--- a/lessons/lesson-12/slides.pptx
+++ b/lessons/lesson-12/slides.pptx
@@ -2,33 +2,33 @@
 <file path=ppt/presentation.xml><?xml version="1.0" encoding="utf-8"?>
 <p:presentation xmlns:p="http://schemas.openxmlformats.org/presentationml/2006/main">
   <p:sldMasterIdLst>
-    <p:sldMasterId xmlns:r="http://schemas.openxmlformats.org/officeDocument/2006/relationships" id="2147483648" r:id="R38702a79cd1f4eec"/>
+    <p:sldMasterId xmlns:r="http://schemas.openxmlformats.org/officeDocument/2006/relationships" id="2147483648" r:id="Rcb46433200ef4fec"/>
   </p:sldMasterIdLst>
   <p:notesMasterIdLst>
-    <p:notesMasterId xmlns:r="http://schemas.openxmlformats.org/officeDocument/2006/relationships" r:id="Rfbfb5df8114e4436"/>
+    <p:notesMasterId xmlns:r="http://schemas.openxmlformats.org/officeDocument/2006/relationships" r:id="R7db7585302d149b6"/>
   </p:notesMasterIdLst>
   <p:sldIdLst>
-    <p:sldId xmlns:r="http://schemas.openxmlformats.org/officeDocument/2006/relationships" id="256" r:id="Rdcfcb595bc914d0c"/>
-    <p:sldId xmlns:r="http://schemas.openxmlformats.org/officeDocument/2006/relationships" id="257" r:id="R00cf20f429114258"/>
-    <p:sldId xmlns:r="http://schemas.openxmlformats.org/officeDocument/2006/relationships" id="258" r:id="Redf42ae35a6e48c1"/>
-    <p:sldId xmlns:r="http://schemas.openxmlformats.org/officeDocument/2006/relationships" id="259" r:id="R4ade02ac21354efb"/>
-    <p:sldId xmlns:r="http://schemas.openxmlformats.org/officeDocument/2006/relationships" id="260" r:id="R46b70c39da8d4874"/>
-    <p:sldId xmlns:r="http://schemas.openxmlformats.org/officeDocument/2006/relationships" id="261" r:id="Rc6f870fc3dfb46bf"/>
-    <p:sldId xmlns:r="http://schemas.openxmlformats.org/officeDocument/2006/relationships" id="262" r:id="R7050906073784af5"/>
-    <p:sldId xmlns:r="http://schemas.openxmlformats.org/officeDocument/2006/relationships" id="263" r:id="Rba9cd829e7bf4541"/>
-    <p:sldId xmlns:r="http://schemas.openxmlformats.org/officeDocument/2006/relationships" id="264" r:id="R22efd8a0b2794d82"/>
-    <p:sldId xmlns:r="http://schemas.openxmlformats.org/officeDocument/2006/relationships" id="265" r:id="Red199b95c0284c5e"/>
-    <p:sldId xmlns:r="http://schemas.openxmlformats.org/officeDocument/2006/relationships" id="266" r:id="R75e78f2c64194259"/>
-    <p:sldId xmlns:r="http://schemas.openxmlformats.org/officeDocument/2006/relationships" id="267" r:id="R70c05ed053224792"/>
-    <p:sldId xmlns:r="http://schemas.openxmlformats.org/officeDocument/2006/relationships" id="268" r:id="R86abc612f946471b"/>
-    <p:sldId xmlns:r="http://schemas.openxmlformats.org/officeDocument/2006/relationships" id="269" r:id="R803ad784dac34b78"/>
-    <p:sldId xmlns:r="http://schemas.openxmlformats.org/officeDocument/2006/relationships" id="270" r:id="R578b9d069252432c"/>
-    <p:sldId xmlns:r="http://schemas.openxmlformats.org/officeDocument/2006/relationships" id="271" r:id="Re608408769df45f4"/>
-    <p:sldId xmlns:r="http://schemas.openxmlformats.org/officeDocument/2006/relationships" id="272" r:id="Rcaf7daa50a5c4c0b"/>
-    <p:sldId xmlns:r="http://schemas.openxmlformats.org/officeDocument/2006/relationships" id="273" r:id="Rc5d6e817d6de4e03"/>
-    <p:sldId xmlns:r="http://schemas.openxmlformats.org/officeDocument/2006/relationships" id="274" r:id="R15cc8ea6e8c345d3"/>
-    <p:sldId xmlns:r="http://schemas.openxmlformats.org/officeDocument/2006/relationships" id="275" r:id="R65becfbac0ec4d7f"/>
-    <p:sldId xmlns:r="http://schemas.openxmlformats.org/officeDocument/2006/relationships" id="276" r:id="Rd458084140224652"/>
+    <p:sldId xmlns:r="http://schemas.openxmlformats.org/officeDocument/2006/relationships" id="256" r:id="R71ff44f29d40494d"/>
+    <p:sldId xmlns:r="http://schemas.openxmlformats.org/officeDocument/2006/relationships" id="257" r:id="R2f5823493b3442cb"/>
+    <p:sldId xmlns:r="http://schemas.openxmlformats.org/officeDocument/2006/relationships" id="258" r:id="Rc01188d1e5524e1b"/>
+    <p:sldId xmlns:r="http://schemas.openxmlformats.org/officeDocument/2006/relationships" id="259" r:id="R036f4b22f6ef43ec"/>
+    <p:sldId xmlns:r="http://schemas.openxmlformats.org/officeDocument/2006/relationships" id="260" r:id="R6ed508816cdd443a"/>
+    <p:sldId xmlns:r="http://schemas.openxmlformats.org/officeDocument/2006/relationships" id="261" r:id="Rcd93e8f319c04677"/>
+    <p:sldId xmlns:r="http://schemas.openxmlformats.org/officeDocument/2006/relationships" id="262" r:id="R388b57c3061d4225"/>
+    <p:sldId xmlns:r="http://schemas.openxmlformats.org/officeDocument/2006/relationships" id="263" r:id="Rccf2a411741c4747"/>
+    <p:sldId xmlns:r="http://schemas.openxmlformats.org/officeDocument/2006/relationships" id="264" r:id="Rb2c4947c48b44b17"/>
+    <p:sldId xmlns:r="http://schemas.openxmlformats.org/officeDocument/2006/relationships" id="265" r:id="Ra1897e409b5646e7"/>
+    <p:sldId xmlns:r="http://schemas.openxmlformats.org/officeDocument/2006/relationships" id="266" r:id="R4f8f40060156492c"/>
+    <p:sldId xmlns:r="http://schemas.openxmlformats.org/officeDocument/2006/relationships" id="267" r:id="Ra9710fbd59c84c53"/>
+    <p:sldId xmlns:r="http://schemas.openxmlformats.org/officeDocument/2006/relationships" id="268" r:id="R60e8ff90fa3742ed"/>
+    <p:sldId xmlns:r="http://schemas.openxmlformats.org/officeDocument/2006/relationships" id="269" r:id="R604c7be4617a41c2"/>
+    <p:sldId xmlns:r="http://schemas.openxmlformats.org/officeDocument/2006/relationships" id="270" r:id="Ra4ca8eb32c3d405f"/>
+    <p:sldId xmlns:r="http://schemas.openxmlformats.org/officeDocument/2006/relationships" id="271" r:id="R1c9ff5b3f4ac432f"/>
+    <p:sldId xmlns:r="http://schemas.openxmlformats.org/officeDocument/2006/relationships" id="272" r:id="Rbd36ca720d8449a4"/>
+    <p:sldId xmlns:r="http://schemas.openxmlformats.org/officeDocument/2006/relationships" id="273" r:id="R717fe18d6bf843a7"/>
+    <p:sldId xmlns:r="http://schemas.openxmlformats.org/officeDocument/2006/relationships" id="274" r:id="Ra5de2e762e2e4746"/>
+    <p:sldId xmlns:r="http://schemas.openxmlformats.org/officeDocument/2006/relationships" id="275" r:id="R6a4b720591734639"/>
+    <p:sldId xmlns:r="http://schemas.openxmlformats.org/officeDocument/2006/relationships" id="276" r:id="R6483a7a13cdf4144"/>
   </p:sldIdLst>
   <p:sldSz cx="12192000" cy="6858000"/>
   <p:notesSz cx="6858000" cy="9144000"/>
@@ -408,7 +408,7 @@
           <a:lstStyle xmlns:a="http://schemas.openxmlformats.org/drawingml/2006/main"/>
           <a:p xmlns:a="http://schemas.openxmlformats.org/drawingml/2006/main">
             <a:r>
-              <a:t>第 12 课最小工作流设计。屏显按现行逐页母稿压缩为课堂可读对象，完整说明保留在讲义与教师备注。</a:t>
+              <a:t>本课把第 10 课单次任务契约和第 11 课冻结执行队列升级为完整可审计工作流，第 13 课评价与复盘。封面仅呈现正式课名。开场请学生标出已有任务中一项尚未封装的状态。</a:t>
             </a:r>
           </a:p>
           <a:p xmlns:a="http://schemas.openxmlformats.org/drawingml/2006/main">
@@ -418,17 +418,22 @@
           </a:p>
           <a:p xmlns:a="http://schemas.openxmlformats.org/drawingml/2006/main">
             <a:r>
+              <a:t>学生动作：请学生举手：最近一次用 Agent 时，是否看过它的权限声明或停止条件？只听回答，不评价。</a:t>
+            </a:r>
+          </a:p>
+          <a:p xmlns:a="http://schemas.openxmlformats.org/drawingml/2006/main">
+            <a:r>
+              <a:t/>
+            </a:r>
+          </a:p>
+          <a:p xmlns:a="http://schemas.openxmlformats.org/drawingml/2006/main">
+            <a:r>
               <a:t>[Sources]</a:t>
             </a:r>
           </a:p>
           <a:p xmlns:a="http://schemas.openxmlformats.org/drawingml/2006/main">
             <a:r>
-              <a:t>- /Users/bright/Projects/courses/graduate/lessons/lesson-12/slides.md</a:t>
-            </a:r>
-          </a:p>
-          <a:p xmlns:a="http://schemas.openxmlformats.org/drawingml/2006/main">
-            <a:r>
-              <a:t>- /Users/bright/Projects/courses/graduate/lessons/lesson-12/handout.md</a:t>
+              <a:t>课程定位以 [curriculum.md](../../course/curriculum.md) 第 4-5 条为准；[assignments.md](../../course/assignments.md) 验证门条件；[syllabus.md](../../course/syllabus.md) 第 12 课。</a:t>
             </a:r>
           </a:p>
           <a:p xmlns:a="http://schemas.openxmlformats.org/drawingml/2006/main">
@@ -503,7 +508,7 @@
           <a:lstStyle xmlns:a="http://schemas.openxmlformats.org/drawingml/2006/main"/>
           <a:p xmlns:a="http://schemas.openxmlformats.org/drawingml/2006/main">
             <a:r>
-              <a:t>第 12 课最小工作流设计。屏显按现行逐页母稿压缩为课堂可读对象，完整说明保留在讲义与教师备注。</a:t>
+              <a:t>脚本适合固定输入输出，固定工作流显式管理状态与恢复，Agent 适合需要动态决策的动作，复杂系统需要额外治理成本。阅读卡冻结任务优先选能完成任务的最低复杂度，选用动态决策时同时指定独立评价与停止条件。</a:t>
             </a:r>
           </a:p>
           <a:p xmlns:a="http://schemas.openxmlformats.org/drawingml/2006/main">
@@ -513,17 +518,22 @@
           </a:p>
           <a:p xmlns:a="http://schemas.openxmlformats.org/drawingml/2006/main">
             <a:r>
+              <a:t>学生动作：无。</a:t>
+            </a:r>
+          </a:p>
+          <a:p xmlns:a="http://schemas.openxmlformats.org/drawingml/2006/main">
+            <a:r>
+              <a:t/>
+            </a:r>
+          </a:p>
+          <a:p xmlns:a="http://schemas.openxmlformats.org/drawingml/2006/main">
+            <a:r>
               <a:t>[Sources]</a:t>
             </a:r>
           </a:p>
           <a:p xmlns:a="http://schemas.openxmlformats.org/drawingml/2006/main">
             <a:r>
-              <a:t>- /Users/bright/Projects/courses/graduate/lessons/lesson-12/slides.md</a:t>
-            </a:r>
-          </a:p>
-          <a:p xmlns:a="http://schemas.openxmlformats.org/drawingml/2006/main">
-            <a:r>
-              <a:t>- /Users/bright/Projects/courses/graduate/lessons/lesson-12/handout.md</a:t>
+              <a:t>[handout.md §三](./handout.md)。</a:t>
             </a:r>
           </a:p>
           <a:p xmlns:a="http://schemas.openxmlformats.org/drawingml/2006/main">
@@ -598,7 +608,7 @@
           <a:lstStyle xmlns:a="http://schemas.openxmlformats.org/drawingml/2006/main"/>
           <a:p xmlns:a="http://schemas.openxmlformats.org/drawingml/2006/main">
             <a:r>
-              <a:t>第 12 课最小工作流设计。屏显按现行逐页母稿压缩为课堂可读对象，完整说明保留在讲义与教师备注。</a:t>
+              <a:t>沿用第 10–11 课同一真实科研动作。本人课题、导师组任务和课堂原型是同一动作的收窄层级，不另开项目。请学生写出输入与一个可检查输出。</a:t>
             </a:r>
           </a:p>
           <a:p xmlns:a="http://schemas.openxmlformats.org/drawingml/2006/main">
@@ -608,17 +618,22 @@
           </a:p>
           <a:p xmlns:a="http://schemas.openxmlformats.org/drawingml/2006/main">
             <a:r>
+              <a:t>学生动作：请学生 30 秒内确定自己要封装的科研动作。</a:t>
+            </a:r>
+          </a:p>
+          <a:p xmlns:a="http://schemas.openxmlformats.org/drawingml/2006/main">
+            <a:r>
+              <a:t/>
+            </a:r>
+          </a:p>
+          <a:p xmlns:a="http://schemas.openxmlformats.org/drawingml/2006/main">
+            <a:r>
               <a:t>[Sources]</a:t>
             </a:r>
           </a:p>
           <a:p xmlns:a="http://schemas.openxmlformats.org/drawingml/2006/main">
             <a:r>
-              <a:t>- /Users/bright/Projects/courses/graduate/lessons/lesson-12/slides.md</a:t>
-            </a:r>
-          </a:p>
-          <a:p xmlns:a="http://schemas.openxmlformats.org/drawingml/2006/main">
-            <a:r>
-              <a:t>- /Users/bright/Projects/courses/graduate/lessons/lesson-12/handout.md</a:t>
+              <a:t>[handout.md §四·1](./handout.md)。</a:t>
             </a:r>
           </a:p>
           <a:p xmlns:a="http://schemas.openxmlformats.org/drawingml/2006/main">
@@ -693,7 +708,7 @@
           <a:lstStyle xmlns:a="http://schemas.openxmlformats.org/drawingml/2006/main"/>
           <a:p xmlns:a="http://schemas.openxmlformats.org/drawingml/2006/main">
             <a:r>
-              <a:t>第 12 课最小工作流设计。屏显按现行逐页母稿压缩为课堂可读对象，完整说明保留在讲义与教师备注。</a:t>
+              <a:t>agent-workflow.md 是个人说明的入口，可链接 contract.md 等实现文件。八要素在屏显中按紧邻角色合并呈现，Context 与状态、Evals 与人工审核仍须各有明确字段。先补契约，再运行或演示最小路径。</a:t>
             </a:r>
           </a:p>
           <a:p xmlns:a="http://schemas.openxmlformats.org/drawingml/2006/main">
@@ -703,17 +718,22 @@
           </a:p>
           <a:p xmlns:a="http://schemas.openxmlformats.org/drawingml/2006/main">
             <a:r>
+              <a:t>学生动作：学生开始填写模板。</a:t>
+            </a:r>
+          </a:p>
+          <a:p xmlns:a="http://schemas.openxmlformats.org/drawingml/2006/main">
+            <a:r>
+              <a:t/>
+            </a:r>
+          </a:p>
+          <a:p xmlns:a="http://schemas.openxmlformats.org/drawingml/2006/main">
+            <a:r>
               <a:t>[Sources]</a:t>
             </a:r>
           </a:p>
           <a:p xmlns:a="http://schemas.openxmlformats.org/drawingml/2006/main">
             <a:r>
-              <a:t>- /Users/bright/Projects/courses/graduate/lessons/lesson-12/slides.md</a:t>
-            </a:r>
-          </a:p>
-          <a:p xmlns:a="http://schemas.openxmlformats.org/drawingml/2006/main">
-            <a:r>
-              <a:t>- /Users/bright/Projects/courses/graduate/lessons/lesson-12/handout.md</a:t>
+              <a:t>[handout.md §四·2](./handout.md)。</a:t>
             </a:r>
           </a:p>
           <a:p xmlns:a="http://schemas.openxmlformats.org/drawingml/2006/main">
@@ -788,7 +808,7 @@
           <a:lstStyle xmlns:a="http://schemas.openxmlformats.org/drawingml/2006/main"/>
           <a:p xmlns:a="http://schemas.openxmlformats.org/drawingml/2006/main">
             <a:r>
-              <a:t>第 12 课最小工作流设计。屏显按现行逐页母稿压缩为课堂可读对象，完整说明保留在讲义与教师备注。</a:t>
+              <a:t>左侧 W 指开发阶段允许修改执行代码和写运行目录；进入冻结批次后配置与方法锁定。右侧 gold.json 的 R 仅属于独立评价端，执行端禁止读取或复制 gold，不能将右侧 R 当作全项目权限。输出生成后才交评价端，协议变更由人工审核并另开版本，不回改当前冻结批次。请学生标明角色与拒绝点。</a:t>
             </a:r>
           </a:p>
           <a:p xmlns:a="http://schemas.openxmlformats.org/drawingml/2006/main">
@@ -798,17 +818,22 @@
           </a:p>
           <a:p xmlns:a="http://schemas.openxmlformats.org/drawingml/2006/main">
             <a:r>
+              <a:t>学生动作：学生在自己的权限栏分别标出执行端不可读 gold 与独立评价端可读 gold。</a:t>
+            </a:r>
+          </a:p>
+          <a:p xmlns:a="http://schemas.openxmlformats.org/drawingml/2006/main">
+            <a:r>
+              <a:t/>
+            </a:r>
+          </a:p>
+          <a:p xmlns:a="http://schemas.openxmlformats.org/drawingml/2006/main">
+            <a:r>
               <a:t>[Sources]</a:t>
             </a:r>
           </a:p>
           <a:p xmlns:a="http://schemas.openxmlformats.org/drawingml/2006/main">
             <a:r>
-              <a:t>- /Users/bright/Projects/courses/graduate/lessons/lesson-12/slides.md</a:t>
-            </a:r>
-          </a:p>
-          <a:p xmlns:a="http://schemas.openxmlformats.org/drawingml/2006/main">
-            <a:r>
-              <a:t>- /Users/bright/Projects/courses/graduate/lessons/lesson-12/handout.md</a:t>
+              <a:t>[assignments.md](../../course/assignments.md) 验证门条件；[handout.md §四·3](./handout.md)；[第 11 课讲义](../lesson-11/handout.md)。</a:t>
             </a:r>
           </a:p>
           <a:p xmlns:a="http://schemas.openxmlformats.org/drawingml/2006/main">
@@ -883,7 +908,7 @@
           <a:lstStyle xmlns:a="http://schemas.openxmlformats.org/drawingml/2006/main"/>
           <a:p xmlns:a="http://schemas.openxmlformats.org/drawingml/2006/main">
             <a:r>
-              <a:t>第 12 课最小工作流设计。屏显按现行逐页母稿压缩为课堂可读对象，完整说明保留在讲义与教师备注。</a:t>
+              <a:t>这是课程虚构案例，只演示工作流契约，不预设真实效果。重点是它直接封装第 10–11 课已有任务，没有重开一个证据地图项目。人工基准不进入生成 Context，评价流程与执行流程隔离。</a:t>
             </a:r>
           </a:p>
           <a:p xmlns:a="http://schemas.openxmlformats.org/drawingml/2006/main">
@@ -893,17 +918,22 @@
           </a:p>
           <a:p xmlns:a="http://schemas.openxmlformats.org/drawingml/2006/main">
             <a:r>
+              <a:t>学生动作：请学生对照自己的模板，看契约字段是否填得同样具体。</a:t>
+            </a:r>
+          </a:p>
+          <a:p xmlns:a="http://schemas.openxmlformats.org/drawingml/2006/main">
+            <a:r>
+              <a:t/>
+            </a:r>
+          </a:p>
+          <a:p xmlns:a="http://schemas.openxmlformats.org/drawingml/2006/main">
+            <a:r>
               <a:t>[Sources]</a:t>
             </a:r>
           </a:p>
           <a:p xmlns:a="http://schemas.openxmlformats.org/drawingml/2006/main">
             <a:r>
-              <a:t>- /Users/bright/Projects/courses/graduate/lessons/lesson-12/slides.md</a:t>
-            </a:r>
-          </a:p>
-          <a:p xmlns:a="http://schemas.openxmlformats.org/drawingml/2006/main">
-            <a:r>
-              <a:t>- /Users/bright/Projects/courses/graduate/lessons/lesson-12/handout.md</a:t>
+              <a:t>[handout.md §五](./handout.md)。案例为虚构教学情境，须在页面和讲述中标明。</a:t>
             </a:r>
           </a:p>
           <a:p xmlns:a="http://schemas.openxmlformats.org/drawingml/2006/main">
@@ -978,7 +1008,7 @@
           <a:lstStyle xmlns:a="http://schemas.openxmlformats.org/drawingml/2006/main"/>
           <a:p xmlns:a="http://schemas.openxmlformats.org/drawingml/2006/main">
             <a:r>
-              <a:t>第 12 课最小工作流设计。屏显按现行逐页母稿压缩为课堂可读对象，完整说明保留在讲义与教师备注。</a:t>
+              <a:t>屏显是课程虚构演示项目的最小目录，不代表已运行的软件或真实结果。教师用预置输入和正常、失败 trace 演示可复现路径。课堂最低产出仍是一条 trace 和失败恢复位置；右侧正常与失败路径是教师演示检查点，不给学生增加两个实际运行的硬门。</a:t>
             </a:r>
           </a:p>
           <a:p xmlns:a="http://schemas.openxmlformats.org/drawingml/2006/main">
@@ -988,17 +1018,22 @@
           </a:p>
           <a:p xmlns:a="http://schemas.openxmlformats.org/drawingml/2006/main">
             <a:r>
+              <a:t>学生动作：现场确认演示项目无敏感材料。</a:t>
+            </a:r>
+          </a:p>
+          <a:p xmlns:a="http://schemas.openxmlformats.org/drawingml/2006/main">
+            <a:r>
+              <a:t/>
+            </a:r>
+          </a:p>
+          <a:p xmlns:a="http://schemas.openxmlformats.org/drawingml/2006/main">
+            <a:r>
               <a:t>[Sources]</a:t>
             </a:r>
           </a:p>
           <a:p xmlns:a="http://schemas.openxmlformats.org/drawingml/2006/main">
             <a:r>
-              <a:t>- /Users/bright/Projects/courses/graduate/lessons/lesson-12/slides.md</a:t>
-            </a:r>
-          </a:p>
-          <a:p xmlns:a="http://schemas.openxmlformats.org/drawingml/2006/main">
-            <a:r>
-              <a:t>- /Users/bright/Projects/courses/graduate/lessons/lesson-12/handout.md</a:t>
+              <a:t>[handout.md §四·4、§五](./handout.md)；课程虚构目录与 trace，用于教师演示，不代表真实执行结果。</a:t>
             </a:r>
           </a:p>
           <a:p xmlns:a="http://schemas.openxmlformats.org/drawingml/2006/main">
@@ -1073,7 +1108,7 @@
           <a:lstStyle xmlns:a="http://schemas.openxmlformats.org/drawingml/2006/main"/>
           <a:p xmlns:a="http://schemas.openxmlformats.org/drawingml/2006/main">
             <a:r>
-              <a:t>第 12 课最小工作流设计。屏显按现行逐页母稿压缩为课堂可读对象，完整说明保留在讲义与教师备注。</a:t>
+              <a:t>这是课程虚构失败 trace。执行端尝试读取 gold 后遭拒绝，记录越权、收窄输入并用新 run ID 重试，最后由人核验。与 P15 正常路径形成对照。请学生指出拒绝发生在哪个角色边界，说明如何保留失败。</a:t>
             </a:r>
           </a:p>
           <a:p xmlns:a="http://schemas.openxmlformats.org/drawingml/2006/main">
@@ -1083,17 +1118,22 @@
           </a:p>
           <a:p xmlns:a="http://schemas.openxmlformats.org/drawingml/2006/main">
             <a:r>
+              <a:t>学生动作：请学生指出失败 trace 中最值得保留的一条信息，并现场给出一个限制条件，教师加入改写后的契约。</a:t>
+            </a:r>
+          </a:p>
+          <a:p xmlns:a="http://schemas.openxmlformats.org/drawingml/2006/main">
+            <a:r>
+              <a:t/>
+            </a:r>
+          </a:p>
+          <a:p xmlns:a="http://schemas.openxmlformats.org/drawingml/2006/main">
+            <a:r>
               <a:t>[Sources]</a:t>
             </a:r>
           </a:p>
           <a:p xmlns:a="http://schemas.openxmlformats.org/drawingml/2006/main">
             <a:r>
-              <a:t>- /Users/bright/Projects/courses/graduate/lessons/lesson-12/slides.md</a:t>
-            </a:r>
-          </a:p>
-          <a:p xmlns:a="http://schemas.openxmlformats.org/drawingml/2006/main">
-            <a:r>
-              <a:t>- /Users/bright/Projects/courses/graduate/lessons/lesson-12/handout.md</a:t>
+              <a:t>[handout.md §四·3 §六](./handout.md)；[第 1 课讲义 §五·第四步](../lesson-01/handout.md)。</a:t>
             </a:r>
           </a:p>
           <a:p xmlns:a="http://schemas.openxmlformats.org/drawingml/2006/main">
@@ -1168,7 +1208,7 @@
           <a:lstStyle xmlns:a="http://schemas.openxmlformats.org/drawingml/2006/main"/>
           <a:p xmlns:a="http://schemas.openxmlformats.org/drawingml/2006/main">
             <a:r>
-              <a:t>第 12 课最小工作流设计。屏显按现行逐页母稿压缩为课堂可读对象，完整说明保留在讲义与教师备注。</a:t>
+              <a:t>第一段先定契约、权限与模式。课堂环境可用时直接运行最小路径；环境受限时使用教师预置输入和 trace 做可复现演示，不把环境故障变成纸面设计豁免。</a:t>
             </a:r>
           </a:p>
           <a:p xmlns:a="http://schemas.openxmlformats.org/drawingml/2006/main">
@@ -1178,17 +1218,22 @@
           </a:p>
           <a:p xmlns:a="http://schemas.openxmlformats.org/drawingml/2006/main">
             <a:r>
+              <a:t>学生动作：本页停留在屏幕上。教师巡视只处理共同卡点。</a:t>
+            </a:r>
+          </a:p>
+          <a:p xmlns:a="http://schemas.openxmlformats.org/drawingml/2006/main">
+            <a:r>
+              <a:t/>
+            </a:r>
+          </a:p>
+          <a:p xmlns:a="http://schemas.openxmlformats.org/drawingml/2006/main">
+            <a:r>
               <a:t>[Sources]</a:t>
             </a:r>
           </a:p>
           <a:p xmlns:a="http://schemas.openxmlformats.org/drawingml/2006/main">
             <a:r>
-              <a:t>- /Users/bright/Projects/courses/graduate/lessons/lesson-12/slides.md</a:t>
-            </a:r>
-          </a:p>
-          <a:p xmlns:a="http://schemas.openxmlformats.org/drawingml/2006/main">
-            <a:r>
-              <a:t>- /Users/bright/Projects/courses/graduate/lessons/lesson-12/handout.md</a:t>
+              <a:t>[handout.md §四·4 §七](./handout.md)。</a:t>
             </a:r>
           </a:p>
           <a:p xmlns:a="http://schemas.openxmlformats.org/drawingml/2006/main">
@@ -1263,7 +1308,7 @@
           <a:lstStyle xmlns:a="http://schemas.openxmlformats.org/drawingml/2006/main"/>
           <a:p xmlns:a="http://schemas.openxmlformats.org/drawingml/2006/main">
             <a:r>
-              <a:t>第 12 课最小工作流设计。屏显按现行逐页母稿压缩为课堂可读对象，完整说明保留在讲义与教师备注。</a:t>
+              <a:t>教师先用共性样例做中点点评，再让学生继续完成最小原型或可复现演示，抽查 Context / Memory、权限栏、trace、评价计划与失败恢复。第 13 课基于课前已有运行结果完成评价、影响报告、证据回写与合规更新。</a:t>
             </a:r>
           </a:p>
           <a:p xmlns:a="http://schemas.openxmlformats.org/drawingml/2006/main">
@@ -1273,17 +1318,22 @@
           </a:p>
           <a:p xmlns:a="http://schemas.openxmlformats.org/drawingml/2006/main">
             <a:r>
+              <a:t>学生动作：教师中点点评后，学生对照清单继续实现或演示，生成 trace 并补失败恢复规则。</a:t>
+            </a:r>
+          </a:p>
+          <a:p xmlns:a="http://schemas.openxmlformats.org/drawingml/2006/main">
+            <a:r>
+              <a:t/>
+            </a:r>
+          </a:p>
+          <a:p xmlns:a="http://schemas.openxmlformats.org/drawingml/2006/main">
+            <a:r>
               <a:t>[Sources]</a:t>
             </a:r>
           </a:p>
           <a:p xmlns:a="http://schemas.openxmlformats.org/drawingml/2006/main">
             <a:r>
-              <a:t>- /Users/bright/Projects/courses/graduate/lessons/lesson-12/slides.md</a:t>
-            </a:r>
-          </a:p>
-          <a:p xmlns:a="http://schemas.openxmlformats.org/drawingml/2006/main">
-            <a:r>
-              <a:t>- /Users/bright/Projects/courses/graduate/lessons/lesson-12/handout.md</a:t>
+              <a:t>[assignments.md](../../course/assignments.md) 验证门条件；[handout.md §四·3](./handout.md)。</a:t>
             </a:r>
           </a:p>
           <a:p xmlns:a="http://schemas.openxmlformats.org/drawingml/2006/main">
@@ -1358,7 +1408,7 @@
           <a:lstStyle xmlns:a="http://schemas.openxmlformats.org/drawingml/2006/main"/>
           <a:p xmlns:a="http://schemas.openxmlformats.org/drawingml/2006/main">
             <a:r>
-              <a:t>第 12 课最小工作流设计。屏显按现行逐页母稿压缩为课堂可读对象，完整说明保留在讲义与教师备注。</a:t>
+              <a:t>每人约 3 分钟：一人 45 秒说明动作和契约；同伴按三问反馈；作者记录处理决定。反馈不要求立即改写。</a:t>
             </a:r>
           </a:p>
           <a:p xmlns:a="http://schemas.openxmlformats.org/drawingml/2006/main">
@@ -1368,17 +1418,22 @@
           </a:p>
           <a:p xmlns:a="http://schemas.openxmlformats.org/drawingml/2006/main">
             <a:r>
+              <a:t>学生动作：两人互查；人数为奇数时组成三人组，每人缩短说明时间。</a:t>
+            </a:r>
+          </a:p>
+          <a:p xmlns:a="http://schemas.openxmlformats.org/drawingml/2006/main">
+            <a:r>
+              <a:t/>
+            </a:r>
+          </a:p>
+          <a:p xmlns:a="http://schemas.openxmlformats.org/drawingml/2006/main">
+            <a:r>
               <a:t>[Sources]</a:t>
             </a:r>
           </a:p>
           <a:p xmlns:a="http://schemas.openxmlformats.org/drawingml/2006/main">
             <a:r>
-              <a:t>- /Users/bright/Projects/courses/graduate/lessons/lesson-12/slides.md</a:t>
-            </a:r>
-          </a:p>
-          <a:p xmlns:a="http://schemas.openxmlformats.org/drawingml/2006/main">
-            <a:r>
-              <a:t>- /Users/bright/Projects/courses/graduate/lessons/lesson-12/handout.md</a:t>
+              <a:t>同伴反馈为形成性活动，不单独计分，不共同提交。</a:t>
             </a:r>
           </a:p>
           <a:p xmlns:a="http://schemas.openxmlformats.org/drawingml/2006/main">
@@ -1453,7 +1508,7 @@
           <a:lstStyle xmlns:a="http://schemas.openxmlformats.org/drawingml/2006/main"/>
           <a:p xmlns:a="http://schemas.openxmlformats.org/drawingml/2006/main">
             <a:r>
-              <a:t>第 12 课最小工作流设计。屏显按现行逐页母稿压缩为课堂可读对象，完整说明保留在讲义与教师备注。</a:t>
+              <a:t>先以 AutoResearch commit 228791f 拆解真实 program.md，再回到同一阅读卡任务设计个人工作流。八要素是课程分析框架，不能声称原项目已完整实现课程权限或审核制度。P03–P08 只补前两课尚未显式化的设计决定。</a:t>
             </a:r>
           </a:p>
           <a:p xmlns:a="http://schemas.openxmlformats.org/drawingml/2006/main">
@@ -1463,17 +1518,22 @@
           </a:p>
           <a:p xmlns:a="http://schemas.openxmlformats.org/drawingml/2006/main">
             <a:r>
+              <a:t>学生动作：让学生预测：现成 Skill 通常在哪几项上最不透明？请学生打开或领取拆解卡模板。</a:t>
+            </a:r>
+          </a:p>
+          <a:p xmlns:a="http://schemas.openxmlformats.org/drawingml/2006/main">
+            <a:r>
+              <a:t/>
+            </a:r>
+          </a:p>
+          <a:p xmlns:a="http://schemas.openxmlformats.org/drawingml/2006/main">
+            <a:r>
               <a:t>[Sources]</a:t>
             </a:r>
           </a:p>
           <a:p xmlns:a="http://schemas.openxmlformats.org/drawingml/2006/main">
             <a:r>
-              <a:t>- /Users/bright/Projects/courses/graduate/lessons/lesson-12/slides.md</a:t>
-            </a:r>
-          </a:p>
-          <a:p xmlns:a="http://schemas.openxmlformats.org/drawingml/2006/main">
-            <a:r>
-              <a:t>- /Users/bright/Projects/courses/graduate/lessons/lesson-12/handout.md</a:t>
+              <a:t>[AutoResearch `program.md`（固定 commit `228791f`）](https://github.com/karpathy/autoresearch/blob/228791fb499afffb54b46200aca536f79142f117/program.md)；[handout.md §二](./handout.md)。2026-09-13 回源核验；工程案例字段摘述，课程迁移要求另行标明，不作为通用自主科研能力证据。</a:t>
             </a:r>
           </a:p>
           <a:p xmlns:a="http://schemas.openxmlformats.org/drawingml/2006/main">
@@ -1548,7 +1608,7 @@
           <a:lstStyle xmlns:a="http://schemas.openxmlformats.org/drawingml/2006/main"/>
           <a:p xmlns:a="http://schemas.openxmlformats.org/drawingml/2006/main">
             <a:r>
-              <a:t>第 12 课最小工作流设计。屏显按现行逐页母稿压缩为课堂可读对象，完整说明保留在讲义与教师备注。</a:t>
+              <a:t>回收八要素契约、权限、Evals 与失败恢复的关系。本页不新增任务。</a:t>
             </a:r>
           </a:p>
           <a:p xmlns:a="http://schemas.openxmlformats.org/drawingml/2006/main">
@@ -1558,17 +1618,22 @@
           </a:p>
           <a:p xmlns:a="http://schemas.openxmlformats.org/drawingml/2006/main">
             <a:r>
+              <a:t>学生动作：学生指出第 13 课验证前最需要补齐的一项。</a:t>
+            </a:r>
+          </a:p>
+          <a:p xmlns:a="http://schemas.openxmlformats.org/drawingml/2006/main">
+            <a:r>
+              <a:t/>
+            </a:r>
+          </a:p>
+          <a:p xmlns:a="http://schemas.openxmlformats.org/drawingml/2006/main">
+            <a:r>
               <a:t>[Sources]</a:t>
             </a:r>
           </a:p>
           <a:p xmlns:a="http://schemas.openxmlformats.org/drawingml/2006/main">
             <a:r>
-              <a:t>- /Users/bright/Projects/courses/graduate/lessons/lesson-12/slides.md</a:t>
-            </a:r>
-          </a:p>
-          <a:p xmlns:a="http://schemas.openxmlformats.org/drawingml/2006/main">
-            <a:r>
-              <a:t>- /Users/bright/Projects/courses/graduate/lessons/lesson-12/handout.md</a:t>
+              <a:t>[handout.md](./handout.md) §二-§六；[teaching-plan.md](./teaching-plan.md) 第四至六节。</a:t>
             </a:r>
           </a:p>
           <a:p xmlns:a="http://schemas.openxmlformats.org/drawingml/2006/main">
@@ -1643,7 +1708,7 @@
           <a:lstStyle xmlns:a="http://schemas.openxmlformats.org/drawingml/2006/main"/>
           <a:p xmlns:a="http://schemas.openxmlformats.org/drawingml/2006/main">
             <a:r>
-              <a:t>第 12 课最小工作流设计。屏显按现行逐页母稿压缩为课堂可读对象，完整说明保留在讲义与教师备注。</a:t>
+              <a:t>回扣本课目标：学生已形成一份可审计的工作流说明、可运行或可复现演示的最小原型、trace 和评价计划。课后补齐批量运行结果与失败记录；第 13 课直接用已有结果完成评价和失败复盘，不从零重跑完整研究。</a:t>
             </a:r>
           </a:p>
           <a:p xmlns:a="http://schemas.openxmlformats.org/drawingml/2006/main">
@@ -1653,17 +1718,22 @@
           </a:p>
           <a:p xmlns:a="http://schemas.openxmlformats.org/drawingml/2006/main">
             <a:r>
+              <a:t>学生动作：学生提交退出卡或保存在个人项目 `notes/`。</a:t>
+            </a:r>
+          </a:p>
+          <a:p xmlns:a="http://schemas.openxmlformats.org/drawingml/2006/main">
+            <a:r>
+              <a:t/>
+            </a:r>
+          </a:p>
+          <a:p xmlns:a="http://schemas.openxmlformats.org/drawingml/2006/main">
+            <a:r>
               <a:t>[Sources]</a:t>
             </a:r>
           </a:p>
           <a:p xmlns:a="http://schemas.openxmlformats.org/drawingml/2006/main">
             <a:r>
-              <a:t>- /Users/bright/Projects/courses/graduate/lessons/lesson-12/slides.md</a:t>
-            </a:r>
-          </a:p>
-          <a:p xmlns:a="http://schemas.openxmlformats.org/drawingml/2006/main">
-            <a:r>
-              <a:t>- /Users/bright/Projects/courses/graduate/lessons/lesson-12/handout.md</a:t>
+              <a:t>[assignments.md](../../course/assignments.md) 验证门条件；[reading-list.md](../../course/reading-list.md) 第 12-13 课。</a:t>
             </a:r>
           </a:p>
           <a:p xmlns:a="http://schemas.openxmlformats.org/drawingml/2006/main">
@@ -1738,7 +1808,7 @@
           <a:lstStyle xmlns:a="http://schemas.openxmlformats.org/drawingml/2006/main"/>
           <a:p xmlns:a="http://schemas.openxmlformats.org/drawingml/2006/main">
             <a:r>
-              <a:t>第 12 课最小工作流设计。屏显按现行逐页母稿压缩为课堂可读对象，完整说明保留在讲义与教师备注。</a:t>
+              <a:t>这是固定 commit 的真实契约字段摘述。单次训练预算为 300 秒，不含启动与编译；原项目优化 val_bpb，只允许改训练代码，不许改 prepare.py、评价函数或增依赖。日志是允许生成的工件，因此“仅修改 train.py”特指实验代码范围。右侧是课程阅读卡的迁移要求，属于不同任务。请学生从左侧指出两条禁止项。</a:t>
             </a:r>
           </a:p>
           <a:p xmlns:a="http://schemas.openxmlformats.org/drawingml/2006/main">
@@ -1748,17 +1818,22 @@
           </a:p>
           <a:p xmlns:a="http://schemas.openxmlformats.org/drawingml/2006/main">
             <a:r>
+              <a:t>学生动作：请学生指出 AutoResearch 契约里的两个禁止项，并说出自己工作流的输入和成功标准各一句。</a:t>
+            </a:r>
+          </a:p>
+          <a:p xmlns:a="http://schemas.openxmlformats.org/drawingml/2006/main">
+            <a:r>
+              <a:t/>
+            </a:r>
+          </a:p>
+          <a:p xmlns:a="http://schemas.openxmlformats.org/drawingml/2006/main">
+            <a:r>
               <a:t>[Sources]</a:t>
             </a:r>
           </a:p>
           <a:p xmlns:a="http://schemas.openxmlformats.org/drawingml/2006/main">
             <a:r>
-              <a:t>- /Users/bright/Projects/courses/graduate/lessons/lesson-12/slides.md</a:t>
-            </a:r>
-          </a:p>
-          <a:p xmlns:a="http://schemas.openxmlformats.org/drawingml/2006/main">
-            <a:r>
-              <a:t>- /Users/bright/Projects/courses/graduate/lessons/lesson-12/handout.md</a:t>
+              <a:t>[AutoResearch `program.md`（固定 commit `228791f`）](https://github.com/karpathy/autoresearch/blob/228791fb499afffb54b46200aca536f79142f117/program.md)；[handout.md §二](./handout.md)。2026-09-13 回源核验；工程案例字段摘述，课程迁移要求另行标明，不作为通用自主科研能力证据。</a:t>
             </a:r>
           </a:p>
           <a:p xmlns:a="http://schemas.openxmlformats.org/drawingml/2006/main">
@@ -1833,7 +1908,7 @@
           <a:lstStyle xmlns:a="http://schemas.openxmlformats.org/drawingml/2006/main"/>
           <a:p xmlns:a="http://schemas.openxmlformats.org/drawingml/2006/main">
             <a:r>
-              <a:t>第 12 课最小工作流设计。屏显按现行逐页母稿压缩为课堂可读对象，完整说明保留在讲义与教师备注。</a:t>
+              <a:t>README.md、prepare.py、train.py 是原文规定的上下文。Git、run.log 和 results.tsv 承担不同状态角色，不能用聊天记忆替代。原项目每次重写 run.log；跨实验追踪依赖账本。课程阅读卡要补每个 run ID 的输入快照与独立日志，不能只留下最后一次日志。请学生列出自己的最小 Context。</a:t>
             </a:r>
           </a:p>
           <a:p xmlns:a="http://schemas.openxmlformats.org/drawingml/2006/main">
@@ -1843,17 +1918,22 @@
           </a:p>
           <a:p xmlns:a="http://schemas.openxmlformats.org/drawingml/2006/main">
             <a:r>
+              <a:t>学生动作：请学生判断：你最近一次用 Agent 时，状态主要存在哪？并列出自己工作流应给 Agent 的最小材料清单。</a:t>
+            </a:r>
+          </a:p>
+          <a:p xmlns:a="http://schemas.openxmlformats.org/drawingml/2006/main">
+            <a:r>
+              <a:t/>
+            </a:r>
+          </a:p>
+          <a:p xmlns:a="http://schemas.openxmlformats.org/drawingml/2006/main">
+            <a:r>
               <a:t>[Sources]</a:t>
             </a:r>
           </a:p>
           <a:p xmlns:a="http://schemas.openxmlformats.org/drawingml/2006/main">
             <a:r>
-              <a:t>- /Users/bright/Projects/courses/graduate/lessons/lesson-12/slides.md</a:t>
-            </a:r>
-          </a:p>
-          <a:p xmlns:a="http://schemas.openxmlformats.org/drawingml/2006/main">
-            <a:r>
-              <a:t>- /Users/bright/Projects/courses/graduate/lessons/lesson-12/handout.md</a:t>
+              <a:t>[AutoResearch `program.md`（固定 commit `228791f`）](https://github.com/karpathy/autoresearch/blob/228791fb499afffb54b46200aca536f79142f117/program.md)；[handout.md §二](./handout.md)。2026-09-13 回源核验；工程案例字段摘述，课程迁移要求另行标明，不作为通用自主科研能力证据。</a:t>
             </a:r>
           </a:p>
           <a:p xmlns:a="http://schemas.openxmlformats.org/drawingml/2006/main">
@@ -1928,7 +2008,7 @@
           <a:lstStyle xmlns:a="http://schemas.openxmlformats.org/drawingml/2006/main"/>
           <a:p xmlns:a="http://schemas.openxmlformats.org/drawingml/2006/main">
             <a:r>
-              <a:t>第 12 课最小工作流设计。屏显按现行逐页母稿压缩为课堂可读对象，完整说明保留在讲义与教师备注。</a:t>
+              <a:t>左侧来自 program.md 的文字约束，不是已验证的操作系统沙箱或默认工具权限。命令要求包含 shell 执行，实际权限由宿主 Agent 配置决定。启动前有人确认设置；循环内并非逐次请求人工确认。右侧是课程另行要求的权限门，禁止把它归为 AutoResearch 原生能力。删除失败记录不属于可确认放行的普通动作。</a:t>
             </a:r>
           </a:p>
           <a:p xmlns:a="http://schemas.openxmlformats.org/drawingml/2006/main">
@@ -1938,17 +2018,22 @@
           </a:p>
           <a:p xmlns:a="http://schemas.openxmlformats.org/drawingml/2006/main">
             <a:r>
+              <a:t>学生动作：请学生指出自己工作流的"需确认"动作至少一项。</a:t>
+            </a:r>
+          </a:p>
+          <a:p xmlns:a="http://schemas.openxmlformats.org/drawingml/2006/main">
+            <a:r>
+              <a:t/>
+            </a:r>
+          </a:p>
+          <a:p xmlns:a="http://schemas.openxmlformats.org/drawingml/2006/main">
+            <a:r>
               <a:t>[Sources]</a:t>
             </a:r>
           </a:p>
           <a:p xmlns:a="http://schemas.openxmlformats.org/drawingml/2006/main">
             <a:r>
-              <a:t>- /Users/bright/Projects/courses/graduate/lessons/lesson-12/slides.md</a:t>
-            </a:r>
-          </a:p>
-          <a:p xmlns:a="http://schemas.openxmlformats.org/drawingml/2006/main">
-            <a:r>
-              <a:t>- /Users/bright/Projects/courses/graduate/lessons/lesson-12/handout.md</a:t>
+              <a:t>[AutoResearch `program.md`（固定 commit `228791f`）](https://github.com/karpathy/autoresearch/blob/228791fb499afffb54b46200aca536f79142f117/program.md)；[handout.md §二](./handout.md)。2026-09-13 回源核验；工程案例字段摘述，课程迁移要求另行标明，不作为通用自主科研能力证据。</a:t>
             </a:r>
           </a:p>
           <a:p xmlns:a="http://schemas.openxmlformats.org/drawingml/2006/main">
@@ -2023,7 +2108,7 @@
           <a:lstStyle xmlns:a="http://schemas.openxmlformats.org/drawingml/2006/main"/>
           <a:p xmlns:a="http://schemas.openxmlformats.org/drawingml/2006/main">
             <a:r>
-              <a:t>第 12 课最小工作流设计。屏显按现行逐页母稿压缩为课堂可读对象，完整说明保留在讲义与教师备注。</a:t>
+              <a:t>AutoResearch 的方法优化循环会改变 train.py，按 val_bpb 决定保留或回退；原文同时要求权衡改进幅度与复杂度。单次训练预算固定不等于总预算固定：外层持续循环直到人工中断。课程冻结队列则不根据输出优劣改方法或删运行，处理预定 120 份后结束。采用原项目设计时须另定总轮次、总预算和人工审核点。请学生说出两种循环停止条件的差别。</a:t>
             </a:r>
           </a:p>
           <a:p xmlns:a="http://schemas.openxmlformats.org/drawingml/2006/main">
@@ -2033,17 +2118,22 @@
           </a:p>
           <a:p xmlns:a="http://schemas.openxmlformats.org/drawingml/2006/main">
             <a:r>
+              <a:t>学生动作：请学生判断自己的科研动作需要固定链还是自主循环，并把自己的工作流对号入座。</a:t>
+            </a:r>
+          </a:p>
+          <a:p xmlns:a="http://schemas.openxmlformats.org/drawingml/2006/main">
+            <a:r>
+              <a:t/>
+            </a:r>
+          </a:p>
+          <a:p xmlns:a="http://schemas.openxmlformats.org/drawingml/2006/main">
+            <a:r>
               <a:t>[Sources]</a:t>
             </a:r>
           </a:p>
           <a:p xmlns:a="http://schemas.openxmlformats.org/drawingml/2006/main">
             <a:r>
-              <a:t>- /Users/bright/Projects/courses/graduate/lessons/lesson-12/slides.md</a:t>
-            </a:r>
-          </a:p>
-          <a:p xmlns:a="http://schemas.openxmlformats.org/drawingml/2006/main">
-            <a:r>
-              <a:t>- /Users/bright/Projects/courses/graduate/lessons/lesson-12/handout.md</a:t>
+              <a:t>[AutoResearch `program.md`（固定 commit `228791f`）](https://github.com/karpathy/autoresearch/blob/228791fb499afffb54b46200aca536f79142f117/program.md)；[handout.md §二](./handout.md)。2026-09-13 回源核验；工程案例字段摘述，课程迁移要求另行标明，不作为通用自主科研能力证据。</a:t>
             </a:r>
           </a:p>
           <a:p xmlns:a="http://schemas.openxmlformats.org/drawingml/2006/main">
@@ -2118,7 +2208,7 @@
           <a:lstStyle xmlns:a="http://schemas.openxmlformats.org/drawingml/2006/main"/>
           <a:p xmlns:a="http://schemas.openxmlformats.org/drawingml/2006/main">
             <a:r>
-              <a:t>第 12 课最小工作流设计。屏显按现行逐页母稿压缩为课堂可读对象，完整说明保留在讲义与教师备注。</a:t>
+              <a:t>这里展示真实字段定义，没有填写实验数值，不是系统运行截图。results.tsv 保留 keep、discard、crash 及代码身份；代码回退不等于删除失败账本。原项目将 results.tsv 留在 Git 跟踪之外，课程记录策略应显式安排存放与备份，不照搬为统一规范。阅读卡任务为每次输出绑定 run ID，保留失败和后续人工处置。</a:t>
             </a:r>
           </a:p>
           <a:p xmlns:a="http://schemas.openxmlformats.org/drawingml/2006/main">
@@ -2128,17 +2218,22 @@
           </a:p>
           <a:p xmlns:a="http://schemas.openxmlformats.org/drawingml/2006/main">
             <a:r>
+              <a:t>学生动作：请学生检查自己工作流的一次运行会留下哪些工件。</a:t>
+            </a:r>
+          </a:p>
+          <a:p xmlns:a="http://schemas.openxmlformats.org/drawingml/2006/main">
+            <a:r>
+              <a:t/>
+            </a:r>
+          </a:p>
+          <a:p xmlns:a="http://schemas.openxmlformats.org/drawingml/2006/main">
+            <a:r>
               <a:t>[Sources]</a:t>
             </a:r>
           </a:p>
           <a:p xmlns:a="http://schemas.openxmlformats.org/drawingml/2006/main">
             <a:r>
-              <a:t>- /Users/bright/Projects/courses/graduate/lessons/lesson-12/slides.md</a:t>
-            </a:r>
-          </a:p>
-          <a:p xmlns:a="http://schemas.openxmlformats.org/drawingml/2006/main">
-            <a:r>
-              <a:t>- /Users/bright/Projects/courses/graduate/lessons/lesson-12/handout.md</a:t>
+              <a:t>[AutoResearch `program.md`（固定 commit `228791f`）](https://github.com/karpathy/autoresearch/blob/228791fb499afffb54b46200aca536f79142f117/program.md)；[handout.md §二](./handout.md)。2026-09-13 回源核验；工程案例字段摘述，课程迁移要求另行标明，不作为通用自主科研能力证据。</a:t>
             </a:r>
           </a:p>
           <a:p xmlns:a="http://schemas.openxmlformats.org/drawingml/2006/main">
@@ -2213,7 +2308,7 @@
           <a:lstStyle xmlns:a="http://schemas.openxmlformats.org/drawingml/2006/main"/>
           <a:p xmlns:a="http://schemas.openxmlformats.org/drawingml/2006/main">
             <a:r>
-              <a:t>第 12 课最小工作流设计。屏显按现行逐页母稿压缩为课堂可读对象，完整说明保留在讲义与教师备注。</a:t>
+              <a:t>原 AutoResearch 将 evaluate_bpb 固定在只读 prepare.py，限制 Agent 修改评价规则。只读评价函数并不等于评价数据对执行端不可读。课程阅读卡还要求 gold 不进入生成 Context，并由独立评价端在输出完成后评分；人工审核决定方法、结论及后续修订。失败回写保留 trace，禁止选择性删除。</a:t>
             </a:r>
           </a:p>
           <a:p xmlns:a="http://schemas.openxmlformats.org/drawingml/2006/main">
@@ -2223,17 +2318,22 @@
           </a:p>
           <a:p xmlns:a="http://schemas.openxmlformats.org/drawingml/2006/main">
             <a:r>
+              <a:t>学生动作：请学生说出自己工作流的 baseline 是什么。</a:t>
+            </a:r>
+          </a:p>
+          <a:p xmlns:a="http://schemas.openxmlformats.org/drawingml/2006/main">
+            <a:r>
+              <a:t/>
+            </a:r>
+          </a:p>
+          <a:p xmlns:a="http://schemas.openxmlformats.org/drawingml/2006/main">
+            <a:r>
               <a:t>[Sources]</a:t>
             </a:r>
           </a:p>
           <a:p xmlns:a="http://schemas.openxmlformats.org/drawingml/2006/main">
             <a:r>
-              <a:t>- /Users/bright/Projects/courses/graduate/lessons/lesson-12/slides.md</a:t>
-            </a:r>
-          </a:p>
-          <a:p xmlns:a="http://schemas.openxmlformats.org/drawingml/2006/main">
-            <a:r>
-              <a:t>- /Users/bright/Projects/courses/graduate/lessons/lesson-12/handout.md</a:t>
+              <a:t>[AutoResearch `program.md`（固定 commit `228791f`）](https://github.com/karpathy/autoresearch/blob/228791fb499afffb54b46200aca536f79142f117/program.md)；[handout.md §二](./handout.md)。2026-09-13 回源核验；工程案例字段摘述，课程迁移要求另行标明，不作为通用自主科研能力证据。</a:t>
             </a:r>
           </a:p>
           <a:p xmlns:a="http://schemas.openxmlformats.org/drawingml/2006/main">
@@ -2308,7 +2408,7 @@
           <a:lstStyle xmlns:a="http://schemas.openxmlformats.org/drawingml/2006/main"/>
           <a:p xmlns:a="http://schemas.openxmlformats.org/drawingml/2006/main">
             <a:r>
-              <a:t>第 12 课最小工作流设计。屏显按现行逐页母稿压缩为课堂可读对象，完整说明保留在讲义与教师备注。</a:t>
+              <a:t>用同一阅读卡任务提问：重复解析由脚本承担，预定生成与状态记录适合固定链，涉及研究判断时设置人工确认。坐标用于比较重复性与判断风险，不把 Agent 视为能力等级。让学生先判断并给出一个理由。</a:t>
             </a:r>
           </a:p>
           <a:p xmlns:a="http://schemas.openxmlformats.org/drawingml/2006/main">
@@ -2318,17 +2418,22 @@
           </a:p>
           <a:p xmlns:a="http://schemas.openxmlformats.org/drawingml/2006/main">
             <a:r>
+              <a:t>学生动作：请学生举手判断每个动作适合哪一类。</a:t>
+            </a:r>
+          </a:p>
+          <a:p xmlns:a="http://schemas.openxmlformats.org/drawingml/2006/main">
+            <a:r>
+              <a:t/>
+            </a:r>
+          </a:p>
+          <a:p xmlns:a="http://schemas.openxmlformats.org/drawingml/2006/main">
+            <a:r>
               <a:t>[Sources]</a:t>
             </a:r>
           </a:p>
           <a:p xmlns:a="http://schemas.openxmlformats.org/drawingml/2006/main">
             <a:r>
-              <a:t>- /Users/bright/Projects/courses/graduate/lessons/lesson-12/slides.md</a:t>
-            </a:r>
-          </a:p>
-          <a:p xmlns:a="http://schemas.openxmlformats.org/drawingml/2006/main">
-            <a:r>
-              <a:t>- /Users/bright/Projects/courses/graduate/lessons/lesson-12/handout.md</a:t>
+              <a:t>[handout.md §三](./handout.md)。</a:t>
             </a:r>
           </a:p>
           <a:p xmlns:a="http://schemas.openxmlformats.org/drawingml/2006/main">
@@ -2384,7 +2489,7 @@
           <p:nvPr/>
         </p:nvPicPr>
         <p:blipFill>
-          <a:blip xmlns:r="http://schemas.openxmlformats.org/officeDocument/2006/relationships" xmlns:a="http://schemas.openxmlformats.org/drawingml/2006/main" r:embed="Rb25a03216fe04617">
+          <a:blip xmlns:r="http://schemas.openxmlformats.org/officeDocument/2006/relationships" xmlns:a="http://schemas.openxmlformats.org/drawingml/2006/main" r:embed="R4a6b975746c5434c">
             <a:duotone>
               <a:prstClr val="black"/>
               <a:schemeClr val="accent1">
@@ -2562,7 +2667,7 @@
           <p:nvPr/>
         </p:nvPicPr>
         <p:blipFill rotWithShape="1">
-          <a:blip xmlns:r="http://schemas.openxmlformats.org/officeDocument/2006/relationships" xmlns:a="http://schemas.openxmlformats.org/drawingml/2006/main" r:embed="Rb437ab10a71c48ff"/>
+          <a:blip xmlns:r="http://schemas.openxmlformats.org/officeDocument/2006/relationships" xmlns:a="http://schemas.openxmlformats.org/drawingml/2006/main" r:embed="Rd9c6bf3402a04e07"/>
           <a:srcRect xmlns:a="http://schemas.openxmlformats.org/drawingml/2006/main" l="74359" t="0" r="1346" b="0"/>
           <a:stretch xmlns:a="http://schemas.openxmlformats.org/drawingml/2006/main"/>
         </p:blipFill>
@@ -2585,7 +2690,7 @@
           <p:nvPr/>
         </p:nvPicPr>
         <p:blipFill rotWithShape="1">
-          <a:blip xmlns:r="http://schemas.openxmlformats.org/officeDocument/2006/relationships" xmlns:a="http://schemas.openxmlformats.org/drawingml/2006/main" r:embed="R7e0958be17bc4c31">
+          <a:blip xmlns:r="http://schemas.openxmlformats.org/officeDocument/2006/relationships" xmlns:a="http://schemas.openxmlformats.org/drawingml/2006/main" r:embed="R5b8eca3b2bd9466c">
             <a:alphaModFix amt="35000"/>
           </a:blip>
           <a:srcRect xmlns:a="http://schemas.openxmlformats.org/drawingml/2006/main" l="0" t="9831" r="0" b="36385"/>
@@ -2847,7 +2952,7 @@
           <p:nvPr/>
         </p:nvPicPr>
         <p:blipFill>
-          <a:blip xmlns:r="http://schemas.openxmlformats.org/officeDocument/2006/relationships" xmlns:a="http://schemas.openxmlformats.org/drawingml/2006/main" r:embed="R3b7ceaad98f84036"/>
+          <a:blip xmlns:r="http://schemas.openxmlformats.org/officeDocument/2006/relationships" xmlns:a="http://schemas.openxmlformats.org/drawingml/2006/main" r:embed="R716ceb19997e4f8f"/>
           <a:srcRect xmlns:a="http://schemas.openxmlformats.org/drawingml/2006/main" l="0" t="0" r="54251" b="0"/>
           <a:stretch xmlns:a="http://schemas.openxmlformats.org/drawingml/2006/main"/>
         </p:blipFill>
@@ -3104,7 +3209,7 @@
           <p:nvPr/>
         </p:nvPicPr>
         <p:blipFill rotWithShape="1">
-          <a:blip xmlns:r="http://schemas.openxmlformats.org/officeDocument/2006/relationships" xmlns:a="http://schemas.openxmlformats.org/drawingml/2006/main" r:embed="Rc225bf80dc194cbb"/>
+          <a:blip xmlns:r="http://schemas.openxmlformats.org/officeDocument/2006/relationships" xmlns:a="http://schemas.openxmlformats.org/drawingml/2006/main" r:embed="R410f6f8e29944f7c"/>
           <a:srcRect xmlns:a="http://schemas.openxmlformats.org/drawingml/2006/main" l="0" t="0" r="1346" b="0"/>
           <a:stretch xmlns:a="http://schemas.openxmlformats.org/drawingml/2006/main"/>
         </p:blipFill>
@@ -3287,7 +3392,7 @@
           <p:nvPr/>
         </p:nvPicPr>
         <p:blipFill>
-          <a:blip xmlns:r="http://schemas.openxmlformats.org/officeDocument/2006/relationships" xmlns:a="http://schemas.openxmlformats.org/drawingml/2006/main" r:embed="R27b45f7f53ab4cdb"/>
+          <a:blip xmlns:r="http://schemas.openxmlformats.org/officeDocument/2006/relationships" xmlns:a="http://schemas.openxmlformats.org/drawingml/2006/main" r:embed="Rdfb6332ad45e4498"/>
           <a:stretch xmlns:a="http://schemas.openxmlformats.org/drawingml/2006/main">
             <a:fillRect l="0" t="0" r="0" b="0"/>
           </a:stretch>
@@ -3383,7 +3488,7 @@
           <p:nvPr/>
         </p:nvPicPr>
         <p:blipFill>
-          <a:blip xmlns:r="http://schemas.openxmlformats.org/officeDocument/2006/relationships" xmlns:a="http://schemas.openxmlformats.org/drawingml/2006/main" r:embed="R2d6dabe0a3b54012">
+          <a:blip xmlns:r="http://schemas.openxmlformats.org/officeDocument/2006/relationships" xmlns:a="http://schemas.openxmlformats.org/drawingml/2006/main" r:embed="R1fcf83cafadb4051">
             <a:duotone>
               <a:prstClr val="black"/>
               <a:schemeClr val="accent1">
@@ -3550,7 +3655,7 @@
           <p:nvPr/>
         </p:nvPicPr>
         <p:blipFill rotWithShape="1">
-          <a:blip xmlns:r="http://schemas.openxmlformats.org/officeDocument/2006/relationships" xmlns:a="http://schemas.openxmlformats.org/drawingml/2006/main" r:embed="Rc33c9ca69082411a">
+          <a:blip xmlns:r="http://schemas.openxmlformats.org/officeDocument/2006/relationships" xmlns:a="http://schemas.openxmlformats.org/drawingml/2006/main" r:embed="R42a7bc79cfe94d5d">
             <a:alphaModFix amt="20000"/>
             <a:duotone>
               <a:schemeClr val="accent4">
@@ -3648,10 +3753,10 @@
   </p:cSld>
   <p:clrMap bg1="lt1" tx1="dk1" bg2="lt2" tx2="dk2" accent1="accent1" accent2="accent2" accent3="accent3" accent4="accent4" accent5="accent5" accent6="accent6" hlink="hlink" folHlink="folHlink"/>
   <p:sldLayoutIdLst>
-    <p:sldLayoutId xmlns:r="http://schemas.openxmlformats.org/officeDocument/2006/relationships" id="2147483649" r:id="R8be3da2a46ec4497"/>
-    <p:sldLayoutId xmlns:r="http://schemas.openxmlformats.org/officeDocument/2006/relationships" id="2147483650" r:id="R1b4c342f05a74b14"/>
-    <p:sldLayoutId xmlns:r="http://schemas.openxmlformats.org/officeDocument/2006/relationships" id="2147483651" r:id="Rf51b513edab54653"/>
-    <p:sldLayoutId xmlns:r="http://schemas.openxmlformats.org/officeDocument/2006/relationships" id="2147483652" r:id="R0e76543479664318"/>
+    <p:sldLayoutId xmlns:r="http://schemas.openxmlformats.org/officeDocument/2006/relationships" id="2147483649" r:id="R80d0cb15b7144838"/>
+    <p:sldLayoutId xmlns:r="http://schemas.openxmlformats.org/officeDocument/2006/relationships" id="2147483650" r:id="R98a70c8556334b47"/>
+    <p:sldLayoutId xmlns:r="http://schemas.openxmlformats.org/officeDocument/2006/relationships" id="2147483651" r:id="Rb2f165273d284805"/>
+    <p:sldLayoutId xmlns:r="http://schemas.openxmlformats.org/officeDocument/2006/relationships" id="2147483652" r:id="Rf96ba87d36b841c9"/>
   </p:sldLayoutIdLst>
   <p:hf hdr="0" ftr="0" dt="0"/>
   <p:txStyles>
@@ -4236,7 +4341,7 @@
                 <a:ea typeface="微软雅黑"/>
                 <a:cs typeface="微软雅黑"/>
               </a:rPr>
-              <a:t>第12讲 Agent/Skill 选型与自主 Research Workflow 设计</a:t>
+              <a:t>第12讲 Agent/Skill 逻辑与自主 Research Workflow 设计</a:t>
             </a:r>
           </a:p>
         </p:txBody>
@@ -4370,14 +4475,14 @@
       </p:sp>
       <p:pic>
         <p:nvPicPr>
-          <p:cNvPr id="29" name=""/>
+          <p:cNvPr id="30" name=""/>
           <p:cNvPicPr>
             <a:picLocks xmlns:a="http://schemas.openxmlformats.org/drawingml/2006/main" noChangeAspect="1"/>
           </p:cNvPicPr>
           <p:nvPr/>
         </p:nvPicPr>
         <p:blipFill>
-          <a:blip xmlns:r="http://schemas.openxmlformats.org/officeDocument/2006/relationships" xmlns:a="http://schemas.openxmlformats.org/drawingml/2006/main" r:embed="Rf5d0bc5da4cd4065"/>
+          <a:blip xmlns:r="http://schemas.openxmlformats.org/officeDocument/2006/relationships" xmlns:a="http://schemas.openxmlformats.org/drawingml/2006/main" r:embed="R2e75cfb9a8b844b3"/>
           <a:stretch xmlns:a="http://schemas.openxmlformats.org/drawingml/2006/main"/>
         </p:blipFill>
         <p:spPr>
@@ -5272,7 +5377,7 @@
                 <a:ea typeface="微软雅黑"/>
                 <a:cs typeface="微软雅黑"/>
               </a:rPr>
-              <a:t>多组件与更强治理</a:t>
+              <a:t>多组件治理</a:t>
             </a:r>
           </a:p>
         </p:txBody>
@@ -5465,14 +5570,14 @@
       </p:sp>
       <p:pic>
         <p:nvPicPr>
-          <p:cNvPr id="16" name=""/>
+          <p:cNvPr id="17" name=""/>
           <p:cNvPicPr>
             <a:picLocks xmlns:a="http://schemas.openxmlformats.org/drawingml/2006/main" noChangeAspect="1"/>
           </p:cNvPicPr>
           <p:nvPr/>
         </p:nvPicPr>
         <p:blipFill>
-          <a:blip xmlns:r="http://schemas.openxmlformats.org/officeDocument/2006/relationships" xmlns:a="http://schemas.openxmlformats.org/drawingml/2006/main" r:embed="R78ea0f6a9dcc40fa"/>
+          <a:blip xmlns:r="http://schemas.openxmlformats.org/officeDocument/2006/relationships" xmlns:a="http://schemas.openxmlformats.org/drawingml/2006/main" r:embed="Rad7f48fe644b40c0"/>
           <a:stretch xmlns:a="http://schemas.openxmlformats.org/drawingml/2006/main"/>
         </p:blipFill>
         <p:spPr>
@@ -5909,14 +6014,14 @@
       </p:sp>
       <p:pic>
         <p:nvPicPr>
-          <p:cNvPr id="22" name=""/>
+          <p:cNvPr id="23" name=""/>
           <p:cNvPicPr>
             <a:picLocks xmlns:a="http://schemas.openxmlformats.org/drawingml/2006/main" noChangeAspect="1"/>
           </p:cNvPicPr>
           <p:nvPr/>
         </p:nvPicPr>
         <p:blipFill>
-          <a:blip xmlns:r="http://schemas.openxmlformats.org/officeDocument/2006/relationships" xmlns:a="http://schemas.openxmlformats.org/drawingml/2006/main" r:embed="Rb4dab0396f274df3"/>
+          <a:blip xmlns:r="http://schemas.openxmlformats.org/officeDocument/2006/relationships" xmlns:a="http://schemas.openxmlformats.org/drawingml/2006/main" r:embed="Rceb2a8372abb4a83"/>
           <a:stretch xmlns:a="http://schemas.openxmlformats.org/drawingml/2006/main"/>
         </p:blipFill>
         <p:spPr>
@@ -6161,7 +6266,7 @@
                 <a:ea typeface="微软雅黑"/>
                 <a:cs typeface="微软雅黑"/>
               </a:rPr>
-              <a:t>workflow-contract.md</a:t>
+              <a:t>agent-workflow.md</a:t>
             </a:r>
           </a:p>
         </p:txBody>
@@ -6649,14 +6754,14 @@
       </p:sp>
       <p:pic>
         <p:nvPicPr>
-          <p:cNvPr id="27" name=""/>
+          <p:cNvPr id="29" name=""/>
           <p:cNvPicPr>
             <a:picLocks xmlns:a="http://schemas.openxmlformats.org/drawingml/2006/main" noChangeAspect="1"/>
           </p:cNvPicPr>
           <p:nvPr/>
         </p:nvPicPr>
         <p:blipFill>
-          <a:blip xmlns:r="http://schemas.openxmlformats.org/officeDocument/2006/relationships" xmlns:a="http://schemas.openxmlformats.org/drawingml/2006/main" r:embed="Rfbf469a2faec40d4"/>
+          <a:blip xmlns:r="http://schemas.openxmlformats.org/officeDocument/2006/relationships" xmlns:a="http://schemas.openxmlformats.org/drawingml/2006/main" r:embed="R03f68ea1b99542c9"/>
           <a:stretch xmlns:a="http://schemas.openxmlformats.org/drawingml/2006/main"/>
         </p:blipFill>
         <p:spPr>
@@ -6901,7 +7006,7 @@
                 <a:ea typeface="微软雅黑"/>
                 <a:cs typeface="微软雅黑"/>
               </a:rPr>
-              <a:t>runner/</a:t>
+              <a:t>runner/ 执行端</a:t>
             </a:r>
           </a:p>
         </p:txBody>
@@ -7130,13 +7235,13 @@
         <p:spPr>
           <a:xfrm xmlns:a="http://schemas.openxmlformats.org/drawingml/2006/main">
             <a:off x="6953250" y="1428750"/>
-            <a:ext cx="3429000" cy="323850"/>
+            <a:ext cx="4572000" cy="323850"/>
           </a:xfrm>
           <a:prstGeom xmlns:a="http://schemas.openxmlformats.org/drawingml/2006/main" prst="rect">
             <a:avLst/>
           </a:prstGeom>
           <a:solidFill xmlns:a="http://schemas.openxmlformats.org/drawingml/2006/main">
-            <a:srgbClr val="C8161E"/>
+            <a:srgbClr val="1F4D78"/>
           </a:solidFill>
           <a:ln xmlns:a="http://schemas.openxmlformats.org/drawingml/2006/main" w="0">
             <a:noFill/>
@@ -7160,7 +7265,7 @@
         <p:spPr>
           <a:xfrm xmlns:a="http://schemas.openxmlformats.org/drawingml/2006/main">
             <a:off x="7029450" y="1447800"/>
-            <a:ext cx="3276600" cy="285750"/>
+            <a:ext cx="4324350" cy="285750"/>
           </a:xfrm>
           <a:prstGeom xmlns:a="http://schemas.openxmlformats.org/drawingml/2006/main" prst="rect">
             <a:avLst/>
@@ -7197,7 +7302,7 @@
                 <a:ea typeface="微软雅黑"/>
                 <a:cs typeface="微软雅黑"/>
               </a:rPr>
-              <a:t>evaluator/</a:t>
+              <a:t>evaluator/ 独立评价端</a:t>
             </a:r>
           </a:p>
         </p:txBody>
@@ -7256,7 +7361,7 @@
                 <a:ea typeface="Consolas"/>
                 <a:cs typeface="Consolas"/>
               </a:rPr>
-              <a:t>gold.json     R</a:t>
+              <a:t>gold.json  仅评价端 R</a:t>
             </a:r>
           </a:p>
         </p:txBody>
@@ -7315,7 +7420,7 @@
                 <a:ea typeface="Consolas"/>
                 <a:cs typeface="Consolas"/>
               </a:rPr>
-              <a:t>rubric.yaml   R</a:t>
+              <a:t>rubric.yaml  冻结规则</a:t>
             </a:r>
           </a:p>
         </p:txBody>
@@ -7374,7 +7479,7 @@
                 <a:ea typeface="Consolas"/>
                 <a:cs typeface="Consolas"/>
               </a:rPr>
-              <a:t>score.py      R</a:t>
+              <a:t>score.py  独立执行</a:t>
             </a:r>
           </a:p>
         </p:txBody>
@@ -7433,7 +7538,7 @@
                 <a:ea typeface="Consolas"/>
                 <a:cs typeface="Consolas"/>
               </a:rPr>
-              <a:t>任何修改     ? 人工确认</a:t>
+              <a:t>协议变更须人工确认</a:t>
             </a:r>
           </a:p>
         </p:txBody>
@@ -7492,7 +7597,66 @@
                 <a:ea typeface="微软雅黑"/>
                 <a:cs typeface="微软雅黑"/>
               </a:rPr>
-              <a:t>→</a:t>
+              <a:t>×</a:t>
+            </a:r>
+          </a:p>
+        </p:txBody>
+      </p:sp>
+      <p:sp>
+        <p:nvSpPr>
+          <p:cNvPr id="25" name="role-boundary">
+            <a:extLst xmlns:a="http://schemas.openxmlformats.org/drawingml/2006/main">
+              <a:ext uri="{FF2B5EF4-FFF2-40B4-BE49-F238E27FC236}">
+                <a16:creationId xmlns:a16="http://schemas.microsoft.com/office/drawing/2014/main" id="{7EAAE0D7-4745-4AEB-A3A6-5E346AB72539}"/>
+              </a:ext>
+            </a:extLst>
+          </p:cNvPr>
+          <p:cNvSpPr>
+            <a:spLocks xmlns:a="http://schemas.openxmlformats.org/drawingml/2006/main" noGrp="1"/>
+          </p:cNvSpPr>
+          <p:nvPr/>
+        </p:nvSpPr>
+        <p:spPr>
+          <a:xfrm xmlns:a="http://schemas.openxmlformats.org/drawingml/2006/main">
+            <a:off x="714375" y="5381625"/>
+            <a:ext cx="10668000" cy="428625"/>
+          </a:xfrm>
+          <a:prstGeom xmlns:a="http://schemas.openxmlformats.org/drawingml/2006/main" prst="rect">
+            <a:avLst/>
+          </a:prstGeom>
+          <a:noFill xmlns:a="http://schemas.openxmlformats.org/drawingml/2006/main"/>
+          <a:ln xmlns:a="http://schemas.openxmlformats.org/drawingml/2006/main" w="0">
+            <a:noFill/>
+          </a:ln>
+        </p:spPr>
+        <p:txBody>
+          <a:bodyPr xmlns:a="http://schemas.openxmlformats.org/drawingml/2006/main" lIns="0" tIns="0" rIns="0" bIns="0" anchor="t"/>
+          <a:lstStyle xmlns:a="http://schemas.openxmlformats.org/drawingml/2006/main"/>
+          <a:p xmlns:a="http://schemas.openxmlformats.org/drawingml/2006/main">
+            <a:pPr algn="ctr">
+              <a:lnSpc>
+                <a:spcPct val="118000"/>
+              </a:lnSpc>
+              <a:buNone/>
+              <a:defRPr sz="2200" b="1">
+                <a:solidFill>
+                  <a:srgbClr val="C8161E"/>
+                </a:solidFill>
+                <a:latin typeface="微软雅黑"/>
+                <a:ea typeface="微软雅黑"/>
+                <a:cs typeface="微软雅黑"/>
+              </a:defRPr>
+            </a:pPr>
+            <a:r>
+              <a:rPr sz="2200" b="1">
+                <a:solidFill>
+                  <a:srgbClr val="C8161E"/>
+                </a:solidFill>
+                <a:latin typeface="微软雅黑"/>
+                <a:ea typeface="微软雅黑"/>
+                <a:cs typeface="微软雅黑"/>
+              </a:rPr>
+              <a:t>执行端禁止读取 gold.json</a:t>
             </a:r>
           </a:p>
         </p:txBody>
@@ -7626,14 +7790,14 @@
       </p:sp>
       <p:pic>
         <p:nvPicPr>
-          <p:cNvPr id="34" name=""/>
+          <p:cNvPr id="35" name=""/>
           <p:cNvPicPr>
             <a:picLocks xmlns:a="http://schemas.openxmlformats.org/drawingml/2006/main" noChangeAspect="1"/>
           </p:cNvPicPr>
           <p:nvPr/>
         </p:nvPicPr>
         <p:blipFill>
-          <a:blip xmlns:r="http://schemas.openxmlformats.org/officeDocument/2006/relationships" xmlns:a="http://schemas.openxmlformats.org/drawingml/2006/main" r:embed="R48c5d2feeee54310"/>
+          <a:blip xmlns:r="http://schemas.openxmlformats.org/officeDocument/2006/relationships" xmlns:a="http://schemas.openxmlformats.org/drawingml/2006/main" r:embed="Rc1f7a37d70fc4b10"/>
           <a:stretch xmlns:a="http://schemas.openxmlformats.org/drawingml/2006/main"/>
         </p:blipFill>
         <p:spPr>
@@ -8987,14 +9151,14 @@
       </p:sp>
       <p:pic>
         <p:nvPicPr>
-          <p:cNvPr id="23" name=""/>
+          <p:cNvPr id="25" name=""/>
           <p:cNvPicPr>
             <a:picLocks xmlns:a="http://schemas.openxmlformats.org/drawingml/2006/main" noChangeAspect="1"/>
           </p:cNvPicPr>
           <p:nvPr/>
         </p:nvPicPr>
         <p:blipFill>
-          <a:blip xmlns:r="http://schemas.openxmlformats.org/officeDocument/2006/relationships" xmlns:a="http://schemas.openxmlformats.org/drawingml/2006/main" r:embed="R8f30367e63e24998"/>
+          <a:blip xmlns:r="http://schemas.openxmlformats.org/officeDocument/2006/relationships" xmlns:a="http://schemas.openxmlformats.org/drawingml/2006/main" r:embed="R719532e5428349c7"/>
           <a:stretch xmlns:a="http://schemas.openxmlformats.org/drawingml/2006/main"/>
         </p:blipFill>
         <p:spPr>
@@ -9652,7 +9816,7 @@
                 <a:ea typeface="微软雅黑"/>
                 <a:cs typeface="微软雅黑"/>
               </a:rPr>
-              <a:t>完成标志</a:t>
+              <a:t>教师演示检查</a:t>
             </a:r>
           </a:p>
           <a:p xmlns:a="http://schemas.openxmlformats.org/drawingml/2006/main">
@@ -9739,6 +9903,65 @@
                 <a:cs typeface="微软雅黑"/>
               </a:rPr>
               <a:t>一个人工决定</a:t>
+            </a:r>
+          </a:p>
+        </p:txBody>
+      </p:sp>
+      <p:sp>
+        <p:nvSpPr>
+          <p:cNvPr id="21" name="fiction">
+            <a:extLst xmlns:a="http://schemas.openxmlformats.org/drawingml/2006/main">
+              <a:ext uri="{FF2B5EF4-FFF2-40B4-BE49-F238E27FC236}">
+                <a16:creationId xmlns:a16="http://schemas.microsoft.com/office/drawing/2014/main" id="{1938CABF-5436-4361-B20B-59E19467F36A}"/>
+              </a:ext>
+            </a:extLst>
+          </p:cNvPr>
+          <p:cNvSpPr>
+            <a:spLocks xmlns:a="http://schemas.openxmlformats.org/drawingml/2006/main" noGrp="1"/>
+          </p:cNvSpPr>
+          <p:nvPr/>
+        </p:nvSpPr>
+        <p:spPr>
+          <a:xfrm xmlns:a="http://schemas.openxmlformats.org/drawingml/2006/main">
+            <a:off x="609600" y="885825"/>
+            <a:ext cx="10572750" cy="314325"/>
+          </a:xfrm>
+          <a:prstGeom xmlns:a="http://schemas.openxmlformats.org/drawingml/2006/main" prst="rect">
+            <a:avLst/>
+          </a:prstGeom>
+          <a:noFill xmlns:a="http://schemas.openxmlformats.org/drawingml/2006/main"/>
+          <a:ln xmlns:a="http://schemas.openxmlformats.org/drawingml/2006/main" w="0">
+            <a:noFill/>
+          </a:ln>
+        </p:spPr>
+        <p:txBody>
+          <a:bodyPr xmlns:a="http://schemas.openxmlformats.org/drawingml/2006/main" lIns="0" tIns="0" rIns="0" bIns="0" anchor="t"/>
+          <a:lstStyle xmlns:a="http://schemas.openxmlformats.org/drawingml/2006/main"/>
+          <a:p xmlns:a="http://schemas.openxmlformats.org/drawingml/2006/main">
+            <a:pPr algn="l">
+              <a:lnSpc>
+                <a:spcPct val="118000"/>
+              </a:lnSpc>
+              <a:buNone/>
+              <a:defRPr sz="1800" b="0">
+                <a:solidFill>
+                  <a:srgbClr val="A96510"/>
+                </a:solidFill>
+                <a:latin typeface="微软雅黑"/>
+                <a:ea typeface="微软雅黑"/>
+                <a:cs typeface="微软雅黑"/>
+              </a:defRPr>
+            </a:pPr>
+            <a:r>
+              <a:rPr sz="1800" b="0">
+                <a:solidFill>
+                  <a:srgbClr val="A96510"/>
+                </a:solidFill>
+                <a:latin typeface="微软雅黑"/>
+                <a:ea typeface="微软雅黑"/>
+                <a:cs typeface="微软雅黑"/>
+              </a:rPr>
+              <a:t>课程虚构教学工件</a:t>
             </a:r>
           </a:p>
         </p:txBody>
@@ -9872,14 +10095,14 @@
       </p:sp>
       <p:pic>
         <p:nvPicPr>
-          <p:cNvPr id="40" name=""/>
+          <p:cNvPr id="41" name=""/>
           <p:cNvPicPr>
             <a:picLocks xmlns:a="http://schemas.openxmlformats.org/drawingml/2006/main" noChangeAspect="1"/>
           </p:cNvPicPr>
           <p:nvPr/>
         </p:nvPicPr>
         <p:blipFill>
-          <a:blip xmlns:r="http://schemas.openxmlformats.org/officeDocument/2006/relationships" xmlns:a="http://schemas.openxmlformats.org/drawingml/2006/main" r:embed="R867561a704214438"/>
+          <a:blip xmlns:r="http://schemas.openxmlformats.org/officeDocument/2006/relationships" xmlns:a="http://schemas.openxmlformats.org/drawingml/2006/main" r:embed="R6af4d36198c143c8"/>
           <a:stretch xmlns:a="http://schemas.openxmlformats.org/drawingml/2006/main"/>
         </p:blipFill>
         <p:spPr>
@@ -11188,7 +11411,7 @@
                 <a:ea typeface="微软雅黑"/>
                 <a:cs typeface="微软雅黑"/>
               </a:rPr>
-              <a:t>决定是否写回</a:t>
+              <a:t>审核写回</a:t>
             </a:r>
           </a:p>
         </p:txBody>
@@ -11500,14 +11723,14 @@
       </p:sp>
       <p:pic>
         <p:nvPicPr>
-          <p:cNvPr id="27" name=""/>
+          <p:cNvPr id="28" name=""/>
           <p:cNvPicPr>
             <a:picLocks xmlns:a="http://schemas.openxmlformats.org/drawingml/2006/main" noChangeAspect="1"/>
           </p:cNvPicPr>
           <p:nvPr/>
         </p:nvPicPr>
         <p:blipFill>
-          <a:blip xmlns:r="http://schemas.openxmlformats.org/officeDocument/2006/relationships" xmlns:a="http://schemas.openxmlformats.org/drawingml/2006/main" r:embed="Rbdeaa8552bc54da7"/>
+          <a:blip xmlns:r="http://schemas.openxmlformats.org/officeDocument/2006/relationships" xmlns:a="http://schemas.openxmlformats.org/drawingml/2006/main" r:embed="R84643859cf0d48c9"/>
           <a:stretch xmlns:a="http://schemas.openxmlformats.org/drawingml/2006/main"/>
         </p:blipFill>
         <p:spPr>
@@ -12138,7 +12361,7 @@
             <a:r>
               <a:rPr sz="1800" b="1">
                 <a:solidFill>
-                  <a:srgbClr val="C8161E"/>
+                  <a:srgbClr val="FFFFFF"/>
                 </a:solidFill>
                 <a:latin typeface="微软雅黑"/>
                 <a:ea typeface="微软雅黑"/>
@@ -12225,7 +12448,7 @@
         <p:spPr>
           <a:xfrm xmlns:a="http://schemas.openxmlformats.org/drawingml/2006/main">
             <a:off x="7905750" y="1666875"/>
-            <a:ext cx="3429000" cy="2619375"/>
+            <a:ext cx="3429000" cy="3476625"/>
           </a:xfrm>
           <a:prstGeom xmlns:a="http://schemas.openxmlformats.org/drawingml/2006/main" prst="rect">
             <a:avLst/>
@@ -12571,14 +12794,14 @@
       </p:sp>
       <p:pic>
         <p:nvPicPr>
-          <p:cNvPr id="25" name=""/>
+          <p:cNvPr id="26" name=""/>
           <p:cNvPicPr>
             <a:picLocks xmlns:a="http://schemas.openxmlformats.org/drawingml/2006/main" noChangeAspect="1"/>
           </p:cNvPicPr>
           <p:nvPr/>
         </p:nvPicPr>
         <p:blipFill>
-          <a:blip xmlns:r="http://schemas.openxmlformats.org/officeDocument/2006/relationships" xmlns:a="http://schemas.openxmlformats.org/drawingml/2006/main" r:embed="Rd5140422d7cb4173"/>
+          <a:blip xmlns:r="http://schemas.openxmlformats.org/officeDocument/2006/relationships" xmlns:a="http://schemas.openxmlformats.org/drawingml/2006/main" r:embed="Rfc1c8b273c9849e7"/>
           <a:stretch xmlns:a="http://schemas.openxmlformats.org/drawingml/2006/main"/>
         </p:blipFill>
         <p:spPr>
@@ -13430,14 +13653,14 @@
       </p:sp>
       <p:pic>
         <p:nvPicPr>
-          <p:cNvPr id="21" name=""/>
+          <p:cNvPr id="22" name=""/>
           <p:cNvPicPr>
             <a:picLocks xmlns:a="http://schemas.openxmlformats.org/drawingml/2006/main" noChangeAspect="1"/>
           </p:cNvPicPr>
           <p:nvPr/>
         </p:nvPicPr>
         <p:blipFill>
-          <a:blip xmlns:r="http://schemas.openxmlformats.org/officeDocument/2006/relationships" xmlns:a="http://schemas.openxmlformats.org/drawingml/2006/main" r:embed="Re0d49ff146024baf"/>
+          <a:blip xmlns:r="http://schemas.openxmlformats.org/officeDocument/2006/relationships" xmlns:a="http://schemas.openxmlformats.org/drawingml/2006/main" r:embed="R56cac36951584cda"/>
           <a:stretch xmlns:a="http://schemas.openxmlformats.org/drawingml/2006/main"/>
         </p:blipFill>
         <p:spPr>
@@ -13859,7 +14082,7 @@
                 <a:ea typeface="微软雅黑"/>
                 <a:cs typeface="微软雅黑"/>
               </a:rPr>
-              <a:t>baseline｜评价器与执行器是否隔离</a:t>
+              <a:t>baseline｜与什么比较，如何评分</a:t>
             </a:r>
           </a:p>
         </p:txBody>
@@ -14111,14 +14334,14 @@
       </p:sp>
       <p:pic>
         <p:nvPicPr>
-          <p:cNvPr id="43" name=""/>
+          <p:cNvPr id="44" name=""/>
           <p:cNvPicPr>
             <a:picLocks xmlns:a="http://schemas.openxmlformats.org/drawingml/2006/main" noChangeAspect="1"/>
           </p:cNvPicPr>
           <p:nvPr/>
         </p:nvPicPr>
         <p:blipFill>
-          <a:blip xmlns:r="http://schemas.openxmlformats.org/officeDocument/2006/relationships" xmlns:a="http://schemas.openxmlformats.org/drawingml/2006/main" r:embed="R6084554922344afa"/>
+          <a:blip xmlns:r="http://schemas.openxmlformats.org/officeDocument/2006/relationships" xmlns:a="http://schemas.openxmlformats.org/drawingml/2006/main" r:embed="R1409537be4184854"/>
           <a:stretch xmlns:a="http://schemas.openxmlformats.org/drawingml/2006/main"/>
         </p:blipFill>
         <p:spPr>
@@ -15916,14 +16139,14 @@
       </p:sp>
       <p:pic>
         <p:nvPicPr>
-          <p:cNvPr id="28" name=""/>
+          <p:cNvPr id="29" name=""/>
           <p:cNvPicPr>
             <a:picLocks xmlns:a="http://schemas.openxmlformats.org/drawingml/2006/main" noChangeAspect="1"/>
           </p:cNvPicPr>
           <p:nvPr/>
         </p:nvPicPr>
         <p:blipFill>
-          <a:blip xmlns:r="http://schemas.openxmlformats.org/officeDocument/2006/relationships" xmlns:a="http://schemas.openxmlformats.org/drawingml/2006/main" r:embed="Ra296e9f65a4b48a8"/>
+          <a:blip xmlns:r="http://schemas.openxmlformats.org/officeDocument/2006/relationships" xmlns:a="http://schemas.openxmlformats.org/drawingml/2006/main" r:embed="R09e5d4544aed4ba7"/>
           <a:stretch xmlns:a="http://schemas.openxmlformats.org/drawingml/2006/main"/>
         </p:blipFill>
         <p:spPr>
@@ -16952,14 +17175,14 @@
       </p:sp>
       <p:pic>
         <p:nvPicPr>
-          <p:cNvPr id="26" name=""/>
+          <p:cNvPr id="27" name=""/>
           <p:cNvPicPr>
             <a:picLocks xmlns:a="http://schemas.openxmlformats.org/drawingml/2006/main" noChangeAspect="1"/>
           </p:cNvPicPr>
           <p:nvPr/>
         </p:nvPicPr>
         <p:blipFill>
-          <a:blip xmlns:r="http://schemas.openxmlformats.org/officeDocument/2006/relationships" xmlns:a="http://schemas.openxmlformats.org/drawingml/2006/main" r:embed="R710c2ab6c4394e55"/>
+          <a:blip xmlns:r="http://schemas.openxmlformats.org/officeDocument/2006/relationships" xmlns:a="http://schemas.openxmlformats.org/drawingml/2006/main" r:embed="R066c7fededb44dcc"/>
           <a:stretch xmlns:a="http://schemas.openxmlformats.org/drawingml/2006/main"/>
         </p:blipFill>
         <p:spPr>
@@ -17912,7 +18135,7 @@
                 <a:ea typeface="微软雅黑"/>
                 <a:cs typeface="微软雅黑"/>
               </a:rPr>
-              <a:t>任务契约同时写明成功与禁止项</a:t>
+              <a:t>AutoResearch 任务契约</a:t>
             </a:r>
             <a:endParaRPr/>
           </a:p>
@@ -17978,14 +18201,14 @@
       </p:sp>
       <p:pic>
         <p:nvPicPr>
-          <p:cNvPr id="22" name=""/>
+          <p:cNvPr id="23" name=""/>
           <p:cNvPicPr>
             <a:picLocks xmlns:a="http://schemas.openxmlformats.org/drawingml/2006/main" noChangeAspect="1"/>
           </p:cNvPicPr>
           <p:nvPr/>
         </p:nvPicPr>
         <p:blipFill>
-          <a:blip xmlns:r="http://schemas.openxmlformats.org/officeDocument/2006/relationships" xmlns:a="http://schemas.openxmlformats.org/drawingml/2006/main" r:embed="Ra6857b99d71d4173"/>
+          <a:blip xmlns:r="http://schemas.openxmlformats.org/officeDocument/2006/relationships" xmlns:a="http://schemas.openxmlformats.org/drawingml/2006/main" r:embed="Ra48d2836e151400a"/>
           <a:stretch xmlns:a="http://schemas.openxmlformats.org/drawingml/2006/main"/>
         </p:blipFill>
         <p:spPr>
@@ -18052,7 +18275,7 @@
                 <a:ea typeface="微软雅黑"/>
                 <a:cs typeface="微软雅黑"/>
               </a:rPr>
-              <a:t>任务契约同时写明成功与禁止项</a:t>
+              <a:t>AutoResearch 任务契约</a:t>
             </a:r>
           </a:p>
         </p:txBody>
@@ -18111,7 +18334,7 @@
                 <a:ea typeface="微软雅黑"/>
                 <a:cs typeface="微软雅黑"/>
               </a:rPr>
-              <a:t>来源：lesson-12/slides.md；课程工件与讲义见 speaker notes</a:t>
+              <a:t>来源：karpathy/autoresearch · program.md · commit 228791f；2026-09-13 核验</a:t>
             </a:r>
           </a:p>
         </p:txBody>
@@ -18230,7 +18453,7 @@
                 <a:ea typeface="微软雅黑"/>
                 <a:cs typeface="微软雅黑"/>
               </a:rPr>
-              <a:t>contract.md</a:t>
+              <a:t>program.md · 228791f</a:t>
             </a:r>
           </a:p>
         </p:txBody>
@@ -18289,7 +18512,7 @@
                 <a:ea typeface="微软雅黑"/>
                 <a:cs typeface="微软雅黑"/>
               </a:rPr>
-              <a:t>科研动作｜为同一 20 篇论文生成两条件输出</a:t>
+              <a:t>目标：降低验证集 val_bpb</a:t>
             </a:r>
           </a:p>
         </p:txBody>
@@ -18348,7 +18571,7 @@
                 <a:ea typeface="微软雅黑"/>
                 <a:cs typeface="微软雅黑"/>
               </a:rPr>
-              <a:t>成功标准｜输出可解析并绑定 run ID</a:t>
+              <a:t>读取：README.md 与 prepare.py</a:t>
             </a:r>
           </a:p>
         </p:txBody>
@@ -18407,7 +18630,7 @@
                 <a:ea typeface="微软雅黑"/>
                 <a:cs typeface="微软雅黑"/>
               </a:rPr>
-              <a:t>不适用范围｜图表为主论文需人工处理</a:t>
+              <a:t>代码改动：仅 train.py</a:t>
             </a:r>
           </a:p>
         </p:txBody>
@@ -18466,7 +18689,7 @@
                 <a:ea typeface="微软雅黑"/>
                 <a:cs typeface="微软雅黑"/>
               </a:rPr>
-              <a:t>禁止项｜不读人工基准、不改评价协议</a:t>
+              <a:t>禁止：改评价函数、添加依赖</a:t>
             </a:r>
           </a:p>
         </p:txBody>
@@ -18525,7 +18748,7 @@
                 <a:ea typeface="微软雅黑"/>
                 <a:cs typeface="微软雅黑"/>
               </a:rPr>
-              <a:t>人工审核｜外部动作与结论写回前确认</a:t>
+              <a:t>产出：run.log、results.tsv 与 commit</a:t>
             </a:r>
           </a:p>
         </p:txBody>
@@ -18576,6 +18799,33 @@
               </a:defRPr>
             </a:pPr>
             <a:r>
+              <a:rPr sz="2200" b="0">
+                <a:solidFill>
+                  <a:srgbClr val="1F4D78"/>
+                </a:solidFill>
+                <a:latin typeface="微软雅黑"/>
+                <a:ea typeface="微软雅黑"/>
+                <a:cs typeface="微软雅黑"/>
+              </a:rPr>
+              <a:t>课程阅读卡任务</a:t>
+            </a:r>
+          </a:p>
+          <a:p xmlns:a="http://schemas.openxmlformats.org/drawingml/2006/main">
+            <a:pPr algn="ctr">
+              <a:lnSpc>
+                <a:spcPct val="118000"/>
+              </a:lnSpc>
+              <a:buNone/>
+              <a:defRPr sz="2600" b="1">
+                <a:solidFill>
+                  <a:srgbClr val="1F4D78"/>
+                </a:solidFill>
+                <a:latin typeface="微软雅黑"/>
+                <a:ea typeface="微软雅黑"/>
+                <a:cs typeface="微软雅黑"/>
+              </a:defRPr>
+            </a:pPr>
+            <a:r>
               <a:rPr sz="2600" b="1">
                 <a:solidFill>
                   <a:srgbClr val="1F4D78"/>
@@ -18584,7 +18834,7 @@
                 <a:ea typeface="微软雅黑"/>
                 <a:cs typeface="微软雅黑"/>
               </a:rPr>
-              <a:t>模糊意图</a:t>
+              <a:t/>
             </a:r>
           </a:p>
           <a:p xmlns:a="http://schemas.openxmlformats.org/drawingml/2006/main">
@@ -18603,7 +18853,7 @@
               </a:defRPr>
             </a:pPr>
             <a:r>
-              <a:rPr sz="2600" b="1">
+              <a:rPr sz="2200" b="0">
                 <a:solidFill>
                   <a:srgbClr val="1F4D78"/>
                 </a:solidFill>
@@ -18611,7 +18861,7 @@
                 <a:ea typeface="微软雅黑"/>
                 <a:cs typeface="微软雅黑"/>
               </a:rPr>
-              <a:t>“自动整理</a:t>
+              <a:t>固定论文与配置</a:t>
             </a:r>
           </a:p>
           <a:p xmlns:a="http://schemas.openxmlformats.org/drawingml/2006/main">
@@ -18620,6 +18870,25 @@
                 <a:spcPct val="118000"/>
               </a:lnSpc>
               <a:buNone/>
+            </a:pPr>
+            <a:r>
+              <a:rPr sz="2200" b="0">
+                <a:solidFill>
+                  <a:srgbClr val="1F4D78"/>
+                </a:solidFill>
+                <a:latin typeface="微软雅黑"/>
+                <a:ea typeface="微软雅黑"/>
+                <a:cs typeface="微软雅黑"/>
+              </a:rPr>
+              <a:t>保留全部输出</a:t>
+            </a:r>
+          </a:p>
+          <a:p xmlns:a="http://schemas.openxmlformats.org/drawingml/2006/main">
+            <a:pPr algn="ctr">
+              <a:lnSpc>
+                <a:spcPct val="118000"/>
+              </a:lnSpc>
+              <a:buNone/>
               <a:defRPr sz="2600" b="1">
                 <a:solidFill>
                   <a:srgbClr val="1F4D78"/>
@@ -18630,7 +18899,7 @@
               </a:defRPr>
             </a:pPr>
             <a:r>
-              <a:rPr sz="2600" b="1">
+              <a:rPr sz="2200" b="0">
                 <a:solidFill>
                   <a:srgbClr val="1F4D78"/>
                 </a:solidFill>
@@ -18638,71 +18907,7 @@
                 <a:ea typeface="微软雅黑"/>
                 <a:cs typeface="微软雅黑"/>
               </a:rPr>
-              <a:t>每周论文”</a:t>
-            </a:r>
-          </a:p>
-          <a:p xmlns:a="http://schemas.openxmlformats.org/drawingml/2006/main">
-            <a:r>
-              <a:t/>
-            </a:r>
-          </a:p>
-          <a:p xmlns:a="http://schemas.openxmlformats.org/drawingml/2006/main">
-            <a:pPr algn="ctr">
-              <a:lnSpc>
-                <a:spcPct val="118000"/>
-              </a:lnSpc>
-              <a:buNone/>
-              <a:defRPr sz="2600" b="1">
-                <a:solidFill>
-                  <a:srgbClr val="1F4D78"/>
-                </a:solidFill>
-                <a:latin typeface="微软雅黑"/>
-                <a:ea typeface="微软雅黑"/>
-                <a:cs typeface="微软雅黑"/>
-              </a:defRPr>
-            </a:pPr>
-            <a:r>
-              <a:rPr sz="2600" b="1">
-                <a:solidFill>
-                  <a:srgbClr val="1F4D78"/>
-                </a:solidFill>
-                <a:latin typeface="微软雅黑"/>
-                <a:ea typeface="微软雅黑"/>
-                <a:cs typeface="微软雅黑"/>
-              </a:rPr>
-              <a:t>↓</a:t>
-            </a:r>
-          </a:p>
-          <a:p xmlns:a="http://schemas.openxmlformats.org/drawingml/2006/main">
-            <a:r>
-              <a:t/>
-            </a:r>
-          </a:p>
-          <a:p xmlns:a="http://schemas.openxmlformats.org/drawingml/2006/main">
-            <a:pPr algn="ctr">
-              <a:lnSpc>
-                <a:spcPct val="118000"/>
-              </a:lnSpc>
-              <a:buNone/>
-              <a:defRPr sz="2600" b="1">
-                <a:solidFill>
-                  <a:srgbClr val="1F4D78"/>
-                </a:solidFill>
-                <a:latin typeface="微软雅黑"/>
-                <a:ea typeface="微软雅黑"/>
-                <a:cs typeface="微软雅黑"/>
-              </a:defRPr>
-            </a:pPr>
-            <a:r>
-              <a:rPr sz="2600" b="1">
-                <a:solidFill>
-                  <a:srgbClr val="1F4D78"/>
-                </a:solidFill>
-                <a:latin typeface="微软雅黑"/>
-                <a:ea typeface="微软雅黑"/>
-                <a:cs typeface="微软雅黑"/>
-              </a:rPr>
-              <a:t>可检查契约</a:t>
+              <a:t>独立人工基准评价</a:t>
             </a:r>
           </a:p>
         </p:txBody>
@@ -18770,7 +18975,7 @@
                 <a:ea typeface="微软雅黑"/>
                 <a:cs typeface="微软雅黑"/>
               </a:rPr>
-              <a:t>Context 是输入，状态必须落到工件</a:t>
+              <a:t>AutoResearch 的输入与持久状态</a:t>
             </a:r>
             <a:endParaRPr/>
           </a:p>
@@ -18836,14 +19041,14 @@
       </p:sp>
       <p:pic>
         <p:nvPicPr>
-          <p:cNvPr id="22" name=""/>
+          <p:cNvPr id="23" name=""/>
           <p:cNvPicPr>
             <a:picLocks xmlns:a="http://schemas.openxmlformats.org/drawingml/2006/main" noChangeAspect="1"/>
           </p:cNvPicPr>
           <p:nvPr/>
         </p:nvPicPr>
         <p:blipFill>
-          <a:blip xmlns:r="http://schemas.openxmlformats.org/officeDocument/2006/relationships" xmlns:a="http://schemas.openxmlformats.org/drawingml/2006/main" r:embed="R92a11dff69084665"/>
+          <a:blip xmlns:r="http://schemas.openxmlformats.org/officeDocument/2006/relationships" xmlns:a="http://schemas.openxmlformats.org/drawingml/2006/main" r:embed="R1369680a133d457f"/>
           <a:stretch xmlns:a="http://schemas.openxmlformats.org/drawingml/2006/main"/>
         </p:blipFill>
         <p:spPr>
@@ -18910,7 +19115,7 @@
                 <a:ea typeface="微软雅黑"/>
                 <a:cs typeface="微软雅黑"/>
               </a:rPr>
-              <a:t>Context 是输入，状态必须落到工件</a:t>
+              <a:t>AutoResearch 的输入与持久状态</a:t>
             </a:r>
           </a:p>
         </p:txBody>
@@ -18969,7 +19174,7 @@
                 <a:ea typeface="微软雅黑"/>
                 <a:cs typeface="微软雅黑"/>
               </a:rPr>
-              <a:t>来源：lesson-12/slides.md；课程工件与讲义见 speaker notes</a:t>
+              <a:t>来源：karpathy/autoresearch · program.md · commit 228791f；2026-09-13 核验</a:t>
             </a:r>
           </a:p>
         </p:txBody>
@@ -19022,13 +19227,13 @@
             <a:r>
               <a:rPr sz="2200" b="1">
                 <a:solidFill>
-                  <a:srgbClr val="C8161E"/>
-                </a:solidFill>
-                <a:latin typeface="微软雅黑"/>
-                <a:ea typeface="微软雅黑"/>
-                <a:cs typeface="微软雅黑"/>
-              </a:rPr>
-              <a:t>不可审计</a:t>
+                  <a:srgbClr val="1F4D78"/>
+                </a:solidFill>
+                <a:latin typeface="微软雅黑"/>
+                <a:ea typeface="微软雅黑"/>
+                <a:cs typeface="微软雅黑"/>
+              </a:rPr>
+              <a:t>Context：读取的文件</a:t>
             </a:r>
           </a:p>
         </p:txBody>
@@ -19087,7 +19292,7 @@
                 <a:ea typeface="微软雅黑"/>
                 <a:cs typeface="微软雅黑"/>
               </a:rPr>
-              <a:t>可审计工件</a:t>
+              <a:t>状态：实验后留下什么</a:t>
             </a:r>
           </a:p>
         </p:txBody>
@@ -19176,7 +19381,7 @@
                 <a:ea typeface="微软雅黑"/>
                 <a:cs typeface="微软雅黑"/>
               </a:rPr>
-              <a:t>— 整仓库塞入 Context</a:t>
+              <a:t>README.md：仓库说明</a:t>
             </a:r>
           </a:p>
         </p:txBody>
@@ -19235,7 +19440,7 @@
                 <a:ea typeface="微软雅黑"/>
                 <a:cs typeface="微软雅黑"/>
               </a:rPr>
-              <a:t>— 只留会话记忆</a:t>
+              <a:t>prepare.py：数据与评价</a:t>
             </a:r>
           </a:p>
         </p:txBody>
@@ -19294,7 +19499,7 @@
                 <a:ea typeface="微软雅黑"/>
                 <a:cs typeface="微软雅黑"/>
               </a:rPr>
-              <a:t>— 无法反查输入版本</a:t>
+              <a:t>train.py：训练实现</a:t>
             </a:r>
           </a:p>
         </p:txBody>
@@ -19353,7 +19558,7 @@
                 <a:ea typeface="微软雅黑"/>
                 <a:cs typeface="微软雅黑"/>
               </a:rPr>
-              <a:t>— input-snapshot/</a:t>
+              <a:t>Git commit：代码版本</a:t>
             </a:r>
           </a:p>
         </p:txBody>
@@ -19412,7 +19617,7 @@
                 <a:ea typeface="微软雅黑"/>
                 <a:cs typeface="微软雅黑"/>
               </a:rPr>
-              <a:t>— state.json + checkpoint</a:t>
+              <a:t>run.log：本次运行输出</a:t>
             </a:r>
           </a:p>
         </p:txBody>
@@ -19471,7 +19676,7 @@
                 <a:ea typeface="微软雅黑"/>
                 <a:cs typeface="微软雅黑"/>
               </a:rPr>
-              <a:t>— evidence-map.md + decision-log.md</a:t>
+              <a:t>results.tsv：跨实验账本</a:t>
             </a:r>
           </a:p>
         </p:txBody>
@@ -19539,7 +19744,7 @@
                 <a:ea typeface="微软雅黑"/>
                 <a:cs typeface="微软雅黑"/>
               </a:rPr>
-              <a:t>工具权限落在仓库路径与人工确认门上</a:t>
+              <a:t>AutoResearch 的约束与课程权限</a:t>
             </a:r>
             <a:endParaRPr/>
           </a:p>
@@ -19605,14 +19810,14 @@
       </p:sp>
       <p:pic>
         <p:nvPicPr>
-          <p:cNvPr id="26" name=""/>
+          <p:cNvPr id="27" name=""/>
           <p:cNvPicPr>
             <a:picLocks xmlns:a="http://schemas.openxmlformats.org/drawingml/2006/main" noChangeAspect="1"/>
           </p:cNvPicPr>
           <p:nvPr/>
         </p:nvPicPr>
         <p:blipFill>
-          <a:blip xmlns:r="http://schemas.openxmlformats.org/officeDocument/2006/relationships" xmlns:a="http://schemas.openxmlformats.org/drawingml/2006/main" r:embed="Rf35eb473dae24f0f"/>
+          <a:blip xmlns:r="http://schemas.openxmlformats.org/officeDocument/2006/relationships" xmlns:a="http://schemas.openxmlformats.org/drawingml/2006/main" r:embed="R2135a7a1a0374068"/>
           <a:stretch xmlns:a="http://schemas.openxmlformats.org/drawingml/2006/main"/>
         </p:blipFill>
         <p:spPr>
@@ -19679,7 +19884,7 @@
                 <a:ea typeface="微软雅黑"/>
                 <a:cs typeface="微软雅黑"/>
               </a:rPr>
-              <a:t>工具权限落在仓库路径与人工确认门上</a:t>
+              <a:t>AutoResearch 的约束与课程权限</a:t>
             </a:r>
           </a:p>
         </p:txBody>
@@ -19738,7 +19943,7 @@
                 <a:ea typeface="微软雅黑"/>
                 <a:cs typeface="微软雅黑"/>
               </a:rPr>
-              <a:t>来源：lesson-12/slides.md；课程工件与讲义见 speaker notes</a:t>
+              <a:t>来源：karpathy/autoresearch · program.md · commit 228791f；2026-09-13 核验</a:t>
             </a:r>
           </a:p>
         </p:txBody>
@@ -19857,7 +20062,7 @@
                 <a:ea typeface="微软雅黑"/>
                 <a:cs typeface="微软雅黑"/>
               </a:rPr>
-              <a:t>project/</a:t>
+              <a:t>program.md 约束摘要</a:t>
             </a:r>
           </a:p>
         </p:txBody>
@@ -19916,7 +20121,7 @@
                 <a:ea typeface="Consolas"/>
                 <a:cs typeface="Consolas"/>
               </a:rPr>
-              <a:t>R  experiment-spec.md</a:t>
+              <a:t>R  prepare.py</a:t>
             </a:r>
           </a:p>
         </p:txBody>
@@ -19975,7 +20180,7 @@
                 <a:ea typeface="Consolas"/>
                 <a:cs typeface="Consolas"/>
               </a:rPr>
-              <a:t>R  evidence-map.md</a:t>
+              <a:t>W  train.py（代码范围）</a:t>
             </a:r>
           </a:p>
         </p:txBody>
@@ -20034,7 +20239,7 @@
                 <a:ea typeface="Consolas"/>
                 <a:cs typeface="Consolas"/>
               </a:rPr>
-              <a:t>W  workflow/runs/</a:t>
+              <a:t>X  uv run train.py</a:t>
             </a:r>
           </a:p>
         </p:txBody>
@@ -20093,7 +20298,7 @@
                 <a:ea typeface="Consolas"/>
                 <a:cs typeface="Consolas"/>
               </a:rPr>
-              <a:t>X  local evaluator only</a:t>
+              <a:t>W  run.log / results.tsv（日志）</a:t>
             </a:r>
           </a:p>
         </p:txBody>
@@ -20152,7 +20357,7 @@
                 <a:ea typeface="Consolas"/>
                 <a:cs typeface="Consolas"/>
               </a:rPr>
-              <a:t>?  external upload / config change</a:t>
+              <a:t>!  改评价函数 / 添加依赖</a:t>
             </a:r>
           </a:p>
         </p:txBody>
@@ -20211,7 +20416,7 @@
                 <a:ea typeface="Consolas"/>
                 <a:cs typeface="Consolas"/>
               </a:rPr>
-              <a:t>!  gold-standard/</a:t>
+              <a:t>?  启动前由人确认设置</a:t>
             </a:r>
           </a:p>
         </p:txBody>
@@ -20232,8 +20437,8 @@
         </p:nvSpPr>
         <p:spPr>
           <a:xfrm xmlns:a="http://schemas.openxmlformats.org/drawingml/2006/main">
-            <a:off x="7810500" y="1714500"/>
-            <a:ext cx="2857500" cy="523875"/>
+            <a:off x="7477125" y="1714500"/>
+            <a:ext cx="3905250" cy="523875"/>
           </a:xfrm>
           <a:prstGeom xmlns:a="http://schemas.openxmlformats.org/drawingml/2006/main" prst="rect">
             <a:avLst/>
@@ -20262,15 +20467,15 @@
               </a:defRPr>
             </a:pPr>
             <a:r>
-              <a:rPr sz="2600" b="1">
-                <a:solidFill>
-                  <a:srgbClr val="C8161E"/>
-                </a:solidFill>
-                <a:latin typeface="微软雅黑"/>
-                <a:ea typeface="微软雅黑"/>
-                <a:cs typeface="微软雅黑"/>
-              </a:rPr>
-              <a:t>人工确认门</a:t>
+              <a:rPr sz="2400" b="1">
+                <a:solidFill>
+                  <a:srgbClr val="1F4D78"/>
+                </a:solidFill>
+                <a:latin typeface="微软雅黑"/>
+                <a:ea typeface="微软雅黑"/>
+                <a:cs typeface="微软雅黑"/>
+              </a:rPr>
+              <a:t>课程另加的权限门</a:t>
             </a:r>
           </a:p>
         </p:txBody>
@@ -20329,7 +20534,7 @@
                 <a:ea typeface="微软雅黑"/>
                 <a:cs typeface="微软雅黑"/>
               </a:rPr>
-              <a:t>□ 外部写入</a:t>
+              <a:t>□ 外部写入先确认</a:t>
             </a:r>
           </a:p>
         </p:txBody>
@@ -20388,7 +20593,7 @@
                 <a:ea typeface="微软雅黑"/>
                 <a:cs typeface="微软雅黑"/>
               </a:rPr>
-              <a:t>□ 数据上传</a:t>
+              <a:t>□ 禁止读取 gold</a:t>
             </a:r>
           </a:p>
         </p:txBody>
@@ -20447,7 +20652,7 @@
                 <a:ea typeface="微软雅黑"/>
                 <a:cs typeface="微软雅黑"/>
               </a:rPr>
-              <a:t>□ 评价配置改动</a:t>
+              <a:t>□ 配置变更先确认</a:t>
             </a:r>
           </a:p>
         </p:txBody>
@@ -20515,7 +20720,7 @@
                 <a:ea typeface="微软雅黑"/>
                 <a:cs typeface="微软雅黑"/>
               </a:rPr>
-              <a:t>自主程度越高，独立评价与停止越重要</a:t>
+              <a:t>方法优化循环与冻结执行队列</a:t>
             </a:r>
             <a:endParaRPr/>
           </a:p>
@@ -20581,14 +20786,14 @@
       </p:sp>
       <p:pic>
         <p:nvPicPr>
-          <p:cNvPr id="25" name=""/>
+          <p:cNvPr id="37" name=""/>
           <p:cNvPicPr>
             <a:picLocks xmlns:a="http://schemas.openxmlformats.org/drawingml/2006/main" noChangeAspect="1"/>
           </p:cNvPicPr>
           <p:nvPr/>
         </p:nvPicPr>
         <p:blipFill>
-          <a:blip xmlns:r="http://schemas.openxmlformats.org/officeDocument/2006/relationships" xmlns:a="http://schemas.openxmlformats.org/drawingml/2006/main" r:embed="Rb7f4ea27e748439d"/>
+          <a:blip xmlns:r="http://schemas.openxmlformats.org/officeDocument/2006/relationships" xmlns:a="http://schemas.openxmlformats.org/drawingml/2006/main" r:embed="R6e5c219a23734c65"/>
           <a:stretch xmlns:a="http://schemas.openxmlformats.org/drawingml/2006/main"/>
         </p:blipFill>
         <p:spPr>
@@ -20655,7 +20860,7 @@
                 <a:ea typeface="微软雅黑"/>
                 <a:cs typeface="微软雅黑"/>
               </a:rPr>
-              <a:t>自主程度越高，独立评价与停止越重要</a:t>
+              <a:t>方法优化循环与冻结执行队列</a:t>
             </a:r>
           </a:p>
         </p:txBody>
@@ -20714,59 +20919,29 @@
                 <a:ea typeface="微软雅黑"/>
                 <a:cs typeface="微软雅黑"/>
               </a:rPr>
-              <a:t>来源：lesson-12/slides.md；课程工件与讲义见 speaker notes</a:t>
-            </a:r>
-          </a:p>
-        </p:txBody>
-      </p:sp>
-      <p:sp>
-        <p:nvSpPr>
-          <p:cNvPr id="10" name="axis">
-            <a:extLst xmlns:a="http://schemas.openxmlformats.org/drawingml/2006/main">
-              <a:ext uri="{FF2B5EF4-FFF2-40B4-BE49-F238E27FC236}">
-                <a16:creationId xmlns:a16="http://schemas.microsoft.com/office/drawing/2014/main" id="{240978B3-122F-492B-A3A5-102C0463309F}"/>
-              </a:ext>
-            </a:extLst>
-          </p:cNvPr>
-          <p:cNvSpPr>
-            <a:spLocks xmlns:a="http://schemas.openxmlformats.org/drawingml/2006/main" noGrp="1"/>
-          </p:cNvSpPr>
-          <p:nvPr/>
-        </p:nvSpPr>
-        <p:spPr>
-          <a:xfrm xmlns:a="http://schemas.openxmlformats.org/drawingml/2006/main">
-            <a:off x="571500" y="3048000"/>
-            <a:ext cx="11334750" cy="14288"/>
-          </a:xfrm>
-          <a:prstGeom xmlns:a="http://schemas.openxmlformats.org/drawingml/2006/main" prst="rect">
-            <a:avLst/>
-          </a:prstGeom>
-          <a:solidFill xmlns:a="http://schemas.openxmlformats.org/drawingml/2006/main">
-            <a:srgbClr val="1F4D78"/>
-          </a:solidFill>
-          <a:ln xmlns:a="http://schemas.openxmlformats.org/drawingml/2006/main" w="0">
-            <a:noFill/>
-          </a:ln>
-        </p:spPr>
-      </p:sp>
-      <p:sp>
-        <p:nvSpPr>
-          <p:cNvPr id="11" name="mode-0">
-            <a:extLst xmlns:a="http://schemas.openxmlformats.org/drawingml/2006/main">
-              <a:ext uri="{FF2B5EF4-FFF2-40B4-BE49-F238E27FC236}">
-                <a16:creationId xmlns:a16="http://schemas.microsoft.com/office/drawing/2014/main" id="{327BE0C0-08F4-4F35-A5B1-EB53A0D063F4}"/>
-              </a:ext>
-            </a:extLst>
-          </p:cNvPr>
-          <p:cNvSpPr>
-            <a:spLocks xmlns:a="http://schemas.openxmlformats.org/drawingml/2006/main" noGrp="1"/>
-          </p:cNvSpPr>
-          <p:nvPr/>
-        </p:nvSpPr>
-        <p:spPr>
-          <a:xfrm xmlns:a="http://schemas.openxmlformats.org/drawingml/2006/main">
-            <a:off x="523875" y="2381250"/>
-            <a:ext cx="1809750" cy="523875"/>
+              <a:t>来源：karpathy/autoresearch · program.md · commit 228791f；2026-09-13 核验</a:t>
+            </a:r>
+          </a:p>
+        </p:txBody>
+      </p:sp>
+      <p:sp>
+        <p:nvSpPr>
+          <p:cNvPr id="23" name="left-h">
+            <a:extLst xmlns:a="http://schemas.openxmlformats.org/drawingml/2006/main">
+              <a:ext uri="{FF2B5EF4-FFF2-40B4-BE49-F238E27FC236}">
+                <a16:creationId xmlns:a16="http://schemas.microsoft.com/office/drawing/2014/main" id="{43BAC395-97E1-4455-A596-D81105D7E806}"/>
+              </a:ext>
+            </a:extLst>
+          </p:cNvPr>
+          <p:cNvSpPr>
+            <a:spLocks xmlns:a="http://schemas.openxmlformats.org/drawingml/2006/main" noGrp="1"/>
+          </p:cNvSpPr>
+          <p:nvPr/>
+        </p:nvSpPr>
+        <p:spPr>
+          <a:xfrm xmlns:a="http://schemas.openxmlformats.org/drawingml/2006/main">
+            <a:off x="609600" y="1333500"/>
+            <a:ext cx="5257800" cy="428625"/>
           </a:xfrm>
           <a:prstGeom xmlns:a="http://schemas.openxmlformats.org/drawingml/2006/main" prst="rect">
             <a:avLst/>
@@ -20780,279 +20955,602 @@
           <a:bodyPr xmlns:a="http://schemas.openxmlformats.org/drawingml/2006/main" lIns="0" tIns="0" rIns="0" bIns="0" anchor="t"/>
           <a:lstStyle xmlns:a="http://schemas.openxmlformats.org/drawingml/2006/main"/>
           <a:p xmlns:a="http://schemas.openxmlformats.org/drawingml/2006/main">
+            <a:pPr algn="l">
+              <a:lnSpc>
+                <a:spcPct val="118000"/>
+              </a:lnSpc>
+              <a:buNone/>
+              <a:defRPr sz="2400" b="1">
+                <a:solidFill>
+                  <a:srgbClr val="1F4D78"/>
+                </a:solidFill>
+                <a:latin typeface="微软雅黑"/>
+                <a:ea typeface="微软雅黑"/>
+                <a:cs typeface="微软雅黑"/>
+              </a:defRPr>
+            </a:pPr>
+            <a:r>
+              <a:rPr sz="2400" b="1">
+                <a:solidFill>
+                  <a:srgbClr val="1F4D78"/>
+                </a:solidFill>
+                <a:latin typeface="微软雅黑"/>
+                <a:ea typeface="微软雅黑"/>
+                <a:cs typeface="微软雅黑"/>
+              </a:rPr>
+              <a:t>AutoResearch · 228791f</a:t>
+            </a:r>
+          </a:p>
+        </p:txBody>
+      </p:sp>
+      <p:sp>
+        <p:nvSpPr>
+          <p:cNvPr id="24" name="right-h">
+            <a:extLst xmlns:a="http://schemas.openxmlformats.org/drawingml/2006/main">
+              <a:ext uri="{FF2B5EF4-FFF2-40B4-BE49-F238E27FC236}">
+                <a16:creationId xmlns:a16="http://schemas.microsoft.com/office/drawing/2014/main" id="{C5937824-FA7F-4182-B5D8-23C962AE2D97}"/>
+              </a:ext>
+            </a:extLst>
+          </p:cNvPr>
+          <p:cNvSpPr>
+            <a:spLocks xmlns:a="http://schemas.openxmlformats.org/drawingml/2006/main" noGrp="1"/>
+          </p:cNvSpPr>
+          <p:nvPr/>
+        </p:nvSpPr>
+        <p:spPr>
+          <a:xfrm xmlns:a="http://schemas.openxmlformats.org/drawingml/2006/main">
+            <a:off x="6572250" y="1333500"/>
+            <a:ext cx="5010150" cy="428625"/>
+          </a:xfrm>
+          <a:prstGeom xmlns:a="http://schemas.openxmlformats.org/drawingml/2006/main" prst="rect">
+            <a:avLst/>
+          </a:prstGeom>
+          <a:noFill xmlns:a="http://schemas.openxmlformats.org/drawingml/2006/main"/>
+          <a:ln xmlns:a="http://schemas.openxmlformats.org/drawingml/2006/main" w="0">
+            <a:noFill/>
+          </a:ln>
+        </p:spPr>
+        <p:txBody>
+          <a:bodyPr xmlns:a="http://schemas.openxmlformats.org/drawingml/2006/main" lIns="0" tIns="0" rIns="0" bIns="0" anchor="t"/>
+          <a:lstStyle xmlns:a="http://schemas.openxmlformats.org/drawingml/2006/main"/>
+          <a:p xmlns:a="http://schemas.openxmlformats.org/drawingml/2006/main">
+            <a:pPr algn="l">
+              <a:lnSpc>
+                <a:spcPct val="118000"/>
+              </a:lnSpc>
+              <a:buNone/>
+              <a:defRPr sz="2400" b="1">
+                <a:solidFill>
+                  <a:srgbClr val="1F4D78"/>
+                </a:solidFill>
+                <a:latin typeface="微软雅黑"/>
+                <a:ea typeface="微软雅黑"/>
+                <a:cs typeface="微软雅黑"/>
+              </a:defRPr>
+            </a:pPr>
+            <a:r>
+              <a:rPr sz="2400" b="1">
+                <a:solidFill>
+                  <a:srgbClr val="1F4D78"/>
+                </a:solidFill>
+                <a:latin typeface="微软雅黑"/>
+                <a:ea typeface="微软雅黑"/>
+                <a:cs typeface="微软雅黑"/>
+              </a:rPr>
+              <a:t>课程阅读卡冻结队列</a:t>
+            </a:r>
+          </a:p>
+        </p:txBody>
+      </p:sp>
+      <p:sp>
+        <p:nvSpPr>
+          <p:cNvPr id="25" name="l1">
+            <a:extLst xmlns:a="http://schemas.openxmlformats.org/drawingml/2006/main">
+              <a:ext uri="{FF2B5EF4-FFF2-40B4-BE49-F238E27FC236}">
+                <a16:creationId xmlns:a16="http://schemas.microsoft.com/office/drawing/2014/main" id="{26485A7F-3281-4A06-906F-F44471C306A9}"/>
+              </a:ext>
+            </a:extLst>
+          </p:cNvPr>
+          <p:cNvSpPr>
+            <a:spLocks xmlns:a="http://schemas.openxmlformats.org/drawingml/2006/main" noGrp="1"/>
+          </p:cNvSpPr>
+          <p:nvPr/>
+        </p:nvSpPr>
+        <p:spPr>
+          <a:xfrm xmlns:a="http://schemas.openxmlformats.org/drawingml/2006/main">
+            <a:off x="609600" y="2095500"/>
+            <a:ext cx="5257800" cy="457200"/>
+          </a:xfrm>
+          <a:prstGeom xmlns:a="http://schemas.openxmlformats.org/drawingml/2006/main" prst="rect">
+            <a:avLst/>
+          </a:prstGeom>
+          <a:noFill xmlns:a="http://schemas.openxmlformats.org/drawingml/2006/main"/>
+          <a:ln xmlns:a="http://schemas.openxmlformats.org/drawingml/2006/main" w="0">
+            <a:noFill/>
+          </a:ln>
+        </p:spPr>
+        <p:txBody>
+          <a:bodyPr xmlns:a="http://schemas.openxmlformats.org/drawingml/2006/main" lIns="0" tIns="0" rIns="0" bIns="0" anchor="t"/>
+          <a:lstStyle xmlns:a="http://schemas.openxmlformats.org/drawingml/2006/main"/>
+          <a:p xmlns:a="http://schemas.openxmlformats.org/drawingml/2006/main">
+            <a:pPr algn="l">
+              <a:lnSpc>
+                <a:spcPct val="118000"/>
+              </a:lnSpc>
+              <a:buNone/>
+              <a:defRPr sz="2200" b="0">
+                <a:solidFill>
+                  <a:srgbClr val="27333D"/>
+                </a:solidFill>
+                <a:latin typeface="微软雅黑"/>
+                <a:ea typeface="微软雅黑"/>
+                <a:cs typeface="微软雅黑"/>
+              </a:defRPr>
+            </a:pPr>
+            <a:r>
+              <a:rPr sz="2200" b="0">
+                <a:solidFill>
+                  <a:srgbClr val="27333D"/>
+                </a:solidFill>
+                <a:latin typeface="微软雅黑"/>
+                <a:ea typeface="微软雅黑"/>
+                <a:cs typeface="微软雅黑"/>
+              </a:rPr>
+              <a:t>改 train.py，运行并评价</a:t>
+            </a:r>
+          </a:p>
+        </p:txBody>
+      </p:sp>
+      <p:sp>
+        <p:nvSpPr>
+          <p:cNvPr id="26" name="r1">
+            <a:extLst xmlns:a="http://schemas.openxmlformats.org/drawingml/2006/main">
+              <a:ext uri="{FF2B5EF4-FFF2-40B4-BE49-F238E27FC236}">
+                <a16:creationId xmlns:a16="http://schemas.microsoft.com/office/drawing/2014/main" id="{0A86C754-7A58-4754-943A-C8CCD054D369}"/>
+              </a:ext>
+            </a:extLst>
+          </p:cNvPr>
+          <p:cNvSpPr>
+            <a:spLocks xmlns:a="http://schemas.openxmlformats.org/drawingml/2006/main" noGrp="1"/>
+          </p:cNvSpPr>
+          <p:nvPr/>
+        </p:nvSpPr>
+        <p:spPr>
+          <a:xfrm xmlns:a="http://schemas.openxmlformats.org/drawingml/2006/main">
+            <a:off x="6572250" y="2095500"/>
+            <a:ext cx="5010150" cy="457200"/>
+          </a:xfrm>
+          <a:prstGeom xmlns:a="http://schemas.openxmlformats.org/drawingml/2006/main" prst="rect">
+            <a:avLst/>
+          </a:prstGeom>
+          <a:noFill xmlns:a="http://schemas.openxmlformats.org/drawingml/2006/main"/>
+          <a:ln xmlns:a="http://schemas.openxmlformats.org/drawingml/2006/main" w="0">
+            <a:noFill/>
+          </a:ln>
+        </p:spPr>
+        <p:txBody>
+          <a:bodyPr xmlns:a="http://schemas.openxmlformats.org/drawingml/2006/main" lIns="0" tIns="0" rIns="0" bIns="0" anchor="t"/>
+          <a:lstStyle xmlns:a="http://schemas.openxmlformats.org/drawingml/2006/main"/>
+          <a:p xmlns:a="http://schemas.openxmlformats.org/drawingml/2006/main">
+            <a:pPr algn="l">
+              <a:lnSpc>
+                <a:spcPct val="118000"/>
+              </a:lnSpc>
+              <a:buNone/>
+              <a:defRPr sz="2200" b="0">
+                <a:solidFill>
+                  <a:srgbClr val="27333D"/>
+                </a:solidFill>
+                <a:latin typeface="微软雅黑"/>
+                <a:ea typeface="微软雅黑"/>
+                <a:cs typeface="微软雅黑"/>
+              </a:defRPr>
+            </a:pPr>
+            <a:r>
+              <a:rPr sz="2200" b="0">
+                <a:solidFill>
+                  <a:srgbClr val="27333D"/>
+                </a:solidFill>
+                <a:latin typeface="微软雅黑"/>
+                <a:ea typeface="微软雅黑"/>
+                <a:cs typeface="微软雅黑"/>
+              </a:rPr>
+              <a:t>固定输入、方法与配置</a:t>
+            </a:r>
+          </a:p>
+        </p:txBody>
+      </p:sp>
+      <p:sp>
+        <p:nvSpPr>
+          <p:cNvPr id="27" name="l2">
+            <a:extLst xmlns:a="http://schemas.openxmlformats.org/drawingml/2006/main">
+              <a:ext uri="{FF2B5EF4-FFF2-40B4-BE49-F238E27FC236}">
+                <a16:creationId xmlns:a16="http://schemas.microsoft.com/office/drawing/2014/main" id="{ED92F01A-4ED3-47B1-87FA-859692FD4282}"/>
+              </a:ext>
+            </a:extLst>
+          </p:cNvPr>
+          <p:cNvSpPr>
+            <a:spLocks xmlns:a="http://schemas.openxmlformats.org/drawingml/2006/main" noGrp="1"/>
+          </p:cNvSpPr>
+          <p:nvPr/>
+        </p:nvSpPr>
+        <p:spPr>
+          <a:xfrm xmlns:a="http://schemas.openxmlformats.org/drawingml/2006/main">
+            <a:off x="609600" y="2714625"/>
+            <a:ext cx="5257800" cy="457200"/>
+          </a:xfrm>
+          <a:prstGeom xmlns:a="http://schemas.openxmlformats.org/drawingml/2006/main" prst="rect">
+            <a:avLst/>
+          </a:prstGeom>
+          <a:noFill xmlns:a="http://schemas.openxmlformats.org/drawingml/2006/main"/>
+          <a:ln xmlns:a="http://schemas.openxmlformats.org/drawingml/2006/main" w="0">
+            <a:noFill/>
+          </a:ln>
+        </p:spPr>
+        <p:txBody>
+          <a:bodyPr xmlns:a="http://schemas.openxmlformats.org/drawingml/2006/main" lIns="0" tIns="0" rIns="0" bIns="0" anchor="t"/>
+          <a:lstStyle xmlns:a="http://schemas.openxmlformats.org/drawingml/2006/main"/>
+          <a:p xmlns:a="http://schemas.openxmlformats.org/drawingml/2006/main">
+            <a:pPr algn="l">
+              <a:lnSpc>
+                <a:spcPct val="118000"/>
+              </a:lnSpc>
+              <a:buNone/>
+              <a:defRPr sz="2200" b="0">
+                <a:solidFill>
+                  <a:srgbClr val="27333D"/>
+                </a:solidFill>
+                <a:latin typeface="微软雅黑"/>
+                <a:ea typeface="微软雅黑"/>
+                <a:cs typeface="微软雅黑"/>
+              </a:defRPr>
+            </a:pPr>
+            <a:r>
+              <a:rPr sz="2200" b="0">
+                <a:solidFill>
+                  <a:srgbClr val="27333D"/>
+                </a:solidFill>
+                <a:latin typeface="微软雅黑"/>
+                <a:ea typeface="微软雅黑"/>
+                <a:cs typeface="微软雅黑"/>
+              </a:rPr>
+              <a:t>按 val_bpb 保留或回退</a:t>
+            </a:r>
+          </a:p>
+        </p:txBody>
+      </p:sp>
+      <p:sp>
+        <p:nvSpPr>
+          <p:cNvPr id="28" name="r2">
+            <a:extLst xmlns:a="http://schemas.openxmlformats.org/drawingml/2006/main">
+              <a:ext uri="{FF2B5EF4-FFF2-40B4-BE49-F238E27FC236}">
+                <a16:creationId xmlns:a16="http://schemas.microsoft.com/office/drawing/2014/main" id="{4B6008FB-5885-414C-B4CD-FE8B0E6A0830}"/>
+              </a:ext>
+            </a:extLst>
+          </p:cNvPr>
+          <p:cNvSpPr>
+            <a:spLocks xmlns:a="http://schemas.openxmlformats.org/drawingml/2006/main" noGrp="1"/>
+          </p:cNvSpPr>
+          <p:nvPr/>
+        </p:nvSpPr>
+        <p:spPr>
+          <a:xfrm xmlns:a="http://schemas.openxmlformats.org/drawingml/2006/main">
+            <a:off x="6572250" y="2714625"/>
+            <a:ext cx="5010150" cy="457200"/>
+          </a:xfrm>
+          <a:prstGeom xmlns:a="http://schemas.openxmlformats.org/drawingml/2006/main" prst="rect">
+            <a:avLst/>
+          </a:prstGeom>
+          <a:noFill xmlns:a="http://schemas.openxmlformats.org/drawingml/2006/main"/>
+          <a:ln xmlns:a="http://schemas.openxmlformats.org/drawingml/2006/main" w="0">
+            <a:noFill/>
+          </a:ln>
+        </p:spPr>
+        <p:txBody>
+          <a:bodyPr xmlns:a="http://schemas.openxmlformats.org/drawingml/2006/main" lIns="0" tIns="0" rIns="0" bIns="0" anchor="t"/>
+          <a:lstStyle xmlns:a="http://schemas.openxmlformats.org/drawingml/2006/main"/>
+          <a:p xmlns:a="http://schemas.openxmlformats.org/drawingml/2006/main">
+            <a:pPr algn="l">
+              <a:lnSpc>
+                <a:spcPct val="118000"/>
+              </a:lnSpc>
+              <a:buNone/>
+              <a:defRPr sz="2200" b="0">
+                <a:solidFill>
+                  <a:srgbClr val="27333D"/>
+                </a:solidFill>
+                <a:latin typeface="微软雅黑"/>
+                <a:ea typeface="微软雅黑"/>
+                <a:cs typeface="微软雅黑"/>
+              </a:defRPr>
+            </a:pPr>
+            <a:r>
+              <a:rPr sz="2200" b="0">
+                <a:solidFill>
+                  <a:srgbClr val="27333D"/>
+                </a:solidFill>
+                <a:latin typeface="微软雅黑"/>
+                <a:ea typeface="微软雅黑"/>
+                <a:cs typeface="微软雅黑"/>
+              </a:rPr>
+              <a:t>逐项生成，保留全部输出</a:t>
+            </a:r>
+          </a:p>
+        </p:txBody>
+      </p:sp>
+      <p:sp>
+        <p:nvSpPr>
+          <p:cNvPr id="29" name="l3">
+            <a:extLst xmlns:a="http://schemas.openxmlformats.org/drawingml/2006/main">
+              <a:ext uri="{FF2B5EF4-FFF2-40B4-BE49-F238E27FC236}">
+                <a16:creationId xmlns:a16="http://schemas.microsoft.com/office/drawing/2014/main" id="{341094CF-33FD-4F30-A68E-DD31A4EB40F2}"/>
+              </a:ext>
+            </a:extLst>
+          </p:cNvPr>
+          <p:cNvSpPr>
+            <a:spLocks xmlns:a="http://schemas.openxmlformats.org/drawingml/2006/main" noGrp="1"/>
+          </p:cNvSpPr>
+          <p:nvPr/>
+        </p:nvSpPr>
+        <p:spPr>
+          <a:xfrm xmlns:a="http://schemas.openxmlformats.org/drawingml/2006/main">
+            <a:off x="609600" y="3333750"/>
+            <a:ext cx="5257800" cy="457200"/>
+          </a:xfrm>
+          <a:prstGeom xmlns:a="http://schemas.openxmlformats.org/drawingml/2006/main" prst="rect">
+            <a:avLst/>
+          </a:prstGeom>
+          <a:noFill xmlns:a="http://schemas.openxmlformats.org/drawingml/2006/main"/>
+          <a:ln xmlns:a="http://schemas.openxmlformats.org/drawingml/2006/main" w="0">
+            <a:noFill/>
+          </a:ln>
+        </p:spPr>
+        <p:txBody>
+          <a:bodyPr xmlns:a="http://schemas.openxmlformats.org/drawingml/2006/main" lIns="0" tIns="0" rIns="0" bIns="0" anchor="t"/>
+          <a:lstStyle xmlns:a="http://schemas.openxmlformats.org/drawingml/2006/main"/>
+          <a:p xmlns:a="http://schemas.openxmlformats.org/drawingml/2006/main">
+            <a:pPr algn="l">
+              <a:lnSpc>
+                <a:spcPct val="118000"/>
+              </a:lnSpc>
+              <a:buNone/>
+              <a:defRPr sz="2200" b="0">
+                <a:solidFill>
+                  <a:srgbClr val="27333D"/>
+                </a:solidFill>
+                <a:latin typeface="微软雅黑"/>
+                <a:ea typeface="微软雅黑"/>
+                <a:cs typeface="微软雅黑"/>
+              </a:defRPr>
+            </a:pPr>
+            <a:r>
+              <a:rPr sz="2200" b="0">
+                <a:solidFill>
+                  <a:srgbClr val="27333D"/>
+                </a:solidFill>
+                <a:latin typeface="微软雅黑"/>
+                <a:ea typeface="微软雅黑"/>
+                <a:cs typeface="微软雅黑"/>
+              </a:rPr>
+              <a:t>账本记录 keep / discard / crash</a:t>
+            </a:r>
+          </a:p>
+        </p:txBody>
+      </p:sp>
+      <p:sp>
+        <p:nvSpPr>
+          <p:cNvPr id="30" name="r3">
+            <a:extLst xmlns:a="http://schemas.openxmlformats.org/drawingml/2006/main">
+              <a:ext uri="{FF2B5EF4-FFF2-40B4-BE49-F238E27FC236}">
+                <a16:creationId xmlns:a16="http://schemas.microsoft.com/office/drawing/2014/main" id="{3B600B73-0677-4AB1-93ED-D6727B82EAB8}"/>
+              </a:ext>
+            </a:extLst>
+          </p:cNvPr>
+          <p:cNvSpPr>
+            <a:spLocks xmlns:a="http://schemas.openxmlformats.org/drawingml/2006/main" noGrp="1"/>
+          </p:cNvSpPr>
+          <p:nvPr/>
+        </p:nvSpPr>
+        <p:spPr>
+          <a:xfrm xmlns:a="http://schemas.openxmlformats.org/drawingml/2006/main">
+            <a:off x="6572250" y="3333750"/>
+            <a:ext cx="5010150" cy="457200"/>
+          </a:xfrm>
+          <a:prstGeom xmlns:a="http://schemas.openxmlformats.org/drawingml/2006/main" prst="rect">
+            <a:avLst/>
+          </a:prstGeom>
+          <a:noFill xmlns:a="http://schemas.openxmlformats.org/drawingml/2006/main"/>
+          <a:ln xmlns:a="http://schemas.openxmlformats.org/drawingml/2006/main" w="0">
+            <a:noFill/>
+          </a:ln>
+        </p:spPr>
+        <p:txBody>
+          <a:bodyPr xmlns:a="http://schemas.openxmlformats.org/drawingml/2006/main" lIns="0" tIns="0" rIns="0" bIns="0" anchor="t"/>
+          <a:lstStyle xmlns:a="http://schemas.openxmlformats.org/drawingml/2006/main"/>
+          <a:p xmlns:a="http://schemas.openxmlformats.org/drawingml/2006/main">
+            <a:pPr algn="l">
+              <a:lnSpc>
+                <a:spcPct val="118000"/>
+              </a:lnSpc>
+              <a:buNone/>
+              <a:defRPr sz="2200" b="0">
+                <a:solidFill>
+                  <a:srgbClr val="27333D"/>
+                </a:solidFill>
+                <a:latin typeface="微软雅黑"/>
+                <a:ea typeface="微软雅黑"/>
+                <a:cs typeface="微软雅黑"/>
+              </a:defRPr>
+            </a:pPr>
+            <a:r>
+              <a:rPr sz="2200" b="0">
+                <a:solidFill>
+                  <a:srgbClr val="27333D"/>
+                </a:solidFill>
+                <a:latin typeface="微软雅黑"/>
+                <a:ea typeface="微软雅黑"/>
+                <a:cs typeface="微软雅黑"/>
+              </a:rPr>
+              <a:t>失败留账，恢复仅补未完成项</a:t>
+            </a:r>
+          </a:p>
+        </p:txBody>
+      </p:sp>
+      <p:sp>
+        <p:nvSpPr>
+          <p:cNvPr id="31" name="l4">
+            <a:extLst xmlns:a="http://schemas.openxmlformats.org/drawingml/2006/main">
+              <a:ext uri="{FF2B5EF4-FFF2-40B4-BE49-F238E27FC236}">
+                <a16:creationId xmlns:a16="http://schemas.microsoft.com/office/drawing/2014/main" id="{E7E83DA1-3900-465C-8F53-75CB617B7207}"/>
+              </a:ext>
+            </a:extLst>
+          </p:cNvPr>
+          <p:cNvSpPr>
+            <a:spLocks xmlns:a="http://schemas.openxmlformats.org/drawingml/2006/main" noGrp="1"/>
+          </p:cNvSpPr>
+          <p:nvPr/>
+        </p:nvSpPr>
+        <p:spPr>
+          <a:xfrm xmlns:a="http://schemas.openxmlformats.org/drawingml/2006/main">
+            <a:off x="609600" y="3952875"/>
+            <a:ext cx="5257800" cy="457200"/>
+          </a:xfrm>
+          <a:prstGeom xmlns:a="http://schemas.openxmlformats.org/drawingml/2006/main" prst="rect">
+            <a:avLst/>
+          </a:prstGeom>
+          <a:noFill xmlns:a="http://schemas.openxmlformats.org/drawingml/2006/main"/>
+          <a:ln xmlns:a="http://schemas.openxmlformats.org/drawingml/2006/main" w="0">
+            <a:noFill/>
+          </a:ln>
+        </p:spPr>
+        <p:txBody>
+          <a:bodyPr xmlns:a="http://schemas.openxmlformats.org/drawingml/2006/main" lIns="0" tIns="0" rIns="0" bIns="0" anchor="t"/>
+          <a:lstStyle xmlns:a="http://schemas.openxmlformats.org/drawingml/2006/main"/>
+          <a:p xmlns:a="http://schemas.openxmlformats.org/drawingml/2006/main">
+            <a:pPr algn="l">
+              <a:lnSpc>
+                <a:spcPct val="118000"/>
+              </a:lnSpc>
+              <a:buNone/>
+              <a:defRPr sz="2200" b="0">
+                <a:solidFill>
+                  <a:srgbClr val="A96510"/>
+                </a:solidFill>
+                <a:latin typeface="微软雅黑"/>
+                <a:ea typeface="微软雅黑"/>
+                <a:cs typeface="微软雅黑"/>
+              </a:defRPr>
+            </a:pPr>
+            <a:r>
+              <a:rPr sz="2200" b="0">
+                <a:solidFill>
+                  <a:srgbClr val="A96510"/>
+                </a:solidFill>
+                <a:latin typeface="微软雅黑"/>
+                <a:ea typeface="微软雅黑"/>
+                <a:cs typeface="微软雅黑"/>
+              </a:rPr>
+              <a:t>外层持续循环，人工中断</a:t>
+            </a:r>
+          </a:p>
+        </p:txBody>
+      </p:sp>
+      <p:sp>
+        <p:nvSpPr>
+          <p:cNvPr id="32" name="r4">
+            <a:extLst xmlns:a="http://schemas.openxmlformats.org/drawingml/2006/main">
+              <a:ext uri="{FF2B5EF4-FFF2-40B4-BE49-F238E27FC236}">
+                <a16:creationId xmlns:a16="http://schemas.microsoft.com/office/drawing/2014/main" id="{FFE915D0-1A17-47EF-B840-EC53A3A9A031}"/>
+              </a:ext>
+            </a:extLst>
+          </p:cNvPr>
+          <p:cNvSpPr>
+            <a:spLocks xmlns:a="http://schemas.openxmlformats.org/drawingml/2006/main" noGrp="1"/>
+          </p:cNvSpPr>
+          <p:nvPr/>
+        </p:nvSpPr>
+        <p:spPr>
+          <a:xfrm xmlns:a="http://schemas.openxmlformats.org/drawingml/2006/main">
+            <a:off x="6572250" y="3952875"/>
+            <a:ext cx="5010150" cy="457200"/>
+          </a:xfrm>
+          <a:prstGeom xmlns:a="http://schemas.openxmlformats.org/drawingml/2006/main" prst="rect">
+            <a:avLst/>
+          </a:prstGeom>
+          <a:noFill xmlns:a="http://schemas.openxmlformats.org/drawingml/2006/main"/>
+          <a:ln xmlns:a="http://schemas.openxmlformats.org/drawingml/2006/main" w="0">
+            <a:noFill/>
+          </a:ln>
+        </p:spPr>
+        <p:txBody>
+          <a:bodyPr xmlns:a="http://schemas.openxmlformats.org/drawingml/2006/main" lIns="0" tIns="0" rIns="0" bIns="0" anchor="t"/>
+          <a:lstStyle xmlns:a="http://schemas.openxmlformats.org/drawingml/2006/main"/>
+          <a:p xmlns:a="http://schemas.openxmlformats.org/drawingml/2006/main">
+            <a:pPr algn="l">
+              <a:lnSpc>
+                <a:spcPct val="118000"/>
+              </a:lnSpc>
+              <a:buNone/>
+              <a:defRPr sz="2200" b="0">
+                <a:solidFill>
+                  <a:srgbClr val="2E7D5B"/>
+                </a:solidFill>
+                <a:latin typeface="微软雅黑"/>
+                <a:ea typeface="微软雅黑"/>
+                <a:cs typeface="微软雅黑"/>
+              </a:defRPr>
+            </a:pPr>
+            <a:r>
+              <a:rPr sz="2200" b="0">
+                <a:solidFill>
+                  <a:srgbClr val="2E7D5B"/>
+                </a:solidFill>
+                <a:latin typeface="微软雅黑"/>
+                <a:ea typeface="微软雅黑"/>
+                <a:cs typeface="微软雅黑"/>
+              </a:rPr>
+              <a:t>预定 120 份处理完即停</a:t>
+            </a:r>
+          </a:p>
+        </p:txBody>
+      </p:sp>
+      <p:sp>
+        <p:nvSpPr>
+          <p:cNvPr id="33" name="guard">
+            <a:extLst xmlns:a="http://schemas.openxmlformats.org/drawingml/2006/main">
+              <a:ext uri="{FF2B5EF4-FFF2-40B4-BE49-F238E27FC236}">
+                <a16:creationId xmlns:a16="http://schemas.microsoft.com/office/drawing/2014/main" id="{002AD89B-8019-484C-AB22-22871B10715E}"/>
+              </a:ext>
+            </a:extLst>
+          </p:cNvPr>
+          <p:cNvSpPr>
+            <a:spLocks xmlns:a="http://schemas.openxmlformats.org/drawingml/2006/main" noGrp="1"/>
+          </p:cNvSpPr>
+          <p:nvPr/>
+        </p:nvSpPr>
+        <p:spPr>
+          <a:xfrm xmlns:a="http://schemas.openxmlformats.org/drawingml/2006/main">
+            <a:off x="1143000" y="5143500"/>
+            <a:ext cx="9906000" cy="476250"/>
+          </a:xfrm>
+          <a:prstGeom xmlns:a="http://schemas.openxmlformats.org/drawingml/2006/main" prst="rect">
+            <a:avLst/>
+          </a:prstGeom>
+          <a:noFill xmlns:a="http://schemas.openxmlformats.org/drawingml/2006/main"/>
+          <a:ln xmlns:a="http://schemas.openxmlformats.org/drawingml/2006/main" w="0">
+            <a:noFill/>
+          </a:ln>
+        </p:spPr>
+        <p:txBody>
+          <a:bodyPr xmlns:a="http://schemas.openxmlformats.org/drawingml/2006/main" lIns="0" tIns="0" rIns="0" bIns="0" anchor="t"/>
+          <a:lstStyle xmlns:a="http://schemas.openxmlformats.org/drawingml/2006/main"/>
+          <a:p xmlns:a="http://schemas.openxmlformats.org/drawingml/2006/main">
             <a:pPr algn="ctr">
               <a:lnSpc>
                 <a:spcPct val="118000"/>
               </a:lnSpc>
               <a:buNone/>
-              <a:defRPr sz="2000" b="1">
-                <a:solidFill>
-                  <a:srgbClr val="1F4D78"/>
-                </a:solidFill>
-                <a:latin typeface="微软雅黑"/>
-                <a:ea typeface="微软雅黑"/>
-                <a:cs typeface="微软雅黑"/>
-              </a:defRPr>
-            </a:pPr>
-            <a:r>
-              <a:rPr sz="2000" b="1">
-                <a:solidFill>
-                  <a:srgbClr val="1F4D78"/>
-                </a:solidFill>
-                <a:latin typeface="微软雅黑"/>
-                <a:ea typeface="微软雅黑"/>
-                <a:cs typeface="微软雅黑"/>
-              </a:rPr>
-              <a:t>脚本</a:t>
-            </a:r>
-          </a:p>
-        </p:txBody>
-      </p:sp>
-      <p:sp>
-        <p:nvSpPr>
-          <p:cNvPr id="12" name="tick-0">
-            <a:extLst xmlns:a="http://schemas.openxmlformats.org/drawingml/2006/main">
-              <a:ext uri="{FF2B5EF4-FFF2-40B4-BE49-F238E27FC236}">
-                <a16:creationId xmlns:a16="http://schemas.microsoft.com/office/drawing/2014/main" id="{2D3CEC24-B1BC-494B-84F0-89C3CD4BA9E0}"/>
-              </a:ext>
-            </a:extLst>
-          </p:cNvPr>
-          <p:cNvSpPr>
-            <a:spLocks xmlns:a="http://schemas.openxmlformats.org/drawingml/2006/main" noGrp="1"/>
-          </p:cNvSpPr>
-          <p:nvPr/>
-        </p:nvSpPr>
-        <p:spPr>
-          <a:xfrm xmlns:a="http://schemas.openxmlformats.org/drawingml/2006/main">
-            <a:off x="1409700" y="2971800"/>
-            <a:ext cx="38100" cy="171450"/>
-          </a:xfrm>
-          <a:prstGeom xmlns:a="http://schemas.openxmlformats.org/drawingml/2006/main" prst="rect">
-            <a:avLst/>
-          </a:prstGeom>
-          <a:solidFill xmlns:a="http://schemas.openxmlformats.org/drawingml/2006/main">
-            <a:srgbClr val="1F4D78"/>
-          </a:solidFill>
-          <a:ln xmlns:a="http://schemas.openxmlformats.org/drawingml/2006/main" w="0">
-            <a:noFill/>
-          </a:ln>
-        </p:spPr>
-      </p:sp>
-      <p:sp>
-        <p:nvSpPr>
-          <p:cNvPr id="13" name="mode-1">
-            <a:extLst xmlns:a="http://schemas.openxmlformats.org/drawingml/2006/main">
-              <a:ext uri="{FF2B5EF4-FFF2-40B4-BE49-F238E27FC236}">
-                <a16:creationId xmlns:a16="http://schemas.microsoft.com/office/drawing/2014/main" id="{FCF40BB9-593A-4995-A44F-240C39B6B73A}"/>
-              </a:ext>
-            </a:extLst>
-          </p:cNvPr>
-          <p:cNvSpPr>
-            <a:spLocks xmlns:a="http://schemas.openxmlformats.org/drawingml/2006/main" noGrp="1"/>
-          </p:cNvSpPr>
-          <p:nvPr/>
-        </p:nvSpPr>
-        <p:spPr>
-          <a:xfrm xmlns:a="http://schemas.openxmlformats.org/drawingml/2006/main">
-            <a:off x="2905125" y="2381250"/>
-            <a:ext cx="1809750" cy="523875"/>
-          </a:xfrm>
-          <a:prstGeom xmlns:a="http://schemas.openxmlformats.org/drawingml/2006/main" prst="rect">
-            <a:avLst/>
-          </a:prstGeom>
-          <a:noFill xmlns:a="http://schemas.openxmlformats.org/drawingml/2006/main"/>
-          <a:ln xmlns:a="http://schemas.openxmlformats.org/drawingml/2006/main" w="0">
-            <a:noFill/>
-          </a:ln>
-        </p:spPr>
-        <p:txBody>
-          <a:bodyPr xmlns:a="http://schemas.openxmlformats.org/drawingml/2006/main" lIns="0" tIns="0" rIns="0" bIns="0" anchor="t"/>
-          <a:lstStyle xmlns:a="http://schemas.openxmlformats.org/drawingml/2006/main"/>
-          <a:p xmlns:a="http://schemas.openxmlformats.org/drawingml/2006/main">
-            <a:pPr algn="ctr">
-              <a:lnSpc>
-                <a:spcPct val="118000"/>
-              </a:lnSpc>
-              <a:buNone/>
-              <a:defRPr sz="2000" b="1">
-                <a:solidFill>
-                  <a:srgbClr val="1F4D78"/>
-                </a:solidFill>
-                <a:latin typeface="微软雅黑"/>
-                <a:ea typeface="微软雅黑"/>
-                <a:cs typeface="微软雅黑"/>
-              </a:defRPr>
-            </a:pPr>
-            <a:r>
-              <a:rPr sz="2000" b="1">
-                <a:solidFill>
-                  <a:srgbClr val="1F4D78"/>
-                </a:solidFill>
-                <a:latin typeface="微软雅黑"/>
-                <a:ea typeface="微软雅黑"/>
-                <a:cs typeface="微软雅黑"/>
-              </a:rPr>
-              <a:t>固定工作流</a:t>
-            </a:r>
-          </a:p>
-        </p:txBody>
-      </p:sp>
-      <p:sp>
-        <p:nvSpPr>
-          <p:cNvPr id="14" name="tick-1">
-            <a:extLst xmlns:a="http://schemas.openxmlformats.org/drawingml/2006/main">
-              <a:ext uri="{FF2B5EF4-FFF2-40B4-BE49-F238E27FC236}">
-                <a16:creationId xmlns:a16="http://schemas.microsoft.com/office/drawing/2014/main" id="{2AB1DEB5-17B9-45AA-B5A4-AF69918F49F9}"/>
-              </a:ext>
-            </a:extLst>
-          </p:cNvPr>
-          <p:cNvSpPr>
-            <a:spLocks xmlns:a="http://schemas.openxmlformats.org/drawingml/2006/main" noGrp="1"/>
-          </p:cNvSpPr>
-          <p:nvPr/>
-        </p:nvSpPr>
-        <p:spPr>
-          <a:xfrm xmlns:a="http://schemas.openxmlformats.org/drawingml/2006/main">
-            <a:off x="3790950" y="2971800"/>
-            <a:ext cx="38100" cy="171450"/>
-          </a:xfrm>
-          <a:prstGeom xmlns:a="http://schemas.openxmlformats.org/drawingml/2006/main" prst="rect">
-            <a:avLst/>
-          </a:prstGeom>
-          <a:solidFill xmlns:a="http://schemas.openxmlformats.org/drawingml/2006/main">
-            <a:srgbClr val="1F4D78"/>
-          </a:solidFill>
-          <a:ln xmlns:a="http://schemas.openxmlformats.org/drawingml/2006/main" w="0">
-            <a:noFill/>
-          </a:ln>
-        </p:spPr>
-      </p:sp>
-      <p:sp>
-        <p:nvSpPr>
-          <p:cNvPr id="15" name="mode-2">
-            <a:extLst xmlns:a="http://schemas.openxmlformats.org/drawingml/2006/main">
-              <a:ext uri="{FF2B5EF4-FFF2-40B4-BE49-F238E27FC236}">
-                <a16:creationId xmlns:a16="http://schemas.microsoft.com/office/drawing/2014/main" id="{A128DF47-4086-4498-8BC0-5CC5E60C7859}"/>
-              </a:ext>
-            </a:extLst>
-          </p:cNvPr>
-          <p:cNvSpPr>
-            <a:spLocks xmlns:a="http://schemas.openxmlformats.org/drawingml/2006/main" noGrp="1"/>
-          </p:cNvSpPr>
-          <p:nvPr/>
-        </p:nvSpPr>
-        <p:spPr>
-          <a:xfrm xmlns:a="http://schemas.openxmlformats.org/drawingml/2006/main">
-            <a:off x="5286375" y="2381250"/>
-            <a:ext cx="1809750" cy="523875"/>
-          </a:xfrm>
-          <a:prstGeom xmlns:a="http://schemas.openxmlformats.org/drawingml/2006/main" prst="rect">
-            <a:avLst/>
-          </a:prstGeom>
-          <a:noFill xmlns:a="http://schemas.openxmlformats.org/drawingml/2006/main"/>
-          <a:ln xmlns:a="http://schemas.openxmlformats.org/drawingml/2006/main" w="0">
-            <a:noFill/>
-          </a:ln>
-        </p:spPr>
-        <p:txBody>
-          <a:bodyPr xmlns:a="http://schemas.openxmlformats.org/drawingml/2006/main" lIns="0" tIns="0" rIns="0" bIns="0" anchor="t"/>
-          <a:lstStyle xmlns:a="http://schemas.openxmlformats.org/drawingml/2006/main"/>
-          <a:p xmlns:a="http://schemas.openxmlformats.org/drawingml/2006/main">
-            <a:pPr algn="ctr">
-              <a:lnSpc>
-                <a:spcPct val="118000"/>
-              </a:lnSpc>
-              <a:buNone/>
-              <a:defRPr sz="2000" b="1">
-                <a:solidFill>
-                  <a:srgbClr val="1F4D78"/>
-                </a:solidFill>
-                <a:latin typeface="微软雅黑"/>
-                <a:ea typeface="微软雅黑"/>
-                <a:cs typeface="微软雅黑"/>
-              </a:defRPr>
-            </a:pPr>
-            <a:r>
-              <a:rPr sz="2000" b="1">
-                <a:solidFill>
-                  <a:srgbClr val="1F4D78"/>
-                </a:solidFill>
-                <a:latin typeface="微软雅黑"/>
-                <a:ea typeface="微软雅黑"/>
-                <a:cs typeface="微软雅黑"/>
-              </a:rPr>
-              <a:t>路由 / 并行</a:t>
-            </a:r>
-          </a:p>
-        </p:txBody>
-      </p:sp>
-      <p:sp>
-        <p:nvSpPr>
-          <p:cNvPr id="16" name="tick-2">
-            <a:extLst xmlns:a="http://schemas.openxmlformats.org/drawingml/2006/main">
-              <a:ext uri="{FF2B5EF4-FFF2-40B4-BE49-F238E27FC236}">
-                <a16:creationId xmlns:a16="http://schemas.microsoft.com/office/drawing/2014/main" id="{8E2EC150-7F51-4732-B5E3-08A804A2E6B1}"/>
-              </a:ext>
-            </a:extLst>
-          </p:cNvPr>
-          <p:cNvSpPr>
-            <a:spLocks xmlns:a="http://schemas.openxmlformats.org/drawingml/2006/main" noGrp="1"/>
-          </p:cNvSpPr>
-          <p:nvPr/>
-        </p:nvSpPr>
-        <p:spPr>
-          <a:xfrm xmlns:a="http://schemas.openxmlformats.org/drawingml/2006/main">
-            <a:off x="6172200" y="2971800"/>
-            <a:ext cx="38100" cy="171450"/>
-          </a:xfrm>
-          <a:prstGeom xmlns:a="http://schemas.openxmlformats.org/drawingml/2006/main" prst="rect">
-            <a:avLst/>
-          </a:prstGeom>
-          <a:solidFill xmlns:a="http://schemas.openxmlformats.org/drawingml/2006/main">
-            <a:srgbClr val="1F4D78"/>
-          </a:solidFill>
-          <a:ln xmlns:a="http://schemas.openxmlformats.org/drawingml/2006/main" w="0">
-            <a:noFill/>
-          </a:ln>
-        </p:spPr>
-      </p:sp>
-      <p:sp>
-        <p:nvSpPr>
-          <p:cNvPr id="17" name="mode-3">
-            <a:extLst xmlns:a="http://schemas.openxmlformats.org/drawingml/2006/main">
-              <a:ext uri="{FF2B5EF4-FFF2-40B4-BE49-F238E27FC236}">
-                <a16:creationId xmlns:a16="http://schemas.microsoft.com/office/drawing/2014/main" id="{B43F6BD1-46DF-492E-8EEF-98F6A3D0AA14}"/>
-              </a:ext>
-            </a:extLst>
-          </p:cNvPr>
-          <p:cNvSpPr>
-            <a:spLocks xmlns:a="http://schemas.openxmlformats.org/drawingml/2006/main" noGrp="1"/>
-          </p:cNvSpPr>
-          <p:nvPr/>
-        </p:nvSpPr>
-        <p:spPr>
-          <a:xfrm xmlns:a="http://schemas.openxmlformats.org/drawingml/2006/main">
-            <a:off x="7667625" y="2381250"/>
-            <a:ext cx="1809750" cy="523875"/>
-          </a:xfrm>
-          <a:prstGeom xmlns:a="http://schemas.openxmlformats.org/drawingml/2006/main" prst="rect">
-            <a:avLst/>
-          </a:prstGeom>
-          <a:noFill xmlns:a="http://schemas.openxmlformats.org/drawingml/2006/main"/>
-          <a:ln xmlns:a="http://schemas.openxmlformats.org/drawingml/2006/main" w="0">
-            <a:noFill/>
-          </a:ln>
-        </p:spPr>
-        <p:txBody>
-          <a:bodyPr xmlns:a="http://schemas.openxmlformats.org/drawingml/2006/main" lIns="0" tIns="0" rIns="0" bIns="0" anchor="t"/>
-          <a:lstStyle xmlns:a="http://schemas.openxmlformats.org/drawingml/2006/main"/>
-          <a:p xmlns:a="http://schemas.openxmlformats.org/drawingml/2006/main">
-            <a:pPr algn="ctr">
-              <a:lnSpc>
-                <a:spcPct val="118000"/>
-              </a:lnSpc>
-              <a:buNone/>
-              <a:defRPr sz="2000" b="1">
+              <a:defRPr sz="2400" b="1">
                 <a:solidFill>
                   <a:srgbClr val="C8161E"/>
                 </a:solidFill>
@@ -21062,7 +21560,7 @@
               </a:defRPr>
             </a:pPr>
             <a:r>
-              <a:rPr sz="2000" b="1">
+              <a:rPr sz="2400" b="1">
                 <a:solidFill>
                   <a:srgbClr val="C8161E"/>
                 </a:solidFill>
@@ -21070,185 +21568,7 @@
                 <a:ea typeface="微软雅黑"/>
                 <a:cs typeface="微软雅黑"/>
               </a:rPr>
-              <a:t>Agent</a:t>
-            </a:r>
-          </a:p>
-        </p:txBody>
-      </p:sp>
-      <p:sp>
-        <p:nvSpPr>
-          <p:cNvPr id="18" name="tick-3">
-            <a:extLst xmlns:a="http://schemas.openxmlformats.org/drawingml/2006/main">
-              <a:ext uri="{FF2B5EF4-FFF2-40B4-BE49-F238E27FC236}">
-                <a16:creationId xmlns:a16="http://schemas.microsoft.com/office/drawing/2014/main" id="{233B2A0C-EEB6-4328-8E89-AB5BD1A7C267}"/>
-              </a:ext>
-            </a:extLst>
-          </p:cNvPr>
-          <p:cNvSpPr>
-            <a:spLocks xmlns:a="http://schemas.openxmlformats.org/drawingml/2006/main" noGrp="1"/>
-          </p:cNvSpPr>
-          <p:nvPr/>
-        </p:nvSpPr>
-        <p:spPr>
-          <a:xfrm xmlns:a="http://schemas.openxmlformats.org/drawingml/2006/main">
-            <a:off x="8553450" y="2971800"/>
-            <a:ext cx="38100" cy="171450"/>
-          </a:xfrm>
-          <a:prstGeom xmlns:a="http://schemas.openxmlformats.org/drawingml/2006/main" prst="rect">
-            <a:avLst/>
-          </a:prstGeom>
-          <a:solidFill xmlns:a="http://schemas.openxmlformats.org/drawingml/2006/main">
-            <a:srgbClr val="C8161E"/>
-          </a:solidFill>
-          <a:ln xmlns:a="http://schemas.openxmlformats.org/drawingml/2006/main" w="0">
-            <a:noFill/>
-          </a:ln>
-        </p:spPr>
-      </p:sp>
-      <p:sp>
-        <p:nvSpPr>
-          <p:cNvPr id="19" name="mode-4">
-            <a:extLst xmlns:a="http://schemas.openxmlformats.org/drawingml/2006/main">
-              <a:ext uri="{FF2B5EF4-FFF2-40B4-BE49-F238E27FC236}">
-                <a16:creationId xmlns:a16="http://schemas.microsoft.com/office/drawing/2014/main" id="{63CC1EB5-2E2B-46E0-93D9-479441D89320}"/>
-              </a:ext>
-            </a:extLst>
-          </p:cNvPr>
-          <p:cNvSpPr>
-            <a:spLocks xmlns:a="http://schemas.openxmlformats.org/drawingml/2006/main" noGrp="1"/>
-          </p:cNvSpPr>
-          <p:nvPr/>
-        </p:nvSpPr>
-        <p:spPr>
-          <a:xfrm xmlns:a="http://schemas.openxmlformats.org/drawingml/2006/main">
-            <a:off x="10048875" y="2381250"/>
-            <a:ext cx="1809750" cy="523875"/>
-          </a:xfrm>
-          <a:prstGeom xmlns:a="http://schemas.openxmlformats.org/drawingml/2006/main" prst="rect">
-            <a:avLst/>
-          </a:prstGeom>
-          <a:noFill xmlns:a="http://schemas.openxmlformats.org/drawingml/2006/main"/>
-          <a:ln xmlns:a="http://schemas.openxmlformats.org/drawingml/2006/main" w="0">
-            <a:noFill/>
-          </a:ln>
-        </p:spPr>
-        <p:txBody>
-          <a:bodyPr xmlns:a="http://schemas.openxmlformats.org/drawingml/2006/main" lIns="0" tIns="0" rIns="0" bIns="0" anchor="t"/>
-          <a:lstStyle xmlns:a="http://schemas.openxmlformats.org/drawingml/2006/main"/>
-          <a:p xmlns:a="http://schemas.openxmlformats.org/drawingml/2006/main">
-            <a:pPr algn="ctr">
-              <a:lnSpc>
-                <a:spcPct val="118000"/>
-              </a:lnSpc>
-              <a:buNone/>
-              <a:defRPr sz="2000" b="1">
-                <a:solidFill>
-                  <a:srgbClr val="C8161E"/>
-                </a:solidFill>
-                <a:latin typeface="微软雅黑"/>
-                <a:ea typeface="微软雅黑"/>
-                <a:cs typeface="微软雅黑"/>
-              </a:defRPr>
-            </a:pPr>
-            <a:r>
-              <a:rPr sz="2000" b="1">
-                <a:solidFill>
-                  <a:srgbClr val="C8161E"/>
-                </a:solidFill>
-                <a:latin typeface="微软雅黑"/>
-                <a:ea typeface="微软雅黑"/>
-                <a:cs typeface="微软雅黑"/>
-              </a:rPr>
-              <a:t>复杂系统</a:t>
-            </a:r>
-          </a:p>
-        </p:txBody>
-      </p:sp>
-      <p:sp>
-        <p:nvSpPr>
-          <p:cNvPr id="20" name="tick-4">
-            <a:extLst xmlns:a="http://schemas.openxmlformats.org/drawingml/2006/main">
-              <a:ext uri="{FF2B5EF4-FFF2-40B4-BE49-F238E27FC236}">
-                <a16:creationId xmlns:a16="http://schemas.microsoft.com/office/drawing/2014/main" id="{E2A3A5CC-17E1-498B-A4C9-8E63284D4E4B}"/>
-              </a:ext>
-            </a:extLst>
-          </p:cNvPr>
-          <p:cNvSpPr>
-            <a:spLocks xmlns:a="http://schemas.openxmlformats.org/drawingml/2006/main" noGrp="1"/>
-          </p:cNvSpPr>
-          <p:nvPr/>
-        </p:nvSpPr>
-        <p:spPr>
-          <a:xfrm xmlns:a="http://schemas.openxmlformats.org/drawingml/2006/main">
-            <a:off x="10934700" y="2971800"/>
-            <a:ext cx="38100" cy="171450"/>
-          </a:xfrm>
-          <a:prstGeom xmlns:a="http://schemas.openxmlformats.org/drawingml/2006/main" prst="rect">
-            <a:avLst/>
-          </a:prstGeom>
-          <a:solidFill xmlns:a="http://schemas.openxmlformats.org/drawingml/2006/main">
-            <a:srgbClr val="C8161E"/>
-          </a:solidFill>
-          <a:ln xmlns:a="http://schemas.openxmlformats.org/drawingml/2006/main" w="0">
-            <a:noFill/>
-          </a:ln>
-        </p:spPr>
-      </p:sp>
-      <p:sp>
-        <p:nvSpPr>
-          <p:cNvPr id="21" name="axis-label">
-            <a:extLst xmlns:a="http://schemas.openxmlformats.org/drawingml/2006/main">
-              <a:ext uri="{FF2B5EF4-FFF2-40B4-BE49-F238E27FC236}">
-                <a16:creationId xmlns:a16="http://schemas.microsoft.com/office/drawing/2014/main" id="{22425B81-F3A0-4778-86FA-AD5EB43089D5}"/>
-              </a:ext>
-            </a:extLst>
-          </p:cNvPr>
-          <p:cNvSpPr>
-            <a:spLocks xmlns:a="http://schemas.openxmlformats.org/drawingml/2006/main" noGrp="1"/>
-          </p:cNvSpPr>
-          <p:nvPr/>
-        </p:nvSpPr>
-        <p:spPr>
-          <a:xfrm xmlns:a="http://schemas.openxmlformats.org/drawingml/2006/main">
-            <a:off x="2571750" y="3714750"/>
-            <a:ext cx="7239000" cy="571500"/>
-          </a:xfrm>
-          <a:prstGeom xmlns:a="http://schemas.openxmlformats.org/drawingml/2006/main" prst="rect">
-            <a:avLst/>
-          </a:prstGeom>
-          <a:noFill xmlns:a="http://schemas.openxmlformats.org/drawingml/2006/main"/>
-          <a:ln xmlns:a="http://schemas.openxmlformats.org/drawingml/2006/main" w="0">
-            <a:noFill/>
-          </a:ln>
-        </p:spPr>
-        <p:txBody>
-          <a:bodyPr xmlns:a="http://schemas.openxmlformats.org/drawingml/2006/main" lIns="0" tIns="0" rIns="0" bIns="0" anchor="t"/>
-          <a:lstStyle xmlns:a="http://schemas.openxmlformats.org/drawingml/2006/main"/>
-          <a:p xmlns:a="http://schemas.openxmlformats.org/drawingml/2006/main">
-            <a:pPr algn="ctr">
-              <a:lnSpc>
-                <a:spcPct val="118000"/>
-              </a:lnSpc>
-              <a:buNone/>
-              <a:defRPr sz="2400" b="1">
-                <a:solidFill>
-                  <a:srgbClr val="C8161E"/>
-                </a:solidFill>
-                <a:latin typeface="微软雅黑"/>
-                <a:ea typeface="微软雅黑"/>
-                <a:cs typeface="微软雅黑"/>
-              </a:defRPr>
-            </a:pPr>
-            <a:r>
-              <a:rPr sz="2400" b="1">
-                <a:solidFill>
-                  <a:srgbClr val="C8161E"/>
-                </a:solidFill>
-                <a:latin typeface="微软雅黑"/>
-                <a:ea typeface="微软雅黑"/>
-                <a:cs typeface="微软雅黑"/>
-              </a:rPr>
-              <a:t>独立 Evals、预算、停止与人工确认要求增强 →</a:t>
+              <a:t>单次训练预算固定 ≠ 外层总预算固定</a:t>
             </a:r>
           </a:p>
         </p:txBody>
@@ -21316,7 +21636,7 @@
                 <a:ea typeface="微软雅黑"/>
                 <a:cs typeface="微软雅黑"/>
               </a:rPr>
-              <a:t>一次运行由同一 run ID 串起</a:t>
+              <a:t>实验账本连接代码、指标与处置</a:t>
             </a:r>
             <a:endParaRPr/>
           </a:p>
@@ -21382,14 +21702,14 @@
       </p:sp>
       <p:pic>
         <p:nvPicPr>
-          <p:cNvPr id="24" name=""/>
+          <p:cNvPr id="25" name=""/>
           <p:cNvPicPr>
             <a:picLocks xmlns:a="http://schemas.openxmlformats.org/drawingml/2006/main" noChangeAspect="1"/>
           </p:cNvPicPr>
           <p:nvPr/>
         </p:nvPicPr>
         <p:blipFill>
-          <a:blip xmlns:r="http://schemas.openxmlformats.org/officeDocument/2006/relationships" xmlns:a="http://schemas.openxmlformats.org/drawingml/2006/main" r:embed="Raadeeb33551a450c"/>
+          <a:blip xmlns:r="http://schemas.openxmlformats.org/officeDocument/2006/relationships" xmlns:a="http://schemas.openxmlformats.org/drawingml/2006/main" r:embed="R7c3003461f3d4580"/>
           <a:stretch xmlns:a="http://schemas.openxmlformats.org/drawingml/2006/main"/>
         </p:blipFill>
         <p:spPr>
@@ -21456,7 +21776,7 @@
                 <a:ea typeface="微软雅黑"/>
                 <a:cs typeface="微软雅黑"/>
               </a:rPr>
-              <a:t>一次运行由同一 run ID 串起</a:t>
+              <a:t>实验账本连接代码、指标与处置</a:t>
             </a:r>
           </a:p>
         </p:txBody>
@@ -21515,7 +21835,7 @@
                 <a:ea typeface="微软雅黑"/>
                 <a:cs typeface="微软雅黑"/>
               </a:rPr>
-              <a:t>来源：lesson-12/slides.md；课程工件与讲义见 speaker notes</a:t>
+              <a:t>来源：karpathy/autoresearch · program.md · commit 228791f；2026-09-13 核验</a:t>
             </a:r>
           </a:p>
         </p:txBody>
@@ -21634,7 +21954,7 @@
                 <a:ea typeface="微软雅黑"/>
                 <a:cs typeface="微软雅黑"/>
               </a:rPr>
-              <a:t>workflow/runs/001/</a:t>
+              <a:t>results.tsv 字段 · 228791f</a:t>
             </a:r>
           </a:p>
         </p:txBody>
@@ -21693,7 +22013,7 @@
                 <a:ea typeface="Consolas"/>
                 <a:cs typeface="Consolas"/>
               </a:rPr>
-              <a:t>input-snapshot/</a:t>
+              <a:t>commit      代码版本</a:t>
             </a:r>
           </a:p>
         </p:txBody>
@@ -21752,7 +22072,7 @@
                 <a:ea typeface="Consolas"/>
                 <a:cs typeface="Consolas"/>
               </a:rPr>
-              <a:t>contract.md</a:t>
+              <a:t>val_bpb     评价值</a:t>
             </a:r>
           </a:p>
         </p:txBody>
@@ -21811,7 +22131,7 @@
                 <a:ea typeface="Consolas"/>
                 <a:cs typeface="Consolas"/>
               </a:rPr>
-              <a:t>tool-calls.log</a:t>
+              <a:t>memory_gb   峰值显存</a:t>
             </a:r>
           </a:p>
         </p:txBody>
@@ -21870,7 +22190,7 @@
                 <a:ea typeface="Consolas"/>
                 <a:cs typeface="Consolas"/>
               </a:rPr>
-              <a:t>diff.patch</a:t>
+              <a:t>status      keep / discard / crash</a:t>
             </a:r>
           </a:p>
         </p:txBody>
@@ -21929,7 +22249,7 @@
                 <a:ea typeface="Consolas"/>
                 <a:cs typeface="Consolas"/>
               </a:rPr>
-              <a:t>outputs.jsonl</a:t>
+              <a:t>description 本次尝试</a:t>
             </a:r>
           </a:p>
         </p:txBody>
@@ -21988,7 +22308,7 @@
                 <a:ea typeface="Consolas"/>
                 <a:cs typeface="Consolas"/>
               </a:rPr>
-              <a:t>review.md</a:t>
+              <a:t>run.log     本次运行详情</a:t>
             </a:r>
           </a:p>
         </p:txBody>
@@ -22047,7 +22367,7 @@
                 <a:ea typeface="Consolas"/>
                 <a:cs typeface="Consolas"/>
               </a:rPr>
-              <a:t>decision.md</a:t>
+              <a:t>课程迁移：日志绑定各自 run ID</a:t>
             </a:r>
           </a:p>
         </p:txBody>
@@ -22106,7 +22426,7 @@
                 <a:ea typeface="微软雅黑"/>
                 <a:cs typeface="微软雅黑"/>
               </a:rPr>
-              <a:t>输入</a:t>
+              <a:t>回退代码</a:t>
             </a:r>
           </a:p>
           <a:p xmlns:a="http://schemas.openxmlformats.org/drawingml/2006/main">
@@ -22133,7 +22453,7 @@
                 <a:ea typeface="微软雅黑"/>
                 <a:cs typeface="微软雅黑"/>
               </a:rPr>
-              <a:t>↓</a:t>
+              <a:t/>
             </a:r>
           </a:p>
           <a:p xmlns:a="http://schemas.openxmlformats.org/drawingml/2006/main">
@@ -22160,7 +22480,7 @@
                 <a:ea typeface="微软雅黑"/>
                 <a:cs typeface="微软雅黑"/>
               </a:rPr>
-              <a:t>动作</a:t>
+              <a:t>保留账本</a:t>
             </a:r>
           </a:p>
           <a:p xmlns:a="http://schemas.openxmlformats.org/drawingml/2006/main">
@@ -22187,7 +22507,7 @@
                 <a:ea typeface="微软雅黑"/>
                 <a:cs typeface="微软雅黑"/>
               </a:rPr>
-              <a:t>↓</a:t>
+              <a:t/>
             </a:r>
           </a:p>
           <a:p xmlns:a="http://schemas.openxmlformats.org/drawingml/2006/main">
@@ -22214,7 +22534,7 @@
                 <a:ea typeface="微软雅黑"/>
                 <a:cs typeface="微软雅黑"/>
               </a:rPr>
-              <a:t>结果</a:t>
+              <a:t>保留失败</a:t>
             </a:r>
           </a:p>
           <a:p xmlns:a="http://schemas.openxmlformats.org/drawingml/2006/main">
@@ -22241,7 +22561,7 @@
                 <a:ea typeface="微软雅黑"/>
                 <a:cs typeface="微软雅黑"/>
               </a:rPr>
-              <a:t>↓</a:t>
+              <a:t/>
             </a:r>
           </a:p>
           <a:p xmlns:a="http://schemas.openxmlformats.org/drawingml/2006/main">
@@ -22336,7 +22656,7 @@
                 <a:ea typeface="微软雅黑"/>
                 <a:cs typeface="微软雅黑"/>
               </a:rPr>
-              <a:t>执行器不能成为唯一裁判</a:t>
+              <a:t>固定评价函数与独立评价端</a:t>
             </a:r>
             <a:endParaRPr/>
           </a:p>
@@ -22402,14 +22722,14 @@
       </p:sp>
       <p:pic>
         <p:nvPicPr>
-          <p:cNvPr id="29" name=""/>
+          <p:cNvPr id="31" name=""/>
           <p:cNvPicPr>
             <a:picLocks xmlns:a="http://schemas.openxmlformats.org/drawingml/2006/main" noChangeAspect="1"/>
           </p:cNvPicPr>
           <p:nvPr/>
         </p:nvPicPr>
         <p:blipFill>
-          <a:blip xmlns:r="http://schemas.openxmlformats.org/officeDocument/2006/relationships" xmlns:a="http://schemas.openxmlformats.org/drawingml/2006/main" r:embed="R9e5832739d884383"/>
+          <a:blip xmlns:r="http://schemas.openxmlformats.org/officeDocument/2006/relationships" xmlns:a="http://schemas.openxmlformats.org/drawingml/2006/main" r:embed="R4ae6e9ea8d8343bf"/>
           <a:stretch xmlns:a="http://schemas.openxmlformats.org/drawingml/2006/main"/>
         </p:blipFill>
         <p:spPr>
@@ -22476,7 +22796,7 @@
                 <a:ea typeface="微软雅黑"/>
                 <a:cs typeface="微软雅黑"/>
               </a:rPr>
-              <a:t>执行器不能成为唯一裁判</a:t>
+              <a:t>固定评价函数与独立评价端</a:t>
             </a:r>
           </a:p>
         </p:txBody>
@@ -22535,7 +22855,7 @@
                 <a:ea typeface="微软雅黑"/>
                 <a:cs typeface="微软雅黑"/>
               </a:rPr>
-              <a:t>来源：lesson-12/slides.md；课程工件与讲义见 speaker notes</a:t>
+              <a:t>来源：karpathy/autoresearch · program.md · commit 228791f；2026-09-13 核验</a:t>
             </a:r>
           </a:p>
         </p:txBody>
@@ -23325,8 +23645,8 @@
         </p:nvSpPr>
         <p:spPr>
           <a:xfrm xmlns:a="http://schemas.openxmlformats.org/drawingml/2006/main">
-            <a:off x="2190750" y="4476750"/>
-            <a:ext cx="7810500" cy="571500"/>
+            <a:off x="762000" y="4572000"/>
+            <a:ext cx="10668000" cy="619125"/>
           </a:xfrm>
           <a:prstGeom xmlns:a="http://schemas.openxmlformats.org/drawingml/2006/main" prst="rect">
             <a:avLst/>
@@ -23355,7 +23675,7 @@
               </a:defRPr>
             </a:pPr>
             <a:r>
-              <a:rPr sz="2400" b="1">
+              <a:rPr sz="2200" b="1">
                 <a:solidFill>
                   <a:srgbClr val="C8161E"/>
                 </a:solidFill>
@@ -23363,7 +23683,66 @@
                 <a:ea typeface="微软雅黑"/>
                 <a:cs typeface="微软雅黑"/>
               </a:rPr>
-              <a:t>评价器只读；任何协议变更必须人工确认。</a:t>
+              <a:t>阅读卡执行器禁止读 gold；独立评价端在生成后评分。</a:t>
+            </a:r>
+          </a:p>
+        </p:txBody>
+      </p:sp>
+      <p:sp>
+        <p:nvSpPr>
+          <p:cNvPr id="27" name="case-boundary">
+            <a:extLst xmlns:a="http://schemas.openxmlformats.org/drawingml/2006/main">
+              <a:ext uri="{FF2B5EF4-FFF2-40B4-BE49-F238E27FC236}">
+                <a16:creationId xmlns:a16="http://schemas.microsoft.com/office/drawing/2014/main" id="{8641FB0D-FA35-40C9-A039-9F5E64249C6F}"/>
+              </a:ext>
+            </a:extLst>
+          </p:cNvPr>
+          <p:cNvSpPr>
+            <a:spLocks xmlns:a="http://schemas.openxmlformats.org/drawingml/2006/main" noGrp="1"/>
+          </p:cNvSpPr>
+          <p:nvPr/>
+        </p:nvSpPr>
+        <p:spPr>
+          <a:xfrm xmlns:a="http://schemas.openxmlformats.org/drawingml/2006/main">
+            <a:off x="857250" y="1285875"/>
+            <a:ext cx="10477500" cy="428625"/>
+          </a:xfrm>
+          <a:prstGeom xmlns:a="http://schemas.openxmlformats.org/drawingml/2006/main" prst="rect">
+            <a:avLst/>
+          </a:prstGeom>
+          <a:noFill xmlns:a="http://schemas.openxmlformats.org/drawingml/2006/main"/>
+          <a:ln xmlns:a="http://schemas.openxmlformats.org/drawingml/2006/main" w="0">
+            <a:noFill/>
+          </a:ln>
+        </p:spPr>
+        <p:txBody>
+          <a:bodyPr xmlns:a="http://schemas.openxmlformats.org/drawingml/2006/main" lIns="0" tIns="0" rIns="0" bIns="0" anchor="t"/>
+          <a:lstStyle xmlns:a="http://schemas.openxmlformats.org/drawingml/2006/main"/>
+          <a:p xmlns:a="http://schemas.openxmlformats.org/drawingml/2006/main">
+            <a:pPr algn="l">
+              <a:lnSpc>
+                <a:spcPct val="118000"/>
+              </a:lnSpc>
+              <a:buNone/>
+              <a:defRPr sz="2200" b="0">
+                <a:solidFill>
+                  <a:srgbClr val="1F4D78"/>
+                </a:solidFill>
+                <a:latin typeface="微软雅黑"/>
+                <a:ea typeface="微软雅黑"/>
+                <a:cs typeface="微软雅黑"/>
+              </a:defRPr>
+            </a:pPr>
+            <a:r>
+              <a:rPr sz="2200" b="0">
+                <a:solidFill>
+                  <a:srgbClr val="1F4D78"/>
+                </a:solidFill>
+                <a:latin typeface="微软雅黑"/>
+                <a:ea typeface="微软雅黑"/>
+                <a:cs typeface="微软雅黑"/>
+              </a:rPr>
+              <a:t>AutoResearch：只读 prepare.py 固定评价函数</a:t>
             </a:r>
           </a:p>
         </p:txBody>
@@ -23497,14 +23876,14 @@
       </p:sp>
       <p:pic>
         <p:nvPicPr>
-          <p:cNvPr id="21" name=""/>
+          <p:cNvPr id="22" name=""/>
           <p:cNvPicPr>
             <a:picLocks xmlns:a="http://schemas.openxmlformats.org/drawingml/2006/main" noChangeAspect="1"/>
           </p:cNvPicPr>
           <p:nvPr/>
         </p:nvPicPr>
         <p:blipFill>
-          <a:blip xmlns:r="http://schemas.openxmlformats.org/officeDocument/2006/relationships" xmlns:a="http://schemas.openxmlformats.org/drawingml/2006/main" r:embed="R2d9dc1587bc442cd"/>
+          <a:blip xmlns:r="http://schemas.openxmlformats.org/officeDocument/2006/relationships" xmlns:a="http://schemas.openxmlformats.org/drawingml/2006/main" r:embed="R115fdea9531b488c"/>
           <a:stretch xmlns:a="http://schemas.openxmlformats.org/drawingml/2006/main"/>
         </p:blipFill>
         <p:spPr>
@@ -23681,8 +24060,8 @@
         </p:nvSpPr>
         <p:spPr>
           <a:xfrm xmlns:a="http://schemas.openxmlformats.org/drawingml/2006/main">
-            <a:off x="1619250" y="1524000"/>
-            <a:ext cx="3333750" cy="14288"/>
+            <a:off x="1619250" y="1714500"/>
+            <a:ext cx="14288" cy="3143250"/>
           </a:xfrm>
           <a:prstGeom xmlns:a="http://schemas.openxmlformats.org/drawingml/2006/main" prst="rect">
             <a:avLst/>
@@ -23770,8 +24149,8 @@
         </p:nvSpPr>
         <p:spPr>
           <a:xfrm xmlns:a="http://schemas.openxmlformats.org/drawingml/2006/main">
-            <a:off x="523875" y="1428750"/>
-            <a:ext cx="1143000" cy="476250"/>
+            <a:off x="428625" y="1143000"/>
+            <a:ext cx="2286000" cy="428625"/>
           </a:xfrm>
           <a:prstGeom xmlns:a="http://schemas.openxmlformats.org/drawingml/2006/main" prst="rect">
             <a:avLst/>
@@ -23808,7 +24187,7 @@
                 <a:ea typeface="微软雅黑"/>
                 <a:cs typeface="微软雅黑"/>
               </a:rPr>
-              <a:t>判断风险高</a:t>
+              <a:t>判断风险 ↑</a:t>
             </a:r>
           </a:p>
         </p:txBody>

--- a/lessons/lesson-12/slides.pptx
+++ b/lessons/lesson-12/slides.pptx
@@ -2,33 +2,33 @@
 <file path=ppt/presentation.xml><?xml version="1.0" encoding="utf-8"?>
 <p:presentation xmlns:p="http://schemas.openxmlformats.org/presentationml/2006/main">
   <p:sldMasterIdLst>
-    <p:sldMasterId xmlns:r="http://schemas.openxmlformats.org/officeDocument/2006/relationships" id="2147483648" r:id="Rcb46433200ef4fec"/>
+    <p:sldMasterId xmlns:r="http://schemas.openxmlformats.org/officeDocument/2006/relationships" id="2147483648" r:id="Rc044832fd32c4338"/>
   </p:sldMasterIdLst>
   <p:notesMasterIdLst>
-    <p:notesMasterId xmlns:r="http://schemas.openxmlformats.org/officeDocument/2006/relationships" r:id="R7db7585302d149b6"/>
+    <p:notesMasterId xmlns:r="http://schemas.openxmlformats.org/officeDocument/2006/relationships" r:id="R3df13123ec034bf0"/>
   </p:notesMasterIdLst>
   <p:sldIdLst>
-    <p:sldId xmlns:r="http://schemas.openxmlformats.org/officeDocument/2006/relationships" id="256" r:id="R71ff44f29d40494d"/>
-    <p:sldId xmlns:r="http://schemas.openxmlformats.org/officeDocument/2006/relationships" id="257" r:id="R2f5823493b3442cb"/>
-    <p:sldId xmlns:r="http://schemas.openxmlformats.org/officeDocument/2006/relationships" id="258" r:id="Rc01188d1e5524e1b"/>
-    <p:sldId xmlns:r="http://schemas.openxmlformats.org/officeDocument/2006/relationships" id="259" r:id="R036f4b22f6ef43ec"/>
-    <p:sldId xmlns:r="http://schemas.openxmlformats.org/officeDocument/2006/relationships" id="260" r:id="R6ed508816cdd443a"/>
-    <p:sldId xmlns:r="http://schemas.openxmlformats.org/officeDocument/2006/relationships" id="261" r:id="Rcd93e8f319c04677"/>
-    <p:sldId xmlns:r="http://schemas.openxmlformats.org/officeDocument/2006/relationships" id="262" r:id="R388b57c3061d4225"/>
-    <p:sldId xmlns:r="http://schemas.openxmlformats.org/officeDocument/2006/relationships" id="263" r:id="Rccf2a411741c4747"/>
-    <p:sldId xmlns:r="http://schemas.openxmlformats.org/officeDocument/2006/relationships" id="264" r:id="Rb2c4947c48b44b17"/>
-    <p:sldId xmlns:r="http://schemas.openxmlformats.org/officeDocument/2006/relationships" id="265" r:id="Ra1897e409b5646e7"/>
-    <p:sldId xmlns:r="http://schemas.openxmlformats.org/officeDocument/2006/relationships" id="266" r:id="R4f8f40060156492c"/>
-    <p:sldId xmlns:r="http://schemas.openxmlformats.org/officeDocument/2006/relationships" id="267" r:id="Ra9710fbd59c84c53"/>
-    <p:sldId xmlns:r="http://schemas.openxmlformats.org/officeDocument/2006/relationships" id="268" r:id="R60e8ff90fa3742ed"/>
-    <p:sldId xmlns:r="http://schemas.openxmlformats.org/officeDocument/2006/relationships" id="269" r:id="R604c7be4617a41c2"/>
-    <p:sldId xmlns:r="http://schemas.openxmlformats.org/officeDocument/2006/relationships" id="270" r:id="Ra4ca8eb32c3d405f"/>
-    <p:sldId xmlns:r="http://schemas.openxmlformats.org/officeDocument/2006/relationships" id="271" r:id="R1c9ff5b3f4ac432f"/>
-    <p:sldId xmlns:r="http://schemas.openxmlformats.org/officeDocument/2006/relationships" id="272" r:id="Rbd36ca720d8449a4"/>
-    <p:sldId xmlns:r="http://schemas.openxmlformats.org/officeDocument/2006/relationships" id="273" r:id="R717fe18d6bf843a7"/>
-    <p:sldId xmlns:r="http://schemas.openxmlformats.org/officeDocument/2006/relationships" id="274" r:id="Ra5de2e762e2e4746"/>
-    <p:sldId xmlns:r="http://schemas.openxmlformats.org/officeDocument/2006/relationships" id="275" r:id="R6a4b720591734639"/>
-    <p:sldId xmlns:r="http://schemas.openxmlformats.org/officeDocument/2006/relationships" id="276" r:id="R6483a7a13cdf4144"/>
+    <p:sldId xmlns:r="http://schemas.openxmlformats.org/officeDocument/2006/relationships" id="256" r:id="R6c1058ca65314493"/>
+    <p:sldId xmlns:r="http://schemas.openxmlformats.org/officeDocument/2006/relationships" id="257" r:id="R17c0727db6ed47de"/>
+    <p:sldId xmlns:r="http://schemas.openxmlformats.org/officeDocument/2006/relationships" id="258" r:id="R29d3bb0678264eb4"/>
+    <p:sldId xmlns:r="http://schemas.openxmlformats.org/officeDocument/2006/relationships" id="259" r:id="R2a9cda008d0f4e29"/>
+    <p:sldId xmlns:r="http://schemas.openxmlformats.org/officeDocument/2006/relationships" id="260" r:id="R987f2c9cf9eb4432"/>
+    <p:sldId xmlns:r="http://schemas.openxmlformats.org/officeDocument/2006/relationships" id="261" r:id="R213253aa9b0e4453"/>
+    <p:sldId xmlns:r="http://schemas.openxmlformats.org/officeDocument/2006/relationships" id="262" r:id="Ra563d764d58446fc"/>
+    <p:sldId xmlns:r="http://schemas.openxmlformats.org/officeDocument/2006/relationships" id="263" r:id="R098ec588b1e54499"/>
+    <p:sldId xmlns:r="http://schemas.openxmlformats.org/officeDocument/2006/relationships" id="264" r:id="Rfd39fee11bdb44ea"/>
+    <p:sldId xmlns:r="http://schemas.openxmlformats.org/officeDocument/2006/relationships" id="265" r:id="Rbd29d085acdd49d5"/>
+    <p:sldId xmlns:r="http://schemas.openxmlformats.org/officeDocument/2006/relationships" id="266" r:id="R9e222d2cc8464397"/>
+    <p:sldId xmlns:r="http://schemas.openxmlformats.org/officeDocument/2006/relationships" id="267" r:id="R99f26dfe6aee4c9e"/>
+    <p:sldId xmlns:r="http://schemas.openxmlformats.org/officeDocument/2006/relationships" id="268" r:id="R6961ac5762d548ad"/>
+    <p:sldId xmlns:r="http://schemas.openxmlformats.org/officeDocument/2006/relationships" id="269" r:id="Re2e3ccb59d9c41cd"/>
+    <p:sldId xmlns:r="http://schemas.openxmlformats.org/officeDocument/2006/relationships" id="270" r:id="R0a9cddc54aca4587"/>
+    <p:sldId xmlns:r="http://schemas.openxmlformats.org/officeDocument/2006/relationships" id="271" r:id="Rbb185ef4dcda4df8"/>
+    <p:sldId xmlns:r="http://schemas.openxmlformats.org/officeDocument/2006/relationships" id="272" r:id="Re53bf1434b1b437d"/>
+    <p:sldId xmlns:r="http://schemas.openxmlformats.org/officeDocument/2006/relationships" id="273" r:id="Rc06d3814418949be"/>
+    <p:sldId xmlns:r="http://schemas.openxmlformats.org/officeDocument/2006/relationships" id="274" r:id="R2e25fdbb8d614e8d"/>
+    <p:sldId xmlns:r="http://schemas.openxmlformats.org/officeDocument/2006/relationships" id="275" r:id="Rb0a9fcdb950e4447"/>
+    <p:sldId xmlns:r="http://schemas.openxmlformats.org/officeDocument/2006/relationships" id="276" r:id="Rbbd5d7580bc6456f"/>
   </p:sldIdLst>
   <p:sldSz cx="12192000" cy="6858000"/>
   <p:notesSz cx="6858000" cy="9144000"/>
@@ -408,6 +408,46 @@
           <a:lstStyle xmlns:a="http://schemas.openxmlformats.org/drawingml/2006/main"/>
           <a:p xmlns:a="http://schemas.openxmlformats.org/drawingml/2006/main">
             <a:r>
+              <a:t>页面：P01 第12讲 Agent/Skill 逻辑与自主 Research Workflow 设计</a:t>
+            </a:r>
+          </a:p>
+          <a:p xmlns:a="http://schemas.openxmlformats.org/drawingml/2006/main">
+            <a:r>
+              <a:t/>
+            </a:r>
+          </a:p>
+          <a:p xmlns:a="http://schemas.openxmlformats.org/drawingml/2006/main">
+            <a:r>
+              <a:t>讲义位置：本课讲义；见逐页母稿映射表</a:t>
+            </a:r>
+          </a:p>
+          <a:p xmlns:a="http://schemas.openxmlformats.org/drawingml/2006/main">
+            <a:r>
+              <a:t/>
+            </a:r>
+          </a:p>
+          <a:p xmlns:a="http://schemas.openxmlformats.org/drawingml/2006/main">
+            <a:r>
+              <a:t>屏显核对：</a:t>
+            </a:r>
+          </a:p>
+          <a:p xmlns:a="http://schemas.openxmlformats.org/drawingml/2006/main">
+            <a:r>
+              <a:t>- 第12讲 Agent/Skill 逻辑与自主 Research Workflow 设计</a:t>
+            </a:r>
+          </a:p>
+          <a:p xmlns:a="http://schemas.openxmlformats.org/drawingml/2006/main">
+            <a:r>
+              <a:t/>
+            </a:r>
+          </a:p>
+          <a:p xmlns:a="http://schemas.openxmlformats.org/drawingml/2006/main">
+            <a:r>
+              <a:t>教师讲述：</a:t>
+            </a:r>
+          </a:p>
+          <a:p xmlns:a="http://schemas.openxmlformats.org/drawingml/2006/main">
+            <a:r>
               <a:t>本课把第 10 课单次任务契约和第 11 课冻结执行队列升级为完整可审计工作流，第 13 课评价与复盘。封面仅呈现正式课名。开场请学生标出已有任务中一项尚未封装的状态。</a:t>
             </a:r>
           </a:p>
@@ -418,7 +458,12 @@
           </a:p>
           <a:p xmlns:a="http://schemas.openxmlformats.org/drawingml/2006/main">
             <a:r>
-              <a:t>学生动作：请学生举手：最近一次用 Agent 时，是否看过它的权限声明或停止条件？只听回答，不评价。</a:t>
+              <a:t>学生动作：</a:t>
+            </a:r>
+          </a:p>
+          <a:p xmlns:a="http://schemas.openxmlformats.org/drawingml/2006/main">
+            <a:r>
+              <a:t>请学生举手：最近一次用 Agent 时，是否看过它的权限声明或停止条件？只听回答，不评价。</a:t>
             </a:r>
           </a:p>
           <a:p xmlns:a="http://schemas.openxmlformats.org/drawingml/2006/main">
@@ -428,12 +473,57 @@
           </a:p>
           <a:p xmlns:a="http://schemas.openxmlformats.org/drawingml/2006/main">
             <a:r>
+              <a:t>来源与边界：</a:t>
+            </a:r>
+          </a:p>
+          <a:p xmlns:a="http://schemas.openxmlformats.org/drawingml/2006/main">
+            <a:r>
+              <a:t>课程定位以 [curriculum.md](../../course/curriculum.md) 第 4-5 条为准；[assignments.md](../../course/assignments.md) 验证门条件；[syllabus.md](../../course/syllabus.md) 第 12 课。</a:t>
+            </a:r>
+          </a:p>
+          <a:p xmlns:a="http://schemas.openxmlformats.org/drawingml/2006/main">
+            <a:r>
+              <a:t/>
+            </a:r>
+          </a:p>
+          <a:p xmlns:a="http://schemas.openxmlformats.org/drawingml/2006/main">
+            <a:r>
+              <a:t>---</a:t>
+            </a:r>
+          </a:p>
+          <a:p xmlns:a="http://schemas.openxmlformats.org/drawingml/2006/main">
+            <a:r>
+              <a:t/>
+            </a:r>
+          </a:p>
+          <a:p xmlns:a="http://schemas.openxmlformats.org/drawingml/2006/main">
+            <a:r>
               <a:t>[Sources]</a:t>
             </a:r>
           </a:p>
           <a:p xmlns:a="http://schemas.openxmlformats.org/drawingml/2006/main">
             <a:r>
-              <a:t>课程定位以 [curriculum.md](../../course/curriculum.md) 第 4-5 条为准；[assignments.md](../../course/assignments.md) 验证门条件；[syllabus.md](../../course/syllabus.md) 第 12 课。</a:t>
+              <a:t/>
+            </a:r>
+          </a:p>
+          <a:p xmlns:a="http://schemas.openxmlformats.org/drawingml/2006/main">
+            <a:r>
+              <a:t>- 本课 handout.md 与 slides.md</a:t>
+            </a:r>
+          </a:p>
+          <a:p xmlns:a="http://schemas.openxmlformats.org/drawingml/2006/main">
+            <a:r>
+              <a:t/>
+            </a:r>
+          </a:p>
+          <a:p xmlns:a="http://schemas.openxmlformats.org/drawingml/2006/main">
+            <a:r>
+              <a:t>- ../../course/reading-card-case.md</a:t>
+            </a:r>
+          </a:p>
+          <a:p xmlns:a="http://schemas.openxmlformats.org/drawingml/2006/main">
+            <a:r>
+              <a:t/>
             </a:r>
           </a:p>
           <a:p xmlns:a="http://schemas.openxmlformats.org/drawingml/2006/main">
@@ -508,6 +598,86 @@
           <a:lstStyle xmlns:a="http://schemas.openxmlformats.org/drawingml/2006/main"/>
           <a:p xmlns:a="http://schemas.openxmlformats.org/drawingml/2006/main">
             <a:r>
+              <a:t>页面：P10 脚本、工作流、Agent 与复杂系统的边界</a:t>
+            </a:r>
+          </a:p>
+          <a:p xmlns:a="http://schemas.openxmlformats.org/drawingml/2006/main">
+            <a:r>
+              <a:t/>
+            </a:r>
+          </a:p>
+          <a:p xmlns:a="http://schemas.openxmlformats.org/drawingml/2006/main">
+            <a:r>
+              <a:t>讲义位置：本课讲义；见逐页母稿映射表</a:t>
+            </a:r>
+          </a:p>
+          <a:p xmlns:a="http://schemas.openxmlformats.org/drawingml/2006/main">
+            <a:r>
+              <a:t/>
+            </a:r>
+          </a:p>
+          <a:p xmlns:a="http://schemas.openxmlformats.org/drawingml/2006/main">
+            <a:r>
+              <a:t>屏显核对：</a:t>
+            </a:r>
+          </a:p>
+          <a:p xmlns:a="http://schemas.openxmlformats.org/drawingml/2006/main">
+            <a:r>
+              <a:t>- 脚本</a:t>
+            </a:r>
+          </a:p>
+          <a:p xmlns:a="http://schemas.openxmlformats.org/drawingml/2006/main">
+            <a:r>
+              <a:t>- 固定输入输出</a:t>
+            </a:r>
+          </a:p>
+          <a:p xmlns:a="http://schemas.openxmlformats.org/drawingml/2006/main">
+            <a:r>
+              <a:t>- 固定工作流</a:t>
+            </a:r>
+          </a:p>
+          <a:p xmlns:a="http://schemas.openxmlformats.org/drawingml/2006/main">
+            <a:r>
+              <a:t>- 状态与回退</a:t>
+            </a:r>
+          </a:p>
+          <a:p xmlns:a="http://schemas.openxmlformats.org/drawingml/2006/main">
+            <a:r>
+              <a:t>- Agent</a:t>
+            </a:r>
+          </a:p>
+          <a:p xmlns:a="http://schemas.openxmlformats.org/drawingml/2006/main">
+            <a:r>
+              <a:t>- 动态决策</a:t>
+            </a:r>
+          </a:p>
+          <a:p xmlns:a="http://schemas.openxmlformats.org/drawingml/2006/main">
+            <a:r>
+              <a:t>- 复杂系统</a:t>
+            </a:r>
+          </a:p>
+          <a:p xmlns:a="http://schemas.openxmlformats.org/drawingml/2006/main">
+            <a:r>
+              <a:t>- 多组件治理</a:t>
+            </a:r>
+          </a:p>
+          <a:p xmlns:a="http://schemas.openxmlformats.org/drawingml/2006/main">
+            <a:r>
+              <a:t>- 先用能完成任务的最低复杂度；自治增加必须带来独立评价与停止。</a:t>
+            </a:r>
+          </a:p>
+          <a:p xmlns:a="http://schemas.openxmlformats.org/drawingml/2006/main">
+            <a:r>
+              <a:t/>
+            </a:r>
+          </a:p>
+          <a:p xmlns:a="http://schemas.openxmlformats.org/drawingml/2006/main">
+            <a:r>
+              <a:t>教师讲述：</a:t>
+            </a:r>
+          </a:p>
+          <a:p xmlns:a="http://schemas.openxmlformats.org/drawingml/2006/main">
+            <a:r>
               <a:t>脚本适合固定输入输出，固定工作流显式管理状态与恢复，Agent 适合需要动态决策的动作，复杂系统需要额外治理成本。阅读卡冻结任务优先选能完成任务的最低复杂度，选用动态决策时同时指定独立评价与停止条件。</a:t>
             </a:r>
           </a:p>
@@ -518,7 +688,12 @@
           </a:p>
           <a:p xmlns:a="http://schemas.openxmlformats.org/drawingml/2006/main">
             <a:r>
-              <a:t>学生动作：无。</a:t>
+              <a:t>学生动作：</a:t>
+            </a:r>
+          </a:p>
+          <a:p xmlns:a="http://schemas.openxmlformats.org/drawingml/2006/main">
+            <a:r>
+              <a:t>无。</a:t>
             </a:r>
           </a:p>
           <a:p xmlns:a="http://schemas.openxmlformats.org/drawingml/2006/main">
@@ -528,12 +703,57 @@
           </a:p>
           <a:p xmlns:a="http://schemas.openxmlformats.org/drawingml/2006/main">
             <a:r>
+              <a:t>来源与边界：</a:t>
+            </a:r>
+          </a:p>
+          <a:p xmlns:a="http://schemas.openxmlformats.org/drawingml/2006/main">
+            <a:r>
+              <a:t>[handout.md §三](./handout.md)。</a:t>
+            </a:r>
+          </a:p>
+          <a:p xmlns:a="http://schemas.openxmlformats.org/drawingml/2006/main">
+            <a:r>
+              <a:t/>
+            </a:r>
+          </a:p>
+          <a:p xmlns:a="http://schemas.openxmlformats.org/drawingml/2006/main">
+            <a:r>
+              <a:t>---</a:t>
+            </a:r>
+          </a:p>
+          <a:p xmlns:a="http://schemas.openxmlformats.org/drawingml/2006/main">
+            <a:r>
+              <a:t/>
+            </a:r>
+          </a:p>
+          <a:p xmlns:a="http://schemas.openxmlformats.org/drawingml/2006/main">
+            <a:r>
               <a:t>[Sources]</a:t>
             </a:r>
           </a:p>
           <a:p xmlns:a="http://schemas.openxmlformats.org/drawingml/2006/main">
             <a:r>
-              <a:t>[handout.md §三](./handout.md)。</a:t>
+              <a:t/>
+            </a:r>
+          </a:p>
+          <a:p xmlns:a="http://schemas.openxmlformats.org/drawingml/2006/main">
+            <a:r>
+              <a:t>- 本课 handout.md 与 slides.md</a:t>
+            </a:r>
+          </a:p>
+          <a:p xmlns:a="http://schemas.openxmlformats.org/drawingml/2006/main">
+            <a:r>
+              <a:t/>
+            </a:r>
+          </a:p>
+          <a:p xmlns:a="http://schemas.openxmlformats.org/drawingml/2006/main">
+            <a:r>
+              <a:t>- ../../course/reading-card-case.md</a:t>
+            </a:r>
+          </a:p>
+          <a:p xmlns:a="http://schemas.openxmlformats.org/drawingml/2006/main">
+            <a:r>
+              <a:t/>
             </a:r>
           </a:p>
           <a:p xmlns:a="http://schemas.openxmlformats.org/drawingml/2006/main">
@@ -608,6 +828,56 @@
           <a:lstStyle xmlns:a="http://schemas.openxmlformats.org/drawingml/2006/main"/>
           <a:p xmlns:a="http://schemas.openxmlformats.org/drawingml/2006/main">
             <a:r>
+              <a:t>页面：P11 个人工作流从一个真实科研动作开始</a:t>
+            </a:r>
+          </a:p>
+          <a:p xmlns:a="http://schemas.openxmlformats.org/drawingml/2006/main">
+            <a:r>
+              <a:t/>
+            </a:r>
+          </a:p>
+          <a:p xmlns:a="http://schemas.openxmlformats.org/drawingml/2006/main">
+            <a:r>
+              <a:t>讲义位置：本课讲义；见逐页母稿映射表</a:t>
+            </a:r>
+          </a:p>
+          <a:p xmlns:a="http://schemas.openxmlformats.org/drawingml/2006/main">
+            <a:r>
+              <a:t/>
+            </a:r>
+          </a:p>
+          <a:p xmlns:a="http://schemas.openxmlformats.org/drawingml/2006/main">
+            <a:r>
+              <a:t>屏显核对：</a:t>
+            </a:r>
+          </a:p>
+          <a:p xmlns:a="http://schemas.openxmlformats.org/drawingml/2006/main">
+            <a:r>
+              <a:t>- 本人真实课题中的重复动作</a:t>
+            </a:r>
+          </a:p>
+          <a:p xmlns:a="http://schemas.openxmlformats.org/drawingml/2006/main">
+            <a:r>
+              <a:t>- 导师组已有任务</a:t>
+            </a:r>
+          </a:p>
+          <a:p xmlns:a="http://schemas.openxmlformats.org/drawingml/2006/main">
+            <a:r>
+              <a:t>- 课堂最小原型</a:t>
+            </a:r>
+          </a:p>
+          <a:p xmlns:a="http://schemas.openxmlformats.org/drawingml/2006/main">
+            <a:r>
+              <a:t/>
+            </a:r>
+          </a:p>
+          <a:p xmlns:a="http://schemas.openxmlformats.org/drawingml/2006/main">
+            <a:r>
+              <a:t>教师讲述：</a:t>
+            </a:r>
+          </a:p>
+          <a:p xmlns:a="http://schemas.openxmlformats.org/drawingml/2006/main">
+            <a:r>
               <a:t>沿用第 10–11 课同一真实科研动作。本人课题、导师组任务和课堂原型是同一动作的收窄层级，不另开项目。请学生写出输入与一个可检查输出。</a:t>
             </a:r>
           </a:p>
@@ -618,7 +888,12 @@
           </a:p>
           <a:p xmlns:a="http://schemas.openxmlformats.org/drawingml/2006/main">
             <a:r>
-              <a:t>学生动作：请学生 30 秒内确定自己要封装的科研动作。</a:t>
+              <a:t>学生动作：</a:t>
+            </a:r>
+          </a:p>
+          <a:p xmlns:a="http://schemas.openxmlformats.org/drawingml/2006/main">
+            <a:r>
+              <a:t>请学生 30 秒内确定自己要封装的科研动作。</a:t>
             </a:r>
           </a:p>
           <a:p xmlns:a="http://schemas.openxmlformats.org/drawingml/2006/main">
@@ -628,12 +903,57 @@
           </a:p>
           <a:p xmlns:a="http://schemas.openxmlformats.org/drawingml/2006/main">
             <a:r>
+              <a:t>来源与边界：</a:t>
+            </a:r>
+          </a:p>
+          <a:p xmlns:a="http://schemas.openxmlformats.org/drawingml/2006/main">
+            <a:r>
+              <a:t>[handout.md §四·1](./handout.md)。</a:t>
+            </a:r>
+          </a:p>
+          <a:p xmlns:a="http://schemas.openxmlformats.org/drawingml/2006/main">
+            <a:r>
+              <a:t/>
+            </a:r>
+          </a:p>
+          <a:p xmlns:a="http://schemas.openxmlformats.org/drawingml/2006/main">
+            <a:r>
+              <a:t>---</a:t>
+            </a:r>
+          </a:p>
+          <a:p xmlns:a="http://schemas.openxmlformats.org/drawingml/2006/main">
+            <a:r>
+              <a:t/>
+            </a:r>
+          </a:p>
+          <a:p xmlns:a="http://schemas.openxmlformats.org/drawingml/2006/main">
+            <a:r>
               <a:t>[Sources]</a:t>
             </a:r>
           </a:p>
           <a:p xmlns:a="http://schemas.openxmlformats.org/drawingml/2006/main">
             <a:r>
-              <a:t>[handout.md §四·1](./handout.md)。</a:t>
+              <a:t/>
+            </a:r>
+          </a:p>
+          <a:p xmlns:a="http://schemas.openxmlformats.org/drawingml/2006/main">
+            <a:r>
+              <a:t>- 本课 handout.md 与 slides.md</a:t>
+            </a:r>
+          </a:p>
+          <a:p xmlns:a="http://schemas.openxmlformats.org/drawingml/2006/main">
+            <a:r>
+              <a:t/>
+            </a:r>
+          </a:p>
+          <a:p xmlns:a="http://schemas.openxmlformats.org/drawingml/2006/main">
+            <a:r>
+              <a:t>- ../../course/reading-card-case.md</a:t>
+            </a:r>
+          </a:p>
+          <a:p xmlns:a="http://schemas.openxmlformats.org/drawingml/2006/main">
+            <a:r>
+              <a:t/>
             </a:r>
           </a:p>
           <a:p xmlns:a="http://schemas.openxmlformats.org/drawingml/2006/main">
@@ -708,6 +1028,76 @@
           <a:lstStyle xmlns:a="http://schemas.openxmlformats.org/drawingml/2006/main"/>
           <a:p xmlns:a="http://schemas.openxmlformats.org/drawingml/2006/main">
             <a:r>
+              <a:t>页面：P12 八要素契约是一张可填写工件</a:t>
+            </a:r>
+          </a:p>
+          <a:p xmlns:a="http://schemas.openxmlformats.org/drawingml/2006/main">
+            <a:r>
+              <a:t/>
+            </a:r>
+          </a:p>
+          <a:p xmlns:a="http://schemas.openxmlformats.org/drawingml/2006/main">
+            <a:r>
+              <a:t>讲义位置：本课讲义；见逐页母稿映射表</a:t>
+            </a:r>
+          </a:p>
+          <a:p xmlns:a="http://schemas.openxmlformats.org/drawingml/2006/main">
+            <a:r>
+              <a:t/>
+            </a:r>
+          </a:p>
+          <a:p xmlns:a="http://schemas.openxmlformats.org/drawingml/2006/main">
+            <a:r>
+              <a:t>屏显核对：</a:t>
+            </a:r>
+          </a:p>
+          <a:p xmlns:a="http://schemas.openxmlformats.org/drawingml/2006/main">
+            <a:r>
+              <a:t>- agent-workflow.md</a:t>
+            </a:r>
+          </a:p>
+          <a:p xmlns:a="http://schemas.openxmlformats.org/drawingml/2006/main">
+            <a:r>
+              <a:t>- 任务契约｜输入、输出、成功标准、不适用范围</a:t>
+            </a:r>
+          </a:p>
+          <a:p xmlns:a="http://schemas.openxmlformats.org/drawingml/2006/main">
+            <a:r>
+              <a:t>- Context / 状态｜最小输入、持久工件、checkpoint</a:t>
+            </a:r>
+          </a:p>
+          <a:p xmlns:a="http://schemas.openxmlformats.org/drawingml/2006/main">
+            <a:r>
+              <a:t>- 工具权限｜只读、可写、可执行、需确认、禁止</a:t>
+            </a:r>
+          </a:p>
+          <a:p xmlns:a="http://schemas.openxmlformats.org/drawingml/2006/main">
+            <a:r>
+              <a:t>- 执行循环｜固定指标、预算、停止、回退</a:t>
+            </a:r>
+          </a:p>
+          <a:p xmlns:a="http://schemas.openxmlformats.org/drawingml/2006/main">
+            <a:r>
+              <a:t>- 工件与追踪｜run ID、trace、失败记录</a:t>
+            </a:r>
+          </a:p>
+          <a:p xmlns:a="http://schemas.openxmlformats.org/drawingml/2006/main">
+            <a:r>
+              <a:t>- Evals / 人工审核｜baseline、rubric、决定权</a:t>
+            </a:r>
+          </a:p>
+          <a:p xmlns:a="http://schemas.openxmlformats.org/drawingml/2006/main">
+            <a:r>
+              <a:t/>
+            </a:r>
+          </a:p>
+          <a:p xmlns:a="http://schemas.openxmlformats.org/drawingml/2006/main">
+            <a:r>
+              <a:t>教师讲述：</a:t>
+            </a:r>
+          </a:p>
+          <a:p xmlns:a="http://schemas.openxmlformats.org/drawingml/2006/main">
+            <a:r>
               <a:t>agent-workflow.md 是个人说明的入口，可链接 contract.md 等实现文件。八要素在屏显中按紧邻角色合并呈现，Context 与状态、Evals 与人工审核仍须各有明确字段。先补契约，再运行或演示最小路径。</a:t>
             </a:r>
           </a:p>
@@ -718,7 +1108,12 @@
           </a:p>
           <a:p xmlns:a="http://schemas.openxmlformats.org/drawingml/2006/main">
             <a:r>
-              <a:t>学生动作：学生开始填写模板。</a:t>
+              <a:t>学生动作：</a:t>
+            </a:r>
+          </a:p>
+          <a:p xmlns:a="http://schemas.openxmlformats.org/drawingml/2006/main">
+            <a:r>
+              <a:t>学生开始填写模板。</a:t>
             </a:r>
           </a:p>
           <a:p xmlns:a="http://schemas.openxmlformats.org/drawingml/2006/main">
@@ -728,12 +1123,57 @@
           </a:p>
           <a:p xmlns:a="http://schemas.openxmlformats.org/drawingml/2006/main">
             <a:r>
+              <a:t>来源与边界：</a:t>
+            </a:r>
+          </a:p>
+          <a:p xmlns:a="http://schemas.openxmlformats.org/drawingml/2006/main">
+            <a:r>
+              <a:t>[handout.md §四·2](./handout.md)。</a:t>
+            </a:r>
+          </a:p>
+          <a:p xmlns:a="http://schemas.openxmlformats.org/drawingml/2006/main">
+            <a:r>
+              <a:t/>
+            </a:r>
+          </a:p>
+          <a:p xmlns:a="http://schemas.openxmlformats.org/drawingml/2006/main">
+            <a:r>
+              <a:t>---</a:t>
+            </a:r>
+          </a:p>
+          <a:p xmlns:a="http://schemas.openxmlformats.org/drawingml/2006/main">
+            <a:r>
+              <a:t/>
+            </a:r>
+          </a:p>
+          <a:p xmlns:a="http://schemas.openxmlformats.org/drawingml/2006/main">
+            <a:r>
               <a:t>[Sources]</a:t>
             </a:r>
           </a:p>
           <a:p xmlns:a="http://schemas.openxmlformats.org/drawingml/2006/main">
             <a:r>
-              <a:t>[handout.md §四·2](./handout.md)。</a:t>
+              <a:t/>
+            </a:r>
+          </a:p>
+          <a:p xmlns:a="http://schemas.openxmlformats.org/drawingml/2006/main">
+            <a:r>
+              <a:t>- 本课 handout.md 与 slides.md</a:t>
+            </a:r>
+          </a:p>
+          <a:p xmlns:a="http://schemas.openxmlformats.org/drawingml/2006/main">
+            <a:r>
+              <a:t/>
+            </a:r>
+          </a:p>
+          <a:p xmlns:a="http://schemas.openxmlformats.org/drawingml/2006/main">
+            <a:r>
+              <a:t>- ../../course/reading-card-case.md</a:t>
+            </a:r>
+          </a:p>
+          <a:p xmlns:a="http://schemas.openxmlformats.org/drawingml/2006/main">
+            <a:r>
+              <a:t/>
             </a:r>
           </a:p>
           <a:p xmlns:a="http://schemas.openxmlformats.org/drawingml/2006/main">
@@ -808,6 +1248,91 @@
           <a:lstStyle xmlns:a="http://schemas.openxmlformats.org/drawingml/2006/main"/>
           <a:p xmlns:a="http://schemas.openxmlformats.org/drawingml/2006/main">
             <a:r>
+              <a:t>页面：P13 评价代码与执行代码必须隔离</a:t>
+            </a:r>
+          </a:p>
+          <a:p xmlns:a="http://schemas.openxmlformats.org/drawingml/2006/main">
+            <a:r>
+              <a:t/>
+            </a:r>
+          </a:p>
+          <a:p xmlns:a="http://schemas.openxmlformats.org/drawingml/2006/main">
+            <a:r>
+              <a:t>讲义位置：本课讲义；见逐页母稿映射表</a:t>
+            </a:r>
+          </a:p>
+          <a:p xmlns:a="http://schemas.openxmlformats.org/drawingml/2006/main">
+            <a:r>
+              <a:t/>
+            </a:r>
+          </a:p>
+          <a:p xmlns:a="http://schemas.openxmlformats.org/drawingml/2006/main">
+            <a:r>
+              <a:t>屏显核对：</a:t>
+            </a:r>
+          </a:p>
+          <a:p xmlns:a="http://schemas.openxmlformats.org/drawingml/2006/main">
+            <a:r>
+              <a:t>- runner/ 执行端</a:t>
+            </a:r>
+          </a:p>
+          <a:p xmlns:a="http://schemas.openxmlformats.org/drawingml/2006/main">
+            <a:r>
+              <a:t>- generate.py   W</a:t>
+            </a:r>
+          </a:p>
+          <a:p xmlns:a="http://schemas.openxmlformats.org/drawingml/2006/main">
+            <a:r>
+              <a:t>- tools.py      W</a:t>
+            </a:r>
+          </a:p>
+          <a:p xmlns:a="http://schemas.openxmlformats.org/drawingml/2006/main">
+            <a:r>
+              <a:t>- runs/         W</a:t>
+            </a:r>
+          </a:p>
+          <a:p xmlns:a="http://schemas.openxmlformats.org/drawingml/2006/main">
+            <a:r>
+              <a:t>- evaluator/ 独立评价端</a:t>
+            </a:r>
+          </a:p>
+          <a:p xmlns:a="http://schemas.openxmlformats.org/drawingml/2006/main">
+            <a:r>
+              <a:t>- gold.json  仅评价端 R</a:t>
+            </a:r>
+          </a:p>
+          <a:p xmlns:a="http://schemas.openxmlformats.org/drawingml/2006/main">
+            <a:r>
+              <a:t>- rubric.yaml  冻结规则</a:t>
+            </a:r>
+          </a:p>
+          <a:p xmlns:a="http://schemas.openxmlformats.org/drawingml/2006/main">
+            <a:r>
+              <a:t>- score.py  独立执行</a:t>
+            </a:r>
+          </a:p>
+          <a:p xmlns:a="http://schemas.openxmlformats.org/drawingml/2006/main">
+            <a:r>
+              <a:t>- 协议变更须人工确认</a:t>
+            </a:r>
+          </a:p>
+          <a:p xmlns:a="http://schemas.openxmlformats.org/drawingml/2006/main">
+            <a:r>
+              <a:t>- 执行端禁止读取 gold.json</a:t>
+            </a:r>
+          </a:p>
+          <a:p xmlns:a="http://schemas.openxmlformats.org/drawingml/2006/main">
+            <a:r>
+              <a:t/>
+            </a:r>
+          </a:p>
+          <a:p xmlns:a="http://schemas.openxmlformats.org/drawingml/2006/main">
+            <a:r>
+              <a:t>教师讲述：</a:t>
+            </a:r>
+          </a:p>
+          <a:p xmlns:a="http://schemas.openxmlformats.org/drawingml/2006/main">
+            <a:r>
               <a:t>左侧 W 指开发阶段允许修改执行代码和写运行目录；进入冻结批次后配置与方法锁定。右侧 gold.json 的 R 仅属于独立评价端，执行端禁止读取或复制 gold，不能将右侧 R 当作全项目权限。输出生成后才交评价端，协议变更由人工审核并另开版本，不回改当前冻结批次。请学生标明角色与拒绝点。</a:t>
             </a:r>
           </a:p>
@@ -818,7 +1343,12 @@
           </a:p>
           <a:p xmlns:a="http://schemas.openxmlformats.org/drawingml/2006/main">
             <a:r>
-              <a:t>学生动作：学生在自己的权限栏分别标出执行端不可读 gold 与独立评价端可读 gold。</a:t>
+              <a:t>学生动作：</a:t>
+            </a:r>
+          </a:p>
+          <a:p xmlns:a="http://schemas.openxmlformats.org/drawingml/2006/main">
+            <a:r>
+              <a:t>学生在自己的权限栏分别标出执行端不可读 gold 与独立评价端可读 gold。</a:t>
             </a:r>
           </a:p>
           <a:p xmlns:a="http://schemas.openxmlformats.org/drawingml/2006/main">
@@ -828,12 +1358,57 @@
           </a:p>
           <a:p xmlns:a="http://schemas.openxmlformats.org/drawingml/2006/main">
             <a:r>
+              <a:t>来源与边界：</a:t>
+            </a:r>
+          </a:p>
+          <a:p xmlns:a="http://schemas.openxmlformats.org/drawingml/2006/main">
+            <a:r>
+              <a:t>[assignments.md](../../course/assignments.md) 验证门条件；[handout.md §四·3](./handout.md)；[第 11 课讲义](../lesson-11/handout.md)。</a:t>
+            </a:r>
+          </a:p>
+          <a:p xmlns:a="http://schemas.openxmlformats.org/drawingml/2006/main">
+            <a:r>
+              <a:t/>
+            </a:r>
+          </a:p>
+          <a:p xmlns:a="http://schemas.openxmlformats.org/drawingml/2006/main">
+            <a:r>
+              <a:t>---</a:t>
+            </a:r>
+          </a:p>
+          <a:p xmlns:a="http://schemas.openxmlformats.org/drawingml/2006/main">
+            <a:r>
+              <a:t/>
+            </a:r>
+          </a:p>
+          <a:p xmlns:a="http://schemas.openxmlformats.org/drawingml/2006/main">
+            <a:r>
               <a:t>[Sources]</a:t>
             </a:r>
           </a:p>
           <a:p xmlns:a="http://schemas.openxmlformats.org/drawingml/2006/main">
             <a:r>
-              <a:t>[assignments.md](../../course/assignments.md) 验证门条件；[handout.md §四·3](./handout.md)；[第 11 课讲义](../lesson-11/handout.md)。</a:t>
+              <a:t/>
+            </a:r>
+          </a:p>
+          <a:p xmlns:a="http://schemas.openxmlformats.org/drawingml/2006/main">
+            <a:r>
+              <a:t>- 本课 handout.md 与 slides.md</a:t>
+            </a:r>
+          </a:p>
+          <a:p xmlns:a="http://schemas.openxmlformats.org/drawingml/2006/main">
+            <a:r>
+              <a:t/>
+            </a:r>
+          </a:p>
+          <a:p xmlns:a="http://schemas.openxmlformats.org/drawingml/2006/main">
+            <a:r>
+              <a:t>- ../../course/reading-card-case.md</a:t>
+            </a:r>
+          </a:p>
+          <a:p xmlns:a="http://schemas.openxmlformats.org/drawingml/2006/main">
+            <a:r>
+              <a:t/>
             </a:r>
           </a:p>
           <a:p xmlns:a="http://schemas.openxmlformats.org/drawingml/2006/main">
@@ -908,7 +1483,7 @@
           <a:lstStyle xmlns:a="http://schemas.openxmlformats.org/drawingml/2006/main"/>
           <a:p xmlns:a="http://schemas.openxmlformats.org/drawingml/2006/main">
             <a:r>
-              <a:t>这是课程虚构案例，只演示工作流契约，不预设真实效果。重点是它直接封装第 10–11 课已有任务，没有重开一个证据地图项目。人工基准不进入生成 Context，评价流程与执行流程隔离。</a:t>
+              <a:t>页面：P14 把原型组织成可反查的工作流</a:t>
             </a:r>
           </a:p>
           <a:p xmlns:a="http://schemas.openxmlformats.org/drawingml/2006/main">
@@ -918,7 +1493,7 @@
           </a:p>
           <a:p xmlns:a="http://schemas.openxmlformats.org/drawingml/2006/main">
             <a:r>
-              <a:t>学生动作：请学生对照自己的模板，看契约字段是否填得同样具体。</a:t>
+              <a:t>讲义位置：handout.md §五、贯穿案例：把同一阅读卡任务升级为工作流</a:t>
             </a:r>
           </a:p>
           <a:p xmlns:a="http://schemas.openxmlformats.org/drawingml/2006/main">
@@ -928,12 +1503,112 @@
           </a:p>
           <a:p xmlns:a="http://schemas.openxmlformats.org/drawingml/2006/main">
             <a:r>
+              <a:t>屏显核对：</a:t>
+            </a:r>
+          </a:p>
+          <a:p xmlns:a="http://schemas.openxmlformats.org/drawingml/2006/main">
+            <a:r>
+              <a:t>任务｜限定条件保留的检查流程</a:t>
+            </a:r>
+          </a:p>
+          <a:p xmlns:a="http://schemas.openxmlformats.org/drawingml/2006/main">
+            <a:r>
+              <a:t>输入｜3 份教学构造源文本与 6 份预置输出</a:t>
+            </a:r>
+          </a:p>
+          <a:p xmlns:a="http://schemas.openxmlformats.org/drawingml/2006/main">
+            <a:r>
+              <a:t>过程｜回放、标注核验、汇总</a:t>
+            </a:r>
+          </a:p>
+          <a:p xmlns:a="http://schemas.openxmlformats.org/drawingml/2006/main">
+            <a:r>
+              <a:t>边界｜固定链；无模型调用；参考标注需人审</a:t>
+            </a:r>
+          </a:p>
+          <a:p xmlns:a="http://schemas.openxmlformats.org/drawingml/2006/main">
+            <a:r>
+              <a:t>输出｜原始记录、结果、失败与局限</a:t>
+            </a:r>
+          </a:p>
+          <a:p xmlns:a="http://schemas.openxmlformats.org/drawingml/2006/main">
+            <a:r>
+              <a:t/>
+            </a:r>
+          </a:p>
+          <a:p xmlns:a="http://schemas.openxmlformats.org/drawingml/2006/main">
+            <a:r>
+              <a:t>教师讲述：</a:t>
+            </a:r>
+          </a:p>
+          <a:p xmlns:a="http://schemas.openxmlformats.org/drawingml/2006/main">
+            <a:r>
+              <a:t>这条工作流服务一个科研动作。学生应选自己项目中的一个动作，不另起一个与原问题脱节的“研究AI是否有效”项目。</a:t>
+            </a:r>
+          </a:p>
+          <a:p xmlns:a="http://schemas.openxmlformats.org/drawingml/2006/main">
+            <a:r>
+              <a:t/>
+            </a:r>
+          </a:p>
+          <a:p xmlns:a="http://schemas.openxmlformats.org/drawingml/2006/main">
+            <a:r>
+              <a:t>学生动作：</a:t>
+            </a:r>
+          </a:p>
+          <a:p xmlns:a="http://schemas.openxmlformats.org/drawingml/2006/main">
+            <a:r>
+              <a:t>用一句话写本人工作流帮助原研究的哪个动作。</a:t>
+            </a:r>
+          </a:p>
+          <a:p xmlns:a="http://schemas.openxmlformats.org/drawingml/2006/main">
+            <a:r>
+              <a:t/>
+            </a:r>
+          </a:p>
+          <a:p xmlns:a="http://schemas.openxmlformats.org/drawingml/2006/main">
+            <a:r>
+              <a:t>来源与边界：</a:t>
+            </a:r>
+          </a:p>
+          <a:p xmlns:a="http://schemas.openxmlformats.org/drawingml/2006/main">
+            <a:r>
+              <a:t>./handout.md；课堂示例与构造数据见 ../../course/reading-card-case.md</a:t>
+            </a:r>
+          </a:p>
+          <a:p xmlns:a="http://schemas.openxmlformats.org/drawingml/2006/main">
+            <a:r>
+              <a:t/>
+            </a:r>
+          </a:p>
+          <a:p xmlns:a="http://schemas.openxmlformats.org/drawingml/2006/main">
+            <a:r>
               <a:t>[Sources]</a:t>
             </a:r>
           </a:p>
           <a:p xmlns:a="http://schemas.openxmlformats.org/drawingml/2006/main">
             <a:r>
-              <a:t>[handout.md §五](./handout.md)。案例为虚构教学情境，须在页面和讲述中标明。</a:t>
+              <a:t/>
+            </a:r>
+          </a:p>
+          <a:p xmlns:a="http://schemas.openxmlformats.org/drawingml/2006/main">
+            <a:r>
+              <a:t>- 本课 handout.md 与 slides.md</a:t>
+            </a:r>
+          </a:p>
+          <a:p xmlns:a="http://schemas.openxmlformats.org/drawingml/2006/main">
+            <a:r>
+              <a:t/>
+            </a:r>
+          </a:p>
+          <a:p xmlns:a="http://schemas.openxmlformats.org/drawingml/2006/main">
+            <a:r>
+              <a:t>- ../../course/reading-card-case.md</a:t>
+            </a:r>
+          </a:p>
+          <a:p xmlns:a="http://schemas.openxmlformats.org/drawingml/2006/main">
+            <a:r>
+              <a:t/>
             </a:r>
           </a:p>
           <a:p xmlns:a="http://schemas.openxmlformats.org/drawingml/2006/main">
@@ -1008,7 +1683,7 @@
           <a:lstStyle xmlns:a="http://schemas.openxmlformats.org/drawingml/2006/main"/>
           <a:p xmlns:a="http://schemas.openxmlformats.org/drawingml/2006/main">
             <a:r>
-              <a:t>屏显是课程虚构演示项目的最小目录，不代表已运行的软件或真实结果。教师用预置输入和正常、失败 trace 演示可复现路径。课堂最低产出仍是一条 trace 和失败恢复位置；右侧正常与失败路径是教师演示检查点，不给学生增加两个实际运行的硬门。</a:t>
+              <a:t>页面：P15 打开这些文件，走一次完整路径</a:t>
             </a:r>
           </a:p>
           <a:p xmlns:a="http://schemas.openxmlformats.org/drawingml/2006/main">
@@ -1018,7 +1693,7 @@
           </a:p>
           <a:p xmlns:a="http://schemas.openxmlformats.org/drawingml/2006/main">
             <a:r>
-              <a:t>学生动作：现场确认演示项目无敏感材料。</a:t>
+              <a:t>讲义位置：handout.md §五、贯穿案例：把同一阅读卡任务升级为工作流</a:t>
             </a:r>
           </a:p>
           <a:p xmlns:a="http://schemas.openxmlformats.org/drawingml/2006/main">
@@ -1028,12 +1703,117 @@
           </a:p>
           <a:p xmlns:a="http://schemas.openxmlformats.org/drawingml/2006/main">
             <a:r>
+              <a:t>屏显核对：</a:t>
+            </a:r>
+          </a:p>
+          <a:p xmlns:a="http://schemas.openxmlformats.org/drawingml/2006/main">
+            <a:r>
+              <a:t>sources / outputs → replay</a:t>
+            </a:r>
+          </a:p>
+          <a:p xmlns:a="http://schemas.openxmlformats.org/drawingml/2006/main">
+            <a:r>
+              <a:t>events / state → 检查执行与恢复</a:t>
+            </a:r>
+          </a:p>
+          <a:p xmlns:a="http://schemas.openxmlformats.org/drawingml/2006/main">
+            <a:r>
+              <a:t>gold / annotations → 人工核验依据</a:t>
+            </a:r>
+          </a:p>
+          <a:p xmlns:a="http://schemas.openxmlformats.org/drawingml/2006/main">
+            <a:r>
+              <a:t>evaluate → evaluation.json</a:t>
+            </a:r>
+          </a:p>
+          <a:p xmlns:a="http://schemas.openxmlformats.org/drawingml/2006/main">
+            <a:r>
+              <a:t/>
+            </a:r>
+          </a:p>
+          <a:p xmlns:a="http://schemas.openxmlformats.org/drawingml/2006/main">
+            <a:r>
+              <a:t>同伴从一个数字反查到输出原句。</a:t>
+            </a:r>
+          </a:p>
+          <a:p xmlns:a="http://schemas.openxmlformats.org/drawingml/2006/main">
+            <a:r>
+              <a:t/>
+            </a:r>
+          </a:p>
+          <a:p xmlns:a="http://schemas.openxmlformats.org/drawingml/2006/main">
+            <a:r>
+              <a:t>教师讲述：</a:t>
+            </a:r>
+          </a:p>
+          <a:p xmlns:a="http://schemas.openxmlformats.org/drawingml/2006/main">
+            <a:r>
+              <a:t>使用lesson-11/assets/reading-card-workflow真实目录。固定输出不冒充Agent现场生成；离线仍可执行。人工参考标注只作为教学校准答案，需先隐藏再发答案。</a:t>
+            </a:r>
+          </a:p>
+          <a:p xmlns:a="http://schemas.openxmlformats.org/drawingml/2006/main">
+            <a:r>
+              <a:t/>
+            </a:r>
+          </a:p>
+          <a:p xmlns:a="http://schemas.openxmlformats.org/drawingml/2006/main">
+            <a:r>
+              <a:t>学生动作：</a:t>
+            </a:r>
+          </a:p>
+          <a:p xmlns:a="http://schemas.openxmlformats.org/drawingml/2006/main">
+            <a:r>
+              <a:t>同伴选择T03，复原一次反向追踪。</a:t>
+            </a:r>
+          </a:p>
+          <a:p xmlns:a="http://schemas.openxmlformats.org/drawingml/2006/main">
+            <a:r>
+              <a:t/>
+            </a:r>
+          </a:p>
+          <a:p xmlns:a="http://schemas.openxmlformats.org/drawingml/2006/main">
+            <a:r>
+              <a:t>来源与边界：</a:t>
+            </a:r>
+          </a:p>
+          <a:p xmlns:a="http://schemas.openxmlformats.org/drawingml/2006/main">
+            <a:r>
+              <a:t>./handout.md；课堂示例与构造数据见 ../../course/reading-card-case.md</a:t>
+            </a:r>
+          </a:p>
+          <a:p xmlns:a="http://schemas.openxmlformats.org/drawingml/2006/main">
+            <a:r>
+              <a:t/>
+            </a:r>
+          </a:p>
+          <a:p xmlns:a="http://schemas.openxmlformats.org/drawingml/2006/main">
+            <a:r>
               <a:t>[Sources]</a:t>
             </a:r>
           </a:p>
           <a:p xmlns:a="http://schemas.openxmlformats.org/drawingml/2006/main">
             <a:r>
-              <a:t>[handout.md §四·4、§五](./handout.md)；课程虚构目录与 trace，用于教师演示，不代表真实执行结果。</a:t>
+              <a:t/>
+            </a:r>
+          </a:p>
+          <a:p xmlns:a="http://schemas.openxmlformats.org/drawingml/2006/main">
+            <a:r>
+              <a:t>- 本课 handout.md 与 slides.md</a:t>
+            </a:r>
+          </a:p>
+          <a:p xmlns:a="http://schemas.openxmlformats.org/drawingml/2006/main">
+            <a:r>
+              <a:t/>
+            </a:r>
+          </a:p>
+          <a:p xmlns:a="http://schemas.openxmlformats.org/drawingml/2006/main">
+            <a:r>
+              <a:t>- ../../course/reading-card-case.md</a:t>
+            </a:r>
+          </a:p>
+          <a:p xmlns:a="http://schemas.openxmlformats.org/drawingml/2006/main">
+            <a:r>
+              <a:t/>
             </a:r>
           </a:p>
           <a:p xmlns:a="http://schemas.openxmlformats.org/drawingml/2006/main">
@@ -1108,7 +1888,7 @@
           <a:lstStyle xmlns:a="http://schemas.openxmlformats.org/drawingml/2006/main"/>
           <a:p xmlns:a="http://schemas.openxmlformats.org/drawingml/2006/main">
             <a:r>
-              <a:t>这是课程虚构失败 trace。执行端尝试读取 gold 后遭拒绝，记录越权、收窄输入并用新 run ID 重试，最后由人核验。与 P15 正常路径形成对照。请学生指出拒绝发生在哪个角色边界，说明如何保留失败。</a:t>
+              <a:t>页面：P16 接口拒绝能证明什么？</a:t>
             </a:r>
           </a:p>
           <a:p xmlns:a="http://schemas.openxmlformats.org/drawingml/2006/main">
@@ -1118,7 +1898,7 @@
           </a:p>
           <a:p xmlns:a="http://schemas.openxmlformats.org/drawingml/2006/main">
             <a:r>
-              <a:t>学生动作：请学生指出失败 trace 中最值得保留的一条信息，并现场给出一个限制条件，教师加入改写后的契约。</a:t>
+              <a:t>讲义位置：handout.md §五、贯穿案例：把同一阅读卡任务升级为工作流</a:t>
             </a:r>
           </a:p>
           <a:p xmlns:a="http://schemas.openxmlformats.org/drawingml/2006/main">
@@ -1128,12 +1908,112 @@
           </a:p>
           <a:p xmlns:a="http://schemas.openxmlformats.org/drawingml/2006/main">
             <a:r>
+              <a:t>屏显核对：</a:t>
+            </a:r>
+          </a:p>
+          <a:p xmlns:a="http://schemas.openxmlformats.org/drawingml/2006/main">
+            <a:r>
+              <a:t>executor 请求 gold → 接口拒绝并记日志</a:t>
+            </a:r>
+          </a:p>
+          <a:p xmlns:a="http://schemas.openxmlformats.org/drawingml/2006/main">
+            <a:r>
+              <a:t>evaluator 按角色读取 → 进入评价</a:t>
+            </a:r>
+          </a:p>
+          <a:p xmlns:a="http://schemas.openxmlformats.org/drawingml/2006/main">
+            <a:r>
+              <a:t/>
+            </a:r>
+          </a:p>
+          <a:p xmlns:a="http://schemas.openxmlformats.org/drawingml/2006/main">
+            <a:r>
+              <a:t>已展示：通过此入口的角色检查。</a:t>
+            </a:r>
+          </a:p>
+          <a:p xmlns:a="http://schemas.openxmlformats.org/drawingml/2006/main">
+            <a:r>
+              <a:t>尚未展示：操作系统或容器级隔离。</a:t>
+            </a:r>
+          </a:p>
+          <a:p xmlns:a="http://schemas.openxmlformats.org/drawingml/2006/main">
+            <a:r>
+              <a:t/>
+            </a:r>
+          </a:p>
+          <a:p xmlns:a="http://schemas.openxmlformats.org/drawingml/2006/main">
+            <a:r>
+              <a:t>教师讲述：</a:t>
+            </a:r>
+          </a:p>
+          <a:p xmlns:a="http://schemas.openxmlformats.org/drawingml/2006/main">
+            <a:r>
+              <a:t>运行access-check --role executor --resource gold，检查返回码和日志。直接文件访问不受这个接口保护，所以不要写“模型绝不可能看到gold”。真实项目需按环境配置隔离并验证。</a:t>
+            </a:r>
+          </a:p>
+          <a:p xmlns:a="http://schemas.openxmlformats.org/drawingml/2006/main">
+            <a:r>
+              <a:t/>
+            </a:r>
+          </a:p>
+          <a:p xmlns:a="http://schemas.openxmlformats.org/drawingml/2006/main">
+            <a:r>
+              <a:t>学生动作：</a:t>
+            </a:r>
+          </a:p>
+          <a:p xmlns:a="http://schemas.openxmlformats.org/drawingml/2006/main">
+            <a:r>
+              <a:t>标记权限声明、执行控制和观察证据各在哪里。</a:t>
+            </a:r>
+          </a:p>
+          <a:p xmlns:a="http://schemas.openxmlformats.org/drawingml/2006/main">
+            <a:r>
+              <a:t/>
+            </a:r>
+          </a:p>
+          <a:p xmlns:a="http://schemas.openxmlformats.org/drawingml/2006/main">
+            <a:r>
+              <a:t>来源与边界：</a:t>
+            </a:r>
+          </a:p>
+          <a:p xmlns:a="http://schemas.openxmlformats.org/drawingml/2006/main">
+            <a:r>
+              <a:t>./handout.md；课堂示例与构造数据见 ../../course/reading-card-case.md</a:t>
+            </a:r>
+          </a:p>
+          <a:p xmlns:a="http://schemas.openxmlformats.org/drawingml/2006/main">
+            <a:r>
+              <a:t/>
+            </a:r>
+          </a:p>
+          <a:p xmlns:a="http://schemas.openxmlformats.org/drawingml/2006/main">
+            <a:r>
               <a:t>[Sources]</a:t>
             </a:r>
           </a:p>
           <a:p xmlns:a="http://schemas.openxmlformats.org/drawingml/2006/main">
             <a:r>
-              <a:t>[handout.md §四·3 §六](./handout.md)；[第 1 课讲义 §五·第四步](../lesson-01/handout.md)。</a:t>
+              <a:t/>
+            </a:r>
+          </a:p>
+          <a:p xmlns:a="http://schemas.openxmlformats.org/drawingml/2006/main">
+            <a:r>
+              <a:t>- 本课 handout.md 与 slides.md</a:t>
+            </a:r>
+          </a:p>
+          <a:p xmlns:a="http://schemas.openxmlformats.org/drawingml/2006/main">
+            <a:r>
+              <a:t/>
+            </a:r>
+          </a:p>
+          <a:p xmlns:a="http://schemas.openxmlformats.org/drawingml/2006/main">
+            <a:r>
+              <a:t>- ../../course/reading-card-case.md</a:t>
+            </a:r>
+          </a:p>
+          <a:p xmlns:a="http://schemas.openxmlformats.org/drawingml/2006/main">
+            <a:r>
+              <a:t/>
             </a:r>
           </a:p>
           <a:p xmlns:a="http://schemas.openxmlformats.org/drawingml/2006/main">
@@ -1208,6 +2088,76 @@
           <a:lstStyle xmlns:a="http://schemas.openxmlformats.org/drawingml/2006/main"/>
           <a:p xmlns:a="http://schemas.openxmlformats.org/drawingml/2006/main">
             <a:r>
+              <a:t>页面：P17 个人实践：先定契约，再走通一条 trace</a:t>
+            </a:r>
+          </a:p>
+          <a:p xmlns:a="http://schemas.openxmlformats.org/drawingml/2006/main">
+            <a:r>
+              <a:t/>
+            </a:r>
+          </a:p>
+          <a:p xmlns:a="http://schemas.openxmlformats.org/drawingml/2006/main">
+            <a:r>
+              <a:t>讲义位置：本课讲义；见逐页母稿映射表</a:t>
+            </a:r>
+          </a:p>
+          <a:p xmlns:a="http://schemas.openxmlformats.org/drawingml/2006/main">
+            <a:r>
+              <a:t/>
+            </a:r>
+          </a:p>
+          <a:p xmlns:a="http://schemas.openxmlformats.org/drawingml/2006/main">
+            <a:r>
+              <a:t>屏显核对：</a:t>
+            </a:r>
+          </a:p>
+          <a:p xmlns:a="http://schemas.openxmlformats.org/drawingml/2006/main">
+            <a:r>
+              <a:t>选第 10–11 课的同一科研动作。</a:t>
+            </a:r>
+          </a:p>
+          <a:p xmlns:a="http://schemas.openxmlformats.org/drawingml/2006/main">
+            <a:r>
+              <a:t/>
+            </a:r>
+          </a:p>
+          <a:p xmlns:a="http://schemas.openxmlformats.org/drawingml/2006/main">
+            <a:r>
+              <a:t>先写任务、权限边界与评价路径，标明其他契约缺口。</a:t>
+            </a:r>
+          </a:p>
+          <a:p xmlns:a="http://schemas.openxmlformats.org/drawingml/2006/main">
+            <a:r>
+              <a:t>建立最小目录，走通一条 trace，说明失败如何保留与恢复。</a:t>
+            </a:r>
+          </a:p>
+          <a:p xmlns:a="http://schemas.openxmlformats.org/drawingml/2006/main">
+            <a:r>
+              <a:t/>
+            </a:r>
+          </a:p>
+          <a:p xmlns:a="http://schemas.openxmlformats.org/drawingml/2006/main">
+            <a:r>
+              <a:t>完成标志：可运行，或能沿已有记录复现演示。</a:t>
+            </a:r>
+          </a:p>
+          <a:p xmlns:a="http://schemas.openxmlformats.org/drawingml/2006/main">
+            <a:r>
+              <a:t>课堂无需跑完 6 份输出；课后补齐完整契约。</a:t>
+            </a:r>
+          </a:p>
+          <a:p xmlns:a="http://schemas.openxmlformats.org/drawingml/2006/main">
+            <a:r>
+              <a:t/>
+            </a:r>
+          </a:p>
+          <a:p xmlns:a="http://schemas.openxmlformats.org/drawingml/2006/main">
+            <a:r>
+              <a:t>教师讲述：</a:t>
+            </a:r>
+          </a:p>
+          <a:p xmlns:a="http://schemas.openxmlformats.org/drawingml/2006/main">
+            <a:r>
               <a:t>第一段先定契约、权限与模式。课堂环境可用时直接运行最小路径；环境受限时使用教师预置输入和 trace 做可复现演示，不把环境故障变成纸面设计豁免。</a:t>
             </a:r>
           </a:p>
@@ -1218,7 +2168,12 @@
           </a:p>
           <a:p xmlns:a="http://schemas.openxmlformats.org/drawingml/2006/main">
             <a:r>
-              <a:t>学生动作：本页停留在屏幕上。教师巡视只处理共同卡点。</a:t>
+              <a:t>学生动作：</a:t>
+            </a:r>
+          </a:p>
+          <a:p xmlns:a="http://schemas.openxmlformats.org/drawingml/2006/main">
+            <a:r>
+              <a:t>本页停留在屏幕上。教师巡视只处理共同卡点。</a:t>
             </a:r>
           </a:p>
           <a:p xmlns:a="http://schemas.openxmlformats.org/drawingml/2006/main">
@@ -1228,12 +2183,57 @@
           </a:p>
           <a:p xmlns:a="http://schemas.openxmlformats.org/drawingml/2006/main">
             <a:r>
+              <a:t>来源与边界：</a:t>
+            </a:r>
+          </a:p>
+          <a:p xmlns:a="http://schemas.openxmlformats.org/drawingml/2006/main">
+            <a:r>
+              <a:t>[handout.md §四·4 §七](./handout.md)。</a:t>
+            </a:r>
+          </a:p>
+          <a:p xmlns:a="http://schemas.openxmlformats.org/drawingml/2006/main">
+            <a:r>
+              <a:t/>
+            </a:r>
+          </a:p>
+          <a:p xmlns:a="http://schemas.openxmlformats.org/drawingml/2006/main">
+            <a:r>
+              <a:t>---</a:t>
+            </a:r>
+          </a:p>
+          <a:p xmlns:a="http://schemas.openxmlformats.org/drawingml/2006/main">
+            <a:r>
+              <a:t/>
+            </a:r>
+          </a:p>
+          <a:p xmlns:a="http://schemas.openxmlformats.org/drawingml/2006/main">
+            <a:r>
               <a:t>[Sources]</a:t>
             </a:r>
           </a:p>
           <a:p xmlns:a="http://schemas.openxmlformats.org/drawingml/2006/main">
             <a:r>
-              <a:t>[handout.md §四·4 §七](./handout.md)。</a:t>
+              <a:t/>
+            </a:r>
+          </a:p>
+          <a:p xmlns:a="http://schemas.openxmlformats.org/drawingml/2006/main">
+            <a:r>
+              <a:t>- 本课 handout.md 与 slides.md</a:t>
+            </a:r>
+          </a:p>
+          <a:p xmlns:a="http://schemas.openxmlformats.org/drawingml/2006/main">
+            <a:r>
+              <a:t/>
+            </a:r>
+          </a:p>
+          <a:p xmlns:a="http://schemas.openxmlformats.org/drawingml/2006/main">
+            <a:r>
+              <a:t>- ../../course/reading-card-case.md</a:t>
+            </a:r>
+          </a:p>
+          <a:p xmlns:a="http://schemas.openxmlformats.org/drawingml/2006/main">
+            <a:r>
+              <a:t/>
             </a:r>
           </a:p>
           <a:p xmlns:a="http://schemas.openxmlformats.org/drawingml/2006/main">
@@ -1308,6 +2308,81 @@
           <a:lstStyle xmlns:a="http://schemas.openxmlformats.org/drawingml/2006/main"/>
           <a:p xmlns:a="http://schemas.openxmlformats.org/drawingml/2006/main">
             <a:r>
+              <a:t>页面：P18 八要素自检贴在同一工作流上</a:t>
+            </a:r>
+          </a:p>
+          <a:p xmlns:a="http://schemas.openxmlformats.org/drawingml/2006/main">
+            <a:r>
+              <a:t/>
+            </a:r>
+          </a:p>
+          <a:p xmlns:a="http://schemas.openxmlformats.org/drawingml/2006/main">
+            <a:r>
+              <a:t>讲义位置：本课讲义；见逐页母稿映射表</a:t>
+            </a:r>
+          </a:p>
+          <a:p xmlns:a="http://schemas.openxmlformats.org/drawingml/2006/main">
+            <a:r>
+              <a:t/>
+            </a:r>
+          </a:p>
+          <a:p xmlns:a="http://schemas.openxmlformats.org/drawingml/2006/main">
+            <a:r>
+              <a:t>屏显核对：</a:t>
+            </a:r>
+          </a:p>
+          <a:p xmlns:a="http://schemas.openxmlformats.org/drawingml/2006/main">
+            <a:r>
+              <a:t>- 契约 / Context</a:t>
+            </a:r>
+          </a:p>
+          <a:p xmlns:a="http://schemas.openxmlformats.org/drawingml/2006/main">
+            <a:r>
+              <a:t>- 输入输出与状态能否反查？</a:t>
+            </a:r>
+          </a:p>
+          <a:p xmlns:a="http://schemas.openxmlformats.org/drawingml/2006/main">
+            <a:r>
+              <a:t>- 权限 / 循环</a:t>
+            </a:r>
+          </a:p>
+          <a:p xmlns:a="http://schemas.openxmlformats.org/drawingml/2006/main">
+            <a:r>
+              <a:t>- 外部动作何时停？</a:t>
+            </a:r>
+          </a:p>
+          <a:p xmlns:a="http://schemas.openxmlformats.org/drawingml/2006/main">
+            <a:r>
+              <a:t>- 工件 / Evals</a:t>
+            </a:r>
+          </a:p>
+          <a:p xmlns:a="http://schemas.openxmlformats.org/drawingml/2006/main">
+            <a:r>
+              <a:t>- 运行与评价是否隔离？</a:t>
+            </a:r>
+          </a:p>
+          <a:p xmlns:a="http://schemas.openxmlformats.org/drawingml/2006/main">
+            <a:r>
+              <a:t>- 人工审核 / 恢复</a:t>
+            </a:r>
+          </a:p>
+          <a:p xmlns:a="http://schemas.openxmlformats.org/drawingml/2006/main">
+            <a:r>
+              <a:t>- 失败是否保留并改变下一步？</a:t>
+            </a:r>
+          </a:p>
+          <a:p xmlns:a="http://schemas.openxmlformats.org/drawingml/2006/main">
+            <a:r>
+              <a:t/>
+            </a:r>
+          </a:p>
+          <a:p xmlns:a="http://schemas.openxmlformats.org/drawingml/2006/main">
+            <a:r>
+              <a:t>教师讲述：</a:t>
+            </a:r>
+          </a:p>
+          <a:p xmlns:a="http://schemas.openxmlformats.org/drawingml/2006/main">
+            <a:r>
               <a:t>教师先用共性样例做中点点评，再让学生继续完成最小原型或可复现演示，抽查 Context / Memory、权限栏、trace、评价计划与失败恢复。第 13 课基于课前已有运行结果完成评价、影响报告、证据回写与合规更新。</a:t>
             </a:r>
           </a:p>
@@ -1318,7 +2393,12 @@
           </a:p>
           <a:p xmlns:a="http://schemas.openxmlformats.org/drawingml/2006/main">
             <a:r>
-              <a:t>学生动作：教师中点点评后，学生对照清单继续实现或演示，生成 trace 并补失败恢复规则。</a:t>
+              <a:t>学生动作：</a:t>
+            </a:r>
+          </a:p>
+          <a:p xmlns:a="http://schemas.openxmlformats.org/drawingml/2006/main">
+            <a:r>
+              <a:t>教师中点点评后，学生对照清单继续实现或演示，生成 trace 并补失败恢复规则。</a:t>
             </a:r>
           </a:p>
           <a:p xmlns:a="http://schemas.openxmlformats.org/drawingml/2006/main">
@@ -1328,12 +2408,57 @@
           </a:p>
           <a:p xmlns:a="http://schemas.openxmlformats.org/drawingml/2006/main">
             <a:r>
+              <a:t>来源与边界：</a:t>
+            </a:r>
+          </a:p>
+          <a:p xmlns:a="http://schemas.openxmlformats.org/drawingml/2006/main">
+            <a:r>
+              <a:t>[assignments.md](../../course/assignments.md) 验证门条件；[handout.md §四·3](./handout.md)。</a:t>
+            </a:r>
+          </a:p>
+          <a:p xmlns:a="http://schemas.openxmlformats.org/drawingml/2006/main">
+            <a:r>
+              <a:t/>
+            </a:r>
+          </a:p>
+          <a:p xmlns:a="http://schemas.openxmlformats.org/drawingml/2006/main">
+            <a:r>
+              <a:t>---</a:t>
+            </a:r>
+          </a:p>
+          <a:p xmlns:a="http://schemas.openxmlformats.org/drawingml/2006/main">
+            <a:r>
+              <a:t/>
+            </a:r>
+          </a:p>
+          <a:p xmlns:a="http://schemas.openxmlformats.org/drawingml/2006/main">
+            <a:r>
               <a:t>[Sources]</a:t>
             </a:r>
           </a:p>
           <a:p xmlns:a="http://schemas.openxmlformats.org/drawingml/2006/main">
             <a:r>
-              <a:t>[assignments.md](../../course/assignments.md) 验证门条件；[handout.md §四·3](./handout.md)。</a:t>
+              <a:t/>
+            </a:r>
+          </a:p>
+          <a:p xmlns:a="http://schemas.openxmlformats.org/drawingml/2006/main">
+            <a:r>
+              <a:t>- 本课 handout.md 与 slides.md</a:t>
+            </a:r>
+          </a:p>
+          <a:p xmlns:a="http://schemas.openxmlformats.org/drawingml/2006/main">
+            <a:r>
+              <a:t/>
+            </a:r>
+          </a:p>
+          <a:p xmlns:a="http://schemas.openxmlformats.org/drawingml/2006/main">
+            <a:r>
+              <a:t>- ../../course/reading-card-case.md</a:t>
+            </a:r>
+          </a:p>
+          <a:p xmlns:a="http://schemas.openxmlformats.org/drawingml/2006/main">
+            <a:r>
+              <a:t/>
             </a:r>
           </a:p>
           <a:p xmlns:a="http://schemas.openxmlformats.org/drawingml/2006/main">
@@ -1408,6 +2533,71 @@
           <a:lstStyle xmlns:a="http://schemas.openxmlformats.org/drawingml/2006/main"/>
           <a:p xmlns:a="http://schemas.openxmlformats.org/drawingml/2006/main">
             <a:r>
+              <a:t>页面：P19 同伴只问边界、越权与 baseline</a:t>
+            </a:r>
+          </a:p>
+          <a:p xmlns:a="http://schemas.openxmlformats.org/drawingml/2006/main">
+            <a:r>
+              <a:t/>
+            </a:r>
+          </a:p>
+          <a:p xmlns:a="http://schemas.openxmlformats.org/drawingml/2006/main">
+            <a:r>
+              <a:t>讲义位置：本课讲义；见逐页母稿映射表</a:t>
+            </a:r>
+          </a:p>
+          <a:p xmlns:a="http://schemas.openxmlformats.org/drawingml/2006/main">
+            <a:r>
+              <a:t/>
+            </a:r>
+          </a:p>
+          <a:p xmlns:a="http://schemas.openxmlformats.org/drawingml/2006/main">
+            <a:r>
+              <a:t>屏显核对：</a:t>
+            </a:r>
+          </a:p>
+          <a:p xmlns:a="http://schemas.openxmlformats.org/drawingml/2006/main">
+            <a:r>
+              <a:t>- 作者的最小工作流</a:t>
+            </a:r>
+          </a:p>
+          <a:p xmlns:a="http://schemas.openxmlformats.org/drawingml/2006/main">
+            <a:r>
+              <a:t>- 边界｜哪些动作不交给 Agent</a:t>
+            </a:r>
+          </a:p>
+          <a:p xmlns:a="http://schemas.openxmlformats.org/drawingml/2006/main">
+            <a:r>
+              <a:t>- 越权｜哪个节点必须停</a:t>
+            </a:r>
+          </a:p>
+          <a:p xmlns:a="http://schemas.openxmlformats.org/drawingml/2006/main">
+            <a:r>
+              <a:t>- baseline｜与什么比较，如何评分</a:t>
+            </a:r>
+          </a:p>
+          <a:p xmlns:a="http://schemas.openxmlformats.org/drawingml/2006/main">
+            <a:r>
+              <a:t>- 同伴只提问题</a:t>
+            </a:r>
+          </a:p>
+          <a:p xmlns:a="http://schemas.openxmlformats.org/drawingml/2006/main">
+            <a:r>
+              <a:t>- 作者记录处理方式与真实理由</a:t>
+            </a:r>
+          </a:p>
+          <a:p xmlns:a="http://schemas.openxmlformats.org/drawingml/2006/main">
+            <a:r>
+              <a:t/>
+            </a:r>
+          </a:p>
+          <a:p xmlns:a="http://schemas.openxmlformats.org/drawingml/2006/main">
+            <a:r>
+              <a:t>教师讲述：</a:t>
+            </a:r>
+          </a:p>
+          <a:p xmlns:a="http://schemas.openxmlformats.org/drawingml/2006/main">
+            <a:r>
               <a:t>每人约 3 分钟：一人 45 秒说明动作和契约；同伴按三问反馈；作者记录处理决定。反馈不要求立即改写。</a:t>
             </a:r>
           </a:p>
@@ -1418,7 +2608,12 @@
           </a:p>
           <a:p xmlns:a="http://schemas.openxmlformats.org/drawingml/2006/main">
             <a:r>
-              <a:t>学生动作：两人互查；人数为奇数时组成三人组，每人缩短说明时间。</a:t>
+              <a:t>学生动作：</a:t>
+            </a:r>
+          </a:p>
+          <a:p xmlns:a="http://schemas.openxmlformats.org/drawingml/2006/main">
+            <a:r>
+              <a:t>两人互查；人数为奇数时组成三人组，每人缩短说明时间。</a:t>
             </a:r>
           </a:p>
           <a:p xmlns:a="http://schemas.openxmlformats.org/drawingml/2006/main">
@@ -1428,12 +2623,57 @@
           </a:p>
           <a:p xmlns:a="http://schemas.openxmlformats.org/drawingml/2006/main">
             <a:r>
+              <a:t>来源与边界：</a:t>
+            </a:r>
+          </a:p>
+          <a:p xmlns:a="http://schemas.openxmlformats.org/drawingml/2006/main">
+            <a:r>
+              <a:t>同伴反馈为形成性活动，不单独计分，不共同提交。</a:t>
+            </a:r>
+          </a:p>
+          <a:p xmlns:a="http://schemas.openxmlformats.org/drawingml/2006/main">
+            <a:r>
+              <a:t/>
+            </a:r>
+          </a:p>
+          <a:p xmlns:a="http://schemas.openxmlformats.org/drawingml/2006/main">
+            <a:r>
+              <a:t>---</a:t>
+            </a:r>
+          </a:p>
+          <a:p xmlns:a="http://schemas.openxmlformats.org/drawingml/2006/main">
+            <a:r>
+              <a:t/>
+            </a:r>
+          </a:p>
+          <a:p xmlns:a="http://schemas.openxmlformats.org/drawingml/2006/main">
+            <a:r>
               <a:t>[Sources]</a:t>
             </a:r>
           </a:p>
           <a:p xmlns:a="http://schemas.openxmlformats.org/drawingml/2006/main">
             <a:r>
-              <a:t>同伴反馈为形成性活动，不单独计分，不共同提交。</a:t>
+              <a:t/>
+            </a:r>
+          </a:p>
+          <a:p xmlns:a="http://schemas.openxmlformats.org/drawingml/2006/main">
+            <a:r>
+              <a:t>- 本课 handout.md 与 slides.md</a:t>
+            </a:r>
+          </a:p>
+          <a:p xmlns:a="http://schemas.openxmlformats.org/drawingml/2006/main">
+            <a:r>
+              <a:t/>
+            </a:r>
+          </a:p>
+          <a:p xmlns:a="http://schemas.openxmlformats.org/drawingml/2006/main">
+            <a:r>
+              <a:t>- ../../course/reading-card-case.md</a:t>
+            </a:r>
+          </a:p>
+          <a:p xmlns:a="http://schemas.openxmlformats.org/drawingml/2006/main">
+            <a:r>
+              <a:t/>
             </a:r>
           </a:p>
           <a:p xmlns:a="http://schemas.openxmlformats.org/drawingml/2006/main">
@@ -1508,6 +2748,121 @@
           <a:lstStyle xmlns:a="http://schemas.openxmlformats.org/drawingml/2006/main"/>
           <a:p xmlns:a="http://schemas.openxmlformats.org/drawingml/2006/main">
             <a:r>
+              <a:t>页面：P02 八个设计决定围绕同一工作流展开</a:t>
+            </a:r>
+          </a:p>
+          <a:p xmlns:a="http://schemas.openxmlformats.org/drawingml/2006/main">
+            <a:r>
+              <a:t/>
+            </a:r>
+          </a:p>
+          <a:p xmlns:a="http://schemas.openxmlformats.org/drawingml/2006/main">
+            <a:r>
+              <a:t>讲义位置：本课讲义；见逐页母稿映射表</a:t>
+            </a:r>
+          </a:p>
+          <a:p xmlns:a="http://schemas.openxmlformats.org/drawingml/2006/main">
+            <a:r>
+              <a:t/>
+            </a:r>
+          </a:p>
+          <a:p xmlns:a="http://schemas.openxmlformats.org/drawingml/2006/main">
+            <a:r>
+              <a:t>屏显核对：</a:t>
+            </a:r>
+          </a:p>
+          <a:p xmlns:a="http://schemas.openxmlformats.org/drawingml/2006/main">
+            <a:r>
+              <a:t>- 任务契约</a:t>
+            </a:r>
+          </a:p>
+          <a:p xmlns:a="http://schemas.openxmlformats.org/drawingml/2006/main">
+            <a:r>
+              <a:t>- 输入输出与边界</a:t>
+            </a:r>
+          </a:p>
+          <a:p xmlns:a="http://schemas.openxmlformats.org/drawingml/2006/main">
+            <a:r>
+              <a:t>- Context / 状态</a:t>
+            </a:r>
+          </a:p>
+          <a:p xmlns:a="http://schemas.openxmlformats.org/drawingml/2006/main">
+            <a:r>
+              <a:t>- 可审计工件</a:t>
+            </a:r>
+          </a:p>
+          <a:p xmlns:a="http://schemas.openxmlformats.org/drawingml/2006/main">
+            <a:r>
+              <a:t>- 工具权限</a:t>
+            </a:r>
+          </a:p>
+          <a:p xmlns:a="http://schemas.openxmlformats.org/drawingml/2006/main">
+            <a:r>
+              <a:t>- 五档与确认点</a:t>
+            </a:r>
+          </a:p>
+          <a:p xmlns:a="http://schemas.openxmlformats.org/drawingml/2006/main">
+            <a:r>
+              <a:t>- 执行循环</a:t>
+            </a:r>
+          </a:p>
+          <a:p xmlns:a="http://schemas.openxmlformats.org/drawingml/2006/main">
+            <a:r>
+              <a:t>- 继承 L11 冻结循环</a:t>
+            </a:r>
+          </a:p>
+          <a:p xmlns:a="http://schemas.openxmlformats.org/drawingml/2006/main">
+            <a:r>
+              <a:t>- 工件追踪</a:t>
+            </a:r>
+          </a:p>
+          <a:p xmlns:a="http://schemas.openxmlformats.org/drawingml/2006/main">
+            <a:r>
+              <a:t>- run ID</a:t>
+            </a:r>
+          </a:p>
+          <a:p xmlns:a="http://schemas.openxmlformats.org/drawingml/2006/main">
+            <a:r>
+              <a:t>- Evals</a:t>
+            </a:r>
+          </a:p>
+          <a:p xmlns:a="http://schemas.openxmlformats.org/drawingml/2006/main">
+            <a:r>
+              <a:t>- 独立评价</a:t>
+            </a:r>
+          </a:p>
+          <a:p xmlns:a="http://schemas.openxmlformats.org/drawingml/2006/main">
+            <a:r>
+              <a:t>- 人工审核</a:t>
+            </a:r>
+          </a:p>
+          <a:p xmlns:a="http://schemas.openxmlformats.org/drawingml/2006/main">
+            <a:r>
+              <a:t>- 研究决定</a:t>
+            </a:r>
+          </a:p>
+          <a:p xmlns:a="http://schemas.openxmlformats.org/drawingml/2006/main">
+            <a:r>
+              <a:t>- 失败恢复</a:t>
+            </a:r>
+          </a:p>
+          <a:p xmlns:a="http://schemas.openxmlformats.org/drawingml/2006/main">
+            <a:r>
+              <a:t>- 保留 trace</a:t>
+            </a:r>
+          </a:p>
+          <a:p xmlns:a="http://schemas.openxmlformats.org/drawingml/2006/main">
+            <a:r>
+              <a:t/>
+            </a:r>
+          </a:p>
+          <a:p xmlns:a="http://schemas.openxmlformats.org/drawingml/2006/main">
+            <a:r>
+              <a:t>教师讲述：</a:t>
+            </a:r>
+          </a:p>
+          <a:p xmlns:a="http://schemas.openxmlformats.org/drawingml/2006/main">
+            <a:r>
               <a:t>先以 AutoResearch commit 228791f 拆解真实 program.md，再回到同一阅读卡任务设计个人工作流。八要素是课程分析框架，不能声称原项目已完整实现课程权限或审核制度。P03–P08 只补前两课尚未显式化的设计决定。</a:t>
             </a:r>
           </a:p>
@@ -1518,7 +2873,12 @@
           </a:p>
           <a:p xmlns:a="http://schemas.openxmlformats.org/drawingml/2006/main">
             <a:r>
-              <a:t>学生动作：让学生预测：现成 Skill 通常在哪几项上最不透明？请学生打开或领取拆解卡模板。</a:t>
+              <a:t>学生动作：</a:t>
+            </a:r>
+          </a:p>
+          <a:p xmlns:a="http://schemas.openxmlformats.org/drawingml/2006/main">
+            <a:r>
+              <a:t>让学生预测：现成 Skill 通常在哪几项上最不透明？请学生打开或领取拆解卡模板。</a:t>
             </a:r>
           </a:p>
           <a:p xmlns:a="http://schemas.openxmlformats.org/drawingml/2006/main">
@@ -1528,12 +2888,122 @@
           </a:p>
           <a:p xmlns:a="http://schemas.openxmlformats.org/drawingml/2006/main">
             <a:r>
+              <a:t>本课板书、诊断与串词：</a:t>
+            </a:r>
+          </a:p>
+          <a:p xmlns:a="http://schemas.openxmlformats.org/drawingml/2006/main">
+            <a:r>
+              <a:t>本节替换同类口头提示，不增加既有时段。开场诊断嵌入现有开场/回顾，后续再沿原实践时段操作。</a:t>
+            </a:r>
+          </a:p>
+          <a:p xmlns:a="http://schemas.openxmlformats.org/drawingml/2006/main">
+            <a:r>
+              <a:t/>
+            </a:r>
+          </a:p>
+          <a:p xmlns:a="http://schemas.openxmlformats.org/drawingml/2006/main">
+            <a:r>
+              <a:t>- **板书主线**：科研动作 → 输入 → 执行 → 评价 → 人工判断。</a:t>
+            </a:r>
+          </a:p>
+          <a:p xmlns:a="http://schemas.openxmlformats.org/drawingml/2006/main">
+            <a:r>
+              <a:t>- **诊断问题**：接口拒绝gold，能否证明任意程序都读不到它？</a:t>
+            </a:r>
+          </a:p>
+          <a:p xmlns:a="http://schemas.openxmlformats.org/drawingml/2006/main">
+            <a:r>
+              <a:t>- **预期回答**：不能，只证明该入口的角色控制；真实隔离另验。</a:t>
+            </a:r>
+          </a:p>
+          <a:p xmlns:a="http://schemas.openxmlformats.org/drawingml/2006/main">
+            <a:r>
+              <a:t>- **常见误答后的追问**：若选型只写Agent，先问固定链为何不足。</a:t>
+            </a:r>
+          </a:p>
+          <a:p xmlns:a="http://schemas.openxmlformats.org/drawingml/2006/main">
+            <a:r>
+              <a:t>- **过渡串词**：“有了可演示路径，第13课用已有结果评价它的实际影响。”</a:t>
+            </a:r>
+          </a:p>
+          <a:p xmlns:a="http://schemas.openxmlformats.org/drawingml/2006/main">
+            <a:r>
+              <a:t>- **当堂最小产出**：一个本人科研动作的工作流说明和可演示路径。</a:t>
+            </a:r>
+          </a:p>
+          <a:p xmlns:a="http://schemas.openxmlformats.org/drawingml/2006/main">
+            <a:r>
+              <a:t>- **退出记录**：写“已完成的动作、本人项目仍缺的证据/工件、下次补齐位置”。使用教师包时标明课堂方法练习，不能据此宣称本人研究门通过；正式提交课次仍为第 6、9、13、16 课。</a:t>
+            </a:r>
+          </a:p>
+          <a:p xmlns:a="http://schemas.openxmlformats.org/drawingml/2006/main">
+            <a:r>
+              <a:t/>
+            </a:r>
+          </a:p>
+          <a:p xmlns:a="http://schemas.openxmlformats.org/drawingml/2006/main">
+            <a:r>
+              <a:t>来源与边界：</a:t>
+            </a:r>
+          </a:p>
+          <a:p xmlns:a="http://schemas.openxmlformats.org/drawingml/2006/main">
+            <a:r>
+              <a:t>[AutoResearch `program.md`（固定 commit `228791f`）](https://github.com/karpathy/autoresearch/blob/228791fb499afffb54b46200aca536f79142f117/program.md)；[handout.md §二](./handout.md)。2026-09-13 回源核验；工程案例字段摘述，课程迁移要求另行标明，不作为通用自主科研能力证据。</a:t>
+            </a:r>
+          </a:p>
+          <a:p xmlns:a="http://schemas.openxmlformats.org/drawingml/2006/main">
+            <a:r>
+              <a:t/>
+            </a:r>
+          </a:p>
+          <a:p xmlns:a="http://schemas.openxmlformats.org/drawingml/2006/main">
+            <a:r>
+              <a:t>---</a:t>
+            </a:r>
+          </a:p>
+          <a:p xmlns:a="http://schemas.openxmlformats.org/drawingml/2006/main">
+            <a:r>
+              <a:t/>
+            </a:r>
+          </a:p>
+          <a:p xmlns:a="http://schemas.openxmlformats.org/drawingml/2006/main">
+            <a:r>
               <a:t>[Sources]</a:t>
             </a:r>
           </a:p>
           <a:p xmlns:a="http://schemas.openxmlformats.org/drawingml/2006/main">
             <a:r>
-              <a:t>[AutoResearch `program.md`（固定 commit `228791f`）](https://github.com/karpathy/autoresearch/blob/228791fb499afffb54b46200aca536f79142f117/program.md)；[handout.md §二](./handout.md)。2026-09-13 回源核验；工程案例字段摘述，课程迁移要求另行标明，不作为通用自主科研能力证据。</a:t>
+              <a:t/>
+            </a:r>
+          </a:p>
+          <a:p xmlns:a="http://schemas.openxmlformats.org/drawingml/2006/main">
+            <a:r>
+              <a:t>- https://github.com/karpathy/autoresearch/blob/228791fb499afffb54b46200aca536f79142f117/program.md</a:t>
+            </a:r>
+          </a:p>
+          <a:p xmlns:a="http://schemas.openxmlformats.org/drawingml/2006/main">
+            <a:r>
+              <a:t/>
+            </a:r>
+          </a:p>
+          <a:p xmlns:a="http://schemas.openxmlformats.org/drawingml/2006/main">
+            <a:r>
+              <a:t>- 本课 handout.md 与 slides.md</a:t>
+            </a:r>
+          </a:p>
+          <a:p xmlns:a="http://schemas.openxmlformats.org/drawingml/2006/main">
+            <a:r>
+              <a:t/>
+            </a:r>
+          </a:p>
+          <a:p xmlns:a="http://schemas.openxmlformats.org/drawingml/2006/main">
+            <a:r>
+              <a:t>- ../../course/reading-card-case.md</a:t>
+            </a:r>
+          </a:p>
+          <a:p xmlns:a="http://schemas.openxmlformats.org/drawingml/2006/main">
+            <a:r>
+              <a:t/>
             </a:r>
           </a:p>
           <a:p xmlns:a="http://schemas.openxmlformats.org/drawingml/2006/main">
@@ -1608,6 +3078,81 @@
           <a:lstStyle xmlns:a="http://schemas.openxmlformats.org/drawingml/2006/main"/>
           <a:p xmlns:a="http://schemas.openxmlformats.org/drawingml/2006/main">
             <a:r>
+              <a:t>页面：P20 本讲知识点总结</a:t>
+            </a:r>
+          </a:p>
+          <a:p xmlns:a="http://schemas.openxmlformats.org/drawingml/2006/main">
+            <a:r>
+              <a:t/>
+            </a:r>
+          </a:p>
+          <a:p xmlns:a="http://schemas.openxmlformats.org/drawingml/2006/main">
+            <a:r>
+              <a:t>讲义位置：本课讲义；见逐页母稿映射表</a:t>
+            </a:r>
+          </a:p>
+          <a:p xmlns:a="http://schemas.openxmlformats.org/drawingml/2006/main">
+            <a:r>
+              <a:t/>
+            </a:r>
+          </a:p>
+          <a:p xmlns:a="http://schemas.openxmlformats.org/drawingml/2006/main">
+            <a:r>
+              <a:t>屏显核对：</a:t>
+            </a:r>
+          </a:p>
+          <a:p xmlns:a="http://schemas.openxmlformats.org/drawingml/2006/main">
+            <a:r>
+              <a:t>- 八要素契约</a:t>
+            </a:r>
+          </a:p>
+          <a:p xmlns:a="http://schemas.openxmlformats.org/drawingml/2006/main">
+            <a:r>
+              <a:t>- 本讲输入</a:t>
+            </a:r>
+          </a:p>
+          <a:p xmlns:a="http://schemas.openxmlformats.org/drawingml/2006/main">
+            <a:r>
+              <a:t>- 权限与循环</a:t>
+            </a:r>
+          </a:p>
+          <a:p xmlns:a="http://schemas.openxmlformats.org/drawingml/2006/main">
+            <a:r>
+              <a:t>- 本讲执行</a:t>
+            </a:r>
+          </a:p>
+          <a:p xmlns:a="http://schemas.openxmlformats.org/drawingml/2006/main">
+            <a:r>
+              <a:t>- 独立评价</a:t>
+            </a:r>
+          </a:p>
+          <a:p xmlns:a="http://schemas.openxmlformats.org/drawingml/2006/main">
+            <a:r>
+              <a:t>- 本讲证据</a:t>
+            </a:r>
+          </a:p>
+          <a:p xmlns:a="http://schemas.openxmlformats.org/drawingml/2006/main">
+            <a:r>
+              <a:t>- 失败 trace</a:t>
+            </a:r>
+          </a:p>
+          <a:p xmlns:a="http://schemas.openxmlformats.org/drawingml/2006/main">
+            <a:r>
+              <a:t>- 下一步</a:t>
+            </a:r>
+          </a:p>
+          <a:p xmlns:a="http://schemas.openxmlformats.org/drawingml/2006/main">
+            <a:r>
+              <a:t/>
+            </a:r>
+          </a:p>
+          <a:p xmlns:a="http://schemas.openxmlformats.org/drawingml/2006/main">
+            <a:r>
+              <a:t>教师讲述：</a:t>
+            </a:r>
+          </a:p>
+          <a:p xmlns:a="http://schemas.openxmlformats.org/drawingml/2006/main">
+            <a:r>
               <a:t>回收八要素契约、权限、Evals 与失败恢复的关系。本页不新增任务。</a:t>
             </a:r>
           </a:p>
@@ -1618,7 +3163,12 @@
           </a:p>
           <a:p xmlns:a="http://schemas.openxmlformats.org/drawingml/2006/main">
             <a:r>
-              <a:t>学生动作：学生指出第 13 课验证前最需要补齐的一项。</a:t>
+              <a:t>学生动作：</a:t>
+            </a:r>
+          </a:p>
+          <a:p xmlns:a="http://schemas.openxmlformats.org/drawingml/2006/main">
+            <a:r>
+              <a:t>学生指出第 13 课验证前最需要补齐的一项。</a:t>
             </a:r>
           </a:p>
           <a:p xmlns:a="http://schemas.openxmlformats.org/drawingml/2006/main">
@@ -1628,12 +3178,57 @@
           </a:p>
           <a:p xmlns:a="http://schemas.openxmlformats.org/drawingml/2006/main">
             <a:r>
+              <a:t>来源与边界：</a:t>
+            </a:r>
+          </a:p>
+          <a:p xmlns:a="http://schemas.openxmlformats.org/drawingml/2006/main">
+            <a:r>
+              <a:t>[handout.md](./handout.md) §二-§六；[teaching-plan.md](./teaching-plan.md) 第四至六节。</a:t>
+            </a:r>
+          </a:p>
+          <a:p xmlns:a="http://schemas.openxmlformats.org/drawingml/2006/main">
+            <a:r>
+              <a:t/>
+            </a:r>
+          </a:p>
+          <a:p xmlns:a="http://schemas.openxmlformats.org/drawingml/2006/main">
+            <a:r>
+              <a:t>---</a:t>
+            </a:r>
+          </a:p>
+          <a:p xmlns:a="http://schemas.openxmlformats.org/drawingml/2006/main">
+            <a:r>
+              <a:t/>
+            </a:r>
+          </a:p>
+          <a:p xmlns:a="http://schemas.openxmlformats.org/drawingml/2006/main">
+            <a:r>
               <a:t>[Sources]</a:t>
             </a:r>
           </a:p>
           <a:p xmlns:a="http://schemas.openxmlformats.org/drawingml/2006/main">
             <a:r>
-              <a:t>[handout.md](./handout.md) §二-§六；[teaching-plan.md](./teaching-plan.md) 第四至六节。</a:t>
+              <a:t/>
+            </a:r>
+          </a:p>
+          <a:p xmlns:a="http://schemas.openxmlformats.org/drawingml/2006/main">
+            <a:r>
+              <a:t>- 本课 handout.md 与 slides.md</a:t>
+            </a:r>
+          </a:p>
+          <a:p xmlns:a="http://schemas.openxmlformats.org/drawingml/2006/main">
+            <a:r>
+              <a:t/>
+            </a:r>
+          </a:p>
+          <a:p xmlns:a="http://schemas.openxmlformats.org/drawingml/2006/main">
+            <a:r>
+              <a:t>- ../../course/reading-card-case.md</a:t>
+            </a:r>
+          </a:p>
+          <a:p xmlns:a="http://schemas.openxmlformats.org/drawingml/2006/main">
+            <a:r>
+              <a:t/>
             </a:r>
           </a:p>
           <a:p xmlns:a="http://schemas.openxmlformats.org/drawingml/2006/main">
@@ -1708,6 +3303,71 @@
           <a:lstStyle xmlns:a="http://schemas.openxmlformats.org/drawingml/2006/main"/>
           <a:p xmlns:a="http://schemas.openxmlformats.org/drawingml/2006/main">
             <a:r>
+              <a:t>页面：P21 把真实运行结果带到第 13 课</a:t>
+            </a:r>
+          </a:p>
+          <a:p xmlns:a="http://schemas.openxmlformats.org/drawingml/2006/main">
+            <a:r>
+              <a:t/>
+            </a:r>
+          </a:p>
+          <a:p xmlns:a="http://schemas.openxmlformats.org/drawingml/2006/main">
+            <a:r>
+              <a:t>讲义位置：本课讲义；见逐页母稿映射表</a:t>
+            </a:r>
+          </a:p>
+          <a:p xmlns:a="http://schemas.openxmlformats.org/drawingml/2006/main">
+            <a:r>
+              <a:t/>
+            </a:r>
+          </a:p>
+          <a:p xmlns:a="http://schemas.openxmlformats.org/drawingml/2006/main">
+            <a:r>
+              <a:t>屏显核对：</a:t>
+            </a:r>
+          </a:p>
+          <a:p xmlns:a="http://schemas.openxmlformats.org/drawingml/2006/main">
+            <a:r>
+              <a:t>- L10 / 受限执行</a:t>
+            </a:r>
+          </a:p>
+          <a:p xmlns:a="http://schemas.openxmlformats.org/drawingml/2006/main">
+            <a:r>
+              <a:t>- L11 / 冻结循环</a:t>
+            </a:r>
+          </a:p>
+          <a:p xmlns:a="http://schemas.openxmlformats.org/drawingml/2006/main">
+            <a:r>
+              <a:t>- L12 / 最小工作流</a:t>
+            </a:r>
+          </a:p>
+          <a:p xmlns:a="http://schemas.openxmlformats.org/drawingml/2006/main">
+            <a:r>
+              <a:t>- 当前位置 / 输出</a:t>
+            </a:r>
+          </a:p>
+          <a:p xmlns:a="http://schemas.openxmlformats.org/drawingml/2006/main">
+            <a:r>
+              <a:t>- L13 / 评价</a:t>
+            </a:r>
+          </a:p>
+          <a:p xmlns:a="http://schemas.openxmlformats.org/drawingml/2006/main">
+            <a:r>
+              <a:t>- 课前带来：结果对照｜失败 trace｜人工审核记录</a:t>
+            </a:r>
+          </a:p>
+          <a:p xmlns:a="http://schemas.openxmlformats.org/drawingml/2006/main">
+            <a:r>
+              <a:t/>
+            </a:r>
+          </a:p>
+          <a:p xmlns:a="http://schemas.openxmlformats.org/drawingml/2006/main">
+            <a:r>
+              <a:t>教师讲述：</a:t>
+            </a:r>
+          </a:p>
+          <a:p xmlns:a="http://schemas.openxmlformats.org/drawingml/2006/main">
+            <a:r>
               <a:t>回扣本课目标：学生已形成一份可审计的工作流说明、可运行或可复现演示的最小原型、trace 和评价计划。课后补齐批量运行结果与失败记录；第 13 课直接用已有结果完成评价和失败复盘，不从零重跑完整研究。</a:t>
             </a:r>
           </a:p>
@@ -1718,7 +3378,12 @@
           </a:p>
           <a:p xmlns:a="http://schemas.openxmlformats.org/drawingml/2006/main">
             <a:r>
-              <a:t>学生动作：学生提交退出卡或保存在个人项目 `notes/`。</a:t>
+              <a:t>学生动作：</a:t>
+            </a:r>
+          </a:p>
+          <a:p xmlns:a="http://schemas.openxmlformats.org/drawingml/2006/main">
+            <a:r>
+              <a:t>学生提交退出卡或保存在个人项目 `notes/`。</a:t>
             </a:r>
           </a:p>
           <a:p xmlns:a="http://schemas.openxmlformats.org/drawingml/2006/main">
@@ -1728,12 +3393,47 @@
           </a:p>
           <a:p xmlns:a="http://schemas.openxmlformats.org/drawingml/2006/main">
             <a:r>
+              <a:t>来源与边界：</a:t>
+            </a:r>
+          </a:p>
+          <a:p xmlns:a="http://schemas.openxmlformats.org/drawingml/2006/main">
+            <a:r>
+              <a:t>[assignments.md](../../course/assignments.md) 验证门条件；[reading-list.md](../../course/reading-list.md) 第 12-13 课。</a:t>
+            </a:r>
+          </a:p>
+          <a:p xmlns:a="http://schemas.openxmlformats.org/drawingml/2006/main">
+            <a:r>
+              <a:t/>
+            </a:r>
+          </a:p>
+          <a:p xmlns:a="http://schemas.openxmlformats.org/drawingml/2006/main">
+            <a:r>
               <a:t>[Sources]</a:t>
             </a:r>
           </a:p>
           <a:p xmlns:a="http://schemas.openxmlformats.org/drawingml/2006/main">
             <a:r>
-              <a:t>[assignments.md](../../course/assignments.md) 验证门条件；[reading-list.md](../../course/reading-list.md) 第 12-13 课。</a:t>
+              <a:t/>
+            </a:r>
+          </a:p>
+          <a:p xmlns:a="http://schemas.openxmlformats.org/drawingml/2006/main">
+            <a:r>
+              <a:t>- 本课 handout.md 与 slides.md</a:t>
+            </a:r>
+          </a:p>
+          <a:p xmlns:a="http://schemas.openxmlformats.org/drawingml/2006/main">
+            <a:r>
+              <a:t/>
+            </a:r>
+          </a:p>
+          <a:p xmlns:a="http://schemas.openxmlformats.org/drawingml/2006/main">
+            <a:r>
+              <a:t>- ../../course/reading-card-case.md</a:t>
+            </a:r>
+          </a:p>
+          <a:p xmlns:a="http://schemas.openxmlformats.org/drawingml/2006/main">
+            <a:r>
+              <a:t/>
             </a:r>
           </a:p>
           <a:p xmlns:a="http://schemas.openxmlformats.org/drawingml/2006/main">
@@ -1808,6 +3508,76 @@
           <a:lstStyle xmlns:a="http://schemas.openxmlformats.org/drawingml/2006/main"/>
           <a:p xmlns:a="http://schemas.openxmlformats.org/drawingml/2006/main">
             <a:r>
+              <a:t>页面：P03 AutoResearch 任务契约</a:t>
+            </a:r>
+          </a:p>
+          <a:p xmlns:a="http://schemas.openxmlformats.org/drawingml/2006/main">
+            <a:r>
+              <a:t/>
+            </a:r>
+          </a:p>
+          <a:p xmlns:a="http://schemas.openxmlformats.org/drawingml/2006/main">
+            <a:r>
+              <a:t>讲义位置：本课讲义；见逐页母稿映射表</a:t>
+            </a:r>
+          </a:p>
+          <a:p xmlns:a="http://schemas.openxmlformats.org/drawingml/2006/main">
+            <a:r>
+              <a:t/>
+            </a:r>
+          </a:p>
+          <a:p xmlns:a="http://schemas.openxmlformats.org/drawingml/2006/main">
+            <a:r>
+              <a:t>屏显核对：</a:t>
+            </a:r>
+          </a:p>
+          <a:p xmlns:a="http://schemas.openxmlformats.org/drawingml/2006/main">
+            <a:r>
+              <a:t>- program.md · 228791f</a:t>
+            </a:r>
+          </a:p>
+          <a:p xmlns:a="http://schemas.openxmlformats.org/drawingml/2006/main">
+            <a:r>
+              <a:t>- 目标：降低验证集 val_bpb</a:t>
+            </a:r>
+          </a:p>
+          <a:p xmlns:a="http://schemas.openxmlformats.org/drawingml/2006/main">
+            <a:r>
+              <a:t>- 读取：README.md 与 prepare.py</a:t>
+            </a:r>
+          </a:p>
+          <a:p xmlns:a="http://schemas.openxmlformats.org/drawingml/2006/main">
+            <a:r>
+              <a:t>- 代码改动：仅 train.py</a:t>
+            </a:r>
+          </a:p>
+          <a:p xmlns:a="http://schemas.openxmlformats.org/drawingml/2006/main">
+            <a:r>
+              <a:t>- 禁止：改评价函数、添加依赖</a:t>
+            </a:r>
+          </a:p>
+          <a:p xmlns:a="http://schemas.openxmlformats.org/drawingml/2006/main">
+            <a:r>
+              <a:t>- 产出：run.log、results.tsv 与 commit</a:t>
+            </a:r>
+          </a:p>
+          <a:p xmlns:a="http://schemas.openxmlformats.org/drawingml/2006/main">
+            <a:r>
+              <a:t>- 课程阅读卡任务 /  / 固定论文与配置 / 保留全部输出 / 独立人工基准评价</a:t>
+            </a:r>
+          </a:p>
+          <a:p xmlns:a="http://schemas.openxmlformats.org/drawingml/2006/main">
+            <a:r>
+              <a:t/>
+            </a:r>
+          </a:p>
+          <a:p xmlns:a="http://schemas.openxmlformats.org/drawingml/2006/main">
+            <a:r>
+              <a:t>教师讲述：</a:t>
+            </a:r>
+          </a:p>
+          <a:p xmlns:a="http://schemas.openxmlformats.org/drawingml/2006/main">
+            <a:r>
               <a:t>这是固定 commit 的真实契约字段摘述。单次训练预算为 300 秒，不含启动与编译；原项目优化 val_bpb，只允许改训练代码，不许改 prepare.py、评价函数或增依赖。日志是允许生成的工件，因此“仅修改 train.py”特指实验代码范围。右侧是课程阅读卡的迁移要求，属于不同任务。请学生从左侧指出两条禁止项。</a:t>
             </a:r>
           </a:p>
@@ -1818,7 +3588,12 @@
           </a:p>
           <a:p xmlns:a="http://schemas.openxmlformats.org/drawingml/2006/main">
             <a:r>
-              <a:t>学生动作：请学生指出 AutoResearch 契约里的两个禁止项，并说出自己工作流的输入和成功标准各一句。</a:t>
+              <a:t>学生动作：</a:t>
+            </a:r>
+          </a:p>
+          <a:p xmlns:a="http://schemas.openxmlformats.org/drawingml/2006/main">
+            <a:r>
+              <a:t>请学生指出 AutoResearch 契约里的两个禁止项，并说出自己工作流的输入和成功标准各一句。</a:t>
             </a:r>
           </a:p>
           <a:p xmlns:a="http://schemas.openxmlformats.org/drawingml/2006/main">
@@ -1828,12 +3603,67 @@
           </a:p>
           <a:p xmlns:a="http://schemas.openxmlformats.org/drawingml/2006/main">
             <a:r>
+              <a:t>来源与边界：</a:t>
+            </a:r>
+          </a:p>
+          <a:p xmlns:a="http://schemas.openxmlformats.org/drawingml/2006/main">
+            <a:r>
+              <a:t>[AutoResearch `program.md`（固定 commit `228791f`）](https://github.com/karpathy/autoresearch/blob/228791fb499afffb54b46200aca536f79142f117/program.md)；[handout.md §二](./handout.md)。2026-09-13 回源核验；工程案例字段摘述，课程迁移要求另行标明，不作为通用自主科研能力证据。</a:t>
+            </a:r>
+          </a:p>
+          <a:p xmlns:a="http://schemas.openxmlformats.org/drawingml/2006/main">
+            <a:r>
+              <a:t/>
+            </a:r>
+          </a:p>
+          <a:p xmlns:a="http://schemas.openxmlformats.org/drawingml/2006/main">
+            <a:r>
+              <a:t>---</a:t>
+            </a:r>
+          </a:p>
+          <a:p xmlns:a="http://schemas.openxmlformats.org/drawingml/2006/main">
+            <a:r>
+              <a:t/>
+            </a:r>
+          </a:p>
+          <a:p xmlns:a="http://schemas.openxmlformats.org/drawingml/2006/main">
+            <a:r>
               <a:t>[Sources]</a:t>
             </a:r>
           </a:p>
           <a:p xmlns:a="http://schemas.openxmlformats.org/drawingml/2006/main">
             <a:r>
-              <a:t>[AutoResearch `program.md`（固定 commit `228791f`）](https://github.com/karpathy/autoresearch/blob/228791fb499afffb54b46200aca536f79142f117/program.md)；[handout.md §二](./handout.md)。2026-09-13 回源核验；工程案例字段摘述，课程迁移要求另行标明，不作为通用自主科研能力证据。</a:t>
+              <a:t/>
+            </a:r>
+          </a:p>
+          <a:p xmlns:a="http://schemas.openxmlformats.org/drawingml/2006/main">
+            <a:r>
+              <a:t>- https://github.com/karpathy/autoresearch/blob/228791fb499afffb54b46200aca536f79142f117/program.md</a:t>
+            </a:r>
+          </a:p>
+          <a:p xmlns:a="http://schemas.openxmlformats.org/drawingml/2006/main">
+            <a:r>
+              <a:t/>
+            </a:r>
+          </a:p>
+          <a:p xmlns:a="http://schemas.openxmlformats.org/drawingml/2006/main">
+            <a:r>
+              <a:t>- 本课 handout.md 与 slides.md</a:t>
+            </a:r>
+          </a:p>
+          <a:p xmlns:a="http://schemas.openxmlformats.org/drawingml/2006/main">
+            <a:r>
+              <a:t/>
+            </a:r>
+          </a:p>
+          <a:p xmlns:a="http://schemas.openxmlformats.org/drawingml/2006/main">
+            <a:r>
+              <a:t>- ../../course/reading-card-case.md</a:t>
+            </a:r>
+          </a:p>
+          <a:p xmlns:a="http://schemas.openxmlformats.org/drawingml/2006/main">
+            <a:r>
+              <a:t/>
             </a:r>
           </a:p>
           <a:p xmlns:a="http://schemas.openxmlformats.org/drawingml/2006/main">
@@ -1908,6 +3738,81 @@
           <a:lstStyle xmlns:a="http://schemas.openxmlformats.org/drawingml/2006/main"/>
           <a:p xmlns:a="http://schemas.openxmlformats.org/drawingml/2006/main">
             <a:r>
+              <a:t>页面：P04 AutoResearch 的输入与持久状态</a:t>
+            </a:r>
+          </a:p>
+          <a:p xmlns:a="http://schemas.openxmlformats.org/drawingml/2006/main">
+            <a:r>
+              <a:t/>
+            </a:r>
+          </a:p>
+          <a:p xmlns:a="http://schemas.openxmlformats.org/drawingml/2006/main">
+            <a:r>
+              <a:t>讲义位置：本课讲义；见逐页母稿映射表</a:t>
+            </a:r>
+          </a:p>
+          <a:p xmlns:a="http://schemas.openxmlformats.org/drawingml/2006/main">
+            <a:r>
+              <a:t/>
+            </a:r>
+          </a:p>
+          <a:p xmlns:a="http://schemas.openxmlformats.org/drawingml/2006/main">
+            <a:r>
+              <a:t>屏显核对：</a:t>
+            </a:r>
+          </a:p>
+          <a:p xmlns:a="http://schemas.openxmlformats.org/drawingml/2006/main">
+            <a:r>
+              <a:t>- Context：读取的文件</a:t>
+            </a:r>
+          </a:p>
+          <a:p xmlns:a="http://schemas.openxmlformats.org/drawingml/2006/main">
+            <a:r>
+              <a:t>- 状态：实验后留下什么</a:t>
+            </a:r>
+          </a:p>
+          <a:p xmlns:a="http://schemas.openxmlformats.org/drawingml/2006/main">
+            <a:r>
+              <a:t>- README.md：仓库说明</a:t>
+            </a:r>
+          </a:p>
+          <a:p xmlns:a="http://schemas.openxmlformats.org/drawingml/2006/main">
+            <a:r>
+              <a:t>- prepare.py：数据与评价</a:t>
+            </a:r>
+          </a:p>
+          <a:p xmlns:a="http://schemas.openxmlformats.org/drawingml/2006/main">
+            <a:r>
+              <a:t>- train.py：训练实现</a:t>
+            </a:r>
+          </a:p>
+          <a:p xmlns:a="http://schemas.openxmlformats.org/drawingml/2006/main">
+            <a:r>
+              <a:t>- Git commit：代码版本</a:t>
+            </a:r>
+          </a:p>
+          <a:p xmlns:a="http://schemas.openxmlformats.org/drawingml/2006/main">
+            <a:r>
+              <a:t>- run.log：本次运行输出</a:t>
+            </a:r>
+          </a:p>
+          <a:p xmlns:a="http://schemas.openxmlformats.org/drawingml/2006/main">
+            <a:r>
+              <a:t>- results.tsv：跨实验账本</a:t>
+            </a:r>
+          </a:p>
+          <a:p xmlns:a="http://schemas.openxmlformats.org/drawingml/2006/main">
+            <a:r>
+              <a:t/>
+            </a:r>
+          </a:p>
+          <a:p xmlns:a="http://schemas.openxmlformats.org/drawingml/2006/main">
+            <a:r>
+              <a:t>教师讲述：</a:t>
+            </a:r>
+          </a:p>
+          <a:p xmlns:a="http://schemas.openxmlformats.org/drawingml/2006/main">
+            <a:r>
               <a:t>README.md、prepare.py、train.py 是原文规定的上下文。Git、run.log 和 results.tsv 承担不同状态角色，不能用聊天记忆替代。原项目每次重写 run.log；跨实验追踪依赖账本。课程阅读卡要补每个 run ID 的输入快照与独立日志，不能只留下最后一次日志。请学生列出自己的最小 Context。</a:t>
             </a:r>
           </a:p>
@@ -1918,7 +3823,12 @@
           </a:p>
           <a:p xmlns:a="http://schemas.openxmlformats.org/drawingml/2006/main">
             <a:r>
-              <a:t>学生动作：请学生判断：你最近一次用 Agent 时，状态主要存在哪？并列出自己工作流应给 Agent 的最小材料清单。</a:t>
+              <a:t>学生动作：</a:t>
+            </a:r>
+          </a:p>
+          <a:p xmlns:a="http://schemas.openxmlformats.org/drawingml/2006/main">
+            <a:r>
+              <a:t>请学生判断：你最近一次用 Agent 时，状态主要存在哪？并列出自己工作流应给 Agent 的最小材料清单。</a:t>
             </a:r>
           </a:p>
           <a:p xmlns:a="http://schemas.openxmlformats.org/drawingml/2006/main">
@@ -1928,12 +3838,67 @@
           </a:p>
           <a:p xmlns:a="http://schemas.openxmlformats.org/drawingml/2006/main">
             <a:r>
+              <a:t>来源与边界：</a:t>
+            </a:r>
+          </a:p>
+          <a:p xmlns:a="http://schemas.openxmlformats.org/drawingml/2006/main">
+            <a:r>
+              <a:t>[AutoResearch `program.md`（固定 commit `228791f`）](https://github.com/karpathy/autoresearch/blob/228791fb499afffb54b46200aca536f79142f117/program.md)；[handout.md §二](./handout.md)。2026-09-13 回源核验；工程案例字段摘述，课程迁移要求另行标明，不作为通用自主科研能力证据。</a:t>
+            </a:r>
+          </a:p>
+          <a:p xmlns:a="http://schemas.openxmlformats.org/drawingml/2006/main">
+            <a:r>
+              <a:t/>
+            </a:r>
+          </a:p>
+          <a:p xmlns:a="http://schemas.openxmlformats.org/drawingml/2006/main">
+            <a:r>
+              <a:t>---</a:t>
+            </a:r>
+          </a:p>
+          <a:p xmlns:a="http://schemas.openxmlformats.org/drawingml/2006/main">
+            <a:r>
+              <a:t/>
+            </a:r>
+          </a:p>
+          <a:p xmlns:a="http://schemas.openxmlformats.org/drawingml/2006/main">
+            <a:r>
               <a:t>[Sources]</a:t>
             </a:r>
           </a:p>
           <a:p xmlns:a="http://schemas.openxmlformats.org/drawingml/2006/main">
             <a:r>
-              <a:t>[AutoResearch `program.md`（固定 commit `228791f`）](https://github.com/karpathy/autoresearch/blob/228791fb499afffb54b46200aca536f79142f117/program.md)；[handout.md §二](./handout.md)。2026-09-13 回源核验；工程案例字段摘述，课程迁移要求另行标明，不作为通用自主科研能力证据。</a:t>
+              <a:t/>
+            </a:r>
+          </a:p>
+          <a:p xmlns:a="http://schemas.openxmlformats.org/drawingml/2006/main">
+            <a:r>
+              <a:t>- https://github.com/karpathy/autoresearch/blob/228791fb499afffb54b46200aca536f79142f117/program.md</a:t>
+            </a:r>
+          </a:p>
+          <a:p xmlns:a="http://schemas.openxmlformats.org/drawingml/2006/main">
+            <a:r>
+              <a:t/>
+            </a:r>
+          </a:p>
+          <a:p xmlns:a="http://schemas.openxmlformats.org/drawingml/2006/main">
+            <a:r>
+              <a:t>- 本课 handout.md 与 slides.md</a:t>
+            </a:r>
+          </a:p>
+          <a:p xmlns:a="http://schemas.openxmlformats.org/drawingml/2006/main">
+            <a:r>
+              <a:t/>
+            </a:r>
+          </a:p>
+          <a:p xmlns:a="http://schemas.openxmlformats.org/drawingml/2006/main">
+            <a:r>
+              <a:t>- ../../course/reading-card-case.md</a:t>
+            </a:r>
+          </a:p>
+          <a:p xmlns:a="http://schemas.openxmlformats.org/drawingml/2006/main">
+            <a:r>
+              <a:t/>
             </a:r>
           </a:p>
           <a:p xmlns:a="http://schemas.openxmlformats.org/drawingml/2006/main">
@@ -2008,6 +3973,96 @@
           <a:lstStyle xmlns:a="http://schemas.openxmlformats.org/drawingml/2006/main"/>
           <a:p xmlns:a="http://schemas.openxmlformats.org/drawingml/2006/main">
             <a:r>
+              <a:t>页面：P05 AutoResearch 的约束与课程权限</a:t>
+            </a:r>
+          </a:p>
+          <a:p xmlns:a="http://schemas.openxmlformats.org/drawingml/2006/main">
+            <a:r>
+              <a:t/>
+            </a:r>
+          </a:p>
+          <a:p xmlns:a="http://schemas.openxmlformats.org/drawingml/2006/main">
+            <a:r>
+              <a:t>讲义位置：本课讲义；见逐页母稿映射表</a:t>
+            </a:r>
+          </a:p>
+          <a:p xmlns:a="http://schemas.openxmlformats.org/drawingml/2006/main">
+            <a:r>
+              <a:t/>
+            </a:r>
+          </a:p>
+          <a:p xmlns:a="http://schemas.openxmlformats.org/drawingml/2006/main">
+            <a:r>
+              <a:t>屏显核对：</a:t>
+            </a:r>
+          </a:p>
+          <a:p xmlns:a="http://schemas.openxmlformats.org/drawingml/2006/main">
+            <a:r>
+              <a:t>- program.md 约束摘要</a:t>
+            </a:r>
+          </a:p>
+          <a:p xmlns:a="http://schemas.openxmlformats.org/drawingml/2006/main">
+            <a:r>
+              <a:t>- R  prepare.py</a:t>
+            </a:r>
+          </a:p>
+          <a:p xmlns:a="http://schemas.openxmlformats.org/drawingml/2006/main">
+            <a:r>
+              <a:t>- W  train.py（代码范围）</a:t>
+            </a:r>
+          </a:p>
+          <a:p xmlns:a="http://schemas.openxmlformats.org/drawingml/2006/main">
+            <a:r>
+              <a:t>- X  uv run train.py</a:t>
+            </a:r>
+          </a:p>
+          <a:p xmlns:a="http://schemas.openxmlformats.org/drawingml/2006/main">
+            <a:r>
+              <a:t>- W  run.log / results.tsv（日志）</a:t>
+            </a:r>
+          </a:p>
+          <a:p xmlns:a="http://schemas.openxmlformats.org/drawingml/2006/main">
+            <a:r>
+              <a:t>- !  改评价函数 / 添加依赖</a:t>
+            </a:r>
+          </a:p>
+          <a:p xmlns:a="http://schemas.openxmlformats.org/drawingml/2006/main">
+            <a:r>
+              <a:t>- ?  启动前由人确认设置</a:t>
+            </a:r>
+          </a:p>
+          <a:p xmlns:a="http://schemas.openxmlformats.org/drawingml/2006/main">
+            <a:r>
+              <a:t>- 课程另加的权限门</a:t>
+            </a:r>
+          </a:p>
+          <a:p xmlns:a="http://schemas.openxmlformats.org/drawingml/2006/main">
+            <a:r>
+              <a:t>- □ 外部写入先确认</a:t>
+            </a:r>
+          </a:p>
+          <a:p xmlns:a="http://schemas.openxmlformats.org/drawingml/2006/main">
+            <a:r>
+              <a:t>- □ 禁止读取 gold</a:t>
+            </a:r>
+          </a:p>
+          <a:p xmlns:a="http://schemas.openxmlformats.org/drawingml/2006/main">
+            <a:r>
+              <a:t>- □ 配置变更先确认</a:t>
+            </a:r>
+          </a:p>
+          <a:p xmlns:a="http://schemas.openxmlformats.org/drawingml/2006/main">
+            <a:r>
+              <a:t/>
+            </a:r>
+          </a:p>
+          <a:p xmlns:a="http://schemas.openxmlformats.org/drawingml/2006/main">
+            <a:r>
+              <a:t>教师讲述：</a:t>
+            </a:r>
+          </a:p>
+          <a:p xmlns:a="http://schemas.openxmlformats.org/drawingml/2006/main">
+            <a:r>
               <a:t>左侧来自 program.md 的文字约束，不是已验证的操作系统沙箱或默认工具权限。命令要求包含 shell 执行，实际权限由宿主 Agent 配置决定。启动前有人确认设置；循环内并非逐次请求人工确认。右侧是课程另行要求的权限门，禁止把它归为 AutoResearch 原生能力。删除失败记录不属于可确认放行的普通动作。</a:t>
             </a:r>
           </a:p>
@@ -2018,7 +4073,12 @@
           </a:p>
           <a:p xmlns:a="http://schemas.openxmlformats.org/drawingml/2006/main">
             <a:r>
-              <a:t>学生动作：请学生指出自己工作流的"需确认"动作至少一项。</a:t>
+              <a:t>学生动作：</a:t>
+            </a:r>
+          </a:p>
+          <a:p xmlns:a="http://schemas.openxmlformats.org/drawingml/2006/main">
+            <a:r>
+              <a:t>请学生指出自己工作流的"需确认"动作至少一项。</a:t>
             </a:r>
           </a:p>
           <a:p xmlns:a="http://schemas.openxmlformats.org/drawingml/2006/main">
@@ -2028,12 +4088,67 @@
           </a:p>
           <a:p xmlns:a="http://schemas.openxmlformats.org/drawingml/2006/main">
             <a:r>
+              <a:t>来源与边界：</a:t>
+            </a:r>
+          </a:p>
+          <a:p xmlns:a="http://schemas.openxmlformats.org/drawingml/2006/main">
+            <a:r>
+              <a:t>[AutoResearch `program.md`（固定 commit `228791f`）](https://github.com/karpathy/autoresearch/blob/228791fb499afffb54b46200aca536f79142f117/program.md)；[handout.md §二](./handout.md)。2026-09-13 回源核验；工程案例字段摘述，课程迁移要求另行标明，不作为通用自主科研能力证据。</a:t>
+            </a:r>
+          </a:p>
+          <a:p xmlns:a="http://schemas.openxmlformats.org/drawingml/2006/main">
+            <a:r>
+              <a:t/>
+            </a:r>
+          </a:p>
+          <a:p xmlns:a="http://schemas.openxmlformats.org/drawingml/2006/main">
+            <a:r>
+              <a:t>---</a:t>
+            </a:r>
+          </a:p>
+          <a:p xmlns:a="http://schemas.openxmlformats.org/drawingml/2006/main">
+            <a:r>
+              <a:t/>
+            </a:r>
+          </a:p>
+          <a:p xmlns:a="http://schemas.openxmlformats.org/drawingml/2006/main">
+            <a:r>
               <a:t>[Sources]</a:t>
             </a:r>
           </a:p>
           <a:p xmlns:a="http://schemas.openxmlformats.org/drawingml/2006/main">
             <a:r>
-              <a:t>[AutoResearch `program.md`（固定 commit `228791f`）](https://github.com/karpathy/autoresearch/blob/228791fb499afffb54b46200aca536f79142f117/program.md)；[handout.md §二](./handout.md)。2026-09-13 回源核验；工程案例字段摘述，课程迁移要求另行标明，不作为通用自主科研能力证据。</a:t>
+              <a:t/>
+            </a:r>
+          </a:p>
+          <a:p xmlns:a="http://schemas.openxmlformats.org/drawingml/2006/main">
+            <a:r>
+              <a:t>- https://github.com/karpathy/autoresearch/blob/228791fb499afffb54b46200aca536f79142f117/program.md</a:t>
+            </a:r>
+          </a:p>
+          <a:p xmlns:a="http://schemas.openxmlformats.org/drawingml/2006/main">
+            <a:r>
+              <a:t/>
+            </a:r>
+          </a:p>
+          <a:p xmlns:a="http://schemas.openxmlformats.org/drawingml/2006/main">
+            <a:r>
+              <a:t>- 本课 handout.md 与 slides.md</a:t>
+            </a:r>
+          </a:p>
+          <a:p xmlns:a="http://schemas.openxmlformats.org/drawingml/2006/main">
+            <a:r>
+              <a:t/>
+            </a:r>
+          </a:p>
+          <a:p xmlns:a="http://schemas.openxmlformats.org/drawingml/2006/main">
+            <a:r>
+              <a:t>- ../../course/reading-card-case.md</a:t>
+            </a:r>
+          </a:p>
+          <a:p xmlns:a="http://schemas.openxmlformats.org/drawingml/2006/main">
+            <a:r>
+              <a:t/>
             </a:r>
           </a:p>
           <a:p xmlns:a="http://schemas.openxmlformats.org/drawingml/2006/main">
@@ -2108,7 +4223,7 @@
           <a:lstStyle xmlns:a="http://schemas.openxmlformats.org/drawingml/2006/main"/>
           <a:p xmlns:a="http://schemas.openxmlformats.org/drawingml/2006/main">
             <a:r>
-              <a:t>AutoResearch 的方法优化循环会改变 train.py，按 val_bpb 决定保留或回退；原文同时要求权衡改进幅度与复杂度。单次训练预算固定不等于总预算固定：外层持续循环直到人工中断。课程冻结队列则不根据输出优劣改方法或删运行，处理预定 120 份后结束。采用原项目设计时须另定总轮次、总预算和人工审核点。请学生说出两种循环停止条件的差别。</a:t>
+              <a:t>页面：P06 方法优化循环与冻结执行队列</a:t>
             </a:r>
           </a:p>
           <a:p xmlns:a="http://schemas.openxmlformats.org/drawingml/2006/main">
@@ -2118,7 +4233,7 @@
           </a:p>
           <a:p xmlns:a="http://schemas.openxmlformats.org/drawingml/2006/main">
             <a:r>
-              <a:t>学生动作：请学生判断自己的科研动作需要固定链还是自主循环，并把自己的工作流对号入座。</a:t>
+              <a:t>讲义位置：本课讲义；见逐页母稿映射表</a:t>
             </a:r>
           </a:p>
           <a:p xmlns:a="http://schemas.openxmlformats.org/drawingml/2006/main">
@@ -2128,12 +4243,147 @@
           </a:p>
           <a:p xmlns:a="http://schemas.openxmlformats.org/drawingml/2006/main">
             <a:r>
+              <a:t>屏显核对：</a:t>
+            </a:r>
+          </a:p>
+          <a:p xmlns:a="http://schemas.openxmlformats.org/drawingml/2006/main">
+            <a:r>
+              <a:t>| 比较轴 | AutoResearch · 228791f | 课程冻结队列 |</a:t>
+            </a:r>
+          </a:p>
+          <a:p xmlns:a="http://schemas.openxmlformats.org/drawingml/2006/main">
+            <a:r>
+              <a:t>| --- | --- | --- |</a:t>
+            </a:r>
+          </a:p>
+          <a:p xmlns:a="http://schemas.openxmlformats.org/drawingml/2006/main">
+            <a:r>
+              <a:t>| 方法 | 修改 train.py 并评价 | 输入、方法与配置固定 |</a:t>
+            </a:r>
+          </a:p>
+          <a:p xmlns:a="http://schemas.openxmlformats.org/drawingml/2006/main">
+            <a:r>
+              <a:t>| 结果处理 | 按 val_bpb 保留或回退 | 回放并保留全部输出 |</a:t>
+            </a:r>
+          </a:p>
+          <a:p xmlns:a="http://schemas.openxmlformats.org/drawingml/2006/main">
+            <a:r>
+              <a:t>| 账本 | keep / discard / crash | 失败留账，只补未完成项 |</a:t>
+            </a:r>
+          </a:p>
+          <a:p xmlns:a="http://schemas.openxmlformats.org/drawingml/2006/main">
+            <a:r>
+              <a:t>| 停止 | 外层持续循环，人工中断 | 6 个任务完成即停 |</a:t>
+            </a:r>
+          </a:p>
+          <a:p xmlns:a="http://schemas.openxmlformats.org/drawingml/2006/main">
+            <a:r>
+              <a:t/>
+            </a:r>
+          </a:p>
+          <a:p xmlns:a="http://schemas.openxmlformats.org/drawingml/2006/main">
+            <a:r>
+              <a:t>单次训练预算固定，不等于外层总预算固定。</a:t>
+            </a:r>
+          </a:p>
+          <a:p xmlns:a="http://schemas.openxmlformats.org/drawingml/2006/main">
+            <a:r>
+              <a:t/>
+            </a:r>
+          </a:p>
+          <a:p xmlns:a="http://schemas.openxmlformats.org/drawingml/2006/main">
+            <a:r>
+              <a:t>教师讲述：</a:t>
+            </a:r>
+          </a:p>
+          <a:p xmlns:a="http://schemas.openxmlformats.org/drawingml/2006/main">
+            <a:r>
+              <a:t>AutoResearch 的方法优化循环会改变 train.py，按 val_bpb 决定保留或回退；原文同时要求权衡改进幅度与复杂度。单次训练预算固定不等于总预算固定：外层持续循环直到人工中断。课程冻结队列则不根据输出优劣改方法或删运行，处理预定 6 份后结束。采用原项目设计时须另定总轮次、总预算和人工审核点。请学生说出两种循环停止条件的差别。</a:t>
+            </a:r>
+          </a:p>
+          <a:p xmlns:a="http://schemas.openxmlformats.org/drawingml/2006/main">
+            <a:r>
+              <a:t/>
+            </a:r>
+          </a:p>
+          <a:p xmlns:a="http://schemas.openxmlformats.org/drawingml/2006/main">
+            <a:r>
+              <a:t>学生动作：</a:t>
+            </a:r>
+          </a:p>
+          <a:p xmlns:a="http://schemas.openxmlformats.org/drawingml/2006/main">
+            <a:r>
+              <a:t>请学生判断自己的科研动作需要固定链还是自主循环，并把自己的工作流对号入座。</a:t>
+            </a:r>
+          </a:p>
+          <a:p xmlns:a="http://schemas.openxmlformats.org/drawingml/2006/main">
+            <a:r>
+              <a:t/>
+            </a:r>
+          </a:p>
+          <a:p xmlns:a="http://schemas.openxmlformats.org/drawingml/2006/main">
+            <a:r>
+              <a:t>来源与边界：</a:t>
+            </a:r>
+          </a:p>
+          <a:p xmlns:a="http://schemas.openxmlformats.org/drawingml/2006/main">
+            <a:r>
+              <a:t>[AutoResearch `program.md`（固定 commit `228791f`）](https://github.com/karpathy/autoresearch/blob/228791fb499afffb54b46200aca536f79142f117/program.md)；[handout.md §二](./handout.md)。2026-09-13 回源核验；工程案例字段摘述，课程迁移要求另行标明，不作为通用自主科研能力证据。</a:t>
+            </a:r>
+          </a:p>
+          <a:p xmlns:a="http://schemas.openxmlformats.org/drawingml/2006/main">
+            <a:r>
+              <a:t/>
+            </a:r>
+          </a:p>
+          <a:p xmlns:a="http://schemas.openxmlformats.org/drawingml/2006/main">
+            <a:r>
+              <a:t>---</a:t>
+            </a:r>
+          </a:p>
+          <a:p xmlns:a="http://schemas.openxmlformats.org/drawingml/2006/main">
+            <a:r>
+              <a:t/>
+            </a:r>
+          </a:p>
+          <a:p xmlns:a="http://schemas.openxmlformats.org/drawingml/2006/main">
+            <a:r>
               <a:t>[Sources]</a:t>
             </a:r>
           </a:p>
           <a:p xmlns:a="http://schemas.openxmlformats.org/drawingml/2006/main">
             <a:r>
-              <a:t>[AutoResearch `program.md`（固定 commit `228791f`）](https://github.com/karpathy/autoresearch/blob/228791fb499afffb54b46200aca536f79142f117/program.md)；[handout.md §二](./handout.md)。2026-09-13 回源核验；工程案例字段摘述，课程迁移要求另行标明，不作为通用自主科研能力证据。</a:t>
+              <a:t/>
+            </a:r>
+          </a:p>
+          <a:p xmlns:a="http://schemas.openxmlformats.org/drawingml/2006/main">
+            <a:r>
+              <a:t>- https://github.com/karpathy/autoresearch/blob/228791fb499afffb54b46200aca536f79142f117/program.md</a:t>
+            </a:r>
+          </a:p>
+          <a:p xmlns:a="http://schemas.openxmlformats.org/drawingml/2006/main">
+            <a:r>
+              <a:t/>
+            </a:r>
+          </a:p>
+          <a:p xmlns:a="http://schemas.openxmlformats.org/drawingml/2006/main">
+            <a:r>
+              <a:t>- 本课 handout.md 与 slides.md</a:t>
+            </a:r>
+          </a:p>
+          <a:p xmlns:a="http://schemas.openxmlformats.org/drawingml/2006/main">
+            <a:r>
+              <a:t/>
+            </a:r>
+          </a:p>
+          <a:p xmlns:a="http://schemas.openxmlformats.org/drawingml/2006/main">
+            <a:r>
+              <a:t>- ../../course/reading-card-case.md</a:t>
+            </a:r>
+          </a:p>
+          <a:p xmlns:a="http://schemas.openxmlformats.org/drawingml/2006/main">
+            <a:r>
+              <a:t/>
             </a:r>
           </a:p>
           <a:p xmlns:a="http://schemas.openxmlformats.org/drawingml/2006/main">
@@ -2208,6 +4458,86 @@
           <a:lstStyle xmlns:a="http://schemas.openxmlformats.org/drawingml/2006/main"/>
           <a:p xmlns:a="http://schemas.openxmlformats.org/drawingml/2006/main">
             <a:r>
+              <a:t>页面：P07 实验账本连接代码、指标与处置</a:t>
+            </a:r>
+          </a:p>
+          <a:p xmlns:a="http://schemas.openxmlformats.org/drawingml/2006/main">
+            <a:r>
+              <a:t/>
+            </a:r>
+          </a:p>
+          <a:p xmlns:a="http://schemas.openxmlformats.org/drawingml/2006/main">
+            <a:r>
+              <a:t>讲义位置：本课讲义；见逐页母稿映射表</a:t>
+            </a:r>
+          </a:p>
+          <a:p xmlns:a="http://schemas.openxmlformats.org/drawingml/2006/main">
+            <a:r>
+              <a:t/>
+            </a:r>
+          </a:p>
+          <a:p xmlns:a="http://schemas.openxmlformats.org/drawingml/2006/main">
+            <a:r>
+              <a:t>屏显核对：</a:t>
+            </a:r>
+          </a:p>
+          <a:p xmlns:a="http://schemas.openxmlformats.org/drawingml/2006/main">
+            <a:r>
+              <a:t>- results.tsv 字段 · 228791f</a:t>
+            </a:r>
+          </a:p>
+          <a:p xmlns:a="http://schemas.openxmlformats.org/drawingml/2006/main">
+            <a:r>
+              <a:t>- commit      代码版本</a:t>
+            </a:r>
+          </a:p>
+          <a:p xmlns:a="http://schemas.openxmlformats.org/drawingml/2006/main">
+            <a:r>
+              <a:t>- val_bpb     评价值</a:t>
+            </a:r>
+          </a:p>
+          <a:p xmlns:a="http://schemas.openxmlformats.org/drawingml/2006/main">
+            <a:r>
+              <a:t>- memory_gb   峰值显存</a:t>
+            </a:r>
+          </a:p>
+          <a:p xmlns:a="http://schemas.openxmlformats.org/drawingml/2006/main">
+            <a:r>
+              <a:t>- status      keep / discard / crash</a:t>
+            </a:r>
+          </a:p>
+          <a:p xmlns:a="http://schemas.openxmlformats.org/drawingml/2006/main">
+            <a:r>
+              <a:t>- description 本次尝试</a:t>
+            </a:r>
+          </a:p>
+          <a:p xmlns:a="http://schemas.openxmlformats.org/drawingml/2006/main">
+            <a:r>
+              <a:t>- run.log     本次运行详情</a:t>
+            </a:r>
+          </a:p>
+          <a:p xmlns:a="http://schemas.openxmlformats.org/drawingml/2006/main">
+            <a:r>
+              <a:t>- 课程迁移：日志绑定各自 run ID</a:t>
+            </a:r>
+          </a:p>
+          <a:p xmlns:a="http://schemas.openxmlformats.org/drawingml/2006/main">
+            <a:r>
+              <a:t>- 回退代码 /  / 保留账本 /  / 保留失败 /  / 人工判断</a:t>
+            </a:r>
+          </a:p>
+          <a:p xmlns:a="http://schemas.openxmlformats.org/drawingml/2006/main">
+            <a:r>
+              <a:t/>
+            </a:r>
+          </a:p>
+          <a:p xmlns:a="http://schemas.openxmlformats.org/drawingml/2006/main">
+            <a:r>
+              <a:t>教师讲述：</a:t>
+            </a:r>
+          </a:p>
+          <a:p xmlns:a="http://schemas.openxmlformats.org/drawingml/2006/main">
+            <a:r>
               <a:t>这里展示真实字段定义，没有填写实验数值，不是系统运行截图。results.tsv 保留 keep、discard、crash 及代码身份；代码回退不等于删除失败账本。原项目将 results.tsv 留在 Git 跟踪之外，课程记录策略应显式安排存放与备份，不照搬为统一规范。阅读卡任务为每次输出绑定 run ID，保留失败和后续人工处置。</a:t>
             </a:r>
           </a:p>
@@ -2218,7 +4548,12 @@
           </a:p>
           <a:p xmlns:a="http://schemas.openxmlformats.org/drawingml/2006/main">
             <a:r>
-              <a:t>学生动作：请学生检查自己工作流的一次运行会留下哪些工件。</a:t>
+              <a:t>学生动作：</a:t>
+            </a:r>
+          </a:p>
+          <a:p xmlns:a="http://schemas.openxmlformats.org/drawingml/2006/main">
+            <a:r>
+              <a:t>请学生检查自己工作流的一次运行会留下哪些工件。</a:t>
             </a:r>
           </a:p>
           <a:p xmlns:a="http://schemas.openxmlformats.org/drawingml/2006/main">
@@ -2228,12 +4563,67 @@
           </a:p>
           <a:p xmlns:a="http://schemas.openxmlformats.org/drawingml/2006/main">
             <a:r>
+              <a:t>来源与边界：</a:t>
+            </a:r>
+          </a:p>
+          <a:p xmlns:a="http://schemas.openxmlformats.org/drawingml/2006/main">
+            <a:r>
+              <a:t>[AutoResearch `program.md`（固定 commit `228791f`）](https://github.com/karpathy/autoresearch/blob/228791fb499afffb54b46200aca536f79142f117/program.md)；[handout.md §二](./handout.md)。2026-09-13 回源核验；工程案例字段摘述，课程迁移要求另行标明，不作为通用自主科研能力证据。</a:t>
+            </a:r>
+          </a:p>
+          <a:p xmlns:a="http://schemas.openxmlformats.org/drawingml/2006/main">
+            <a:r>
+              <a:t/>
+            </a:r>
+          </a:p>
+          <a:p xmlns:a="http://schemas.openxmlformats.org/drawingml/2006/main">
+            <a:r>
+              <a:t>---</a:t>
+            </a:r>
+          </a:p>
+          <a:p xmlns:a="http://schemas.openxmlformats.org/drawingml/2006/main">
+            <a:r>
+              <a:t/>
+            </a:r>
+          </a:p>
+          <a:p xmlns:a="http://schemas.openxmlformats.org/drawingml/2006/main">
+            <a:r>
               <a:t>[Sources]</a:t>
             </a:r>
           </a:p>
           <a:p xmlns:a="http://schemas.openxmlformats.org/drawingml/2006/main">
             <a:r>
-              <a:t>[AutoResearch `program.md`（固定 commit `228791f`）](https://github.com/karpathy/autoresearch/blob/228791fb499afffb54b46200aca536f79142f117/program.md)；[handout.md §二](./handout.md)。2026-09-13 回源核验；工程案例字段摘述，课程迁移要求另行标明，不作为通用自主科研能力证据。</a:t>
+              <a:t/>
+            </a:r>
+          </a:p>
+          <a:p xmlns:a="http://schemas.openxmlformats.org/drawingml/2006/main">
+            <a:r>
+              <a:t>- https://github.com/karpathy/autoresearch/blob/228791fb499afffb54b46200aca536f79142f117/program.md</a:t>
+            </a:r>
+          </a:p>
+          <a:p xmlns:a="http://schemas.openxmlformats.org/drawingml/2006/main">
+            <a:r>
+              <a:t/>
+            </a:r>
+          </a:p>
+          <a:p xmlns:a="http://schemas.openxmlformats.org/drawingml/2006/main">
+            <a:r>
+              <a:t>- 本课 handout.md 与 slides.md</a:t>
+            </a:r>
+          </a:p>
+          <a:p xmlns:a="http://schemas.openxmlformats.org/drawingml/2006/main">
+            <a:r>
+              <a:t/>
+            </a:r>
+          </a:p>
+          <a:p xmlns:a="http://schemas.openxmlformats.org/drawingml/2006/main">
+            <a:r>
+              <a:t>- ../../course/reading-card-case.md</a:t>
+            </a:r>
+          </a:p>
+          <a:p xmlns:a="http://schemas.openxmlformats.org/drawingml/2006/main">
+            <a:r>
+              <a:t/>
             </a:r>
           </a:p>
           <a:p xmlns:a="http://schemas.openxmlformats.org/drawingml/2006/main">
@@ -2308,6 +4698,91 @@
           <a:lstStyle xmlns:a="http://schemas.openxmlformats.org/drawingml/2006/main"/>
           <a:p xmlns:a="http://schemas.openxmlformats.org/drawingml/2006/main">
             <a:r>
+              <a:t>页面：P08 固定评价函数与独立评价端</a:t>
+            </a:r>
+          </a:p>
+          <a:p xmlns:a="http://schemas.openxmlformats.org/drawingml/2006/main">
+            <a:r>
+              <a:t/>
+            </a:r>
+          </a:p>
+          <a:p xmlns:a="http://schemas.openxmlformats.org/drawingml/2006/main">
+            <a:r>
+              <a:t>讲义位置：本课讲义；见逐页母稿映射表</a:t>
+            </a:r>
+          </a:p>
+          <a:p xmlns:a="http://schemas.openxmlformats.org/drawingml/2006/main">
+            <a:r>
+              <a:t/>
+            </a:r>
+          </a:p>
+          <a:p xmlns:a="http://schemas.openxmlformats.org/drawingml/2006/main">
+            <a:r>
+              <a:t>屏显核对：</a:t>
+            </a:r>
+          </a:p>
+          <a:p xmlns:a="http://schemas.openxmlformats.org/drawingml/2006/main">
+            <a:r>
+              <a:t>- 执行器</a:t>
+            </a:r>
+          </a:p>
+          <a:p xmlns:a="http://schemas.openxmlformats.org/drawingml/2006/main">
+            <a:r>
+              <a:t>- 生成候选</a:t>
+            </a:r>
+          </a:p>
+          <a:p xmlns:a="http://schemas.openxmlformats.org/drawingml/2006/main">
+            <a:r>
+              <a:t>- 独立 Evals</a:t>
+            </a:r>
+          </a:p>
+          <a:p xmlns:a="http://schemas.openxmlformats.org/drawingml/2006/main">
+            <a:r>
+              <a:t>- baseline / rubric</a:t>
+            </a:r>
+          </a:p>
+          <a:p xmlns:a="http://schemas.openxmlformats.org/drawingml/2006/main">
+            <a:r>
+              <a:t>- 人工审核</a:t>
+            </a:r>
+          </a:p>
+          <a:p xmlns:a="http://schemas.openxmlformats.org/drawingml/2006/main">
+            <a:r>
+              <a:t>- 方法与结论</a:t>
+            </a:r>
+          </a:p>
+          <a:p xmlns:a="http://schemas.openxmlformats.org/drawingml/2006/main">
+            <a:r>
+              <a:t>- 失败恢复</a:t>
+            </a:r>
+          </a:p>
+          <a:p xmlns:a="http://schemas.openxmlformats.org/drawingml/2006/main">
+            <a:r>
+              <a:t>- 记录后收窄</a:t>
+            </a:r>
+          </a:p>
+          <a:p xmlns:a="http://schemas.openxmlformats.org/drawingml/2006/main">
+            <a:r>
+              <a:t>- 阅读卡执行器禁止读 gold；独立评价端在生成后评分。</a:t>
+            </a:r>
+          </a:p>
+          <a:p xmlns:a="http://schemas.openxmlformats.org/drawingml/2006/main">
+            <a:r>
+              <a:t>- AutoResearch：只读 prepare.py 固定评价函数</a:t>
+            </a:r>
+          </a:p>
+          <a:p xmlns:a="http://schemas.openxmlformats.org/drawingml/2006/main">
+            <a:r>
+              <a:t/>
+            </a:r>
+          </a:p>
+          <a:p xmlns:a="http://schemas.openxmlformats.org/drawingml/2006/main">
+            <a:r>
+              <a:t>教师讲述：</a:t>
+            </a:r>
+          </a:p>
+          <a:p xmlns:a="http://schemas.openxmlformats.org/drawingml/2006/main">
+            <a:r>
               <a:t>原 AutoResearch 将 evaluate_bpb 固定在只读 prepare.py，限制 Agent 修改评价规则。只读评价函数并不等于评价数据对执行端不可读。课程阅读卡还要求 gold 不进入生成 Context，并由独立评价端在输出完成后评分；人工审核决定方法、结论及后续修订。失败回写保留 trace，禁止选择性删除。</a:t>
             </a:r>
           </a:p>
@@ -2318,7 +4793,12 @@
           </a:p>
           <a:p xmlns:a="http://schemas.openxmlformats.org/drawingml/2006/main">
             <a:r>
-              <a:t>学生动作：请学生说出自己工作流的 baseline 是什么。</a:t>
+              <a:t>学生动作：</a:t>
+            </a:r>
+          </a:p>
+          <a:p xmlns:a="http://schemas.openxmlformats.org/drawingml/2006/main">
+            <a:r>
+              <a:t>请学生说出自己工作流的 baseline 是什么。</a:t>
             </a:r>
           </a:p>
           <a:p xmlns:a="http://schemas.openxmlformats.org/drawingml/2006/main">
@@ -2328,12 +4808,67 @@
           </a:p>
           <a:p xmlns:a="http://schemas.openxmlformats.org/drawingml/2006/main">
             <a:r>
+              <a:t>来源与边界：</a:t>
+            </a:r>
+          </a:p>
+          <a:p xmlns:a="http://schemas.openxmlformats.org/drawingml/2006/main">
+            <a:r>
+              <a:t>[AutoResearch `program.md`（固定 commit `228791f`）](https://github.com/karpathy/autoresearch/blob/228791fb499afffb54b46200aca536f79142f117/program.md)；[handout.md §二](./handout.md)。2026-09-13 回源核验；工程案例字段摘述，课程迁移要求另行标明，不作为通用自主科研能力证据。</a:t>
+            </a:r>
+          </a:p>
+          <a:p xmlns:a="http://schemas.openxmlformats.org/drawingml/2006/main">
+            <a:r>
+              <a:t/>
+            </a:r>
+          </a:p>
+          <a:p xmlns:a="http://schemas.openxmlformats.org/drawingml/2006/main">
+            <a:r>
+              <a:t>---</a:t>
+            </a:r>
+          </a:p>
+          <a:p xmlns:a="http://schemas.openxmlformats.org/drawingml/2006/main">
+            <a:r>
+              <a:t/>
+            </a:r>
+          </a:p>
+          <a:p xmlns:a="http://schemas.openxmlformats.org/drawingml/2006/main">
+            <a:r>
               <a:t>[Sources]</a:t>
             </a:r>
           </a:p>
           <a:p xmlns:a="http://schemas.openxmlformats.org/drawingml/2006/main">
             <a:r>
-              <a:t>[AutoResearch `program.md`（固定 commit `228791f`）](https://github.com/karpathy/autoresearch/blob/228791fb499afffb54b46200aca536f79142f117/program.md)；[handout.md §二](./handout.md)。2026-09-13 回源核验；工程案例字段摘述，课程迁移要求另行标明，不作为通用自主科研能力证据。</a:t>
+              <a:t/>
+            </a:r>
+          </a:p>
+          <a:p xmlns:a="http://schemas.openxmlformats.org/drawingml/2006/main">
+            <a:r>
+              <a:t>- https://github.com/karpathy/autoresearch/blob/228791fb499afffb54b46200aca536f79142f117/program.md</a:t>
+            </a:r>
+          </a:p>
+          <a:p xmlns:a="http://schemas.openxmlformats.org/drawingml/2006/main">
+            <a:r>
+              <a:t/>
+            </a:r>
+          </a:p>
+          <a:p xmlns:a="http://schemas.openxmlformats.org/drawingml/2006/main">
+            <a:r>
+              <a:t>- 本课 handout.md 与 slides.md</a:t>
+            </a:r>
+          </a:p>
+          <a:p xmlns:a="http://schemas.openxmlformats.org/drawingml/2006/main">
+            <a:r>
+              <a:t/>
+            </a:r>
+          </a:p>
+          <a:p xmlns:a="http://schemas.openxmlformats.org/drawingml/2006/main">
+            <a:r>
+              <a:t>- ../../course/reading-card-case.md</a:t>
+            </a:r>
+          </a:p>
+          <a:p xmlns:a="http://schemas.openxmlformats.org/drawingml/2006/main">
+            <a:r>
+              <a:t/>
             </a:r>
           </a:p>
           <a:p xmlns:a="http://schemas.openxmlformats.org/drawingml/2006/main">
@@ -2408,6 +4943,71 @@
           <a:lstStyle xmlns:a="http://schemas.openxmlformats.org/drawingml/2006/main"/>
           <a:p xmlns:a="http://schemas.openxmlformats.org/drawingml/2006/main">
             <a:r>
+              <a:t>页面：P09 科研动作是否值得交给 Agent</a:t>
+            </a:r>
+          </a:p>
+          <a:p xmlns:a="http://schemas.openxmlformats.org/drawingml/2006/main">
+            <a:r>
+              <a:t/>
+            </a:r>
+          </a:p>
+          <a:p xmlns:a="http://schemas.openxmlformats.org/drawingml/2006/main">
+            <a:r>
+              <a:t>讲义位置：本课讲义；见逐页母稿映射表</a:t>
+            </a:r>
+          </a:p>
+          <a:p xmlns:a="http://schemas.openxmlformats.org/drawingml/2006/main">
+            <a:r>
+              <a:t/>
+            </a:r>
+          </a:p>
+          <a:p xmlns:a="http://schemas.openxmlformats.org/drawingml/2006/main">
+            <a:r>
+              <a:t>屏显核对：</a:t>
+            </a:r>
+          </a:p>
+          <a:p xmlns:a="http://schemas.openxmlformats.org/drawingml/2006/main">
+            <a:r>
+              <a:t>- 重复性高 →</a:t>
+            </a:r>
+          </a:p>
+          <a:p xmlns:a="http://schemas.openxmlformats.org/drawingml/2006/main">
+            <a:r>
+              <a:t>- 判断风险 ↑</a:t>
+            </a:r>
+          </a:p>
+          <a:p xmlns:a="http://schemas.openxmlformats.org/drawingml/2006/main">
+            <a:r>
+              <a:t>- Agent + 人工确认</a:t>
+            </a:r>
+          </a:p>
+          <a:p xmlns:a="http://schemas.openxmlformats.org/drawingml/2006/main">
+            <a:r>
+              <a:t>- 固定工作流 / 脚本</a:t>
+            </a:r>
+          </a:p>
+          <a:p xmlns:a="http://schemas.openxmlformats.org/drawingml/2006/main">
+            <a:r>
+              <a:t>- 人工主导</a:t>
+            </a:r>
+          </a:p>
+          <a:p xmlns:a="http://schemas.openxmlformats.org/drawingml/2006/main">
+            <a:r>
+              <a:t>- 不值得自动化</a:t>
+            </a:r>
+          </a:p>
+          <a:p xmlns:a="http://schemas.openxmlformats.org/drawingml/2006/main">
+            <a:r>
+              <a:t/>
+            </a:r>
+          </a:p>
+          <a:p xmlns:a="http://schemas.openxmlformats.org/drawingml/2006/main">
+            <a:r>
+              <a:t>教师讲述：</a:t>
+            </a:r>
+          </a:p>
+          <a:p xmlns:a="http://schemas.openxmlformats.org/drawingml/2006/main">
+            <a:r>
               <a:t>用同一阅读卡任务提问：重复解析由脚本承担，预定生成与状态记录适合固定链，涉及研究判断时设置人工确认。坐标用于比较重复性与判断风险，不把 Agent 视为能力等级。让学生先判断并给出一个理由。</a:t>
             </a:r>
           </a:p>
@@ -2418,7 +5018,12 @@
           </a:p>
           <a:p xmlns:a="http://schemas.openxmlformats.org/drawingml/2006/main">
             <a:r>
-              <a:t>学生动作：请学生举手判断每个动作适合哪一类。</a:t>
+              <a:t>学生动作：</a:t>
+            </a:r>
+          </a:p>
+          <a:p xmlns:a="http://schemas.openxmlformats.org/drawingml/2006/main">
+            <a:r>
+              <a:t>请学生举手判断每个动作适合哪一类。</a:t>
             </a:r>
           </a:p>
           <a:p xmlns:a="http://schemas.openxmlformats.org/drawingml/2006/main">
@@ -2428,12 +5033,57 @@
           </a:p>
           <a:p xmlns:a="http://schemas.openxmlformats.org/drawingml/2006/main">
             <a:r>
+              <a:t>来源与边界：</a:t>
+            </a:r>
+          </a:p>
+          <a:p xmlns:a="http://schemas.openxmlformats.org/drawingml/2006/main">
+            <a:r>
+              <a:t>[handout.md §三](./handout.md)。</a:t>
+            </a:r>
+          </a:p>
+          <a:p xmlns:a="http://schemas.openxmlformats.org/drawingml/2006/main">
+            <a:r>
+              <a:t/>
+            </a:r>
+          </a:p>
+          <a:p xmlns:a="http://schemas.openxmlformats.org/drawingml/2006/main">
+            <a:r>
+              <a:t>---</a:t>
+            </a:r>
+          </a:p>
+          <a:p xmlns:a="http://schemas.openxmlformats.org/drawingml/2006/main">
+            <a:r>
+              <a:t/>
+            </a:r>
+          </a:p>
+          <a:p xmlns:a="http://schemas.openxmlformats.org/drawingml/2006/main">
+            <a:r>
               <a:t>[Sources]</a:t>
             </a:r>
           </a:p>
           <a:p xmlns:a="http://schemas.openxmlformats.org/drawingml/2006/main">
             <a:r>
-              <a:t>[handout.md §三](./handout.md)。</a:t>
+              <a:t/>
+            </a:r>
+          </a:p>
+          <a:p xmlns:a="http://schemas.openxmlformats.org/drawingml/2006/main">
+            <a:r>
+              <a:t>- 本课 handout.md 与 slides.md</a:t>
+            </a:r>
+          </a:p>
+          <a:p xmlns:a="http://schemas.openxmlformats.org/drawingml/2006/main">
+            <a:r>
+              <a:t/>
+            </a:r>
+          </a:p>
+          <a:p xmlns:a="http://schemas.openxmlformats.org/drawingml/2006/main">
+            <a:r>
+              <a:t>- ../../course/reading-card-case.md</a:t>
+            </a:r>
+          </a:p>
+          <a:p xmlns:a="http://schemas.openxmlformats.org/drawingml/2006/main">
+            <a:r>
+              <a:t/>
             </a:r>
           </a:p>
           <a:p xmlns:a="http://schemas.openxmlformats.org/drawingml/2006/main">
@@ -2489,7 +5139,7 @@
           <p:nvPr/>
         </p:nvPicPr>
         <p:blipFill>
-          <a:blip xmlns:r="http://schemas.openxmlformats.org/officeDocument/2006/relationships" xmlns:a="http://schemas.openxmlformats.org/drawingml/2006/main" r:embed="R4a6b975746c5434c">
+          <a:blip xmlns:r="http://schemas.openxmlformats.org/officeDocument/2006/relationships" xmlns:a="http://schemas.openxmlformats.org/drawingml/2006/main" r:embed="Rd2c24374cef7437a">
             <a:duotone>
               <a:prstClr val="black"/>
               <a:schemeClr val="accent1">
@@ -2667,7 +5317,7 @@
           <p:nvPr/>
         </p:nvPicPr>
         <p:blipFill rotWithShape="1">
-          <a:blip xmlns:r="http://schemas.openxmlformats.org/officeDocument/2006/relationships" xmlns:a="http://schemas.openxmlformats.org/drawingml/2006/main" r:embed="Rd9c6bf3402a04e07"/>
+          <a:blip xmlns:r="http://schemas.openxmlformats.org/officeDocument/2006/relationships" xmlns:a="http://schemas.openxmlformats.org/drawingml/2006/main" r:embed="R1d35a310b851473c"/>
           <a:srcRect xmlns:a="http://schemas.openxmlformats.org/drawingml/2006/main" l="74359" t="0" r="1346" b="0"/>
           <a:stretch xmlns:a="http://schemas.openxmlformats.org/drawingml/2006/main"/>
         </p:blipFill>
@@ -2690,7 +5340,7 @@
           <p:nvPr/>
         </p:nvPicPr>
         <p:blipFill rotWithShape="1">
-          <a:blip xmlns:r="http://schemas.openxmlformats.org/officeDocument/2006/relationships" xmlns:a="http://schemas.openxmlformats.org/drawingml/2006/main" r:embed="R5b8eca3b2bd9466c">
+          <a:blip xmlns:r="http://schemas.openxmlformats.org/officeDocument/2006/relationships" xmlns:a="http://schemas.openxmlformats.org/drawingml/2006/main" r:embed="R04c1f6c2f05f4131">
             <a:alphaModFix amt="35000"/>
           </a:blip>
           <a:srcRect xmlns:a="http://schemas.openxmlformats.org/drawingml/2006/main" l="0" t="9831" r="0" b="36385"/>
@@ -2952,7 +5602,7 @@
           <p:nvPr/>
         </p:nvPicPr>
         <p:blipFill>
-          <a:blip xmlns:r="http://schemas.openxmlformats.org/officeDocument/2006/relationships" xmlns:a="http://schemas.openxmlformats.org/drawingml/2006/main" r:embed="R716ceb19997e4f8f"/>
+          <a:blip xmlns:r="http://schemas.openxmlformats.org/officeDocument/2006/relationships" xmlns:a="http://schemas.openxmlformats.org/drawingml/2006/main" r:embed="R6003d01192e84107"/>
           <a:srcRect xmlns:a="http://schemas.openxmlformats.org/drawingml/2006/main" l="0" t="0" r="54251" b="0"/>
           <a:stretch xmlns:a="http://schemas.openxmlformats.org/drawingml/2006/main"/>
         </p:blipFill>
@@ -3209,7 +5859,7 @@
           <p:nvPr/>
         </p:nvPicPr>
         <p:blipFill rotWithShape="1">
-          <a:blip xmlns:r="http://schemas.openxmlformats.org/officeDocument/2006/relationships" xmlns:a="http://schemas.openxmlformats.org/drawingml/2006/main" r:embed="R410f6f8e29944f7c"/>
+          <a:blip xmlns:r="http://schemas.openxmlformats.org/officeDocument/2006/relationships" xmlns:a="http://schemas.openxmlformats.org/drawingml/2006/main" r:embed="R8ea20d37198e48bc"/>
           <a:srcRect xmlns:a="http://schemas.openxmlformats.org/drawingml/2006/main" l="0" t="0" r="1346" b="0"/>
           <a:stretch xmlns:a="http://schemas.openxmlformats.org/drawingml/2006/main"/>
         </p:blipFill>
@@ -3392,7 +6042,7 @@
           <p:nvPr/>
         </p:nvPicPr>
         <p:blipFill>
-          <a:blip xmlns:r="http://schemas.openxmlformats.org/officeDocument/2006/relationships" xmlns:a="http://schemas.openxmlformats.org/drawingml/2006/main" r:embed="Rdfb6332ad45e4498"/>
+          <a:blip xmlns:r="http://schemas.openxmlformats.org/officeDocument/2006/relationships" xmlns:a="http://schemas.openxmlformats.org/drawingml/2006/main" r:embed="R5ea1e8b5b8344020"/>
           <a:stretch xmlns:a="http://schemas.openxmlformats.org/drawingml/2006/main">
             <a:fillRect l="0" t="0" r="0" b="0"/>
           </a:stretch>
@@ -3488,7 +6138,7 @@
           <p:nvPr/>
         </p:nvPicPr>
         <p:blipFill>
-          <a:blip xmlns:r="http://schemas.openxmlformats.org/officeDocument/2006/relationships" xmlns:a="http://schemas.openxmlformats.org/drawingml/2006/main" r:embed="R1fcf83cafadb4051">
+          <a:blip xmlns:r="http://schemas.openxmlformats.org/officeDocument/2006/relationships" xmlns:a="http://schemas.openxmlformats.org/drawingml/2006/main" r:embed="R14198cf94d4d4e48">
             <a:duotone>
               <a:prstClr val="black"/>
               <a:schemeClr val="accent1">
@@ -3655,7 +6305,7 @@
           <p:nvPr/>
         </p:nvPicPr>
         <p:blipFill rotWithShape="1">
-          <a:blip xmlns:r="http://schemas.openxmlformats.org/officeDocument/2006/relationships" xmlns:a="http://schemas.openxmlformats.org/drawingml/2006/main" r:embed="R42a7bc79cfe94d5d">
+          <a:blip xmlns:r="http://schemas.openxmlformats.org/officeDocument/2006/relationships" xmlns:a="http://schemas.openxmlformats.org/drawingml/2006/main" r:embed="R5b1ae77a68e546ec">
             <a:alphaModFix amt="20000"/>
             <a:duotone>
               <a:schemeClr val="accent4">
@@ -3753,10 +6403,10 @@
   </p:cSld>
   <p:clrMap bg1="lt1" tx1="dk1" bg2="lt2" tx2="dk2" accent1="accent1" accent2="accent2" accent3="accent3" accent4="accent4" accent5="accent5" accent6="accent6" hlink="hlink" folHlink="folHlink"/>
   <p:sldLayoutIdLst>
-    <p:sldLayoutId xmlns:r="http://schemas.openxmlformats.org/officeDocument/2006/relationships" id="2147483649" r:id="R80d0cb15b7144838"/>
-    <p:sldLayoutId xmlns:r="http://schemas.openxmlformats.org/officeDocument/2006/relationships" id="2147483650" r:id="R98a70c8556334b47"/>
-    <p:sldLayoutId xmlns:r="http://schemas.openxmlformats.org/officeDocument/2006/relationships" id="2147483651" r:id="Rb2f165273d284805"/>
-    <p:sldLayoutId xmlns:r="http://schemas.openxmlformats.org/officeDocument/2006/relationships" id="2147483652" r:id="Rf96ba87d36b841c9"/>
+    <p:sldLayoutId xmlns:r="http://schemas.openxmlformats.org/officeDocument/2006/relationships" id="2147483649" r:id="Ra30ee99294664287"/>
+    <p:sldLayoutId xmlns:r="http://schemas.openxmlformats.org/officeDocument/2006/relationships" id="2147483650" r:id="Rad4a1ee89f5049f2"/>
+    <p:sldLayoutId xmlns:r="http://schemas.openxmlformats.org/officeDocument/2006/relationships" id="2147483651" r:id="Rd3aa2fdf35ec4733"/>
+    <p:sldLayoutId xmlns:r="http://schemas.openxmlformats.org/officeDocument/2006/relationships" id="2147483652" r:id="R4de0007e2e1c477e"/>
   </p:sldLayoutIdLst>
   <p:hf hdr="0" ftr="0" dt="0"/>
   <p:txStyles>
@@ -4482,7 +7132,7 @@
           <p:nvPr/>
         </p:nvPicPr>
         <p:blipFill>
-          <a:blip xmlns:r="http://schemas.openxmlformats.org/officeDocument/2006/relationships" xmlns:a="http://schemas.openxmlformats.org/drawingml/2006/main" r:embed="R2e75cfb9a8b844b3"/>
+          <a:blip xmlns:r="http://schemas.openxmlformats.org/officeDocument/2006/relationships" xmlns:a="http://schemas.openxmlformats.org/drawingml/2006/main" r:embed="R8b7083d3786f432e"/>
           <a:stretch xmlns:a="http://schemas.openxmlformats.org/drawingml/2006/main"/>
         </p:blipFill>
         <p:spPr>
@@ -5577,7 +8227,7 @@
           <p:nvPr/>
         </p:nvPicPr>
         <p:blipFill>
-          <a:blip xmlns:r="http://schemas.openxmlformats.org/officeDocument/2006/relationships" xmlns:a="http://schemas.openxmlformats.org/drawingml/2006/main" r:embed="Rad7f48fe644b40c0"/>
+          <a:blip xmlns:r="http://schemas.openxmlformats.org/officeDocument/2006/relationships" xmlns:a="http://schemas.openxmlformats.org/drawingml/2006/main" r:embed="R62264e110b7a4d5f"/>
           <a:stretch xmlns:a="http://schemas.openxmlformats.org/drawingml/2006/main"/>
         </p:blipFill>
         <p:spPr>
@@ -6021,7 +8671,7 @@
           <p:nvPr/>
         </p:nvPicPr>
         <p:blipFill>
-          <a:blip xmlns:r="http://schemas.openxmlformats.org/officeDocument/2006/relationships" xmlns:a="http://schemas.openxmlformats.org/drawingml/2006/main" r:embed="Rceb2a8372abb4a83"/>
+          <a:blip xmlns:r="http://schemas.openxmlformats.org/officeDocument/2006/relationships" xmlns:a="http://schemas.openxmlformats.org/drawingml/2006/main" r:embed="R90a3bba4248c47b0"/>
           <a:stretch xmlns:a="http://schemas.openxmlformats.org/drawingml/2006/main"/>
         </p:blipFill>
         <p:spPr>
@@ -6754,14 +9404,14 @@
       </p:sp>
       <p:pic>
         <p:nvPicPr>
-          <p:cNvPr id="29" name=""/>
+          <p:cNvPr id="30" name=""/>
           <p:cNvPicPr>
             <a:picLocks xmlns:a="http://schemas.openxmlformats.org/drawingml/2006/main" noChangeAspect="1"/>
           </p:cNvPicPr>
           <p:nvPr/>
         </p:nvPicPr>
         <p:blipFill>
-          <a:blip xmlns:r="http://schemas.openxmlformats.org/officeDocument/2006/relationships" xmlns:a="http://schemas.openxmlformats.org/drawingml/2006/main" r:embed="R03f68ea1b99542c9"/>
+          <a:blip xmlns:r="http://schemas.openxmlformats.org/officeDocument/2006/relationships" xmlns:a="http://schemas.openxmlformats.org/drawingml/2006/main" r:embed="R68b41d77470e47db"/>
           <a:stretch xmlns:a="http://schemas.openxmlformats.org/drawingml/2006/main"/>
         </p:blipFill>
         <p:spPr>
@@ -7724,7 +10374,7 @@
                 <a:ea typeface="微软雅黑"/>
                 <a:cs typeface="微软雅黑"/>
               </a:rPr>
-              <a:t>同一阅读卡任务升级为可审计工作流</a:t>
+              <a:t>把原型组织成可反查的工作流</a:t>
             </a:r>
             <a:endParaRPr/>
           </a:p>
@@ -7760,74 +10410,22 @@
       </p:sp>
       <p:sp>
         <p:nvSpPr>
-          <p:cNvPr id="6" name="brand-header">
-            <a:extLst xmlns:a="http://schemas.openxmlformats.org/drawingml/2006/main">
-              <a:ext uri="{FF2B5EF4-FFF2-40B4-BE49-F238E27FC236}">
-                <a16:creationId xmlns:a16="http://schemas.microsoft.com/office/drawing/2014/main" id="{88EDFD4F-ED8E-4280-A9B4-FD2B9A77356B}"/>
-              </a:ext>
-            </a:extLst>
-          </p:cNvPr>
-          <p:cNvSpPr>
-            <a:spLocks xmlns:a="http://schemas.openxmlformats.org/drawingml/2006/main" noGrp="1"/>
-          </p:cNvSpPr>
-          <p:nvPr/>
-        </p:nvSpPr>
-        <p:spPr>
-          <a:xfrm xmlns:a="http://schemas.openxmlformats.org/drawingml/2006/main">
-            <a:off x="0" y="0"/>
-            <a:ext cx="11887200" cy="685800"/>
-          </a:xfrm>
-          <a:prstGeom xmlns:a="http://schemas.openxmlformats.org/drawingml/2006/main" prst="rect">
-            <a:avLst/>
-          </a:prstGeom>
-          <a:solidFill xmlns:a="http://schemas.openxmlformats.org/drawingml/2006/main">
-            <a:srgbClr val="C8161E"/>
-          </a:solidFill>
-          <a:ln xmlns:a="http://schemas.openxmlformats.org/drawingml/2006/main" w="0">
-            <a:noFill/>
-          </a:ln>
-        </p:spPr>
-      </p:sp>
-      <p:pic>
-        <p:nvPicPr>
-          <p:cNvPr id="35" name=""/>
-          <p:cNvPicPr>
-            <a:picLocks xmlns:a="http://schemas.openxmlformats.org/drawingml/2006/main" noChangeAspect="1"/>
-          </p:cNvPicPr>
-          <p:nvPr/>
-        </p:nvPicPr>
-        <p:blipFill>
-          <a:blip xmlns:r="http://schemas.openxmlformats.org/officeDocument/2006/relationships" xmlns:a="http://schemas.openxmlformats.org/drawingml/2006/main" r:embed="Rc1f7a37d70fc4b10"/>
-          <a:stretch xmlns:a="http://schemas.openxmlformats.org/drawingml/2006/main"/>
-        </p:blipFill>
-        <p:spPr>
-          <a:xfrm xmlns:a="http://schemas.openxmlformats.org/drawingml/2006/main">
-            <a:off x="323850" y="76200"/>
-            <a:ext cx="533400" cy="533400"/>
-          </a:xfrm>
-          <a:prstGeom xmlns:a="http://schemas.openxmlformats.org/drawingml/2006/main" prst="rect">
-            <a:avLst/>
-          </a:prstGeom>
-        </p:spPr>
-      </p:pic>
-      <p:sp>
-        <p:nvSpPr>
-          <p:cNvPr id="8" name="brand-title">
-            <a:extLst xmlns:a="http://schemas.openxmlformats.org/drawingml/2006/main">
-              <a:ext uri="{FF2B5EF4-FFF2-40B4-BE49-F238E27FC236}">
-                <a16:creationId xmlns:a16="http://schemas.microsoft.com/office/drawing/2014/main" id="{53D1D6C1-B528-44D1-91C2-094E60A88E28}"/>
-              </a:ext>
-            </a:extLst>
-          </p:cNvPr>
-          <p:cNvSpPr>
-            <a:spLocks xmlns:a="http://schemas.openxmlformats.org/drawingml/2006/main" noGrp="1"/>
-          </p:cNvSpPr>
-          <p:nvPr/>
-        </p:nvSpPr>
-        <p:spPr>
-          <a:xfrm xmlns:a="http://schemas.openxmlformats.org/drawingml/2006/main">
-            <a:off x="1028700" y="66675"/>
-            <a:ext cx="10477500" cy="552450"/>
+          <p:cNvPr id="6" name="content-322">
+            <a:extLst xmlns:a="http://schemas.openxmlformats.org/drawingml/2006/main">
+              <a:ext uri="{FF2B5EF4-FFF2-40B4-BE49-F238E27FC236}">
+                <a16:creationId xmlns:a16="http://schemas.microsoft.com/office/drawing/2014/main" id="{0B8D5072-BDEF-4E59-A92C-7B11A7A9E7F3}"/>
+              </a:ext>
+            </a:extLst>
+          </p:cNvPr>
+          <p:cNvSpPr>
+            <a:spLocks xmlns:a="http://schemas.openxmlformats.org/drawingml/2006/main" noGrp="1"/>
+          </p:cNvSpPr>
+          <p:nvPr/>
+        </p:nvSpPr>
+        <p:spPr>
+          <a:xfrm xmlns:a="http://schemas.openxmlformats.org/drawingml/2006/main">
+            <a:off x="609600" y="1571625"/>
+            <a:ext cx="10972800" cy="432435"/>
           </a:xfrm>
           <a:prstGeom xmlns:a="http://schemas.openxmlformats.org/drawingml/2006/main" prst="rect">
             <a:avLst/>
@@ -7838,7 +10436,7 @@
           </a:ln>
         </p:spPr>
         <p:txBody>
-          <a:bodyPr xmlns:a="http://schemas.openxmlformats.org/drawingml/2006/main" lIns="0" tIns="0" rIns="0" bIns="0" anchor="ctr"/>
+          <a:bodyPr xmlns:a="http://schemas.openxmlformats.org/drawingml/2006/main" lIns="0" tIns="0" rIns="0" bIns="0" anchor="t"/>
           <a:lstStyle xmlns:a="http://schemas.openxmlformats.org/drawingml/2006/main"/>
           <a:p xmlns:a="http://schemas.openxmlformats.org/drawingml/2006/main">
             <a:pPr algn="l">
@@ -7846,9 +10444,9 @@
                 <a:spcPct val="118000"/>
               </a:lnSpc>
               <a:buNone/>
-              <a:defRPr sz="3000" b="1">
-                <a:solidFill>
-                  <a:srgbClr val="FFFFFF"/>
+              <a:defRPr sz="2400" b="0">
+                <a:solidFill>
+                  <a:srgbClr val="27333D"/>
                 </a:solidFill>
                 <a:latin typeface="微软雅黑"/>
                 <a:ea typeface="微软雅黑"/>
@@ -7856,37 +10454,37 @@
               </a:defRPr>
             </a:pPr>
             <a:r>
-              <a:rPr sz="3000" b="1">
-                <a:solidFill>
-                  <a:srgbClr val="FFFFFF"/>
+              <a:rPr sz="2400" b="0">
+                <a:solidFill>
+                  <a:srgbClr val="27333D"/>
                 </a:solidFill>
                 <a:latin typeface="微软雅黑"/>
                 <a:ea typeface="微软雅黑"/>
                 <a:cs typeface="微软雅黑"/>
               </a:rPr>
-              <a:t>同一阅读卡任务升级为可审计工作流</a:t>
-            </a:r>
-          </a:p>
-        </p:txBody>
-      </p:sp>
-      <p:sp>
-        <p:nvSpPr>
-          <p:cNvPr id="9" name="source">
-            <a:extLst xmlns:a="http://schemas.openxmlformats.org/drawingml/2006/main">
-              <a:ext uri="{FF2B5EF4-FFF2-40B4-BE49-F238E27FC236}">
-                <a16:creationId xmlns:a16="http://schemas.microsoft.com/office/drawing/2014/main" id="{BF43DA5E-7E26-4E2B-886D-352D8BC0D79C}"/>
-              </a:ext>
-            </a:extLst>
-          </p:cNvPr>
-          <p:cNvSpPr>
-            <a:spLocks xmlns:a="http://schemas.openxmlformats.org/drawingml/2006/main" noGrp="1"/>
-          </p:cNvSpPr>
-          <p:nvPr/>
-        </p:nvSpPr>
-        <p:spPr>
-          <a:xfrm xmlns:a="http://schemas.openxmlformats.org/drawingml/2006/main">
-            <a:off x="609600" y="6067425"/>
-            <a:ext cx="10763250" cy="209550"/>
+              <a:t>任务｜限定条件保留的检查流程</a:t>
+            </a:r>
+          </a:p>
+        </p:txBody>
+      </p:sp>
+      <p:sp>
+        <p:nvSpPr>
+          <p:cNvPr id="7" name="content-323">
+            <a:extLst xmlns:a="http://schemas.openxmlformats.org/drawingml/2006/main">
+              <a:ext uri="{FF2B5EF4-FFF2-40B4-BE49-F238E27FC236}">
+                <a16:creationId xmlns:a16="http://schemas.microsoft.com/office/drawing/2014/main" id="{C9D36877-FC78-4FB4-87CD-C8258EE62870}"/>
+              </a:ext>
+            </a:extLst>
+          </p:cNvPr>
+          <p:cNvSpPr>
+            <a:spLocks xmlns:a="http://schemas.openxmlformats.org/drawingml/2006/main" noGrp="1"/>
+          </p:cNvSpPr>
+          <p:nvPr/>
+        </p:nvSpPr>
+        <p:spPr>
+          <a:xfrm xmlns:a="http://schemas.openxmlformats.org/drawingml/2006/main">
+            <a:off x="609600" y="2261235"/>
+            <a:ext cx="10972800" cy="432435"/>
           </a:xfrm>
           <a:prstGeom xmlns:a="http://schemas.openxmlformats.org/drawingml/2006/main" prst="rect">
             <a:avLst/>
@@ -7905,9 +10503,9 @@
                 <a:spcPct val="118000"/>
               </a:lnSpc>
               <a:buNone/>
-              <a:defRPr sz="1100" b="0">
-                <a:solidFill>
-                  <a:srgbClr val="66727D"/>
+              <a:defRPr sz="2400" b="0">
+                <a:solidFill>
+                  <a:srgbClr val="27333D"/>
                 </a:solidFill>
                 <a:latin typeface="微软雅黑"/>
                 <a:ea typeface="微软雅黑"/>
@@ -7915,37 +10513,37 @@
               </a:defRPr>
             </a:pPr>
             <a:r>
-              <a:rPr sz="1100" b="0">
-                <a:solidFill>
-                  <a:srgbClr val="66727D"/>
+              <a:rPr sz="2400" b="0">
+                <a:solidFill>
+                  <a:srgbClr val="27333D"/>
                 </a:solidFill>
                 <a:latin typeface="微软雅黑"/>
                 <a:ea typeface="微软雅黑"/>
                 <a:cs typeface="微软雅黑"/>
               </a:rPr>
-              <a:t>来源：lesson-12/slides.md；课程工件与讲义见 speaker notes</a:t>
-            </a:r>
-          </a:p>
-        </p:txBody>
-      </p:sp>
-      <p:sp>
-        <p:nvSpPr>
-          <p:cNvPr id="10" name="fiction">
-            <a:extLst xmlns:a="http://schemas.openxmlformats.org/drawingml/2006/main">
-              <a:ext uri="{FF2B5EF4-FFF2-40B4-BE49-F238E27FC236}">
-                <a16:creationId xmlns:a16="http://schemas.microsoft.com/office/drawing/2014/main" id="{889283E5-8866-41DD-BF07-BD7907487F03}"/>
-              </a:ext>
-            </a:extLst>
-          </p:cNvPr>
-          <p:cNvSpPr>
-            <a:spLocks xmlns:a="http://schemas.openxmlformats.org/drawingml/2006/main" noGrp="1"/>
-          </p:cNvSpPr>
-          <p:nvPr/>
-        </p:nvSpPr>
-        <p:spPr>
-          <a:xfrm xmlns:a="http://schemas.openxmlformats.org/drawingml/2006/main">
-            <a:off x="609600" y="885825"/>
-            <a:ext cx="10572750" cy="314325"/>
+              <a:t>输入｜3 份教学构造源文本与 6 份预置输出</a:t>
+            </a:r>
+          </a:p>
+        </p:txBody>
+      </p:sp>
+      <p:sp>
+        <p:nvSpPr>
+          <p:cNvPr id="8" name="content-324">
+            <a:extLst xmlns:a="http://schemas.openxmlformats.org/drawingml/2006/main">
+              <a:ext uri="{FF2B5EF4-FFF2-40B4-BE49-F238E27FC236}">
+                <a16:creationId xmlns:a16="http://schemas.microsoft.com/office/drawing/2014/main" id="{06394105-2111-472F-AC72-A856664954DC}"/>
+              </a:ext>
+            </a:extLst>
+          </p:cNvPr>
+          <p:cNvSpPr>
+            <a:spLocks xmlns:a="http://schemas.openxmlformats.org/drawingml/2006/main" noGrp="1"/>
+          </p:cNvSpPr>
+          <p:nvPr/>
+        </p:nvSpPr>
+        <p:spPr>
+          <a:xfrm xmlns:a="http://schemas.openxmlformats.org/drawingml/2006/main">
+            <a:off x="609600" y="2950845"/>
+            <a:ext cx="10972800" cy="432435"/>
           </a:xfrm>
           <a:prstGeom xmlns:a="http://schemas.openxmlformats.org/drawingml/2006/main" prst="rect">
             <a:avLst/>
@@ -7964,9 +10562,9 @@
                 <a:spcPct val="118000"/>
               </a:lnSpc>
               <a:buNone/>
-              <a:defRPr sz="1800" b="0">
-                <a:solidFill>
-                  <a:srgbClr val="A96510"/>
+              <a:defRPr sz="2400" b="0">
+                <a:solidFill>
+                  <a:srgbClr val="27333D"/>
                 </a:solidFill>
                 <a:latin typeface="微软雅黑"/>
                 <a:ea typeface="微软雅黑"/>
@@ -7974,67 +10572,37 @@
               </a:defRPr>
             </a:pPr>
             <a:r>
-              <a:rPr sz="1800" b="0">
-                <a:solidFill>
-                  <a:srgbClr val="A96510"/>
+              <a:rPr sz="2400" b="0">
+                <a:solidFill>
+                  <a:srgbClr val="27333D"/>
                 </a:solidFill>
                 <a:latin typeface="微软雅黑"/>
                 <a:ea typeface="微软雅黑"/>
                 <a:cs typeface="微软雅黑"/>
               </a:rPr>
-              <a:t>课程虚构教学案例</a:t>
-            </a:r>
-          </a:p>
-        </p:txBody>
-      </p:sp>
-      <p:sp>
-        <p:nvSpPr>
-          <p:cNvPr id="11" name="chain-line-0">
-            <a:extLst xmlns:a="http://schemas.openxmlformats.org/drawingml/2006/main">
-              <a:ext uri="{FF2B5EF4-FFF2-40B4-BE49-F238E27FC236}">
-                <a16:creationId xmlns:a16="http://schemas.microsoft.com/office/drawing/2014/main" id="{A6800770-7DE2-475A-86BA-986502FF9304}"/>
-              </a:ext>
-            </a:extLst>
-          </p:cNvPr>
-          <p:cNvSpPr>
-            <a:spLocks xmlns:a="http://schemas.openxmlformats.org/drawingml/2006/main" noGrp="1"/>
-          </p:cNvSpPr>
-          <p:nvPr/>
-        </p:nvSpPr>
-        <p:spPr>
-          <a:xfrm xmlns:a="http://schemas.openxmlformats.org/drawingml/2006/main">
-            <a:off x="609600" y="2486025"/>
-            <a:ext cx="1714500" cy="14288"/>
-          </a:xfrm>
-          <a:prstGeom xmlns:a="http://schemas.openxmlformats.org/drawingml/2006/main" prst="rect">
-            <a:avLst/>
-          </a:prstGeom>
-          <a:solidFill xmlns:a="http://schemas.openxmlformats.org/drawingml/2006/main">
-            <a:srgbClr val="1F4D78"/>
-          </a:solidFill>
-          <a:ln xmlns:a="http://schemas.openxmlformats.org/drawingml/2006/main" w="0">
-            <a:noFill/>
-          </a:ln>
-        </p:spPr>
-      </p:sp>
-      <p:sp>
-        <p:nvSpPr>
-          <p:cNvPr id="12" name="chain-0">
-            <a:extLst xmlns:a="http://schemas.openxmlformats.org/drawingml/2006/main">
-              <a:ext uri="{FF2B5EF4-FFF2-40B4-BE49-F238E27FC236}">
-                <a16:creationId xmlns:a16="http://schemas.microsoft.com/office/drawing/2014/main" id="{50CF4000-1191-4155-AD78-E38EDECA091A}"/>
-              </a:ext>
-            </a:extLst>
-          </p:cNvPr>
-          <p:cNvSpPr>
-            <a:spLocks xmlns:a="http://schemas.openxmlformats.org/drawingml/2006/main" noGrp="1"/>
-          </p:cNvSpPr>
-          <p:nvPr/>
-        </p:nvSpPr>
-        <p:spPr>
-          <a:xfrm xmlns:a="http://schemas.openxmlformats.org/drawingml/2006/main">
-            <a:off x="609600" y="1762125"/>
-            <a:ext cx="1714500" cy="666750"/>
+              <a:t>过程｜回放、标注核验、汇总</a:t>
+            </a:r>
+          </a:p>
+        </p:txBody>
+      </p:sp>
+      <p:sp>
+        <p:nvSpPr>
+          <p:cNvPr id="9" name="content-325">
+            <a:extLst xmlns:a="http://schemas.openxmlformats.org/drawingml/2006/main">
+              <a:ext uri="{FF2B5EF4-FFF2-40B4-BE49-F238E27FC236}">
+                <a16:creationId xmlns:a16="http://schemas.microsoft.com/office/drawing/2014/main" id="{021C0BF4-E162-4E7D-A1E6-73CF8B0CEBF2}"/>
+              </a:ext>
+            </a:extLst>
+          </p:cNvPr>
+          <p:cNvSpPr>
+            <a:spLocks xmlns:a="http://schemas.openxmlformats.org/drawingml/2006/main" noGrp="1"/>
+          </p:cNvSpPr>
+          <p:nvPr/>
+        </p:nvSpPr>
+        <p:spPr>
+          <a:xfrm xmlns:a="http://schemas.openxmlformats.org/drawingml/2006/main">
+            <a:off x="609600" y="3640455"/>
+            <a:ext cx="10972800" cy="432435"/>
           </a:xfrm>
           <a:prstGeom xmlns:a="http://schemas.openxmlformats.org/drawingml/2006/main" prst="rect">
             <a:avLst/>
@@ -8045,17 +10613,17 @@
           </a:ln>
         </p:spPr>
         <p:txBody>
-          <a:bodyPr xmlns:a="http://schemas.openxmlformats.org/drawingml/2006/main" lIns="0" tIns="0" rIns="0" bIns="0" anchor="ctr"/>
-          <a:lstStyle xmlns:a="http://schemas.openxmlformats.org/drawingml/2006/main"/>
-          <a:p xmlns:a="http://schemas.openxmlformats.org/drawingml/2006/main">
-            <a:pPr algn="ctr">
+          <a:bodyPr xmlns:a="http://schemas.openxmlformats.org/drawingml/2006/main" lIns="0" tIns="0" rIns="0" bIns="0" anchor="t"/>
+          <a:lstStyle xmlns:a="http://schemas.openxmlformats.org/drawingml/2006/main"/>
+          <a:p xmlns:a="http://schemas.openxmlformats.org/drawingml/2006/main">
+            <a:pPr algn="l">
               <a:lnSpc>
                 <a:spcPct val="118000"/>
               </a:lnSpc>
               <a:buNone/>
-              <a:defRPr sz="2200" b="0">
-                <a:solidFill>
-                  <a:srgbClr val="1F4D78"/>
+              <a:defRPr sz="2400" b="0">
+                <a:solidFill>
+                  <a:srgbClr val="27333D"/>
                 </a:solidFill>
                 <a:latin typeface="微软雅黑"/>
                 <a:ea typeface="微软雅黑"/>
@@ -8063,37 +10631,37 @@
               </a:defRPr>
             </a:pPr>
             <a:r>
-              <a:rPr sz="2200" b="0">
-                <a:solidFill>
-                  <a:srgbClr val="1F4D78"/>
+              <a:rPr sz="2400" b="0">
+                <a:solidFill>
+                  <a:srgbClr val="27333D"/>
                 </a:solidFill>
                 <a:latin typeface="微软雅黑"/>
                 <a:ea typeface="微软雅黑"/>
                 <a:cs typeface="微软雅黑"/>
               </a:rPr>
-              <a:t>20 篇论文</a:t>
-            </a:r>
-          </a:p>
-        </p:txBody>
-      </p:sp>
-      <p:sp>
-        <p:nvSpPr>
-          <p:cNvPr id="13" name="chain-arrow-0">
-            <a:extLst xmlns:a="http://schemas.openxmlformats.org/drawingml/2006/main">
-              <a:ext uri="{FF2B5EF4-FFF2-40B4-BE49-F238E27FC236}">
-                <a16:creationId xmlns:a16="http://schemas.microsoft.com/office/drawing/2014/main" id="{6ADE1618-BDC1-48FD-9BE0-AF393E922F64}"/>
-              </a:ext>
-            </a:extLst>
-          </p:cNvPr>
-          <p:cNvSpPr>
-            <a:spLocks xmlns:a="http://schemas.openxmlformats.org/drawingml/2006/main" noGrp="1"/>
-          </p:cNvSpPr>
-          <p:nvPr/>
-        </p:nvSpPr>
-        <p:spPr>
-          <a:xfrm xmlns:a="http://schemas.openxmlformats.org/drawingml/2006/main">
-            <a:off x="2324100" y="1933575"/>
-            <a:ext cx="600075" cy="323850"/>
+              <a:t>边界｜固定链；无模型调用；参考标注需人审</a:t>
+            </a:r>
+          </a:p>
+        </p:txBody>
+      </p:sp>
+      <p:sp>
+        <p:nvSpPr>
+          <p:cNvPr id="10" name="content-326">
+            <a:extLst xmlns:a="http://schemas.openxmlformats.org/drawingml/2006/main">
+              <a:ext uri="{FF2B5EF4-FFF2-40B4-BE49-F238E27FC236}">
+                <a16:creationId xmlns:a16="http://schemas.microsoft.com/office/drawing/2014/main" id="{3F1FF797-936E-429B-9D0E-647D435FE506}"/>
+              </a:ext>
+            </a:extLst>
+          </p:cNvPr>
+          <p:cNvSpPr>
+            <a:spLocks xmlns:a="http://schemas.openxmlformats.org/drawingml/2006/main" noGrp="1"/>
+          </p:cNvSpPr>
+          <p:nvPr/>
+        </p:nvSpPr>
+        <p:spPr>
+          <a:xfrm xmlns:a="http://schemas.openxmlformats.org/drawingml/2006/main">
+            <a:off x="609600" y="4330065"/>
+            <a:ext cx="10972800" cy="432435"/>
           </a:xfrm>
           <a:prstGeom xmlns:a="http://schemas.openxmlformats.org/drawingml/2006/main" prst="rect">
             <a:avLst/>
@@ -8104,10 +10672,10 @@
           </a:ln>
         </p:spPr>
         <p:txBody>
-          <a:bodyPr xmlns:a="http://schemas.openxmlformats.org/drawingml/2006/main" lIns="0" tIns="0" rIns="0" bIns="0" anchor="ctr"/>
-          <a:lstStyle xmlns:a="http://schemas.openxmlformats.org/drawingml/2006/main"/>
-          <a:p xmlns:a="http://schemas.openxmlformats.org/drawingml/2006/main">
-            <a:pPr algn="ctr">
+          <a:bodyPr xmlns:a="http://schemas.openxmlformats.org/drawingml/2006/main" lIns="0" tIns="0" rIns="0" bIns="0" anchor="t"/>
+          <a:lstStyle xmlns:a="http://schemas.openxmlformats.org/drawingml/2006/main"/>
+          <a:p xmlns:a="http://schemas.openxmlformats.org/drawingml/2006/main">
+            <a:pPr algn="l">
               <a:lnSpc>
                 <a:spcPct val="118000"/>
               </a:lnSpc>
@@ -8130,894 +10698,7 @@
                 <a:ea typeface="微软雅黑"/>
                 <a:cs typeface="微软雅黑"/>
               </a:rPr>
-              <a:t>→</a:t>
-            </a:r>
-          </a:p>
-        </p:txBody>
-      </p:sp>
-      <p:sp>
-        <p:nvSpPr>
-          <p:cNvPr id="14" name="chain-sub-0">
-            <a:extLst xmlns:a="http://schemas.openxmlformats.org/drawingml/2006/main">
-              <a:ext uri="{FF2B5EF4-FFF2-40B4-BE49-F238E27FC236}">
-                <a16:creationId xmlns:a16="http://schemas.microsoft.com/office/drawing/2014/main" id="{6F44AE8C-7B44-4465-90F9-0B148EB735DD}"/>
-              </a:ext>
-            </a:extLst>
-          </p:cNvPr>
-          <p:cNvSpPr>
-            <a:spLocks xmlns:a="http://schemas.openxmlformats.org/drawingml/2006/main" noGrp="1"/>
-          </p:cNvSpPr>
-          <p:nvPr/>
-        </p:nvSpPr>
-        <p:spPr>
-          <a:xfrm xmlns:a="http://schemas.openxmlformats.org/drawingml/2006/main">
-            <a:off x="609600" y="2638425"/>
-            <a:ext cx="1714500" cy="571500"/>
-          </a:xfrm>
-          <a:prstGeom xmlns:a="http://schemas.openxmlformats.org/drawingml/2006/main" prst="rect">
-            <a:avLst/>
-          </a:prstGeom>
-          <a:noFill xmlns:a="http://schemas.openxmlformats.org/drawingml/2006/main"/>
-          <a:ln xmlns:a="http://schemas.openxmlformats.org/drawingml/2006/main" w="0">
-            <a:noFill/>
-          </a:ln>
-        </p:spPr>
-        <p:txBody>
-          <a:bodyPr xmlns:a="http://schemas.openxmlformats.org/drawingml/2006/main" lIns="0" tIns="0" rIns="0" bIns="0" anchor="t"/>
-          <a:lstStyle xmlns:a="http://schemas.openxmlformats.org/drawingml/2006/main"/>
-          <a:p xmlns:a="http://schemas.openxmlformats.org/drawingml/2006/main">
-            <a:pPr algn="ctr">
-              <a:lnSpc>
-                <a:spcPct val="118000"/>
-              </a:lnSpc>
-              <a:buNone/>
-              <a:defRPr sz="2000" b="0">
-                <a:solidFill>
-                  <a:srgbClr val="66727D"/>
-                </a:solidFill>
-                <a:latin typeface="微软雅黑"/>
-                <a:ea typeface="微软雅黑"/>
-                <a:cs typeface="微软雅黑"/>
-              </a:defRPr>
-            </a:pPr>
-            <a:r>
-              <a:rPr sz="2000" b="0">
-                <a:solidFill>
-                  <a:srgbClr val="66727D"/>
-                </a:solidFill>
-                <a:latin typeface="微软雅黑"/>
-                <a:ea typeface="微软雅黑"/>
-                <a:cs typeface="微软雅黑"/>
-              </a:rPr>
-              <a:t>固定输入</a:t>
-            </a:r>
-          </a:p>
-        </p:txBody>
-      </p:sp>
-      <p:sp>
-        <p:nvSpPr>
-          <p:cNvPr id="15" name="chain-line-1">
-            <a:extLst xmlns:a="http://schemas.openxmlformats.org/drawingml/2006/main">
-              <a:ext uri="{FF2B5EF4-FFF2-40B4-BE49-F238E27FC236}">
-                <a16:creationId xmlns:a16="http://schemas.microsoft.com/office/drawing/2014/main" id="{5CA7A75A-F1F6-4122-8455-6DAFB825BE81}"/>
-              </a:ext>
-            </a:extLst>
-          </p:cNvPr>
-          <p:cNvSpPr>
-            <a:spLocks xmlns:a="http://schemas.openxmlformats.org/drawingml/2006/main" noGrp="1"/>
-          </p:cNvSpPr>
-          <p:nvPr/>
-        </p:nvSpPr>
-        <p:spPr>
-          <a:xfrm xmlns:a="http://schemas.openxmlformats.org/drawingml/2006/main">
-            <a:off x="2924175" y="2486025"/>
-            <a:ext cx="1714500" cy="14288"/>
-          </a:xfrm>
-          <a:prstGeom xmlns:a="http://schemas.openxmlformats.org/drawingml/2006/main" prst="rect">
-            <a:avLst/>
-          </a:prstGeom>
-          <a:solidFill xmlns:a="http://schemas.openxmlformats.org/drawingml/2006/main">
-            <a:srgbClr val="1F4D78"/>
-          </a:solidFill>
-          <a:ln xmlns:a="http://schemas.openxmlformats.org/drawingml/2006/main" w="0">
-            <a:noFill/>
-          </a:ln>
-        </p:spPr>
-      </p:sp>
-      <p:sp>
-        <p:nvSpPr>
-          <p:cNvPr id="16" name="chain-1">
-            <a:extLst xmlns:a="http://schemas.openxmlformats.org/drawingml/2006/main">
-              <a:ext uri="{FF2B5EF4-FFF2-40B4-BE49-F238E27FC236}">
-                <a16:creationId xmlns:a16="http://schemas.microsoft.com/office/drawing/2014/main" id="{A47E4A55-55BE-4D49-AC23-5C272509FE62}"/>
-              </a:ext>
-            </a:extLst>
-          </p:cNvPr>
-          <p:cNvSpPr>
-            <a:spLocks xmlns:a="http://schemas.openxmlformats.org/drawingml/2006/main" noGrp="1"/>
-          </p:cNvSpPr>
-          <p:nvPr/>
-        </p:nvSpPr>
-        <p:spPr>
-          <a:xfrm xmlns:a="http://schemas.openxmlformats.org/drawingml/2006/main">
-            <a:off x="2924175" y="1762125"/>
-            <a:ext cx="1714500" cy="666750"/>
-          </a:xfrm>
-          <a:prstGeom xmlns:a="http://schemas.openxmlformats.org/drawingml/2006/main" prst="rect">
-            <a:avLst/>
-          </a:prstGeom>
-          <a:noFill xmlns:a="http://schemas.openxmlformats.org/drawingml/2006/main"/>
-          <a:ln xmlns:a="http://schemas.openxmlformats.org/drawingml/2006/main" w="0">
-            <a:noFill/>
-          </a:ln>
-        </p:spPr>
-        <p:txBody>
-          <a:bodyPr xmlns:a="http://schemas.openxmlformats.org/drawingml/2006/main" lIns="0" tIns="0" rIns="0" bIns="0" anchor="ctr"/>
-          <a:lstStyle xmlns:a="http://schemas.openxmlformats.org/drawingml/2006/main"/>
-          <a:p xmlns:a="http://schemas.openxmlformats.org/drawingml/2006/main">
-            <a:pPr algn="ctr">
-              <a:lnSpc>
-                <a:spcPct val="118000"/>
-              </a:lnSpc>
-              <a:buNone/>
-              <a:defRPr sz="2200" b="0">
-                <a:solidFill>
-                  <a:srgbClr val="1F4D78"/>
-                </a:solidFill>
-                <a:latin typeface="微软雅黑"/>
-                <a:ea typeface="微软雅黑"/>
-                <a:cs typeface="微软雅黑"/>
-              </a:defRPr>
-            </a:pPr>
-            <a:r>
-              <a:rPr sz="2200" b="0">
-                <a:solidFill>
-                  <a:srgbClr val="1F4D78"/>
-                </a:solidFill>
-                <a:latin typeface="微软雅黑"/>
-                <a:ea typeface="微软雅黑"/>
-                <a:cs typeface="微软雅黑"/>
-              </a:rPr>
-              <a:t>两条件生成</a:t>
-            </a:r>
-          </a:p>
-        </p:txBody>
-      </p:sp>
-      <p:sp>
-        <p:nvSpPr>
-          <p:cNvPr id="17" name="chain-arrow-1">
-            <a:extLst xmlns:a="http://schemas.openxmlformats.org/drawingml/2006/main">
-              <a:ext uri="{FF2B5EF4-FFF2-40B4-BE49-F238E27FC236}">
-                <a16:creationId xmlns:a16="http://schemas.microsoft.com/office/drawing/2014/main" id="{4DC649AF-AF23-47BB-88FC-6E5AE3F2A9A4}"/>
-              </a:ext>
-            </a:extLst>
-          </p:cNvPr>
-          <p:cNvSpPr>
-            <a:spLocks xmlns:a="http://schemas.openxmlformats.org/drawingml/2006/main" noGrp="1"/>
-          </p:cNvSpPr>
-          <p:nvPr/>
-        </p:nvSpPr>
-        <p:spPr>
-          <a:xfrm xmlns:a="http://schemas.openxmlformats.org/drawingml/2006/main">
-            <a:off x="4638675" y="1933575"/>
-            <a:ext cx="600075" cy="323850"/>
-          </a:xfrm>
-          <a:prstGeom xmlns:a="http://schemas.openxmlformats.org/drawingml/2006/main" prst="rect">
-            <a:avLst/>
-          </a:prstGeom>
-          <a:noFill xmlns:a="http://schemas.openxmlformats.org/drawingml/2006/main"/>
-          <a:ln xmlns:a="http://schemas.openxmlformats.org/drawingml/2006/main" w="0">
-            <a:noFill/>
-          </a:ln>
-        </p:spPr>
-        <p:txBody>
-          <a:bodyPr xmlns:a="http://schemas.openxmlformats.org/drawingml/2006/main" lIns="0" tIns="0" rIns="0" bIns="0" anchor="ctr"/>
-          <a:lstStyle xmlns:a="http://schemas.openxmlformats.org/drawingml/2006/main"/>
-          <a:p xmlns:a="http://schemas.openxmlformats.org/drawingml/2006/main">
-            <a:pPr algn="ctr">
-              <a:lnSpc>
-                <a:spcPct val="118000"/>
-              </a:lnSpc>
-              <a:buNone/>
-              <a:defRPr sz="2400" b="0">
-                <a:solidFill>
-                  <a:srgbClr val="1F4D78"/>
-                </a:solidFill>
-                <a:latin typeface="微软雅黑"/>
-                <a:ea typeface="微软雅黑"/>
-                <a:cs typeface="微软雅黑"/>
-              </a:defRPr>
-            </a:pPr>
-            <a:r>
-              <a:rPr sz="2400" b="0">
-                <a:solidFill>
-                  <a:srgbClr val="1F4D78"/>
-                </a:solidFill>
-                <a:latin typeface="微软雅黑"/>
-                <a:ea typeface="微软雅黑"/>
-                <a:cs typeface="微软雅黑"/>
-              </a:rPr>
-              <a:t>→</a:t>
-            </a:r>
-          </a:p>
-        </p:txBody>
-      </p:sp>
-      <p:sp>
-        <p:nvSpPr>
-          <p:cNvPr id="18" name="chain-sub-1">
-            <a:extLst xmlns:a="http://schemas.openxmlformats.org/drawingml/2006/main">
-              <a:ext uri="{FF2B5EF4-FFF2-40B4-BE49-F238E27FC236}">
-                <a16:creationId xmlns:a16="http://schemas.microsoft.com/office/drawing/2014/main" id="{91D1A8D4-2532-48E0-9C45-C808C1D32044}"/>
-              </a:ext>
-            </a:extLst>
-          </p:cNvPr>
-          <p:cNvSpPr>
-            <a:spLocks xmlns:a="http://schemas.openxmlformats.org/drawingml/2006/main" noGrp="1"/>
-          </p:cNvSpPr>
-          <p:nvPr/>
-        </p:nvSpPr>
-        <p:spPr>
-          <a:xfrm xmlns:a="http://schemas.openxmlformats.org/drawingml/2006/main">
-            <a:off x="2924175" y="2638425"/>
-            <a:ext cx="1714500" cy="571500"/>
-          </a:xfrm>
-          <a:prstGeom xmlns:a="http://schemas.openxmlformats.org/drawingml/2006/main" prst="rect">
-            <a:avLst/>
-          </a:prstGeom>
-          <a:noFill xmlns:a="http://schemas.openxmlformats.org/drawingml/2006/main"/>
-          <a:ln xmlns:a="http://schemas.openxmlformats.org/drawingml/2006/main" w="0">
-            <a:noFill/>
-          </a:ln>
-        </p:spPr>
-        <p:txBody>
-          <a:bodyPr xmlns:a="http://schemas.openxmlformats.org/drawingml/2006/main" lIns="0" tIns="0" rIns="0" bIns="0" anchor="t"/>
-          <a:lstStyle xmlns:a="http://schemas.openxmlformats.org/drawingml/2006/main"/>
-          <a:p xmlns:a="http://schemas.openxmlformats.org/drawingml/2006/main">
-            <a:pPr algn="ctr">
-              <a:lnSpc>
-                <a:spcPct val="118000"/>
-              </a:lnSpc>
-              <a:buNone/>
-              <a:defRPr sz="2000" b="0">
-                <a:solidFill>
-                  <a:srgbClr val="66727D"/>
-                </a:solidFill>
-                <a:latin typeface="微软雅黑"/>
-                <a:ea typeface="微软雅黑"/>
-                <a:cs typeface="微软雅黑"/>
-              </a:defRPr>
-            </a:pPr>
-            <a:r>
-              <a:rPr sz="2000" b="0">
-                <a:solidFill>
-                  <a:srgbClr val="66727D"/>
-                </a:solidFill>
-                <a:latin typeface="微软雅黑"/>
-                <a:ea typeface="微软雅黑"/>
-                <a:cs typeface="微软雅黑"/>
-              </a:rPr>
-              <a:t>阅读卡 / 自由摘要</a:t>
-            </a:r>
-          </a:p>
-        </p:txBody>
-      </p:sp>
-      <p:sp>
-        <p:nvSpPr>
-          <p:cNvPr id="19" name="chain-line-2">
-            <a:extLst xmlns:a="http://schemas.openxmlformats.org/drawingml/2006/main">
-              <a:ext uri="{FF2B5EF4-FFF2-40B4-BE49-F238E27FC236}">
-                <a16:creationId xmlns:a16="http://schemas.microsoft.com/office/drawing/2014/main" id="{155D9E96-DB96-4CA6-B490-863936034C1F}"/>
-              </a:ext>
-            </a:extLst>
-          </p:cNvPr>
-          <p:cNvSpPr>
-            <a:spLocks xmlns:a="http://schemas.openxmlformats.org/drawingml/2006/main" noGrp="1"/>
-          </p:cNvSpPr>
-          <p:nvPr/>
-        </p:nvSpPr>
-        <p:spPr>
-          <a:xfrm xmlns:a="http://schemas.openxmlformats.org/drawingml/2006/main">
-            <a:off x="5238750" y="2486025"/>
-            <a:ext cx="1714500" cy="14288"/>
-          </a:xfrm>
-          <a:prstGeom xmlns:a="http://schemas.openxmlformats.org/drawingml/2006/main" prst="rect">
-            <a:avLst/>
-          </a:prstGeom>
-          <a:solidFill xmlns:a="http://schemas.openxmlformats.org/drawingml/2006/main">
-            <a:srgbClr val="1F4D78"/>
-          </a:solidFill>
-          <a:ln xmlns:a="http://schemas.openxmlformats.org/drawingml/2006/main" w="0">
-            <a:noFill/>
-          </a:ln>
-        </p:spPr>
-      </p:sp>
-      <p:sp>
-        <p:nvSpPr>
-          <p:cNvPr id="20" name="chain-2">
-            <a:extLst xmlns:a="http://schemas.openxmlformats.org/drawingml/2006/main">
-              <a:ext uri="{FF2B5EF4-FFF2-40B4-BE49-F238E27FC236}">
-                <a16:creationId xmlns:a16="http://schemas.microsoft.com/office/drawing/2014/main" id="{F0DC681D-344C-42F5-9B81-869B515F38C1}"/>
-              </a:ext>
-            </a:extLst>
-          </p:cNvPr>
-          <p:cNvSpPr>
-            <a:spLocks xmlns:a="http://schemas.openxmlformats.org/drawingml/2006/main" noGrp="1"/>
-          </p:cNvSpPr>
-          <p:nvPr/>
-        </p:nvSpPr>
-        <p:spPr>
-          <a:xfrm xmlns:a="http://schemas.openxmlformats.org/drawingml/2006/main">
-            <a:off x="5238750" y="1762125"/>
-            <a:ext cx="1714500" cy="666750"/>
-          </a:xfrm>
-          <a:prstGeom xmlns:a="http://schemas.openxmlformats.org/drawingml/2006/main" prst="rect">
-            <a:avLst/>
-          </a:prstGeom>
-          <a:noFill xmlns:a="http://schemas.openxmlformats.org/drawingml/2006/main"/>
-          <a:ln xmlns:a="http://schemas.openxmlformats.org/drawingml/2006/main" w="0">
-            <a:noFill/>
-          </a:ln>
-        </p:spPr>
-        <p:txBody>
-          <a:bodyPr xmlns:a="http://schemas.openxmlformats.org/drawingml/2006/main" lIns="0" tIns="0" rIns="0" bIns="0" anchor="ctr"/>
-          <a:lstStyle xmlns:a="http://schemas.openxmlformats.org/drawingml/2006/main"/>
-          <a:p xmlns:a="http://schemas.openxmlformats.org/drawingml/2006/main">
-            <a:pPr algn="ctr">
-              <a:lnSpc>
-                <a:spcPct val="118000"/>
-              </a:lnSpc>
-              <a:buNone/>
-              <a:defRPr sz="2200" b="0">
-                <a:solidFill>
-                  <a:srgbClr val="1F4D78"/>
-                </a:solidFill>
-                <a:latin typeface="微软雅黑"/>
-                <a:ea typeface="微软雅黑"/>
-                <a:cs typeface="微软雅黑"/>
-              </a:defRPr>
-            </a:pPr>
-            <a:r>
-              <a:rPr sz="2200" b="0">
-                <a:solidFill>
-                  <a:srgbClr val="1F4D78"/>
-                </a:solidFill>
-                <a:latin typeface="微软雅黑"/>
-                <a:ea typeface="微软雅黑"/>
-                <a:cs typeface="微软雅黑"/>
-              </a:rPr>
-              <a:t>各 3 次运行</a:t>
-            </a:r>
-          </a:p>
-        </p:txBody>
-      </p:sp>
-      <p:sp>
-        <p:nvSpPr>
-          <p:cNvPr id="21" name="chain-arrow-2">
-            <a:extLst xmlns:a="http://schemas.openxmlformats.org/drawingml/2006/main">
-              <a:ext uri="{FF2B5EF4-FFF2-40B4-BE49-F238E27FC236}">
-                <a16:creationId xmlns:a16="http://schemas.microsoft.com/office/drawing/2014/main" id="{E5A13596-5E17-406F-85FF-431902A51678}"/>
-              </a:ext>
-            </a:extLst>
-          </p:cNvPr>
-          <p:cNvSpPr>
-            <a:spLocks xmlns:a="http://schemas.openxmlformats.org/drawingml/2006/main" noGrp="1"/>
-          </p:cNvSpPr>
-          <p:nvPr/>
-        </p:nvSpPr>
-        <p:spPr>
-          <a:xfrm xmlns:a="http://schemas.openxmlformats.org/drawingml/2006/main">
-            <a:off x="6953250" y="1933575"/>
-            <a:ext cx="600075" cy="323850"/>
-          </a:xfrm>
-          <a:prstGeom xmlns:a="http://schemas.openxmlformats.org/drawingml/2006/main" prst="rect">
-            <a:avLst/>
-          </a:prstGeom>
-          <a:noFill xmlns:a="http://schemas.openxmlformats.org/drawingml/2006/main"/>
-          <a:ln xmlns:a="http://schemas.openxmlformats.org/drawingml/2006/main" w="0">
-            <a:noFill/>
-          </a:ln>
-        </p:spPr>
-        <p:txBody>
-          <a:bodyPr xmlns:a="http://schemas.openxmlformats.org/drawingml/2006/main" lIns="0" tIns="0" rIns="0" bIns="0" anchor="ctr"/>
-          <a:lstStyle xmlns:a="http://schemas.openxmlformats.org/drawingml/2006/main"/>
-          <a:p xmlns:a="http://schemas.openxmlformats.org/drawingml/2006/main">
-            <a:pPr algn="ctr">
-              <a:lnSpc>
-                <a:spcPct val="118000"/>
-              </a:lnSpc>
-              <a:buNone/>
-              <a:defRPr sz="2400" b="0">
-                <a:solidFill>
-                  <a:srgbClr val="1F4D78"/>
-                </a:solidFill>
-                <a:latin typeface="微软雅黑"/>
-                <a:ea typeface="微软雅黑"/>
-                <a:cs typeface="微软雅黑"/>
-              </a:defRPr>
-            </a:pPr>
-            <a:r>
-              <a:rPr sz="2400" b="0">
-                <a:solidFill>
-                  <a:srgbClr val="1F4D78"/>
-                </a:solidFill>
-                <a:latin typeface="微软雅黑"/>
-                <a:ea typeface="微软雅黑"/>
-                <a:cs typeface="微软雅黑"/>
-              </a:rPr>
-              <a:t>→</a:t>
-            </a:r>
-          </a:p>
-        </p:txBody>
-      </p:sp>
-      <p:sp>
-        <p:nvSpPr>
-          <p:cNvPr id="22" name="chain-sub-2">
-            <a:extLst xmlns:a="http://schemas.openxmlformats.org/drawingml/2006/main">
-              <a:ext uri="{FF2B5EF4-FFF2-40B4-BE49-F238E27FC236}">
-                <a16:creationId xmlns:a16="http://schemas.microsoft.com/office/drawing/2014/main" id="{601D2A90-9A1F-4D95-9298-89F0DA25E968}"/>
-              </a:ext>
-            </a:extLst>
-          </p:cNvPr>
-          <p:cNvSpPr>
-            <a:spLocks xmlns:a="http://schemas.openxmlformats.org/drawingml/2006/main" noGrp="1"/>
-          </p:cNvSpPr>
-          <p:nvPr/>
-        </p:nvSpPr>
-        <p:spPr>
-          <a:xfrm xmlns:a="http://schemas.openxmlformats.org/drawingml/2006/main">
-            <a:off x="5238750" y="2638425"/>
-            <a:ext cx="1714500" cy="571500"/>
-          </a:xfrm>
-          <a:prstGeom xmlns:a="http://schemas.openxmlformats.org/drawingml/2006/main" prst="rect">
-            <a:avLst/>
-          </a:prstGeom>
-          <a:noFill xmlns:a="http://schemas.openxmlformats.org/drawingml/2006/main"/>
-          <a:ln xmlns:a="http://schemas.openxmlformats.org/drawingml/2006/main" w="0">
-            <a:noFill/>
-          </a:ln>
-        </p:spPr>
-        <p:txBody>
-          <a:bodyPr xmlns:a="http://schemas.openxmlformats.org/drawingml/2006/main" lIns="0" tIns="0" rIns="0" bIns="0" anchor="t"/>
-          <a:lstStyle xmlns:a="http://schemas.openxmlformats.org/drawingml/2006/main"/>
-          <a:p xmlns:a="http://schemas.openxmlformats.org/drawingml/2006/main">
-            <a:pPr algn="ctr">
-              <a:lnSpc>
-                <a:spcPct val="118000"/>
-              </a:lnSpc>
-              <a:buNone/>
-              <a:defRPr sz="2000" b="0">
-                <a:solidFill>
-                  <a:srgbClr val="66727D"/>
-                </a:solidFill>
-                <a:latin typeface="微软雅黑"/>
-                <a:ea typeface="微软雅黑"/>
-                <a:cs typeface="微软雅黑"/>
-              </a:defRPr>
-            </a:pPr>
-            <a:r>
-              <a:rPr sz="2000" b="0">
-                <a:solidFill>
-                  <a:srgbClr val="66727D"/>
-                </a:solidFill>
-                <a:latin typeface="微软雅黑"/>
-                <a:ea typeface="微软雅黑"/>
-                <a:cs typeface="微软雅黑"/>
-              </a:rPr>
-              <a:t>冻结配置</a:t>
-            </a:r>
-          </a:p>
-        </p:txBody>
-      </p:sp>
-      <p:sp>
-        <p:nvSpPr>
-          <p:cNvPr id="23" name="chain-line-3">
-            <a:extLst xmlns:a="http://schemas.openxmlformats.org/drawingml/2006/main">
-              <a:ext uri="{FF2B5EF4-FFF2-40B4-BE49-F238E27FC236}">
-                <a16:creationId xmlns:a16="http://schemas.microsoft.com/office/drawing/2014/main" id="{8F02F0C2-3291-49D2-A712-79CB5B51CF0E}"/>
-              </a:ext>
-            </a:extLst>
-          </p:cNvPr>
-          <p:cNvSpPr>
-            <a:spLocks xmlns:a="http://schemas.openxmlformats.org/drawingml/2006/main" noGrp="1"/>
-          </p:cNvSpPr>
-          <p:nvPr/>
-        </p:nvSpPr>
-        <p:spPr>
-          <a:xfrm xmlns:a="http://schemas.openxmlformats.org/drawingml/2006/main">
-            <a:off x="7553325" y="2486025"/>
-            <a:ext cx="1714500" cy="14288"/>
-          </a:xfrm>
-          <a:prstGeom xmlns:a="http://schemas.openxmlformats.org/drawingml/2006/main" prst="rect">
-            <a:avLst/>
-          </a:prstGeom>
-          <a:solidFill xmlns:a="http://schemas.openxmlformats.org/drawingml/2006/main">
-            <a:srgbClr val="1F4D78"/>
-          </a:solidFill>
-          <a:ln xmlns:a="http://schemas.openxmlformats.org/drawingml/2006/main" w="0">
-            <a:noFill/>
-          </a:ln>
-        </p:spPr>
-      </p:sp>
-      <p:sp>
-        <p:nvSpPr>
-          <p:cNvPr id="24" name="chain-3">
-            <a:extLst xmlns:a="http://schemas.openxmlformats.org/drawingml/2006/main">
-              <a:ext uri="{FF2B5EF4-FFF2-40B4-BE49-F238E27FC236}">
-                <a16:creationId xmlns:a16="http://schemas.microsoft.com/office/drawing/2014/main" id="{EBC78AF9-6A26-42A9-804E-D51C5DCD5AD7}"/>
-              </a:ext>
-            </a:extLst>
-          </p:cNvPr>
-          <p:cNvSpPr>
-            <a:spLocks xmlns:a="http://schemas.openxmlformats.org/drawingml/2006/main" noGrp="1"/>
-          </p:cNvSpPr>
-          <p:nvPr/>
-        </p:nvSpPr>
-        <p:spPr>
-          <a:xfrm xmlns:a="http://schemas.openxmlformats.org/drawingml/2006/main">
-            <a:off x="7553325" y="1762125"/>
-            <a:ext cx="1714500" cy="666750"/>
-          </a:xfrm>
-          <a:prstGeom xmlns:a="http://schemas.openxmlformats.org/drawingml/2006/main" prst="rect">
-            <a:avLst/>
-          </a:prstGeom>
-          <a:noFill xmlns:a="http://schemas.openxmlformats.org/drawingml/2006/main"/>
-          <a:ln xmlns:a="http://schemas.openxmlformats.org/drawingml/2006/main" w="0">
-            <a:noFill/>
-          </a:ln>
-        </p:spPr>
-        <p:txBody>
-          <a:bodyPr xmlns:a="http://schemas.openxmlformats.org/drawingml/2006/main" lIns="0" tIns="0" rIns="0" bIns="0" anchor="ctr"/>
-          <a:lstStyle xmlns:a="http://schemas.openxmlformats.org/drawingml/2006/main"/>
-          <a:p xmlns:a="http://schemas.openxmlformats.org/drawingml/2006/main">
-            <a:pPr algn="ctr">
-              <a:lnSpc>
-                <a:spcPct val="118000"/>
-              </a:lnSpc>
-              <a:buNone/>
-              <a:defRPr sz="2200" b="0">
-                <a:solidFill>
-                  <a:srgbClr val="1F4D78"/>
-                </a:solidFill>
-                <a:latin typeface="微软雅黑"/>
-                <a:ea typeface="微软雅黑"/>
-                <a:cs typeface="微软雅黑"/>
-              </a:defRPr>
-            </a:pPr>
-            <a:r>
-              <a:rPr sz="2200" b="0">
-                <a:solidFill>
-                  <a:srgbClr val="1F4D78"/>
-                </a:solidFill>
-                <a:latin typeface="微软雅黑"/>
-                <a:ea typeface="微软雅黑"/>
-                <a:cs typeface="微软雅黑"/>
-              </a:rPr>
-              <a:t>120 份输出</a:t>
-            </a:r>
-          </a:p>
-        </p:txBody>
-      </p:sp>
-      <p:sp>
-        <p:nvSpPr>
-          <p:cNvPr id="25" name="chain-arrow-3">
-            <a:extLst xmlns:a="http://schemas.openxmlformats.org/drawingml/2006/main">
-              <a:ext uri="{FF2B5EF4-FFF2-40B4-BE49-F238E27FC236}">
-                <a16:creationId xmlns:a16="http://schemas.microsoft.com/office/drawing/2014/main" id="{8E0F8D12-7838-4A53-B19A-8328AE64ACE3}"/>
-              </a:ext>
-            </a:extLst>
-          </p:cNvPr>
-          <p:cNvSpPr>
-            <a:spLocks xmlns:a="http://schemas.openxmlformats.org/drawingml/2006/main" noGrp="1"/>
-          </p:cNvSpPr>
-          <p:nvPr/>
-        </p:nvSpPr>
-        <p:spPr>
-          <a:xfrm xmlns:a="http://schemas.openxmlformats.org/drawingml/2006/main">
-            <a:off x="9267825" y="1933575"/>
-            <a:ext cx="600075" cy="323850"/>
-          </a:xfrm>
-          <a:prstGeom xmlns:a="http://schemas.openxmlformats.org/drawingml/2006/main" prst="rect">
-            <a:avLst/>
-          </a:prstGeom>
-          <a:noFill xmlns:a="http://schemas.openxmlformats.org/drawingml/2006/main"/>
-          <a:ln xmlns:a="http://schemas.openxmlformats.org/drawingml/2006/main" w="0">
-            <a:noFill/>
-          </a:ln>
-        </p:spPr>
-        <p:txBody>
-          <a:bodyPr xmlns:a="http://schemas.openxmlformats.org/drawingml/2006/main" lIns="0" tIns="0" rIns="0" bIns="0" anchor="ctr"/>
-          <a:lstStyle xmlns:a="http://schemas.openxmlformats.org/drawingml/2006/main"/>
-          <a:p xmlns:a="http://schemas.openxmlformats.org/drawingml/2006/main">
-            <a:pPr algn="ctr">
-              <a:lnSpc>
-                <a:spcPct val="118000"/>
-              </a:lnSpc>
-              <a:buNone/>
-              <a:defRPr sz="2400" b="0">
-                <a:solidFill>
-                  <a:srgbClr val="1F4D78"/>
-                </a:solidFill>
-                <a:latin typeface="微软雅黑"/>
-                <a:ea typeface="微软雅黑"/>
-                <a:cs typeface="微软雅黑"/>
-              </a:defRPr>
-            </a:pPr>
-            <a:r>
-              <a:rPr sz="2400" b="0">
-                <a:solidFill>
-                  <a:srgbClr val="1F4D78"/>
-                </a:solidFill>
-                <a:latin typeface="微软雅黑"/>
-                <a:ea typeface="微软雅黑"/>
-                <a:cs typeface="微软雅黑"/>
-              </a:rPr>
-              <a:t>→</a:t>
-            </a:r>
-          </a:p>
-        </p:txBody>
-      </p:sp>
-      <p:sp>
-        <p:nvSpPr>
-          <p:cNvPr id="26" name="chain-sub-3">
-            <a:extLst xmlns:a="http://schemas.openxmlformats.org/drawingml/2006/main">
-              <a:ext uri="{FF2B5EF4-FFF2-40B4-BE49-F238E27FC236}">
-                <a16:creationId xmlns:a16="http://schemas.microsoft.com/office/drawing/2014/main" id="{0BA81DFF-D4FF-4F1E-941F-9905A5DB0531}"/>
-              </a:ext>
-            </a:extLst>
-          </p:cNvPr>
-          <p:cNvSpPr>
-            <a:spLocks xmlns:a="http://schemas.openxmlformats.org/drawingml/2006/main" noGrp="1"/>
-          </p:cNvSpPr>
-          <p:nvPr/>
-        </p:nvSpPr>
-        <p:spPr>
-          <a:xfrm xmlns:a="http://schemas.openxmlformats.org/drawingml/2006/main">
-            <a:off x="7553325" y="2638425"/>
-            <a:ext cx="1714500" cy="571500"/>
-          </a:xfrm>
-          <a:prstGeom xmlns:a="http://schemas.openxmlformats.org/drawingml/2006/main" prst="rect">
-            <a:avLst/>
-          </a:prstGeom>
-          <a:noFill xmlns:a="http://schemas.openxmlformats.org/drawingml/2006/main"/>
-          <a:ln xmlns:a="http://schemas.openxmlformats.org/drawingml/2006/main" w="0">
-            <a:noFill/>
-          </a:ln>
-        </p:spPr>
-        <p:txBody>
-          <a:bodyPr xmlns:a="http://schemas.openxmlformats.org/drawingml/2006/main" lIns="0" tIns="0" rIns="0" bIns="0" anchor="t"/>
-          <a:lstStyle xmlns:a="http://schemas.openxmlformats.org/drawingml/2006/main"/>
-          <a:p xmlns:a="http://schemas.openxmlformats.org/drawingml/2006/main">
-            <a:pPr algn="ctr">
-              <a:lnSpc>
-                <a:spcPct val="118000"/>
-              </a:lnSpc>
-              <a:buNone/>
-              <a:defRPr sz="2000" b="0">
-                <a:solidFill>
-                  <a:srgbClr val="66727D"/>
-                </a:solidFill>
-                <a:latin typeface="微软雅黑"/>
-                <a:ea typeface="微软雅黑"/>
-                <a:cs typeface="微软雅黑"/>
-              </a:defRPr>
-            </a:pPr>
-            <a:r>
-              <a:rPr sz="2000" b="0">
-                <a:solidFill>
-                  <a:srgbClr val="66727D"/>
-                </a:solidFill>
-                <a:latin typeface="微软雅黑"/>
-                <a:ea typeface="微软雅黑"/>
-                <a:cs typeface="微软雅黑"/>
-              </a:rPr>
-              <a:t>绑定 run ID</a:t>
-            </a:r>
-          </a:p>
-        </p:txBody>
-      </p:sp>
-      <p:sp>
-        <p:nvSpPr>
-          <p:cNvPr id="27" name="chain-line-4">
-            <a:extLst xmlns:a="http://schemas.openxmlformats.org/drawingml/2006/main">
-              <a:ext uri="{FF2B5EF4-FFF2-40B4-BE49-F238E27FC236}">
-                <a16:creationId xmlns:a16="http://schemas.microsoft.com/office/drawing/2014/main" id="{CE087C13-FA04-4A47-BCBF-47308CE1C9D6}"/>
-              </a:ext>
-            </a:extLst>
-          </p:cNvPr>
-          <p:cNvSpPr>
-            <a:spLocks xmlns:a="http://schemas.openxmlformats.org/drawingml/2006/main" noGrp="1"/>
-          </p:cNvSpPr>
-          <p:nvPr/>
-        </p:nvSpPr>
-        <p:spPr>
-          <a:xfrm xmlns:a="http://schemas.openxmlformats.org/drawingml/2006/main">
-            <a:off x="9867900" y="2486025"/>
-            <a:ext cx="1714500" cy="14288"/>
-          </a:xfrm>
-          <a:prstGeom xmlns:a="http://schemas.openxmlformats.org/drawingml/2006/main" prst="rect">
-            <a:avLst/>
-          </a:prstGeom>
-          <a:solidFill xmlns:a="http://schemas.openxmlformats.org/drawingml/2006/main">
-            <a:srgbClr val="1F4D78"/>
-          </a:solidFill>
-          <a:ln xmlns:a="http://schemas.openxmlformats.org/drawingml/2006/main" w="0">
-            <a:noFill/>
-          </a:ln>
-        </p:spPr>
-      </p:sp>
-      <p:sp>
-        <p:nvSpPr>
-          <p:cNvPr id="28" name="chain-4">
-            <a:extLst xmlns:a="http://schemas.openxmlformats.org/drawingml/2006/main">
-              <a:ext uri="{FF2B5EF4-FFF2-40B4-BE49-F238E27FC236}">
-                <a16:creationId xmlns:a16="http://schemas.microsoft.com/office/drawing/2014/main" id="{EF27C582-C0BC-498E-8E15-003D7B25780E}"/>
-              </a:ext>
-            </a:extLst>
-          </p:cNvPr>
-          <p:cNvSpPr>
-            <a:spLocks xmlns:a="http://schemas.openxmlformats.org/drawingml/2006/main" noGrp="1"/>
-          </p:cNvSpPr>
-          <p:nvPr/>
-        </p:nvSpPr>
-        <p:spPr>
-          <a:xfrm xmlns:a="http://schemas.openxmlformats.org/drawingml/2006/main">
-            <a:off x="9867900" y="1762125"/>
-            <a:ext cx="1714500" cy="666750"/>
-          </a:xfrm>
-          <a:prstGeom xmlns:a="http://schemas.openxmlformats.org/drawingml/2006/main" prst="rect">
-            <a:avLst/>
-          </a:prstGeom>
-          <a:noFill xmlns:a="http://schemas.openxmlformats.org/drawingml/2006/main"/>
-          <a:ln xmlns:a="http://schemas.openxmlformats.org/drawingml/2006/main" w="0">
-            <a:noFill/>
-          </a:ln>
-        </p:spPr>
-        <p:txBody>
-          <a:bodyPr xmlns:a="http://schemas.openxmlformats.org/drawingml/2006/main" lIns="0" tIns="0" rIns="0" bIns="0" anchor="ctr"/>
-          <a:lstStyle xmlns:a="http://schemas.openxmlformats.org/drawingml/2006/main"/>
-          <a:p xmlns:a="http://schemas.openxmlformats.org/drawingml/2006/main">
-            <a:pPr algn="ctr">
-              <a:lnSpc>
-                <a:spcPct val="118000"/>
-              </a:lnSpc>
-              <a:buNone/>
-              <a:defRPr sz="2200" b="0">
-                <a:solidFill>
-                  <a:srgbClr val="1F4D78"/>
-                </a:solidFill>
-                <a:latin typeface="微软雅黑"/>
-                <a:ea typeface="微软雅黑"/>
-                <a:cs typeface="微软雅黑"/>
-              </a:defRPr>
-            </a:pPr>
-            <a:r>
-              <a:rPr sz="2200" b="0">
-                <a:solidFill>
-                  <a:srgbClr val="1F4D78"/>
-                </a:solidFill>
-                <a:latin typeface="微软雅黑"/>
-                <a:ea typeface="微软雅黑"/>
-                <a:cs typeface="微软雅黑"/>
-              </a:rPr>
-              <a:t>人工基准评价</a:t>
-            </a:r>
-          </a:p>
-        </p:txBody>
-      </p:sp>
-      <p:sp>
-        <p:nvSpPr>
-          <p:cNvPr id="29" name="chain-sub-4">
-            <a:extLst xmlns:a="http://schemas.openxmlformats.org/drawingml/2006/main">
-              <a:ext uri="{FF2B5EF4-FFF2-40B4-BE49-F238E27FC236}">
-                <a16:creationId xmlns:a16="http://schemas.microsoft.com/office/drawing/2014/main" id="{4813AA21-3FA8-4708-A7A9-86155FFD12EF}"/>
-              </a:ext>
-            </a:extLst>
-          </p:cNvPr>
-          <p:cNvSpPr>
-            <a:spLocks xmlns:a="http://schemas.openxmlformats.org/drawingml/2006/main" noGrp="1"/>
-          </p:cNvSpPr>
-          <p:nvPr/>
-        </p:nvSpPr>
-        <p:spPr>
-          <a:xfrm xmlns:a="http://schemas.openxmlformats.org/drawingml/2006/main">
-            <a:off x="9867900" y="2638425"/>
-            <a:ext cx="1714500" cy="571500"/>
-          </a:xfrm>
-          <a:prstGeom xmlns:a="http://schemas.openxmlformats.org/drawingml/2006/main" prst="rect">
-            <a:avLst/>
-          </a:prstGeom>
-          <a:noFill xmlns:a="http://schemas.openxmlformats.org/drawingml/2006/main"/>
-          <a:ln xmlns:a="http://schemas.openxmlformats.org/drawingml/2006/main" w="0">
-            <a:noFill/>
-          </a:ln>
-        </p:spPr>
-        <p:txBody>
-          <a:bodyPr xmlns:a="http://schemas.openxmlformats.org/drawingml/2006/main" lIns="0" tIns="0" rIns="0" bIns="0" anchor="t"/>
-          <a:lstStyle xmlns:a="http://schemas.openxmlformats.org/drawingml/2006/main"/>
-          <a:p xmlns:a="http://schemas.openxmlformats.org/drawingml/2006/main">
-            <a:pPr algn="ctr">
-              <a:lnSpc>
-                <a:spcPct val="118000"/>
-              </a:lnSpc>
-              <a:buNone/>
-              <a:defRPr sz="2000" b="0">
-                <a:solidFill>
-                  <a:srgbClr val="C8161E"/>
-                </a:solidFill>
-                <a:latin typeface="微软雅黑"/>
-                <a:ea typeface="微软雅黑"/>
-                <a:cs typeface="微软雅黑"/>
-              </a:defRPr>
-            </a:pPr>
-            <a:r>
-              <a:rPr sz="2000" b="0">
-                <a:solidFill>
-                  <a:srgbClr val="C8161E"/>
-                </a:solidFill>
-                <a:latin typeface="微软雅黑"/>
-                <a:ea typeface="微软雅黑"/>
-                <a:cs typeface="微软雅黑"/>
-              </a:rPr>
-              <a:t>执行器不可读</a:t>
-            </a:r>
-          </a:p>
-        </p:txBody>
-      </p:sp>
-      <p:sp>
-        <p:nvSpPr>
-          <p:cNvPr id="30" name="hyp">
-            <a:extLst xmlns:a="http://schemas.openxmlformats.org/drawingml/2006/main">
-              <a:ext uri="{FF2B5EF4-FFF2-40B4-BE49-F238E27FC236}">
-                <a16:creationId xmlns:a16="http://schemas.microsoft.com/office/drawing/2014/main" id="{FCFCDD9B-1778-4D30-A055-4E4773D104BC}"/>
-              </a:ext>
-            </a:extLst>
-          </p:cNvPr>
-          <p:cNvSpPr>
-            <a:spLocks xmlns:a="http://schemas.openxmlformats.org/drawingml/2006/main" noGrp="1"/>
-          </p:cNvSpPr>
-          <p:nvPr/>
-        </p:nvSpPr>
-        <p:spPr>
-          <a:xfrm xmlns:a="http://schemas.openxmlformats.org/drawingml/2006/main">
-            <a:off x="1428750" y="4333875"/>
-            <a:ext cx="9334500" cy="571500"/>
-          </a:xfrm>
-          <a:prstGeom xmlns:a="http://schemas.openxmlformats.org/drawingml/2006/main" prst="rect">
-            <a:avLst/>
-          </a:prstGeom>
-          <a:noFill xmlns:a="http://schemas.openxmlformats.org/drawingml/2006/main"/>
-          <a:ln xmlns:a="http://schemas.openxmlformats.org/drawingml/2006/main" w="0">
-            <a:noFill/>
-          </a:ln>
-        </p:spPr>
-        <p:txBody>
-          <a:bodyPr xmlns:a="http://schemas.openxmlformats.org/drawingml/2006/main" lIns="0" tIns="0" rIns="0" bIns="0" anchor="t"/>
-          <a:lstStyle xmlns:a="http://schemas.openxmlformats.org/drawingml/2006/main"/>
-          <a:p xmlns:a="http://schemas.openxmlformats.org/drawingml/2006/main">
-            <a:pPr algn="ctr">
-              <a:lnSpc>
-                <a:spcPct val="118000"/>
-              </a:lnSpc>
-              <a:buNone/>
-              <a:defRPr sz="2200" b="0">
-                <a:solidFill>
-                  <a:srgbClr val="A96510"/>
-                </a:solidFill>
-                <a:latin typeface="微软雅黑"/>
-                <a:ea typeface="微软雅黑"/>
-                <a:cs typeface="微软雅黑"/>
-              </a:defRPr>
-            </a:pPr>
-            <a:r>
-              <a:rPr sz="2200" b="0">
-                <a:solidFill>
-                  <a:srgbClr val="A96510"/>
-                </a:solidFill>
-                <a:latin typeface="微软雅黑"/>
-                <a:ea typeface="微软雅黑"/>
-                <a:cs typeface="微软雅黑"/>
-              </a:rPr>
-              <a:t>H1 结构字段｜A1 任务转移｜A2 标注提示｜A3 文档结构</a:t>
+              <a:t>输出｜原始记录、结果、失败与局限</a:t>
             </a:r>
           </a:p>
         </p:txBody>
@@ -9085,7 +10766,7 @@
                 <a:ea typeface="微软雅黑"/>
                 <a:cs typeface="微软雅黑"/>
               </a:rPr>
-              <a:t>最小原型先证明路径可运行或可演示</a:t>
+              <a:t>打开这些文件，走一次完整路径</a:t>
             </a:r>
             <a:endParaRPr/>
           </a:p>
@@ -9121,74 +10802,22 @@
       </p:sp>
       <p:sp>
         <p:nvSpPr>
-          <p:cNvPr id="6" name="brand-header">
-            <a:extLst xmlns:a="http://schemas.openxmlformats.org/drawingml/2006/main">
-              <a:ext uri="{FF2B5EF4-FFF2-40B4-BE49-F238E27FC236}">
-                <a16:creationId xmlns:a16="http://schemas.microsoft.com/office/drawing/2014/main" id="{3A73FAEC-E1E4-422A-A9D8-44FF7FCA1FF3}"/>
-              </a:ext>
-            </a:extLst>
-          </p:cNvPr>
-          <p:cNvSpPr>
-            <a:spLocks xmlns:a="http://schemas.openxmlformats.org/drawingml/2006/main" noGrp="1"/>
-          </p:cNvSpPr>
-          <p:nvPr/>
-        </p:nvSpPr>
-        <p:spPr>
-          <a:xfrm xmlns:a="http://schemas.openxmlformats.org/drawingml/2006/main">
-            <a:off x="0" y="0"/>
-            <a:ext cx="11887200" cy="685800"/>
-          </a:xfrm>
-          <a:prstGeom xmlns:a="http://schemas.openxmlformats.org/drawingml/2006/main" prst="rect">
-            <a:avLst/>
-          </a:prstGeom>
-          <a:solidFill xmlns:a="http://schemas.openxmlformats.org/drawingml/2006/main">
-            <a:srgbClr val="C8161E"/>
-          </a:solidFill>
-          <a:ln xmlns:a="http://schemas.openxmlformats.org/drawingml/2006/main" w="0">
-            <a:noFill/>
-          </a:ln>
-        </p:spPr>
-      </p:sp>
-      <p:pic>
-        <p:nvPicPr>
-          <p:cNvPr id="25" name=""/>
-          <p:cNvPicPr>
-            <a:picLocks xmlns:a="http://schemas.openxmlformats.org/drawingml/2006/main" noChangeAspect="1"/>
-          </p:cNvPicPr>
-          <p:nvPr/>
-        </p:nvPicPr>
-        <p:blipFill>
-          <a:blip xmlns:r="http://schemas.openxmlformats.org/officeDocument/2006/relationships" xmlns:a="http://schemas.openxmlformats.org/drawingml/2006/main" r:embed="R719532e5428349c7"/>
-          <a:stretch xmlns:a="http://schemas.openxmlformats.org/drawingml/2006/main"/>
-        </p:blipFill>
-        <p:spPr>
-          <a:xfrm xmlns:a="http://schemas.openxmlformats.org/drawingml/2006/main">
-            <a:off x="323850" y="76200"/>
-            <a:ext cx="533400" cy="533400"/>
-          </a:xfrm>
-          <a:prstGeom xmlns:a="http://schemas.openxmlformats.org/drawingml/2006/main" prst="rect">
-            <a:avLst/>
-          </a:prstGeom>
-        </p:spPr>
-      </p:pic>
-      <p:sp>
-        <p:nvSpPr>
-          <p:cNvPr id="8" name="brand-title">
-            <a:extLst xmlns:a="http://schemas.openxmlformats.org/drawingml/2006/main">
-              <a:ext uri="{FF2B5EF4-FFF2-40B4-BE49-F238E27FC236}">
-                <a16:creationId xmlns:a16="http://schemas.microsoft.com/office/drawing/2014/main" id="{13B9612C-A8C8-4A40-8831-285330CE202A}"/>
-              </a:ext>
-            </a:extLst>
-          </p:cNvPr>
-          <p:cNvSpPr>
-            <a:spLocks xmlns:a="http://schemas.openxmlformats.org/drawingml/2006/main" noGrp="1"/>
-          </p:cNvSpPr>
-          <p:nvPr/>
-        </p:nvSpPr>
-        <p:spPr>
-          <a:xfrm xmlns:a="http://schemas.openxmlformats.org/drawingml/2006/main">
-            <a:off x="1028700" y="66675"/>
-            <a:ext cx="10477500" cy="552450"/>
+          <p:cNvPr id="6" name="content-327">
+            <a:extLst xmlns:a="http://schemas.openxmlformats.org/drawingml/2006/main">
+              <a:ext uri="{FF2B5EF4-FFF2-40B4-BE49-F238E27FC236}">
+                <a16:creationId xmlns:a16="http://schemas.microsoft.com/office/drawing/2014/main" id="{75761DBD-2018-4452-967C-3EEC8F10646E}"/>
+              </a:ext>
+            </a:extLst>
+          </p:cNvPr>
+          <p:cNvSpPr>
+            <a:spLocks xmlns:a="http://schemas.openxmlformats.org/drawingml/2006/main" noGrp="1"/>
+          </p:cNvSpPr>
+          <p:nvPr/>
+        </p:nvSpPr>
+        <p:spPr>
+          <a:xfrm xmlns:a="http://schemas.openxmlformats.org/drawingml/2006/main">
+            <a:off x="609600" y="1571625"/>
+            <a:ext cx="10972800" cy="432435"/>
           </a:xfrm>
           <a:prstGeom xmlns:a="http://schemas.openxmlformats.org/drawingml/2006/main" prst="rect">
             <a:avLst/>
@@ -9199,7 +10828,7 @@
           </a:ln>
         </p:spPr>
         <p:txBody>
-          <a:bodyPr xmlns:a="http://schemas.openxmlformats.org/drawingml/2006/main" lIns="0" tIns="0" rIns="0" bIns="0" anchor="ctr"/>
+          <a:bodyPr xmlns:a="http://schemas.openxmlformats.org/drawingml/2006/main" lIns="0" tIns="0" rIns="0" bIns="0" anchor="t"/>
           <a:lstStyle xmlns:a="http://schemas.openxmlformats.org/drawingml/2006/main"/>
           <a:p xmlns:a="http://schemas.openxmlformats.org/drawingml/2006/main">
             <a:pPr algn="l">
@@ -9207,9 +10836,9 @@
                 <a:spcPct val="118000"/>
               </a:lnSpc>
               <a:buNone/>
-              <a:defRPr sz="3000" b="1">
-                <a:solidFill>
-                  <a:srgbClr val="FFFFFF"/>
+              <a:defRPr sz="2400" b="0">
+                <a:solidFill>
+                  <a:srgbClr val="27333D"/>
                 </a:solidFill>
                 <a:latin typeface="微软雅黑"/>
                 <a:ea typeface="微软雅黑"/>
@@ -9217,37 +10846,37 @@
               </a:defRPr>
             </a:pPr>
             <a:r>
-              <a:rPr sz="3000" b="1">
-                <a:solidFill>
-                  <a:srgbClr val="FFFFFF"/>
+              <a:rPr sz="2400" b="0">
+                <a:solidFill>
+                  <a:srgbClr val="27333D"/>
                 </a:solidFill>
                 <a:latin typeface="微软雅黑"/>
                 <a:ea typeface="微软雅黑"/>
                 <a:cs typeface="微软雅黑"/>
               </a:rPr>
-              <a:t>最小原型先证明路径可运行或可演示</a:t>
-            </a:r>
-          </a:p>
-        </p:txBody>
-      </p:sp>
-      <p:sp>
-        <p:nvSpPr>
-          <p:cNvPr id="9" name="source">
-            <a:extLst xmlns:a="http://schemas.openxmlformats.org/drawingml/2006/main">
-              <a:ext uri="{FF2B5EF4-FFF2-40B4-BE49-F238E27FC236}">
-                <a16:creationId xmlns:a16="http://schemas.microsoft.com/office/drawing/2014/main" id="{B2B2F0E1-92AC-45B6-9C43-A48D90E879E6}"/>
-              </a:ext>
-            </a:extLst>
-          </p:cNvPr>
-          <p:cNvSpPr>
-            <a:spLocks xmlns:a="http://schemas.openxmlformats.org/drawingml/2006/main" noGrp="1"/>
-          </p:cNvSpPr>
-          <p:nvPr/>
-        </p:nvSpPr>
-        <p:spPr>
-          <a:xfrm xmlns:a="http://schemas.openxmlformats.org/drawingml/2006/main">
-            <a:off x="609600" y="6067425"/>
-            <a:ext cx="10763250" cy="209550"/>
+              <a:t>sources / outputs → replay</a:t>
+            </a:r>
+          </a:p>
+        </p:txBody>
+      </p:sp>
+      <p:sp>
+        <p:nvSpPr>
+          <p:cNvPr id="7" name="content-328">
+            <a:extLst xmlns:a="http://schemas.openxmlformats.org/drawingml/2006/main">
+              <a:ext uri="{FF2B5EF4-FFF2-40B4-BE49-F238E27FC236}">
+                <a16:creationId xmlns:a16="http://schemas.microsoft.com/office/drawing/2014/main" id="{02F14233-2B28-481B-90E5-6B6160295888}"/>
+              </a:ext>
+            </a:extLst>
+          </p:cNvPr>
+          <p:cNvSpPr>
+            <a:spLocks xmlns:a="http://schemas.openxmlformats.org/drawingml/2006/main" noGrp="1"/>
+          </p:cNvSpPr>
+          <p:nvPr/>
+        </p:nvSpPr>
+        <p:spPr>
+          <a:xfrm xmlns:a="http://schemas.openxmlformats.org/drawingml/2006/main">
+            <a:off x="609600" y="2261235"/>
+            <a:ext cx="10972800" cy="432435"/>
           </a:xfrm>
           <a:prstGeom xmlns:a="http://schemas.openxmlformats.org/drawingml/2006/main" prst="rect">
             <a:avLst/>
@@ -9266,9 +10895,9 @@
                 <a:spcPct val="118000"/>
               </a:lnSpc>
               <a:buNone/>
-              <a:defRPr sz="1100" b="0">
-                <a:solidFill>
-                  <a:srgbClr val="66727D"/>
+              <a:defRPr sz="2400" b="0">
+                <a:solidFill>
+                  <a:srgbClr val="27333D"/>
                 </a:solidFill>
                 <a:latin typeface="微软雅黑"/>
                 <a:ea typeface="微软雅黑"/>
@@ -9276,97 +10905,37 @@
               </a:defRPr>
             </a:pPr>
             <a:r>
-              <a:rPr sz="1100" b="0">
-                <a:solidFill>
-                  <a:srgbClr val="66727D"/>
+              <a:rPr sz="2400" b="0">
+                <a:solidFill>
+                  <a:srgbClr val="27333D"/>
                 </a:solidFill>
                 <a:latin typeface="微软雅黑"/>
                 <a:ea typeface="微软雅黑"/>
                 <a:cs typeface="微软雅黑"/>
               </a:rPr>
-              <a:t>来源：lesson-12/slides.md；课程工件与讲义见 speaker notes</a:t>
-            </a:r>
-          </a:p>
-        </p:txBody>
-      </p:sp>
-      <p:sp>
-        <p:nvSpPr>
-          <p:cNvPr id="10" name="doc-18-bg">
-            <a:extLst xmlns:a="http://schemas.openxmlformats.org/drawingml/2006/main">
-              <a:ext uri="{FF2B5EF4-FFF2-40B4-BE49-F238E27FC236}">
-                <a16:creationId xmlns:a16="http://schemas.microsoft.com/office/drawing/2014/main" id="{98E38A78-BDC6-49D9-A788-B1D2AAEF8966}"/>
-              </a:ext>
-            </a:extLst>
-          </p:cNvPr>
-          <p:cNvSpPr>
-            <a:spLocks xmlns:a="http://schemas.openxmlformats.org/drawingml/2006/main" noGrp="1"/>
-          </p:cNvSpPr>
-          <p:nvPr/>
-        </p:nvSpPr>
-        <p:spPr>
-          <a:xfrm xmlns:a="http://schemas.openxmlformats.org/drawingml/2006/main">
-            <a:off x="666750" y="1381125"/>
-            <a:ext cx="7048500" cy="4095750"/>
-          </a:xfrm>
-          <a:prstGeom xmlns:a="http://schemas.openxmlformats.org/drawingml/2006/main" prst="rect">
-            <a:avLst/>
-          </a:prstGeom>
-          <a:solidFill xmlns:a="http://schemas.openxmlformats.org/drawingml/2006/main">
-            <a:srgbClr val="F4F6F8"/>
-          </a:solidFill>
-          <a:ln xmlns:a="http://schemas.openxmlformats.org/drawingml/2006/main" w="0">
-            <a:noFill/>
-          </a:ln>
-        </p:spPr>
-      </p:sp>
-      <p:sp>
-        <p:nvSpPr>
-          <p:cNvPr id="11" name="doc-18-title-bg">
-            <a:extLst xmlns:a="http://schemas.openxmlformats.org/drawingml/2006/main">
-              <a:ext uri="{FF2B5EF4-FFF2-40B4-BE49-F238E27FC236}">
-                <a16:creationId xmlns:a16="http://schemas.microsoft.com/office/drawing/2014/main" id="{A144220E-66E9-4886-B62E-A40D3A38C0B8}"/>
-              </a:ext>
-            </a:extLst>
-          </p:cNvPr>
-          <p:cNvSpPr>
-            <a:spLocks xmlns:a="http://schemas.openxmlformats.org/drawingml/2006/main" noGrp="1"/>
-          </p:cNvSpPr>
-          <p:nvPr/>
-        </p:nvSpPr>
-        <p:spPr>
-          <a:xfrm xmlns:a="http://schemas.openxmlformats.org/drawingml/2006/main">
-            <a:off x="666750" y="1381125"/>
-            <a:ext cx="3429000" cy="323850"/>
-          </a:xfrm>
-          <a:prstGeom xmlns:a="http://schemas.openxmlformats.org/drawingml/2006/main" prst="rect">
-            <a:avLst/>
-          </a:prstGeom>
-          <a:solidFill xmlns:a="http://schemas.openxmlformats.org/drawingml/2006/main">
-            <a:srgbClr val="1F4D78"/>
-          </a:solidFill>
-          <a:ln xmlns:a="http://schemas.openxmlformats.org/drawingml/2006/main" w="0">
-            <a:noFill/>
-          </a:ln>
-        </p:spPr>
-      </p:sp>
-      <p:sp>
-        <p:nvSpPr>
-          <p:cNvPr id="12" name="doc-18-title">
-            <a:extLst xmlns:a="http://schemas.openxmlformats.org/drawingml/2006/main">
-              <a:ext uri="{FF2B5EF4-FFF2-40B4-BE49-F238E27FC236}">
-                <a16:creationId xmlns:a16="http://schemas.microsoft.com/office/drawing/2014/main" id="{820578CA-BA98-4524-A487-B301FFB67A54}"/>
-              </a:ext>
-            </a:extLst>
-          </p:cNvPr>
-          <p:cNvSpPr>
-            <a:spLocks xmlns:a="http://schemas.openxmlformats.org/drawingml/2006/main" noGrp="1"/>
-          </p:cNvSpPr>
-          <p:nvPr/>
-        </p:nvSpPr>
-        <p:spPr>
-          <a:xfrm xmlns:a="http://schemas.openxmlformats.org/drawingml/2006/main">
-            <a:off x="742950" y="1400175"/>
-            <a:ext cx="3276600" cy="285750"/>
+              <a:t>events / state → 检查执行与恢复</a:t>
+            </a:r>
+          </a:p>
+        </p:txBody>
+      </p:sp>
+      <p:sp>
+        <p:nvSpPr>
+          <p:cNvPr id="8" name="content-329">
+            <a:extLst xmlns:a="http://schemas.openxmlformats.org/drawingml/2006/main">
+              <a:ext uri="{FF2B5EF4-FFF2-40B4-BE49-F238E27FC236}">
+                <a16:creationId xmlns:a16="http://schemas.microsoft.com/office/drawing/2014/main" id="{E010E2C9-AC51-4FF0-AC61-56C20BE61198}"/>
+              </a:ext>
+            </a:extLst>
+          </p:cNvPr>
+          <p:cNvSpPr>
+            <a:spLocks xmlns:a="http://schemas.openxmlformats.org/drawingml/2006/main" noGrp="1"/>
+          </p:cNvSpPr>
+          <p:nvPr/>
+        </p:nvSpPr>
+        <p:spPr>
+          <a:xfrm xmlns:a="http://schemas.openxmlformats.org/drawingml/2006/main">
+            <a:off x="609600" y="2950845"/>
+            <a:ext cx="10972800" cy="432435"/>
           </a:xfrm>
           <a:prstGeom xmlns:a="http://schemas.openxmlformats.org/drawingml/2006/main" prst="rect">
             <a:avLst/>
@@ -9377,7 +10946,7 @@
           </a:ln>
         </p:spPr>
         <p:txBody>
-          <a:bodyPr xmlns:a="http://schemas.openxmlformats.org/drawingml/2006/main" lIns="0" tIns="0" rIns="0" bIns="0" anchor="ctr"/>
+          <a:bodyPr xmlns:a="http://schemas.openxmlformats.org/drawingml/2006/main" lIns="0" tIns="0" rIns="0" bIns="0" anchor="t"/>
           <a:lstStyle xmlns:a="http://schemas.openxmlformats.org/drawingml/2006/main"/>
           <a:p xmlns:a="http://schemas.openxmlformats.org/drawingml/2006/main">
             <a:pPr algn="l">
@@ -9385,9 +10954,9 @@
                 <a:spcPct val="118000"/>
               </a:lnSpc>
               <a:buNone/>
-              <a:defRPr sz="1800" b="1">
-                <a:solidFill>
-                  <a:srgbClr val="FFFFFF"/>
+              <a:defRPr sz="2400" b="0">
+                <a:solidFill>
+                  <a:srgbClr val="27333D"/>
                 </a:solidFill>
                 <a:latin typeface="微软雅黑"/>
                 <a:ea typeface="微软雅黑"/>
@@ -9395,37 +10964,37 @@
               </a:defRPr>
             </a:pPr>
             <a:r>
-              <a:rPr sz="1800" b="1">
-                <a:solidFill>
-                  <a:srgbClr val="FFFFFF"/>
+              <a:rPr sz="2400" b="0">
+                <a:solidFill>
+                  <a:srgbClr val="27333D"/>
                 </a:solidFill>
                 <a:latin typeface="微软雅黑"/>
                 <a:ea typeface="微软雅黑"/>
                 <a:cs typeface="微软雅黑"/>
               </a:rPr>
-              <a:t>agent-workflow/</a:t>
-            </a:r>
-          </a:p>
-        </p:txBody>
-      </p:sp>
-      <p:sp>
-        <p:nvSpPr>
-          <p:cNvPr id="13" name="doc-18-line-0">
-            <a:extLst xmlns:a="http://schemas.openxmlformats.org/drawingml/2006/main">
-              <a:ext uri="{FF2B5EF4-FFF2-40B4-BE49-F238E27FC236}">
-                <a16:creationId xmlns:a16="http://schemas.microsoft.com/office/drawing/2014/main" id="{D386DC31-CA81-4F32-8872-2733BC92E802}"/>
-              </a:ext>
-            </a:extLst>
-          </p:cNvPr>
-          <p:cNvSpPr>
-            <a:spLocks xmlns:a="http://schemas.openxmlformats.org/drawingml/2006/main" noGrp="1"/>
-          </p:cNvSpPr>
-          <p:nvPr/>
-        </p:nvSpPr>
-        <p:spPr>
-          <a:xfrm xmlns:a="http://schemas.openxmlformats.org/drawingml/2006/main">
-            <a:off x="895350" y="1876425"/>
-            <a:ext cx="6591300" cy="558800"/>
+              <a:t>gold / annotations → 人工核验依据</a:t>
+            </a:r>
+          </a:p>
+        </p:txBody>
+      </p:sp>
+      <p:sp>
+        <p:nvSpPr>
+          <p:cNvPr id="9" name="content-330">
+            <a:extLst xmlns:a="http://schemas.openxmlformats.org/drawingml/2006/main">
+              <a:ext uri="{FF2B5EF4-FFF2-40B4-BE49-F238E27FC236}">
+                <a16:creationId xmlns:a16="http://schemas.microsoft.com/office/drawing/2014/main" id="{37F81DEA-E93F-4AF6-A1A4-DA0B39D9640F}"/>
+              </a:ext>
+            </a:extLst>
+          </p:cNvPr>
+          <p:cNvSpPr>
+            <a:spLocks xmlns:a="http://schemas.openxmlformats.org/drawingml/2006/main" noGrp="1"/>
+          </p:cNvSpPr>
+          <p:nvPr/>
+        </p:nvSpPr>
+        <p:spPr>
+          <a:xfrm xmlns:a="http://schemas.openxmlformats.org/drawingml/2006/main">
+            <a:off x="609600" y="3640455"/>
+            <a:ext cx="10972800" cy="432435"/>
           </a:xfrm>
           <a:prstGeom xmlns:a="http://schemas.openxmlformats.org/drawingml/2006/main" prst="rect">
             <a:avLst/>
@@ -9436,7 +11005,7 @@
           </a:ln>
         </p:spPr>
         <p:txBody>
-          <a:bodyPr xmlns:a="http://schemas.openxmlformats.org/drawingml/2006/main" lIns="0" tIns="0" rIns="0" bIns="0" anchor="ctr"/>
+          <a:bodyPr xmlns:a="http://schemas.openxmlformats.org/drawingml/2006/main" lIns="0" tIns="0" rIns="0" bIns="0" anchor="t"/>
           <a:lstStyle xmlns:a="http://schemas.openxmlformats.org/drawingml/2006/main"/>
           <a:p xmlns:a="http://schemas.openxmlformats.org/drawingml/2006/main">
             <a:pPr algn="l">
@@ -9444,47 +11013,47 @@
                 <a:spcPct val="118000"/>
               </a:lnSpc>
               <a:buNone/>
-              <a:defRPr sz="1800" b="0">
+              <a:defRPr sz="2400" b="0">
                 <a:solidFill>
                   <a:srgbClr val="27333D"/>
                 </a:solidFill>
-                <a:latin typeface="Consolas"/>
-                <a:ea typeface="Consolas"/>
-                <a:cs typeface="Consolas"/>
+                <a:latin typeface="微软雅黑"/>
+                <a:ea typeface="微软雅黑"/>
+                <a:cs typeface="微软雅黑"/>
               </a:defRPr>
             </a:pPr>
             <a:r>
-              <a:rPr sz="1800" b="0">
+              <a:rPr sz="2400" b="0">
                 <a:solidFill>
                   <a:srgbClr val="27333D"/>
                 </a:solidFill>
-                <a:latin typeface="Consolas"/>
-                <a:ea typeface="Consolas"/>
-                <a:cs typeface="Consolas"/>
+                <a:latin typeface="微软雅黑"/>
+                <a:ea typeface="微软雅黑"/>
+                <a:cs typeface="微软雅黑"/>
               </a:rPr>
-              <a:t>contract.md</a:t>
-            </a:r>
-          </a:p>
-        </p:txBody>
-      </p:sp>
-      <p:sp>
-        <p:nvSpPr>
-          <p:cNvPr id="14" name="doc-18-line-1">
-            <a:extLst xmlns:a="http://schemas.openxmlformats.org/drawingml/2006/main">
-              <a:ext uri="{FF2B5EF4-FFF2-40B4-BE49-F238E27FC236}">
-                <a16:creationId xmlns:a16="http://schemas.microsoft.com/office/drawing/2014/main" id="{3FE232B9-FFC8-4668-86F5-0E43E224849F}"/>
-              </a:ext>
-            </a:extLst>
-          </p:cNvPr>
-          <p:cNvSpPr>
-            <a:spLocks xmlns:a="http://schemas.openxmlformats.org/drawingml/2006/main" noGrp="1"/>
-          </p:cNvSpPr>
-          <p:nvPr/>
-        </p:nvSpPr>
-        <p:spPr>
-          <a:xfrm xmlns:a="http://schemas.openxmlformats.org/drawingml/2006/main">
-            <a:off x="895350" y="2444750"/>
-            <a:ext cx="6591300" cy="558800"/>
+              <a:t>evaluate → evaluation.json</a:t>
+            </a:r>
+          </a:p>
+        </p:txBody>
+      </p:sp>
+      <p:sp>
+        <p:nvSpPr>
+          <p:cNvPr id="10" name="content-331">
+            <a:extLst xmlns:a="http://schemas.openxmlformats.org/drawingml/2006/main">
+              <a:ext uri="{FF2B5EF4-FFF2-40B4-BE49-F238E27FC236}">
+                <a16:creationId xmlns:a16="http://schemas.microsoft.com/office/drawing/2014/main" id="{D541FC49-77C8-4106-A043-1FEDDDE50A2E}"/>
+              </a:ext>
+            </a:extLst>
+          </p:cNvPr>
+          <p:cNvSpPr>
+            <a:spLocks xmlns:a="http://schemas.openxmlformats.org/drawingml/2006/main" noGrp="1"/>
+          </p:cNvSpPr>
+          <p:nvPr/>
+        </p:nvSpPr>
+        <p:spPr>
+          <a:xfrm xmlns:a="http://schemas.openxmlformats.org/drawingml/2006/main">
+            <a:off x="609600" y="4330065"/>
+            <a:ext cx="10972800" cy="432435"/>
           </a:xfrm>
           <a:prstGeom xmlns:a="http://schemas.openxmlformats.org/drawingml/2006/main" prst="rect">
             <a:avLst/>
@@ -9495,7 +11064,7 @@
           </a:ln>
         </p:spPr>
         <p:txBody>
-          <a:bodyPr xmlns:a="http://schemas.openxmlformats.org/drawingml/2006/main" lIns="0" tIns="0" rIns="0" bIns="0" anchor="ctr"/>
+          <a:bodyPr xmlns:a="http://schemas.openxmlformats.org/drawingml/2006/main" lIns="0" tIns="0" rIns="0" bIns="0" anchor="t"/>
           <a:lstStyle xmlns:a="http://schemas.openxmlformats.org/drawingml/2006/main"/>
           <a:p xmlns:a="http://schemas.openxmlformats.org/drawingml/2006/main">
             <a:pPr algn="l">
@@ -9503,465 +11072,25 @@
                 <a:spcPct val="118000"/>
               </a:lnSpc>
               <a:buNone/>
-              <a:defRPr sz="1800" b="0">
-                <a:solidFill>
-                  <a:srgbClr val="27333D"/>
-                </a:solidFill>
-                <a:latin typeface="Consolas"/>
-                <a:ea typeface="Consolas"/>
-                <a:cs typeface="Consolas"/>
+              <a:defRPr sz="2400" b="0">
+                <a:solidFill>
+                  <a:srgbClr val="1F4D78"/>
+                </a:solidFill>
+                <a:latin typeface="微软雅黑"/>
+                <a:ea typeface="微软雅黑"/>
+                <a:cs typeface="微软雅黑"/>
               </a:defRPr>
             </a:pPr>
             <a:r>
-              <a:rPr sz="1800" b="0">
-                <a:solidFill>
-                  <a:srgbClr val="27333D"/>
-                </a:solidFill>
-                <a:latin typeface="Consolas"/>
-                <a:ea typeface="Consolas"/>
-                <a:cs typeface="Consolas"/>
+              <a:rPr sz="2400" b="0">
+                <a:solidFill>
+                  <a:srgbClr val="1F4D78"/>
+                </a:solidFill>
+                <a:latin typeface="微软雅黑"/>
+                <a:ea typeface="微软雅黑"/>
+                <a:cs typeface="微软雅黑"/>
               </a:rPr>
-              <a:t>runner/</a:t>
-            </a:r>
-          </a:p>
-        </p:txBody>
-      </p:sp>
-      <p:sp>
-        <p:nvSpPr>
-          <p:cNvPr id="15" name="doc-18-line-2">
-            <a:extLst xmlns:a="http://schemas.openxmlformats.org/drawingml/2006/main">
-              <a:ext uri="{FF2B5EF4-FFF2-40B4-BE49-F238E27FC236}">
-                <a16:creationId xmlns:a16="http://schemas.microsoft.com/office/drawing/2014/main" id="{6263B70F-E99D-4480-A225-EEADB35CCDDD}"/>
-              </a:ext>
-            </a:extLst>
-          </p:cNvPr>
-          <p:cNvSpPr>
-            <a:spLocks xmlns:a="http://schemas.openxmlformats.org/drawingml/2006/main" noGrp="1"/>
-          </p:cNvSpPr>
-          <p:nvPr/>
-        </p:nvSpPr>
-        <p:spPr>
-          <a:xfrm xmlns:a="http://schemas.openxmlformats.org/drawingml/2006/main">
-            <a:off x="895350" y="3013075"/>
-            <a:ext cx="6591300" cy="558800"/>
-          </a:xfrm>
-          <a:prstGeom xmlns:a="http://schemas.openxmlformats.org/drawingml/2006/main" prst="rect">
-            <a:avLst/>
-          </a:prstGeom>
-          <a:noFill xmlns:a="http://schemas.openxmlformats.org/drawingml/2006/main"/>
-          <a:ln xmlns:a="http://schemas.openxmlformats.org/drawingml/2006/main" w="0">
-            <a:noFill/>
-          </a:ln>
-        </p:spPr>
-        <p:txBody>
-          <a:bodyPr xmlns:a="http://schemas.openxmlformats.org/drawingml/2006/main" lIns="0" tIns="0" rIns="0" bIns="0" anchor="ctr"/>
-          <a:lstStyle xmlns:a="http://schemas.openxmlformats.org/drawingml/2006/main"/>
-          <a:p xmlns:a="http://schemas.openxmlformats.org/drawingml/2006/main">
-            <a:pPr algn="l">
-              <a:lnSpc>
-                <a:spcPct val="118000"/>
-              </a:lnSpc>
-              <a:buNone/>
-              <a:defRPr sz="1800" b="0">
-                <a:solidFill>
-                  <a:srgbClr val="27333D"/>
-                </a:solidFill>
-                <a:latin typeface="Consolas"/>
-                <a:ea typeface="Consolas"/>
-                <a:cs typeface="Consolas"/>
-              </a:defRPr>
-            </a:pPr>
-            <a:r>
-              <a:rPr sz="1800" b="0">
-                <a:solidFill>
-                  <a:srgbClr val="27333D"/>
-                </a:solidFill>
-                <a:latin typeface="Consolas"/>
-                <a:ea typeface="Consolas"/>
-                <a:cs typeface="Consolas"/>
-              </a:rPr>
-              <a:t>evaluator/</a:t>
-            </a:r>
-          </a:p>
-        </p:txBody>
-      </p:sp>
-      <p:sp>
-        <p:nvSpPr>
-          <p:cNvPr id="16" name="doc-18-line-3">
-            <a:extLst xmlns:a="http://schemas.openxmlformats.org/drawingml/2006/main">
-              <a:ext uri="{FF2B5EF4-FFF2-40B4-BE49-F238E27FC236}">
-                <a16:creationId xmlns:a16="http://schemas.microsoft.com/office/drawing/2014/main" id="{7FA95B49-7159-4B57-996C-45E3620BD88A}"/>
-              </a:ext>
-            </a:extLst>
-          </p:cNvPr>
-          <p:cNvSpPr>
-            <a:spLocks xmlns:a="http://schemas.openxmlformats.org/drawingml/2006/main" noGrp="1"/>
-          </p:cNvSpPr>
-          <p:nvPr/>
-        </p:nvSpPr>
-        <p:spPr>
-          <a:xfrm xmlns:a="http://schemas.openxmlformats.org/drawingml/2006/main">
-            <a:off x="895350" y="3581400"/>
-            <a:ext cx="6591300" cy="558800"/>
-          </a:xfrm>
-          <a:prstGeom xmlns:a="http://schemas.openxmlformats.org/drawingml/2006/main" prst="rect">
-            <a:avLst/>
-          </a:prstGeom>
-          <a:noFill xmlns:a="http://schemas.openxmlformats.org/drawingml/2006/main"/>
-          <a:ln xmlns:a="http://schemas.openxmlformats.org/drawingml/2006/main" w="0">
-            <a:noFill/>
-          </a:ln>
-        </p:spPr>
-        <p:txBody>
-          <a:bodyPr xmlns:a="http://schemas.openxmlformats.org/drawingml/2006/main" lIns="0" tIns="0" rIns="0" bIns="0" anchor="ctr"/>
-          <a:lstStyle xmlns:a="http://schemas.openxmlformats.org/drawingml/2006/main"/>
-          <a:p xmlns:a="http://schemas.openxmlformats.org/drawingml/2006/main">
-            <a:pPr algn="l">
-              <a:lnSpc>
-                <a:spcPct val="118000"/>
-              </a:lnSpc>
-              <a:buNone/>
-              <a:defRPr sz="1800" b="0">
-                <a:solidFill>
-                  <a:srgbClr val="27333D"/>
-                </a:solidFill>
-                <a:latin typeface="Consolas"/>
-                <a:ea typeface="Consolas"/>
-                <a:cs typeface="Consolas"/>
-              </a:defRPr>
-            </a:pPr>
-            <a:r>
-              <a:rPr sz="1800" b="0">
-                <a:solidFill>
-                  <a:srgbClr val="27333D"/>
-                </a:solidFill>
-                <a:latin typeface="Consolas"/>
-                <a:ea typeface="Consolas"/>
-                <a:cs typeface="Consolas"/>
-              </a:rPr>
-              <a:t>runs/001/</a:t>
-            </a:r>
-          </a:p>
-        </p:txBody>
-      </p:sp>
-      <p:sp>
-        <p:nvSpPr>
-          <p:cNvPr id="17" name="doc-18-line-4">
-            <a:extLst xmlns:a="http://schemas.openxmlformats.org/drawingml/2006/main">
-              <a:ext uri="{FF2B5EF4-FFF2-40B4-BE49-F238E27FC236}">
-                <a16:creationId xmlns:a16="http://schemas.microsoft.com/office/drawing/2014/main" id="{E95E6EFD-7A4D-4DBC-82B6-CB7B6F4053A6}"/>
-              </a:ext>
-            </a:extLst>
-          </p:cNvPr>
-          <p:cNvSpPr>
-            <a:spLocks xmlns:a="http://schemas.openxmlformats.org/drawingml/2006/main" noGrp="1"/>
-          </p:cNvSpPr>
-          <p:nvPr/>
-        </p:nvSpPr>
-        <p:spPr>
-          <a:xfrm xmlns:a="http://schemas.openxmlformats.org/drawingml/2006/main">
-            <a:off x="895350" y="4149725"/>
-            <a:ext cx="6591300" cy="558800"/>
-          </a:xfrm>
-          <a:prstGeom xmlns:a="http://schemas.openxmlformats.org/drawingml/2006/main" prst="rect">
-            <a:avLst/>
-          </a:prstGeom>
-          <a:noFill xmlns:a="http://schemas.openxmlformats.org/drawingml/2006/main"/>
-          <a:ln xmlns:a="http://schemas.openxmlformats.org/drawingml/2006/main" w="0">
-            <a:noFill/>
-          </a:ln>
-        </p:spPr>
-        <p:txBody>
-          <a:bodyPr xmlns:a="http://schemas.openxmlformats.org/drawingml/2006/main" lIns="0" tIns="0" rIns="0" bIns="0" anchor="ctr"/>
-          <a:lstStyle xmlns:a="http://schemas.openxmlformats.org/drawingml/2006/main"/>
-          <a:p xmlns:a="http://schemas.openxmlformats.org/drawingml/2006/main">
-            <a:pPr algn="l">
-              <a:lnSpc>
-                <a:spcPct val="118000"/>
-              </a:lnSpc>
-              <a:buNone/>
-              <a:defRPr sz="1800" b="0">
-                <a:solidFill>
-                  <a:srgbClr val="27333D"/>
-                </a:solidFill>
-                <a:latin typeface="Consolas"/>
-                <a:ea typeface="Consolas"/>
-                <a:cs typeface="Consolas"/>
-              </a:defRPr>
-            </a:pPr>
-            <a:r>
-              <a:rPr sz="1800" b="0">
-                <a:solidFill>
-                  <a:srgbClr val="27333D"/>
-                </a:solidFill>
-                <a:latin typeface="Consolas"/>
-                <a:ea typeface="Consolas"/>
-                <a:cs typeface="Consolas"/>
-              </a:rPr>
-              <a:t>runs/001-failure/</a:t>
-            </a:r>
-          </a:p>
-        </p:txBody>
-      </p:sp>
-      <p:sp>
-        <p:nvSpPr>
-          <p:cNvPr id="18" name="doc-18-line-5">
-            <a:extLst xmlns:a="http://schemas.openxmlformats.org/drawingml/2006/main">
-              <a:ext uri="{FF2B5EF4-FFF2-40B4-BE49-F238E27FC236}">
-                <a16:creationId xmlns:a16="http://schemas.microsoft.com/office/drawing/2014/main" id="{764EA38D-8FE3-4757-B3CC-187CB9C470EA}"/>
-              </a:ext>
-            </a:extLst>
-          </p:cNvPr>
-          <p:cNvSpPr>
-            <a:spLocks xmlns:a="http://schemas.openxmlformats.org/drawingml/2006/main" noGrp="1"/>
-          </p:cNvSpPr>
-          <p:nvPr/>
-        </p:nvSpPr>
-        <p:spPr>
-          <a:xfrm xmlns:a="http://schemas.openxmlformats.org/drawingml/2006/main">
-            <a:off x="895350" y="4718050"/>
-            <a:ext cx="6591300" cy="558800"/>
-          </a:xfrm>
-          <a:prstGeom xmlns:a="http://schemas.openxmlformats.org/drawingml/2006/main" prst="rect">
-            <a:avLst/>
-          </a:prstGeom>
-          <a:noFill xmlns:a="http://schemas.openxmlformats.org/drawingml/2006/main"/>
-          <a:ln xmlns:a="http://schemas.openxmlformats.org/drawingml/2006/main" w="0">
-            <a:noFill/>
-          </a:ln>
-        </p:spPr>
-        <p:txBody>
-          <a:bodyPr xmlns:a="http://schemas.openxmlformats.org/drawingml/2006/main" lIns="0" tIns="0" rIns="0" bIns="0" anchor="ctr"/>
-          <a:lstStyle xmlns:a="http://schemas.openxmlformats.org/drawingml/2006/main"/>
-          <a:p xmlns:a="http://schemas.openxmlformats.org/drawingml/2006/main">
-            <a:pPr algn="l">
-              <a:lnSpc>
-                <a:spcPct val="118000"/>
-              </a:lnSpc>
-              <a:buNone/>
-              <a:defRPr sz="1800" b="0">
-                <a:solidFill>
-                  <a:srgbClr val="27333D"/>
-                </a:solidFill>
-                <a:latin typeface="Consolas"/>
-                <a:ea typeface="Consolas"/>
-                <a:cs typeface="Consolas"/>
-              </a:defRPr>
-            </a:pPr>
-            <a:r>
-              <a:rPr sz="1800" b="0">
-                <a:solidFill>
-                  <a:srgbClr val="27333D"/>
-                </a:solidFill>
-                <a:latin typeface="Consolas"/>
-                <a:ea typeface="Consolas"/>
-                <a:cs typeface="Consolas"/>
-              </a:rPr>
-              <a:t>review.md</a:t>
-            </a:r>
-          </a:p>
-        </p:txBody>
-      </p:sp>
-      <p:sp>
-        <p:nvSpPr>
-          <p:cNvPr id="19" name="proof">
-            <a:extLst xmlns:a="http://schemas.openxmlformats.org/drawingml/2006/main">
-              <a:ext uri="{FF2B5EF4-FFF2-40B4-BE49-F238E27FC236}">
-                <a16:creationId xmlns:a16="http://schemas.microsoft.com/office/drawing/2014/main" id="{544A187A-D9A4-4FB1-ADF5-D8B21A3773EC}"/>
-              </a:ext>
-            </a:extLst>
-          </p:cNvPr>
-          <p:cNvSpPr>
-            <a:spLocks xmlns:a="http://schemas.openxmlformats.org/drawingml/2006/main" noGrp="1"/>
-          </p:cNvSpPr>
-          <p:nvPr/>
-        </p:nvSpPr>
-        <p:spPr>
-          <a:xfrm xmlns:a="http://schemas.openxmlformats.org/drawingml/2006/main">
-            <a:off x="8239125" y="2095500"/>
-            <a:ext cx="2667000" cy="2286000"/>
-          </a:xfrm>
-          <a:prstGeom xmlns:a="http://schemas.openxmlformats.org/drawingml/2006/main" prst="rect">
-            <a:avLst/>
-          </a:prstGeom>
-          <a:noFill xmlns:a="http://schemas.openxmlformats.org/drawingml/2006/main"/>
-          <a:ln xmlns:a="http://schemas.openxmlformats.org/drawingml/2006/main" w="0">
-            <a:noFill/>
-          </a:ln>
-        </p:spPr>
-        <p:txBody>
-          <a:bodyPr xmlns:a="http://schemas.openxmlformats.org/drawingml/2006/main" lIns="0" tIns="0" rIns="0" bIns="0" anchor="t"/>
-          <a:lstStyle xmlns:a="http://schemas.openxmlformats.org/drawingml/2006/main"/>
-          <a:p xmlns:a="http://schemas.openxmlformats.org/drawingml/2006/main">
-            <a:pPr algn="ctr">
-              <a:lnSpc>
-                <a:spcPct val="118000"/>
-              </a:lnSpc>
-              <a:buNone/>
-              <a:defRPr sz="2400" b="1">
-                <a:solidFill>
-                  <a:srgbClr val="2E7D5B"/>
-                </a:solidFill>
-                <a:latin typeface="微软雅黑"/>
-                <a:ea typeface="微软雅黑"/>
-                <a:cs typeface="微软雅黑"/>
-              </a:defRPr>
-            </a:pPr>
-            <a:r>
-              <a:rPr sz="2400" b="1">
-                <a:solidFill>
-                  <a:srgbClr val="2E7D5B"/>
-                </a:solidFill>
-                <a:latin typeface="微软雅黑"/>
-                <a:ea typeface="微软雅黑"/>
-                <a:cs typeface="微软雅黑"/>
-              </a:rPr>
-              <a:t>教师演示检查</a:t>
-            </a:r>
-          </a:p>
-          <a:p xmlns:a="http://schemas.openxmlformats.org/drawingml/2006/main">
-            <a:r>
-              <a:t/>
-            </a:r>
-          </a:p>
-          <a:p xmlns:a="http://schemas.openxmlformats.org/drawingml/2006/main">
-            <a:pPr algn="ctr">
-              <a:lnSpc>
-                <a:spcPct val="118000"/>
-              </a:lnSpc>
-              <a:buNone/>
-              <a:defRPr sz="2400" b="1">
-                <a:solidFill>
-                  <a:srgbClr val="2E7D5B"/>
-                </a:solidFill>
-                <a:latin typeface="微软雅黑"/>
-                <a:ea typeface="微软雅黑"/>
-                <a:cs typeface="微软雅黑"/>
-              </a:defRPr>
-            </a:pPr>
-            <a:r>
-              <a:rPr sz="2400" b="1">
-                <a:solidFill>
-                  <a:srgbClr val="2E7D5B"/>
-                </a:solidFill>
-                <a:latin typeface="微软雅黑"/>
-                <a:ea typeface="微软雅黑"/>
-                <a:cs typeface="微软雅黑"/>
-              </a:rPr>
-              <a:t>一条正常 trace</a:t>
-            </a:r>
-          </a:p>
-          <a:p xmlns:a="http://schemas.openxmlformats.org/drawingml/2006/main">
-            <a:pPr algn="ctr">
-              <a:lnSpc>
-                <a:spcPct val="118000"/>
-              </a:lnSpc>
-              <a:buNone/>
-              <a:defRPr sz="2400" b="1">
-                <a:solidFill>
-                  <a:srgbClr val="2E7D5B"/>
-                </a:solidFill>
-                <a:latin typeface="微软雅黑"/>
-                <a:ea typeface="微软雅黑"/>
-                <a:cs typeface="微软雅黑"/>
-              </a:defRPr>
-            </a:pPr>
-            <a:r>
-              <a:rPr sz="2400" b="1">
-                <a:solidFill>
-                  <a:srgbClr val="2E7D5B"/>
-                </a:solidFill>
-                <a:latin typeface="微软雅黑"/>
-                <a:ea typeface="微软雅黑"/>
-                <a:cs typeface="微软雅黑"/>
-              </a:rPr>
-              <a:t>一条失败 trace</a:t>
-            </a:r>
-          </a:p>
-          <a:p xmlns:a="http://schemas.openxmlformats.org/drawingml/2006/main">
-            <a:pPr algn="ctr">
-              <a:lnSpc>
-                <a:spcPct val="118000"/>
-              </a:lnSpc>
-              <a:buNone/>
-              <a:defRPr sz="2400" b="1">
-                <a:solidFill>
-                  <a:srgbClr val="2E7D5B"/>
-                </a:solidFill>
-                <a:latin typeface="微软雅黑"/>
-                <a:ea typeface="微软雅黑"/>
-                <a:cs typeface="微软雅黑"/>
-              </a:defRPr>
-            </a:pPr>
-            <a:r>
-              <a:rPr sz="2400" b="1">
-                <a:solidFill>
-                  <a:srgbClr val="2E7D5B"/>
-                </a:solidFill>
-                <a:latin typeface="微软雅黑"/>
-                <a:ea typeface="微软雅黑"/>
-                <a:cs typeface="微软雅黑"/>
-              </a:rPr>
-              <a:t>一个人工决定</a:t>
-            </a:r>
-          </a:p>
-        </p:txBody>
-      </p:sp>
-      <p:sp>
-        <p:nvSpPr>
-          <p:cNvPr id="21" name="fiction">
-            <a:extLst xmlns:a="http://schemas.openxmlformats.org/drawingml/2006/main">
-              <a:ext uri="{FF2B5EF4-FFF2-40B4-BE49-F238E27FC236}">
-                <a16:creationId xmlns:a16="http://schemas.microsoft.com/office/drawing/2014/main" id="{1938CABF-5436-4361-B20B-59E19467F36A}"/>
-              </a:ext>
-            </a:extLst>
-          </p:cNvPr>
-          <p:cNvSpPr>
-            <a:spLocks xmlns:a="http://schemas.openxmlformats.org/drawingml/2006/main" noGrp="1"/>
-          </p:cNvSpPr>
-          <p:nvPr/>
-        </p:nvSpPr>
-        <p:spPr>
-          <a:xfrm xmlns:a="http://schemas.openxmlformats.org/drawingml/2006/main">
-            <a:off x="609600" y="885825"/>
-            <a:ext cx="10572750" cy="314325"/>
-          </a:xfrm>
-          <a:prstGeom xmlns:a="http://schemas.openxmlformats.org/drawingml/2006/main" prst="rect">
-            <a:avLst/>
-          </a:prstGeom>
-          <a:noFill xmlns:a="http://schemas.openxmlformats.org/drawingml/2006/main"/>
-          <a:ln xmlns:a="http://schemas.openxmlformats.org/drawingml/2006/main" w="0">
-            <a:noFill/>
-          </a:ln>
-        </p:spPr>
-        <p:txBody>
-          <a:bodyPr xmlns:a="http://schemas.openxmlformats.org/drawingml/2006/main" lIns="0" tIns="0" rIns="0" bIns="0" anchor="t"/>
-          <a:lstStyle xmlns:a="http://schemas.openxmlformats.org/drawingml/2006/main"/>
-          <a:p xmlns:a="http://schemas.openxmlformats.org/drawingml/2006/main">
-            <a:pPr algn="l">
-              <a:lnSpc>
-                <a:spcPct val="118000"/>
-              </a:lnSpc>
-              <a:buNone/>
-              <a:defRPr sz="1800" b="0">
-                <a:solidFill>
-                  <a:srgbClr val="A96510"/>
-                </a:solidFill>
-                <a:latin typeface="微软雅黑"/>
-                <a:ea typeface="微软雅黑"/>
-                <a:cs typeface="微软雅黑"/>
-              </a:defRPr>
-            </a:pPr>
-            <a:r>
-              <a:rPr sz="1800" b="0">
-                <a:solidFill>
-                  <a:srgbClr val="A96510"/>
-                </a:solidFill>
-                <a:latin typeface="微软雅黑"/>
-                <a:ea typeface="微软雅黑"/>
-                <a:cs typeface="微软雅黑"/>
-              </a:rPr>
-              <a:t>课程虚构教学工件</a:t>
+              <a:t>同伴从一个数字反查到输出原句。</a:t>
             </a:r>
           </a:p>
         </p:txBody>
@@ -10029,7 +11158,7 @@
                 <a:ea typeface="微软雅黑"/>
                 <a:cs typeface="微软雅黑"/>
               </a:rPr>
-              <a:t>失败 trace 保留越权、处置与恢复</a:t>
+              <a:t>接口拒绝能证明什么？</a:t>
             </a:r>
             <a:endParaRPr/>
           </a:p>
@@ -10065,74 +11194,22 @@
       </p:sp>
       <p:sp>
         <p:nvSpPr>
-          <p:cNvPr id="6" name="brand-header">
-            <a:extLst xmlns:a="http://schemas.openxmlformats.org/drawingml/2006/main">
-              <a:ext uri="{FF2B5EF4-FFF2-40B4-BE49-F238E27FC236}">
-                <a16:creationId xmlns:a16="http://schemas.microsoft.com/office/drawing/2014/main" id="{3F440A46-3362-4E84-9BE6-5D0B535097B5}"/>
-              </a:ext>
-            </a:extLst>
-          </p:cNvPr>
-          <p:cNvSpPr>
-            <a:spLocks xmlns:a="http://schemas.openxmlformats.org/drawingml/2006/main" noGrp="1"/>
-          </p:cNvSpPr>
-          <p:nvPr/>
-        </p:nvSpPr>
-        <p:spPr>
-          <a:xfrm xmlns:a="http://schemas.openxmlformats.org/drawingml/2006/main">
-            <a:off x="0" y="0"/>
-            <a:ext cx="11887200" cy="685800"/>
-          </a:xfrm>
-          <a:prstGeom xmlns:a="http://schemas.openxmlformats.org/drawingml/2006/main" prst="rect">
-            <a:avLst/>
-          </a:prstGeom>
-          <a:solidFill xmlns:a="http://schemas.openxmlformats.org/drawingml/2006/main">
-            <a:srgbClr val="C8161E"/>
-          </a:solidFill>
-          <a:ln xmlns:a="http://schemas.openxmlformats.org/drawingml/2006/main" w="0">
-            <a:noFill/>
-          </a:ln>
-        </p:spPr>
-      </p:sp>
-      <p:pic>
-        <p:nvPicPr>
-          <p:cNvPr id="41" name=""/>
-          <p:cNvPicPr>
-            <a:picLocks xmlns:a="http://schemas.openxmlformats.org/drawingml/2006/main" noChangeAspect="1"/>
-          </p:cNvPicPr>
-          <p:nvPr/>
-        </p:nvPicPr>
-        <p:blipFill>
-          <a:blip xmlns:r="http://schemas.openxmlformats.org/officeDocument/2006/relationships" xmlns:a="http://schemas.openxmlformats.org/drawingml/2006/main" r:embed="R6af4d36198c143c8"/>
-          <a:stretch xmlns:a="http://schemas.openxmlformats.org/drawingml/2006/main"/>
-        </p:blipFill>
-        <p:spPr>
-          <a:xfrm xmlns:a="http://schemas.openxmlformats.org/drawingml/2006/main">
-            <a:off x="323850" y="76200"/>
-            <a:ext cx="533400" cy="533400"/>
-          </a:xfrm>
-          <a:prstGeom xmlns:a="http://schemas.openxmlformats.org/drawingml/2006/main" prst="rect">
-            <a:avLst/>
-          </a:prstGeom>
-        </p:spPr>
-      </p:pic>
-      <p:sp>
-        <p:nvSpPr>
-          <p:cNvPr id="8" name="brand-title">
-            <a:extLst xmlns:a="http://schemas.openxmlformats.org/drawingml/2006/main">
-              <a:ext uri="{FF2B5EF4-FFF2-40B4-BE49-F238E27FC236}">
-                <a16:creationId xmlns:a16="http://schemas.microsoft.com/office/drawing/2014/main" id="{4A42ADF4-DE66-413C-96DD-3DCA99A2ED4D}"/>
-              </a:ext>
-            </a:extLst>
-          </p:cNvPr>
-          <p:cNvSpPr>
-            <a:spLocks xmlns:a="http://schemas.openxmlformats.org/drawingml/2006/main" noGrp="1"/>
-          </p:cNvSpPr>
-          <p:nvPr/>
-        </p:nvSpPr>
-        <p:spPr>
-          <a:xfrm xmlns:a="http://schemas.openxmlformats.org/drawingml/2006/main">
-            <a:off x="1028700" y="66675"/>
-            <a:ext cx="10477500" cy="552450"/>
+          <p:cNvPr id="6" name="content-332">
+            <a:extLst xmlns:a="http://schemas.openxmlformats.org/drawingml/2006/main">
+              <a:ext uri="{FF2B5EF4-FFF2-40B4-BE49-F238E27FC236}">
+                <a16:creationId xmlns:a16="http://schemas.microsoft.com/office/drawing/2014/main" id="{1F2CA69F-25EC-4E24-86DF-C3B1AD73673F}"/>
+              </a:ext>
+            </a:extLst>
+          </p:cNvPr>
+          <p:cNvSpPr>
+            <a:spLocks xmlns:a="http://schemas.openxmlformats.org/drawingml/2006/main" noGrp="1"/>
+          </p:cNvSpPr>
+          <p:nvPr/>
+        </p:nvSpPr>
+        <p:spPr>
+          <a:xfrm xmlns:a="http://schemas.openxmlformats.org/drawingml/2006/main">
+            <a:off x="609600" y="1571625"/>
+            <a:ext cx="10972800" cy="432435"/>
           </a:xfrm>
           <a:prstGeom xmlns:a="http://schemas.openxmlformats.org/drawingml/2006/main" prst="rect">
             <a:avLst/>
@@ -10143,7 +11220,7 @@
           </a:ln>
         </p:spPr>
         <p:txBody>
-          <a:bodyPr xmlns:a="http://schemas.openxmlformats.org/drawingml/2006/main" lIns="0" tIns="0" rIns="0" bIns="0" anchor="ctr"/>
+          <a:bodyPr xmlns:a="http://schemas.openxmlformats.org/drawingml/2006/main" lIns="0" tIns="0" rIns="0" bIns="0" anchor="t"/>
           <a:lstStyle xmlns:a="http://schemas.openxmlformats.org/drawingml/2006/main"/>
           <a:p xmlns:a="http://schemas.openxmlformats.org/drawingml/2006/main">
             <a:pPr algn="l">
@@ -10151,9 +11228,9 @@
                 <a:spcPct val="118000"/>
               </a:lnSpc>
               <a:buNone/>
-              <a:defRPr sz="3000" b="1">
-                <a:solidFill>
-                  <a:srgbClr val="FFFFFF"/>
+              <a:defRPr sz="2400" b="0">
+                <a:solidFill>
+                  <a:srgbClr val="27333D"/>
                 </a:solidFill>
                 <a:latin typeface="微软雅黑"/>
                 <a:ea typeface="微软雅黑"/>
@@ -10161,37 +11238,37 @@
               </a:defRPr>
             </a:pPr>
             <a:r>
-              <a:rPr sz="3000" b="1">
-                <a:solidFill>
-                  <a:srgbClr val="FFFFFF"/>
+              <a:rPr sz="2400" b="0">
+                <a:solidFill>
+                  <a:srgbClr val="27333D"/>
                 </a:solidFill>
                 <a:latin typeface="微软雅黑"/>
                 <a:ea typeface="微软雅黑"/>
                 <a:cs typeface="微软雅黑"/>
               </a:rPr>
-              <a:t>失败 trace 保留越权、处置与恢复</a:t>
-            </a:r>
-          </a:p>
-        </p:txBody>
-      </p:sp>
-      <p:sp>
-        <p:nvSpPr>
-          <p:cNvPr id="9" name="source">
-            <a:extLst xmlns:a="http://schemas.openxmlformats.org/drawingml/2006/main">
-              <a:ext uri="{FF2B5EF4-FFF2-40B4-BE49-F238E27FC236}">
-                <a16:creationId xmlns:a16="http://schemas.microsoft.com/office/drawing/2014/main" id="{A032A660-922A-4D95-B3F9-17B189DD8754}"/>
-              </a:ext>
-            </a:extLst>
-          </p:cNvPr>
-          <p:cNvSpPr>
-            <a:spLocks xmlns:a="http://schemas.openxmlformats.org/drawingml/2006/main" noGrp="1"/>
-          </p:cNvSpPr>
-          <p:nvPr/>
-        </p:nvSpPr>
-        <p:spPr>
-          <a:xfrm xmlns:a="http://schemas.openxmlformats.org/drawingml/2006/main">
-            <a:off x="609600" y="6067425"/>
-            <a:ext cx="10763250" cy="209550"/>
+              <a:t>executor 请求 gold → 接口拒绝并记日志</a:t>
+            </a:r>
+          </a:p>
+        </p:txBody>
+      </p:sp>
+      <p:sp>
+        <p:nvSpPr>
+          <p:cNvPr id="7" name="content-333">
+            <a:extLst xmlns:a="http://schemas.openxmlformats.org/drawingml/2006/main">
+              <a:ext uri="{FF2B5EF4-FFF2-40B4-BE49-F238E27FC236}">
+                <a16:creationId xmlns:a16="http://schemas.microsoft.com/office/drawing/2014/main" id="{1176A590-C756-442B-8D39-820D4E1DEF48}"/>
+              </a:ext>
+            </a:extLst>
+          </p:cNvPr>
+          <p:cNvSpPr>
+            <a:spLocks xmlns:a="http://schemas.openxmlformats.org/drawingml/2006/main" noGrp="1"/>
+          </p:cNvSpPr>
+          <p:nvPr/>
+        </p:nvSpPr>
+        <p:spPr>
+          <a:xfrm xmlns:a="http://schemas.openxmlformats.org/drawingml/2006/main">
+            <a:off x="609600" y="2261235"/>
+            <a:ext cx="10972800" cy="432435"/>
           </a:xfrm>
           <a:prstGeom xmlns:a="http://schemas.openxmlformats.org/drawingml/2006/main" prst="rect">
             <a:avLst/>
@@ -10210,9 +11287,9 @@
                 <a:spcPct val="118000"/>
               </a:lnSpc>
               <a:buNone/>
-              <a:defRPr sz="1100" b="0">
-                <a:solidFill>
-                  <a:srgbClr val="66727D"/>
+              <a:defRPr sz="2400" b="0">
+                <a:solidFill>
+                  <a:srgbClr val="27333D"/>
                 </a:solidFill>
                 <a:latin typeface="微软雅黑"/>
                 <a:ea typeface="微软雅黑"/>
@@ -10220,67 +11297,37 @@
               </a:defRPr>
             </a:pPr>
             <a:r>
-              <a:rPr sz="1100" b="0">
-                <a:solidFill>
-                  <a:srgbClr val="66727D"/>
+              <a:rPr sz="2400" b="0">
+                <a:solidFill>
+                  <a:srgbClr val="27333D"/>
                 </a:solidFill>
                 <a:latin typeface="微软雅黑"/>
                 <a:ea typeface="微软雅黑"/>
                 <a:cs typeface="微软雅黑"/>
               </a:rPr>
-              <a:t>来源：lesson-12/slides.md；课程工件与讲义见 speaker notes</a:t>
-            </a:r>
-          </a:p>
-        </p:txBody>
-      </p:sp>
-      <p:sp>
-        <p:nvSpPr>
-          <p:cNvPr id="10" name="chain-line-0">
-            <a:extLst xmlns:a="http://schemas.openxmlformats.org/drawingml/2006/main">
-              <a:ext uri="{FF2B5EF4-FFF2-40B4-BE49-F238E27FC236}">
-                <a16:creationId xmlns:a16="http://schemas.microsoft.com/office/drawing/2014/main" id="{94971607-BE89-47FF-8B18-E0EEC3B8AD49}"/>
-              </a:ext>
-            </a:extLst>
-          </p:cNvPr>
-          <p:cNvSpPr>
-            <a:spLocks xmlns:a="http://schemas.openxmlformats.org/drawingml/2006/main" noGrp="1"/>
-          </p:cNvSpPr>
-          <p:nvPr/>
-        </p:nvSpPr>
-        <p:spPr>
-          <a:xfrm xmlns:a="http://schemas.openxmlformats.org/drawingml/2006/main">
-            <a:off x="571500" y="2628900"/>
-            <a:ext cx="1428750" cy="14288"/>
-          </a:xfrm>
-          <a:prstGeom xmlns:a="http://schemas.openxmlformats.org/drawingml/2006/main" prst="rect">
-            <a:avLst/>
-          </a:prstGeom>
-          <a:solidFill xmlns:a="http://schemas.openxmlformats.org/drawingml/2006/main">
-            <a:srgbClr val="1F4D78"/>
-          </a:solidFill>
-          <a:ln xmlns:a="http://schemas.openxmlformats.org/drawingml/2006/main" w="0">
-            <a:noFill/>
-          </a:ln>
-        </p:spPr>
-      </p:sp>
-      <p:sp>
-        <p:nvSpPr>
-          <p:cNvPr id="11" name="chain-0">
-            <a:extLst xmlns:a="http://schemas.openxmlformats.org/drawingml/2006/main">
-              <a:ext uri="{FF2B5EF4-FFF2-40B4-BE49-F238E27FC236}">
-                <a16:creationId xmlns:a16="http://schemas.microsoft.com/office/drawing/2014/main" id="{882946C2-DAFE-4D01-B465-2DB068362762}"/>
-              </a:ext>
-            </a:extLst>
-          </p:cNvPr>
-          <p:cNvSpPr>
-            <a:spLocks xmlns:a="http://schemas.openxmlformats.org/drawingml/2006/main" noGrp="1"/>
-          </p:cNvSpPr>
-          <p:nvPr/>
-        </p:nvSpPr>
-        <p:spPr>
-          <a:xfrm xmlns:a="http://schemas.openxmlformats.org/drawingml/2006/main">
-            <a:off x="571500" y="1905000"/>
-            <a:ext cx="1428750" cy="666750"/>
+              <a:t>evaluator 按角色读取 → 进入评价</a:t>
+            </a:r>
+          </a:p>
+        </p:txBody>
+      </p:sp>
+      <p:sp>
+        <p:nvSpPr>
+          <p:cNvPr id="8" name="content-334">
+            <a:extLst xmlns:a="http://schemas.openxmlformats.org/drawingml/2006/main">
+              <a:ext uri="{FF2B5EF4-FFF2-40B4-BE49-F238E27FC236}">
+                <a16:creationId xmlns:a16="http://schemas.microsoft.com/office/drawing/2014/main" id="{768E2698-41BF-46DB-B4B3-9C2A1B40BF44}"/>
+              </a:ext>
+            </a:extLst>
+          </p:cNvPr>
+          <p:cNvSpPr>
+            <a:spLocks xmlns:a="http://schemas.openxmlformats.org/drawingml/2006/main" noGrp="1"/>
+          </p:cNvSpPr>
+          <p:nvPr/>
+        </p:nvSpPr>
+        <p:spPr>
+          <a:xfrm xmlns:a="http://schemas.openxmlformats.org/drawingml/2006/main">
+            <a:off x="609600" y="2950845"/>
+            <a:ext cx="10972800" cy="432435"/>
           </a:xfrm>
           <a:prstGeom xmlns:a="http://schemas.openxmlformats.org/drawingml/2006/main" prst="rect">
             <a:avLst/>
@@ -10291,1220 +11338,7 @@
           </a:ln>
         </p:spPr>
         <p:txBody>
-          <a:bodyPr xmlns:a="http://schemas.openxmlformats.org/drawingml/2006/main" lIns="0" tIns="0" rIns="0" bIns="0" anchor="ctr"/>
-          <a:lstStyle xmlns:a="http://schemas.openxmlformats.org/drawingml/2006/main"/>
-          <a:p xmlns:a="http://schemas.openxmlformats.org/drawingml/2006/main">
-            <a:pPr algn="ctr">
-              <a:lnSpc>
-                <a:spcPct val="118000"/>
-              </a:lnSpc>
-              <a:buNone/>
-              <a:defRPr sz="2200" b="0">
-                <a:solidFill>
-                  <a:srgbClr val="1F4D78"/>
-                </a:solidFill>
-                <a:latin typeface="微软雅黑"/>
-                <a:ea typeface="微软雅黑"/>
-                <a:cs typeface="微软雅黑"/>
-              </a:defRPr>
-            </a:pPr>
-            <a:r>
-              <a:rPr sz="2200" b="0">
-                <a:solidFill>
-                  <a:srgbClr val="1F4D78"/>
-                </a:solidFill>
-                <a:latin typeface="微软雅黑"/>
-                <a:ea typeface="微软雅黑"/>
-                <a:cs typeface="微软雅黑"/>
-              </a:rPr>
-              <a:t>越权请求</a:t>
-            </a:r>
-          </a:p>
-        </p:txBody>
-      </p:sp>
-      <p:sp>
-        <p:nvSpPr>
-          <p:cNvPr id="12" name="chain-arrow-0">
-            <a:extLst xmlns:a="http://schemas.openxmlformats.org/drawingml/2006/main">
-              <a:ext uri="{FF2B5EF4-FFF2-40B4-BE49-F238E27FC236}">
-                <a16:creationId xmlns:a16="http://schemas.microsoft.com/office/drawing/2014/main" id="{EFA9DAEF-A4A3-4D09-BD1E-493448698172}"/>
-              </a:ext>
-            </a:extLst>
-          </p:cNvPr>
-          <p:cNvSpPr>
-            <a:spLocks xmlns:a="http://schemas.openxmlformats.org/drawingml/2006/main" noGrp="1"/>
-          </p:cNvSpPr>
-          <p:nvPr/>
-        </p:nvSpPr>
-        <p:spPr>
-          <a:xfrm xmlns:a="http://schemas.openxmlformats.org/drawingml/2006/main">
-            <a:off x="2000250" y="2076450"/>
-            <a:ext cx="495300" cy="323850"/>
-          </a:xfrm>
-          <a:prstGeom xmlns:a="http://schemas.openxmlformats.org/drawingml/2006/main" prst="rect">
-            <a:avLst/>
-          </a:prstGeom>
-          <a:noFill xmlns:a="http://schemas.openxmlformats.org/drawingml/2006/main"/>
-          <a:ln xmlns:a="http://schemas.openxmlformats.org/drawingml/2006/main" w="0">
-            <a:noFill/>
-          </a:ln>
-        </p:spPr>
-        <p:txBody>
-          <a:bodyPr xmlns:a="http://schemas.openxmlformats.org/drawingml/2006/main" lIns="0" tIns="0" rIns="0" bIns="0" anchor="ctr"/>
-          <a:lstStyle xmlns:a="http://schemas.openxmlformats.org/drawingml/2006/main"/>
-          <a:p xmlns:a="http://schemas.openxmlformats.org/drawingml/2006/main">
-            <a:pPr algn="ctr">
-              <a:lnSpc>
-                <a:spcPct val="118000"/>
-              </a:lnSpc>
-              <a:buNone/>
-              <a:defRPr sz="2400" b="0">
-                <a:solidFill>
-                  <a:srgbClr val="1F4D78"/>
-                </a:solidFill>
-                <a:latin typeface="微软雅黑"/>
-                <a:ea typeface="微软雅黑"/>
-                <a:cs typeface="微软雅黑"/>
-              </a:defRPr>
-            </a:pPr>
-            <a:r>
-              <a:rPr sz="2400" b="0">
-                <a:solidFill>
-                  <a:srgbClr val="1F4D78"/>
-                </a:solidFill>
-                <a:latin typeface="微软雅黑"/>
-                <a:ea typeface="微软雅黑"/>
-                <a:cs typeface="微软雅黑"/>
-              </a:rPr>
-              <a:t>→</a:t>
-            </a:r>
-          </a:p>
-        </p:txBody>
-      </p:sp>
-      <p:sp>
-        <p:nvSpPr>
-          <p:cNvPr id="13" name="chain-sub-0">
-            <a:extLst xmlns:a="http://schemas.openxmlformats.org/drawingml/2006/main">
-              <a:ext uri="{FF2B5EF4-FFF2-40B4-BE49-F238E27FC236}">
-                <a16:creationId xmlns:a16="http://schemas.microsoft.com/office/drawing/2014/main" id="{1E104196-1CE2-4859-8DB8-C4A4E7D20B8D}"/>
-              </a:ext>
-            </a:extLst>
-          </p:cNvPr>
-          <p:cNvSpPr>
-            <a:spLocks xmlns:a="http://schemas.openxmlformats.org/drawingml/2006/main" noGrp="1"/>
-          </p:cNvSpPr>
-          <p:nvPr/>
-        </p:nvSpPr>
-        <p:spPr>
-          <a:xfrm xmlns:a="http://schemas.openxmlformats.org/drawingml/2006/main">
-            <a:off x="571500" y="2781300"/>
-            <a:ext cx="1428750" cy="571500"/>
-          </a:xfrm>
-          <a:prstGeom xmlns:a="http://schemas.openxmlformats.org/drawingml/2006/main" prst="rect">
-            <a:avLst/>
-          </a:prstGeom>
-          <a:noFill xmlns:a="http://schemas.openxmlformats.org/drawingml/2006/main"/>
-          <a:ln xmlns:a="http://schemas.openxmlformats.org/drawingml/2006/main" w="0">
-            <a:noFill/>
-          </a:ln>
-        </p:spPr>
-        <p:txBody>
           <a:bodyPr xmlns:a="http://schemas.openxmlformats.org/drawingml/2006/main" lIns="0" tIns="0" rIns="0" bIns="0" anchor="t"/>
-          <a:lstStyle xmlns:a="http://schemas.openxmlformats.org/drawingml/2006/main"/>
-          <a:p xmlns:a="http://schemas.openxmlformats.org/drawingml/2006/main">
-            <a:pPr algn="ctr">
-              <a:lnSpc>
-                <a:spcPct val="118000"/>
-              </a:lnSpc>
-              <a:buNone/>
-              <a:defRPr sz="2000" b="0">
-                <a:solidFill>
-                  <a:srgbClr val="C8161E"/>
-                </a:solidFill>
-                <a:latin typeface="微软雅黑"/>
-                <a:ea typeface="微软雅黑"/>
-                <a:cs typeface="微软雅黑"/>
-              </a:defRPr>
-            </a:pPr>
-            <a:r>
-              <a:rPr sz="2000" b="0">
-                <a:solidFill>
-                  <a:srgbClr val="C8161E"/>
-                </a:solidFill>
-                <a:latin typeface="微软雅黑"/>
-                <a:ea typeface="微软雅黑"/>
-                <a:cs typeface="微软雅黑"/>
-              </a:rPr>
-              <a:t>read gold</a:t>
-            </a:r>
-          </a:p>
-        </p:txBody>
-      </p:sp>
-      <p:sp>
-        <p:nvSpPr>
-          <p:cNvPr id="14" name="chain-line-1">
-            <a:extLst xmlns:a="http://schemas.openxmlformats.org/drawingml/2006/main">
-              <a:ext uri="{FF2B5EF4-FFF2-40B4-BE49-F238E27FC236}">
-                <a16:creationId xmlns:a16="http://schemas.microsoft.com/office/drawing/2014/main" id="{DEAF0116-E0C1-49A4-B36F-99619DFE57A3}"/>
-              </a:ext>
-            </a:extLst>
-          </p:cNvPr>
-          <p:cNvSpPr>
-            <a:spLocks xmlns:a="http://schemas.openxmlformats.org/drawingml/2006/main" noGrp="1"/>
-          </p:cNvSpPr>
-          <p:nvPr/>
-        </p:nvSpPr>
-        <p:spPr>
-          <a:xfrm xmlns:a="http://schemas.openxmlformats.org/drawingml/2006/main">
-            <a:off x="2495550" y="2628900"/>
-            <a:ext cx="1428750" cy="14288"/>
-          </a:xfrm>
-          <a:prstGeom xmlns:a="http://schemas.openxmlformats.org/drawingml/2006/main" prst="rect">
-            <a:avLst/>
-          </a:prstGeom>
-          <a:solidFill xmlns:a="http://schemas.openxmlformats.org/drawingml/2006/main">
-            <a:srgbClr val="1F4D78"/>
-          </a:solidFill>
-          <a:ln xmlns:a="http://schemas.openxmlformats.org/drawingml/2006/main" w="0">
-            <a:noFill/>
-          </a:ln>
-        </p:spPr>
-      </p:sp>
-      <p:sp>
-        <p:nvSpPr>
-          <p:cNvPr id="15" name="chain-1">
-            <a:extLst xmlns:a="http://schemas.openxmlformats.org/drawingml/2006/main">
-              <a:ext uri="{FF2B5EF4-FFF2-40B4-BE49-F238E27FC236}">
-                <a16:creationId xmlns:a16="http://schemas.microsoft.com/office/drawing/2014/main" id="{78B8E4ED-0479-4C4D-B8B3-96B35C288776}"/>
-              </a:ext>
-            </a:extLst>
-          </p:cNvPr>
-          <p:cNvSpPr>
-            <a:spLocks xmlns:a="http://schemas.openxmlformats.org/drawingml/2006/main" noGrp="1"/>
-          </p:cNvSpPr>
-          <p:nvPr/>
-        </p:nvSpPr>
-        <p:spPr>
-          <a:xfrm xmlns:a="http://schemas.openxmlformats.org/drawingml/2006/main">
-            <a:off x="2495550" y="1905000"/>
-            <a:ext cx="1428750" cy="666750"/>
-          </a:xfrm>
-          <a:prstGeom xmlns:a="http://schemas.openxmlformats.org/drawingml/2006/main" prst="rect">
-            <a:avLst/>
-          </a:prstGeom>
-          <a:noFill xmlns:a="http://schemas.openxmlformats.org/drawingml/2006/main"/>
-          <a:ln xmlns:a="http://schemas.openxmlformats.org/drawingml/2006/main" w="0">
-            <a:noFill/>
-          </a:ln>
-        </p:spPr>
-        <p:txBody>
-          <a:bodyPr xmlns:a="http://schemas.openxmlformats.org/drawingml/2006/main" lIns="0" tIns="0" rIns="0" bIns="0" anchor="ctr"/>
-          <a:lstStyle xmlns:a="http://schemas.openxmlformats.org/drawingml/2006/main"/>
-          <a:p xmlns:a="http://schemas.openxmlformats.org/drawingml/2006/main">
-            <a:pPr algn="ctr">
-              <a:lnSpc>
-                <a:spcPct val="118000"/>
-              </a:lnSpc>
-              <a:buNone/>
-              <a:defRPr sz="2200" b="0">
-                <a:solidFill>
-                  <a:srgbClr val="1F4D78"/>
-                </a:solidFill>
-                <a:latin typeface="微软雅黑"/>
-                <a:ea typeface="微软雅黑"/>
-                <a:cs typeface="微软雅黑"/>
-              </a:defRPr>
-            </a:pPr>
-            <a:r>
-              <a:rPr sz="2200" b="0">
-                <a:solidFill>
-                  <a:srgbClr val="1F4D78"/>
-                </a:solidFill>
-                <a:latin typeface="微软雅黑"/>
-                <a:ea typeface="微软雅黑"/>
-                <a:cs typeface="微软雅黑"/>
-              </a:rPr>
-              <a:t>停止</a:t>
-            </a:r>
-          </a:p>
-        </p:txBody>
-      </p:sp>
-      <p:sp>
-        <p:nvSpPr>
-          <p:cNvPr id="16" name="chain-arrow-1">
-            <a:extLst xmlns:a="http://schemas.openxmlformats.org/drawingml/2006/main">
-              <a:ext uri="{FF2B5EF4-FFF2-40B4-BE49-F238E27FC236}">
-                <a16:creationId xmlns:a16="http://schemas.microsoft.com/office/drawing/2014/main" id="{08AB23BE-A459-45A6-BDED-F34AC0B86FDB}"/>
-              </a:ext>
-            </a:extLst>
-          </p:cNvPr>
-          <p:cNvSpPr>
-            <a:spLocks xmlns:a="http://schemas.openxmlformats.org/drawingml/2006/main" noGrp="1"/>
-          </p:cNvSpPr>
-          <p:nvPr/>
-        </p:nvSpPr>
-        <p:spPr>
-          <a:xfrm xmlns:a="http://schemas.openxmlformats.org/drawingml/2006/main">
-            <a:off x="3924300" y="2076450"/>
-            <a:ext cx="495300" cy="323850"/>
-          </a:xfrm>
-          <a:prstGeom xmlns:a="http://schemas.openxmlformats.org/drawingml/2006/main" prst="rect">
-            <a:avLst/>
-          </a:prstGeom>
-          <a:noFill xmlns:a="http://schemas.openxmlformats.org/drawingml/2006/main"/>
-          <a:ln xmlns:a="http://schemas.openxmlformats.org/drawingml/2006/main" w="0">
-            <a:noFill/>
-          </a:ln>
-        </p:spPr>
-        <p:txBody>
-          <a:bodyPr xmlns:a="http://schemas.openxmlformats.org/drawingml/2006/main" lIns="0" tIns="0" rIns="0" bIns="0" anchor="ctr"/>
-          <a:lstStyle xmlns:a="http://schemas.openxmlformats.org/drawingml/2006/main"/>
-          <a:p xmlns:a="http://schemas.openxmlformats.org/drawingml/2006/main">
-            <a:pPr algn="ctr">
-              <a:lnSpc>
-                <a:spcPct val="118000"/>
-              </a:lnSpc>
-              <a:buNone/>
-              <a:defRPr sz="2400" b="0">
-                <a:solidFill>
-                  <a:srgbClr val="1F4D78"/>
-                </a:solidFill>
-                <a:latin typeface="微软雅黑"/>
-                <a:ea typeface="微软雅黑"/>
-                <a:cs typeface="微软雅黑"/>
-              </a:defRPr>
-            </a:pPr>
-            <a:r>
-              <a:rPr sz="2400" b="0">
-                <a:solidFill>
-                  <a:srgbClr val="1F4D78"/>
-                </a:solidFill>
-                <a:latin typeface="微软雅黑"/>
-                <a:ea typeface="微软雅黑"/>
-                <a:cs typeface="微软雅黑"/>
-              </a:rPr>
-              <a:t>→</a:t>
-            </a:r>
-          </a:p>
-        </p:txBody>
-      </p:sp>
-      <p:sp>
-        <p:nvSpPr>
-          <p:cNvPr id="17" name="chain-sub-1">
-            <a:extLst xmlns:a="http://schemas.openxmlformats.org/drawingml/2006/main">
-              <a:ext uri="{FF2B5EF4-FFF2-40B4-BE49-F238E27FC236}">
-                <a16:creationId xmlns:a16="http://schemas.microsoft.com/office/drawing/2014/main" id="{EF507A5D-5827-44DE-B136-4BC02108D5F2}"/>
-              </a:ext>
-            </a:extLst>
-          </p:cNvPr>
-          <p:cNvSpPr>
-            <a:spLocks xmlns:a="http://schemas.openxmlformats.org/drawingml/2006/main" noGrp="1"/>
-          </p:cNvSpPr>
-          <p:nvPr/>
-        </p:nvSpPr>
-        <p:spPr>
-          <a:xfrm xmlns:a="http://schemas.openxmlformats.org/drawingml/2006/main">
-            <a:off x="2495550" y="2781300"/>
-            <a:ext cx="1428750" cy="571500"/>
-          </a:xfrm>
-          <a:prstGeom xmlns:a="http://schemas.openxmlformats.org/drawingml/2006/main" prst="rect">
-            <a:avLst/>
-          </a:prstGeom>
-          <a:noFill xmlns:a="http://schemas.openxmlformats.org/drawingml/2006/main"/>
-          <a:ln xmlns:a="http://schemas.openxmlformats.org/drawingml/2006/main" w="0">
-            <a:noFill/>
-          </a:ln>
-        </p:spPr>
-        <p:txBody>
-          <a:bodyPr xmlns:a="http://schemas.openxmlformats.org/drawingml/2006/main" lIns="0" tIns="0" rIns="0" bIns="0" anchor="t"/>
-          <a:lstStyle xmlns:a="http://schemas.openxmlformats.org/drawingml/2006/main"/>
-          <a:p xmlns:a="http://schemas.openxmlformats.org/drawingml/2006/main">
-            <a:pPr algn="ctr">
-              <a:lnSpc>
-                <a:spcPct val="118000"/>
-              </a:lnSpc>
-              <a:buNone/>
-              <a:defRPr sz="2000" b="0">
-                <a:solidFill>
-                  <a:srgbClr val="C8161E"/>
-                </a:solidFill>
-                <a:latin typeface="微软雅黑"/>
-                <a:ea typeface="微软雅黑"/>
-                <a:cs typeface="微软雅黑"/>
-              </a:defRPr>
-            </a:pPr>
-            <a:r>
-              <a:rPr sz="2000" b="0">
-                <a:solidFill>
-                  <a:srgbClr val="C8161E"/>
-                </a:solidFill>
-                <a:latin typeface="微软雅黑"/>
-                <a:ea typeface="微软雅黑"/>
-                <a:cs typeface="微软雅黑"/>
-              </a:rPr>
-              <a:t>permission denied</a:t>
-            </a:r>
-          </a:p>
-        </p:txBody>
-      </p:sp>
-      <p:sp>
-        <p:nvSpPr>
-          <p:cNvPr id="18" name="chain-line-2">
-            <a:extLst xmlns:a="http://schemas.openxmlformats.org/drawingml/2006/main">
-              <a:ext uri="{FF2B5EF4-FFF2-40B4-BE49-F238E27FC236}">
-                <a16:creationId xmlns:a16="http://schemas.microsoft.com/office/drawing/2014/main" id="{50E2B674-97E4-449A-9A45-D98201DC082C}"/>
-              </a:ext>
-            </a:extLst>
-          </p:cNvPr>
-          <p:cNvSpPr>
-            <a:spLocks xmlns:a="http://schemas.openxmlformats.org/drawingml/2006/main" noGrp="1"/>
-          </p:cNvSpPr>
-          <p:nvPr/>
-        </p:nvSpPr>
-        <p:spPr>
-          <a:xfrm xmlns:a="http://schemas.openxmlformats.org/drawingml/2006/main">
-            <a:off x="4419600" y="2628900"/>
-            <a:ext cx="1428750" cy="14288"/>
-          </a:xfrm>
-          <a:prstGeom xmlns:a="http://schemas.openxmlformats.org/drawingml/2006/main" prst="rect">
-            <a:avLst/>
-          </a:prstGeom>
-          <a:solidFill xmlns:a="http://schemas.openxmlformats.org/drawingml/2006/main">
-            <a:srgbClr val="1F4D78"/>
-          </a:solidFill>
-          <a:ln xmlns:a="http://schemas.openxmlformats.org/drawingml/2006/main" w="0">
-            <a:noFill/>
-          </a:ln>
-        </p:spPr>
-      </p:sp>
-      <p:sp>
-        <p:nvSpPr>
-          <p:cNvPr id="19" name="chain-2">
-            <a:extLst xmlns:a="http://schemas.openxmlformats.org/drawingml/2006/main">
-              <a:ext uri="{FF2B5EF4-FFF2-40B4-BE49-F238E27FC236}">
-                <a16:creationId xmlns:a16="http://schemas.microsoft.com/office/drawing/2014/main" id="{D3D3194D-034E-45F4-B35A-A87EDFCB3019}"/>
-              </a:ext>
-            </a:extLst>
-          </p:cNvPr>
-          <p:cNvSpPr>
-            <a:spLocks xmlns:a="http://schemas.openxmlformats.org/drawingml/2006/main" noGrp="1"/>
-          </p:cNvSpPr>
-          <p:nvPr/>
-        </p:nvSpPr>
-        <p:spPr>
-          <a:xfrm xmlns:a="http://schemas.openxmlformats.org/drawingml/2006/main">
-            <a:off x="4419600" y="1905000"/>
-            <a:ext cx="1428750" cy="666750"/>
-          </a:xfrm>
-          <a:prstGeom xmlns:a="http://schemas.openxmlformats.org/drawingml/2006/main" prst="rect">
-            <a:avLst/>
-          </a:prstGeom>
-          <a:noFill xmlns:a="http://schemas.openxmlformats.org/drawingml/2006/main"/>
-          <a:ln xmlns:a="http://schemas.openxmlformats.org/drawingml/2006/main" w="0">
-            <a:noFill/>
-          </a:ln>
-        </p:spPr>
-        <p:txBody>
-          <a:bodyPr xmlns:a="http://schemas.openxmlformats.org/drawingml/2006/main" lIns="0" tIns="0" rIns="0" bIns="0" anchor="ctr"/>
-          <a:lstStyle xmlns:a="http://schemas.openxmlformats.org/drawingml/2006/main"/>
-          <a:p xmlns:a="http://schemas.openxmlformats.org/drawingml/2006/main">
-            <a:pPr algn="ctr">
-              <a:lnSpc>
-                <a:spcPct val="118000"/>
-              </a:lnSpc>
-              <a:buNone/>
-              <a:defRPr sz="2200" b="0">
-                <a:solidFill>
-                  <a:srgbClr val="1F4D78"/>
-                </a:solidFill>
-                <a:latin typeface="微软雅黑"/>
-                <a:ea typeface="微软雅黑"/>
-                <a:cs typeface="微软雅黑"/>
-              </a:defRPr>
-            </a:pPr>
-            <a:r>
-              <a:rPr sz="2200" b="0">
-                <a:solidFill>
-                  <a:srgbClr val="1F4D78"/>
-                </a:solidFill>
-                <a:latin typeface="微软雅黑"/>
-                <a:ea typeface="微软雅黑"/>
-                <a:cs typeface="微软雅黑"/>
-              </a:rPr>
-              <a:t>记录</a:t>
-            </a:r>
-          </a:p>
-        </p:txBody>
-      </p:sp>
-      <p:sp>
-        <p:nvSpPr>
-          <p:cNvPr id="20" name="chain-arrow-2">
-            <a:extLst xmlns:a="http://schemas.openxmlformats.org/drawingml/2006/main">
-              <a:ext uri="{FF2B5EF4-FFF2-40B4-BE49-F238E27FC236}">
-                <a16:creationId xmlns:a16="http://schemas.microsoft.com/office/drawing/2014/main" id="{48357446-E4FE-4ECF-8760-7765930CBDFA}"/>
-              </a:ext>
-            </a:extLst>
-          </p:cNvPr>
-          <p:cNvSpPr>
-            <a:spLocks xmlns:a="http://schemas.openxmlformats.org/drawingml/2006/main" noGrp="1"/>
-          </p:cNvSpPr>
-          <p:nvPr/>
-        </p:nvSpPr>
-        <p:spPr>
-          <a:xfrm xmlns:a="http://schemas.openxmlformats.org/drawingml/2006/main">
-            <a:off x="5848350" y="2076450"/>
-            <a:ext cx="495300" cy="323850"/>
-          </a:xfrm>
-          <a:prstGeom xmlns:a="http://schemas.openxmlformats.org/drawingml/2006/main" prst="rect">
-            <a:avLst/>
-          </a:prstGeom>
-          <a:noFill xmlns:a="http://schemas.openxmlformats.org/drawingml/2006/main"/>
-          <a:ln xmlns:a="http://schemas.openxmlformats.org/drawingml/2006/main" w="0">
-            <a:noFill/>
-          </a:ln>
-        </p:spPr>
-        <p:txBody>
-          <a:bodyPr xmlns:a="http://schemas.openxmlformats.org/drawingml/2006/main" lIns="0" tIns="0" rIns="0" bIns="0" anchor="ctr"/>
-          <a:lstStyle xmlns:a="http://schemas.openxmlformats.org/drawingml/2006/main"/>
-          <a:p xmlns:a="http://schemas.openxmlformats.org/drawingml/2006/main">
-            <a:pPr algn="ctr">
-              <a:lnSpc>
-                <a:spcPct val="118000"/>
-              </a:lnSpc>
-              <a:buNone/>
-              <a:defRPr sz="2400" b="0">
-                <a:solidFill>
-                  <a:srgbClr val="1F4D78"/>
-                </a:solidFill>
-                <a:latin typeface="微软雅黑"/>
-                <a:ea typeface="微软雅黑"/>
-                <a:cs typeface="微软雅黑"/>
-              </a:defRPr>
-            </a:pPr>
-            <a:r>
-              <a:rPr sz="2400" b="0">
-                <a:solidFill>
-                  <a:srgbClr val="1F4D78"/>
-                </a:solidFill>
-                <a:latin typeface="微软雅黑"/>
-                <a:ea typeface="微软雅黑"/>
-                <a:cs typeface="微软雅黑"/>
-              </a:rPr>
-              <a:t>→</a:t>
-            </a:r>
-          </a:p>
-        </p:txBody>
-      </p:sp>
-      <p:sp>
-        <p:nvSpPr>
-          <p:cNvPr id="21" name="chain-sub-2">
-            <a:extLst xmlns:a="http://schemas.openxmlformats.org/drawingml/2006/main">
-              <a:ext uri="{FF2B5EF4-FFF2-40B4-BE49-F238E27FC236}">
-                <a16:creationId xmlns:a16="http://schemas.microsoft.com/office/drawing/2014/main" id="{44D9ABD4-CD17-442B-9471-916FF2F1A2EE}"/>
-              </a:ext>
-            </a:extLst>
-          </p:cNvPr>
-          <p:cNvSpPr>
-            <a:spLocks xmlns:a="http://schemas.openxmlformats.org/drawingml/2006/main" noGrp="1"/>
-          </p:cNvSpPr>
-          <p:nvPr/>
-        </p:nvSpPr>
-        <p:spPr>
-          <a:xfrm xmlns:a="http://schemas.openxmlformats.org/drawingml/2006/main">
-            <a:off x="4419600" y="2781300"/>
-            <a:ext cx="1428750" cy="571500"/>
-          </a:xfrm>
-          <a:prstGeom xmlns:a="http://schemas.openxmlformats.org/drawingml/2006/main" prst="rect">
-            <a:avLst/>
-          </a:prstGeom>
-          <a:noFill xmlns:a="http://schemas.openxmlformats.org/drawingml/2006/main"/>
-          <a:ln xmlns:a="http://schemas.openxmlformats.org/drawingml/2006/main" w="0">
-            <a:noFill/>
-          </a:ln>
-        </p:spPr>
-        <p:txBody>
-          <a:bodyPr xmlns:a="http://schemas.openxmlformats.org/drawingml/2006/main" lIns="0" tIns="0" rIns="0" bIns="0" anchor="t"/>
-          <a:lstStyle xmlns:a="http://schemas.openxmlformats.org/drawingml/2006/main"/>
-          <a:p xmlns:a="http://schemas.openxmlformats.org/drawingml/2006/main">
-            <a:pPr algn="ctr">
-              <a:lnSpc>
-                <a:spcPct val="118000"/>
-              </a:lnSpc>
-              <a:buNone/>
-              <a:defRPr sz="2000" b="0">
-                <a:solidFill>
-                  <a:srgbClr val="66727D"/>
-                </a:solidFill>
-                <a:latin typeface="微软雅黑"/>
-                <a:ea typeface="微软雅黑"/>
-                <a:cs typeface="微软雅黑"/>
-              </a:defRPr>
-            </a:pPr>
-            <a:r>
-              <a:rPr sz="2000" b="0">
-                <a:solidFill>
-                  <a:srgbClr val="66727D"/>
-                </a:solidFill>
-                <a:latin typeface="微软雅黑"/>
-                <a:ea typeface="微软雅黑"/>
-                <a:cs typeface="微软雅黑"/>
-              </a:rPr>
-              <a:t>trace.jsonl</a:t>
-            </a:r>
-          </a:p>
-        </p:txBody>
-      </p:sp>
-      <p:sp>
-        <p:nvSpPr>
-          <p:cNvPr id="22" name="chain-line-3">
-            <a:extLst xmlns:a="http://schemas.openxmlformats.org/drawingml/2006/main">
-              <a:ext uri="{FF2B5EF4-FFF2-40B4-BE49-F238E27FC236}">
-                <a16:creationId xmlns:a16="http://schemas.microsoft.com/office/drawing/2014/main" id="{5F0C06DB-12B1-4E22-AFB6-3CBE2512CA7A}"/>
-              </a:ext>
-            </a:extLst>
-          </p:cNvPr>
-          <p:cNvSpPr>
-            <a:spLocks xmlns:a="http://schemas.openxmlformats.org/drawingml/2006/main" noGrp="1"/>
-          </p:cNvSpPr>
-          <p:nvPr/>
-        </p:nvSpPr>
-        <p:spPr>
-          <a:xfrm xmlns:a="http://schemas.openxmlformats.org/drawingml/2006/main">
-            <a:off x="6343650" y="2628900"/>
-            <a:ext cx="1428750" cy="14288"/>
-          </a:xfrm>
-          <a:prstGeom xmlns:a="http://schemas.openxmlformats.org/drawingml/2006/main" prst="rect">
-            <a:avLst/>
-          </a:prstGeom>
-          <a:solidFill xmlns:a="http://schemas.openxmlformats.org/drawingml/2006/main">
-            <a:srgbClr val="1F4D78"/>
-          </a:solidFill>
-          <a:ln xmlns:a="http://schemas.openxmlformats.org/drawingml/2006/main" w="0">
-            <a:noFill/>
-          </a:ln>
-        </p:spPr>
-      </p:sp>
-      <p:sp>
-        <p:nvSpPr>
-          <p:cNvPr id="23" name="chain-3">
-            <a:extLst xmlns:a="http://schemas.openxmlformats.org/drawingml/2006/main">
-              <a:ext uri="{FF2B5EF4-FFF2-40B4-BE49-F238E27FC236}">
-                <a16:creationId xmlns:a16="http://schemas.microsoft.com/office/drawing/2014/main" id="{A0AB99D7-0D63-40E6-A3CC-E2D71A9E9D35}"/>
-              </a:ext>
-            </a:extLst>
-          </p:cNvPr>
-          <p:cNvSpPr>
-            <a:spLocks xmlns:a="http://schemas.openxmlformats.org/drawingml/2006/main" noGrp="1"/>
-          </p:cNvSpPr>
-          <p:nvPr/>
-        </p:nvSpPr>
-        <p:spPr>
-          <a:xfrm xmlns:a="http://schemas.openxmlformats.org/drawingml/2006/main">
-            <a:off x="6343650" y="1905000"/>
-            <a:ext cx="1428750" cy="666750"/>
-          </a:xfrm>
-          <a:prstGeom xmlns:a="http://schemas.openxmlformats.org/drawingml/2006/main" prst="rect">
-            <a:avLst/>
-          </a:prstGeom>
-          <a:noFill xmlns:a="http://schemas.openxmlformats.org/drawingml/2006/main"/>
-          <a:ln xmlns:a="http://schemas.openxmlformats.org/drawingml/2006/main" w="0">
-            <a:noFill/>
-          </a:ln>
-        </p:spPr>
-        <p:txBody>
-          <a:bodyPr xmlns:a="http://schemas.openxmlformats.org/drawingml/2006/main" lIns="0" tIns="0" rIns="0" bIns="0" anchor="ctr"/>
-          <a:lstStyle xmlns:a="http://schemas.openxmlformats.org/drawingml/2006/main"/>
-          <a:p xmlns:a="http://schemas.openxmlformats.org/drawingml/2006/main">
-            <a:pPr algn="ctr">
-              <a:lnSpc>
-                <a:spcPct val="118000"/>
-              </a:lnSpc>
-              <a:buNone/>
-              <a:defRPr sz="2200" b="0">
-                <a:solidFill>
-                  <a:srgbClr val="1F4D78"/>
-                </a:solidFill>
-                <a:latin typeface="微软雅黑"/>
-                <a:ea typeface="微软雅黑"/>
-                <a:cs typeface="微软雅黑"/>
-              </a:defRPr>
-            </a:pPr>
-            <a:r>
-              <a:rPr sz="2200" b="0">
-                <a:solidFill>
-                  <a:srgbClr val="1F4D78"/>
-                </a:solidFill>
-                <a:latin typeface="微软雅黑"/>
-                <a:ea typeface="微软雅黑"/>
-                <a:cs typeface="微软雅黑"/>
-              </a:rPr>
-              <a:t>收窄</a:t>
-            </a:r>
-          </a:p>
-        </p:txBody>
-      </p:sp>
-      <p:sp>
-        <p:nvSpPr>
-          <p:cNvPr id="24" name="chain-arrow-3">
-            <a:extLst xmlns:a="http://schemas.openxmlformats.org/drawingml/2006/main">
-              <a:ext uri="{FF2B5EF4-FFF2-40B4-BE49-F238E27FC236}">
-                <a16:creationId xmlns:a16="http://schemas.microsoft.com/office/drawing/2014/main" id="{9542A458-1BBE-43FC-A519-58DDB7B2961B}"/>
-              </a:ext>
-            </a:extLst>
-          </p:cNvPr>
-          <p:cNvSpPr>
-            <a:spLocks xmlns:a="http://schemas.openxmlformats.org/drawingml/2006/main" noGrp="1"/>
-          </p:cNvSpPr>
-          <p:nvPr/>
-        </p:nvSpPr>
-        <p:spPr>
-          <a:xfrm xmlns:a="http://schemas.openxmlformats.org/drawingml/2006/main">
-            <a:off x="7772400" y="2076450"/>
-            <a:ext cx="495300" cy="323850"/>
-          </a:xfrm>
-          <a:prstGeom xmlns:a="http://schemas.openxmlformats.org/drawingml/2006/main" prst="rect">
-            <a:avLst/>
-          </a:prstGeom>
-          <a:noFill xmlns:a="http://schemas.openxmlformats.org/drawingml/2006/main"/>
-          <a:ln xmlns:a="http://schemas.openxmlformats.org/drawingml/2006/main" w="0">
-            <a:noFill/>
-          </a:ln>
-        </p:spPr>
-        <p:txBody>
-          <a:bodyPr xmlns:a="http://schemas.openxmlformats.org/drawingml/2006/main" lIns="0" tIns="0" rIns="0" bIns="0" anchor="ctr"/>
-          <a:lstStyle xmlns:a="http://schemas.openxmlformats.org/drawingml/2006/main"/>
-          <a:p xmlns:a="http://schemas.openxmlformats.org/drawingml/2006/main">
-            <a:pPr algn="ctr">
-              <a:lnSpc>
-                <a:spcPct val="118000"/>
-              </a:lnSpc>
-              <a:buNone/>
-              <a:defRPr sz="2400" b="0">
-                <a:solidFill>
-                  <a:srgbClr val="1F4D78"/>
-                </a:solidFill>
-                <a:latin typeface="微软雅黑"/>
-                <a:ea typeface="微软雅黑"/>
-                <a:cs typeface="微软雅黑"/>
-              </a:defRPr>
-            </a:pPr>
-            <a:r>
-              <a:rPr sz="2400" b="0">
-                <a:solidFill>
-                  <a:srgbClr val="1F4D78"/>
-                </a:solidFill>
-                <a:latin typeface="微软雅黑"/>
-                <a:ea typeface="微软雅黑"/>
-                <a:cs typeface="微软雅黑"/>
-              </a:rPr>
-              <a:t>→</a:t>
-            </a:r>
-          </a:p>
-        </p:txBody>
-      </p:sp>
-      <p:sp>
-        <p:nvSpPr>
-          <p:cNvPr id="25" name="chain-sub-3">
-            <a:extLst xmlns:a="http://schemas.openxmlformats.org/drawingml/2006/main">
-              <a:ext uri="{FF2B5EF4-FFF2-40B4-BE49-F238E27FC236}">
-                <a16:creationId xmlns:a16="http://schemas.microsoft.com/office/drawing/2014/main" id="{82D662D6-8C68-4B18-8647-766EEFCF02CF}"/>
-              </a:ext>
-            </a:extLst>
-          </p:cNvPr>
-          <p:cNvSpPr>
-            <a:spLocks xmlns:a="http://schemas.openxmlformats.org/drawingml/2006/main" noGrp="1"/>
-          </p:cNvSpPr>
-          <p:nvPr/>
-        </p:nvSpPr>
-        <p:spPr>
-          <a:xfrm xmlns:a="http://schemas.openxmlformats.org/drawingml/2006/main">
-            <a:off x="6343650" y="2781300"/>
-            <a:ext cx="1428750" cy="571500"/>
-          </a:xfrm>
-          <a:prstGeom xmlns:a="http://schemas.openxmlformats.org/drawingml/2006/main" prst="rect">
-            <a:avLst/>
-          </a:prstGeom>
-          <a:noFill xmlns:a="http://schemas.openxmlformats.org/drawingml/2006/main"/>
-          <a:ln xmlns:a="http://schemas.openxmlformats.org/drawingml/2006/main" w="0">
-            <a:noFill/>
-          </a:ln>
-        </p:spPr>
-        <p:txBody>
-          <a:bodyPr xmlns:a="http://schemas.openxmlformats.org/drawingml/2006/main" lIns="0" tIns="0" rIns="0" bIns="0" anchor="t"/>
-          <a:lstStyle xmlns:a="http://schemas.openxmlformats.org/drawingml/2006/main"/>
-          <a:p xmlns:a="http://schemas.openxmlformats.org/drawingml/2006/main">
-            <a:pPr algn="ctr">
-              <a:lnSpc>
-                <a:spcPct val="118000"/>
-              </a:lnSpc>
-              <a:buNone/>
-              <a:defRPr sz="2000" b="0">
-                <a:solidFill>
-                  <a:srgbClr val="66727D"/>
-                </a:solidFill>
-                <a:latin typeface="微软雅黑"/>
-                <a:ea typeface="微软雅黑"/>
-                <a:cs typeface="微软雅黑"/>
-              </a:defRPr>
-            </a:pPr>
-            <a:r>
-              <a:rPr sz="2000" b="0">
-                <a:solidFill>
-                  <a:srgbClr val="66727D"/>
-                </a:solidFill>
-                <a:latin typeface="微软雅黑"/>
-                <a:ea typeface="微软雅黑"/>
-                <a:cs typeface="微软雅黑"/>
-              </a:rPr>
-              <a:t>冻结输入</a:t>
-            </a:r>
-          </a:p>
-        </p:txBody>
-      </p:sp>
-      <p:sp>
-        <p:nvSpPr>
-          <p:cNvPr id="26" name="chain-line-4">
-            <a:extLst xmlns:a="http://schemas.openxmlformats.org/drawingml/2006/main">
-              <a:ext uri="{FF2B5EF4-FFF2-40B4-BE49-F238E27FC236}">
-                <a16:creationId xmlns:a16="http://schemas.microsoft.com/office/drawing/2014/main" id="{7AFD8F76-2E53-43D8-BE12-9F063D9CB57E}"/>
-              </a:ext>
-            </a:extLst>
-          </p:cNvPr>
-          <p:cNvSpPr>
-            <a:spLocks xmlns:a="http://schemas.openxmlformats.org/drawingml/2006/main" noGrp="1"/>
-          </p:cNvSpPr>
-          <p:nvPr/>
-        </p:nvSpPr>
-        <p:spPr>
-          <a:xfrm xmlns:a="http://schemas.openxmlformats.org/drawingml/2006/main">
-            <a:off x="8267700" y="2628900"/>
-            <a:ext cx="1428750" cy="14288"/>
-          </a:xfrm>
-          <a:prstGeom xmlns:a="http://schemas.openxmlformats.org/drawingml/2006/main" prst="rect">
-            <a:avLst/>
-          </a:prstGeom>
-          <a:solidFill xmlns:a="http://schemas.openxmlformats.org/drawingml/2006/main">
-            <a:srgbClr val="1F4D78"/>
-          </a:solidFill>
-          <a:ln xmlns:a="http://schemas.openxmlformats.org/drawingml/2006/main" w="0">
-            <a:noFill/>
-          </a:ln>
-        </p:spPr>
-      </p:sp>
-      <p:sp>
-        <p:nvSpPr>
-          <p:cNvPr id="27" name="chain-4">
-            <a:extLst xmlns:a="http://schemas.openxmlformats.org/drawingml/2006/main">
-              <a:ext uri="{FF2B5EF4-FFF2-40B4-BE49-F238E27FC236}">
-                <a16:creationId xmlns:a16="http://schemas.microsoft.com/office/drawing/2014/main" id="{DF102652-DADE-4571-A4EC-0674623FF518}"/>
-              </a:ext>
-            </a:extLst>
-          </p:cNvPr>
-          <p:cNvSpPr>
-            <a:spLocks xmlns:a="http://schemas.openxmlformats.org/drawingml/2006/main" noGrp="1"/>
-          </p:cNvSpPr>
-          <p:nvPr/>
-        </p:nvSpPr>
-        <p:spPr>
-          <a:xfrm xmlns:a="http://schemas.openxmlformats.org/drawingml/2006/main">
-            <a:off x="8267700" y="1905000"/>
-            <a:ext cx="1428750" cy="666750"/>
-          </a:xfrm>
-          <a:prstGeom xmlns:a="http://schemas.openxmlformats.org/drawingml/2006/main" prst="rect">
-            <a:avLst/>
-          </a:prstGeom>
-          <a:noFill xmlns:a="http://schemas.openxmlformats.org/drawingml/2006/main"/>
-          <a:ln xmlns:a="http://schemas.openxmlformats.org/drawingml/2006/main" w="0">
-            <a:noFill/>
-          </a:ln>
-        </p:spPr>
-        <p:txBody>
-          <a:bodyPr xmlns:a="http://schemas.openxmlformats.org/drawingml/2006/main" lIns="0" tIns="0" rIns="0" bIns="0" anchor="ctr"/>
-          <a:lstStyle xmlns:a="http://schemas.openxmlformats.org/drawingml/2006/main"/>
-          <a:p xmlns:a="http://schemas.openxmlformats.org/drawingml/2006/main">
-            <a:pPr algn="ctr">
-              <a:lnSpc>
-                <a:spcPct val="118000"/>
-              </a:lnSpc>
-              <a:buNone/>
-              <a:defRPr sz="2200" b="0">
-                <a:solidFill>
-                  <a:srgbClr val="1F4D78"/>
-                </a:solidFill>
-                <a:latin typeface="微软雅黑"/>
-                <a:ea typeface="微软雅黑"/>
-                <a:cs typeface="微软雅黑"/>
-              </a:defRPr>
-            </a:pPr>
-            <a:r>
-              <a:rPr sz="2200" b="0">
-                <a:solidFill>
-                  <a:srgbClr val="1F4D78"/>
-                </a:solidFill>
-                <a:latin typeface="微软雅黑"/>
-                <a:ea typeface="微软雅黑"/>
-                <a:cs typeface="微软雅黑"/>
-              </a:rPr>
-              <a:t>重试</a:t>
-            </a:r>
-          </a:p>
-        </p:txBody>
-      </p:sp>
-      <p:sp>
-        <p:nvSpPr>
-          <p:cNvPr id="28" name="chain-arrow-4">
-            <a:extLst xmlns:a="http://schemas.openxmlformats.org/drawingml/2006/main">
-              <a:ext uri="{FF2B5EF4-FFF2-40B4-BE49-F238E27FC236}">
-                <a16:creationId xmlns:a16="http://schemas.microsoft.com/office/drawing/2014/main" id="{B0397E4A-A5EB-46D6-8014-A4B236C57421}"/>
-              </a:ext>
-            </a:extLst>
-          </p:cNvPr>
-          <p:cNvSpPr>
-            <a:spLocks xmlns:a="http://schemas.openxmlformats.org/drawingml/2006/main" noGrp="1"/>
-          </p:cNvSpPr>
-          <p:nvPr/>
-        </p:nvSpPr>
-        <p:spPr>
-          <a:xfrm xmlns:a="http://schemas.openxmlformats.org/drawingml/2006/main">
-            <a:off x="9696450" y="2076450"/>
-            <a:ext cx="495300" cy="323850"/>
-          </a:xfrm>
-          <a:prstGeom xmlns:a="http://schemas.openxmlformats.org/drawingml/2006/main" prst="rect">
-            <a:avLst/>
-          </a:prstGeom>
-          <a:noFill xmlns:a="http://schemas.openxmlformats.org/drawingml/2006/main"/>
-          <a:ln xmlns:a="http://schemas.openxmlformats.org/drawingml/2006/main" w="0">
-            <a:noFill/>
-          </a:ln>
-        </p:spPr>
-        <p:txBody>
-          <a:bodyPr xmlns:a="http://schemas.openxmlformats.org/drawingml/2006/main" lIns="0" tIns="0" rIns="0" bIns="0" anchor="ctr"/>
-          <a:lstStyle xmlns:a="http://schemas.openxmlformats.org/drawingml/2006/main"/>
-          <a:p xmlns:a="http://schemas.openxmlformats.org/drawingml/2006/main">
-            <a:pPr algn="ctr">
-              <a:lnSpc>
-                <a:spcPct val="118000"/>
-              </a:lnSpc>
-              <a:buNone/>
-              <a:defRPr sz="2400" b="0">
-                <a:solidFill>
-                  <a:srgbClr val="1F4D78"/>
-                </a:solidFill>
-                <a:latin typeface="微软雅黑"/>
-                <a:ea typeface="微软雅黑"/>
-                <a:cs typeface="微软雅黑"/>
-              </a:defRPr>
-            </a:pPr>
-            <a:r>
-              <a:rPr sz="2400" b="0">
-                <a:solidFill>
-                  <a:srgbClr val="1F4D78"/>
-                </a:solidFill>
-                <a:latin typeface="微软雅黑"/>
-                <a:ea typeface="微软雅黑"/>
-                <a:cs typeface="微软雅黑"/>
-              </a:rPr>
-              <a:t>→</a:t>
-            </a:r>
-          </a:p>
-        </p:txBody>
-      </p:sp>
-      <p:sp>
-        <p:nvSpPr>
-          <p:cNvPr id="29" name="chain-sub-4">
-            <a:extLst xmlns:a="http://schemas.openxmlformats.org/drawingml/2006/main">
-              <a:ext uri="{FF2B5EF4-FFF2-40B4-BE49-F238E27FC236}">
-                <a16:creationId xmlns:a16="http://schemas.microsoft.com/office/drawing/2014/main" id="{B9C8CF57-A0E0-448D-BE0D-4004D12F67E5}"/>
-              </a:ext>
-            </a:extLst>
-          </p:cNvPr>
-          <p:cNvSpPr>
-            <a:spLocks xmlns:a="http://schemas.openxmlformats.org/drawingml/2006/main" noGrp="1"/>
-          </p:cNvSpPr>
-          <p:nvPr/>
-        </p:nvSpPr>
-        <p:spPr>
-          <a:xfrm xmlns:a="http://schemas.openxmlformats.org/drawingml/2006/main">
-            <a:off x="8267700" y="2781300"/>
-            <a:ext cx="1428750" cy="571500"/>
-          </a:xfrm>
-          <a:prstGeom xmlns:a="http://schemas.openxmlformats.org/drawingml/2006/main" prst="rect">
-            <a:avLst/>
-          </a:prstGeom>
-          <a:noFill xmlns:a="http://schemas.openxmlformats.org/drawingml/2006/main"/>
-          <a:ln xmlns:a="http://schemas.openxmlformats.org/drawingml/2006/main" w="0">
-            <a:noFill/>
-          </a:ln>
-        </p:spPr>
-        <p:txBody>
-          <a:bodyPr xmlns:a="http://schemas.openxmlformats.org/drawingml/2006/main" lIns="0" tIns="0" rIns="0" bIns="0" anchor="t"/>
-          <a:lstStyle xmlns:a="http://schemas.openxmlformats.org/drawingml/2006/main"/>
-          <a:p xmlns:a="http://schemas.openxmlformats.org/drawingml/2006/main">
-            <a:pPr algn="ctr">
-              <a:lnSpc>
-                <a:spcPct val="118000"/>
-              </a:lnSpc>
-              <a:buNone/>
-              <a:defRPr sz="2000" b="0">
-                <a:solidFill>
-                  <a:srgbClr val="66727D"/>
-                </a:solidFill>
-                <a:latin typeface="微软雅黑"/>
-                <a:ea typeface="微软雅黑"/>
-                <a:cs typeface="微软雅黑"/>
-              </a:defRPr>
-            </a:pPr>
-            <a:r>
-              <a:rPr sz="2000" b="0">
-                <a:solidFill>
-                  <a:srgbClr val="66727D"/>
-                </a:solidFill>
-                <a:latin typeface="微软雅黑"/>
-                <a:ea typeface="微软雅黑"/>
-                <a:cs typeface="微软雅黑"/>
-              </a:rPr>
-              <a:t>新 run ID</a:t>
-            </a:r>
-          </a:p>
-        </p:txBody>
-      </p:sp>
-      <p:sp>
-        <p:nvSpPr>
-          <p:cNvPr id="30" name="chain-line-5">
-            <a:extLst xmlns:a="http://schemas.openxmlformats.org/drawingml/2006/main">
-              <a:ext uri="{FF2B5EF4-FFF2-40B4-BE49-F238E27FC236}">
-                <a16:creationId xmlns:a16="http://schemas.microsoft.com/office/drawing/2014/main" id="{8089531F-8D46-4B82-A1F6-A62FF5FF8E38}"/>
-              </a:ext>
-            </a:extLst>
-          </p:cNvPr>
-          <p:cNvSpPr>
-            <a:spLocks xmlns:a="http://schemas.openxmlformats.org/drawingml/2006/main" noGrp="1"/>
-          </p:cNvSpPr>
-          <p:nvPr/>
-        </p:nvSpPr>
-        <p:spPr>
-          <a:xfrm xmlns:a="http://schemas.openxmlformats.org/drawingml/2006/main">
-            <a:off x="10191750" y="2628900"/>
-            <a:ext cx="1428750" cy="14288"/>
-          </a:xfrm>
-          <a:prstGeom xmlns:a="http://schemas.openxmlformats.org/drawingml/2006/main" prst="rect">
-            <a:avLst/>
-          </a:prstGeom>
-          <a:solidFill xmlns:a="http://schemas.openxmlformats.org/drawingml/2006/main">
-            <a:srgbClr val="2E7D5B"/>
-          </a:solidFill>
-          <a:ln xmlns:a="http://schemas.openxmlformats.org/drawingml/2006/main" w="0">
-            <a:noFill/>
-          </a:ln>
-        </p:spPr>
-      </p:sp>
-      <p:sp>
-        <p:nvSpPr>
-          <p:cNvPr id="31" name="chain-5">
-            <a:extLst xmlns:a="http://schemas.openxmlformats.org/drawingml/2006/main">
-              <a:ext uri="{FF2B5EF4-FFF2-40B4-BE49-F238E27FC236}">
-                <a16:creationId xmlns:a16="http://schemas.microsoft.com/office/drawing/2014/main" id="{4D49DA07-9FF9-4F39-B1CF-1F8D3FD1EE16}"/>
-              </a:ext>
-            </a:extLst>
-          </p:cNvPr>
-          <p:cNvSpPr>
-            <a:spLocks xmlns:a="http://schemas.openxmlformats.org/drawingml/2006/main" noGrp="1"/>
-          </p:cNvSpPr>
-          <p:nvPr/>
-        </p:nvSpPr>
-        <p:spPr>
-          <a:xfrm xmlns:a="http://schemas.openxmlformats.org/drawingml/2006/main">
-            <a:off x="10191750" y="1905000"/>
-            <a:ext cx="1428750" cy="666750"/>
-          </a:xfrm>
-          <a:prstGeom xmlns:a="http://schemas.openxmlformats.org/drawingml/2006/main" prst="rect">
-            <a:avLst/>
-          </a:prstGeom>
-          <a:noFill xmlns:a="http://schemas.openxmlformats.org/drawingml/2006/main"/>
-          <a:ln xmlns:a="http://schemas.openxmlformats.org/drawingml/2006/main" w="0">
-            <a:noFill/>
-          </a:ln>
-        </p:spPr>
-        <p:txBody>
-          <a:bodyPr xmlns:a="http://schemas.openxmlformats.org/drawingml/2006/main" lIns="0" tIns="0" rIns="0" bIns="0" anchor="ctr"/>
-          <a:lstStyle xmlns:a="http://schemas.openxmlformats.org/drawingml/2006/main"/>
-          <a:p xmlns:a="http://schemas.openxmlformats.org/drawingml/2006/main">
-            <a:pPr algn="ctr">
-              <a:lnSpc>
-                <a:spcPct val="118000"/>
-              </a:lnSpc>
-              <a:buNone/>
-              <a:defRPr sz="2200" b="0">
-                <a:solidFill>
-                  <a:srgbClr val="2E7D5B"/>
-                </a:solidFill>
-                <a:latin typeface="微软雅黑"/>
-                <a:ea typeface="微软雅黑"/>
-                <a:cs typeface="微软雅黑"/>
-              </a:defRPr>
-            </a:pPr>
-            <a:r>
-              <a:rPr sz="2200" b="0">
-                <a:solidFill>
-                  <a:srgbClr val="2E7D5B"/>
-                </a:solidFill>
-                <a:latin typeface="微软雅黑"/>
-                <a:ea typeface="微软雅黑"/>
-                <a:cs typeface="微软雅黑"/>
-              </a:rPr>
-              <a:t>人工核验</a:t>
-            </a:r>
-          </a:p>
-        </p:txBody>
-      </p:sp>
-      <p:sp>
-        <p:nvSpPr>
-          <p:cNvPr id="32" name="chain-sub-5">
-            <a:extLst xmlns:a="http://schemas.openxmlformats.org/drawingml/2006/main">
-              <a:ext uri="{FF2B5EF4-FFF2-40B4-BE49-F238E27FC236}">
-                <a16:creationId xmlns:a16="http://schemas.microsoft.com/office/drawing/2014/main" id="{4B35AF69-741F-44C6-B307-EFD0E3E6F654}"/>
-              </a:ext>
-            </a:extLst>
-          </p:cNvPr>
-          <p:cNvSpPr>
-            <a:spLocks xmlns:a="http://schemas.openxmlformats.org/drawingml/2006/main" noGrp="1"/>
-          </p:cNvSpPr>
-          <p:nvPr/>
-        </p:nvSpPr>
-        <p:spPr>
-          <a:xfrm xmlns:a="http://schemas.openxmlformats.org/drawingml/2006/main">
-            <a:off x="10191750" y="2781300"/>
-            <a:ext cx="1428750" cy="571500"/>
-          </a:xfrm>
-          <a:prstGeom xmlns:a="http://schemas.openxmlformats.org/drawingml/2006/main" prst="rect">
-            <a:avLst/>
-          </a:prstGeom>
-          <a:noFill xmlns:a="http://schemas.openxmlformats.org/drawingml/2006/main"/>
-          <a:ln xmlns:a="http://schemas.openxmlformats.org/drawingml/2006/main" w="0">
-            <a:noFill/>
-          </a:ln>
-        </p:spPr>
-        <p:txBody>
-          <a:bodyPr xmlns:a="http://schemas.openxmlformats.org/drawingml/2006/main" lIns="0" tIns="0" rIns="0" bIns="0" anchor="t"/>
-          <a:lstStyle xmlns:a="http://schemas.openxmlformats.org/drawingml/2006/main"/>
-          <a:p xmlns:a="http://schemas.openxmlformats.org/drawingml/2006/main">
-            <a:pPr algn="ctr">
-              <a:lnSpc>
-                <a:spcPct val="118000"/>
-              </a:lnSpc>
-              <a:buNone/>
-              <a:defRPr sz="2000" b="0">
-                <a:solidFill>
-                  <a:srgbClr val="2E7D5B"/>
-                </a:solidFill>
-                <a:latin typeface="微软雅黑"/>
-                <a:ea typeface="微软雅黑"/>
-                <a:cs typeface="微软雅黑"/>
-              </a:defRPr>
-            </a:pPr>
-            <a:r>
-              <a:rPr sz="2000" b="0">
-                <a:solidFill>
-                  <a:srgbClr val="2E7D5B"/>
-                </a:solidFill>
-                <a:latin typeface="微软雅黑"/>
-                <a:ea typeface="微软雅黑"/>
-                <a:cs typeface="微软雅黑"/>
-              </a:rPr>
-              <a:t>审核写回</a:t>
-            </a:r>
-          </a:p>
-        </p:txBody>
-      </p:sp>
-      <p:sp>
-        <p:nvSpPr>
-          <p:cNvPr id="33" name="doc-19-bg">
-            <a:extLst xmlns:a="http://schemas.openxmlformats.org/drawingml/2006/main">
-              <a:ext uri="{FF2B5EF4-FFF2-40B4-BE49-F238E27FC236}">
-                <a16:creationId xmlns:a16="http://schemas.microsoft.com/office/drawing/2014/main" id="{74A81401-7369-4C92-BBA2-B2D4E4C56673}"/>
-              </a:ext>
-            </a:extLst>
-          </p:cNvPr>
-          <p:cNvSpPr>
-            <a:spLocks xmlns:a="http://schemas.openxmlformats.org/drawingml/2006/main" noGrp="1"/>
-          </p:cNvSpPr>
-          <p:nvPr/>
-        </p:nvSpPr>
-        <p:spPr>
-          <a:xfrm xmlns:a="http://schemas.openxmlformats.org/drawingml/2006/main">
-            <a:off x="1714500" y="3905250"/>
-            <a:ext cx="8763000" cy="1428750"/>
-          </a:xfrm>
-          <a:prstGeom xmlns:a="http://schemas.openxmlformats.org/drawingml/2006/main" prst="rect">
-            <a:avLst/>
-          </a:prstGeom>
-          <a:solidFill xmlns:a="http://schemas.openxmlformats.org/drawingml/2006/main">
-            <a:srgbClr val="F4F6F8"/>
-          </a:solidFill>
-          <a:ln xmlns:a="http://schemas.openxmlformats.org/drawingml/2006/main" w="0">
-            <a:noFill/>
-          </a:ln>
-        </p:spPr>
-      </p:sp>
-      <p:sp>
-        <p:nvSpPr>
-          <p:cNvPr id="34" name="doc-19-title-bg">
-            <a:extLst xmlns:a="http://schemas.openxmlformats.org/drawingml/2006/main">
-              <a:ext uri="{FF2B5EF4-FFF2-40B4-BE49-F238E27FC236}">
-                <a16:creationId xmlns:a16="http://schemas.microsoft.com/office/drawing/2014/main" id="{C57E423A-0269-48B9-ADDD-939340A4174F}"/>
-              </a:ext>
-            </a:extLst>
-          </p:cNvPr>
-          <p:cNvSpPr>
-            <a:spLocks xmlns:a="http://schemas.openxmlformats.org/drawingml/2006/main" noGrp="1"/>
-          </p:cNvSpPr>
-          <p:nvPr/>
-        </p:nvSpPr>
-        <p:spPr>
-          <a:xfrm xmlns:a="http://schemas.openxmlformats.org/drawingml/2006/main">
-            <a:off x="1714500" y="3905250"/>
-            <a:ext cx="3429000" cy="323850"/>
-          </a:xfrm>
-          <a:prstGeom xmlns:a="http://schemas.openxmlformats.org/drawingml/2006/main" prst="rect">
-            <a:avLst/>
-          </a:prstGeom>
-          <a:solidFill xmlns:a="http://schemas.openxmlformats.org/drawingml/2006/main">
-            <a:srgbClr val="C8161E"/>
-          </a:solidFill>
-          <a:ln xmlns:a="http://schemas.openxmlformats.org/drawingml/2006/main" w="0">
-            <a:noFill/>
-          </a:ln>
-        </p:spPr>
-      </p:sp>
-      <p:sp>
-        <p:nvSpPr>
-          <p:cNvPr id="35" name="doc-19-title">
-            <a:extLst xmlns:a="http://schemas.openxmlformats.org/drawingml/2006/main">
-              <a:ext uri="{FF2B5EF4-FFF2-40B4-BE49-F238E27FC236}">
-                <a16:creationId xmlns:a16="http://schemas.microsoft.com/office/drawing/2014/main" id="{78475229-7444-493D-8662-451C862F5DBC}"/>
-              </a:ext>
-            </a:extLst>
-          </p:cNvPr>
-          <p:cNvSpPr>
-            <a:spLocks xmlns:a="http://schemas.openxmlformats.org/drawingml/2006/main" noGrp="1"/>
-          </p:cNvSpPr>
-          <p:nvPr/>
-        </p:nvSpPr>
-        <p:spPr>
-          <a:xfrm xmlns:a="http://schemas.openxmlformats.org/drawingml/2006/main">
-            <a:off x="1790700" y="3924300"/>
-            <a:ext cx="3276600" cy="285750"/>
-          </a:xfrm>
-          <a:prstGeom xmlns:a="http://schemas.openxmlformats.org/drawingml/2006/main" prst="rect">
-            <a:avLst/>
-          </a:prstGeom>
-          <a:noFill xmlns:a="http://schemas.openxmlformats.org/drawingml/2006/main"/>
-          <a:ln xmlns:a="http://schemas.openxmlformats.org/drawingml/2006/main" w="0">
-            <a:noFill/>
-          </a:ln>
-        </p:spPr>
-        <p:txBody>
-          <a:bodyPr xmlns:a="http://schemas.openxmlformats.org/drawingml/2006/main" lIns="0" tIns="0" rIns="0" bIns="0" anchor="ctr"/>
           <a:lstStyle xmlns:a="http://schemas.openxmlformats.org/drawingml/2006/main"/>
           <a:p xmlns:a="http://schemas.openxmlformats.org/drawingml/2006/main">
             <a:pPr algn="l">
@@ -11512,9 +11346,9 @@
                 <a:spcPct val="118000"/>
               </a:lnSpc>
               <a:buNone/>
-              <a:defRPr sz="1800" b="1">
-                <a:solidFill>
-                  <a:srgbClr val="FFFFFF"/>
+              <a:defRPr sz="2400" b="0">
+                <a:solidFill>
+                  <a:srgbClr val="27333D"/>
                 </a:solidFill>
                 <a:latin typeface="微软雅黑"/>
                 <a:ea typeface="微软雅黑"/>
@@ -11522,37 +11356,37 @@
               </a:defRPr>
             </a:pPr>
             <a:r>
-              <a:rPr sz="1800" b="1">
-                <a:solidFill>
-                  <a:srgbClr val="FFFFFF"/>
+              <a:rPr sz="2400" b="0">
+                <a:solidFill>
+                  <a:srgbClr val="27333D"/>
                 </a:solidFill>
                 <a:latin typeface="微软雅黑"/>
                 <a:ea typeface="微软雅黑"/>
                 <a:cs typeface="微软雅黑"/>
               </a:rPr>
-              <a:t>trace.jsonl｜课程虚构工件</a:t>
-            </a:r>
-          </a:p>
-        </p:txBody>
-      </p:sp>
-      <p:sp>
-        <p:nvSpPr>
-          <p:cNvPr id="36" name="doc-19-line-0">
-            <a:extLst xmlns:a="http://schemas.openxmlformats.org/drawingml/2006/main">
-              <a:ext uri="{FF2B5EF4-FFF2-40B4-BE49-F238E27FC236}">
-                <a16:creationId xmlns:a16="http://schemas.microsoft.com/office/drawing/2014/main" id="{E7ECFCE8-46FF-46BB-90DC-B55DD5FA16E3}"/>
-              </a:ext>
-            </a:extLst>
-          </p:cNvPr>
-          <p:cNvSpPr>
-            <a:spLocks xmlns:a="http://schemas.openxmlformats.org/drawingml/2006/main" noGrp="1"/>
-          </p:cNvSpPr>
-          <p:nvPr/>
-        </p:nvSpPr>
-        <p:spPr>
-          <a:xfrm xmlns:a="http://schemas.openxmlformats.org/drawingml/2006/main">
-            <a:off x="1943100" y="4400550"/>
-            <a:ext cx="8305800" cy="685800"/>
+              <a:t>已展示：通过此入口的角色检查。</a:t>
+            </a:r>
+          </a:p>
+        </p:txBody>
+      </p:sp>
+      <p:sp>
+        <p:nvSpPr>
+          <p:cNvPr id="9" name="content-335">
+            <a:extLst xmlns:a="http://schemas.openxmlformats.org/drawingml/2006/main">
+              <a:ext uri="{FF2B5EF4-FFF2-40B4-BE49-F238E27FC236}">
+                <a16:creationId xmlns:a16="http://schemas.microsoft.com/office/drawing/2014/main" id="{68D65F9D-1275-48FC-8081-350C97DD219E}"/>
+              </a:ext>
+            </a:extLst>
+          </p:cNvPr>
+          <p:cNvSpPr>
+            <a:spLocks xmlns:a="http://schemas.openxmlformats.org/drawingml/2006/main" noGrp="1"/>
+          </p:cNvSpPr>
+          <p:nvPr/>
+        </p:nvSpPr>
+        <p:spPr>
+          <a:xfrm xmlns:a="http://schemas.openxmlformats.org/drawingml/2006/main">
+            <a:off x="609600" y="3640455"/>
+            <a:ext cx="10972800" cy="432435"/>
           </a:xfrm>
           <a:prstGeom xmlns:a="http://schemas.openxmlformats.org/drawingml/2006/main" prst="rect">
             <a:avLst/>
@@ -11563,7 +11397,7 @@
           </a:ln>
         </p:spPr>
         <p:txBody>
-          <a:bodyPr xmlns:a="http://schemas.openxmlformats.org/drawingml/2006/main" lIns="0" tIns="0" rIns="0" bIns="0" anchor="ctr"/>
+          <a:bodyPr xmlns:a="http://schemas.openxmlformats.org/drawingml/2006/main" lIns="0" tIns="0" rIns="0" bIns="0" anchor="t"/>
           <a:lstStyle xmlns:a="http://schemas.openxmlformats.org/drawingml/2006/main"/>
           <a:p xmlns:a="http://schemas.openxmlformats.org/drawingml/2006/main">
             <a:pPr algn="l">
@@ -11571,25 +11405,25 @@
                 <a:spcPct val="118000"/>
               </a:lnSpc>
               <a:buNone/>
-              <a:defRPr sz="1800" b="0">
-                <a:solidFill>
-                  <a:srgbClr val="27333D"/>
-                </a:solidFill>
-                <a:latin typeface="Consolas"/>
-                <a:ea typeface="Consolas"/>
-                <a:cs typeface="Consolas"/>
+              <a:defRPr sz="2400" b="0">
+                <a:solidFill>
+                  <a:srgbClr val="1F4D78"/>
+                </a:solidFill>
+                <a:latin typeface="微软雅黑"/>
+                <a:ea typeface="微软雅黑"/>
+                <a:cs typeface="微软雅黑"/>
               </a:defRPr>
             </a:pPr>
             <a:r>
-              <a:rPr sz="1800" b="0">
-                <a:solidFill>
-                  <a:srgbClr val="27333D"/>
-                </a:solidFill>
-                <a:latin typeface="Consolas"/>
-                <a:ea typeface="Consolas"/>
-                <a:cs typeface="Consolas"/>
+              <a:rPr sz="2400" b="0">
+                <a:solidFill>
+                  <a:srgbClr val="1F4D78"/>
+                </a:solidFill>
+                <a:latin typeface="微软雅黑"/>
+                <a:ea typeface="微软雅黑"/>
+                <a:cs typeface="微软雅黑"/>
               </a:rPr>
-              <a:t>action=read_gold  permission=denied  recovery=narrow_scope  reviewer=human</a:t>
+              <a:t>尚未展示：操作系统或容器级隔离。</a:t>
             </a:r>
           </a:p>
         </p:txBody>
@@ -11693,74 +11527,22 @@
       </p:sp>
       <p:sp>
         <p:nvSpPr>
-          <p:cNvPr id="6" name="brand-header">
-            <a:extLst xmlns:a="http://schemas.openxmlformats.org/drawingml/2006/main">
-              <a:ext uri="{FF2B5EF4-FFF2-40B4-BE49-F238E27FC236}">
-                <a16:creationId xmlns:a16="http://schemas.microsoft.com/office/drawing/2014/main" id="{68F4EEDE-69F0-4C83-B3CB-73172C60D339}"/>
-              </a:ext>
-            </a:extLst>
-          </p:cNvPr>
-          <p:cNvSpPr>
-            <a:spLocks xmlns:a="http://schemas.openxmlformats.org/drawingml/2006/main" noGrp="1"/>
-          </p:cNvSpPr>
-          <p:nvPr/>
-        </p:nvSpPr>
-        <p:spPr>
-          <a:xfrm xmlns:a="http://schemas.openxmlformats.org/drawingml/2006/main">
-            <a:off x="0" y="0"/>
-            <a:ext cx="11887200" cy="685800"/>
-          </a:xfrm>
-          <a:prstGeom xmlns:a="http://schemas.openxmlformats.org/drawingml/2006/main" prst="rect">
-            <a:avLst/>
-          </a:prstGeom>
-          <a:solidFill xmlns:a="http://schemas.openxmlformats.org/drawingml/2006/main">
-            <a:srgbClr val="C8161E"/>
-          </a:solidFill>
-          <a:ln xmlns:a="http://schemas.openxmlformats.org/drawingml/2006/main" w="0">
-            <a:noFill/>
-          </a:ln>
-        </p:spPr>
-      </p:sp>
-      <p:pic>
-        <p:nvPicPr>
-          <p:cNvPr id="28" name=""/>
-          <p:cNvPicPr>
-            <a:picLocks xmlns:a="http://schemas.openxmlformats.org/drawingml/2006/main" noChangeAspect="1"/>
-          </p:cNvPicPr>
-          <p:nvPr/>
-        </p:nvPicPr>
-        <p:blipFill>
-          <a:blip xmlns:r="http://schemas.openxmlformats.org/officeDocument/2006/relationships" xmlns:a="http://schemas.openxmlformats.org/drawingml/2006/main" r:embed="R84643859cf0d48c9"/>
-          <a:stretch xmlns:a="http://schemas.openxmlformats.org/drawingml/2006/main"/>
-        </p:blipFill>
-        <p:spPr>
-          <a:xfrm xmlns:a="http://schemas.openxmlformats.org/drawingml/2006/main">
-            <a:off x="323850" y="76200"/>
-            <a:ext cx="533400" cy="533400"/>
-          </a:xfrm>
-          <a:prstGeom xmlns:a="http://schemas.openxmlformats.org/drawingml/2006/main" prst="rect">
-            <a:avLst/>
-          </a:prstGeom>
-        </p:spPr>
-      </p:pic>
-      <p:sp>
-        <p:nvSpPr>
-          <p:cNvPr id="8" name="brand-title">
-            <a:extLst xmlns:a="http://schemas.openxmlformats.org/drawingml/2006/main">
-              <a:ext uri="{FF2B5EF4-FFF2-40B4-BE49-F238E27FC236}">
-                <a16:creationId xmlns:a16="http://schemas.microsoft.com/office/drawing/2014/main" id="{B5B15441-4932-4698-8DA6-3824C0D80659}"/>
-              </a:ext>
-            </a:extLst>
-          </p:cNvPr>
-          <p:cNvSpPr>
-            <a:spLocks xmlns:a="http://schemas.openxmlformats.org/drawingml/2006/main" noGrp="1"/>
-          </p:cNvSpPr>
-          <p:nvPr/>
-        </p:nvSpPr>
-        <p:spPr>
-          <a:xfrm xmlns:a="http://schemas.openxmlformats.org/drawingml/2006/main">
-            <a:off x="1028700" y="66675"/>
-            <a:ext cx="10477500" cy="552450"/>
+          <p:cNvPr id="6" name="content-336">
+            <a:extLst xmlns:a="http://schemas.openxmlformats.org/drawingml/2006/main">
+              <a:ext uri="{FF2B5EF4-FFF2-40B4-BE49-F238E27FC236}">
+                <a16:creationId xmlns:a16="http://schemas.microsoft.com/office/drawing/2014/main" id="{B267732A-E555-405E-BAA0-72E8D8B344D9}"/>
+              </a:ext>
+            </a:extLst>
+          </p:cNvPr>
+          <p:cNvSpPr>
+            <a:spLocks xmlns:a="http://schemas.openxmlformats.org/drawingml/2006/main" noGrp="1"/>
+          </p:cNvSpPr>
+          <p:nvPr/>
+        </p:nvSpPr>
+        <p:spPr>
+          <a:xfrm xmlns:a="http://schemas.openxmlformats.org/drawingml/2006/main">
+            <a:off x="609600" y="1571625"/>
+            <a:ext cx="10972800" cy="432435"/>
           </a:xfrm>
           <a:prstGeom xmlns:a="http://schemas.openxmlformats.org/drawingml/2006/main" prst="rect">
             <a:avLst/>
@@ -11771,7 +11553,7 @@
           </a:ln>
         </p:spPr>
         <p:txBody>
-          <a:bodyPr xmlns:a="http://schemas.openxmlformats.org/drawingml/2006/main" lIns="0" tIns="0" rIns="0" bIns="0" anchor="ctr"/>
+          <a:bodyPr xmlns:a="http://schemas.openxmlformats.org/drawingml/2006/main" lIns="0" tIns="0" rIns="0" bIns="0" anchor="t"/>
           <a:lstStyle xmlns:a="http://schemas.openxmlformats.org/drawingml/2006/main"/>
           <a:p xmlns:a="http://schemas.openxmlformats.org/drawingml/2006/main">
             <a:pPr algn="l">
@@ -11779,9 +11561,9 @@
                 <a:spcPct val="118000"/>
               </a:lnSpc>
               <a:buNone/>
-              <a:defRPr sz="3000" b="1">
-                <a:solidFill>
-                  <a:srgbClr val="FFFFFF"/>
+              <a:defRPr sz="2400" b="0">
+                <a:solidFill>
+                  <a:srgbClr val="27333D"/>
                 </a:solidFill>
                 <a:latin typeface="微软雅黑"/>
                 <a:ea typeface="微软雅黑"/>
@@ -11789,37 +11571,37 @@
               </a:defRPr>
             </a:pPr>
             <a:r>
-              <a:rPr sz="3000" b="1">
-                <a:solidFill>
-                  <a:srgbClr val="FFFFFF"/>
+              <a:rPr sz="2400" b="0">
+                <a:solidFill>
+                  <a:srgbClr val="27333D"/>
                 </a:solidFill>
                 <a:latin typeface="微软雅黑"/>
                 <a:ea typeface="微软雅黑"/>
                 <a:cs typeface="微软雅黑"/>
               </a:rPr>
-              <a:t>个人实践：先定契约，再走通一条 trace</a:t>
-            </a:r>
-          </a:p>
-        </p:txBody>
-      </p:sp>
-      <p:sp>
-        <p:nvSpPr>
-          <p:cNvPr id="9" name="source">
-            <a:extLst xmlns:a="http://schemas.openxmlformats.org/drawingml/2006/main">
-              <a:ext uri="{FF2B5EF4-FFF2-40B4-BE49-F238E27FC236}">
-                <a16:creationId xmlns:a16="http://schemas.microsoft.com/office/drawing/2014/main" id="{7B66670D-A8CC-4310-AB36-EE9330218575}"/>
-              </a:ext>
-            </a:extLst>
-          </p:cNvPr>
-          <p:cNvSpPr>
-            <a:spLocks xmlns:a="http://schemas.openxmlformats.org/drawingml/2006/main" noGrp="1"/>
-          </p:cNvSpPr>
-          <p:nvPr/>
-        </p:nvSpPr>
-        <p:spPr>
-          <a:xfrm xmlns:a="http://schemas.openxmlformats.org/drawingml/2006/main">
-            <a:off x="609600" y="6067425"/>
-            <a:ext cx="10763250" cy="209550"/>
+              <a:t>选第 10–11 课的同一科研动作。</a:t>
+            </a:r>
+          </a:p>
+        </p:txBody>
+      </p:sp>
+      <p:sp>
+        <p:nvSpPr>
+          <p:cNvPr id="7" name="content-337">
+            <a:extLst xmlns:a="http://schemas.openxmlformats.org/drawingml/2006/main">
+              <a:ext uri="{FF2B5EF4-FFF2-40B4-BE49-F238E27FC236}">
+                <a16:creationId xmlns:a16="http://schemas.microsoft.com/office/drawing/2014/main" id="{53FBF48E-1CBA-4631-B352-60A9CEC9225C}"/>
+              </a:ext>
+            </a:extLst>
+          </p:cNvPr>
+          <p:cNvSpPr>
+            <a:spLocks xmlns:a="http://schemas.openxmlformats.org/drawingml/2006/main" noGrp="1"/>
+          </p:cNvSpPr>
+          <p:nvPr/>
+        </p:nvSpPr>
+        <p:spPr>
+          <a:xfrm xmlns:a="http://schemas.openxmlformats.org/drawingml/2006/main">
+            <a:off x="609600" y="2261235"/>
+            <a:ext cx="10972800" cy="432435"/>
           </a:xfrm>
           <a:prstGeom xmlns:a="http://schemas.openxmlformats.org/drawingml/2006/main" prst="rect">
             <a:avLst/>
@@ -11838,9 +11620,9 @@
                 <a:spcPct val="118000"/>
               </a:lnSpc>
               <a:buNone/>
-              <a:defRPr sz="1100" b="0">
-                <a:solidFill>
-                  <a:srgbClr val="66727D"/>
+              <a:defRPr sz="2400" b="0">
+                <a:solidFill>
+                  <a:srgbClr val="27333D"/>
                 </a:solidFill>
                 <a:latin typeface="微软雅黑"/>
                 <a:ea typeface="微软雅黑"/>
@@ -11848,98 +11630,37 @@
               </a:defRPr>
             </a:pPr>
             <a:r>
-              <a:rPr sz="1100" b="0">
-                <a:solidFill>
-                  <a:srgbClr val="66727D"/>
+              <a:rPr sz="2400" b="0">
+                <a:solidFill>
+                  <a:srgbClr val="27333D"/>
                 </a:solidFill>
                 <a:latin typeface="微软雅黑"/>
                 <a:ea typeface="微软雅黑"/>
                 <a:cs typeface="微软雅黑"/>
               </a:rPr>
-              <a:t>来源：lesson-12/slides.md；课程工件与讲义见 speaker notes</a:t>
-            </a:r>
-          </a:p>
-        </p:txBody>
-      </p:sp>
-      <p:sp>
-        <p:nvSpPr>
-          <p:cNvPr id="10" name="num-0">
-            <a:extLst xmlns:a="http://schemas.openxmlformats.org/drawingml/2006/main">
-              <a:ext uri="{FF2B5EF4-FFF2-40B4-BE49-F238E27FC236}">
-                <a16:creationId xmlns:a16="http://schemas.microsoft.com/office/drawing/2014/main" id="{889E6745-6AC4-4531-86AA-E54F83A44C39}"/>
-              </a:ext>
-            </a:extLst>
-          </p:cNvPr>
-          <p:cNvSpPr>
-            <a:spLocks xmlns:a="http://schemas.openxmlformats.org/drawingml/2006/main" noGrp="1"/>
-          </p:cNvSpPr>
-          <p:nvPr/>
-        </p:nvSpPr>
-        <p:spPr>
-          <a:xfrm xmlns:a="http://schemas.openxmlformats.org/drawingml/2006/main">
-            <a:off x="666750" y="1524000"/>
-            <a:ext cx="323850" cy="738188"/>
-          </a:xfrm>
-          <a:prstGeom xmlns:a="http://schemas.openxmlformats.org/drawingml/2006/main" prst="rect">
-            <a:avLst/>
-          </a:prstGeom>
-          <a:solidFill xmlns:a="http://schemas.openxmlformats.org/drawingml/2006/main">
-            <a:srgbClr val="1F4D78"/>
-          </a:solidFill>
-          <a:ln xmlns:a="http://schemas.openxmlformats.org/drawingml/2006/main" w="0">
-            <a:noFill/>
-          </a:ln>
-        </p:spPr>
-        <p:txBody>
-          <a:bodyPr xmlns:a="http://schemas.openxmlformats.org/drawingml/2006/main" lIns="0" tIns="0" rIns="0" bIns="0" anchor="ctr"/>
-          <a:lstStyle xmlns:a="http://schemas.openxmlformats.org/drawingml/2006/main"/>
-          <a:p xmlns:a="http://schemas.openxmlformats.org/drawingml/2006/main">
-            <a:pPr algn="ctr">
-              <a:lnSpc>
-                <a:spcPct val="118000"/>
-              </a:lnSpc>
-              <a:buNone/>
-              <a:defRPr sz="1800" b="1">
-                <a:solidFill>
-                  <a:srgbClr val="FFFFFF"/>
-                </a:solidFill>
-                <a:latin typeface="微软雅黑"/>
-                <a:ea typeface="微软雅黑"/>
-                <a:cs typeface="微软雅黑"/>
-              </a:defRPr>
-            </a:pPr>
-            <a:r>
-              <a:rPr sz="1800" b="1">
-                <a:solidFill>
-                  <a:srgbClr val="FFFFFF"/>
-                </a:solidFill>
-                <a:latin typeface="微软雅黑"/>
-                <a:ea typeface="微软雅黑"/>
-                <a:cs typeface="微软雅黑"/>
-              </a:rPr>
-              <a:t>1</a:t>
-            </a:r>
-          </a:p>
-        </p:txBody>
-      </p:sp>
-      <p:sp>
-        <p:nvSpPr>
-          <p:cNvPr id="11" name="row-0">
-            <a:extLst xmlns:a="http://schemas.openxmlformats.org/drawingml/2006/main">
-              <a:ext uri="{FF2B5EF4-FFF2-40B4-BE49-F238E27FC236}">
-                <a16:creationId xmlns:a16="http://schemas.microsoft.com/office/drawing/2014/main" id="{C469546A-FB6A-4828-8DB1-814ADA7019F7}"/>
-              </a:ext>
-            </a:extLst>
-          </p:cNvPr>
-          <p:cNvSpPr>
-            <a:spLocks xmlns:a="http://schemas.openxmlformats.org/drawingml/2006/main" noGrp="1"/>
-          </p:cNvSpPr>
-          <p:nvPr/>
-        </p:nvSpPr>
-        <p:spPr>
-          <a:xfrm xmlns:a="http://schemas.openxmlformats.org/drawingml/2006/main">
-            <a:off x="1143000" y="1524000"/>
-            <a:ext cx="6191250" cy="738188"/>
+              <a:t>先写任务、权限边界与评价路径，标明其他契约缺口。</a:t>
+            </a:r>
+          </a:p>
+        </p:txBody>
+      </p:sp>
+      <p:sp>
+        <p:nvSpPr>
+          <p:cNvPr id="8" name="content-338">
+            <a:extLst xmlns:a="http://schemas.openxmlformats.org/drawingml/2006/main">
+              <a:ext uri="{FF2B5EF4-FFF2-40B4-BE49-F238E27FC236}">
+                <a16:creationId xmlns:a16="http://schemas.microsoft.com/office/drawing/2014/main" id="{CD08A774-2C3B-457B-BADF-91608D935A6D}"/>
+              </a:ext>
+            </a:extLst>
+          </p:cNvPr>
+          <p:cNvSpPr>
+            <a:spLocks xmlns:a="http://schemas.openxmlformats.org/drawingml/2006/main" noGrp="1"/>
+          </p:cNvSpPr>
+          <p:nvPr/>
+        </p:nvSpPr>
+        <p:spPr>
+          <a:xfrm xmlns:a="http://schemas.openxmlformats.org/drawingml/2006/main">
+            <a:off x="609600" y="2950845"/>
+            <a:ext cx="10972800" cy="432435"/>
           </a:xfrm>
           <a:prstGeom xmlns:a="http://schemas.openxmlformats.org/drawingml/2006/main" prst="rect">
             <a:avLst/>
@@ -11950,7 +11671,7 @@
           </a:ln>
         </p:spPr>
         <p:txBody>
-          <a:bodyPr xmlns:a="http://schemas.openxmlformats.org/drawingml/2006/main" lIns="0" tIns="0" rIns="0" bIns="0" anchor="ctr"/>
+          <a:bodyPr xmlns:a="http://schemas.openxmlformats.org/drawingml/2006/main" lIns="0" tIns="0" rIns="0" bIns="0" anchor="t"/>
           <a:lstStyle xmlns:a="http://schemas.openxmlformats.org/drawingml/2006/main"/>
           <a:p xmlns:a="http://schemas.openxmlformats.org/drawingml/2006/main">
             <a:pPr algn="l">
@@ -11958,7 +11679,7 @@
                 <a:spcPct val="118000"/>
               </a:lnSpc>
               <a:buNone/>
-              <a:defRPr sz="2200" b="0">
+              <a:defRPr sz="2400" b="0">
                 <a:solidFill>
                   <a:srgbClr val="27333D"/>
                 </a:solidFill>
@@ -11968,7 +11689,7 @@
               </a:defRPr>
             </a:pPr>
             <a:r>
-              <a:rPr sz="2200" b="0">
+              <a:rPr sz="2400" b="0">
                 <a:solidFill>
                   <a:srgbClr val="27333D"/>
                 </a:solidFill>
@@ -11976,120 +11697,29 @@
                 <a:ea typeface="微软雅黑"/>
                 <a:cs typeface="微软雅黑"/>
               </a:rPr>
-              <a:t>选第 10–11 课同一科研动作</a:t>
-            </a:r>
-          </a:p>
-        </p:txBody>
-      </p:sp>
-      <p:sp>
-        <p:nvSpPr>
-          <p:cNvPr id="12" name="row-rule-0">
-            <a:extLst xmlns:a="http://schemas.openxmlformats.org/drawingml/2006/main">
-              <a:ext uri="{FF2B5EF4-FFF2-40B4-BE49-F238E27FC236}">
-                <a16:creationId xmlns:a16="http://schemas.microsoft.com/office/drawing/2014/main" id="{B85BEF1D-8CB5-40C7-BF89-D9B3A40E0C65}"/>
-              </a:ext>
-            </a:extLst>
-          </p:cNvPr>
-          <p:cNvSpPr>
-            <a:spLocks xmlns:a="http://schemas.openxmlformats.org/drawingml/2006/main" noGrp="1"/>
-          </p:cNvSpPr>
-          <p:nvPr/>
-        </p:nvSpPr>
-        <p:spPr>
-          <a:xfrm xmlns:a="http://schemas.openxmlformats.org/drawingml/2006/main">
-            <a:off x="1143000" y="2300288"/>
-            <a:ext cx="6191250" cy="14288"/>
-          </a:xfrm>
-          <a:prstGeom xmlns:a="http://schemas.openxmlformats.org/drawingml/2006/main" prst="rect">
-            <a:avLst/>
-          </a:prstGeom>
-          <a:solidFill xmlns:a="http://schemas.openxmlformats.org/drawingml/2006/main">
-            <a:srgbClr val="CDD5DB"/>
-          </a:solidFill>
-          <a:ln xmlns:a="http://schemas.openxmlformats.org/drawingml/2006/main" w="0">
-            <a:noFill/>
-          </a:ln>
-        </p:spPr>
-      </p:sp>
-      <p:sp>
-        <p:nvSpPr>
-          <p:cNvPr id="13" name="num-1">
-            <a:extLst xmlns:a="http://schemas.openxmlformats.org/drawingml/2006/main">
-              <a:ext uri="{FF2B5EF4-FFF2-40B4-BE49-F238E27FC236}">
-                <a16:creationId xmlns:a16="http://schemas.microsoft.com/office/drawing/2014/main" id="{1C21F831-7A78-4B5B-815D-D06F16BDA6E4}"/>
-              </a:ext>
-            </a:extLst>
-          </p:cNvPr>
-          <p:cNvSpPr>
-            <a:spLocks xmlns:a="http://schemas.openxmlformats.org/drawingml/2006/main" noGrp="1"/>
-          </p:cNvSpPr>
-          <p:nvPr/>
-        </p:nvSpPr>
-        <p:spPr>
-          <a:xfrm xmlns:a="http://schemas.openxmlformats.org/drawingml/2006/main">
-            <a:off x="666750" y="2357438"/>
-            <a:ext cx="323850" cy="738188"/>
-          </a:xfrm>
-          <a:prstGeom xmlns:a="http://schemas.openxmlformats.org/drawingml/2006/main" prst="rect">
-            <a:avLst/>
-          </a:prstGeom>
-          <a:solidFill xmlns:a="http://schemas.openxmlformats.org/drawingml/2006/main">
-            <a:srgbClr val="1F4D78"/>
-          </a:solidFill>
-          <a:ln xmlns:a="http://schemas.openxmlformats.org/drawingml/2006/main" w="0">
-            <a:noFill/>
-          </a:ln>
-        </p:spPr>
-        <p:txBody>
-          <a:bodyPr xmlns:a="http://schemas.openxmlformats.org/drawingml/2006/main" lIns="0" tIns="0" rIns="0" bIns="0" anchor="ctr"/>
-          <a:lstStyle xmlns:a="http://schemas.openxmlformats.org/drawingml/2006/main"/>
-          <a:p xmlns:a="http://schemas.openxmlformats.org/drawingml/2006/main">
-            <a:pPr algn="ctr">
-              <a:lnSpc>
-                <a:spcPct val="118000"/>
-              </a:lnSpc>
-              <a:buNone/>
-              <a:defRPr sz="1800" b="1">
-                <a:solidFill>
-                  <a:srgbClr val="FFFFFF"/>
-                </a:solidFill>
-                <a:latin typeface="微软雅黑"/>
-                <a:ea typeface="微软雅黑"/>
-                <a:cs typeface="微软雅黑"/>
-              </a:defRPr>
-            </a:pPr>
-            <a:r>
-              <a:rPr sz="1800" b="1">
-                <a:solidFill>
-                  <a:srgbClr val="FFFFFF"/>
-                </a:solidFill>
-                <a:latin typeface="微软雅黑"/>
-                <a:ea typeface="微软雅黑"/>
-                <a:cs typeface="微软雅黑"/>
-              </a:rPr>
-              <a:t>2</a:t>
-            </a:r>
-          </a:p>
-        </p:txBody>
-      </p:sp>
-      <p:sp>
-        <p:nvSpPr>
-          <p:cNvPr id="14" name="row-1">
-            <a:extLst xmlns:a="http://schemas.openxmlformats.org/drawingml/2006/main">
-              <a:ext uri="{FF2B5EF4-FFF2-40B4-BE49-F238E27FC236}">
-                <a16:creationId xmlns:a16="http://schemas.microsoft.com/office/drawing/2014/main" id="{8D803240-6DA1-4472-BB58-2C13E55B2574}"/>
-              </a:ext>
-            </a:extLst>
-          </p:cNvPr>
-          <p:cNvSpPr>
-            <a:spLocks xmlns:a="http://schemas.openxmlformats.org/drawingml/2006/main" noGrp="1"/>
-          </p:cNvSpPr>
-          <p:nvPr/>
-        </p:nvSpPr>
-        <p:spPr>
-          <a:xfrm xmlns:a="http://schemas.openxmlformats.org/drawingml/2006/main">
-            <a:off x="1143000" y="2357438"/>
-            <a:ext cx="6191250" cy="738188"/>
+              <a:t>建立最小目录，走通一条 trace，说明失败如何保留与恢复。</a:t>
+            </a:r>
+          </a:p>
+        </p:txBody>
+      </p:sp>
+      <p:sp>
+        <p:nvSpPr>
+          <p:cNvPr id="9" name="content-339">
+            <a:extLst xmlns:a="http://schemas.openxmlformats.org/drawingml/2006/main">
+              <a:ext uri="{FF2B5EF4-FFF2-40B4-BE49-F238E27FC236}">
+                <a16:creationId xmlns:a16="http://schemas.microsoft.com/office/drawing/2014/main" id="{12B84699-73CE-417B-9D85-EB2A03246E9A}"/>
+              </a:ext>
+            </a:extLst>
+          </p:cNvPr>
+          <p:cNvSpPr>
+            <a:spLocks xmlns:a="http://schemas.openxmlformats.org/drawingml/2006/main" noGrp="1"/>
+          </p:cNvSpPr>
+          <p:nvPr/>
+        </p:nvSpPr>
+        <p:spPr>
+          <a:xfrm xmlns:a="http://schemas.openxmlformats.org/drawingml/2006/main">
+            <a:off x="609600" y="3640455"/>
+            <a:ext cx="10972800" cy="432435"/>
           </a:xfrm>
           <a:prstGeom xmlns:a="http://schemas.openxmlformats.org/drawingml/2006/main" prst="rect">
             <a:avLst/>
@@ -12100,7 +11730,7 @@
           </a:ln>
         </p:spPr>
         <p:txBody>
-          <a:bodyPr xmlns:a="http://schemas.openxmlformats.org/drawingml/2006/main" lIns="0" tIns="0" rIns="0" bIns="0" anchor="ctr"/>
+          <a:bodyPr xmlns:a="http://schemas.openxmlformats.org/drawingml/2006/main" lIns="0" tIns="0" rIns="0" bIns="0" anchor="t"/>
           <a:lstStyle xmlns:a="http://schemas.openxmlformats.org/drawingml/2006/main"/>
           <a:p xmlns:a="http://schemas.openxmlformats.org/drawingml/2006/main">
             <a:pPr algn="l">
@@ -12108,7 +11738,7 @@
                 <a:spcPct val="118000"/>
               </a:lnSpc>
               <a:buNone/>
-              <a:defRPr sz="2200" b="0">
+              <a:defRPr sz="2400" b="0">
                 <a:solidFill>
                   <a:srgbClr val="27333D"/>
                 </a:solidFill>
@@ -12118,7 +11748,7 @@
               </a:defRPr>
             </a:pPr>
             <a:r>
-              <a:rPr sz="2200" b="0">
+              <a:rPr sz="2400" b="0">
                 <a:solidFill>
                   <a:srgbClr val="27333D"/>
                 </a:solidFill>
@@ -12126,120 +11756,29 @@
                 <a:ea typeface="微软雅黑"/>
                 <a:cs typeface="微软雅黑"/>
               </a:rPr>
-              <a:t>补齐八要素契约</a:t>
-            </a:r>
-          </a:p>
-        </p:txBody>
-      </p:sp>
-      <p:sp>
-        <p:nvSpPr>
-          <p:cNvPr id="15" name="row-rule-1">
-            <a:extLst xmlns:a="http://schemas.openxmlformats.org/drawingml/2006/main">
-              <a:ext uri="{FF2B5EF4-FFF2-40B4-BE49-F238E27FC236}">
-                <a16:creationId xmlns:a16="http://schemas.microsoft.com/office/drawing/2014/main" id="{5F92E528-8E22-4E4F-A9CC-218EAB16EAF2}"/>
-              </a:ext>
-            </a:extLst>
-          </p:cNvPr>
-          <p:cNvSpPr>
-            <a:spLocks xmlns:a="http://schemas.openxmlformats.org/drawingml/2006/main" noGrp="1"/>
-          </p:cNvSpPr>
-          <p:nvPr/>
-        </p:nvSpPr>
-        <p:spPr>
-          <a:xfrm xmlns:a="http://schemas.openxmlformats.org/drawingml/2006/main">
-            <a:off x="1143000" y="3133725"/>
-            <a:ext cx="6191250" cy="14288"/>
-          </a:xfrm>
-          <a:prstGeom xmlns:a="http://schemas.openxmlformats.org/drawingml/2006/main" prst="rect">
-            <a:avLst/>
-          </a:prstGeom>
-          <a:solidFill xmlns:a="http://schemas.openxmlformats.org/drawingml/2006/main">
-            <a:srgbClr val="CDD5DB"/>
-          </a:solidFill>
-          <a:ln xmlns:a="http://schemas.openxmlformats.org/drawingml/2006/main" w="0">
-            <a:noFill/>
-          </a:ln>
-        </p:spPr>
-      </p:sp>
-      <p:sp>
-        <p:nvSpPr>
-          <p:cNvPr id="16" name="num-2">
-            <a:extLst xmlns:a="http://schemas.openxmlformats.org/drawingml/2006/main">
-              <a:ext uri="{FF2B5EF4-FFF2-40B4-BE49-F238E27FC236}">
-                <a16:creationId xmlns:a16="http://schemas.microsoft.com/office/drawing/2014/main" id="{CC05C34B-2F87-4166-AD20-8B14004C649B}"/>
-              </a:ext>
-            </a:extLst>
-          </p:cNvPr>
-          <p:cNvSpPr>
-            <a:spLocks xmlns:a="http://schemas.openxmlformats.org/drawingml/2006/main" noGrp="1"/>
-          </p:cNvSpPr>
-          <p:nvPr/>
-        </p:nvSpPr>
-        <p:spPr>
-          <a:xfrm xmlns:a="http://schemas.openxmlformats.org/drawingml/2006/main">
-            <a:off x="666750" y="3190875"/>
-            <a:ext cx="323850" cy="738188"/>
-          </a:xfrm>
-          <a:prstGeom xmlns:a="http://schemas.openxmlformats.org/drawingml/2006/main" prst="rect">
-            <a:avLst/>
-          </a:prstGeom>
-          <a:solidFill xmlns:a="http://schemas.openxmlformats.org/drawingml/2006/main">
-            <a:srgbClr val="1F4D78"/>
-          </a:solidFill>
-          <a:ln xmlns:a="http://schemas.openxmlformats.org/drawingml/2006/main" w="0">
-            <a:noFill/>
-          </a:ln>
-        </p:spPr>
-        <p:txBody>
-          <a:bodyPr xmlns:a="http://schemas.openxmlformats.org/drawingml/2006/main" lIns="0" tIns="0" rIns="0" bIns="0" anchor="ctr"/>
-          <a:lstStyle xmlns:a="http://schemas.openxmlformats.org/drawingml/2006/main"/>
-          <a:p xmlns:a="http://schemas.openxmlformats.org/drawingml/2006/main">
-            <a:pPr algn="ctr">
-              <a:lnSpc>
-                <a:spcPct val="118000"/>
-              </a:lnSpc>
-              <a:buNone/>
-              <a:defRPr sz="1800" b="1">
-                <a:solidFill>
-                  <a:srgbClr val="FFFFFF"/>
-                </a:solidFill>
-                <a:latin typeface="微软雅黑"/>
-                <a:ea typeface="微软雅黑"/>
-                <a:cs typeface="微软雅黑"/>
-              </a:defRPr>
-            </a:pPr>
-            <a:r>
-              <a:rPr sz="1800" b="1">
-                <a:solidFill>
-                  <a:srgbClr val="FFFFFF"/>
-                </a:solidFill>
-                <a:latin typeface="微软雅黑"/>
-                <a:ea typeface="微软雅黑"/>
-                <a:cs typeface="微软雅黑"/>
-              </a:rPr>
-              <a:t>3</a:t>
-            </a:r>
-          </a:p>
-        </p:txBody>
-      </p:sp>
-      <p:sp>
-        <p:nvSpPr>
-          <p:cNvPr id="17" name="row-2">
-            <a:extLst xmlns:a="http://schemas.openxmlformats.org/drawingml/2006/main">
-              <a:ext uri="{FF2B5EF4-FFF2-40B4-BE49-F238E27FC236}">
-                <a16:creationId xmlns:a16="http://schemas.microsoft.com/office/drawing/2014/main" id="{1709FAEC-98D9-48AC-9428-C429985E5B9F}"/>
-              </a:ext>
-            </a:extLst>
-          </p:cNvPr>
-          <p:cNvSpPr>
-            <a:spLocks xmlns:a="http://schemas.openxmlformats.org/drawingml/2006/main" noGrp="1"/>
-          </p:cNvSpPr>
-          <p:nvPr/>
-        </p:nvSpPr>
-        <p:spPr>
-          <a:xfrm xmlns:a="http://schemas.openxmlformats.org/drawingml/2006/main">
-            <a:off x="1143000" y="3190875"/>
-            <a:ext cx="6191250" cy="738188"/>
+              <a:t>完成标志：可运行，或能沿已有记录复现演示。</a:t>
+            </a:r>
+          </a:p>
+        </p:txBody>
+      </p:sp>
+      <p:sp>
+        <p:nvSpPr>
+          <p:cNvPr id="10" name="content-340">
+            <a:extLst xmlns:a="http://schemas.openxmlformats.org/drawingml/2006/main">
+              <a:ext uri="{FF2B5EF4-FFF2-40B4-BE49-F238E27FC236}">
+                <a16:creationId xmlns:a16="http://schemas.microsoft.com/office/drawing/2014/main" id="{0D7D37A5-845E-4629-9A1D-BE2792115CBE}"/>
+              </a:ext>
+            </a:extLst>
+          </p:cNvPr>
+          <p:cNvSpPr>
+            <a:spLocks xmlns:a="http://schemas.openxmlformats.org/drawingml/2006/main" noGrp="1"/>
+          </p:cNvSpPr>
+          <p:nvPr/>
+        </p:nvSpPr>
+        <p:spPr>
+          <a:xfrm xmlns:a="http://schemas.openxmlformats.org/drawingml/2006/main">
+            <a:off x="609600" y="4330065"/>
+            <a:ext cx="10972800" cy="432435"/>
           </a:xfrm>
           <a:prstGeom xmlns:a="http://schemas.openxmlformats.org/drawingml/2006/main" prst="rect">
             <a:avLst/>
@@ -12250,7 +11789,7 @@
           </a:ln>
         </p:spPr>
         <p:txBody>
-          <a:bodyPr xmlns:a="http://schemas.openxmlformats.org/drawingml/2006/main" lIns="0" tIns="0" rIns="0" bIns="0" anchor="ctr"/>
+          <a:bodyPr xmlns:a="http://schemas.openxmlformats.org/drawingml/2006/main" lIns="0" tIns="0" rIns="0" bIns="0" anchor="t"/>
           <a:lstStyle xmlns:a="http://schemas.openxmlformats.org/drawingml/2006/main"/>
           <a:p xmlns:a="http://schemas.openxmlformats.org/drawingml/2006/main">
             <a:pPr algn="l">
@@ -12258,9 +11797,9 @@
                 <a:spcPct val="118000"/>
               </a:lnSpc>
               <a:buNone/>
-              <a:defRPr sz="2200" b="0">
-                <a:solidFill>
-                  <a:srgbClr val="27333D"/>
+              <a:defRPr sz="2400" b="0">
+                <a:solidFill>
+                  <a:srgbClr val="1F4D78"/>
                 </a:solidFill>
                 <a:latin typeface="微软雅黑"/>
                 <a:ea typeface="微软雅黑"/>
@@ -12268,399 +11807,15 @@
               </a:defRPr>
             </a:pPr>
             <a:r>
-              <a:rPr sz="2200" b="0">
-                <a:solidFill>
-                  <a:srgbClr val="27333D"/>
+              <a:rPr sz="2400" b="0">
+                <a:solidFill>
+                  <a:srgbClr val="1F4D78"/>
                 </a:solidFill>
                 <a:latin typeface="微软雅黑"/>
                 <a:ea typeface="微软雅黑"/>
                 <a:cs typeface="微软雅黑"/>
               </a:rPr>
-              <a:t>建立最小目录与运行路径</a:t>
-            </a:r>
-          </a:p>
-        </p:txBody>
-      </p:sp>
-      <p:sp>
-        <p:nvSpPr>
-          <p:cNvPr id="18" name="row-rule-2">
-            <a:extLst xmlns:a="http://schemas.openxmlformats.org/drawingml/2006/main">
-              <a:ext uri="{FF2B5EF4-FFF2-40B4-BE49-F238E27FC236}">
-                <a16:creationId xmlns:a16="http://schemas.microsoft.com/office/drawing/2014/main" id="{8D665E54-29BA-46B9-ACAD-7AB46C318626}"/>
-              </a:ext>
-            </a:extLst>
-          </p:cNvPr>
-          <p:cNvSpPr>
-            <a:spLocks xmlns:a="http://schemas.openxmlformats.org/drawingml/2006/main" noGrp="1"/>
-          </p:cNvSpPr>
-          <p:nvPr/>
-        </p:nvSpPr>
-        <p:spPr>
-          <a:xfrm xmlns:a="http://schemas.openxmlformats.org/drawingml/2006/main">
-            <a:off x="1143000" y="3967163"/>
-            <a:ext cx="6191250" cy="14288"/>
-          </a:xfrm>
-          <a:prstGeom xmlns:a="http://schemas.openxmlformats.org/drawingml/2006/main" prst="rect">
-            <a:avLst/>
-          </a:prstGeom>
-          <a:solidFill xmlns:a="http://schemas.openxmlformats.org/drawingml/2006/main">
-            <a:srgbClr val="CDD5DB"/>
-          </a:solidFill>
-          <a:ln xmlns:a="http://schemas.openxmlformats.org/drawingml/2006/main" w="0">
-            <a:noFill/>
-          </a:ln>
-        </p:spPr>
-      </p:sp>
-      <p:sp>
-        <p:nvSpPr>
-          <p:cNvPr id="19" name="num-3">
-            <a:extLst xmlns:a="http://schemas.openxmlformats.org/drawingml/2006/main">
-              <a:ext uri="{FF2B5EF4-FFF2-40B4-BE49-F238E27FC236}">
-                <a16:creationId xmlns:a16="http://schemas.microsoft.com/office/drawing/2014/main" id="{421D16FC-C4B3-42F5-A977-CA512C146F84}"/>
-              </a:ext>
-            </a:extLst>
-          </p:cNvPr>
-          <p:cNvSpPr>
-            <a:spLocks xmlns:a="http://schemas.openxmlformats.org/drawingml/2006/main" noGrp="1"/>
-          </p:cNvSpPr>
-          <p:nvPr/>
-        </p:nvSpPr>
-        <p:spPr>
-          <a:xfrm xmlns:a="http://schemas.openxmlformats.org/drawingml/2006/main">
-            <a:off x="666750" y="4024313"/>
-            <a:ext cx="323850" cy="738188"/>
-          </a:xfrm>
-          <a:prstGeom xmlns:a="http://schemas.openxmlformats.org/drawingml/2006/main" prst="rect">
-            <a:avLst/>
-          </a:prstGeom>
-          <a:solidFill xmlns:a="http://schemas.openxmlformats.org/drawingml/2006/main">
-            <a:srgbClr val="C8161E"/>
-          </a:solidFill>
-          <a:ln xmlns:a="http://schemas.openxmlformats.org/drawingml/2006/main" w="0">
-            <a:noFill/>
-          </a:ln>
-        </p:spPr>
-        <p:txBody>
-          <a:bodyPr xmlns:a="http://schemas.openxmlformats.org/drawingml/2006/main" lIns="0" tIns="0" rIns="0" bIns="0" anchor="ctr"/>
-          <a:lstStyle xmlns:a="http://schemas.openxmlformats.org/drawingml/2006/main"/>
-          <a:p xmlns:a="http://schemas.openxmlformats.org/drawingml/2006/main">
-            <a:pPr algn="ctr">
-              <a:lnSpc>
-                <a:spcPct val="118000"/>
-              </a:lnSpc>
-              <a:buNone/>
-              <a:defRPr sz="1800" b="1">
-                <a:solidFill>
-                  <a:srgbClr val="C8161E"/>
-                </a:solidFill>
-                <a:latin typeface="微软雅黑"/>
-                <a:ea typeface="微软雅黑"/>
-                <a:cs typeface="微软雅黑"/>
-              </a:defRPr>
-            </a:pPr>
-            <a:r>
-              <a:rPr sz="1800" b="1">
-                <a:solidFill>
-                  <a:srgbClr val="FFFFFF"/>
-                </a:solidFill>
-                <a:latin typeface="微软雅黑"/>
-                <a:ea typeface="微软雅黑"/>
-                <a:cs typeface="微软雅黑"/>
-              </a:rPr>
-              <a:t>4</a:t>
-            </a:r>
-          </a:p>
-        </p:txBody>
-      </p:sp>
-      <p:sp>
-        <p:nvSpPr>
-          <p:cNvPr id="20" name="row-3">
-            <a:extLst xmlns:a="http://schemas.openxmlformats.org/drawingml/2006/main">
-              <a:ext uri="{FF2B5EF4-FFF2-40B4-BE49-F238E27FC236}">
-                <a16:creationId xmlns:a16="http://schemas.microsoft.com/office/drawing/2014/main" id="{A8135100-7A53-4CA7-822E-86B37EA16951}"/>
-              </a:ext>
-            </a:extLst>
-          </p:cNvPr>
-          <p:cNvSpPr>
-            <a:spLocks xmlns:a="http://schemas.openxmlformats.org/drawingml/2006/main" noGrp="1"/>
-          </p:cNvSpPr>
-          <p:nvPr/>
-        </p:nvSpPr>
-        <p:spPr>
-          <a:xfrm xmlns:a="http://schemas.openxmlformats.org/drawingml/2006/main">
-            <a:off x="1143000" y="4024313"/>
-            <a:ext cx="6191250" cy="738188"/>
-          </a:xfrm>
-          <a:prstGeom xmlns:a="http://schemas.openxmlformats.org/drawingml/2006/main" prst="rect">
-            <a:avLst/>
-          </a:prstGeom>
-          <a:noFill xmlns:a="http://schemas.openxmlformats.org/drawingml/2006/main"/>
-          <a:ln xmlns:a="http://schemas.openxmlformats.org/drawingml/2006/main" w="0">
-            <a:noFill/>
-          </a:ln>
-        </p:spPr>
-        <p:txBody>
-          <a:bodyPr xmlns:a="http://schemas.openxmlformats.org/drawingml/2006/main" lIns="0" tIns="0" rIns="0" bIns="0" anchor="ctr"/>
-          <a:lstStyle xmlns:a="http://schemas.openxmlformats.org/drawingml/2006/main"/>
-          <a:p xmlns:a="http://schemas.openxmlformats.org/drawingml/2006/main">
-            <a:pPr algn="l">
-              <a:lnSpc>
-                <a:spcPct val="118000"/>
-              </a:lnSpc>
-              <a:buNone/>
-              <a:defRPr sz="2200" b="0">
-                <a:solidFill>
-                  <a:srgbClr val="27333D"/>
-                </a:solidFill>
-                <a:latin typeface="微软雅黑"/>
-                <a:ea typeface="微软雅黑"/>
-                <a:cs typeface="微软雅黑"/>
-              </a:defRPr>
-            </a:pPr>
-            <a:r>
-              <a:rPr sz="2200" b="0">
-                <a:solidFill>
-                  <a:srgbClr val="27333D"/>
-                </a:solidFill>
-                <a:latin typeface="微软雅黑"/>
-                <a:ea typeface="微软雅黑"/>
-                <a:cs typeface="微软雅黑"/>
-              </a:rPr>
-              <a:t>保留一条 trace 与失败恢复</a:t>
-            </a:r>
-          </a:p>
-        </p:txBody>
-      </p:sp>
-      <p:sp>
-        <p:nvSpPr>
-          <p:cNvPr id="21" name="practice-side">
-            <a:extLst xmlns:a="http://schemas.openxmlformats.org/drawingml/2006/main">
-              <a:ext uri="{FF2B5EF4-FFF2-40B4-BE49-F238E27FC236}">
-                <a16:creationId xmlns:a16="http://schemas.microsoft.com/office/drawing/2014/main" id="{08E09762-0060-4A39-ACA6-4A0CA841584E}"/>
-              </a:ext>
-            </a:extLst>
-          </p:cNvPr>
-          <p:cNvSpPr>
-            <a:spLocks xmlns:a="http://schemas.openxmlformats.org/drawingml/2006/main" noGrp="1"/>
-          </p:cNvSpPr>
-          <p:nvPr/>
-        </p:nvSpPr>
-        <p:spPr>
-          <a:xfrm xmlns:a="http://schemas.openxmlformats.org/drawingml/2006/main">
-            <a:off x="7905750" y="1666875"/>
-            <a:ext cx="3429000" cy="3476625"/>
-          </a:xfrm>
-          <a:prstGeom xmlns:a="http://schemas.openxmlformats.org/drawingml/2006/main" prst="rect">
-            <a:avLst/>
-          </a:prstGeom>
-          <a:solidFill xmlns:a="http://schemas.openxmlformats.org/drawingml/2006/main">
-            <a:srgbClr val="F4F6F8"/>
-          </a:solidFill>
-          <a:ln xmlns:a="http://schemas.openxmlformats.org/drawingml/2006/main" w="0">
-            <a:noFill/>
-          </a:ln>
-        </p:spPr>
-      </p:sp>
-      <p:sp>
-        <p:nvSpPr>
-          <p:cNvPr id="22" name="practice-h">
-            <a:extLst xmlns:a="http://schemas.openxmlformats.org/drawingml/2006/main">
-              <a:ext uri="{FF2B5EF4-FFF2-40B4-BE49-F238E27FC236}">
-                <a16:creationId xmlns:a16="http://schemas.microsoft.com/office/drawing/2014/main" id="{6E584B81-92EB-429D-A107-0E8EEF17F087}"/>
-              </a:ext>
-            </a:extLst>
-          </p:cNvPr>
-          <p:cNvSpPr>
-            <a:spLocks xmlns:a="http://schemas.openxmlformats.org/drawingml/2006/main" noGrp="1"/>
-          </p:cNvSpPr>
-          <p:nvPr/>
-        </p:nvSpPr>
-        <p:spPr>
-          <a:xfrm xmlns:a="http://schemas.openxmlformats.org/drawingml/2006/main">
-            <a:off x="8191500" y="1952625"/>
-            <a:ext cx="2857500" cy="361950"/>
-          </a:xfrm>
-          <a:prstGeom xmlns:a="http://schemas.openxmlformats.org/drawingml/2006/main" prst="rect">
-            <a:avLst/>
-          </a:prstGeom>
-          <a:noFill xmlns:a="http://schemas.openxmlformats.org/drawingml/2006/main"/>
-          <a:ln xmlns:a="http://schemas.openxmlformats.org/drawingml/2006/main" w="0">
-            <a:noFill/>
-          </a:ln>
-        </p:spPr>
-        <p:txBody>
-          <a:bodyPr xmlns:a="http://schemas.openxmlformats.org/drawingml/2006/main" lIns="0" tIns="0" rIns="0" bIns="0" anchor="t"/>
-          <a:lstStyle xmlns:a="http://schemas.openxmlformats.org/drawingml/2006/main"/>
-          <a:p xmlns:a="http://schemas.openxmlformats.org/drawingml/2006/main">
-            <a:pPr algn="l">
-              <a:lnSpc>
-                <a:spcPct val="118000"/>
-              </a:lnSpc>
-              <a:buNone/>
-              <a:defRPr sz="2200" b="1">
-                <a:solidFill>
-                  <a:srgbClr val="1F4D78"/>
-                </a:solidFill>
-                <a:latin typeface="微软雅黑"/>
-                <a:ea typeface="微软雅黑"/>
-                <a:cs typeface="微软雅黑"/>
-              </a:defRPr>
-            </a:pPr>
-            <a:r>
-              <a:rPr sz="2200" b="1">
-                <a:solidFill>
-                  <a:srgbClr val="1F4D78"/>
-                </a:solidFill>
-                <a:latin typeface="微软雅黑"/>
-                <a:ea typeface="微软雅黑"/>
-                <a:cs typeface="微软雅黑"/>
-              </a:rPr>
-              <a:t>课堂完成标志</a:t>
-            </a:r>
-          </a:p>
-        </p:txBody>
-      </p:sp>
-      <p:sp>
-        <p:nvSpPr>
-          <p:cNvPr id="23" name="practice-note">
-            <a:extLst xmlns:a="http://schemas.openxmlformats.org/drawingml/2006/main">
-              <a:ext uri="{FF2B5EF4-FFF2-40B4-BE49-F238E27FC236}">
-                <a16:creationId xmlns:a16="http://schemas.microsoft.com/office/drawing/2014/main" id="{2A4F1657-2D58-4A2B-B4A7-239E122A0CE2}"/>
-              </a:ext>
-            </a:extLst>
-          </p:cNvPr>
-          <p:cNvSpPr>
-            <a:spLocks xmlns:a="http://schemas.openxmlformats.org/drawingml/2006/main" noGrp="1"/>
-          </p:cNvSpPr>
-          <p:nvPr/>
-        </p:nvSpPr>
-        <p:spPr>
-          <a:xfrm xmlns:a="http://schemas.openxmlformats.org/drawingml/2006/main">
-            <a:off x="8191500" y="2619375"/>
-            <a:ext cx="2762250" cy="1428750"/>
-          </a:xfrm>
-          <a:prstGeom xmlns:a="http://schemas.openxmlformats.org/drawingml/2006/main" prst="rect">
-            <a:avLst/>
-          </a:prstGeom>
-          <a:noFill xmlns:a="http://schemas.openxmlformats.org/drawingml/2006/main"/>
-          <a:ln xmlns:a="http://schemas.openxmlformats.org/drawingml/2006/main" w="0">
-            <a:noFill/>
-          </a:ln>
-        </p:spPr>
-        <p:txBody>
-          <a:bodyPr xmlns:a="http://schemas.openxmlformats.org/drawingml/2006/main" lIns="0" tIns="0" rIns="0" bIns="0" anchor="t"/>
-          <a:lstStyle xmlns:a="http://schemas.openxmlformats.org/drawingml/2006/main"/>
-          <a:p xmlns:a="http://schemas.openxmlformats.org/drawingml/2006/main">
-            <a:pPr algn="l">
-              <a:lnSpc>
-                <a:spcPct val="118000"/>
-              </a:lnSpc>
-              <a:buNone/>
-              <a:defRPr sz="2200" b="0">
-                <a:solidFill>
-                  <a:srgbClr val="27333D"/>
-                </a:solidFill>
-                <a:latin typeface="微软雅黑"/>
-                <a:ea typeface="微软雅黑"/>
-                <a:cs typeface="微软雅黑"/>
-              </a:defRPr>
-            </a:pPr>
-            <a:r>
-              <a:rPr sz="2200" b="0">
-                <a:solidFill>
-                  <a:srgbClr val="27333D"/>
-                </a:solidFill>
-                <a:latin typeface="微软雅黑"/>
-                <a:ea typeface="微软雅黑"/>
-                <a:cs typeface="微软雅黑"/>
-              </a:rPr>
-              <a:t>可运行</a:t>
-            </a:r>
-          </a:p>
-          <a:p xmlns:a="http://schemas.openxmlformats.org/drawingml/2006/main">
-            <a:pPr algn="l">
-              <a:lnSpc>
-                <a:spcPct val="118000"/>
-              </a:lnSpc>
-              <a:buNone/>
-              <a:defRPr sz="2200" b="0">
-                <a:solidFill>
-                  <a:srgbClr val="27333D"/>
-                </a:solidFill>
-                <a:latin typeface="微软雅黑"/>
-                <a:ea typeface="微软雅黑"/>
-                <a:cs typeface="微软雅黑"/>
-              </a:defRPr>
-            </a:pPr>
-            <a:r>
-              <a:rPr sz="2200" b="0">
-                <a:solidFill>
-                  <a:srgbClr val="27333D"/>
-                </a:solidFill>
-                <a:latin typeface="微软雅黑"/>
-                <a:ea typeface="微软雅黑"/>
-                <a:cs typeface="微软雅黑"/>
-              </a:rPr>
-              <a:t>或</a:t>
-            </a:r>
-          </a:p>
-          <a:p xmlns:a="http://schemas.openxmlformats.org/drawingml/2006/main">
-            <a:pPr algn="l">
-              <a:lnSpc>
-                <a:spcPct val="118000"/>
-              </a:lnSpc>
-              <a:buNone/>
-              <a:defRPr sz="2200" b="0">
-                <a:solidFill>
-                  <a:srgbClr val="27333D"/>
-                </a:solidFill>
-                <a:latin typeface="微软雅黑"/>
-                <a:ea typeface="微软雅黑"/>
-                <a:cs typeface="微软雅黑"/>
-              </a:defRPr>
-            </a:pPr>
-            <a:r>
-              <a:rPr sz="2200" b="0">
-                <a:solidFill>
-                  <a:srgbClr val="27333D"/>
-                </a:solidFill>
-                <a:latin typeface="微软雅黑"/>
-                <a:ea typeface="微软雅黑"/>
-                <a:cs typeface="微软雅黑"/>
-              </a:rPr>
-              <a:t>可复现演示</a:t>
-            </a:r>
-          </a:p>
-          <a:p xmlns:a="http://schemas.openxmlformats.org/drawingml/2006/main">
-            <a:r>
-              <a:t/>
-            </a:r>
-          </a:p>
-          <a:p xmlns:a="http://schemas.openxmlformats.org/drawingml/2006/main">
-            <a:pPr algn="l">
-              <a:lnSpc>
-                <a:spcPct val="118000"/>
-              </a:lnSpc>
-              <a:buNone/>
-              <a:defRPr sz="2200" b="0">
-                <a:solidFill>
-                  <a:srgbClr val="27333D"/>
-                </a:solidFill>
-                <a:latin typeface="微软雅黑"/>
-                <a:ea typeface="微软雅黑"/>
-                <a:cs typeface="微软雅黑"/>
-              </a:defRPr>
-            </a:pPr>
-            <a:r>
-              <a:rPr sz="2200" b="0">
-                <a:solidFill>
-                  <a:srgbClr val="27333D"/>
-                </a:solidFill>
-                <a:latin typeface="微软雅黑"/>
-                <a:ea typeface="微软雅黑"/>
-                <a:cs typeface="微软雅黑"/>
-              </a:rPr>
-              <a:t>不要求课堂跑完 120 输出</a:t>
+              <a:t>课堂无需跑完 6 份输出；课后补齐完整契约。</a:t>
             </a:r>
           </a:p>
         </p:txBody>
@@ -12801,7 +11956,7 @@
           <p:nvPr/>
         </p:nvPicPr>
         <p:blipFill>
-          <a:blip xmlns:r="http://schemas.openxmlformats.org/officeDocument/2006/relationships" xmlns:a="http://schemas.openxmlformats.org/drawingml/2006/main" r:embed="Rfc1c8b273c9849e7"/>
+          <a:blip xmlns:r="http://schemas.openxmlformats.org/officeDocument/2006/relationships" xmlns:a="http://schemas.openxmlformats.org/drawingml/2006/main" r:embed="Rd61cc8d372ae405c"/>
           <a:stretch xmlns:a="http://schemas.openxmlformats.org/drawingml/2006/main"/>
         </p:blipFill>
         <p:spPr>
@@ -13660,7 +12815,7 @@
           <p:nvPr/>
         </p:nvPicPr>
         <p:blipFill>
-          <a:blip xmlns:r="http://schemas.openxmlformats.org/officeDocument/2006/relationships" xmlns:a="http://schemas.openxmlformats.org/drawingml/2006/main" r:embed="R56cac36951584cda"/>
+          <a:blip xmlns:r="http://schemas.openxmlformats.org/officeDocument/2006/relationships" xmlns:a="http://schemas.openxmlformats.org/drawingml/2006/main" r:embed="Rfa04184528d449fa"/>
           <a:stretch xmlns:a="http://schemas.openxmlformats.org/drawingml/2006/main"/>
         </p:blipFill>
         <p:spPr>
@@ -14341,7 +13496,7 @@
           <p:nvPr/>
         </p:nvPicPr>
         <p:blipFill>
-          <a:blip xmlns:r="http://schemas.openxmlformats.org/officeDocument/2006/relationships" xmlns:a="http://schemas.openxmlformats.org/drawingml/2006/main" r:embed="R1409537be4184854"/>
+          <a:blip xmlns:r="http://schemas.openxmlformats.org/officeDocument/2006/relationships" xmlns:a="http://schemas.openxmlformats.org/drawingml/2006/main" r:embed="R9b23b49ec5594cb5"/>
           <a:stretch xmlns:a="http://schemas.openxmlformats.org/drawingml/2006/main"/>
         </p:blipFill>
         <p:spPr>
@@ -16146,7 +15301,7 @@
           <p:nvPr/>
         </p:nvPicPr>
         <p:blipFill>
-          <a:blip xmlns:r="http://schemas.openxmlformats.org/officeDocument/2006/relationships" xmlns:a="http://schemas.openxmlformats.org/drawingml/2006/main" r:embed="R09e5d4544aed4ba7"/>
+          <a:blip xmlns:r="http://schemas.openxmlformats.org/officeDocument/2006/relationships" xmlns:a="http://schemas.openxmlformats.org/drawingml/2006/main" r:embed="Rdb6cd8db1ba14071"/>
           <a:stretch xmlns:a="http://schemas.openxmlformats.org/drawingml/2006/main"/>
         </p:blipFill>
         <p:spPr>
@@ -17182,7 +16337,7 @@
           <p:nvPr/>
         </p:nvPicPr>
         <p:blipFill>
-          <a:blip xmlns:r="http://schemas.openxmlformats.org/officeDocument/2006/relationships" xmlns:a="http://schemas.openxmlformats.org/drawingml/2006/main" r:embed="R066c7fededb44dcc"/>
+          <a:blip xmlns:r="http://schemas.openxmlformats.org/officeDocument/2006/relationships" xmlns:a="http://schemas.openxmlformats.org/drawingml/2006/main" r:embed="R9e926a3581d54d46"/>
           <a:stretch xmlns:a="http://schemas.openxmlformats.org/drawingml/2006/main"/>
         </p:blipFill>
         <p:spPr>
@@ -18208,7 +17363,7 @@
           <p:nvPr/>
         </p:nvPicPr>
         <p:blipFill>
-          <a:blip xmlns:r="http://schemas.openxmlformats.org/officeDocument/2006/relationships" xmlns:a="http://schemas.openxmlformats.org/drawingml/2006/main" r:embed="Ra48d2836e151400a"/>
+          <a:blip xmlns:r="http://schemas.openxmlformats.org/officeDocument/2006/relationships" xmlns:a="http://schemas.openxmlformats.org/drawingml/2006/main" r:embed="Rc841f731bc2f4791"/>
           <a:stretch xmlns:a="http://schemas.openxmlformats.org/drawingml/2006/main"/>
         </p:blipFill>
         <p:spPr>
@@ -19048,7 +18203,7 @@
           <p:nvPr/>
         </p:nvPicPr>
         <p:blipFill>
-          <a:blip xmlns:r="http://schemas.openxmlformats.org/officeDocument/2006/relationships" xmlns:a="http://schemas.openxmlformats.org/drawingml/2006/main" r:embed="R1369680a133d457f"/>
+          <a:blip xmlns:r="http://schemas.openxmlformats.org/officeDocument/2006/relationships" xmlns:a="http://schemas.openxmlformats.org/drawingml/2006/main" r:embed="Rae60577d97fd4a73"/>
           <a:stretch xmlns:a="http://schemas.openxmlformats.org/drawingml/2006/main"/>
         </p:blipFill>
         <p:spPr>
@@ -19817,7 +18972,7 @@
           <p:nvPr/>
         </p:nvPicPr>
         <p:blipFill>
-          <a:blip xmlns:r="http://schemas.openxmlformats.org/officeDocument/2006/relationships" xmlns:a="http://schemas.openxmlformats.org/drawingml/2006/main" r:embed="R2135a7a1a0374068"/>
+          <a:blip xmlns:r="http://schemas.openxmlformats.org/officeDocument/2006/relationships" xmlns:a="http://schemas.openxmlformats.org/drawingml/2006/main" r:embed="R4ddf5c403bca49c5"/>
           <a:stretch xmlns:a="http://schemas.openxmlformats.org/drawingml/2006/main"/>
         </p:blipFill>
         <p:spPr>
@@ -20754,76 +19909,417 @@
           </a:p>
         </p:txBody>
       </p:sp>
-      <p:sp>
-        <p:nvSpPr>
-          <p:cNvPr id="6" name="brand-header">
-            <a:extLst xmlns:a="http://schemas.openxmlformats.org/drawingml/2006/main">
-              <a:ext uri="{FF2B5EF4-FFF2-40B4-BE49-F238E27FC236}">
-                <a16:creationId xmlns:a16="http://schemas.microsoft.com/office/drawing/2014/main" id="{75FE2AE4-82E1-44B6-BB97-AA986C9A6A5F}"/>
-              </a:ext>
-            </a:extLst>
-          </p:cNvPr>
-          <p:cNvSpPr>
-            <a:spLocks xmlns:a="http://schemas.openxmlformats.org/drawingml/2006/main" noGrp="1"/>
-          </p:cNvSpPr>
-          <p:nvPr/>
-        </p:nvSpPr>
-        <p:spPr>
-          <a:xfrm xmlns:a="http://schemas.openxmlformats.org/drawingml/2006/main">
-            <a:off x="0" y="0"/>
-            <a:ext cx="11887200" cy="685800"/>
-          </a:xfrm>
-          <a:prstGeom xmlns:a="http://schemas.openxmlformats.org/drawingml/2006/main" prst="rect">
-            <a:avLst/>
-          </a:prstGeom>
-          <a:solidFill xmlns:a="http://schemas.openxmlformats.org/drawingml/2006/main">
-            <a:srgbClr val="C8161E"/>
-          </a:solidFill>
-          <a:ln xmlns:a="http://schemas.openxmlformats.org/drawingml/2006/main" w="0">
-            <a:noFill/>
-          </a:ln>
-        </p:spPr>
-      </p:sp>
-      <p:pic>
-        <p:nvPicPr>
-          <p:cNvPr id="37" name=""/>
-          <p:cNvPicPr>
-            <a:picLocks xmlns:a="http://schemas.openxmlformats.org/drawingml/2006/main" noChangeAspect="1"/>
-          </p:cNvPicPr>
-          <p:nvPr/>
-        </p:nvPicPr>
-        <p:blipFill>
-          <a:blip xmlns:r="http://schemas.openxmlformats.org/officeDocument/2006/relationships" xmlns:a="http://schemas.openxmlformats.org/drawingml/2006/main" r:embed="R6e5c219a23734c65"/>
-          <a:stretch xmlns:a="http://schemas.openxmlformats.org/drawingml/2006/main"/>
-        </p:blipFill>
-        <p:spPr>
-          <a:xfrm xmlns:a="http://schemas.openxmlformats.org/drawingml/2006/main">
-            <a:off x="323850" y="76200"/>
-            <a:ext cx="533400" cy="533400"/>
-          </a:xfrm>
-          <a:prstGeom xmlns:a="http://schemas.openxmlformats.org/drawingml/2006/main" prst="rect">
-            <a:avLst/>
-          </a:prstGeom>
-        </p:spPr>
-      </p:pic>
-      <p:sp>
-        <p:nvSpPr>
-          <p:cNvPr id="8" name="brand-title">
-            <a:extLst xmlns:a="http://schemas.openxmlformats.org/drawingml/2006/main">
-              <a:ext uri="{FF2B5EF4-FFF2-40B4-BE49-F238E27FC236}">
-                <a16:creationId xmlns:a16="http://schemas.microsoft.com/office/drawing/2014/main" id="{A1BDD0C0-982F-4D7C-A644-F845DBFFDF41}"/>
-              </a:ext>
-            </a:extLst>
-          </p:cNvPr>
-          <p:cNvSpPr>
-            <a:spLocks xmlns:a="http://schemas.openxmlformats.org/drawingml/2006/main" noGrp="1"/>
-          </p:cNvSpPr>
-          <p:nvPr/>
-        </p:nvSpPr>
-        <p:spPr>
-          <a:xfrm xmlns:a="http://schemas.openxmlformats.org/drawingml/2006/main">
-            <a:off x="1028700" y="66675"/>
-            <a:ext cx="10477500" cy="552450"/>
+      <p:graphicFrame>
+        <p:nvGraphicFramePr>
+          <p:cNvPr id="10" name="native-table-320"/>
+          <p:cNvGraphicFramePr/>
+          <p:nvPr/>
+        </p:nvGraphicFramePr>
+        <p:xfrm>
+          <a:off xmlns:a="http://schemas.openxmlformats.org/drawingml/2006/main" x="609600" y="1476375"/>
+          <a:ext xmlns:a="http://schemas.openxmlformats.org/drawingml/2006/main" cx="10972800" cy="2714625"/>
+        </p:xfrm>
+        <a:graphic xmlns:a="http://schemas.openxmlformats.org/drawingml/2006/main">
+          <a:graphicData uri="http://schemas.openxmlformats.org/drawingml/2006/table">
+            <a:tbl>
+              <a:tblPr/>
+              <a:tblGrid>
+                <a:gridCol w="1981200"/>
+                <a:gridCol w="4495800"/>
+                <a:gridCol w="4495800"/>
+              </a:tblGrid>
+              <a:tr h="542925">
+                <a:tc>
+                  <a:txBody>
+                    <a:bodyPr/>
+                    <a:lstStyle/>
+                    <a:p>
+                      <a:r>
+                        <a:rPr sz="2000" b="1">
+                          <a:solidFill>
+                            <a:srgbClr val="1F4D78"/>
+                          </a:solidFill>
+                          <a:latin typeface="微软雅黑"/>
+                          <a:ea typeface="微软雅黑"/>
+                          <a:cs typeface="微软雅黑"/>
+                        </a:rPr>
+                        <a:t>比较轴</a:t>
+                      </a:r>
+                    </a:p>
+                  </a:txBody>
+                  <a:tcPr marL="123825" marR="123825" marT="85725" marB="85725" anchor="ctr">
+                    <a:solidFill>
+                      <a:srgbClr val="F4F6F8"/>
+                    </a:solidFill>
+                  </a:tcPr>
+                </a:tc>
+                <a:tc>
+                  <a:txBody>
+                    <a:bodyPr/>
+                    <a:lstStyle/>
+                    <a:p>
+                      <a:r>
+                        <a:rPr sz="2000" b="1">
+                          <a:solidFill>
+                            <a:srgbClr val="1F4D78"/>
+                          </a:solidFill>
+                          <a:latin typeface="微软雅黑"/>
+                          <a:ea typeface="微软雅黑"/>
+                          <a:cs typeface="微软雅黑"/>
+                        </a:rPr>
+                        <a:t>AutoResearch · 228791f</a:t>
+                      </a:r>
+                    </a:p>
+                  </a:txBody>
+                  <a:tcPr marL="123825" marR="123825" marT="85725" marB="85725" anchor="ctr">
+                    <a:solidFill>
+                      <a:srgbClr val="F4F6F8"/>
+                    </a:solidFill>
+                  </a:tcPr>
+                </a:tc>
+                <a:tc>
+                  <a:txBody>
+                    <a:bodyPr/>
+                    <a:lstStyle/>
+                    <a:p>
+                      <a:r>
+                        <a:rPr sz="2000" b="1">
+                          <a:solidFill>
+                            <a:srgbClr val="1F4D78"/>
+                          </a:solidFill>
+                          <a:latin typeface="微软雅黑"/>
+                          <a:ea typeface="微软雅黑"/>
+                          <a:cs typeface="微软雅黑"/>
+                        </a:rPr>
+                        <a:t>课程冻结队列</a:t>
+                      </a:r>
+                    </a:p>
+                  </a:txBody>
+                  <a:tcPr marL="123825" marR="123825" marT="85725" marB="85725" anchor="ctr">
+                    <a:solidFill>
+                      <a:srgbClr val="F4F6F8"/>
+                    </a:solidFill>
+                  </a:tcPr>
+                </a:tc>
+              </a:tr>
+              <a:tr h="542925">
+                <a:tc>
+                  <a:txBody>
+                    <a:bodyPr/>
+                    <a:lstStyle/>
+                    <a:p>
+                      <a:r>
+                        <a:rPr sz="2000">
+                          <a:solidFill>
+                            <a:srgbClr val="27333D"/>
+                          </a:solidFill>
+                          <a:latin typeface="微软雅黑"/>
+                          <a:ea typeface="微软雅黑"/>
+                          <a:cs typeface="微软雅黑"/>
+                        </a:rPr>
+                        <a:t>方法</a:t>
+                      </a:r>
+                    </a:p>
+                  </a:txBody>
+                  <a:tcPr marL="123825" marR="123825" marT="85725" marB="85725" anchor="ctr">
+                    <a:solidFill>
+                      <a:srgbClr val="FFFFFF"/>
+                    </a:solidFill>
+                  </a:tcPr>
+                </a:tc>
+                <a:tc>
+                  <a:txBody>
+                    <a:bodyPr/>
+                    <a:lstStyle/>
+                    <a:p>
+                      <a:r>
+                        <a:rPr sz="2000">
+                          <a:solidFill>
+                            <a:srgbClr val="27333D"/>
+                          </a:solidFill>
+                          <a:latin typeface="微软雅黑"/>
+                          <a:ea typeface="微软雅黑"/>
+                          <a:cs typeface="微软雅黑"/>
+                        </a:rPr>
+                        <a:t>修改 train.py 并评价</a:t>
+                      </a:r>
+                    </a:p>
+                  </a:txBody>
+                  <a:tcPr marL="123825" marR="123825" marT="85725" marB="85725" anchor="ctr">
+                    <a:solidFill>
+                      <a:srgbClr val="FFFFFF"/>
+                    </a:solidFill>
+                  </a:tcPr>
+                </a:tc>
+                <a:tc>
+                  <a:txBody>
+                    <a:bodyPr/>
+                    <a:lstStyle/>
+                    <a:p>
+                      <a:r>
+                        <a:rPr sz="2000">
+                          <a:solidFill>
+                            <a:srgbClr val="27333D"/>
+                          </a:solidFill>
+                          <a:latin typeface="微软雅黑"/>
+                          <a:ea typeface="微软雅黑"/>
+                          <a:cs typeface="微软雅黑"/>
+                        </a:rPr>
+                        <a:t>输入、方法与配置固定</a:t>
+                      </a:r>
+                    </a:p>
+                  </a:txBody>
+                  <a:tcPr marL="123825" marR="123825" marT="85725" marB="85725" anchor="ctr">
+                    <a:solidFill>
+                      <a:srgbClr val="FFFFFF"/>
+                    </a:solidFill>
+                  </a:tcPr>
+                </a:tc>
+              </a:tr>
+              <a:tr h="542925">
+                <a:tc>
+                  <a:txBody>
+                    <a:bodyPr/>
+                    <a:lstStyle/>
+                    <a:p>
+                      <a:r>
+                        <a:rPr sz="2000">
+                          <a:solidFill>
+                            <a:srgbClr val="27333D"/>
+                          </a:solidFill>
+                          <a:latin typeface="微软雅黑"/>
+                          <a:ea typeface="微软雅黑"/>
+                          <a:cs typeface="微软雅黑"/>
+                        </a:rPr>
+                        <a:t>结果处理</a:t>
+                      </a:r>
+                    </a:p>
+                  </a:txBody>
+                  <a:tcPr marL="123825" marR="123825" marT="85725" marB="85725" anchor="ctr">
+                    <a:solidFill>
+                      <a:srgbClr val="FFFFFF"/>
+                    </a:solidFill>
+                  </a:tcPr>
+                </a:tc>
+                <a:tc>
+                  <a:txBody>
+                    <a:bodyPr/>
+                    <a:lstStyle/>
+                    <a:p>
+                      <a:r>
+                        <a:rPr sz="2000">
+                          <a:solidFill>
+                            <a:srgbClr val="27333D"/>
+                          </a:solidFill>
+                          <a:latin typeface="微软雅黑"/>
+                          <a:ea typeface="微软雅黑"/>
+                          <a:cs typeface="微软雅黑"/>
+                        </a:rPr>
+                        <a:t>按 val_bpb 保留或回退</a:t>
+                      </a:r>
+                    </a:p>
+                  </a:txBody>
+                  <a:tcPr marL="123825" marR="123825" marT="85725" marB="85725" anchor="ctr">
+                    <a:solidFill>
+                      <a:srgbClr val="FFFFFF"/>
+                    </a:solidFill>
+                  </a:tcPr>
+                </a:tc>
+                <a:tc>
+                  <a:txBody>
+                    <a:bodyPr/>
+                    <a:lstStyle/>
+                    <a:p>
+                      <a:r>
+                        <a:rPr sz="2000">
+                          <a:solidFill>
+                            <a:srgbClr val="27333D"/>
+                          </a:solidFill>
+                          <a:latin typeface="微软雅黑"/>
+                          <a:ea typeface="微软雅黑"/>
+                          <a:cs typeface="微软雅黑"/>
+                        </a:rPr>
+                        <a:t>回放并保留全部输出</a:t>
+                      </a:r>
+                    </a:p>
+                  </a:txBody>
+                  <a:tcPr marL="123825" marR="123825" marT="85725" marB="85725" anchor="ctr">
+                    <a:solidFill>
+                      <a:srgbClr val="FFFFFF"/>
+                    </a:solidFill>
+                  </a:tcPr>
+                </a:tc>
+              </a:tr>
+              <a:tr h="542925">
+                <a:tc>
+                  <a:txBody>
+                    <a:bodyPr/>
+                    <a:lstStyle/>
+                    <a:p>
+                      <a:r>
+                        <a:rPr sz="2000">
+                          <a:solidFill>
+                            <a:srgbClr val="27333D"/>
+                          </a:solidFill>
+                          <a:latin typeface="微软雅黑"/>
+                          <a:ea typeface="微软雅黑"/>
+                          <a:cs typeface="微软雅黑"/>
+                        </a:rPr>
+                        <a:t>账本</a:t>
+                      </a:r>
+                    </a:p>
+                  </a:txBody>
+                  <a:tcPr marL="123825" marR="123825" marT="85725" marB="85725" anchor="ctr">
+                    <a:solidFill>
+                      <a:srgbClr val="FFFFFF"/>
+                    </a:solidFill>
+                  </a:tcPr>
+                </a:tc>
+                <a:tc>
+                  <a:txBody>
+                    <a:bodyPr/>
+                    <a:lstStyle/>
+                    <a:p>
+                      <a:r>
+                        <a:rPr sz="2000">
+                          <a:solidFill>
+                            <a:srgbClr val="27333D"/>
+                          </a:solidFill>
+                          <a:latin typeface="微软雅黑"/>
+                          <a:ea typeface="微软雅黑"/>
+                          <a:cs typeface="微软雅黑"/>
+                        </a:rPr>
+                        <a:t>keep / discard / crash</a:t>
+                      </a:r>
+                    </a:p>
+                  </a:txBody>
+                  <a:tcPr marL="123825" marR="123825" marT="85725" marB="85725" anchor="ctr">
+                    <a:solidFill>
+                      <a:srgbClr val="FFFFFF"/>
+                    </a:solidFill>
+                  </a:tcPr>
+                </a:tc>
+                <a:tc>
+                  <a:txBody>
+                    <a:bodyPr/>
+                    <a:lstStyle/>
+                    <a:p>
+                      <a:r>
+                        <a:rPr sz="2000">
+                          <a:solidFill>
+                            <a:srgbClr val="27333D"/>
+                          </a:solidFill>
+                          <a:latin typeface="微软雅黑"/>
+                          <a:ea typeface="微软雅黑"/>
+                          <a:cs typeface="微软雅黑"/>
+                        </a:rPr>
+                        <a:t>失败留账，只补未完成项</a:t>
+                      </a:r>
+                    </a:p>
+                  </a:txBody>
+                  <a:tcPr marL="123825" marR="123825" marT="85725" marB="85725" anchor="ctr">
+                    <a:solidFill>
+                      <a:srgbClr val="FFFFFF"/>
+                    </a:solidFill>
+                  </a:tcPr>
+                </a:tc>
+              </a:tr>
+              <a:tr h="542925">
+                <a:tc>
+                  <a:txBody>
+                    <a:bodyPr/>
+                    <a:lstStyle/>
+                    <a:p>
+                      <a:r>
+                        <a:rPr sz="2000">
+                          <a:solidFill>
+                            <a:srgbClr val="27333D"/>
+                          </a:solidFill>
+                          <a:latin typeface="微软雅黑"/>
+                          <a:ea typeface="微软雅黑"/>
+                          <a:cs typeface="微软雅黑"/>
+                        </a:rPr>
+                        <a:t>停止</a:t>
+                      </a:r>
+                    </a:p>
+                  </a:txBody>
+                  <a:tcPr marL="123825" marR="123825" marT="85725" marB="85725" anchor="ctr">
+                    <a:solidFill>
+                      <a:srgbClr val="FFFFFF"/>
+                    </a:solidFill>
+                  </a:tcPr>
+                </a:tc>
+                <a:tc>
+                  <a:txBody>
+                    <a:bodyPr/>
+                    <a:lstStyle/>
+                    <a:p>
+                      <a:r>
+                        <a:rPr sz="2000">
+                          <a:solidFill>
+                            <a:srgbClr val="27333D"/>
+                          </a:solidFill>
+                          <a:latin typeface="微软雅黑"/>
+                          <a:ea typeface="微软雅黑"/>
+                          <a:cs typeface="微软雅黑"/>
+                        </a:rPr>
+                        <a:t>外层持续循环，人工中断</a:t>
+                      </a:r>
+                    </a:p>
+                  </a:txBody>
+                  <a:tcPr marL="123825" marR="123825" marT="85725" marB="85725" anchor="ctr">
+                    <a:solidFill>
+                      <a:srgbClr val="FFFFFF"/>
+                    </a:solidFill>
+                  </a:tcPr>
+                </a:tc>
+                <a:tc>
+                  <a:txBody>
+                    <a:bodyPr/>
+                    <a:lstStyle/>
+                    <a:p>
+                      <a:r>
+                        <a:rPr sz="2000">
+                          <a:solidFill>
+                            <a:srgbClr val="27333D"/>
+                          </a:solidFill>
+                          <a:latin typeface="微软雅黑"/>
+                          <a:ea typeface="微软雅黑"/>
+                          <a:cs typeface="微软雅黑"/>
+                        </a:rPr>
+                        <a:t>6 个任务完成即停</a:t>
+                      </a:r>
+                    </a:p>
+                  </a:txBody>
+                  <a:tcPr marL="123825" marR="123825" marT="85725" marB="85725" anchor="ctr">
+                    <a:solidFill>
+                      <a:srgbClr val="FFFFFF"/>
+                    </a:solidFill>
+                  </a:tcPr>
+                </a:tc>
+              </a:tr>
+            </a:tbl>
+          </a:graphicData>
+        </a:graphic>
+      </p:graphicFrame>
+      <p:sp>
+        <p:nvSpPr>
+          <p:cNvPr id="7" name="content-321">
+            <a:extLst xmlns:a="http://schemas.openxmlformats.org/drawingml/2006/main">
+              <a:ext uri="{FF2B5EF4-FFF2-40B4-BE49-F238E27FC236}">
+                <a16:creationId xmlns:a16="http://schemas.microsoft.com/office/drawing/2014/main" id="{62279B09-95B5-47F6-BF83-B5262C1A62DA}"/>
+              </a:ext>
+            </a:extLst>
+          </p:cNvPr>
+          <p:cNvSpPr>
+            <a:spLocks xmlns:a="http://schemas.openxmlformats.org/drawingml/2006/main" noGrp="1"/>
+          </p:cNvSpPr>
+          <p:nvPr/>
+        </p:nvSpPr>
+        <p:spPr>
+          <a:xfrm xmlns:a="http://schemas.openxmlformats.org/drawingml/2006/main">
+            <a:off x="609600" y="4476750"/>
+            <a:ext cx="10972800" cy="386715"/>
           </a:xfrm>
           <a:prstGeom xmlns:a="http://schemas.openxmlformats.org/drawingml/2006/main" prst="rect">
             <a:avLst/>
@@ -20834,7 +20330,7 @@
           </a:ln>
         </p:spPr>
         <p:txBody>
-          <a:bodyPr xmlns:a="http://schemas.openxmlformats.org/drawingml/2006/main" lIns="0" tIns="0" rIns="0" bIns="0" anchor="ctr"/>
+          <a:bodyPr xmlns:a="http://schemas.openxmlformats.org/drawingml/2006/main" lIns="0" tIns="0" rIns="0" bIns="0" anchor="t"/>
           <a:lstStyle xmlns:a="http://schemas.openxmlformats.org/drawingml/2006/main"/>
           <a:p xmlns:a="http://schemas.openxmlformats.org/drawingml/2006/main">
             <a:pPr algn="l">
@@ -20842,9 +20338,9 @@
                 <a:spcPct val="118000"/>
               </a:lnSpc>
               <a:buNone/>
-              <a:defRPr sz="3000" b="1">
-                <a:solidFill>
-                  <a:srgbClr val="FFFFFF"/>
+              <a:defRPr sz="2100" b="0">
+                <a:solidFill>
+                  <a:srgbClr val="27333D"/>
                 </a:solidFill>
                 <a:latin typeface="微软雅黑"/>
                 <a:ea typeface="微软雅黑"/>
@@ -20852,723 +20348,15 @@
               </a:defRPr>
             </a:pPr>
             <a:r>
-              <a:rPr sz="3000" b="1">
-                <a:solidFill>
-                  <a:srgbClr val="FFFFFF"/>
+              <a:rPr sz="2100" b="0">
+                <a:solidFill>
+                  <a:srgbClr val="27333D"/>
                 </a:solidFill>
                 <a:latin typeface="微软雅黑"/>
                 <a:ea typeface="微软雅黑"/>
                 <a:cs typeface="微软雅黑"/>
               </a:rPr>
-              <a:t>方法优化循环与冻结执行队列</a:t>
-            </a:r>
-          </a:p>
-        </p:txBody>
-      </p:sp>
-      <p:sp>
-        <p:nvSpPr>
-          <p:cNvPr id="9" name="source">
-            <a:extLst xmlns:a="http://schemas.openxmlformats.org/drawingml/2006/main">
-              <a:ext uri="{FF2B5EF4-FFF2-40B4-BE49-F238E27FC236}">
-                <a16:creationId xmlns:a16="http://schemas.microsoft.com/office/drawing/2014/main" id="{F0B7D47B-D68E-4DF8-9992-11CAE395755B}"/>
-              </a:ext>
-            </a:extLst>
-          </p:cNvPr>
-          <p:cNvSpPr>
-            <a:spLocks xmlns:a="http://schemas.openxmlformats.org/drawingml/2006/main" noGrp="1"/>
-          </p:cNvSpPr>
-          <p:nvPr/>
-        </p:nvSpPr>
-        <p:spPr>
-          <a:xfrm xmlns:a="http://schemas.openxmlformats.org/drawingml/2006/main">
-            <a:off x="609600" y="6067425"/>
-            <a:ext cx="10763250" cy="209550"/>
-          </a:xfrm>
-          <a:prstGeom xmlns:a="http://schemas.openxmlformats.org/drawingml/2006/main" prst="rect">
-            <a:avLst/>
-          </a:prstGeom>
-          <a:noFill xmlns:a="http://schemas.openxmlformats.org/drawingml/2006/main"/>
-          <a:ln xmlns:a="http://schemas.openxmlformats.org/drawingml/2006/main" w="0">
-            <a:noFill/>
-          </a:ln>
-        </p:spPr>
-        <p:txBody>
-          <a:bodyPr xmlns:a="http://schemas.openxmlformats.org/drawingml/2006/main" lIns="0" tIns="0" rIns="0" bIns="0" anchor="t"/>
-          <a:lstStyle xmlns:a="http://schemas.openxmlformats.org/drawingml/2006/main"/>
-          <a:p xmlns:a="http://schemas.openxmlformats.org/drawingml/2006/main">
-            <a:pPr algn="l">
-              <a:lnSpc>
-                <a:spcPct val="118000"/>
-              </a:lnSpc>
-              <a:buNone/>
-              <a:defRPr sz="1100" b="0">
-                <a:solidFill>
-                  <a:srgbClr val="66727D"/>
-                </a:solidFill>
-                <a:latin typeface="微软雅黑"/>
-                <a:ea typeface="微软雅黑"/>
-                <a:cs typeface="微软雅黑"/>
-              </a:defRPr>
-            </a:pPr>
-            <a:r>
-              <a:rPr sz="1100" b="0">
-                <a:solidFill>
-                  <a:srgbClr val="66727D"/>
-                </a:solidFill>
-                <a:latin typeface="微软雅黑"/>
-                <a:ea typeface="微软雅黑"/>
-                <a:cs typeface="微软雅黑"/>
-              </a:rPr>
-              <a:t>来源：karpathy/autoresearch · program.md · commit 228791f；2026-09-13 核验</a:t>
-            </a:r>
-          </a:p>
-        </p:txBody>
-      </p:sp>
-      <p:sp>
-        <p:nvSpPr>
-          <p:cNvPr id="23" name="left-h">
-            <a:extLst xmlns:a="http://schemas.openxmlformats.org/drawingml/2006/main">
-              <a:ext uri="{FF2B5EF4-FFF2-40B4-BE49-F238E27FC236}">
-                <a16:creationId xmlns:a16="http://schemas.microsoft.com/office/drawing/2014/main" id="{43BAC395-97E1-4455-A596-D81105D7E806}"/>
-              </a:ext>
-            </a:extLst>
-          </p:cNvPr>
-          <p:cNvSpPr>
-            <a:spLocks xmlns:a="http://schemas.openxmlformats.org/drawingml/2006/main" noGrp="1"/>
-          </p:cNvSpPr>
-          <p:nvPr/>
-        </p:nvSpPr>
-        <p:spPr>
-          <a:xfrm xmlns:a="http://schemas.openxmlformats.org/drawingml/2006/main">
-            <a:off x="609600" y="1333500"/>
-            <a:ext cx="5257800" cy="428625"/>
-          </a:xfrm>
-          <a:prstGeom xmlns:a="http://schemas.openxmlformats.org/drawingml/2006/main" prst="rect">
-            <a:avLst/>
-          </a:prstGeom>
-          <a:noFill xmlns:a="http://schemas.openxmlformats.org/drawingml/2006/main"/>
-          <a:ln xmlns:a="http://schemas.openxmlformats.org/drawingml/2006/main" w="0">
-            <a:noFill/>
-          </a:ln>
-        </p:spPr>
-        <p:txBody>
-          <a:bodyPr xmlns:a="http://schemas.openxmlformats.org/drawingml/2006/main" lIns="0" tIns="0" rIns="0" bIns="0" anchor="t"/>
-          <a:lstStyle xmlns:a="http://schemas.openxmlformats.org/drawingml/2006/main"/>
-          <a:p xmlns:a="http://schemas.openxmlformats.org/drawingml/2006/main">
-            <a:pPr algn="l">
-              <a:lnSpc>
-                <a:spcPct val="118000"/>
-              </a:lnSpc>
-              <a:buNone/>
-              <a:defRPr sz="2400" b="1">
-                <a:solidFill>
-                  <a:srgbClr val="1F4D78"/>
-                </a:solidFill>
-                <a:latin typeface="微软雅黑"/>
-                <a:ea typeface="微软雅黑"/>
-                <a:cs typeface="微软雅黑"/>
-              </a:defRPr>
-            </a:pPr>
-            <a:r>
-              <a:rPr sz="2400" b="1">
-                <a:solidFill>
-                  <a:srgbClr val="1F4D78"/>
-                </a:solidFill>
-                <a:latin typeface="微软雅黑"/>
-                <a:ea typeface="微软雅黑"/>
-                <a:cs typeface="微软雅黑"/>
-              </a:rPr>
-              <a:t>AutoResearch · 228791f</a:t>
-            </a:r>
-          </a:p>
-        </p:txBody>
-      </p:sp>
-      <p:sp>
-        <p:nvSpPr>
-          <p:cNvPr id="24" name="right-h">
-            <a:extLst xmlns:a="http://schemas.openxmlformats.org/drawingml/2006/main">
-              <a:ext uri="{FF2B5EF4-FFF2-40B4-BE49-F238E27FC236}">
-                <a16:creationId xmlns:a16="http://schemas.microsoft.com/office/drawing/2014/main" id="{C5937824-FA7F-4182-B5D8-23C962AE2D97}"/>
-              </a:ext>
-            </a:extLst>
-          </p:cNvPr>
-          <p:cNvSpPr>
-            <a:spLocks xmlns:a="http://schemas.openxmlformats.org/drawingml/2006/main" noGrp="1"/>
-          </p:cNvSpPr>
-          <p:nvPr/>
-        </p:nvSpPr>
-        <p:spPr>
-          <a:xfrm xmlns:a="http://schemas.openxmlformats.org/drawingml/2006/main">
-            <a:off x="6572250" y="1333500"/>
-            <a:ext cx="5010150" cy="428625"/>
-          </a:xfrm>
-          <a:prstGeom xmlns:a="http://schemas.openxmlformats.org/drawingml/2006/main" prst="rect">
-            <a:avLst/>
-          </a:prstGeom>
-          <a:noFill xmlns:a="http://schemas.openxmlformats.org/drawingml/2006/main"/>
-          <a:ln xmlns:a="http://schemas.openxmlformats.org/drawingml/2006/main" w="0">
-            <a:noFill/>
-          </a:ln>
-        </p:spPr>
-        <p:txBody>
-          <a:bodyPr xmlns:a="http://schemas.openxmlformats.org/drawingml/2006/main" lIns="0" tIns="0" rIns="0" bIns="0" anchor="t"/>
-          <a:lstStyle xmlns:a="http://schemas.openxmlformats.org/drawingml/2006/main"/>
-          <a:p xmlns:a="http://schemas.openxmlformats.org/drawingml/2006/main">
-            <a:pPr algn="l">
-              <a:lnSpc>
-                <a:spcPct val="118000"/>
-              </a:lnSpc>
-              <a:buNone/>
-              <a:defRPr sz="2400" b="1">
-                <a:solidFill>
-                  <a:srgbClr val="1F4D78"/>
-                </a:solidFill>
-                <a:latin typeface="微软雅黑"/>
-                <a:ea typeface="微软雅黑"/>
-                <a:cs typeface="微软雅黑"/>
-              </a:defRPr>
-            </a:pPr>
-            <a:r>
-              <a:rPr sz="2400" b="1">
-                <a:solidFill>
-                  <a:srgbClr val="1F4D78"/>
-                </a:solidFill>
-                <a:latin typeface="微软雅黑"/>
-                <a:ea typeface="微软雅黑"/>
-                <a:cs typeface="微软雅黑"/>
-              </a:rPr>
-              <a:t>课程阅读卡冻结队列</a:t>
-            </a:r>
-          </a:p>
-        </p:txBody>
-      </p:sp>
-      <p:sp>
-        <p:nvSpPr>
-          <p:cNvPr id="25" name="l1">
-            <a:extLst xmlns:a="http://schemas.openxmlformats.org/drawingml/2006/main">
-              <a:ext uri="{FF2B5EF4-FFF2-40B4-BE49-F238E27FC236}">
-                <a16:creationId xmlns:a16="http://schemas.microsoft.com/office/drawing/2014/main" id="{26485A7F-3281-4A06-906F-F44471C306A9}"/>
-              </a:ext>
-            </a:extLst>
-          </p:cNvPr>
-          <p:cNvSpPr>
-            <a:spLocks xmlns:a="http://schemas.openxmlformats.org/drawingml/2006/main" noGrp="1"/>
-          </p:cNvSpPr>
-          <p:nvPr/>
-        </p:nvSpPr>
-        <p:spPr>
-          <a:xfrm xmlns:a="http://schemas.openxmlformats.org/drawingml/2006/main">
-            <a:off x="609600" y="2095500"/>
-            <a:ext cx="5257800" cy="457200"/>
-          </a:xfrm>
-          <a:prstGeom xmlns:a="http://schemas.openxmlformats.org/drawingml/2006/main" prst="rect">
-            <a:avLst/>
-          </a:prstGeom>
-          <a:noFill xmlns:a="http://schemas.openxmlformats.org/drawingml/2006/main"/>
-          <a:ln xmlns:a="http://schemas.openxmlformats.org/drawingml/2006/main" w="0">
-            <a:noFill/>
-          </a:ln>
-        </p:spPr>
-        <p:txBody>
-          <a:bodyPr xmlns:a="http://schemas.openxmlformats.org/drawingml/2006/main" lIns="0" tIns="0" rIns="0" bIns="0" anchor="t"/>
-          <a:lstStyle xmlns:a="http://schemas.openxmlformats.org/drawingml/2006/main"/>
-          <a:p xmlns:a="http://schemas.openxmlformats.org/drawingml/2006/main">
-            <a:pPr algn="l">
-              <a:lnSpc>
-                <a:spcPct val="118000"/>
-              </a:lnSpc>
-              <a:buNone/>
-              <a:defRPr sz="2200" b="0">
-                <a:solidFill>
-                  <a:srgbClr val="27333D"/>
-                </a:solidFill>
-                <a:latin typeface="微软雅黑"/>
-                <a:ea typeface="微软雅黑"/>
-                <a:cs typeface="微软雅黑"/>
-              </a:defRPr>
-            </a:pPr>
-            <a:r>
-              <a:rPr sz="2200" b="0">
-                <a:solidFill>
-                  <a:srgbClr val="27333D"/>
-                </a:solidFill>
-                <a:latin typeface="微软雅黑"/>
-                <a:ea typeface="微软雅黑"/>
-                <a:cs typeface="微软雅黑"/>
-              </a:rPr>
-              <a:t>改 train.py，运行并评价</a:t>
-            </a:r>
-          </a:p>
-        </p:txBody>
-      </p:sp>
-      <p:sp>
-        <p:nvSpPr>
-          <p:cNvPr id="26" name="r1">
-            <a:extLst xmlns:a="http://schemas.openxmlformats.org/drawingml/2006/main">
-              <a:ext uri="{FF2B5EF4-FFF2-40B4-BE49-F238E27FC236}">
-                <a16:creationId xmlns:a16="http://schemas.microsoft.com/office/drawing/2014/main" id="{0A86C754-7A58-4754-943A-C8CCD054D369}"/>
-              </a:ext>
-            </a:extLst>
-          </p:cNvPr>
-          <p:cNvSpPr>
-            <a:spLocks xmlns:a="http://schemas.openxmlformats.org/drawingml/2006/main" noGrp="1"/>
-          </p:cNvSpPr>
-          <p:nvPr/>
-        </p:nvSpPr>
-        <p:spPr>
-          <a:xfrm xmlns:a="http://schemas.openxmlformats.org/drawingml/2006/main">
-            <a:off x="6572250" y="2095500"/>
-            <a:ext cx="5010150" cy="457200"/>
-          </a:xfrm>
-          <a:prstGeom xmlns:a="http://schemas.openxmlformats.org/drawingml/2006/main" prst="rect">
-            <a:avLst/>
-          </a:prstGeom>
-          <a:noFill xmlns:a="http://schemas.openxmlformats.org/drawingml/2006/main"/>
-          <a:ln xmlns:a="http://schemas.openxmlformats.org/drawingml/2006/main" w="0">
-            <a:noFill/>
-          </a:ln>
-        </p:spPr>
-        <p:txBody>
-          <a:bodyPr xmlns:a="http://schemas.openxmlformats.org/drawingml/2006/main" lIns="0" tIns="0" rIns="0" bIns="0" anchor="t"/>
-          <a:lstStyle xmlns:a="http://schemas.openxmlformats.org/drawingml/2006/main"/>
-          <a:p xmlns:a="http://schemas.openxmlformats.org/drawingml/2006/main">
-            <a:pPr algn="l">
-              <a:lnSpc>
-                <a:spcPct val="118000"/>
-              </a:lnSpc>
-              <a:buNone/>
-              <a:defRPr sz="2200" b="0">
-                <a:solidFill>
-                  <a:srgbClr val="27333D"/>
-                </a:solidFill>
-                <a:latin typeface="微软雅黑"/>
-                <a:ea typeface="微软雅黑"/>
-                <a:cs typeface="微软雅黑"/>
-              </a:defRPr>
-            </a:pPr>
-            <a:r>
-              <a:rPr sz="2200" b="0">
-                <a:solidFill>
-                  <a:srgbClr val="27333D"/>
-                </a:solidFill>
-                <a:latin typeface="微软雅黑"/>
-                <a:ea typeface="微软雅黑"/>
-                <a:cs typeface="微软雅黑"/>
-              </a:rPr>
-              <a:t>固定输入、方法与配置</a:t>
-            </a:r>
-          </a:p>
-        </p:txBody>
-      </p:sp>
-      <p:sp>
-        <p:nvSpPr>
-          <p:cNvPr id="27" name="l2">
-            <a:extLst xmlns:a="http://schemas.openxmlformats.org/drawingml/2006/main">
-              <a:ext uri="{FF2B5EF4-FFF2-40B4-BE49-F238E27FC236}">
-                <a16:creationId xmlns:a16="http://schemas.microsoft.com/office/drawing/2014/main" id="{ED92F01A-4ED3-47B1-87FA-859692FD4282}"/>
-              </a:ext>
-            </a:extLst>
-          </p:cNvPr>
-          <p:cNvSpPr>
-            <a:spLocks xmlns:a="http://schemas.openxmlformats.org/drawingml/2006/main" noGrp="1"/>
-          </p:cNvSpPr>
-          <p:nvPr/>
-        </p:nvSpPr>
-        <p:spPr>
-          <a:xfrm xmlns:a="http://schemas.openxmlformats.org/drawingml/2006/main">
-            <a:off x="609600" y="2714625"/>
-            <a:ext cx="5257800" cy="457200"/>
-          </a:xfrm>
-          <a:prstGeom xmlns:a="http://schemas.openxmlformats.org/drawingml/2006/main" prst="rect">
-            <a:avLst/>
-          </a:prstGeom>
-          <a:noFill xmlns:a="http://schemas.openxmlformats.org/drawingml/2006/main"/>
-          <a:ln xmlns:a="http://schemas.openxmlformats.org/drawingml/2006/main" w="0">
-            <a:noFill/>
-          </a:ln>
-        </p:spPr>
-        <p:txBody>
-          <a:bodyPr xmlns:a="http://schemas.openxmlformats.org/drawingml/2006/main" lIns="0" tIns="0" rIns="0" bIns="0" anchor="t"/>
-          <a:lstStyle xmlns:a="http://schemas.openxmlformats.org/drawingml/2006/main"/>
-          <a:p xmlns:a="http://schemas.openxmlformats.org/drawingml/2006/main">
-            <a:pPr algn="l">
-              <a:lnSpc>
-                <a:spcPct val="118000"/>
-              </a:lnSpc>
-              <a:buNone/>
-              <a:defRPr sz="2200" b="0">
-                <a:solidFill>
-                  <a:srgbClr val="27333D"/>
-                </a:solidFill>
-                <a:latin typeface="微软雅黑"/>
-                <a:ea typeface="微软雅黑"/>
-                <a:cs typeface="微软雅黑"/>
-              </a:defRPr>
-            </a:pPr>
-            <a:r>
-              <a:rPr sz="2200" b="0">
-                <a:solidFill>
-                  <a:srgbClr val="27333D"/>
-                </a:solidFill>
-                <a:latin typeface="微软雅黑"/>
-                <a:ea typeface="微软雅黑"/>
-                <a:cs typeface="微软雅黑"/>
-              </a:rPr>
-              <a:t>按 val_bpb 保留或回退</a:t>
-            </a:r>
-          </a:p>
-        </p:txBody>
-      </p:sp>
-      <p:sp>
-        <p:nvSpPr>
-          <p:cNvPr id="28" name="r2">
-            <a:extLst xmlns:a="http://schemas.openxmlformats.org/drawingml/2006/main">
-              <a:ext uri="{FF2B5EF4-FFF2-40B4-BE49-F238E27FC236}">
-                <a16:creationId xmlns:a16="http://schemas.microsoft.com/office/drawing/2014/main" id="{4B6008FB-5885-414C-B4CD-FE8B0E6A0830}"/>
-              </a:ext>
-            </a:extLst>
-          </p:cNvPr>
-          <p:cNvSpPr>
-            <a:spLocks xmlns:a="http://schemas.openxmlformats.org/drawingml/2006/main" noGrp="1"/>
-          </p:cNvSpPr>
-          <p:nvPr/>
-        </p:nvSpPr>
-        <p:spPr>
-          <a:xfrm xmlns:a="http://schemas.openxmlformats.org/drawingml/2006/main">
-            <a:off x="6572250" y="2714625"/>
-            <a:ext cx="5010150" cy="457200"/>
-          </a:xfrm>
-          <a:prstGeom xmlns:a="http://schemas.openxmlformats.org/drawingml/2006/main" prst="rect">
-            <a:avLst/>
-          </a:prstGeom>
-          <a:noFill xmlns:a="http://schemas.openxmlformats.org/drawingml/2006/main"/>
-          <a:ln xmlns:a="http://schemas.openxmlformats.org/drawingml/2006/main" w="0">
-            <a:noFill/>
-          </a:ln>
-        </p:spPr>
-        <p:txBody>
-          <a:bodyPr xmlns:a="http://schemas.openxmlformats.org/drawingml/2006/main" lIns="0" tIns="0" rIns="0" bIns="0" anchor="t"/>
-          <a:lstStyle xmlns:a="http://schemas.openxmlformats.org/drawingml/2006/main"/>
-          <a:p xmlns:a="http://schemas.openxmlformats.org/drawingml/2006/main">
-            <a:pPr algn="l">
-              <a:lnSpc>
-                <a:spcPct val="118000"/>
-              </a:lnSpc>
-              <a:buNone/>
-              <a:defRPr sz="2200" b="0">
-                <a:solidFill>
-                  <a:srgbClr val="27333D"/>
-                </a:solidFill>
-                <a:latin typeface="微软雅黑"/>
-                <a:ea typeface="微软雅黑"/>
-                <a:cs typeface="微软雅黑"/>
-              </a:defRPr>
-            </a:pPr>
-            <a:r>
-              <a:rPr sz="2200" b="0">
-                <a:solidFill>
-                  <a:srgbClr val="27333D"/>
-                </a:solidFill>
-                <a:latin typeface="微软雅黑"/>
-                <a:ea typeface="微软雅黑"/>
-                <a:cs typeface="微软雅黑"/>
-              </a:rPr>
-              <a:t>逐项生成，保留全部输出</a:t>
-            </a:r>
-          </a:p>
-        </p:txBody>
-      </p:sp>
-      <p:sp>
-        <p:nvSpPr>
-          <p:cNvPr id="29" name="l3">
-            <a:extLst xmlns:a="http://schemas.openxmlformats.org/drawingml/2006/main">
-              <a:ext uri="{FF2B5EF4-FFF2-40B4-BE49-F238E27FC236}">
-                <a16:creationId xmlns:a16="http://schemas.microsoft.com/office/drawing/2014/main" id="{341094CF-33FD-4F30-A68E-DD31A4EB40F2}"/>
-              </a:ext>
-            </a:extLst>
-          </p:cNvPr>
-          <p:cNvSpPr>
-            <a:spLocks xmlns:a="http://schemas.openxmlformats.org/drawingml/2006/main" noGrp="1"/>
-          </p:cNvSpPr>
-          <p:nvPr/>
-        </p:nvSpPr>
-        <p:spPr>
-          <a:xfrm xmlns:a="http://schemas.openxmlformats.org/drawingml/2006/main">
-            <a:off x="609600" y="3333750"/>
-            <a:ext cx="5257800" cy="457200"/>
-          </a:xfrm>
-          <a:prstGeom xmlns:a="http://schemas.openxmlformats.org/drawingml/2006/main" prst="rect">
-            <a:avLst/>
-          </a:prstGeom>
-          <a:noFill xmlns:a="http://schemas.openxmlformats.org/drawingml/2006/main"/>
-          <a:ln xmlns:a="http://schemas.openxmlformats.org/drawingml/2006/main" w="0">
-            <a:noFill/>
-          </a:ln>
-        </p:spPr>
-        <p:txBody>
-          <a:bodyPr xmlns:a="http://schemas.openxmlformats.org/drawingml/2006/main" lIns="0" tIns="0" rIns="0" bIns="0" anchor="t"/>
-          <a:lstStyle xmlns:a="http://schemas.openxmlformats.org/drawingml/2006/main"/>
-          <a:p xmlns:a="http://schemas.openxmlformats.org/drawingml/2006/main">
-            <a:pPr algn="l">
-              <a:lnSpc>
-                <a:spcPct val="118000"/>
-              </a:lnSpc>
-              <a:buNone/>
-              <a:defRPr sz="2200" b="0">
-                <a:solidFill>
-                  <a:srgbClr val="27333D"/>
-                </a:solidFill>
-                <a:latin typeface="微软雅黑"/>
-                <a:ea typeface="微软雅黑"/>
-                <a:cs typeface="微软雅黑"/>
-              </a:defRPr>
-            </a:pPr>
-            <a:r>
-              <a:rPr sz="2200" b="0">
-                <a:solidFill>
-                  <a:srgbClr val="27333D"/>
-                </a:solidFill>
-                <a:latin typeface="微软雅黑"/>
-                <a:ea typeface="微软雅黑"/>
-                <a:cs typeface="微软雅黑"/>
-              </a:rPr>
-              <a:t>账本记录 keep / discard / crash</a:t>
-            </a:r>
-          </a:p>
-        </p:txBody>
-      </p:sp>
-      <p:sp>
-        <p:nvSpPr>
-          <p:cNvPr id="30" name="r3">
-            <a:extLst xmlns:a="http://schemas.openxmlformats.org/drawingml/2006/main">
-              <a:ext uri="{FF2B5EF4-FFF2-40B4-BE49-F238E27FC236}">
-                <a16:creationId xmlns:a16="http://schemas.microsoft.com/office/drawing/2014/main" id="{3B600B73-0677-4AB1-93ED-D6727B82EAB8}"/>
-              </a:ext>
-            </a:extLst>
-          </p:cNvPr>
-          <p:cNvSpPr>
-            <a:spLocks xmlns:a="http://schemas.openxmlformats.org/drawingml/2006/main" noGrp="1"/>
-          </p:cNvSpPr>
-          <p:nvPr/>
-        </p:nvSpPr>
-        <p:spPr>
-          <a:xfrm xmlns:a="http://schemas.openxmlformats.org/drawingml/2006/main">
-            <a:off x="6572250" y="3333750"/>
-            <a:ext cx="5010150" cy="457200"/>
-          </a:xfrm>
-          <a:prstGeom xmlns:a="http://schemas.openxmlformats.org/drawingml/2006/main" prst="rect">
-            <a:avLst/>
-          </a:prstGeom>
-          <a:noFill xmlns:a="http://schemas.openxmlformats.org/drawingml/2006/main"/>
-          <a:ln xmlns:a="http://schemas.openxmlformats.org/drawingml/2006/main" w="0">
-            <a:noFill/>
-          </a:ln>
-        </p:spPr>
-        <p:txBody>
-          <a:bodyPr xmlns:a="http://schemas.openxmlformats.org/drawingml/2006/main" lIns="0" tIns="0" rIns="0" bIns="0" anchor="t"/>
-          <a:lstStyle xmlns:a="http://schemas.openxmlformats.org/drawingml/2006/main"/>
-          <a:p xmlns:a="http://schemas.openxmlformats.org/drawingml/2006/main">
-            <a:pPr algn="l">
-              <a:lnSpc>
-                <a:spcPct val="118000"/>
-              </a:lnSpc>
-              <a:buNone/>
-              <a:defRPr sz="2200" b="0">
-                <a:solidFill>
-                  <a:srgbClr val="27333D"/>
-                </a:solidFill>
-                <a:latin typeface="微软雅黑"/>
-                <a:ea typeface="微软雅黑"/>
-                <a:cs typeface="微软雅黑"/>
-              </a:defRPr>
-            </a:pPr>
-            <a:r>
-              <a:rPr sz="2200" b="0">
-                <a:solidFill>
-                  <a:srgbClr val="27333D"/>
-                </a:solidFill>
-                <a:latin typeface="微软雅黑"/>
-                <a:ea typeface="微软雅黑"/>
-                <a:cs typeface="微软雅黑"/>
-              </a:rPr>
-              <a:t>失败留账，恢复仅补未完成项</a:t>
-            </a:r>
-          </a:p>
-        </p:txBody>
-      </p:sp>
-      <p:sp>
-        <p:nvSpPr>
-          <p:cNvPr id="31" name="l4">
-            <a:extLst xmlns:a="http://schemas.openxmlformats.org/drawingml/2006/main">
-              <a:ext uri="{FF2B5EF4-FFF2-40B4-BE49-F238E27FC236}">
-                <a16:creationId xmlns:a16="http://schemas.microsoft.com/office/drawing/2014/main" id="{E7E83DA1-3900-465C-8F53-75CB617B7207}"/>
-              </a:ext>
-            </a:extLst>
-          </p:cNvPr>
-          <p:cNvSpPr>
-            <a:spLocks xmlns:a="http://schemas.openxmlformats.org/drawingml/2006/main" noGrp="1"/>
-          </p:cNvSpPr>
-          <p:nvPr/>
-        </p:nvSpPr>
-        <p:spPr>
-          <a:xfrm xmlns:a="http://schemas.openxmlformats.org/drawingml/2006/main">
-            <a:off x="609600" y="3952875"/>
-            <a:ext cx="5257800" cy="457200"/>
-          </a:xfrm>
-          <a:prstGeom xmlns:a="http://schemas.openxmlformats.org/drawingml/2006/main" prst="rect">
-            <a:avLst/>
-          </a:prstGeom>
-          <a:noFill xmlns:a="http://schemas.openxmlformats.org/drawingml/2006/main"/>
-          <a:ln xmlns:a="http://schemas.openxmlformats.org/drawingml/2006/main" w="0">
-            <a:noFill/>
-          </a:ln>
-        </p:spPr>
-        <p:txBody>
-          <a:bodyPr xmlns:a="http://schemas.openxmlformats.org/drawingml/2006/main" lIns="0" tIns="0" rIns="0" bIns="0" anchor="t"/>
-          <a:lstStyle xmlns:a="http://schemas.openxmlformats.org/drawingml/2006/main"/>
-          <a:p xmlns:a="http://schemas.openxmlformats.org/drawingml/2006/main">
-            <a:pPr algn="l">
-              <a:lnSpc>
-                <a:spcPct val="118000"/>
-              </a:lnSpc>
-              <a:buNone/>
-              <a:defRPr sz="2200" b="0">
-                <a:solidFill>
-                  <a:srgbClr val="A96510"/>
-                </a:solidFill>
-                <a:latin typeface="微软雅黑"/>
-                <a:ea typeface="微软雅黑"/>
-                <a:cs typeface="微软雅黑"/>
-              </a:defRPr>
-            </a:pPr>
-            <a:r>
-              <a:rPr sz="2200" b="0">
-                <a:solidFill>
-                  <a:srgbClr val="A96510"/>
-                </a:solidFill>
-                <a:latin typeface="微软雅黑"/>
-                <a:ea typeface="微软雅黑"/>
-                <a:cs typeface="微软雅黑"/>
-              </a:rPr>
-              <a:t>外层持续循环，人工中断</a:t>
-            </a:r>
-          </a:p>
-        </p:txBody>
-      </p:sp>
-      <p:sp>
-        <p:nvSpPr>
-          <p:cNvPr id="32" name="r4">
-            <a:extLst xmlns:a="http://schemas.openxmlformats.org/drawingml/2006/main">
-              <a:ext uri="{FF2B5EF4-FFF2-40B4-BE49-F238E27FC236}">
-                <a16:creationId xmlns:a16="http://schemas.microsoft.com/office/drawing/2014/main" id="{FFE915D0-1A17-47EF-B840-EC53A3A9A031}"/>
-              </a:ext>
-            </a:extLst>
-          </p:cNvPr>
-          <p:cNvSpPr>
-            <a:spLocks xmlns:a="http://schemas.openxmlformats.org/drawingml/2006/main" noGrp="1"/>
-          </p:cNvSpPr>
-          <p:nvPr/>
-        </p:nvSpPr>
-        <p:spPr>
-          <a:xfrm xmlns:a="http://schemas.openxmlformats.org/drawingml/2006/main">
-            <a:off x="6572250" y="3952875"/>
-            <a:ext cx="5010150" cy="457200"/>
-          </a:xfrm>
-          <a:prstGeom xmlns:a="http://schemas.openxmlformats.org/drawingml/2006/main" prst="rect">
-            <a:avLst/>
-          </a:prstGeom>
-          <a:noFill xmlns:a="http://schemas.openxmlformats.org/drawingml/2006/main"/>
-          <a:ln xmlns:a="http://schemas.openxmlformats.org/drawingml/2006/main" w="0">
-            <a:noFill/>
-          </a:ln>
-        </p:spPr>
-        <p:txBody>
-          <a:bodyPr xmlns:a="http://schemas.openxmlformats.org/drawingml/2006/main" lIns="0" tIns="0" rIns="0" bIns="0" anchor="t"/>
-          <a:lstStyle xmlns:a="http://schemas.openxmlformats.org/drawingml/2006/main"/>
-          <a:p xmlns:a="http://schemas.openxmlformats.org/drawingml/2006/main">
-            <a:pPr algn="l">
-              <a:lnSpc>
-                <a:spcPct val="118000"/>
-              </a:lnSpc>
-              <a:buNone/>
-              <a:defRPr sz="2200" b="0">
-                <a:solidFill>
-                  <a:srgbClr val="2E7D5B"/>
-                </a:solidFill>
-                <a:latin typeface="微软雅黑"/>
-                <a:ea typeface="微软雅黑"/>
-                <a:cs typeface="微软雅黑"/>
-              </a:defRPr>
-            </a:pPr>
-            <a:r>
-              <a:rPr sz="2200" b="0">
-                <a:solidFill>
-                  <a:srgbClr val="2E7D5B"/>
-                </a:solidFill>
-                <a:latin typeface="微软雅黑"/>
-                <a:ea typeface="微软雅黑"/>
-                <a:cs typeface="微软雅黑"/>
-              </a:rPr>
-              <a:t>预定 120 份处理完即停</a:t>
-            </a:r>
-          </a:p>
-        </p:txBody>
-      </p:sp>
-      <p:sp>
-        <p:nvSpPr>
-          <p:cNvPr id="33" name="guard">
-            <a:extLst xmlns:a="http://schemas.openxmlformats.org/drawingml/2006/main">
-              <a:ext uri="{FF2B5EF4-FFF2-40B4-BE49-F238E27FC236}">
-                <a16:creationId xmlns:a16="http://schemas.microsoft.com/office/drawing/2014/main" id="{002AD89B-8019-484C-AB22-22871B10715E}"/>
-              </a:ext>
-            </a:extLst>
-          </p:cNvPr>
-          <p:cNvSpPr>
-            <a:spLocks xmlns:a="http://schemas.openxmlformats.org/drawingml/2006/main" noGrp="1"/>
-          </p:cNvSpPr>
-          <p:nvPr/>
-        </p:nvSpPr>
-        <p:spPr>
-          <a:xfrm xmlns:a="http://schemas.openxmlformats.org/drawingml/2006/main">
-            <a:off x="1143000" y="5143500"/>
-            <a:ext cx="9906000" cy="476250"/>
-          </a:xfrm>
-          <a:prstGeom xmlns:a="http://schemas.openxmlformats.org/drawingml/2006/main" prst="rect">
-            <a:avLst/>
-          </a:prstGeom>
-          <a:noFill xmlns:a="http://schemas.openxmlformats.org/drawingml/2006/main"/>
-          <a:ln xmlns:a="http://schemas.openxmlformats.org/drawingml/2006/main" w="0">
-            <a:noFill/>
-          </a:ln>
-        </p:spPr>
-        <p:txBody>
-          <a:bodyPr xmlns:a="http://schemas.openxmlformats.org/drawingml/2006/main" lIns="0" tIns="0" rIns="0" bIns="0" anchor="t"/>
-          <a:lstStyle xmlns:a="http://schemas.openxmlformats.org/drawingml/2006/main"/>
-          <a:p xmlns:a="http://schemas.openxmlformats.org/drawingml/2006/main">
-            <a:pPr algn="ctr">
-              <a:lnSpc>
-                <a:spcPct val="118000"/>
-              </a:lnSpc>
-              <a:buNone/>
-              <a:defRPr sz="2400" b="1">
-                <a:solidFill>
-                  <a:srgbClr val="C8161E"/>
-                </a:solidFill>
-                <a:latin typeface="微软雅黑"/>
-                <a:ea typeface="微软雅黑"/>
-                <a:cs typeface="微软雅黑"/>
-              </a:defRPr>
-            </a:pPr>
-            <a:r>
-              <a:rPr sz="2400" b="1">
-                <a:solidFill>
-                  <a:srgbClr val="C8161E"/>
-                </a:solidFill>
-                <a:latin typeface="微软雅黑"/>
-                <a:ea typeface="微软雅黑"/>
-                <a:cs typeface="微软雅黑"/>
-              </a:rPr>
-              <a:t>单次训练预算固定 ≠ 外层总预算固定</a:t>
+              <a:t>单次训练预算固定，不等于外层总预算固定。</a:t>
             </a:r>
           </a:p>
         </p:txBody>
@@ -21709,7 +20497,7 @@
           <p:nvPr/>
         </p:nvPicPr>
         <p:blipFill>
-          <a:blip xmlns:r="http://schemas.openxmlformats.org/officeDocument/2006/relationships" xmlns:a="http://schemas.openxmlformats.org/drawingml/2006/main" r:embed="R7c3003461f3d4580"/>
+          <a:blip xmlns:r="http://schemas.openxmlformats.org/officeDocument/2006/relationships" xmlns:a="http://schemas.openxmlformats.org/drawingml/2006/main" r:embed="Rdbd4178444a441b9"/>
           <a:stretch xmlns:a="http://schemas.openxmlformats.org/drawingml/2006/main"/>
         </p:blipFill>
         <p:spPr>
@@ -22722,14 +21510,14 @@
       </p:sp>
       <p:pic>
         <p:nvPicPr>
-          <p:cNvPr id="31" name=""/>
+          <p:cNvPr id="32" name=""/>
           <p:cNvPicPr>
             <a:picLocks xmlns:a="http://schemas.openxmlformats.org/drawingml/2006/main" noChangeAspect="1"/>
           </p:cNvPicPr>
           <p:nvPr/>
         </p:nvPicPr>
         <p:blipFill>
-          <a:blip xmlns:r="http://schemas.openxmlformats.org/officeDocument/2006/relationships" xmlns:a="http://schemas.openxmlformats.org/drawingml/2006/main" r:embed="R4ae6e9ea8d8343bf"/>
+          <a:blip xmlns:r="http://schemas.openxmlformats.org/officeDocument/2006/relationships" xmlns:a="http://schemas.openxmlformats.org/drawingml/2006/main" r:embed="Rb16d194ddcdc4745"/>
           <a:stretch xmlns:a="http://schemas.openxmlformats.org/drawingml/2006/main"/>
         </p:blipFill>
         <p:spPr>
@@ -23883,7 +22671,7 @@
           <p:nvPr/>
         </p:nvPicPr>
         <p:blipFill>
-          <a:blip xmlns:r="http://schemas.openxmlformats.org/officeDocument/2006/relationships" xmlns:a="http://schemas.openxmlformats.org/drawingml/2006/main" r:embed="R115fdea9531b488c"/>
+          <a:blip xmlns:r="http://schemas.openxmlformats.org/officeDocument/2006/relationships" xmlns:a="http://schemas.openxmlformats.org/drawingml/2006/main" r:embed="Rd4a82294e1ad4849"/>
           <a:stretch xmlns:a="http://schemas.openxmlformats.org/drawingml/2006/main"/>
         </p:blipFill>
         <p:spPr>

--- a/lessons/lesson-12/slides.pptx
+++ b/lessons/lesson-12/slides.pptx
@@ -418,7 +418,12 @@
           </a:p>
           <a:p xmlns:a="http://schemas.openxmlformats.org/drawingml/2006/main">
             <a:r>
-              <a:t>讲义位置：本课讲义；见逐页母稿映射表</a:t>
+              <a:t>讲述与校准：</a:t>
+            </a:r>
+          </a:p>
+          <a:p xmlns:a="http://schemas.openxmlformats.org/drawingml/2006/main">
+            <a:r>
+              <a:t>本课把第 10 课单次任务契约和第 11 课冻结执行队列升级为完整可审计工作流，第 13 课评价与复盘。封面仅呈现正式课名。开场请学生标出已有任务中一项尚未封装的状态。</a:t>
             </a:r>
           </a:p>
           <a:p xmlns:a="http://schemas.openxmlformats.org/drawingml/2006/main">
@@ -428,12 +433,12 @@
           </a:p>
           <a:p xmlns:a="http://schemas.openxmlformats.org/drawingml/2006/main">
             <a:r>
-              <a:t>屏显核对：</a:t>
-            </a:r>
-          </a:p>
-          <a:p xmlns:a="http://schemas.openxmlformats.org/drawingml/2006/main">
-            <a:r>
-              <a:t>- 第12讲 Agent/Skill 逻辑与自主 Research Workflow 设计</a:t>
+              <a:t>学生动作：</a:t>
+            </a:r>
+          </a:p>
+          <a:p xmlns:a="http://schemas.openxmlformats.org/drawingml/2006/main">
+            <a:r>
+              <a:t>请学生举手：最近一次用 Agent 时，是否看过它的权限声明或停止条件？只听回答，不评价。</a:t>
             </a:r>
           </a:p>
           <a:p xmlns:a="http://schemas.openxmlformats.org/drawingml/2006/main">
@@ -443,12 +448,7 @@
           </a:p>
           <a:p xmlns:a="http://schemas.openxmlformats.org/drawingml/2006/main">
             <a:r>
-              <a:t>教师讲述：</a:t>
-            </a:r>
-          </a:p>
-          <a:p xmlns:a="http://schemas.openxmlformats.org/drawingml/2006/main">
-            <a:r>
-              <a:t>本课把第 10 课单次任务契约和第 11 课冻结执行队列升级为完整可审计工作流，第 13 课评价与复盘。封面仅呈现正式课名。开场请学生标出已有任务中一项尚未封装的状态。</a:t>
+              <a:t>课堂安排：按本稿下方 90 分钟教学路由安排；此页不另占独立时段。</a:t>
             </a:r>
           </a:p>
           <a:p xmlns:a="http://schemas.openxmlformats.org/drawingml/2006/main">
@@ -458,12 +458,12 @@
           </a:p>
           <a:p xmlns:a="http://schemas.openxmlformats.org/drawingml/2006/main">
             <a:r>
-              <a:t>学生动作：</a:t>
-            </a:r>
-          </a:p>
-          <a:p xmlns:a="http://schemas.openxmlformats.org/drawingml/2006/main">
-            <a:r>
-              <a:t>请学生举手：最近一次用 Agent 时，是否看过它的权限声明或停止条件？只听回答，不评价。</a:t>
+              <a:t>[Sources]</a:t>
+            </a:r>
+          </a:p>
+          <a:p xmlns:a="http://schemas.openxmlformats.org/drawingml/2006/main">
+            <a:r>
+              <a:t>课程定位以 [curriculum.md](../../course/curriculum.md) 第 4-5 条为准；[assignments.md](../../course/assignments.md) 验证门条件；[syllabus.md](../../course/syllabus.md) 第 12 课。</a:t>
             </a:r>
           </a:p>
           <a:p xmlns:a="http://schemas.openxmlformats.org/drawingml/2006/main">
@@ -473,57 +473,7 @@
           </a:p>
           <a:p xmlns:a="http://schemas.openxmlformats.org/drawingml/2006/main">
             <a:r>
-              <a:t>来源与边界：</a:t>
-            </a:r>
-          </a:p>
-          <a:p xmlns:a="http://schemas.openxmlformats.org/drawingml/2006/main">
-            <a:r>
-              <a:t>课程定位以 [curriculum.md](../../course/curriculum.md) 第 4-5 条为准；[assignments.md](../../course/assignments.md) 验证门条件；[syllabus.md](../../course/syllabus.md) 第 12 课。</a:t>
-            </a:r>
-          </a:p>
-          <a:p xmlns:a="http://schemas.openxmlformats.org/drawingml/2006/main">
-            <a:r>
-              <a:t/>
-            </a:r>
-          </a:p>
-          <a:p xmlns:a="http://schemas.openxmlformats.org/drawingml/2006/main">
-            <a:r>
-              <a:t>---</a:t>
-            </a:r>
-          </a:p>
-          <a:p xmlns:a="http://schemas.openxmlformats.org/drawingml/2006/main">
-            <a:r>
-              <a:t/>
-            </a:r>
-          </a:p>
-          <a:p xmlns:a="http://schemas.openxmlformats.org/drawingml/2006/main">
-            <a:r>
-              <a:t>[Sources]</a:t>
-            </a:r>
-          </a:p>
-          <a:p xmlns:a="http://schemas.openxmlformats.org/drawingml/2006/main">
-            <a:r>
-              <a:t/>
-            </a:r>
-          </a:p>
-          <a:p xmlns:a="http://schemas.openxmlformats.org/drawingml/2006/main">
-            <a:r>
-              <a:t>- 本课 handout.md 与 slides.md</a:t>
-            </a:r>
-          </a:p>
-          <a:p xmlns:a="http://schemas.openxmlformats.org/drawingml/2006/main">
-            <a:r>
-              <a:t/>
-            </a:r>
-          </a:p>
-          <a:p xmlns:a="http://schemas.openxmlformats.org/drawingml/2006/main">
-            <a:r>
-              <a:t>- ../../course/reading-card-case.md</a:t>
-            </a:r>
-          </a:p>
-          <a:p xmlns:a="http://schemas.openxmlformats.org/drawingml/2006/main">
-            <a:r>
-              <a:t/>
+              <a:t>本课 handout.md、judgment-task.md；../../course/judgment-path.md。</a:t>
             </a:r>
           </a:p>
           <a:p xmlns:a="http://schemas.openxmlformats.org/drawingml/2006/main">
@@ -608,7 +558,12 @@
           </a:p>
           <a:p xmlns:a="http://schemas.openxmlformats.org/drawingml/2006/main">
             <a:r>
-              <a:t>讲义位置：本课讲义；见逐页母稿映射表</a:t>
+              <a:t>讲述与校准：</a:t>
+            </a:r>
+          </a:p>
+          <a:p xmlns:a="http://schemas.openxmlformats.org/drawingml/2006/main">
+            <a:r>
+              <a:t>脚本适合固定输入输出，固定工作流显式管理状态与恢复，Agent 适合需要动态决策的动作，复杂系统需要额外治理成本。阅读卡冻结任务优先选能完成任务的最低复杂度，选用动态决策时同时指定独立评价与停止条件。</a:t>
             </a:r>
           </a:p>
           <a:p xmlns:a="http://schemas.openxmlformats.org/drawingml/2006/main">
@@ -618,52 +573,12 @@
           </a:p>
           <a:p xmlns:a="http://schemas.openxmlformats.org/drawingml/2006/main">
             <a:r>
-              <a:t>屏显核对：</a:t>
-            </a:r>
-          </a:p>
-          <a:p xmlns:a="http://schemas.openxmlformats.org/drawingml/2006/main">
-            <a:r>
-              <a:t>- 脚本</a:t>
-            </a:r>
-          </a:p>
-          <a:p xmlns:a="http://schemas.openxmlformats.org/drawingml/2006/main">
-            <a:r>
-              <a:t>- 固定输入输出</a:t>
-            </a:r>
-          </a:p>
-          <a:p xmlns:a="http://schemas.openxmlformats.org/drawingml/2006/main">
-            <a:r>
-              <a:t>- 固定工作流</a:t>
-            </a:r>
-          </a:p>
-          <a:p xmlns:a="http://schemas.openxmlformats.org/drawingml/2006/main">
-            <a:r>
-              <a:t>- 状态与回退</a:t>
-            </a:r>
-          </a:p>
-          <a:p xmlns:a="http://schemas.openxmlformats.org/drawingml/2006/main">
-            <a:r>
-              <a:t>- Agent</a:t>
-            </a:r>
-          </a:p>
-          <a:p xmlns:a="http://schemas.openxmlformats.org/drawingml/2006/main">
-            <a:r>
-              <a:t>- 动态决策</a:t>
-            </a:r>
-          </a:p>
-          <a:p xmlns:a="http://schemas.openxmlformats.org/drawingml/2006/main">
-            <a:r>
-              <a:t>- 复杂系统</a:t>
-            </a:r>
-          </a:p>
-          <a:p xmlns:a="http://schemas.openxmlformats.org/drawingml/2006/main">
-            <a:r>
-              <a:t>- 多组件治理</a:t>
-            </a:r>
-          </a:p>
-          <a:p xmlns:a="http://schemas.openxmlformats.org/drawingml/2006/main">
-            <a:r>
-              <a:t>- 先用能完成任务的最低复杂度；自治增加必须带来独立评价与停止。</a:t>
+              <a:t>学生动作：</a:t>
+            </a:r>
+          </a:p>
+          <a:p xmlns:a="http://schemas.openxmlformats.org/drawingml/2006/main">
+            <a:r>
+              <a:t>无。</a:t>
             </a:r>
           </a:p>
           <a:p xmlns:a="http://schemas.openxmlformats.org/drawingml/2006/main">
@@ -673,12 +588,7 @@
           </a:p>
           <a:p xmlns:a="http://schemas.openxmlformats.org/drawingml/2006/main">
             <a:r>
-              <a:t>教师讲述：</a:t>
-            </a:r>
-          </a:p>
-          <a:p xmlns:a="http://schemas.openxmlformats.org/drawingml/2006/main">
-            <a:r>
-              <a:t>脚本适合固定输入输出，固定工作流显式管理状态与恢复，Agent 适合需要动态决策的动作，复杂系统需要额外治理成本。阅读卡冻结任务优先选能完成任务的最低复杂度，选用动态决策时同时指定独立评价与停止条件。</a:t>
+              <a:t>课堂安排：按本稿下方 90 分钟教学路由安排；此页不另占独立时段。</a:t>
             </a:r>
           </a:p>
           <a:p xmlns:a="http://schemas.openxmlformats.org/drawingml/2006/main">
@@ -688,12 +598,12 @@
           </a:p>
           <a:p xmlns:a="http://schemas.openxmlformats.org/drawingml/2006/main">
             <a:r>
-              <a:t>学生动作：</a:t>
-            </a:r>
-          </a:p>
-          <a:p xmlns:a="http://schemas.openxmlformats.org/drawingml/2006/main">
-            <a:r>
-              <a:t>无。</a:t>
+              <a:t>[Sources]</a:t>
+            </a:r>
+          </a:p>
+          <a:p xmlns:a="http://schemas.openxmlformats.org/drawingml/2006/main">
+            <a:r>
+              <a:t>[handout.md §三](./handout.md)。</a:t>
             </a:r>
           </a:p>
           <a:p xmlns:a="http://schemas.openxmlformats.org/drawingml/2006/main">
@@ -703,57 +613,7 @@
           </a:p>
           <a:p xmlns:a="http://schemas.openxmlformats.org/drawingml/2006/main">
             <a:r>
-              <a:t>来源与边界：</a:t>
-            </a:r>
-          </a:p>
-          <a:p xmlns:a="http://schemas.openxmlformats.org/drawingml/2006/main">
-            <a:r>
-              <a:t>[handout.md §三](./handout.md)。</a:t>
-            </a:r>
-          </a:p>
-          <a:p xmlns:a="http://schemas.openxmlformats.org/drawingml/2006/main">
-            <a:r>
-              <a:t/>
-            </a:r>
-          </a:p>
-          <a:p xmlns:a="http://schemas.openxmlformats.org/drawingml/2006/main">
-            <a:r>
-              <a:t>---</a:t>
-            </a:r>
-          </a:p>
-          <a:p xmlns:a="http://schemas.openxmlformats.org/drawingml/2006/main">
-            <a:r>
-              <a:t/>
-            </a:r>
-          </a:p>
-          <a:p xmlns:a="http://schemas.openxmlformats.org/drawingml/2006/main">
-            <a:r>
-              <a:t>[Sources]</a:t>
-            </a:r>
-          </a:p>
-          <a:p xmlns:a="http://schemas.openxmlformats.org/drawingml/2006/main">
-            <a:r>
-              <a:t/>
-            </a:r>
-          </a:p>
-          <a:p xmlns:a="http://schemas.openxmlformats.org/drawingml/2006/main">
-            <a:r>
-              <a:t>- 本课 handout.md 与 slides.md</a:t>
-            </a:r>
-          </a:p>
-          <a:p xmlns:a="http://schemas.openxmlformats.org/drawingml/2006/main">
-            <a:r>
-              <a:t/>
-            </a:r>
-          </a:p>
-          <a:p xmlns:a="http://schemas.openxmlformats.org/drawingml/2006/main">
-            <a:r>
-              <a:t>- ../../course/reading-card-case.md</a:t>
-            </a:r>
-          </a:p>
-          <a:p xmlns:a="http://schemas.openxmlformats.org/drawingml/2006/main">
-            <a:r>
-              <a:t/>
+              <a:t>本课 handout.md、judgment-task.md；../../course/judgment-path.md。</a:t>
             </a:r>
           </a:p>
           <a:p xmlns:a="http://schemas.openxmlformats.org/drawingml/2006/main">
@@ -838,7 +698,12 @@
           </a:p>
           <a:p xmlns:a="http://schemas.openxmlformats.org/drawingml/2006/main">
             <a:r>
-              <a:t>讲义位置：本课讲义；见逐页母稿映射表</a:t>
+              <a:t>讲述与校准：</a:t>
+            </a:r>
+          </a:p>
+          <a:p xmlns:a="http://schemas.openxmlformats.org/drawingml/2006/main">
+            <a:r>
+              <a:t>沿用第 10–11 课同一真实科研动作。本人课题、导师组任务和课堂原型是同一动作的收窄层级，不另开项目。请学生写出输入与一个可检查输出。</a:t>
             </a:r>
           </a:p>
           <a:p xmlns:a="http://schemas.openxmlformats.org/drawingml/2006/main">
@@ -848,22 +713,12 @@
           </a:p>
           <a:p xmlns:a="http://schemas.openxmlformats.org/drawingml/2006/main">
             <a:r>
-              <a:t>屏显核对：</a:t>
-            </a:r>
-          </a:p>
-          <a:p xmlns:a="http://schemas.openxmlformats.org/drawingml/2006/main">
-            <a:r>
-              <a:t>- 本人真实课题中的重复动作</a:t>
-            </a:r>
-          </a:p>
-          <a:p xmlns:a="http://schemas.openxmlformats.org/drawingml/2006/main">
-            <a:r>
-              <a:t>- 导师组已有任务</a:t>
-            </a:r>
-          </a:p>
-          <a:p xmlns:a="http://schemas.openxmlformats.org/drawingml/2006/main">
-            <a:r>
-              <a:t>- 课堂最小原型</a:t>
+              <a:t>学生动作：</a:t>
+            </a:r>
+          </a:p>
+          <a:p xmlns:a="http://schemas.openxmlformats.org/drawingml/2006/main">
+            <a:r>
+              <a:t>请学生 30 秒内确定自己要封装的科研动作。</a:t>
             </a:r>
           </a:p>
           <a:p xmlns:a="http://schemas.openxmlformats.org/drawingml/2006/main">
@@ -873,12 +728,7 @@
           </a:p>
           <a:p xmlns:a="http://schemas.openxmlformats.org/drawingml/2006/main">
             <a:r>
-              <a:t>教师讲述：</a:t>
-            </a:r>
-          </a:p>
-          <a:p xmlns:a="http://schemas.openxmlformats.org/drawingml/2006/main">
-            <a:r>
-              <a:t>沿用第 10–11 课同一真实科研动作。本人课题、导师组任务和课堂原型是同一动作的收窄层级，不另开项目。请学生写出输入与一个可检查输出。</a:t>
+              <a:t>课堂安排：按本稿下方 90 分钟教学路由安排；此页不另占独立时段。</a:t>
             </a:r>
           </a:p>
           <a:p xmlns:a="http://schemas.openxmlformats.org/drawingml/2006/main">
@@ -888,12 +738,12 @@
           </a:p>
           <a:p xmlns:a="http://schemas.openxmlformats.org/drawingml/2006/main">
             <a:r>
-              <a:t>学生动作：</a:t>
-            </a:r>
-          </a:p>
-          <a:p xmlns:a="http://schemas.openxmlformats.org/drawingml/2006/main">
-            <a:r>
-              <a:t>请学生 30 秒内确定自己要封装的科研动作。</a:t>
+              <a:t>[Sources]</a:t>
+            </a:r>
+          </a:p>
+          <a:p xmlns:a="http://schemas.openxmlformats.org/drawingml/2006/main">
+            <a:r>
+              <a:t>[handout.md §四·1](./handout.md)。</a:t>
             </a:r>
           </a:p>
           <a:p xmlns:a="http://schemas.openxmlformats.org/drawingml/2006/main">
@@ -903,57 +753,7 @@
           </a:p>
           <a:p xmlns:a="http://schemas.openxmlformats.org/drawingml/2006/main">
             <a:r>
-              <a:t>来源与边界：</a:t>
-            </a:r>
-          </a:p>
-          <a:p xmlns:a="http://schemas.openxmlformats.org/drawingml/2006/main">
-            <a:r>
-              <a:t>[handout.md §四·1](./handout.md)。</a:t>
-            </a:r>
-          </a:p>
-          <a:p xmlns:a="http://schemas.openxmlformats.org/drawingml/2006/main">
-            <a:r>
-              <a:t/>
-            </a:r>
-          </a:p>
-          <a:p xmlns:a="http://schemas.openxmlformats.org/drawingml/2006/main">
-            <a:r>
-              <a:t>---</a:t>
-            </a:r>
-          </a:p>
-          <a:p xmlns:a="http://schemas.openxmlformats.org/drawingml/2006/main">
-            <a:r>
-              <a:t/>
-            </a:r>
-          </a:p>
-          <a:p xmlns:a="http://schemas.openxmlformats.org/drawingml/2006/main">
-            <a:r>
-              <a:t>[Sources]</a:t>
-            </a:r>
-          </a:p>
-          <a:p xmlns:a="http://schemas.openxmlformats.org/drawingml/2006/main">
-            <a:r>
-              <a:t/>
-            </a:r>
-          </a:p>
-          <a:p xmlns:a="http://schemas.openxmlformats.org/drawingml/2006/main">
-            <a:r>
-              <a:t>- 本课 handout.md 与 slides.md</a:t>
-            </a:r>
-          </a:p>
-          <a:p xmlns:a="http://schemas.openxmlformats.org/drawingml/2006/main">
-            <a:r>
-              <a:t/>
-            </a:r>
-          </a:p>
-          <a:p xmlns:a="http://schemas.openxmlformats.org/drawingml/2006/main">
-            <a:r>
-              <a:t>- ../../course/reading-card-case.md</a:t>
-            </a:r>
-          </a:p>
-          <a:p xmlns:a="http://schemas.openxmlformats.org/drawingml/2006/main">
-            <a:r>
-              <a:t/>
+              <a:t>本课 handout.md、judgment-task.md；../../course/judgment-path.md。</a:t>
             </a:r>
           </a:p>
           <a:p xmlns:a="http://schemas.openxmlformats.org/drawingml/2006/main">
@@ -1038,7 +838,12 @@
           </a:p>
           <a:p xmlns:a="http://schemas.openxmlformats.org/drawingml/2006/main">
             <a:r>
-              <a:t>讲义位置：本课讲义；见逐页母稿映射表</a:t>
+              <a:t>讲述与校准：</a:t>
+            </a:r>
+          </a:p>
+          <a:p xmlns:a="http://schemas.openxmlformats.org/drawingml/2006/main">
+            <a:r>
+              <a:t>agent-workflow.md 是个人说明的入口，可链接 contract.md 等实现文件。八要素在屏显中按紧邻角色合并呈现，Context 与状态、Evals 与人工审核仍须各有明确字段。先补契约，再运行或演示最小路径。</a:t>
             </a:r>
           </a:p>
           <a:p xmlns:a="http://schemas.openxmlformats.org/drawingml/2006/main">
@@ -1048,42 +853,12 @@
           </a:p>
           <a:p xmlns:a="http://schemas.openxmlformats.org/drawingml/2006/main">
             <a:r>
-              <a:t>屏显核对：</a:t>
-            </a:r>
-          </a:p>
-          <a:p xmlns:a="http://schemas.openxmlformats.org/drawingml/2006/main">
-            <a:r>
-              <a:t>- agent-workflow.md</a:t>
-            </a:r>
-          </a:p>
-          <a:p xmlns:a="http://schemas.openxmlformats.org/drawingml/2006/main">
-            <a:r>
-              <a:t>- 任务契约｜输入、输出、成功标准、不适用范围</a:t>
-            </a:r>
-          </a:p>
-          <a:p xmlns:a="http://schemas.openxmlformats.org/drawingml/2006/main">
-            <a:r>
-              <a:t>- Context / 状态｜最小输入、持久工件、checkpoint</a:t>
-            </a:r>
-          </a:p>
-          <a:p xmlns:a="http://schemas.openxmlformats.org/drawingml/2006/main">
-            <a:r>
-              <a:t>- 工具权限｜只读、可写、可执行、需确认、禁止</a:t>
-            </a:r>
-          </a:p>
-          <a:p xmlns:a="http://schemas.openxmlformats.org/drawingml/2006/main">
-            <a:r>
-              <a:t>- 执行循环｜固定指标、预算、停止、回退</a:t>
-            </a:r>
-          </a:p>
-          <a:p xmlns:a="http://schemas.openxmlformats.org/drawingml/2006/main">
-            <a:r>
-              <a:t>- 工件与追踪｜run ID、trace、失败记录</a:t>
-            </a:r>
-          </a:p>
-          <a:p xmlns:a="http://schemas.openxmlformats.org/drawingml/2006/main">
-            <a:r>
-              <a:t>- Evals / 人工审核｜baseline、rubric、决定权</a:t>
+              <a:t>学生动作：</a:t>
+            </a:r>
+          </a:p>
+          <a:p xmlns:a="http://schemas.openxmlformats.org/drawingml/2006/main">
+            <a:r>
+              <a:t>学生开始填写模板。</a:t>
             </a:r>
           </a:p>
           <a:p xmlns:a="http://schemas.openxmlformats.org/drawingml/2006/main">
@@ -1093,12 +868,7 @@
           </a:p>
           <a:p xmlns:a="http://schemas.openxmlformats.org/drawingml/2006/main">
             <a:r>
-              <a:t>教师讲述：</a:t>
-            </a:r>
-          </a:p>
-          <a:p xmlns:a="http://schemas.openxmlformats.org/drawingml/2006/main">
-            <a:r>
-              <a:t>agent-workflow.md 是个人说明的入口，可链接 contract.md 等实现文件。八要素在屏显中按紧邻角色合并呈现，Context 与状态、Evals 与人工审核仍须各有明确字段。先补契约，再运行或演示最小路径。</a:t>
+              <a:t>课堂安排：按本稿下方 90 分钟教学路由安排；此页不另占独立时段。</a:t>
             </a:r>
           </a:p>
           <a:p xmlns:a="http://schemas.openxmlformats.org/drawingml/2006/main">
@@ -1108,12 +878,12 @@
           </a:p>
           <a:p xmlns:a="http://schemas.openxmlformats.org/drawingml/2006/main">
             <a:r>
-              <a:t>学生动作：</a:t>
-            </a:r>
-          </a:p>
-          <a:p xmlns:a="http://schemas.openxmlformats.org/drawingml/2006/main">
-            <a:r>
-              <a:t>学生开始填写模板。</a:t>
+              <a:t>[Sources]</a:t>
+            </a:r>
+          </a:p>
+          <a:p xmlns:a="http://schemas.openxmlformats.org/drawingml/2006/main">
+            <a:r>
+              <a:t>[handout.md §四·2](./handout.md)。</a:t>
             </a:r>
           </a:p>
           <a:p xmlns:a="http://schemas.openxmlformats.org/drawingml/2006/main">
@@ -1123,57 +893,7 @@
           </a:p>
           <a:p xmlns:a="http://schemas.openxmlformats.org/drawingml/2006/main">
             <a:r>
-              <a:t>来源与边界：</a:t>
-            </a:r>
-          </a:p>
-          <a:p xmlns:a="http://schemas.openxmlformats.org/drawingml/2006/main">
-            <a:r>
-              <a:t>[handout.md §四·2](./handout.md)。</a:t>
-            </a:r>
-          </a:p>
-          <a:p xmlns:a="http://schemas.openxmlformats.org/drawingml/2006/main">
-            <a:r>
-              <a:t/>
-            </a:r>
-          </a:p>
-          <a:p xmlns:a="http://schemas.openxmlformats.org/drawingml/2006/main">
-            <a:r>
-              <a:t>---</a:t>
-            </a:r>
-          </a:p>
-          <a:p xmlns:a="http://schemas.openxmlformats.org/drawingml/2006/main">
-            <a:r>
-              <a:t/>
-            </a:r>
-          </a:p>
-          <a:p xmlns:a="http://schemas.openxmlformats.org/drawingml/2006/main">
-            <a:r>
-              <a:t>[Sources]</a:t>
-            </a:r>
-          </a:p>
-          <a:p xmlns:a="http://schemas.openxmlformats.org/drawingml/2006/main">
-            <a:r>
-              <a:t/>
-            </a:r>
-          </a:p>
-          <a:p xmlns:a="http://schemas.openxmlformats.org/drawingml/2006/main">
-            <a:r>
-              <a:t>- 本课 handout.md 与 slides.md</a:t>
-            </a:r>
-          </a:p>
-          <a:p xmlns:a="http://schemas.openxmlformats.org/drawingml/2006/main">
-            <a:r>
-              <a:t/>
-            </a:r>
-          </a:p>
-          <a:p xmlns:a="http://schemas.openxmlformats.org/drawingml/2006/main">
-            <a:r>
-              <a:t>- ../../course/reading-card-case.md</a:t>
-            </a:r>
-          </a:p>
-          <a:p xmlns:a="http://schemas.openxmlformats.org/drawingml/2006/main">
-            <a:r>
-              <a:t/>
+              <a:t>本课 handout.md、judgment-task.md；../../course/judgment-path.md。</a:t>
             </a:r>
           </a:p>
           <a:p xmlns:a="http://schemas.openxmlformats.org/drawingml/2006/main">
@@ -1258,7 +978,12 @@
           </a:p>
           <a:p xmlns:a="http://schemas.openxmlformats.org/drawingml/2006/main">
             <a:r>
-              <a:t>讲义位置：本课讲义；见逐页母稿映射表</a:t>
+              <a:t>讲述与校准：</a:t>
+            </a:r>
+          </a:p>
+          <a:p xmlns:a="http://schemas.openxmlformats.org/drawingml/2006/main">
+            <a:r>
+              <a:t>左侧 W 指开发阶段允许修改执行代码和写运行目录；进入冻结批次后配置与方法锁定。右侧 gold.json 的 R 仅属于独立评价端，执行端禁止读取或复制 gold，不能将右侧 R 当作全项目权限。输出生成后才交评价端，协议变更由人工审核并另开版本，不回改当前冻结批次。请学生标明角色与拒绝点。</a:t>
             </a:r>
           </a:p>
           <a:p xmlns:a="http://schemas.openxmlformats.org/drawingml/2006/main">
@@ -1268,57 +993,12 @@
           </a:p>
           <a:p xmlns:a="http://schemas.openxmlformats.org/drawingml/2006/main">
             <a:r>
-              <a:t>屏显核对：</a:t>
-            </a:r>
-          </a:p>
-          <a:p xmlns:a="http://schemas.openxmlformats.org/drawingml/2006/main">
-            <a:r>
-              <a:t>- runner/ 执行端</a:t>
-            </a:r>
-          </a:p>
-          <a:p xmlns:a="http://schemas.openxmlformats.org/drawingml/2006/main">
-            <a:r>
-              <a:t>- generate.py   W</a:t>
-            </a:r>
-          </a:p>
-          <a:p xmlns:a="http://schemas.openxmlformats.org/drawingml/2006/main">
-            <a:r>
-              <a:t>- tools.py      W</a:t>
-            </a:r>
-          </a:p>
-          <a:p xmlns:a="http://schemas.openxmlformats.org/drawingml/2006/main">
-            <a:r>
-              <a:t>- runs/         W</a:t>
-            </a:r>
-          </a:p>
-          <a:p xmlns:a="http://schemas.openxmlformats.org/drawingml/2006/main">
-            <a:r>
-              <a:t>- evaluator/ 独立评价端</a:t>
-            </a:r>
-          </a:p>
-          <a:p xmlns:a="http://schemas.openxmlformats.org/drawingml/2006/main">
-            <a:r>
-              <a:t>- gold.json  仅评价端 R</a:t>
-            </a:r>
-          </a:p>
-          <a:p xmlns:a="http://schemas.openxmlformats.org/drawingml/2006/main">
-            <a:r>
-              <a:t>- rubric.yaml  冻结规则</a:t>
-            </a:r>
-          </a:p>
-          <a:p xmlns:a="http://schemas.openxmlformats.org/drawingml/2006/main">
-            <a:r>
-              <a:t>- score.py  独立执行</a:t>
-            </a:r>
-          </a:p>
-          <a:p xmlns:a="http://schemas.openxmlformats.org/drawingml/2006/main">
-            <a:r>
-              <a:t>- 协议变更须人工确认</a:t>
-            </a:r>
-          </a:p>
-          <a:p xmlns:a="http://schemas.openxmlformats.org/drawingml/2006/main">
-            <a:r>
-              <a:t>- 执行端禁止读取 gold.json</a:t>
+              <a:t>学生动作：</a:t>
+            </a:r>
+          </a:p>
+          <a:p xmlns:a="http://schemas.openxmlformats.org/drawingml/2006/main">
+            <a:r>
+              <a:t>学生在自己的权限栏分别标出执行端不可读 gold 与独立评价端可读 gold。</a:t>
             </a:r>
           </a:p>
           <a:p xmlns:a="http://schemas.openxmlformats.org/drawingml/2006/main">
@@ -1328,12 +1008,7 @@
           </a:p>
           <a:p xmlns:a="http://schemas.openxmlformats.org/drawingml/2006/main">
             <a:r>
-              <a:t>教师讲述：</a:t>
-            </a:r>
-          </a:p>
-          <a:p xmlns:a="http://schemas.openxmlformats.org/drawingml/2006/main">
-            <a:r>
-              <a:t>左侧 W 指开发阶段允许修改执行代码和写运行目录；进入冻结批次后配置与方法锁定。右侧 gold.json 的 R 仅属于独立评价端，执行端禁止读取或复制 gold，不能将右侧 R 当作全项目权限。输出生成后才交评价端，协议变更由人工审核并另开版本，不回改当前冻结批次。请学生标明角色与拒绝点。</a:t>
+              <a:t>课堂安排：按本稿下方 90 分钟教学路由安排；此页不另占独立时段。</a:t>
             </a:r>
           </a:p>
           <a:p xmlns:a="http://schemas.openxmlformats.org/drawingml/2006/main">
@@ -1343,12 +1018,12 @@
           </a:p>
           <a:p xmlns:a="http://schemas.openxmlformats.org/drawingml/2006/main">
             <a:r>
-              <a:t>学生动作：</a:t>
-            </a:r>
-          </a:p>
-          <a:p xmlns:a="http://schemas.openxmlformats.org/drawingml/2006/main">
-            <a:r>
-              <a:t>学生在自己的权限栏分别标出执行端不可读 gold 与独立评价端可读 gold。</a:t>
+              <a:t>[Sources]</a:t>
+            </a:r>
+          </a:p>
+          <a:p xmlns:a="http://schemas.openxmlformats.org/drawingml/2006/main">
+            <a:r>
+              <a:t>[assignments.md](../../course/assignments.md) 验证门条件；[handout.md §四·3](./handout.md)；[第 11 课讲义](../lesson-11/handout.md)。</a:t>
             </a:r>
           </a:p>
           <a:p xmlns:a="http://schemas.openxmlformats.org/drawingml/2006/main">
@@ -1358,57 +1033,7 @@
           </a:p>
           <a:p xmlns:a="http://schemas.openxmlformats.org/drawingml/2006/main">
             <a:r>
-              <a:t>来源与边界：</a:t>
-            </a:r>
-          </a:p>
-          <a:p xmlns:a="http://schemas.openxmlformats.org/drawingml/2006/main">
-            <a:r>
-              <a:t>[assignments.md](../../course/assignments.md) 验证门条件；[handout.md §四·3](./handout.md)；[第 11 课讲义](../lesson-11/handout.md)。</a:t>
-            </a:r>
-          </a:p>
-          <a:p xmlns:a="http://schemas.openxmlformats.org/drawingml/2006/main">
-            <a:r>
-              <a:t/>
-            </a:r>
-          </a:p>
-          <a:p xmlns:a="http://schemas.openxmlformats.org/drawingml/2006/main">
-            <a:r>
-              <a:t>---</a:t>
-            </a:r>
-          </a:p>
-          <a:p xmlns:a="http://schemas.openxmlformats.org/drawingml/2006/main">
-            <a:r>
-              <a:t/>
-            </a:r>
-          </a:p>
-          <a:p xmlns:a="http://schemas.openxmlformats.org/drawingml/2006/main">
-            <a:r>
-              <a:t>[Sources]</a:t>
-            </a:r>
-          </a:p>
-          <a:p xmlns:a="http://schemas.openxmlformats.org/drawingml/2006/main">
-            <a:r>
-              <a:t/>
-            </a:r>
-          </a:p>
-          <a:p xmlns:a="http://schemas.openxmlformats.org/drawingml/2006/main">
-            <a:r>
-              <a:t>- 本课 handout.md 与 slides.md</a:t>
-            </a:r>
-          </a:p>
-          <a:p xmlns:a="http://schemas.openxmlformats.org/drawingml/2006/main">
-            <a:r>
-              <a:t/>
-            </a:r>
-          </a:p>
-          <a:p xmlns:a="http://schemas.openxmlformats.org/drawingml/2006/main">
-            <a:r>
-              <a:t>- ../../course/reading-card-case.md</a:t>
-            </a:r>
-          </a:p>
-          <a:p xmlns:a="http://schemas.openxmlformats.org/drawingml/2006/main">
-            <a:r>
-              <a:t/>
+              <a:t>本课 handout.md、judgment-task.md；../../course/judgment-path.md。</a:t>
             </a:r>
           </a:p>
           <a:p xmlns:a="http://schemas.openxmlformats.org/drawingml/2006/main">
@@ -1493,7 +1118,12 @@
           </a:p>
           <a:p xmlns:a="http://schemas.openxmlformats.org/drawingml/2006/main">
             <a:r>
-              <a:t>讲义位置：handout.md §五、贯穿案例：把同一阅读卡任务升级为工作流</a:t>
+              <a:t>讲述与校准：</a:t>
+            </a:r>
+          </a:p>
+          <a:p xmlns:a="http://schemas.openxmlformats.org/drawingml/2006/main">
+            <a:r>
+              <a:t>这条工作流服务一个科研动作。学生应选自己项目中的一个动作，不另起一个与原问题脱节的“研究AI是否有效”项目。</a:t>
             </a:r>
           </a:p>
           <a:p xmlns:a="http://schemas.openxmlformats.org/drawingml/2006/main">
@@ -1503,32 +1133,12 @@
           </a:p>
           <a:p xmlns:a="http://schemas.openxmlformats.org/drawingml/2006/main">
             <a:r>
-              <a:t>屏显核对：</a:t>
-            </a:r>
-          </a:p>
-          <a:p xmlns:a="http://schemas.openxmlformats.org/drawingml/2006/main">
-            <a:r>
-              <a:t>任务｜限定条件保留的检查流程</a:t>
-            </a:r>
-          </a:p>
-          <a:p xmlns:a="http://schemas.openxmlformats.org/drawingml/2006/main">
-            <a:r>
-              <a:t>输入｜3 份教学构造源文本与 6 份预置输出</a:t>
-            </a:r>
-          </a:p>
-          <a:p xmlns:a="http://schemas.openxmlformats.org/drawingml/2006/main">
-            <a:r>
-              <a:t>过程｜回放、标注核验、汇总</a:t>
-            </a:r>
-          </a:p>
-          <a:p xmlns:a="http://schemas.openxmlformats.org/drawingml/2006/main">
-            <a:r>
-              <a:t>边界｜固定链；无模型调用；参考标注需人审</a:t>
-            </a:r>
-          </a:p>
-          <a:p xmlns:a="http://schemas.openxmlformats.org/drawingml/2006/main">
-            <a:r>
-              <a:t>输出｜原始记录、结果、失败与局限</a:t>
+              <a:t>学生动作：</a:t>
+            </a:r>
+          </a:p>
+          <a:p xmlns:a="http://schemas.openxmlformats.org/drawingml/2006/main">
+            <a:r>
+              <a:t>用一句话写本人工作流帮助原研究的哪个动作。</a:t>
             </a:r>
           </a:p>
           <a:p xmlns:a="http://schemas.openxmlformats.org/drawingml/2006/main">
@@ -1538,12 +1148,7 @@
           </a:p>
           <a:p xmlns:a="http://schemas.openxmlformats.org/drawingml/2006/main">
             <a:r>
-              <a:t>教师讲述：</a:t>
-            </a:r>
-          </a:p>
-          <a:p xmlns:a="http://schemas.openxmlformats.org/drawingml/2006/main">
-            <a:r>
-              <a:t>这条工作流服务一个科研动作。学生应选自己项目中的一个动作，不另起一个与原问题脱节的“研究AI是否有效”项目。</a:t>
+              <a:t>课堂安排：按本稿下方 90 分钟教学路由安排；此页不另占独立时段。</a:t>
             </a:r>
           </a:p>
           <a:p xmlns:a="http://schemas.openxmlformats.org/drawingml/2006/main">
@@ -1553,12 +1158,12 @@
           </a:p>
           <a:p xmlns:a="http://schemas.openxmlformats.org/drawingml/2006/main">
             <a:r>
-              <a:t>学生动作：</a:t>
-            </a:r>
-          </a:p>
-          <a:p xmlns:a="http://schemas.openxmlformats.org/drawingml/2006/main">
-            <a:r>
-              <a:t>用一句话写本人工作流帮助原研究的哪个动作。</a:t>
+              <a:t>[Sources]</a:t>
+            </a:r>
+          </a:p>
+          <a:p xmlns:a="http://schemas.openxmlformats.org/drawingml/2006/main">
+            <a:r>
+              <a:t>./handout.md；课堂示例与构造数据见 ../../course/reading-card-case.md</a:t>
             </a:r>
           </a:p>
           <a:p xmlns:a="http://schemas.openxmlformats.org/drawingml/2006/main">
@@ -1568,47 +1173,7 @@
           </a:p>
           <a:p xmlns:a="http://schemas.openxmlformats.org/drawingml/2006/main">
             <a:r>
-              <a:t>来源与边界：</a:t>
-            </a:r>
-          </a:p>
-          <a:p xmlns:a="http://schemas.openxmlformats.org/drawingml/2006/main">
-            <a:r>
-              <a:t>./handout.md；课堂示例与构造数据见 ../../course/reading-card-case.md</a:t>
-            </a:r>
-          </a:p>
-          <a:p xmlns:a="http://schemas.openxmlformats.org/drawingml/2006/main">
-            <a:r>
-              <a:t/>
-            </a:r>
-          </a:p>
-          <a:p xmlns:a="http://schemas.openxmlformats.org/drawingml/2006/main">
-            <a:r>
-              <a:t>[Sources]</a:t>
-            </a:r>
-          </a:p>
-          <a:p xmlns:a="http://schemas.openxmlformats.org/drawingml/2006/main">
-            <a:r>
-              <a:t/>
-            </a:r>
-          </a:p>
-          <a:p xmlns:a="http://schemas.openxmlformats.org/drawingml/2006/main">
-            <a:r>
-              <a:t>- 本课 handout.md 与 slides.md</a:t>
-            </a:r>
-          </a:p>
-          <a:p xmlns:a="http://schemas.openxmlformats.org/drawingml/2006/main">
-            <a:r>
-              <a:t/>
-            </a:r>
-          </a:p>
-          <a:p xmlns:a="http://schemas.openxmlformats.org/drawingml/2006/main">
-            <a:r>
-              <a:t>- ../../course/reading-card-case.md</a:t>
-            </a:r>
-          </a:p>
-          <a:p xmlns:a="http://schemas.openxmlformats.org/drawingml/2006/main">
-            <a:r>
-              <a:t/>
+              <a:t>本课 handout.md、judgment-task.md；../../course/judgment-path.md。</a:t>
             </a:r>
           </a:p>
           <a:p xmlns:a="http://schemas.openxmlformats.org/drawingml/2006/main">
@@ -1693,7 +1258,12 @@
           </a:p>
           <a:p xmlns:a="http://schemas.openxmlformats.org/drawingml/2006/main">
             <a:r>
-              <a:t>讲义位置：handout.md §五、贯穿案例：把同一阅读卡任务升级为工作流</a:t>
+              <a:t>讲述与校准：</a:t>
+            </a:r>
+          </a:p>
+          <a:p xmlns:a="http://schemas.openxmlformats.org/drawingml/2006/main">
+            <a:r>
+              <a:t>使用lesson-11/assets/reading-card-workflow真实目录。固定输出不冒充Agent现场生成；离线仍可执行。人工参考标注只作为教学校准答案，需先隐藏再发答案。</a:t>
             </a:r>
           </a:p>
           <a:p xmlns:a="http://schemas.openxmlformats.org/drawingml/2006/main">
@@ -1703,27 +1273,12 @@
           </a:p>
           <a:p xmlns:a="http://schemas.openxmlformats.org/drawingml/2006/main">
             <a:r>
-              <a:t>屏显核对：</a:t>
-            </a:r>
-          </a:p>
-          <a:p xmlns:a="http://schemas.openxmlformats.org/drawingml/2006/main">
-            <a:r>
-              <a:t>sources / outputs → replay</a:t>
-            </a:r>
-          </a:p>
-          <a:p xmlns:a="http://schemas.openxmlformats.org/drawingml/2006/main">
-            <a:r>
-              <a:t>events / state → 检查执行与恢复</a:t>
-            </a:r>
-          </a:p>
-          <a:p xmlns:a="http://schemas.openxmlformats.org/drawingml/2006/main">
-            <a:r>
-              <a:t>gold / annotations → 人工核验依据</a:t>
-            </a:r>
-          </a:p>
-          <a:p xmlns:a="http://schemas.openxmlformats.org/drawingml/2006/main">
-            <a:r>
-              <a:t>evaluate → evaluation.json</a:t>
+              <a:t>学生动作：</a:t>
+            </a:r>
+          </a:p>
+          <a:p xmlns:a="http://schemas.openxmlformats.org/drawingml/2006/main">
+            <a:r>
+              <a:t>同伴选择T03，复原一次反向追踪。</a:t>
             </a:r>
           </a:p>
           <a:p xmlns:a="http://schemas.openxmlformats.org/drawingml/2006/main">
@@ -1733,7 +1288,7 @@
           </a:p>
           <a:p xmlns:a="http://schemas.openxmlformats.org/drawingml/2006/main">
             <a:r>
-              <a:t>同伴从一个数字反查到输出原句。</a:t>
+              <a:t>课堂安排：按本稿下方 90 分钟教学路由安排；此页不另占独立时段。</a:t>
             </a:r>
           </a:p>
           <a:p xmlns:a="http://schemas.openxmlformats.org/drawingml/2006/main">
@@ -1743,12 +1298,12 @@
           </a:p>
           <a:p xmlns:a="http://schemas.openxmlformats.org/drawingml/2006/main">
             <a:r>
-              <a:t>教师讲述：</a:t>
-            </a:r>
-          </a:p>
-          <a:p xmlns:a="http://schemas.openxmlformats.org/drawingml/2006/main">
-            <a:r>
-              <a:t>使用lesson-11/assets/reading-card-workflow真实目录。固定输出不冒充Agent现场生成；离线仍可执行。人工参考标注只作为教学校准答案，需先隐藏再发答案。</a:t>
+              <a:t>[Sources]</a:t>
+            </a:r>
+          </a:p>
+          <a:p xmlns:a="http://schemas.openxmlformats.org/drawingml/2006/main">
+            <a:r>
+              <a:t>./handout.md；课堂示例与构造数据见 ../../course/reading-card-case.md</a:t>
             </a:r>
           </a:p>
           <a:p xmlns:a="http://schemas.openxmlformats.org/drawingml/2006/main">
@@ -1758,62 +1313,7 @@
           </a:p>
           <a:p xmlns:a="http://schemas.openxmlformats.org/drawingml/2006/main">
             <a:r>
-              <a:t>学生动作：</a:t>
-            </a:r>
-          </a:p>
-          <a:p xmlns:a="http://schemas.openxmlformats.org/drawingml/2006/main">
-            <a:r>
-              <a:t>同伴选择T03，复原一次反向追踪。</a:t>
-            </a:r>
-          </a:p>
-          <a:p xmlns:a="http://schemas.openxmlformats.org/drawingml/2006/main">
-            <a:r>
-              <a:t/>
-            </a:r>
-          </a:p>
-          <a:p xmlns:a="http://schemas.openxmlformats.org/drawingml/2006/main">
-            <a:r>
-              <a:t>来源与边界：</a:t>
-            </a:r>
-          </a:p>
-          <a:p xmlns:a="http://schemas.openxmlformats.org/drawingml/2006/main">
-            <a:r>
-              <a:t>./handout.md；课堂示例与构造数据见 ../../course/reading-card-case.md</a:t>
-            </a:r>
-          </a:p>
-          <a:p xmlns:a="http://schemas.openxmlformats.org/drawingml/2006/main">
-            <a:r>
-              <a:t/>
-            </a:r>
-          </a:p>
-          <a:p xmlns:a="http://schemas.openxmlformats.org/drawingml/2006/main">
-            <a:r>
-              <a:t>[Sources]</a:t>
-            </a:r>
-          </a:p>
-          <a:p xmlns:a="http://schemas.openxmlformats.org/drawingml/2006/main">
-            <a:r>
-              <a:t/>
-            </a:r>
-          </a:p>
-          <a:p xmlns:a="http://schemas.openxmlformats.org/drawingml/2006/main">
-            <a:r>
-              <a:t>- 本课 handout.md 与 slides.md</a:t>
-            </a:r>
-          </a:p>
-          <a:p xmlns:a="http://schemas.openxmlformats.org/drawingml/2006/main">
-            <a:r>
-              <a:t/>
-            </a:r>
-          </a:p>
-          <a:p xmlns:a="http://schemas.openxmlformats.org/drawingml/2006/main">
-            <a:r>
-              <a:t>- ../../course/reading-card-case.md</a:t>
-            </a:r>
-          </a:p>
-          <a:p xmlns:a="http://schemas.openxmlformats.org/drawingml/2006/main">
-            <a:r>
-              <a:t/>
+              <a:t>本课 handout.md、judgment-task.md；../../course/judgment-path.md。</a:t>
             </a:r>
           </a:p>
           <a:p xmlns:a="http://schemas.openxmlformats.org/drawingml/2006/main">
@@ -1898,7 +1398,12 @@
           </a:p>
           <a:p xmlns:a="http://schemas.openxmlformats.org/drawingml/2006/main">
             <a:r>
-              <a:t>讲义位置：handout.md §五、贯穿案例：把同一阅读卡任务升级为工作流</a:t>
+              <a:t>讲述与校准：</a:t>
+            </a:r>
+          </a:p>
+          <a:p xmlns:a="http://schemas.openxmlformats.org/drawingml/2006/main">
+            <a:r>
+              <a:t>运行access-check --role executor --resource gold，检查返回码和日志。直接文件访问不受这个接口保护，所以不要写“模型绝不可能看到gold”。真实项目需按环境配置隔离并验证。</a:t>
             </a:r>
           </a:p>
           <a:p xmlns:a="http://schemas.openxmlformats.org/drawingml/2006/main">
@@ -1908,17 +1413,12 @@
           </a:p>
           <a:p xmlns:a="http://schemas.openxmlformats.org/drawingml/2006/main">
             <a:r>
-              <a:t>屏显核对：</a:t>
-            </a:r>
-          </a:p>
-          <a:p xmlns:a="http://schemas.openxmlformats.org/drawingml/2006/main">
-            <a:r>
-              <a:t>executor 请求 gold → 接口拒绝并记日志</a:t>
-            </a:r>
-          </a:p>
-          <a:p xmlns:a="http://schemas.openxmlformats.org/drawingml/2006/main">
-            <a:r>
-              <a:t>evaluator 按角色读取 → 进入评价</a:t>
+              <a:t>学生动作：</a:t>
+            </a:r>
+          </a:p>
+          <a:p xmlns:a="http://schemas.openxmlformats.org/drawingml/2006/main">
+            <a:r>
+              <a:t>标记权限声明、执行控制和观察证据各在哪里。</a:t>
             </a:r>
           </a:p>
           <a:p xmlns:a="http://schemas.openxmlformats.org/drawingml/2006/main">
@@ -1928,12 +1428,7 @@
           </a:p>
           <a:p xmlns:a="http://schemas.openxmlformats.org/drawingml/2006/main">
             <a:r>
-              <a:t>已展示：通过此入口的角色检查。</a:t>
-            </a:r>
-          </a:p>
-          <a:p xmlns:a="http://schemas.openxmlformats.org/drawingml/2006/main">
-            <a:r>
-              <a:t>尚未展示：操作系统或容器级隔离。</a:t>
+              <a:t>课堂安排：按本稿下方 90 分钟教学路由安排；此页不另占独立时段。</a:t>
             </a:r>
           </a:p>
           <a:p xmlns:a="http://schemas.openxmlformats.org/drawingml/2006/main">
@@ -1943,12 +1438,12 @@
           </a:p>
           <a:p xmlns:a="http://schemas.openxmlformats.org/drawingml/2006/main">
             <a:r>
-              <a:t>教师讲述：</a:t>
-            </a:r>
-          </a:p>
-          <a:p xmlns:a="http://schemas.openxmlformats.org/drawingml/2006/main">
-            <a:r>
-              <a:t>运行access-check --role executor --resource gold，检查返回码和日志。直接文件访问不受这个接口保护，所以不要写“模型绝不可能看到gold”。真实项目需按环境配置隔离并验证。</a:t>
+              <a:t>[Sources]</a:t>
+            </a:r>
+          </a:p>
+          <a:p xmlns:a="http://schemas.openxmlformats.org/drawingml/2006/main">
+            <a:r>
+              <a:t>./handout.md；课堂示例与构造数据见 ../../course/reading-card-case.md</a:t>
             </a:r>
           </a:p>
           <a:p xmlns:a="http://schemas.openxmlformats.org/drawingml/2006/main">
@@ -1958,62 +1453,7 @@
           </a:p>
           <a:p xmlns:a="http://schemas.openxmlformats.org/drawingml/2006/main">
             <a:r>
-              <a:t>学生动作：</a:t>
-            </a:r>
-          </a:p>
-          <a:p xmlns:a="http://schemas.openxmlformats.org/drawingml/2006/main">
-            <a:r>
-              <a:t>标记权限声明、执行控制和观察证据各在哪里。</a:t>
-            </a:r>
-          </a:p>
-          <a:p xmlns:a="http://schemas.openxmlformats.org/drawingml/2006/main">
-            <a:r>
-              <a:t/>
-            </a:r>
-          </a:p>
-          <a:p xmlns:a="http://schemas.openxmlformats.org/drawingml/2006/main">
-            <a:r>
-              <a:t>来源与边界：</a:t>
-            </a:r>
-          </a:p>
-          <a:p xmlns:a="http://schemas.openxmlformats.org/drawingml/2006/main">
-            <a:r>
-              <a:t>./handout.md；课堂示例与构造数据见 ../../course/reading-card-case.md</a:t>
-            </a:r>
-          </a:p>
-          <a:p xmlns:a="http://schemas.openxmlformats.org/drawingml/2006/main">
-            <a:r>
-              <a:t/>
-            </a:r>
-          </a:p>
-          <a:p xmlns:a="http://schemas.openxmlformats.org/drawingml/2006/main">
-            <a:r>
-              <a:t>[Sources]</a:t>
-            </a:r>
-          </a:p>
-          <a:p xmlns:a="http://schemas.openxmlformats.org/drawingml/2006/main">
-            <a:r>
-              <a:t/>
-            </a:r>
-          </a:p>
-          <a:p xmlns:a="http://schemas.openxmlformats.org/drawingml/2006/main">
-            <a:r>
-              <a:t>- 本课 handout.md 与 slides.md</a:t>
-            </a:r>
-          </a:p>
-          <a:p xmlns:a="http://schemas.openxmlformats.org/drawingml/2006/main">
-            <a:r>
-              <a:t/>
-            </a:r>
-          </a:p>
-          <a:p xmlns:a="http://schemas.openxmlformats.org/drawingml/2006/main">
-            <a:r>
-              <a:t>- ../../course/reading-card-case.md</a:t>
-            </a:r>
-          </a:p>
-          <a:p xmlns:a="http://schemas.openxmlformats.org/drawingml/2006/main">
-            <a:r>
-              <a:t/>
+              <a:t>本课 handout.md、judgment-task.md；../../course/judgment-path.md。</a:t>
             </a:r>
           </a:p>
           <a:p xmlns:a="http://schemas.openxmlformats.org/drawingml/2006/main">
@@ -2088,7 +1528,7 @@
           <a:lstStyle xmlns:a="http://schemas.openxmlformats.org/drawingml/2006/main"/>
           <a:p xmlns:a="http://schemas.openxmlformats.org/drawingml/2006/main">
             <a:r>
-              <a:t>页面：P17 个人实践：先定契约，再走通一条 trace</a:t>
+              <a:t>页面：P17 本人项目：决定、核验与回写</a:t>
             </a:r>
           </a:p>
           <a:p xmlns:a="http://schemas.openxmlformats.org/drawingml/2006/main">
@@ -2098,7 +1538,12 @@
           </a:p>
           <a:p xmlns:a="http://schemas.openxmlformats.org/drawingml/2006/main">
             <a:r>
-              <a:t>讲义位置：本课讲义；见逐页母稿映射表</a:t>
+              <a:t>讲述与校准：</a:t>
+            </a:r>
+          </a:p>
+          <a:p xmlns:a="http://schemas.openxmlformats.org/drawingml/2006/main">
+            <a:r>
+              <a:t>第一段作决定并查证据；中点处理共性卡点；第二段实际回写并验证。A 可以满足当前确定性动作并达标；B 适合确需语义生成时但需人工核验；C 存在选择与评价混用，不能因“更智能”优先。允许自主检索等不同设计，但要证明该决策确需动态信息。课程 Agent Workflow 可由脚本与人工检查点实现，不强制 agent 化。</a:t>
             </a:r>
           </a:p>
           <a:p xmlns:a="http://schemas.openxmlformats.org/drawingml/2006/main">
@@ -2108,12 +1553,12 @@
           </a:p>
           <a:p xmlns:a="http://schemas.openxmlformats.org/drawingml/2006/main">
             <a:r>
-              <a:t>屏显核对：</a:t>
-            </a:r>
-          </a:p>
-          <a:p xmlns:a="http://schemas.openxmlformats.org/drawingml/2006/main">
-            <a:r>
-              <a:t>选第 10–11 课的同一科研动作。</a:t>
+              <a:t>学生动作：</a:t>
+            </a:r>
+          </a:p>
+          <a:p xmlns:a="http://schemas.openxmlformats.org/drawingml/2006/main">
+            <a:r>
+              <a:t>在个人副本接入 L10 校验，或增加分组盲化/任务状态持久化等一个实质环节。对真实输入走通输入→处理→人工检查→评价 trace；输出标明 accepted/rejected 与理由，正常项守恒。</a:t>
             </a:r>
           </a:p>
           <a:p xmlns:a="http://schemas.openxmlformats.org/drawingml/2006/main">
@@ -2123,12 +1568,7 @@
           </a:p>
           <a:p xmlns:a="http://schemas.openxmlformats.org/drawingml/2006/main">
             <a:r>
-              <a:t>先写任务、权限边界与评价路径，标明其他契约缺口。</a:t>
-            </a:r>
-          </a:p>
-          <a:p xmlns:a="http://schemas.openxmlformats.org/drawingml/2006/main">
-            <a:r>
-              <a:t>建立最小目录，走通一条 trace，说明失败如何保留与恢复。</a:t>
+              <a:t>课堂安排：按本稿下方 90 分钟教学路由安排；此页不另占独立时段。</a:t>
             </a:r>
           </a:p>
           <a:p xmlns:a="http://schemas.openxmlformats.org/drawingml/2006/main">
@@ -2138,12 +1578,12 @@
           </a:p>
           <a:p xmlns:a="http://schemas.openxmlformats.org/drawingml/2006/main">
             <a:r>
-              <a:t>完成标志：可运行，或能沿已有记录复现演示。</a:t>
-            </a:r>
-          </a:p>
-          <a:p xmlns:a="http://schemas.openxmlformats.org/drawingml/2006/main">
-            <a:r>
-              <a:t>课堂无需跑完 6 份输出；课后补齐完整契约。</a:t>
+              <a:t>[Sources]</a:t>
+            </a:r>
+          </a:p>
+          <a:p xmlns:a="http://schemas.openxmlformats.org/drawingml/2006/main">
+            <a:r>
+              <a:t>[handout.md §四·4 §七](./handout.md)。</a:t>
             </a:r>
           </a:p>
           <a:p xmlns:a="http://schemas.openxmlformats.org/drawingml/2006/main">
@@ -2153,87 +1593,7 @@
           </a:p>
           <a:p xmlns:a="http://schemas.openxmlformats.org/drawingml/2006/main">
             <a:r>
-              <a:t>教师讲述：</a:t>
-            </a:r>
-          </a:p>
-          <a:p xmlns:a="http://schemas.openxmlformats.org/drawingml/2006/main">
-            <a:r>
-              <a:t>第一段先定契约、权限与模式。课堂环境可用时直接运行最小路径；环境受限时使用教师预置输入和 trace 做可复现演示，不把环境故障变成纸面设计豁免。</a:t>
-            </a:r>
-          </a:p>
-          <a:p xmlns:a="http://schemas.openxmlformats.org/drawingml/2006/main">
-            <a:r>
-              <a:t/>
-            </a:r>
-          </a:p>
-          <a:p xmlns:a="http://schemas.openxmlformats.org/drawingml/2006/main">
-            <a:r>
-              <a:t>学生动作：</a:t>
-            </a:r>
-          </a:p>
-          <a:p xmlns:a="http://schemas.openxmlformats.org/drawingml/2006/main">
-            <a:r>
-              <a:t>本页停留在屏幕上。教师巡视只处理共同卡点。</a:t>
-            </a:r>
-          </a:p>
-          <a:p xmlns:a="http://schemas.openxmlformats.org/drawingml/2006/main">
-            <a:r>
-              <a:t/>
-            </a:r>
-          </a:p>
-          <a:p xmlns:a="http://schemas.openxmlformats.org/drawingml/2006/main">
-            <a:r>
-              <a:t>来源与边界：</a:t>
-            </a:r>
-          </a:p>
-          <a:p xmlns:a="http://schemas.openxmlformats.org/drawingml/2006/main">
-            <a:r>
-              <a:t>[handout.md §四·4 §七](./handout.md)。</a:t>
-            </a:r>
-          </a:p>
-          <a:p xmlns:a="http://schemas.openxmlformats.org/drawingml/2006/main">
-            <a:r>
-              <a:t/>
-            </a:r>
-          </a:p>
-          <a:p xmlns:a="http://schemas.openxmlformats.org/drawingml/2006/main">
-            <a:r>
-              <a:t>---</a:t>
-            </a:r>
-          </a:p>
-          <a:p xmlns:a="http://schemas.openxmlformats.org/drawingml/2006/main">
-            <a:r>
-              <a:t/>
-            </a:r>
-          </a:p>
-          <a:p xmlns:a="http://schemas.openxmlformats.org/drawingml/2006/main">
-            <a:r>
-              <a:t>[Sources]</a:t>
-            </a:r>
-          </a:p>
-          <a:p xmlns:a="http://schemas.openxmlformats.org/drawingml/2006/main">
-            <a:r>
-              <a:t/>
-            </a:r>
-          </a:p>
-          <a:p xmlns:a="http://schemas.openxmlformats.org/drawingml/2006/main">
-            <a:r>
-              <a:t>- 本课 handout.md 与 slides.md</a:t>
-            </a:r>
-          </a:p>
-          <a:p xmlns:a="http://schemas.openxmlformats.org/drawingml/2006/main">
-            <a:r>
-              <a:t/>
-            </a:r>
-          </a:p>
-          <a:p xmlns:a="http://schemas.openxmlformats.org/drawingml/2006/main">
-            <a:r>
-              <a:t>- ../../course/reading-card-case.md</a:t>
-            </a:r>
-          </a:p>
-          <a:p xmlns:a="http://schemas.openxmlformats.org/drawingml/2006/main">
-            <a:r>
-              <a:t/>
+              <a:t>本课 handout.md、judgment-task.md；../../course/judgment-path.md。教学构造仅用于方法判断；本人结果以实际记录为准。</a:t>
             </a:r>
           </a:p>
           <a:p xmlns:a="http://schemas.openxmlformats.org/drawingml/2006/main">
@@ -2318,7 +1678,12 @@
           </a:p>
           <a:p xmlns:a="http://schemas.openxmlformats.org/drawingml/2006/main">
             <a:r>
-              <a:t>讲义位置：本课讲义；见逐页母稿映射表</a:t>
+              <a:t>讲述与校准：</a:t>
+            </a:r>
+          </a:p>
+          <a:p xmlns:a="http://schemas.openxmlformats.org/drawingml/2006/main">
+            <a:r>
+              <a:t>教师先用共性样例做中点点评，再让学生继续完成最小原型或可复现演示，抽查 Context / Memory、权限栏、trace、评价计划与失败恢复。第 13 课基于课前已有运行结果完成评价、影响报告、证据回写与合规更新。</a:t>
             </a:r>
           </a:p>
           <a:p xmlns:a="http://schemas.openxmlformats.org/drawingml/2006/main">
@@ -2328,47 +1693,12 @@
           </a:p>
           <a:p xmlns:a="http://schemas.openxmlformats.org/drawingml/2006/main">
             <a:r>
-              <a:t>屏显核对：</a:t>
-            </a:r>
-          </a:p>
-          <a:p xmlns:a="http://schemas.openxmlformats.org/drawingml/2006/main">
-            <a:r>
-              <a:t>- 契约 / Context</a:t>
-            </a:r>
-          </a:p>
-          <a:p xmlns:a="http://schemas.openxmlformats.org/drawingml/2006/main">
-            <a:r>
-              <a:t>- 输入输出与状态能否反查？</a:t>
-            </a:r>
-          </a:p>
-          <a:p xmlns:a="http://schemas.openxmlformats.org/drawingml/2006/main">
-            <a:r>
-              <a:t>- 权限 / 循环</a:t>
-            </a:r>
-          </a:p>
-          <a:p xmlns:a="http://schemas.openxmlformats.org/drawingml/2006/main">
-            <a:r>
-              <a:t>- 外部动作何时停？</a:t>
-            </a:r>
-          </a:p>
-          <a:p xmlns:a="http://schemas.openxmlformats.org/drawingml/2006/main">
-            <a:r>
-              <a:t>- 工件 / Evals</a:t>
-            </a:r>
-          </a:p>
-          <a:p xmlns:a="http://schemas.openxmlformats.org/drawingml/2006/main">
-            <a:r>
-              <a:t>- 运行与评价是否隔离？</a:t>
-            </a:r>
-          </a:p>
-          <a:p xmlns:a="http://schemas.openxmlformats.org/drawingml/2006/main">
-            <a:r>
-              <a:t>- 人工审核 / 恢复</a:t>
-            </a:r>
-          </a:p>
-          <a:p xmlns:a="http://schemas.openxmlformats.org/drawingml/2006/main">
-            <a:r>
-              <a:t>- 失败是否保留并改变下一步？</a:t>
+              <a:t>学生动作：</a:t>
+            </a:r>
+          </a:p>
+          <a:p xmlns:a="http://schemas.openxmlformats.org/drawingml/2006/main">
+            <a:r>
+              <a:t>教师中点点评后，学生对照清单继续实现或演示，生成 trace 并补失败恢复规则。</a:t>
             </a:r>
           </a:p>
           <a:p xmlns:a="http://schemas.openxmlformats.org/drawingml/2006/main">
@@ -2378,12 +1708,7 @@
           </a:p>
           <a:p xmlns:a="http://schemas.openxmlformats.org/drawingml/2006/main">
             <a:r>
-              <a:t>教师讲述：</a:t>
-            </a:r>
-          </a:p>
-          <a:p xmlns:a="http://schemas.openxmlformats.org/drawingml/2006/main">
-            <a:r>
-              <a:t>教师先用共性样例做中点点评，再让学生继续完成最小原型或可复现演示，抽查 Context / Memory、权限栏、trace、评价计划与失败恢复。第 13 课基于课前已有运行结果完成评价、影响报告、证据回写与合规更新。</a:t>
+              <a:t>课堂安排：按本稿下方 90 分钟教学路由安排；此页不另占独立时段。</a:t>
             </a:r>
           </a:p>
           <a:p xmlns:a="http://schemas.openxmlformats.org/drawingml/2006/main">
@@ -2393,12 +1718,12 @@
           </a:p>
           <a:p xmlns:a="http://schemas.openxmlformats.org/drawingml/2006/main">
             <a:r>
-              <a:t>学生动作：</a:t>
-            </a:r>
-          </a:p>
-          <a:p xmlns:a="http://schemas.openxmlformats.org/drawingml/2006/main">
-            <a:r>
-              <a:t>教师中点点评后，学生对照清单继续实现或演示，生成 trace 并补失败恢复规则。</a:t>
+              <a:t>[Sources]</a:t>
+            </a:r>
+          </a:p>
+          <a:p xmlns:a="http://schemas.openxmlformats.org/drawingml/2006/main">
+            <a:r>
+              <a:t>[assignments.md](../../course/assignments.md) 验证门条件；[handout.md §四·3](./handout.md)。</a:t>
             </a:r>
           </a:p>
           <a:p xmlns:a="http://schemas.openxmlformats.org/drawingml/2006/main">
@@ -2408,57 +1733,7 @@
           </a:p>
           <a:p xmlns:a="http://schemas.openxmlformats.org/drawingml/2006/main">
             <a:r>
-              <a:t>来源与边界：</a:t>
-            </a:r>
-          </a:p>
-          <a:p xmlns:a="http://schemas.openxmlformats.org/drawingml/2006/main">
-            <a:r>
-              <a:t>[assignments.md](../../course/assignments.md) 验证门条件；[handout.md §四·3](./handout.md)。</a:t>
-            </a:r>
-          </a:p>
-          <a:p xmlns:a="http://schemas.openxmlformats.org/drawingml/2006/main">
-            <a:r>
-              <a:t/>
-            </a:r>
-          </a:p>
-          <a:p xmlns:a="http://schemas.openxmlformats.org/drawingml/2006/main">
-            <a:r>
-              <a:t>---</a:t>
-            </a:r>
-          </a:p>
-          <a:p xmlns:a="http://schemas.openxmlformats.org/drawingml/2006/main">
-            <a:r>
-              <a:t/>
-            </a:r>
-          </a:p>
-          <a:p xmlns:a="http://schemas.openxmlformats.org/drawingml/2006/main">
-            <a:r>
-              <a:t>[Sources]</a:t>
-            </a:r>
-          </a:p>
-          <a:p xmlns:a="http://schemas.openxmlformats.org/drawingml/2006/main">
-            <a:r>
-              <a:t/>
-            </a:r>
-          </a:p>
-          <a:p xmlns:a="http://schemas.openxmlformats.org/drawingml/2006/main">
-            <a:r>
-              <a:t>- 本课 handout.md 与 slides.md</a:t>
-            </a:r>
-          </a:p>
-          <a:p xmlns:a="http://schemas.openxmlformats.org/drawingml/2006/main">
-            <a:r>
-              <a:t/>
-            </a:r>
-          </a:p>
-          <a:p xmlns:a="http://schemas.openxmlformats.org/drawingml/2006/main">
-            <a:r>
-              <a:t>- ../../course/reading-card-case.md</a:t>
-            </a:r>
-          </a:p>
-          <a:p xmlns:a="http://schemas.openxmlformats.org/drawingml/2006/main">
-            <a:r>
-              <a:t/>
+              <a:t>本课 handout.md、judgment-task.md；../../course/judgment-path.md。</a:t>
             </a:r>
           </a:p>
           <a:p xmlns:a="http://schemas.openxmlformats.org/drawingml/2006/main">
@@ -2543,7 +1818,12 @@
           </a:p>
           <a:p xmlns:a="http://schemas.openxmlformats.org/drawingml/2006/main">
             <a:r>
-              <a:t>讲义位置：本课讲义；见逐页母稿映射表</a:t>
+              <a:t>讲述与校准：</a:t>
+            </a:r>
+          </a:p>
+          <a:p xmlns:a="http://schemas.openxmlformats.org/drawingml/2006/main">
+            <a:r>
+              <a:t>每人约 3 分钟：一人 45 秒说明动作和契约；同伴按三问反馈；作者记录处理决定。反馈不要求立即改写。</a:t>
             </a:r>
           </a:p>
           <a:p xmlns:a="http://schemas.openxmlformats.org/drawingml/2006/main">
@@ -2553,37 +1833,12 @@
           </a:p>
           <a:p xmlns:a="http://schemas.openxmlformats.org/drawingml/2006/main">
             <a:r>
-              <a:t>屏显核对：</a:t>
-            </a:r>
-          </a:p>
-          <a:p xmlns:a="http://schemas.openxmlformats.org/drawingml/2006/main">
-            <a:r>
-              <a:t>- 作者的最小工作流</a:t>
-            </a:r>
-          </a:p>
-          <a:p xmlns:a="http://schemas.openxmlformats.org/drawingml/2006/main">
-            <a:r>
-              <a:t>- 边界｜哪些动作不交给 Agent</a:t>
-            </a:r>
-          </a:p>
-          <a:p xmlns:a="http://schemas.openxmlformats.org/drawingml/2006/main">
-            <a:r>
-              <a:t>- 越权｜哪个节点必须停</a:t>
-            </a:r>
-          </a:p>
-          <a:p xmlns:a="http://schemas.openxmlformats.org/drawingml/2006/main">
-            <a:r>
-              <a:t>- baseline｜与什么比较，如何评分</a:t>
-            </a:r>
-          </a:p>
-          <a:p xmlns:a="http://schemas.openxmlformats.org/drawingml/2006/main">
-            <a:r>
-              <a:t>- 同伴只提问题</a:t>
-            </a:r>
-          </a:p>
-          <a:p xmlns:a="http://schemas.openxmlformats.org/drawingml/2006/main">
-            <a:r>
-              <a:t>- 作者记录处理方式与真实理由</a:t>
+              <a:t>学生动作：</a:t>
+            </a:r>
+          </a:p>
+          <a:p xmlns:a="http://schemas.openxmlformats.org/drawingml/2006/main">
+            <a:r>
+              <a:t>两人互查；人数为奇数时组成三人组，每人缩短说明时间。</a:t>
             </a:r>
           </a:p>
           <a:p xmlns:a="http://schemas.openxmlformats.org/drawingml/2006/main">
@@ -2593,12 +1848,7 @@
           </a:p>
           <a:p xmlns:a="http://schemas.openxmlformats.org/drawingml/2006/main">
             <a:r>
-              <a:t>教师讲述：</a:t>
-            </a:r>
-          </a:p>
-          <a:p xmlns:a="http://schemas.openxmlformats.org/drawingml/2006/main">
-            <a:r>
-              <a:t>每人约 3 分钟：一人 45 秒说明动作和契约；同伴按三问反馈；作者记录处理决定。反馈不要求立即改写。</a:t>
+              <a:t>课堂安排：按本稿下方 90 分钟教学路由安排；此页不另占独立时段。</a:t>
             </a:r>
           </a:p>
           <a:p xmlns:a="http://schemas.openxmlformats.org/drawingml/2006/main">
@@ -2608,12 +1858,12 @@
           </a:p>
           <a:p xmlns:a="http://schemas.openxmlformats.org/drawingml/2006/main">
             <a:r>
-              <a:t>学生动作：</a:t>
-            </a:r>
-          </a:p>
-          <a:p xmlns:a="http://schemas.openxmlformats.org/drawingml/2006/main">
-            <a:r>
-              <a:t>两人互查；人数为奇数时组成三人组，每人缩短说明时间。</a:t>
+              <a:t>[Sources]</a:t>
+            </a:r>
+          </a:p>
+          <a:p xmlns:a="http://schemas.openxmlformats.org/drawingml/2006/main">
+            <a:r>
+              <a:t>同伴反馈为形成性活动，不单独计分，不共同提交。</a:t>
             </a:r>
           </a:p>
           <a:p xmlns:a="http://schemas.openxmlformats.org/drawingml/2006/main">
@@ -2623,57 +1873,7 @@
           </a:p>
           <a:p xmlns:a="http://schemas.openxmlformats.org/drawingml/2006/main">
             <a:r>
-              <a:t>来源与边界：</a:t>
-            </a:r>
-          </a:p>
-          <a:p xmlns:a="http://schemas.openxmlformats.org/drawingml/2006/main">
-            <a:r>
-              <a:t>同伴反馈为形成性活动，不单独计分，不共同提交。</a:t>
-            </a:r>
-          </a:p>
-          <a:p xmlns:a="http://schemas.openxmlformats.org/drawingml/2006/main">
-            <a:r>
-              <a:t/>
-            </a:r>
-          </a:p>
-          <a:p xmlns:a="http://schemas.openxmlformats.org/drawingml/2006/main">
-            <a:r>
-              <a:t>---</a:t>
-            </a:r>
-          </a:p>
-          <a:p xmlns:a="http://schemas.openxmlformats.org/drawingml/2006/main">
-            <a:r>
-              <a:t/>
-            </a:r>
-          </a:p>
-          <a:p xmlns:a="http://schemas.openxmlformats.org/drawingml/2006/main">
-            <a:r>
-              <a:t>[Sources]</a:t>
-            </a:r>
-          </a:p>
-          <a:p xmlns:a="http://schemas.openxmlformats.org/drawingml/2006/main">
-            <a:r>
-              <a:t/>
-            </a:r>
-          </a:p>
-          <a:p xmlns:a="http://schemas.openxmlformats.org/drawingml/2006/main">
-            <a:r>
-              <a:t>- 本课 handout.md 与 slides.md</a:t>
-            </a:r>
-          </a:p>
-          <a:p xmlns:a="http://schemas.openxmlformats.org/drawingml/2006/main">
-            <a:r>
-              <a:t/>
-            </a:r>
-          </a:p>
-          <a:p xmlns:a="http://schemas.openxmlformats.org/drawingml/2006/main">
-            <a:r>
-              <a:t>- ../../course/reading-card-case.md</a:t>
-            </a:r>
-          </a:p>
-          <a:p xmlns:a="http://schemas.openxmlformats.org/drawingml/2006/main">
-            <a:r>
-              <a:t/>
+              <a:t>本课 handout.md、judgment-task.md；../../course/judgment-path.md。</a:t>
             </a:r>
           </a:p>
           <a:p xmlns:a="http://schemas.openxmlformats.org/drawingml/2006/main">
@@ -2748,7 +1948,7 @@
           <a:lstStyle xmlns:a="http://schemas.openxmlformats.org/drawingml/2006/main"/>
           <a:p xmlns:a="http://schemas.openxmlformats.org/drawingml/2006/main">
             <a:r>
-              <a:t>页面：P02 八个设计决定围绕同一工作流展开</a:t>
+              <a:t>页面：P02 这个任务需要多少自主性</a:t>
             </a:r>
           </a:p>
           <a:p xmlns:a="http://schemas.openxmlformats.org/drawingml/2006/main">
@@ -2758,7 +1958,12 @@
           </a:p>
           <a:p xmlns:a="http://schemas.openxmlformats.org/drawingml/2006/main">
             <a:r>
-              <a:t>讲义位置：本课讲义；见逐页母稿映射表</a:t>
+              <a:t>讲述与校准：</a:t>
+            </a:r>
+          </a:p>
+          <a:p xmlns:a="http://schemas.openxmlformats.org/drawingml/2006/main">
+            <a:r>
+              <a:t>先独立作答，再同伴比较；以下依据只在校准时揭示。</a:t>
             </a:r>
           </a:p>
           <a:p xmlns:a="http://schemas.openxmlformats.org/drawingml/2006/main">
@@ -2768,87 +1973,7 @@
           </a:p>
           <a:p xmlns:a="http://schemas.openxmlformats.org/drawingml/2006/main">
             <a:r>
-              <a:t>屏显核对：</a:t>
-            </a:r>
-          </a:p>
-          <a:p xmlns:a="http://schemas.openxmlformats.org/drawingml/2006/main">
-            <a:r>
-              <a:t>- 任务契约</a:t>
-            </a:r>
-          </a:p>
-          <a:p xmlns:a="http://schemas.openxmlformats.org/drawingml/2006/main">
-            <a:r>
-              <a:t>- 输入输出与边界</a:t>
-            </a:r>
-          </a:p>
-          <a:p xmlns:a="http://schemas.openxmlformats.org/drawingml/2006/main">
-            <a:r>
-              <a:t>- Context / 状态</a:t>
-            </a:r>
-          </a:p>
-          <a:p xmlns:a="http://schemas.openxmlformats.org/drawingml/2006/main">
-            <a:r>
-              <a:t>- 可审计工件</a:t>
-            </a:r>
-          </a:p>
-          <a:p xmlns:a="http://schemas.openxmlformats.org/drawingml/2006/main">
-            <a:r>
-              <a:t>- 工具权限</a:t>
-            </a:r>
-          </a:p>
-          <a:p xmlns:a="http://schemas.openxmlformats.org/drawingml/2006/main">
-            <a:r>
-              <a:t>- 五档与确认点</a:t>
-            </a:r>
-          </a:p>
-          <a:p xmlns:a="http://schemas.openxmlformats.org/drawingml/2006/main">
-            <a:r>
-              <a:t>- 执行循环</a:t>
-            </a:r>
-          </a:p>
-          <a:p xmlns:a="http://schemas.openxmlformats.org/drawingml/2006/main">
-            <a:r>
-              <a:t>- 继承 L11 冻结循环</a:t>
-            </a:r>
-          </a:p>
-          <a:p xmlns:a="http://schemas.openxmlformats.org/drawingml/2006/main">
-            <a:r>
-              <a:t>- 工件追踪</a:t>
-            </a:r>
-          </a:p>
-          <a:p xmlns:a="http://schemas.openxmlformats.org/drawingml/2006/main">
-            <a:r>
-              <a:t>- run ID</a:t>
-            </a:r>
-          </a:p>
-          <a:p xmlns:a="http://schemas.openxmlformats.org/drawingml/2006/main">
-            <a:r>
-              <a:t>- Evals</a:t>
-            </a:r>
-          </a:p>
-          <a:p xmlns:a="http://schemas.openxmlformats.org/drawingml/2006/main">
-            <a:r>
-              <a:t>- 独立评价</a:t>
-            </a:r>
-          </a:p>
-          <a:p xmlns:a="http://schemas.openxmlformats.org/drawingml/2006/main">
-            <a:r>
-              <a:t>- 人工审核</a:t>
-            </a:r>
-          </a:p>
-          <a:p xmlns:a="http://schemas.openxmlformats.org/drawingml/2006/main">
-            <a:r>
-              <a:t>- 研究决定</a:t>
-            </a:r>
-          </a:p>
-          <a:p xmlns:a="http://schemas.openxmlformats.org/drawingml/2006/main">
-            <a:r>
-              <a:t>- 失败恢复</a:t>
-            </a:r>
-          </a:p>
-          <a:p xmlns:a="http://schemas.openxmlformats.org/drawingml/2006/main">
-            <a:r>
-              <a:t>- 保留 trace</a:t>
+              <a:t>A 可以满足当前确定性动作并达标；B 适合确需语义生成时但需人工核验；C 存在选择与评价混用，不能因“更智能”优先。允许自主检索等不同设计，但要证明该决策确需动态信息。课程 Agent Workflow 可由脚本与人工检查点实现，不强制 agent 化。</a:t>
             </a:r>
           </a:p>
           <a:p xmlns:a="http://schemas.openxmlformats.org/drawingml/2006/main">
@@ -2858,12 +1983,12 @@
           </a:p>
           <a:p xmlns:a="http://schemas.openxmlformats.org/drawingml/2006/main">
             <a:r>
-              <a:t>教师讲述：</a:t>
-            </a:r>
-          </a:p>
-          <a:p xmlns:a="http://schemas.openxmlformats.org/drawingml/2006/main">
-            <a:r>
-              <a:t>先以 AutoResearch commit 228791f 拆解真实 program.md，再回到同一阅读卡任务设计个人工作流。八要素是课程分析框架，不能声称原项目已完整实现课程权限或审核制度。P03–P08 只补前两课尚未显式化的设计决定。</a:t>
+              <a:t>学生动作：</a:t>
+            </a:r>
+          </a:p>
+          <a:p xmlns:a="http://schemas.openxmlformats.org/drawingml/2006/main">
+            <a:r>
+              <a:t>先独立写决定和证据，后同伴比较；校准后再回写。</a:t>
             </a:r>
           </a:p>
           <a:p xmlns:a="http://schemas.openxmlformats.org/drawingml/2006/main">
@@ -2873,12 +1998,7 @@
           </a:p>
           <a:p xmlns:a="http://schemas.openxmlformats.org/drawingml/2006/main">
             <a:r>
-              <a:t>学生动作：</a:t>
-            </a:r>
-          </a:p>
-          <a:p xmlns:a="http://schemas.openxmlformats.org/drawingml/2006/main">
-            <a:r>
-              <a:t>让学生预测：现成 Skill 通常在哪几项上最不透明？请学生打开或领取拆解卡模板。</a:t>
+              <a:t>课堂安排：按本稿下方 90 分钟教学路由安排；此页不另占独立时段。</a:t>
             </a:r>
           </a:p>
           <a:p xmlns:a="http://schemas.openxmlformats.org/drawingml/2006/main">
@@ -2888,12 +2008,12 @@
           </a:p>
           <a:p xmlns:a="http://schemas.openxmlformats.org/drawingml/2006/main">
             <a:r>
-              <a:t>本课板书、诊断与串词：</a:t>
-            </a:r>
-          </a:p>
-          <a:p xmlns:a="http://schemas.openxmlformats.org/drawingml/2006/main">
-            <a:r>
-              <a:t>本节替换同类口头提示，不增加既有时段。开场诊断嵌入现有开场/回顾，后续再沿原实践时段操作。</a:t>
+              <a:t>[Sources]</a:t>
+            </a:r>
+          </a:p>
+          <a:p xmlns:a="http://schemas.openxmlformats.org/drawingml/2006/main">
+            <a:r>
+              <a:t>[AutoResearch `program.md`（固定 commit `228791f`）](https://github.com/karpathy/autoresearch/blob/228791fb499afffb54b46200aca536f79142f117/program.md)；[handout.md §二](./handout.md)。2026-09-13 回源核验；工程案例字段摘述，课程迁移要求另行标明，不作为通用自主科研能力证据。</a:t>
             </a:r>
           </a:p>
           <a:p xmlns:a="http://schemas.openxmlformats.org/drawingml/2006/main">
@@ -2903,107 +2023,7 @@
           </a:p>
           <a:p xmlns:a="http://schemas.openxmlformats.org/drawingml/2006/main">
             <a:r>
-              <a:t>- **板书主线**：科研动作 → 输入 → 执行 → 评价 → 人工判断。</a:t>
-            </a:r>
-          </a:p>
-          <a:p xmlns:a="http://schemas.openxmlformats.org/drawingml/2006/main">
-            <a:r>
-              <a:t>- **诊断问题**：接口拒绝gold，能否证明任意程序都读不到它？</a:t>
-            </a:r>
-          </a:p>
-          <a:p xmlns:a="http://schemas.openxmlformats.org/drawingml/2006/main">
-            <a:r>
-              <a:t>- **预期回答**：不能，只证明该入口的角色控制；真实隔离另验。</a:t>
-            </a:r>
-          </a:p>
-          <a:p xmlns:a="http://schemas.openxmlformats.org/drawingml/2006/main">
-            <a:r>
-              <a:t>- **常见误答后的追问**：若选型只写Agent，先问固定链为何不足。</a:t>
-            </a:r>
-          </a:p>
-          <a:p xmlns:a="http://schemas.openxmlformats.org/drawingml/2006/main">
-            <a:r>
-              <a:t>- **过渡串词**：“有了可演示路径，第13课用已有结果评价它的实际影响。”</a:t>
-            </a:r>
-          </a:p>
-          <a:p xmlns:a="http://schemas.openxmlformats.org/drawingml/2006/main">
-            <a:r>
-              <a:t>- **当堂最小产出**：一个本人科研动作的工作流说明和可演示路径。</a:t>
-            </a:r>
-          </a:p>
-          <a:p xmlns:a="http://schemas.openxmlformats.org/drawingml/2006/main">
-            <a:r>
-              <a:t>- **退出记录**：写“已完成的动作、本人项目仍缺的证据/工件、下次补齐位置”。使用教师包时标明课堂方法练习，不能据此宣称本人研究门通过；正式提交课次仍为第 6、9、13、16 课。</a:t>
-            </a:r>
-          </a:p>
-          <a:p xmlns:a="http://schemas.openxmlformats.org/drawingml/2006/main">
-            <a:r>
-              <a:t/>
-            </a:r>
-          </a:p>
-          <a:p xmlns:a="http://schemas.openxmlformats.org/drawingml/2006/main">
-            <a:r>
-              <a:t>来源与边界：</a:t>
-            </a:r>
-          </a:p>
-          <a:p xmlns:a="http://schemas.openxmlformats.org/drawingml/2006/main">
-            <a:r>
-              <a:t>[AutoResearch `program.md`（固定 commit `228791f`）](https://github.com/karpathy/autoresearch/blob/228791fb499afffb54b46200aca536f79142f117/program.md)；[handout.md §二](./handout.md)。2026-09-13 回源核验；工程案例字段摘述，课程迁移要求另行标明，不作为通用自主科研能力证据。</a:t>
-            </a:r>
-          </a:p>
-          <a:p xmlns:a="http://schemas.openxmlformats.org/drawingml/2006/main">
-            <a:r>
-              <a:t/>
-            </a:r>
-          </a:p>
-          <a:p xmlns:a="http://schemas.openxmlformats.org/drawingml/2006/main">
-            <a:r>
-              <a:t>---</a:t>
-            </a:r>
-          </a:p>
-          <a:p xmlns:a="http://schemas.openxmlformats.org/drawingml/2006/main">
-            <a:r>
-              <a:t/>
-            </a:r>
-          </a:p>
-          <a:p xmlns:a="http://schemas.openxmlformats.org/drawingml/2006/main">
-            <a:r>
-              <a:t>[Sources]</a:t>
-            </a:r>
-          </a:p>
-          <a:p xmlns:a="http://schemas.openxmlformats.org/drawingml/2006/main">
-            <a:r>
-              <a:t/>
-            </a:r>
-          </a:p>
-          <a:p xmlns:a="http://schemas.openxmlformats.org/drawingml/2006/main">
-            <a:r>
-              <a:t>- https://github.com/karpathy/autoresearch/blob/228791fb499afffb54b46200aca536f79142f117/program.md</a:t>
-            </a:r>
-          </a:p>
-          <a:p xmlns:a="http://schemas.openxmlformats.org/drawingml/2006/main">
-            <a:r>
-              <a:t/>
-            </a:r>
-          </a:p>
-          <a:p xmlns:a="http://schemas.openxmlformats.org/drawingml/2006/main">
-            <a:r>
-              <a:t>- 本课 handout.md 与 slides.md</a:t>
-            </a:r>
-          </a:p>
-          <a:p xmlns:a="http://schemas.openxmlformats.org/drawingml/2006/main">
-            <a:r>
-              <a:t/>
-            </a:r>
-          </a:p>
-          <a:p xmlns:a="http://schemas.openxmlformats.org/drawingml/2006/main">
-            <a:r>
-              <a:t>- ../../course/reading-card-case.md</a:t>
-            </a:r>
-          </a:p>
-          <a:p xmlns:a="http://schemas.openxmlformats.org/drawingml/2006/main">
-            <a:r>
-              <a:t/>
+              <a:t>本课 handout.md、judgment-task.md；../../course/judgment-path.md。教学构造仅用于方法判断；本人结果以实际记录为准。</a:t>
             </a:r>
           </a:p>
           <a:p xmlns:a="http://schemas.openxmlformats.org/drawingml/2006/main">
@@ -3088,7 +2108,12 @@
           </a:p>
           <a:p xmlns:a="http://schemas.openxmlformats.org/drawingml/2006/main">
             <a:r>
-              <a:t>讲义位置：本课讲义；见逐页母稿映射表</a:t>
+              <a:t>讲述与校准：</a:t>
+            </a:r>
+          </a:p>
+          <a:p xmlns:a="http://schemas.openxmlformats.org/drawingml/2006/main">
+            <a:r>
+              <a:t>回收八要素契约、权限、Evals 与失败恢复的关系。本页不新增任务。</a:t>
             </a:r>
           </a:p>
           <a:p xmlns:a="http://schemas.openxmlformats.org/drawingml/2006/main">
@@ -3098,47 +2123,12 @@
           </a:p>
           <a:p xmlns:a="http://schemas.openxmlformats.org/drawingml/2006/main">
             <a:r>
-              <a:t>屏显核对：</a:t>
-            </a:r>
-          </a:p>
-          <a:p xmlns:a="http://schemas.openxmlformats.org/drawingml/2006/main">
-            <a:r>
-              <a:t>- 八要素契约</a:t>
-            </a:r>
-          </a:p>
-          <a:p xmlns:a="http://schemas.openxmlformats.org/drawingml/2006/main">
-            <a:r>
-              <a:t>- 本讲输入</a:t>
-            </a:r>
-          </a:p>
-          <a:p xmlns:a="http://schemas.openxmlformats.org/drawingml/2006/main">
-            <a:r>
-              <a:t>- 权限与循环</a:t>
-            </a:r>
-          </a:p>
-          <a:p xmlns:a="http://schemas.openxmlformats.org/drawingml/2006/main">
-            <a:r>
-              <a:t>- 本讲执行</a:t>
-            </a:r>
-          </a:p>
-          <a:p xmlns:a="http://schemas.openxmlformats.org/drawingml/2006/main">
-            <a:r>
-              <a:t>- 独立评价</a:t>
-            </a:r>
-          </a:p>
-          <a:p xmlns:a="http://schemas.openxmlformats.org/drawingml/2006/main">
-            <a:r>
-              <a:t>- 本讲证据</a:t>
-            </a:r>
-          </a:p>
-          <a:p xmlns:a="http://schemas.openxmlformats.org/drawingml/2006/main">
-            <a:r>
-              <a:t>- 失败 trace</a:t>
-            </a:r>
-          </a:p>
-          <a:p xmlns:a="http://schemas.openxmlformats.org/drawingml/2006/main">
-            <a:r>
-              <a:t>- 下一步</a:t>
+              <a:t>学生动作：</a:t>
+            </a:r>
+          </a:p>
+          <a:p xmlns:a="http://schemas.openxmlformats.org/drawingml/2006/main">
+            <a:r>
+              <a:t>学生指出第 13 课验证前最需要补齐的一项。</a:t>
             </a:r>
           </a:p>
           <a:p xmlns:a="http://schemas.openxmlformats.org/drawingml/2006/main">
@@ -3148,12 +2138,7 @@
           </a:p>
           <a:p xmlns:a="http://schemas.openxmlformats.org/drawingml/2006/main">
             <a:r>
-              <a:t>教师讲述：</a:t>
-            </a:r>
-          </a:p>
-          <a:p xmlns:a="http://schemas.openxmlformats.org/drawingml/2006/main">
-            <a:r>
-              <a:t>回收八要素契约、权限、Evals 与失败恢复的关系。本页不新增任务。</a:t>
+              <a:t>课堂安排：按本稿下方 90 分钟教学路由安排；此页不另占独立时段。</a:t>
             </a:r>
           </a:p>
           <a:p xmlns:a="http://schemas.openxmlformats.org/drawingml/2006/main">
@@ -3163,12 +2148,12 @@
           </a:p>
           <a:p xmlns:a="http://schemas.openxmlformats.org/drawingml/2006/main">
             <a:r>
-              <a:t>学生动作：</a:t>
-            </a:r>
-          </a:p>
-          <a:p xmlns:a="http://schemas.openxmlformats.org/drawingml/2006/main">
-            <a:r>
-              <a:t>学生指出第 13 课验证前最需要补齐的一项。</a:t>
+              <a:t>[Sources]</a:t>
+            </a:r>
+          </a:p>
+          <a:p xmlns:a="http://schemas.openxmlformats.org/drawingml/2006/main">
+            <a:r>
+              <a:t>[handout.md](./handout.md) §二-§六；[teaching-plan.md](./teaching-plan.md) 第四至六节。</a:t>
             </a:r>
           </a:p>
           <a:p xmlns:a="http://schemas.openxmlformats.org/drawingml/2006/main">
@@ -3178,57 +2163,7 @@
           </a:p>
           <a:p xmlns:a="http://schemas.openxmlformats.org/drawingml/2006/main">
             <a:r>
-              <a:t>来源与边界：</a:t>
-            </a:r>
-          </a:p>
-          <a:p xmlns:a="http://schemas.openxmlformats.org/drawingml/2006/main">
-            <a:r>
-              <a:t>[handout.md](./handout.md) §二-§六；[teaching-plan.md](./teaching-plan.md) 第四至六节。</a:t>
-            </a:r>
-          </a:p>
-          <a:p xmlns:a="http://schemas.openxmlformats.org/drawingml/2006/main">
-            <a:r>
-              <a:t/>
-            </a:r>
-          </a:p>
-          <a:p xmlns:a="http://schemas.openxmlformats.org/drawingml/2006/main">
-            <a:r>
-              <a:t>---</a:t>
-            </a:r>
-          </a:p>
-          <a:p xmlns:a="http://schemas.openxmlformats.org/drawingml/2006/main">
-            <a:r>
-              <a:t/>
-            </a:r>
-          </a:p>
-          <a:p xmlns:a="http://schemas.openxmlformats.org/drawingml/2006/main">
-            <a:r>
-              <a:t>[Sources]</a:t>
-            </a:r>
-          </a:p>
-          <a:p xmlns:a="http://schemas.openxmlformats.org/drawingml/2006/main">
-            <a:r>
-              <a:t/>
-            </a:r>
-          </a:p>
-          <a:p xmlns:a="http://schemas.openxmlformats.org/drawingml/2006/main">
-            <a:r>
-              <a:t>- 本课 handout.md 与 slides.md</a:t>
-            </a:r>
-          </a:p>
-          <a:p xmlns:a="http://schemas.openxmlformats.org/drawingml/2006/main">
-            <a:r>
-              <a:t/>
-            </a:r>
-          </a:p>
-          <a:p xmlns:a="http://schemas.openxmlformats.org/drawingml/2006/main">
-            <a:r>
-              <a:t>- ../../course/reading-card-case.md</a:t>
-            </a:r>
-          </a:p>
-          <a:p xmlns:a="http://schemas.openxmlformats.org/drawingml/2006/main">
-            <a:r>
-              <a:t/>
+              <a:t>本课 handout.md、judgment-task.md；../../course/judgment-path.md。</a:t>
             </a:r>
           </a:p>
           <a:p xmlns:a="http://schemas.openxmlformats.org/drawingml/2006/main">
@@ -3303,7 +2238,7 @@
           <a:lstStyle xmlns:a="http://schemas.openxmlformats.org/drawingml/2006/main"/>
           <a:p xmlns:a="http://schemas.openxmlformats.org/drawingml/2006/main">
             <a:r>
-              <a:t>页面：P21 把真实运行结果带到第 13 课</a:t>
+              <a:t>页面：P21 保留本课决定，准备下一课输入</a:t>
             </a:r>
           </a:p>
           <a:p xmlns:a="http://schemas.openxmlformats.org/drawingml/2006/main">
@@ -3313,7 +2248,12 @@
           </a:p>
           <a:p xmlns:a="http://schemas.openxmlformats.org/drawingml/2006/main">
             <a:r>
-              <a:t>讲义位置：本课讲义；见逐页母稿映射表</a:t>
+              <a:t>讲述与校准：</a:t>
+            </a:r>
+          </a:p>
+          <a:p xmlns:a="http://schemas.openxmlformats.org/drawingml/2006/main">
+            <a:r>
+              <a:t>仅修未走通的一个环节并补运行说明；不要求接入 MCP 或付费模型。 每课课外最多60分钟；详见讲义。</a:t>
             </a:r>
           </a:p>
           <a:p xmlns:a="http://schemas.openxmlformats.org/drawingml/2006/main">
@@ -3323,37 +2263,12 @@
           </a:p>
           <a:p xmlns:a="http://schemas.openxmlformats.org/drawingml/2006/main">
             <a:r>
-              <a:t>屏显核对：</a:t>
-            </a:r>
-          </a:p>
-          <a:p xmlns:a="http://schemas.openxmlformats.org/drawingml/2006/main">
-            <a:r>
-              <a:t>- L10 / 受限执行</a:t>
-            </a:r>
-          </a:p>
-          <a:p xmlns:a="http://schemas.openxmlformats.org/drawingml/2006/main">
-            <a:r>
-              <a:t>- L11 / 冻结循环</a:t>
-            </a:r>
-          </a:p>
-          <a:p xmlns:a="http://schemas.openxmlformats.org/drawingml/2006/main">
-            <a:r>
-              <a:t>- L12 / 最小工作流</a:t>
-            </a:r>
-          </a:p>
-          <a:p xmlns:a="http://schemas.openxmlformats.org/drawingml/2006/main">
-            <a:r>
-              <a:t>- 当前位置 / 输出</a:t>
-            </a:r>
-          </a:p>
-          <a:p xmlns:a="http://schemas.openxmlformats.org/drawingml/2006/main">
-            <a:r>
-              <a:t>- L13 / 评价</a:t>
-            </a:r>
-          </a:p>
-          <a:p xmlns:a="http://schemas.openxmlformats.org/drawingml/2006/main">
-            <a:r>
-              <a:t>- 课前带来：结果对照｜失败 trace｜人工审核记录</a:t>
+              <a:t>学生动作：</a:t>
+            </a:r>
+          </a:p>
+          <a:p xmlns:a="http://schemas.openxmlformats.org/drawingml/2006/main">
+            <a:r>
+              <a:t>定位实际工件与下一项动作；按既定预算收口。</a:t>
             </a:r>
           </a:p>
           <a:p xmlns:a="http://schemas.openxmlformats.org/drawingml/2006/main">
@@ -3363,12 +2278,7 @@
           </a:p>
           <a:p xmlns:a="http://schemas.openxmlformats.org/drawingml/2006/main">
             <a:r>
-              <a:t>教师讲述：</a:t>
-            </a:r>
-          </a:p>
-          <a:p xmlns:a="http://schemas.openxmlformats.org/drawingml/2006/main">
-            <a:r>
-              <a:t>回扣本课目标：学生已形成一份可审计的工作流说明、可运行或可复现演示的最小原型、trace 和评价计划。课后补齐批量运行结果与失败记录；第 13 课直接用已有结果完成评价和失败复盘，不从零重跑完整研究。</a:t>
+              <a:t>课堂安排：按本稿下方 90 分钟教学路由安排；此页不另占独立时段。</a:t>
             </a:r>
           </a:p>
           <a:p xmlns:a="http://schemas.openxmlformats.org/drawingml/2006/main">
@@ -3378,12 +2288,12 @@
           </a:p>
           <a:p xmlns:a="http://schemas.openxmlformats.org/drawingml/2006/main">
             <a:r>
-              <a:t>学生动作：</a:t>
-            </a:r>
-          </a:p>
-          <a:p xmlns:a="http://schemas.openxmlformats.org/drawingml/2006/main">
-            <a:r>
-              <a:t>学生提交退出卡或保存在个人项目 `notes/`。</a:t>
+              <a:t>[Sources]</a:t>
+            </a:r>
+          </a:p>
+          <a:p xmlns:a="http://schemas.openxmlformats.org/drawingml/2006/main">
+            <a:r>
+              <a:t>[assignments.md](../../course/assignments.md) 验证门条件；[reading-list.md](../../course/reading-list.md) 第 12-13 课。</a:t>
             </a:r>
           </a:p>
           <a:p xmlns:a="http://schemas.openxmlformats.org/drawingml/2006/main">
@@ -3393,47 +2303,7 @@
           </a:p>
           <a:p xmlns:a="http://schemas.openxmlformats.org/drawingml/2006/main">
             <a:r>
-              <a:t>来源与边界：</a:t>
-            </a:r>
-          </a:p>
-          <a:p xmlns:a="http://schemas.openxmlformats.org/drawingml/2006/main">
-            <a:r>
-              <a:t>[assignments.md](../../course/assignments.md) 验证门条件；[reading-list.md](../../course/reading-list.md) 第 12-13 课。</a:t>
-            </a:r>
-          </a:p>
-          <a:p xmlns:a="http://schemas.openxmlformats.org/drawingml/2006/main">
-            <a:r>
-              <a:t/>
-            </a:r>
-          </a:p>
-          <a:p xmlns:a="http://schemas.openxmlformats.org/drawingml/2006/main">
-            <a:r>
-              <a:t>[Sources]</a:t>
-            </a:r>
-          </a:p>
-          <a:p xmlns:a="http://schemas.openxmlformats.org/drawingml/2006/main">
-            <a:r>
-              <a:t/>
-            </a:r>
-          </a:p>
-          <a:p xmlns:a="http://schemas.openxmlformats.org/drawingml/2006/main">
-            <a:r>
-              <a:t>- 本课 handout.md 与 slides.md</a:t>
-            </a:r>
-          </a:p>
-          <a:p xmlns:a="http://schemas.openxmlformats.org/drawingml/2006/main">
-            <a:r>
-              <a:t/>
-            </a:r>
-          </a:p>
-          <a:p xmlns:a="http://schemas.openxmlformats.org/drawingml/2006/main">
-            <a:r>
-              <a:t>- ../../course/reading-card-case.md</a:t>
-            </a:r>
-          </a:p>
-          <a:p xmlns:a="http://schemas.openxmlformats.org/drawingml/2006/main">
-            <a:r>
-              <a:t/>
+              <a:t>本课 handout.md、judgment-task.md；../../course/judgment-path.md。教学构造仅用于方法判断；本人结果以实际记录为准。</a:t>
             </a:r>
           </a:p>
           <a:p xmlns:a="http://schemas.openxmlformats.org/drawingml/2006/main">
@@ -3518,7 +2388,12 @@
           </a:p>
           <a:p xmlns:a="http://schemas.openxmlformats.org/drawingml/2006/main">
             <a:r>
-              <a:t>讲义位置：本课讲义；见逐页母稿映射表</a:t>
+              <a:t>讲述与校准：</a:t>
+            </a:r>
+          </a:p>
+          <a:p xmlns:a="http://schemas.openxmlformats.org/drawingml/2006/main">
+            <a:r>
+              <a:t>这是固定 commit 的真实契约字段摘述。单次训练预算为 300 秒，不含启动与编译；原项目优化 val_bpb，只允许改训练代码，不许改 prepare.py、评价函数或增依赖。日志是允许生成的工件，因此“仅修改 train.py”特指实验代码范围。右侧是课程阅读卡的迁移要求，属于不同任务。请学生从左侧指出两条禁止项。</a:t>
             </a:r>
           </a:p>
           <a:p xmlns:a="http://schemas.openxmlformats.org/drawingml/2006/main">
@@ -3528,42 +2403,12 @@
           </a:p>
           <a:p xmlns:a="http://schemas.openxmlformats.org/drawingml/2006/main">
             <a:r>
-              <a:t>屏显核对：</a:t>
-            </a:r>
-          </a:p>
-          <a:p xmlns:a="http://schemas.openxmlformats.org/drawingml/2006/main">
-            <a:r>
-              <a:t>- program.md · 228791f</a:t>
-            </a:r>
-          </a:p>
-          <a:p xmlns:a="http://schemas.openxmlformats.org/drawingml/2006/main">
-            <a:r>
-              <a:t>- 目标：降低验证集 val_bpb</a:t>
-            </a:r>
-          </a:p>
-          <a:p xmlns:a="http://schemas.openxmlformats.org/drawingml/2006/main">
-            <a:r>
-              <a:t>- 读取：README.md 与 prepare.py</a:t>
-            </a:r>
-          </a:p>
-          <a:p xmlns:a="http://schemas.openxmlformats.org/drawingml/2006/main">
-            <a:r>
-              <a:t>- 代码改动：仅 train.py</a:t>
-            </a:r>
-          </a:p>
-          <a:p xmlns:a="http://schemas.openxmlformats.org/drawingml/2006/main">
-            <a:r>
-              <a:t>- 禁止：改评价函数、添加依赖</a:t>
-            </a:r>
-          </a:p>
-          <a:p xmlns:a="http://schemas.openxmlformats.org/drawingml/2006/main">
-            <a:r>
-              <a:t>- 产出：run.log、results.tsv 与 commit</a:t>
-            </a:r>
-          </a:p>
-          <a:p xmlns:a="http://schemas.openxmlformats.org/drawingml/2006/main">
-            <a:r>
-              <a:t>- 课程阅读卡任务 /  / 固定论文与配置 / 保留全部输出 / 独立人工基准评价</a:t>
+              <a:t>学生动作：</a:t>
+            </a:r>
+          </a:p>
+          <a:p xmlns:a="http://schemas.openxmlformats.org/drawingml/2006/main">
+            <a:r>
+              <a:t>请学生指出 AutoResearch 契约里的两个禁止项，并说出自己工作流的输入和成功标准各一句。</a:t>
             </a:r>
           </a:p>
           <a:p xmlns:a="http://schemas.openxmlformats.org/drawingml/2006/main">
@@ -3573,12 +2418,7 @@
           </a:p>
           <a:p xmlns:a="http://schemas.openxmlformats.org/drawingml/2006/main">
             <a:r>
-              <a:t>教师讲述：</a:t>
-            </a:r>
-          </a:p>
-          <a:p xmlns:a="http://schemas.openxmlformats.org/drawingml/2006/main">
-            <a:r>
-              <a:t>这是固定 commit 的真实契约字段摘述。单次训练预算为 300 秒，不含启动与编译；原项目优化 val_bpb，只允许改训练代码，不许改 prepare.py、评价函数或增依赖。日志是允许生成的工件，因此“仅修改 train.py”特指实验代码范围。右侧是课程阅读卡的迁移要求，属于不同任务。请学生从左侧指出两条禁止项。</a:t>
+              <a:t>课堂安排：按本稿下方 90 分钟教学路由安排；此页不另占独立时段。</a:t>
             </a:r>
           </a:p>
           <a:p xmlns:a="http://schemas.openxmlformats.org/drawingml/2006/main">
@@ -3588,12 +2428,12 @@
           </a:p>
           <a:p xmlns:a="http://schemas.openxmlformats.org/drawingml/2006/main">
             <a:r>
-              <a:t>学生动作：</a:t>
-            </a:r>
-          </a:p>
-          <a:p xmlns:a="http://schemas.openxmlformats.org/drawingml/2006/main">
-            <a:r>
-              <a:t>请学生指出 AutoResearch 契约里的两个禁止项，并说出自己工作流的输入和成功标准各一句。</a:t>
+              <a:t>[Sources]</a:t>
+            </a:r>
+          </a:p>
+          <a:p xmlns:a="http://schemas.openxmlformats.org/drawingml/2006/main">
+            <a:r>
+              <a:t>[AutoResearch `program.md`（固定 commit `228791f`）](https://github.com/karpathy/autoresearch/blob/228791fb499afffb54b46200aca536f79142f117/program.md)；[handout.md §二](./handout.md)。2026-09-13 回源核验；工程案例字段摘述，课程迁移要求另行标明，不作为通用自主科研能力证据。</a:t>
             </a:r>
           </a:p>
           <a:p xmlns:a="http://schemas.openxmlformats.org/drawingml/2006/main">
@@ -3603,67 +2443,7 @@
           </a:p>
           <a:p xmlns:a="http://schemas.openxmlformats.org/drawingml/2006/main">
             <a:r>
-              <a:t>来源与边界：</a:t>
-            </a:r>
-          </a:p>
-          <a:p xmlns:a="http://schemas.openxmlformats.org/drawingml/2006/main">
-            <a:r>
-              <a:t>[AutoResearch `program.md`（固定 commit `228791f`）](https://github.com/karpathy/autoresearch/blob/228791fb499afffb54b46200aca536f79142f117/program.md)；[handout.md §二](./handout.md)。2026-09-13 回源核验；工程案例字段摘述，课程迁移要求另行标明，不作为通用自主科研能力证据。</a:t>
-            </a:r>
-          </a:p>
-          <a:p xmlns:a="http://schemas.openxmlformats.org/drawingml/2006/main">
-            <a:r>
-              <a:t/>
-            </a:r>
-          </a:p>
-          <a:p xmlns:a="http://schemas.openxmlformats.org/drawingml/2006/main">
-            <a:r>
-              <a:t>---</a:t>
-            </a:r>
-          </a:p>
-          <a:p xmlns:a="http://schemas.openxmlformats.org/drawingml/2006/main">
-            <a:r>
-              <a:t/>
-            </a:r>
-          </a:p>
-          <a:p xmlns:a="http://schemas.openxmlformats.org/drawingml/2006/main">
-            <a:r>
-              <a:t>[Sources]</a:t>
-            </a:r>
-          </a:p>
-          <a:p xmlns:a="http://schemas.openxmlformats.org/drawingml/2006/main">
-            <a:r>
-              <a:t/>
-            </a:r>
-          </a:p>
-          <a:p xmlns:a="http://schemas.openxmlformats.org/drawingml/2006/main">
-            <a:r>
-              <a:t>- https://github.com/karpathy/autoresearch/blob/228791fb499afffb54b46200aca536f79142f117/program.md</a:t>
-            </a:r>
-          </a:p>
-          <a:p xmlns:a="http://schemas.openxmlformats.org/drawingml/2006/main">
-            <a:r>
-              <a:t/>
-            </a:r>
-          </a:p>
-          <a:p xmlns:a="http://schemas.openxmlformats.org/drawingml/2006/main">
-            <a:r>
-              <a:t>- 本课 handout.md 与 slides.md</a:t>
-            </a:r>
-          </a:p>
-          <a:p xmlns:a="http://schemas.openxmlformats.org/drawingml/2006/main">
-            <a:r>
-              <a:t/>
-            </a:r>
-          </a:p>
-          <a:p xmlns:a="http://schemas.openxmlformats.org/drawingml/2006/main">
-            <a:r>
-              <a:t>- ../../course/reading-card-case.md</a:t>
-            </a:r>
-          </a:p>
-          <a:p xmlns:a="http://schemas.openxmlformats.org/drawingml/2006/main">
-            <a:r>
-              <a:t/>
+              <a:t>本课 handout.md、judgment-task.md；../../course/judgment-path.md。</a:t>
             </a:r>
           </a:p>
           <a:p xmlns:a="http://schemas.openxmlformats.org/drawingml/2006/main">
@@ -3748,7 +2528,12 @@
           </a:p>
           <a:p xmlns:a="http://schemas.openxmlformats.org/drawingml/2006/main">
             <a:r>
-              <a:t>讲义位置：本课讲义；见逐页母稿映射表</a:t>
+              <a:t>讲述与校准：</a:t>
+            </a:r>
+          </a:p>
+          <a:p xmlns:a="http://schemas.openxmlformats.org/drawingml/2006/main">
+            <a:r>
+              <a:t>README.md、prepare.py、train.py 是原文规定的上下文。Git、run.log 和 results.tsv 承担不同状态角色，不能用聊天记忆替代。原项目每次重写 run.log；跨实验追踪依赖账本。课程阅读卡要补每个 run ID 的输入快照与独立日志，不能只留下最后一次日志。请学生列出自己的最小 Context。</a:t>
             </a:r>
           </a:p>
           <a:p xmlns:a="http://schemas.openxmlformats.org/drawingml/2006/main">
@@ -3758,47 +2543,12 @@
           </a:p>
           <a:p xmlns:a="http://schemas.openxmlformats.org/drawingml/2006/main">
             <a:r>
-              <a:t>屏显核对：</a:t>
-            </a:r>
-          </a:p>
-          <a:p xmlns:a="http://schemas.openxmlformats.org/drawingml/2006/main">
-            <a:r>
-              <a:t>- Context：读取的文件</a:t>
-            </a:r>
-          </a:p>
-          <a:p xmlns:a="http://schemas.openxmlformats.org/drawingml/2006/main">
-            <a:r>
-              <a:t>- 状态：实验后留下什么</a:t>
-            </a:r>
-          </a:p>
-          <a:p xmlns:a="http://schemas.openxmlformats.org/drawingml/2006/main">
-            <a:r>
-              <a:t>- README.md：仓库说明</a:t>
-            </a:r>
-          </a:p>
-          <a:p xmlns:a="http://schemas.openxmlformats.org/drawingml/2006/main">
-            <a:r>
-              <a:t>- prepare.py：数据与评价</a:t>
-            </a:r>
-          </a:p>
-          <a:p xmlns:a="http://schemas.openxmlformats.org/drawingml/2006/main">
-            <a:r>
-              <a:t>- train.py：训练实现</a:t>
-            </a:r>
-          </a:p>
-          <a:p xmlns:a="http://schemas.openxmlformats.org/drawingml/2006/main">
-            <a:r>
-              <a:t>- Git commit：代码版本</a:t>
-            </a:r>
-          </a:p>
-          <a:p xmlns:a="http://schemas.openxmlformats.org/drawingml/2006/main">
-            <a:r>
-              <a:t>- run.log：本次运行输出</a:t>
-            </a:r>
-          </a:p>
-          <a:p xmlns:a="http://schemas.openxmlformats.org/drawingml/2006/main">
-            <a:r>
-              <a:t>- results.tsv：跨实验账本</a:t>
+              <a:t>学生动作：</a:t>
+            </a:r>
+          </a:p>
+          <a:p xmlns:a="http://schemas.openxmlformats.org/drawingml/2006/main">
+            <a:r>
+              <a:t>请学生判断：你最近一次用 Agent 时，状态主要存在哪？并列出自己工作流应给 Agent 的最小材料清单。</a:t>
             </a:r>
           </a:p>
           <a:p xmlns:a="http://schemas.openxmlformats.org/drawingml/2006/main">
@@ -3808,12 +2558,7 @@
           </a:p>
           <a:p xmlns:a="http://schemas.openxmlformats.org/drawingml/2006/main">
             <a:r>
-              <a:t>教师讲述：</a:t>
-            </a:r>
-          </a:p>
-          <a:p xmlns:a="http://schemas.openxmlformats.org/drawingml/2006/main">
-            <a:r>
-              <a:t>README.md、prepare.py、train.py 是原文规定的上下文。Git、run.log 和 results.tsv 承担不同状态角色，不能用聊天记忆替代。原项目每次重写 run.log；跨实验追踪依赖账本。课程阅读卡要补每个 run ID 的输入快照与独立日志，不能只留下最后一次日志。请学生列出自己的最小 Context。</a:t>
+              <a:t>课堂安排：按本稿下方 90 分钟教学路由安排；此页不另占独立时段。</a:t>
             </a:r>
           </a:p>
           <a:p xmlns:a="http://schemas.openxmlformats.org/drawingml/2006/main">
@@ -3823,12 +2568,12 @@
           </a:p>
           <a:p xmlns:a="http://schemas.openxmlformats.org/drawingml/2006/main">
             <a:r>
-              <a:t>学生动作：</a:t>
-            </a:r>
-          </a:p>
-          <a:p xmlns:a="http://schemas.openxmlformats.org/drawingml/2006/main">
-            <a:r>
-              <a:t>请学生判断：你最近一次用 Agent 时，状态主要存在哪？并列出自己工作流应给 Agent 的最小材料清单。</a:t>
+              <a:t>[Sources]</a:t>
+            </a:r>
+          </a:p>
+          <a:p xmlns:a="http://schemas.openxmlformats.org/drawingml/2006/main">
+            <a:r>
+              <a:t>[AutoResearch `program.md`（固定 commit `228791f`）](https://github.com/karpathy/autoresearch/blob/228791fb499afffb54b46200aca536f79142f117/program.md)；[handout.md §二](./handout.md)。2026-09-13 回源核验；工程案例字段摘述，课程迁移要求另行标明，不作为通用自主科研能力证据。</a:t>
             </a:r>
           </a:p>
           <a:p xmlns:a="http://schemas.openxmlformats.org/drawingml/2006/main">
@@ -3838,67 +2583,7 @@
           </a:p>
           <a:p xmlns:a="http://schemas.openxmlformats.org/drawingml/2006/main">
             <a:r>
-              <a:t>来源与边界：</a:t>
-            </a:r>
-          </a:p>
-          <a:p xmlns:a="http://schemas.openxmlformats.org/drawingml/2006/main">
-            <a:r>
-              <a:t>[AutoResearch `program.md`（固定 commit `228791f`）](https://github.com/karpathy/autoresearch/blob/228791fb499afffb54b46200aca536f79142f117/program.md)；[handout.md §二](./handout.md)。2026-09-13 回源核验；工程案例字段摘述，课程迁移要求另行标明，不作为通用自主科研能力证据。</a:t>
-            </a:r>
-          </a:p>
-          <a:p xmlns:a="http://schemas.openxmlformats.org/drawingml/2006/main">
-            <a:r>
-              <a:t/>
-            </a:r>
-          </a:p>
-          <a:p xmlns:a="http://schemas.openxmlformats.org/drawingml/2006/main">
-            <a:r>
-              <a:t>---</a:t>
-            </a:r>
-          </a:p>
-          <a:p xmlns:a="http://schemas.openxmlformats.org/drawingml/2006/main">
-            <a:r>
-              <a:t/>
-            </a:r>
-          </a:p>
-          <a:p xmlns:a="http://schemas.openxmlformats.org/drawingml/2006/main">
-            <a:r>
-              <a:t>[Sources]</a:t>
-            </a:r>
-          </a:p>
-          <a:p xmlns:a="http://schemas.openxmlformats.org/drawingml/2006/main">
-            <a:r>
-              <a:t/>
-            </a:r>
-          </a:p>
-          <a:p xmlns:a="http://schemas.openxmlformats.org/drawingml/2006/main">
-            <a:r>
-              <a:t>- https://github.com/karpathy/autoresearch/blob/228791fb499afffb54b46200aca536f79142f117/program.md</a:t>
-            </a:r>
-          </a:p>
-          <a:p xmlns:a="http://schemas.openxmlformats.org/drawingml/2006/main">
-            <a:r>
-              <a:t/>
-            </a:r>
-          </a:p>
-          <a:p xmlns:a="http://schemas.openxmlformats.org/drawingml/2006/main">
-            <a:r>
-              <a:t>- 本课 handout.md 与 slides.md</a:t>
-            </a:r>
-          </a:p>
-          <a:p xmlns:a="http://schemas.openxmlformats.org/drawingml/2006/main">
-            <a:r>
-              <a:t/>
-            </a:r>
-          </a:p>
-          <a:p xmlns:a="http://schemas.openxmlformats.org/drawingml/2006/main">
-            <a:r>
-              <a:t>- ../../course/reading-card-case.md</a:t>
-            </a:r>
-          </a:p>
-          <a:p xmlns:a="http://schemas.openxmlformats.org/drawingml/2006/main">
-            <a:r>
-              <a:t/>
+              <a:t>本课 handout.md、judgment-task.md；../../course/judgment-path.md。</a:t>
             </a:r>
           </a:p>
           <a:p xmlns:a="http://schemas.openxmlformats.org/drawingml/2006/main">
@@ -3983,7 +2668,12 @@
           </a:p>
           <a:p xmlns:a="http://schemas.openxmlformats.org/drawingml/2006/main">
             <a:r>
-              <a:t>讲义位置：本课讲义；见逐页母稿映射表</a:t>
+              <a:t>讲述与校准：</a:t>
+            </a:r>
+          </a:p>
+          <a:p xmlns:a="http://schemas.openxmlformats.org/drawingml/2006/main">
+            <a:r>
+              <a:t>左侧来自 program.md 的文字约束，不是已验证的操作系统沙箱或默认工具权限。命令要求包含 shell 执行，实际权限由宿主 Agent 配置决定。启动前有人确认设置；循环内并非逐次请求人工确认。右侧是课程另行要求的权限门，禁止把它归为 AutoResearch 原生能力。删除失败记录不属于可确认放行的普通动作。</a:t>
             </a:r>
           </a:p>
           <a:p xmlns:a="http://schemas.openxmlformats.org/drawingml/2006/main">
@@ -3993,62 +2683,12 @@
           </a:p>
           <a:p xmlns:a="http://schemas.openxmlformats.org/drawingml/2006/main">
             <a:r>
-              <a:t>屏显核对：</a:t>
-            </a:r>
-          </a:p>
-          <a:p xmlns:a="http://schemas.openxmlformats.org/drawingml/2006/main">
-            <a:r>
-              <a:t>- program.md 约束摘要</a:t>
-            </a:r>
-          </a:p>
-          <a:p xmlns:a="http://schemas.openxmlformats.org/drawingml/2006/main">
-            <a:r>
-              <a:t>- R  prepare.py</a:t>
-            </a:r>
-          </a:p>
-          <a:p xmlns:a="http://schemas.openxmlformats.org/drawingml/2006/main">
-            <a:r>
-              <a:t>- W  train.py（代码范围）</a:t>
-            </a:r>
-          </a:p>
-          <a:p xmlns:a="http://schemas.openxmlformats.org/drawingml/2006/main">
-            <a:r>
-              <a:t>- X  uv run train.py</a:t>
-            </a:r>
-          </a:p>
-          <a:p xmlns:a="http://schemas.openxmlformats.org/drawingml/2006/main">
-            <a:r>
-              <a:t>- W  run.log / results.tsv（日志）</a:t>
-            </a:r>
-          </a:p>
-          <a:p xmlns:a="http://schemas.openxmlformats.org/drawingml/2006/main">
-            <a:r>
-              <a:t>- !  改评价函数 / 添加依赖</a:t>
-            </a:r>
-          </a:p>
-          <a:p xmlns:a="http://schemas.openxmlformats.org/drawingml/2006/main">
-            <a:r>
-              <a:t>- ?  启动前由人确认设置</a:t>
-            </a:r>
-          </a:p>
-          <a:p xmlns:a="http://schemas.openxmlformats.org/drawingml/2006/main">
-            <a:r>
-              <a:t>- 课程另加的权限门</a:t>
-            </a:r>
-          </a:p>
-          <a:p xmlns:a="http://schemas.openxmlformats.org/drawingml/2006/main">
-            <a:r>
-              <a:t>- □ 外部写入先确认</a:t>
-            </a:r>
-          </a:p>
-          <a:p xmlns:a="http://schemas.openxmlformats.org/drawingml/2006/main">
-            <a:r>
-              <a:t>- □ 禁止读取 gold</a:t>
-            </a:r>
-          </a:p>
-          <a:p xmlns:a="http://schemas.openxmlformats.org/drawingml/2006/main">
-            <a:r>
-              <a:t>- □ 配置变更先确认</a:t>
+              <a:t>学生动作：</a:t>
+            </a:r>
+          </a:p>
+          <a:p xmlns:a="http://schemas.openxmlformats.org/drawingml/2006/main">
+            <a:r>
+              <a:t>请学生指出自己工作流的"需确认"动作至少一项。</a:t>
             </a:r>
           </a:p>
           <a:p xmlns:a="http://schemas.openxmlformats.org/drawingml/2006/main">
@@ -4058,12 +2698,7 @@
           </a:p>
           <a:p xmlns:a="http://schemas.openxmlformats.org/drawingml/2006/main">
             <a:r>
-              <a:t>教师讲述：</a:t>
-            </a:r>
-          </a:p>
-          <a:p xmlns:a="http://schemas.openxmlformats.org/drawingml/2006/main">
-            <a:r>
-              <a:t>左侧来自 program.md 的文字约束，不是已验证的操作系统沙箱或默认工具权限。命令要求包含 shell 执行，实际权限由宿主 Agent 配置决定。启动前有人确认设置；循环内并非逐次请求人工确认。右侧是课程另行要求的权限门，禁止把它归为 AutoResearch 原生能力。删除失败记录不属于可确认放行的普通动作。</a:t>
+              <a:t>课堂安排：按本稿下方 90 分钟教学路由安排；此页不另占独立时段。</a:t>
             </a:r>
           </a:p>
           <a:p xmlns:a="http://schemas.openxmlformats.org/drawingml/2006/main">
@@ -4073,12 +2708,12 @@
           </a:p>
           <a:p xmlns:a="http://schemas.openxmlformats.org/drawingml/2006/main">
             <a:r>
-              <a:t>学生动作：</a:t>
-            </a:r>
-          </a:p>
-          <a:p xmlns:a="http://schemas.openxmlformats.org/drawingml/2006/main">
-            <a:r>
-              <a:t>请学生指出自己工作流的"需确认"动作至少一项。</a:t>
+              <a:t>[Sources]</a:t>
+            </a:r>
+          </a:p>
+          <a:p xmlns:a="http://schemas.openxmlformats.org/drawingml/2006/main">
+            <a:r>
+              <a:t>[AutoResearch `program.md`（固定 commit `228791f`）](https://github.com/karpathy/autoresearch/blob/228791fb499afffb54b46200aca536f79142f117/program.md)；[handout.md §二](./handout.md)。2026-09-13 回源核验；工程案例字段摘述，课程迁移要求另行标明，不作为通用自主科研能力证据。</a:t>
             </a:r>
           </a:p>
           <a:p xmlns:a="http://schemas.openxmlformats.org/drawingml/2006/main">
@@ -4088,67 +2723,7 @@
           </a:p>
           <a:p xmlns:a="http://schemas.openxmlformats.org/drawingml/2006/main">
             <a:r>
-              <a:t>来源与边界：</a:t>
-            </a:r>
-          </a:p>
-          <a:p xmlns:a="http://schemas.openxmlformats.org/drawingml/2006/main">
-            <a:r>
-              <a:t>[AutoResearch `program.md`（固定 commit `228791f`）](https://github.com/karpathy/autoresearch/blob/228791fb499afffb54b46200aca536f79142f117/program.md)；[handout.md §二](./handout.md)。2026-09-13 回源核验；工程案例字段摘述，课程迁移要求另行标明，不作为通用自主科研能力证据。</a:t>
-            </a:r>
-          </a:p>
-          <a:p xmlns:a="http://schemas.openxmlformats.org/drawingml/2006/main">
-            <a:r>
-              <a:t/>
-            </a:r>
-          </a:p>
-          <a:p xmlns:a="http://schemas.openxmlformats.org/drawingml/2006/main">
-            <a:r>
-              <a:t>---</a:t>
-            </a:r>
-          </a:p>
-          <a:p xmlns:a="http://schemas.openxmlformats.org/drawingml/2006/main">
-            <a:r>
-              <a:t/>
-            </a:r>
-          </a:p>
-          <a:p xmlns:a="http://schemas.openxmlformats.org/drawingml/2006/main">
-            <a:r>
-              <a:t>[Sources]</a:t>
-            </a:r>
-          </a:p>
-          <a:p xmlns:a="http://schemas.openxmlformats.org/drawingml/2006/main">
-            <a:r>
-              <a:t/>
-            </a:r>
-          </a:p>
-          <a:p xmlns:a="http://schemas.openxmlformats.org/drawingml/2006/main">
-            <a:r>
-              <a:t>- https://github.com/karpathy/autoresearch/blob/228791fb499afffb54b46200aca536f79142f117/program.md</a:t>
-            </a:r>
-          </a:p>
-          <a:p xmlns:a="http://schemas.openxmlformats.org/drawingml/2006/main">
-            <a:r>
-              <a:t/>
-            </a:r>
-          </a:p>
-          <a:p xmlns:a="http://schemas.openxmlformats.org/drawingml/2006/main">
-            <a:r>
-              <a:t>- 本课 handout.md 与 slides.md</a:t>
-            </a:r>
-          </a:p>
-          <a:p xmlns:a="http://schemas.openxmlformats.org/drawingml/2006/main">
-            <a:r>
-              <a:t/>
-            </a:r>
-          </a:p>
-          <a:p xmlns:a="http://schemas.openxmlformats.org/drawingml/2006/main">
-            <a:r>
-              <a:t>- ../../course/reading-card-case.md</a:t>
-            </a:r>
-          </a:p>
-          <a:p xmlns:a="http://schemas.openxmlformats.org/drawingml/2006/main">
-            <a:r>
-              <a:t/>
+              <a:t>本课 handout.md、judgment-task.md；../../course/judgment-path.md。</a:t>
             </a:r>
           </a:p>
           <a:p xmlns:a="http://schemas.openxmlformats.org/drawingml/2006/main">
@@ -4233,7 +2808,12 @@
           </a:p>
           <a:p xmlns:a="http://schemas.openxmlformats.org/drawingml/2006/main">
             <a:r>
-              <a:t>讲义位置：本课讲义；见逐页母稿映射表</a:t>
+              <a:t>讲述与校准：</a:t>
+            </a:r>
+          </a:p>
+          <a:p xmlns:a="http://schemas.openxmlformats.org/drawingml/2006/main">
+            <a:r>
+              <a:t>AutoResearch 的方法优化循环会改变 train.py，按 val_bpb 决定保留或回退；原文同时要求权衡改进幅度与复杂度。单次训练预算固定不等于总预算固定：外层持续循环直到人工中断。课程冻结队列则不根据输出优劣改方法或删运行，处理预定 6 份后结束。采用原项目设计时须另定总轮次、总预算和人工审核点。请学生说出两种循环停止条件的差别。</a:t>
             </a:r>
           </a:p>
           <a:p xmlns:a="http://schemas.openxmlformats.org/drawingml/2006/main">
@@ -4243,37 +2823,12 @@
           </a:p>
           <a:p xmlns:a="http://schemas.openxmlformats.org/drawingml/2006/main">
             <a:r>
-              <a:t>屏显核对：</a:t>
-            </a:r>
-          </a:p>
-          <a:p xmlns:a="http://schemas.openxmlformats.org/drawingml/2006/main">
-            <a:r>
-              <a:t>| 比较轴 | AutoResearch · 228791f | 课程冻结队列 |</a:t>
-            </a:r>
-          </a:p>
-          <a:p xmlns:a="http://schemas.openxmlformats.org/drawingml/2006/main">
-            <a:r>
-              <a:t>| --- | --- | --- |</a:t>
-            </a:r>
-          </a:p>
-          <a:p xmlns:a="http://schemas.openxmlformats.org/drawingml/2006/main">
-            <a:r>
-              <a:t>| 方法 | 修改 train.py 并评价 | 输入、方法与配置固定 |</a:t>
-            </a:r>
-          </a:p>
-          <a:p xmlns:a="http://schemas.openxmlformats.org/drawingml/2006/main">
-            <a:r>
-              <a:t>| 结果处理 | 按 val_bpb 保留或回退 | 回放并保留全部输出 |</a:t>
-            </a:r>
-          </a:p>
-          <a:p xmlns:a="http://schemas.openxmlformats.org/drawingml/2006/main">
-            <a:r>
-              <a:t>| 账本 | keep / discard / crash | 失败留账，只补未完成项 |</a:t>
-            </a:r>
-          </a:p>
-          <a:p xmlns:a="http://schemas.openxmlformats.org/drawingml/2006/main">
-            <a:r>
-              <a:t>| 停止 | 外层持续循环，人工中断 | 6 个任务完成即停 |</a:t>
+              <a:t>学生动作：</a:t>
+            </a:r>
+          </a:p>
+          <a:p xmlns:a="http://schemas.openxmlformats.org/drawingml/2006/main">
+            <a:r>
+              <a:t>请学生判断自己的科研动作需要固定链还是自主循环，并把自己的工作流对号入座。</a:t>
             </a:r>
           </a:p>
           <a:p xmlns:a="http://schemas.openxmlformats.org/drawingml/2006/main">
@@ -4283,7 +2838,7 @@
           </a:p>
           <a:p xmlns:a="http://schemas.openxmlformats.org/drawingml/2006/main">
             <a:r>
-              <a:t>单次训练预算固定，不等于外层总预算固定。</a:t>
+              <a:t>课堂安排：按本稿下方 90 分钟教学路由安排；此页不另占独立时段。</a:t>
             </a:r>
           </a:p>
           <a:p xmlns:a="http://schemas.openxmlformats.org/drawingml/2006/main">
@@ -4293,12 +2848,12 @@
           </a:p>
           <a:p xmlns:a="http://schemas.openxmlformats.org/drawingml/2006/main">
             <a:r>
-              <a:t>教师讲述：</a:t>
-            </a:r>
-          </a:p>
-          <a:p xmlns:a="http://schemas.openxmlformats.org/drawingml/2006/main">
-            <a:r>
-              <a:t>AutoResearch 的方法优化循环会改变 train.py，按 val_bpb 决定保留或回退；原文同时要求权衡改进幅度与复杂度。单次训练预算固定不等于总预算固定：外层持续循环直到人工中断。课程冻结队列则不根据输出优劣改方法或删运行，处理预定 6 份后结束。采用原项目设计时须另定总轮次、总预算和人工审核点。请学生说出两种循环停止条件的差别。</a:t>
+              <a:t>[Sources]</a:t>
+            </a:r>
+          </a:p>
+          <a:p xmlns:a="http://schemas.openxmlformats.org/drawingml/2006/main">
+            <a:r>
+              <a:t>[AutoResearch `program.md`（固定 commit `228791f`）](https://github.com/karpathy/autoresearch/blob/228791fb499afffb54b46200aca536f79142f117/program.md)；[handout.md §二](./handout.md)。2026-09-13 回源核验；工程案例字段摘述，课程迁移要求另行标明，不作为通用自主科研能力证据。</a:t>
             </a:r>
           </a:p>
           <a:p xmlns:a="http://schemas.openxmlformats.org/drawingml/2006/main">
@@ -4308,82 +2863,7 @@
           </a:p>
           <a:p xmlns:a="http://schemas.openxmlformats.org/drawingml/2006/main">
             <a:r>
-              <a:t>学生动作：</a:t>
-            </a:r>
-          </a:p>
-          <a:p xmlns:a="http://schemas.openxmlformats.org/drawingml/2006/main">
-            <a:r>
-              <a:t>请学生判断自己的科研动作需要固定链还是自主循环，并把自己的工作流对号入座。</a:t>
-            </a:r>
-          </a:p>
-          <a:p xmlns:a="http://schemas.openxmlformats.org/drawingml/2006/main">
-            <a:r>
-              <a:t/>
-            </a:r>
-          </a:p>
-          <a:p xmlns:a="http://schemas.openxmlformats.org/drawingml/2006/main">
-            <a:r>
-              <a:t>来源与边界：</a:t>
-            </a:r>
-          </a:p>
-          <a:p xmlns:a="http://schemas.openxmlformats.org/drawingml/2006/main">
-            <a:r>
-              <a:t>[AutoResearch `program.md`（固定 commit `228791f`）](https://github.com/karpathy/autoresearch/blob/228791fb499afffb54b46200aca536f79142f117/program.md)；[handout.md §二](./handout.md)。2026-09-13 回源核验；工程案例字段摘述，课程迁移要求另行标明，不作为通用自主科研能力证据。</a:t>
-            </a:r>
-          </a:p>
-          <a:p xmlns:a="http://schemas.openxmlformats.org/drawingml/2006/main">
-            <a:r>
-              <a:t/>
-            </a:r>
-          </a:p>
-          <a:p xmlns:a="http://schemas.openxmlformats.org/drawingml/2006/main">
-            <a:r>
-              <a:t>---</a:t>
-            </a:r>
-          </a:p>
-          <a:p xmlns:a="http://schemas.openxmlformats.org/drawingml/2006/main">
-            <a:r>
-              <a:t/>
-            </a:r>
-          </a:p>
-          <a:p xmlns:a="http://schemas.openxmlformats.org/drawingml/2006/main">
-            <a:r>
-              <a:t>[Sources]</a:t>
-            </a:r>
-          </a:p>
-          <a:p xmlns:a="http://schemas.openxmlformats.org/drawingml/2006/main">
-            <a:r>
-              <a:t/>
-            </a:r>
-          </a:p>
-          <a:p xmlns:a="http://schemas.openxmlformats.org/drawingml/2006/main">
-            <a:r>
-              <a:t>- https://github.com/karpathy/autoresearch/blob/228791fb499afffb54b46200aca536f79142f117/program.md</a:t>
-            </a:r>
-          </a:p>
-          <a:p xmlns:a="http://schemas.openxmlformats.org/drawingml/2006/main">
-            <a:r>
-              <a:t/>
-            </a:r>
-          </a:p>
-          <a:p xmlns:a="http://schemas.openxmlformats.org/drawingml/2006/main">
-            <a:r>
-              <a:t>- 本课 handout.md 与 slides.md</a:t>
-            </a:r>
-          </a:p>
-          <a:p xmlns:a="http://schemas.openxmlformats.org/drawingml/2006/main">
-            <a:r>
-              <a:t/>
-            </a:r>
-          </a:p>
-          <a:p xmlns:a="http://schemas.openxmlformats.org/drawingml/2006/main">
-            <a:r>
-              <a:t>- ../../course/reading-card-case.md</a:t>
-            </a:r>
-          </a:p>
-          <a:p xmlns:a="http://schemas.openxmlformats.org/drawingml/2006/main">
-            <a:r>
-              <a:t/>
+              <a:t>本课 handout.md、judgment-task.md；../../course/judgment-path.md。</a:t>
             </a:r>
           </a:p>
           <a:p xmlns:a="http://schemas.openxmlformats.org/drawingml/2006/main">
@@ -4468,7 +2948,12 @@
           </a:p>
           <a:p xmlns:a="http://schemas.openxmlformats.org/drawingml/2006/main">
             <a:r>
-              <a:t>讲义位置：本课讲义；见逐页母稿映射表</a:t>
+              <a:t>讲述与校准：</a:t>
+            </a:r>
+          </a:p>
+          <a:p xmlns:a="http://schemas.openxmlformats.org/drawingml/2006/main">
+            <a:r>
+              <a:t>这里展示真实字段定义，没有填写实验数值，不是系统运行截图。results.tsv 保留 keep、discard、crash 及代码身份；代码回退不等于删除失败账本。原项目将 results.tsv 留在 Git 跟踪之外，课程记录策略应显式安排存放与备份，不照搬为统一规范。阅读卡任务为每次输出绑定 run ID，保留失败和后续人工处置。</a:t>
             </a:r>
           </a:p>
           <a:p xmlns:a="http://schemas.openxmlformats.org/drawingml/2006/main">
@@ -4478,52 +2963,12 @@
           </a:p>
           <a:p xmlns:a="http://schemas.openxmlformats.org/drawingml/2006/main">
             <a:r>
-              <a:t>屏显核对：</a:t>
-            </a:r>
-          </a:p>
-          <a:p xmlns:a="http://schemas.openxmlformats.org/drawingml/2006/main">
-            <a:r>
-              <a:t>- results.tsv 字段 · 228791f</a:t>
-            </a:r>
-          </a:p>
-          <a:p xmlns:a="http://schemas.openxmlformats.org/drawingml/2006/main">
-            <a:r>
-              <a:t>- commit      代码版本</a:t>
-            </a:r>
-          </a:p>
-          <a:p xmlns:a="http://schemas.openxmlformats.org/drawingml/2006/main">
-            <a:r>
-              <a:t>- val_bpb     评价值</a:t>
-            </a:r>
-          </a:p>
-          <a:p xmlns:a="http://schemas.openxmlformats.org/drawingml/2006/main">
-            <a:r>
-              <a:t>- memory_gb   峰值显存</a:t>
-            </a:r>
-          </a:p>
-          <a:p xmlns:a="http://schemas.openxmlformats.org/drawingml/2006/main">
-            <a:r>
-              <a:t>- status      keep / discard / crash</a:t>
-            </a:r>
-          </a:p>
-          <a:p xmlns:a="http://schemas.openxmlformats.org/drawingml/2006/main">
-            <a:r>
-              <a:t>- description 本次尝试</a:t>
-            </a:r>
-          </a:p>
-          <a:p xmlns:a="http://schemas.openxmlformats.org/drawingml/2006/main">
-            <a:r>
-              <a:t>- run.log     本次运行详情</a:t>
-            </a:r>
-          </a:p>
-          <a:p xmlns:a="http://schemas.openxmlformats.org/drawingml/2006/main">
-            <a:r>
-              <a:t>- 课程迁移：日志绑定各自 run ID</a:t>
-            </a:r>
-          </a:p>
-          <a:p xmlns:a="http://schemas.openxmlformats.org/drawingml/2006/main">
-            <a:r>
-              <a:t>- 回退代码 /  / 保留账本 /  / 保留失败 /  / 人工判断</a:t>
+              <a:t>学生动作：</a:t>
+            </a:r>
+          </a:p>
+          <a:p xmlns:a="http://schemas.openxmlformats.org/drawingml/2006/main">
+            <a:r>
+              <a:t>请学生检查自己工作流的一次运行会留下哪些工件。</a:t>
             </a:r>
           </a:p>
           <a:p xmlns:a="http://schemas.openxmlformats.org/drawingml/2006/main">
@@ -4533,12 +2978,7 @@
           </a:p>
           <a:p xmlns:a="http://schemas.openxmlformats.org/drawingml/2006/main">
             <a:r>
-              <a:t>教师讲述：</a:t>
-            </a:r>
-          </a:p>
-          <a:p xmlns:a="http://schemas.openxmlformats.org/drawingml/2006/main">
-            <a:r>
-              <a:t>这里展示真实字段定义，没有填写实验数值，不是系统运行截图。results.tsv 保留 keep、discard、crash 及代码身份；代码回退不等于删除失败账本。原项目将 results.tsv 留在 Git 跟踪之外，课程记录策略应显式安排存放与备份，不照搬为统一规范。阅读卡任务为每次输出绑定 run ID，保留失败和后续人工处置。</a:t>
+              <a:t>课堂安排：按本稿下方 90 分钟教学路由安排；此页不另占独立时段。</a:t>
             </a:r>
           </a:p>
           <a:p xmlns:a="http://schemas.openxmlformats.org/drawingml/2006/main">
@@ -4548,12 +2988,12 @@
           </a:p>
           <a:p xmlns:a="http://schemas.openxmlformats.org/drawingml/2006/main">
             <a:r>
-              <a:t>学生动作：</a:t>
-            </a:r>
-          </a:p>
-          <a:p xmlns:a="http://schemas.openxmlformats.org/drawingml/2006/main">
-            <a:r>
-              <a:t>请学生检查自己工作流的一次运行会留下哪些工件。</a:t>
+              <a:t>[Sources]</a:t>
+            </a:r>
+          </a:p>
+          <a:p xmlns:a="http://schemas.openxmlformats.org/drawingml/2006/main">
+            <a:r>
+              <a:t>[AutoResearch `program.md`（固定 commit `228791f`）](https://github.com/karpathy/autoresearch/blob/228791fb499afffb54b46200aca536f79142f117/program.md)；[handout.md §二](./handout.md)。2026-09-13 回源核验；工程案例字段摘述，课程迁移要求另行标明，不作为通用自主科研能力证据。</a:t>
             </a:r>
           </a:p>
           <a:p xmlns:a="http://schemas.openxmlformats.org/drawingml/2006/main">
@@ -4563,67 +3003,7 @@
           </a:p>
           <a:p xmlns:a="http://schemas.openxmlformats.org/drawingml/2006/main">
             <a:r>
-              <a:t>来源与边界：</a:t>
-            </a:r>
-          </a:p>
-          <a:p xmlns:a="http://schemas.openxmlformats.org/drawingml/2006/main">
-            <a:r>
-              <a:t>[AutoResearch `program.md`（固定 commit `228791f`）](https://github.com/karpathy/autoresearch/blob/228791fb499afffb54b46200aca536f79142f117/program.md)；[handout.md §二](./handout.md)。2026-09-13 回源核验；工程案例字段摘述，课程迁移要求另行标明，不作为通用自主科研能力证据。</a:t>
-            </a:r>
-          </a:p>
-          <a:p xmlns:a="http://schemas.openxmlformats.org/drawingml/2006/main">
-            <a:r>
-              <a:t/>
-            </a:r>
-          </a:p>
-          <a:p xmlns:a="http://schemas.openxmlformats.org/drawingml/2006/main">
-            <a:r>
-              <a:t>---</a:t>
-            </a:r>
-          </a:p>
-          <a:p xmlns:a="http://schemas.openxmlformats.org/drawingml/2006/main">
-            <a:r>
-              <a:t/>
-            </a:r>
-          </a:p>
-          <a:p xmlns:a="http://schemas.openxmlformats.org/drawingml/2006/main">
-            <a:r>
-              <a:t>[Sources]</a:t>
-            </a:r>
-          </a:p>
-          <a:p xmlns:a="http://schemas.openxmlformats.org/drawingml/2006/main">
-            <a:r>
-              <a:t/>
-            </a:r>
-          </a:p>
-          <a:p xmlns:a="http://schemas.openxmlformats.org/drawingml/2006/main">
-            <a:r>
-              <a:t>- https://github.com/karpathy/autoresearch/blob/228791fb499afffb54b46200aca536f79142f117/program.md</a:t>
-            </a:r>
-          </a:p>
-          <a:p xmlns:a="http://schemas.openxmlformats.org/drawingml/2006/main">
-            <a:r>
-              <a:t/>
-            </a:r>
-          </a:p>
-          <a:p xmlns:a="http://schemas.openxmlformats.org/drawingml/2006/main">
-            <a:r>
-              <a:t>- 本课 handout.md 与 slides.md</a:t>
-            </a:r>
-          </a:p>
-          <a:p xmlns:a="http://schemas.openxmlformats.org/drawingml/2006/main">
-            <a:r>
-              <a:t/>
-            </a:r>
-          </a:p>
-          <a:p xmlns:a="http://schemas.openxmlformats.org/drawingml/2006/main">
-            <a:r>
-              <a:t>- ../../course/reading-card-case.md</a:t>
-            </a:r>
-          </a:p>
-          <a:p xmlns:a="http://schemas.openxmlformats.org/drawingml/2006/main">
-            <a:r>
-              <a:t/>
+              <a:t>本课 handout.md、judgment-task.md；../../course/judgment-path.md。</a:t>
             </a:r>
           </a:p>
           <a:p xmlns:a="http://schemas.openxmlformats.org/drawingml/2006/main">
@@ -4708,7 +3088,12 @@
           </a:p>
           <a:p xmlns:a="http://schemas.openxmlformats.org/drawingml/2006/main">
             <a:r>
-              <a:t>讲义位置：本课讲义；见逐页母稿映射表</a:t>
+              <a:t>讲述与校准：</a:t>
+            </a:r>
+          </a:p>
+          <a:p xmlns:a="http://schemas.openxmlformats.org/drawingml/2006/main">
+            <a:r>
+              <a:t>原 AutoResearch 将 evaluate_bpb 固定在只读 prepare.py，限制 Agent 修改评价规则。只读评价函数并不等于评价数据对执行端不可读。课程阅读卡还要求 gold 不进入生成 Context，并由独立评价端在输出完成后评分；人工审核决定方法、结论及后续修订。失败回写保留 trace，禁止选择性删除。</a:t>
             </a:r>
           </a:p>
           <a:p xmlns:a="http://schemas.openxmlformats.org/drawingml/2006/main">
@@ -4718,57 +3103,12 @@
           </a:p>
           <a:p xmlns:a="http://schemas.openxmlformats.org/drawingml/2006/main">
             <a:r>
-              <a:t>屏显核对：</a:t>
-            </a:r>
-          </a:p>
-          <a:p xmlns:a="http://schemas.openxmlformats.org/drawingml/2006/main">
-            <a:r>
-              <a:t>- 执行器</a:t>
-            </a:r>
-          </a:p>
-          <a:p xmlns:a="http://schemas.openxmlformats.org/drawingml/2006/main">
-            <a:r>
-              <a:t>- 生成候选</a:t>
-            </a:r>
-          </a:p>
-          <a:p xmlns:a="http://schemas.openxmlformats.org/drawingml/2006/main">
-            <a:r>
-              <a:t>- 独立 Evals</a:t>
-            </a:r>
-          </a:p>
-          <a:p xmlns:a="http://schemas.openxmlformats.org/drawingml/2006/main">
-            <a:r>
-              <a:t>- baseline / rubric</a:t>
-            </a:r>
-          </a:p>
-          <a:p xmlns:a="http://schemas.openxmlformats.org/drawingml/2006/main">
-            <a:r>
-              <a:t>- 人工审核</a:t>
-            </a:r>
-          </a:p>
-          <a:p xmlns:a="http://schemas.openxmlformats.org/drawingml/2006/main">
-            <a:r>
-              <a:t>- 方法与结论</a:t>
-            </a:r>
-          </a:p>
-          <a:p xmlns:a="http://schemas.openxmlformats.org/drawingml/2006/main">
-            <a:r>
-              <a:t>- 失败恢复</a:t>
-            </a:r>
-          </a:p>
-          <a:p xmlns:a="http://schemas.openxmlformats.org/drawingml/2006/main">
-            <a:r>
-              <a:t>- 记录后收窄</a:t>
-            </a:r>
-          </a:p>
-          <a:p xmlns:a="http://schemas.openxmlformats.org/drawingml/2006/main">
-            <a:r>
-              <a:t>- 阅读卡执行器禁止读 gold；独立评价端在生成后评分。</a:t>
-            </a:r>
-          </a:p>
-          <a:p xmlns:a="http://schemas.openxmlformats.org/drawingml/2006/main">
-            <a:r>
-              <a:t>- AutoResearch：只读 prepare.py 固定评价函数</a:t>
+              <a:t>学生动作：</a:t>
+            </a:r>
+          </a:p>
+          <a:p xmlns:a="http://schemas.openxmlformats.org/drawingml/2006/main">
+            <a:r>
+              <a:t>请学生说出自己工作流的 baseline 是什么。</a:t>
             </a:r>
           </a:p>
           <a:p xmlns:a="http://schemas.openxmlformats.org/drawingml/2006/main">
@@ -4778,12 +3118,7 @@
           </a:p>
           <a:p xmlns:a="http://schemas.openxmlformats.org/drawingml/2006/main">
             <a:r>
-              <a:t>教师讲述：</a:t>
-            </a:r>
-          </a:p>
-          <a:p xmlns:a="http://schemas.openxmlformats.org/drawingml/2006/main">
-            <a:r>
-              <a:t>原 AutoResearch 将 evaluate_bpb 固定在只读 prepare.py，限制 Agent 修改评价规则。只读评价函数并不等于评价数据对执行端不可读。课程阅读卡还要求 gold 不进入生成 Context，并由独立评价端在输出完成后评分；人工审核决定方法、结论及后续修订。失败回写保留 trace，禁止选择性删除。</a:t>
+              <a:t>课堂安排：按本稿下方 90 分钟教学路由安排；此页不另占独立时段。</a:t>
             </a:r>
           </a:p>
           <a:p xmlns:a="http://schemas.openxmlformats.org/drawingml/2006/main">
@@ -4793,12 +3128,12 @@
           </a:p>
           <a:p xmlns:a="http://schemas.openxmlformats.org/drawingml/2006/main">
             <a:r>
-              <a:t>学生动作：</a:t>
-            </a:r>
-          </a:p>
-          <a:p xmlns:a="http://schemas.openxmlformats.org/drawingml/2006/main">
-            <a:r>
-              <a:t>请学生说出自己工作流的 baseline 是什么。</a:t>
+              <a:t>[Sources]</a:t>
+            </a:r>
+          </a:p>
+          <a:p xmlns:a="http://schemas.openxmlformats.org/drawingml/2006/main">
+            <a:r>
+              <a:t>[AutoResearch `program.md`（固定 commit `228791f`）](https://github.com/karpathy/autoresearch/blob/228791fb499afffb54b46200aca536f79142f117/program.md)；[handout.md §二](./handout.md)。2026-09-13 回源核验；工程案例字段摘述，课程迁移要求另行标明，不作为通用自主科研能力证据。</a:t>
             </a:r>
           </a:p>
           <a:p xmlns:a="http://schemas.openxmlformats.org/drawingml/2006/main">
@@ -4808,67 +3143,7 @@
           </a:p>
           <a:p xmlns:a="http://schemas.openxmlformats.org/drawingml/2006/main">
             <a:r>
-              <a:t>来源与边界：</a:t>
-            </a:r>
-          </a:p>
-          <a:p xmlns:a="http://schemas.openxmlformats.org/drawingml/2006/main">
-            <a:r>
-              <a:t>[AutoResearch `program.md`（固定 commit `228791f`）](https://github.com/karpathy/autoresearch/blob/228791fb499afffb54b46200aca536f79142f117/program.md)；[handout.md §二](./handout.md)。2026-09-13 回源核验；工程案例字段摘述，课程迁移要求另行标明，不作为通用自主科研能力证据。</a:t>
-            </a:r>
-          </a:p>
-          <a:p xmlns:a="http://schemas.openxmlformats.org/drawingml/2006/main">
-            <a:r>
-              <a:t/>
-            </a:r>
-          </a:p>
-          <a:p xmlns:a="http://schemas.openxmlformats.org/drawingml/2006/main">
-            <a:r>
-              <a:t>---</a:t>
-            </a:r>
-          </a:p>
-          <a:p xmlns:a="http://schemas.openxmlformats.org/drawingml/2006/main">
-            <a:r>
-              <a:t/>
-            </a:r>
-          </a:p>
-          <a:p xmlns:a="http://schemas.openxmlformats.org/drawingml/2006/main">
-            <a:r>
-              <a:t>[Sources]</a:t>
-            </a:r>
-          </a:p>
-          <a:p xmlns:a="http://schemas.openxmlformats.org/drawingml/2006/main">
-            <a:r>
-              <a:t/>
-            </a:r>
-          </a:p>
-          <a:p xmlns:a="http://schemas.openxmlformats.org/drawingml/2006/main">
-            <a:r>
-              <a:t>- https://github.com/karpathy/autoresearch/blob/228791fb499afffb54b46200aca536f79142f117/program.md</a:t>
-            </a:r>
-          </a:p>
-          <a:p xmlns:a="http://schemas.openxmlformats.org/drawingml/2006/main">
-            <a:r>
-              <a:t/>
-            </a:r>
-          </a:p>
-          <a:p xmlns:a="http://schemas.openxmlformats.org/drawingml/2006/main">
-            <a:r>
-              <a:t>- 本课 handout.md 与 slides.md</a:t>
-            </a:r>
-          </a:p>
-          <a:p xmlns:a="http://schemas.openxmlformats.org/drawingml/2006/main">
-            <a:r>
-              <a:t/>
-            </a:r>
-          </a:p>
-          <a:p xmlns:a="http://schemas.openxmlformats.org/drawingml/2006/main">
-            <a:r>
-              <a:t>- ../../course/reading-card-case.md</a:t>
-            </a:r>
-          </a:p>
-          <a:p xmlns:a="http://schemas.openxmlformats.org/drawingml/2006/main">
-            <a:r>
-              <a:t/>
+              <a:t>本课 handout.md、judgment-task.md；../../course/judgment-path.md。</a:t>
             </a:r>
           </a:p>
           <a:p xmlns:a="http://schemas.openxmlformats.org/drawingml/2006/main">
@@ -4953,7 +3228,12 @@
           </a:p>
           <a:p xmlns:a="http://schemas.openxmlformats.org/drawingml/2006/main">
             <a:r>
-              <a:t>讲义位置：本课讲义；见逐页母稿映射表</a:t>
+              <a:t>讲述与校准：</a:t>
+            </a:r>
+          </a:p>
+          <a:p xmlns:a="http://schemas.openxmlformats.org/drawingml/2006/main">
+            <a:r>
+              <a:t>用同一阅读卡任务提问：重复解析由脚本承担，预定生成与状态记录适合固定链，涉及研究判断时设置人工确认。坐标用于比较重复性与判断风险，不把 Agent 视为能力等级。让学生先判断并给出一个理由。</a:t>
             </a:r>
           </a:p>
           <a:p xmlns:a="http://schemas.openxmlformats.org/drawingml/2006/main">
@@ -4963,37 +3243,12 @@
           </a:p>
           <a:p xmlns:a="http://schemas.openxmlformats.org/drawingml/2006/main">
             <a:r>
-              <a:t>屏显核对：</a:t>
-            </a:r>
-          </a:p>
-          <a:p xmlns:a="http://schemas.openxmlformats.org/drawingml/2006/main">
-            <a:r>
-              <a:t>- 重复性高 →</a:t>
-            </a:r>
-          </a:p>
-          <a:p xmlns:a="http://schemas.openxmlformats.org/drawingml/2006/main">
-            <a:r>
-              <a:t>- 判断风险 ↑</a:t>
-            </a:r>
-          </a:p>
-          <a:p xmlns:a="http://schemas.openxmlformats.org/drawingml/2006/main">
-            <a:r>
-              <a:t>- Agent + 人工确认</a:t>
-            </a:r>
-          </a:p>
-          <a:p xmlns:a="http://schemas.openxmlformats.org/drawingml/2006/main">
-            <a:r>
-              <a:t>- 固定工作流 / 脚本</a:t>
-            </a:r>
-          </a:p>
-          <a:p xmlns:a="http://schemas.openxmlformats.org/drawingml/2006/main">
-            <a:r>
-              <a:t>- 人工主导</a:t>
-            </a:r>
-          </a:p>
-          <a:p xmlns:a="http://schemas.openxmlformats.org/drawingml/2006/main">
-            <a:r>
-              <a:t>- 不值得自动化</a:t>
+              <a:t>学生动作：</a:t>
+            </a:r>
+          </a:p>
+          <a:p xmlns:a="http://schemas.openxmlformats.org/drawingml/2006/main">
+            <a:r>
+              <a:t>请学生举手判断每个动作适合哪一类。</a:t>
             </a:r>
           </a:p>
           <a:p xmlns:a="http://schemas.openxmlformats.org/drawingml/2006/main">
@@ -5003,12 +3258,7 @@
           </a:p>
           <a:p xmlns:a="http://schemas.openxmlformats.org/drawingml/2006/main">
             <a:r>
-              <a:t>教师讲述：</a:t>
-            </a:r>
-          </a:p>
-          <a:p xmlns:a="http://schemas.openxmlformats.org/drawingml/2006/main">
-            <a:r>
-              <a:t>用同一阅读卡任务提问：重复解析由脚本承担，预定生成与状态记录适合固定链，涉及研究判断时设置人工确认。坐标用于比较重复性与判断风险，不把 Agent 视为能力等级。让学生先判断并给出一个理由。</a:t>
+              <a:t>课堂安排：按本稿下方 90 分钟教学路由安排；此页不另占独立时段。</a:t>
             </a:r>
           </a:p>
           <a:p xmlns:a="http://schemas.openxmlformats.org/drawingml/2006/main">
@@ -5018,12 +3268,12 @@
           </a:p>
           <a:p xmlns:a="http://schemas.openxmlformats.org/drawingml/2006/main">
             <a:r>
-              <a:t>学生动作：</a:t>
-            </a:r>
-          </a:p>
-          <a:p xmlns:a="http://schemas.openxmlformats.org/drawingml/2006/main">
-            <a:r>
-              <a:t>请学生举手判断每个动作适合哪一类。</a:t>
+              <a:t>[Sources]</a:t>
+            </a:r>
+          </a:p>
+          <a:p xmlns:a="http://schemas.openxmlformats.org/drawingml/2006/main">
+            <a:r>
+              <a:t>[handout.md §三](./handout.md)。</a:t>
             </a:r>
           </a:p>
           <a:p xmlns:a="http://schemas.openxmlformats.org/drawingml/2006/main">
@@ -5033,57 +3283,7 @@
           </a:p>
           <a:p xmlns:a="http://schemas.openxmlformats.org/drawingml/2006/main">
             <a:r>
-              <a:t>来源与边界：</a:t>
-            </a:r>
-          </a:p>
-          <a:p xmlns:a="http://schemas.openxmlformats.org/drawingml/2006/main">
-            <a:r>
-              <a:t>[handout.md §三](./handout.md)。</a:t>
-            </a:r>
-          </a:p>
-          <a:p xmlns:a="http://schemas.openxmlformats.org/drawingml/2006/main">
-            <a:r>
-              <a:t/>
-            </a:r>
-          </a:p>
-          <a:p xmlns:a="http://schemas.openxmlformats.org/drawingml/2006/main">
-            <a:r>
-              <a:t>---</a:t>
-            </a:r>
-          </a:p>
-          <a:p xmlns:a="http://schemas.openxmlformats.org/drawingml/2006/main">
-            <a:r>
-              <a:t/>
-            </a:r>
-          </a:p>
-          <a:p xmlns:a="http://schemas.openxmlformats.org/drawingml/2006/main">
-            <a:r>
-              <a:t>[Sources]</a:t>
-            </a:r>
-          </a:p>
-          <a:p xmlns:a="http://schemas.openxmlformats.org/drawingml/2006/main">
-            <a:r>
-              <a:t/>
-            </a:r>
-          </a:p>
-          <a:p xmlns:a="http://schemas.openxmlformats.org/drawingml/2006/main">
-            <a:r>
-              <a:t>- 本课 handout.md 与 slides.md</a:t>
-            </a:r>
-          </a:p>
-          <a:p xmlns:a="http://schemas.openxmlformats.org/drawingml/2006/main">
-            <a:r>
-              <a:t/>
-            </a:r>
-          </a:p>
-          <a:p xmlns:a="http://schemas.openxmlformats.org/drawingml/2006/main">
-            <a:r>
-              <a:t>- ../../course/reading-card-case.md</a:t>
-            </a:r>
-          </a:p>
-          <a:p xmlns:a="http://schemas.openxmlformats.org/drawingml/2006/main">
-            <a:r>
-              <a:t/>
+              <a:t>本课 handout.md、judgment-task.md；../../course/judgment-path.md。</a:t>
             </a:r>
           </a:p>
           <a:p xmlns:a="http://schemas.openxmlformats.org/drawingml/2006/main">
@@ -11452,35 +9652,55 @@
       </p:grpSpPr>
       <p:sp>
         <p:nvSpPr>
-          <p:cNvPr id="4" name="Text Placeholder 3">
-            <a:extLst xmlns:a="http://schemas.openxmlformats.org/drawingml/2006/main">
-              <a:ext uri="{FF2B5EF4-FFF2-40B4-BE49-F238E27FC236}">
-                <a16:creationId xmlns:a16="http://schemas.microsoft.com/office/drawing/2014/main" id="{4D941B40-7A0A-534E-3563-CA11753C8E3F}"/>
-              </a:ext>
-            </a:extLst>
-          </p:cNvPr>
-          <p:cNvSpPr>
-            <a:spLocks xmlns:a="http://schemas.openxmlformats.org/drawingml/2006/main" noGrp="1"/>
-          </p:cNvSpPr>
-          <p:nvPr>
-            <p:ph type="body" idx="14"/>
-          </p:nvPr>
-        </p:nvSpPr>
-        <p:spPr>
-          <a:xfrm xmlns:a="http://schemas.openxmlformats.org/drawingml/2006/main">
-            <a:off x="1028700" y="57150"/>
-            <a:ext cx="10668000" cy="571500"/>
-          </a:xfrm>
-        </p:spPr>
-        <p:txBody>
-          <a:bodyPr xmlns:a="http://schemas.openxmlformats.org/drawingml/2006/main" lIns="0" tIns="0" rIns="0" bIns="0" anchor="ctr"/>
-          <a:lstStyle xmlns:a="http://schemas.openxmlformats.org/drawingml/2006/main"/>
+          <p:cNvPr id="7" name="judgment-title">
+            <a:extLst xmlns:a="http://schemas.openxmlformats.org/drawingml/2006/main">
+              <a:ext uri="{FF2B5EF4-FFF2-40B4-BE49-F238E27FC236}">
+                <a16:creationId xmlns:a16="http://schemas.microsoft.com/office/drawing/2014/main" id="{0D3F1BCA-0F0D-4FC5-B336-650A679BBC4B}"/>
+              </a:ext>
+            </a:extLst>
+          </p:cNvPr>
+          <p:cNvSpPr>
+            <a:spLocks xmlns:a="http://schemas.openxmlformats.org/drawingml/2006/main" noGrp="1"/>
+          </p:cNvSpPr>
+          <p:nvPr/>
+        </p:nvSpPr>
+        <p:spPr>
+          <a:xfrm xmlns:a="http://schemas.openxmlformats.org/drawingml/2006/main">
+            <a:off x="1028700" y="76200"/>
+            <a:ext cx="10687050" cy="514350"/>
+          </a:xfrm>
+          <a:prstGeom xmlns:a="http://schemas.openxmlformats.org/drawingml/2006/main" prst="rect">
+            <a:avLst/>
+          </a:prstGeom>
+          <a:noFill xmlns:a="http://schemas.openxmlformats.org/drawingml/2006/main"/>
+          <a:ln xmlns:a="http://schemas.openxmlformats.org/drawingml/2006/main" w="0">
+            <a:noFill/>
+          </a:ln>
+        </p:spPr>
+        <p:txBody>
+          <a:bodyPr xmlns:a="http://schemas.openxmlformats.org/drawingml/2006/main" lIns="0" tIns="0" rIns="0" bIns="0" anchor="t"/>
+          <a:lstStyle xmlns:a="http://schemas.openxmlformats.org/drawingml/2006/main">
+            <a:defPPr algn="l">
+              <a:defRPr sz="3000" b="1">
+                <a:solidFill>
+                  <a:srgbClr val="FFFFFF"/>
+                </a:solidFill>
+                <a:latin typeface="微软雅黑"/>
+                <a:ea typeface="微软雅黑"/>
+                <a:cs typeface="微软雅黑"/>
+              </a:defRPr>
+            </a:defPPr>
+          </a:lstStyle>
           <a:p xmlns:a="http://schemas.openxmlformats.org/drawingml/2006/main">
             <a:pPr algn="l">
-              <a:lnSpc>
-                <a:spcPct val="118000"/>
-              </a:lnSpc>
-              <a:buNone/>
+              <a:defRPr sz="3000" b="1">
+                <a:solidFill>
+                  <a:srgbClr val="FFFFFF"/>
+                </a:solidFill>
+                <a:latin typeface="微软雅黑"/>
+                <a:ea typeface="微软雅黑"/>
+                <a:cs typeface="微软雅黑"/>
+              </a:defRPr>
             </a:pPr>
             <a:r>
               <a:rPr sz="3000" b="1">
@@ -11491,331 +9711,337 @@
                 <a:ea typeface="微软雅黑"/>
                 <a:cs typeface="微软雅黑"/>
               </a:rPr>
-              <a:t>个人实践：先定契约，再走通一条 trace</a:t>
-            </a:r>
-            <a:endParaRPr/>
-          </a:p>
-        </p:txBody>
-      </p:sp>
-      <p:sp>
-        <p:nvSpPr>
-          <p:cNvPr id="5" name="Slide Number Placeholder 4">
-            <a:extLst xmlns:a="http://schemas.openxmlformats.org/drawingml/2006/main">
-              <a:ext uri="{FF2B5EF4-FFF2-40B4-BE49-F238E27FC236}">
-                <a16:creationId xmlns:a16="http://schemas.microsoft.com/office/drawing/2014/main" id="{EBA5909F-738E-F60C-BE8C-B3F1D94548E5}"/>
-              </a:ext>
-            </a:extLst>
-          </p:cNvPr>
-          <p:cNvSpPr>
-            <a:spLocks xmlns:a="http://schemas.openxmlformats.org/drawingml/2006/main" noGrp="1"/>
-          </p:cNvSpPr>
-          <p:nvPr>
-            <p:ph type="sldNum" idx="10"/>
-          </p:nvPr>
-        </p:nvSpPr>
-        <p:spPr/>
-        <p:txBody>
-          <a:bodyPr xmlns:a="http://schemas.openxmlformats.org/drawingml/2006/main"/>
-          <a:lstStyle xmlns:a="http://schemas.openxmlformats.org/drawingml/2006/main"/>
-          <a:p xmlns:a="http://schemas.openxmlformats.org/drawingml/2006/main">
-            <a:fld id="{90F7333B-44AC-F7E9-D49D-FE92F45E0477}" type="slidenum">
+              <a:t>本人项目：决定、核验与回写</a:t>
+            </a:r>
+          </a:p>
+        </p:txBody>
+      </p:sp>
+      <p:sp>
+        <p:nvSpPr>
+          <p:cNvPr id="2" name="judgment-body-0">
+            <a:extLst xmlns:a="http://schemas.openxmlformats.org/drawingml/2006/main">
+              <a:ext uri="{FF2B5EF4-FFF2-40B4-BE49-F238E27FC236}">
+                <a16:creationId xmlns:a16="http://schemas.microsoft.com/office/drawing/2014/main" id="{963155FB-3B96-46FA-A442-2C86547BE3A4}"/>
+              </a:ext>
+            </a:extLst>
+          </p:cNvPr>
+          <p:cNvSpPr>
+            <a:spLocks xmlns:a="http://schemas.openxmlformats.org/drawingml/2006/main" noGrp="1"/>
+          </p:cNvSpPr>
+          <p:nvPr/>
+        </p:nvSpPr>
+        <p:spPr>
+          <a:xfrm xmlns:a="http://schemas.openxmlformats.org/drawingml/2006/main">
+            <a:off x="666750" y="1066800"/>
+            <a:ext cx="10858500" cy="1476375"/>
+          </a:xfrm>
+          <a:prstGeom xmlns:a="http://schemas.openxmlformats.org/drawingml/2006/main" prst="rect">
+            <a:avLst/>
+          </a:prstGeom>
+          <a:noFill xmlns:a="http://schemas.openxmlformats.org/drawingml/2006/main"/>
+          <a:ln xmlns:a="http://schemas.openxmlformats.org/drawingml/2006/main" w="0">
+            <a:noFill/>
+          </a:ln>
+        </p:spPr>
+        <p:txBody>
+          <a:bodyPr xmlns:a="http://schemas.openxmlformats.org/drawingml/2006/main" lIns="0" tIns="0" rIns="0" bIns="0" anchor="t"/>
+          <a:lstStyle xmlns:a="http://schemas.openxmlformats.org/drawingml/2006/main">
+            <a:defPPr algn="l">
+              <a:defRPr sz="2400" b="0">
+                <a:solidFill>
+                  <a:srgbClr val="263746"/>
+                </a:solidFill>
+                <a:latin typeface="微软雅黑"/>
+                <a:ea typeface="微软雅黑"/>
+                <a:cs typeface="微软雅黑"/>
+              </a:defRPr>
+            </a:defPPr>
+          </a:lstStyle>
+          <a:p xmlns:a="http://schemas.openxmlformats.org/drawingml/2006/main">
+            <a:pPr algn="l">
+              <a:defRPr sz="2400" b="0">
+                <a:solidFill>
+                  <a:srgbClr val="263746"/>
+                </a:solidFill>
+                <a:latin typeface="微软雅黑"/>
+                <a:ea typeface="微软雅黑"/>
+                <a:cs typeface="微软雅黑"/>
+              </a:defRPr>
+            </a:pPr>
+            <a:r>
+              <a:rPr sz="2400" b="0">
+                <a:solidFill>
+                  <a:srgbClr val="263746"/>
+                </a:solidFill>
+                <a:latin typeface="微软雅黑"/>
+                <a:ea typeface="微软雅黑"/>
+                <a:cs typeface="微软雅黑"/>
+              </a:rPr>
+              <a:t>在个人副本接入 L10 校验，或增加分组盲化/任务状态持久化等一个实质环节。对真实输入走通输入→处理→人工检查→评价 trace；输出标明 accepted/rejected 与理由，正常项守恒。</a:t>
+            </a:r>
+          </a:p>
+        </p:txBody>
+      </p:sp>
+      <p:sp>
+        <p:nvSpPr>
+          <p:cNvPr id="3" name="judgment-body-1">
+            <a:extLst xmlns:a="http://schemas.openxmlformats.org/drawingml/2006/main">
+              <a:ext uri="{FF2B5EF4-FFF2-40B4-BE49-F238E27FC236}">
+                <a16:creationId xmlns:a16="http://schemas.microsoft.com/office/drawing/2014/main" id="{2DE06640-81E0-4B7C-91CF-F2B28A6E0078}"/>
+              </a:ext>
+            </a:extLst>
+          </p:cNvPr>
+          <p:cNvSpPr>
+            <a:spLocks xmlns:a="http://schemas.openxmlformats.org/drawingml/2006/main" noGrp="1"/>
+          </p:cNvSpPr>
+          <p:nvPr/>
+        </p:nvSpPr>
+        <p:spPr>
+          <a:xfrm xmlns:a="http://schemas.openxmlformats.org/drawingml/2006/main">
+            <a:off x="666750" y="2724150"/>
+            <a:ext cx="10858500" cy="1524000"/>
+          </a:xfrm>
+          <a:prstGeom xmlns:a="http://schemas.openxmlformats.org/drawingml/2006/main" prst="rect">
+            <a:avLst/>
+          </a:prstGeom>
+          <a:noFill xmlns:a="http://schemas.openxmlformats.org/drawingml/2006/main"/>
+          <a:ln xmlns:a="http://schemas.openxmlformats.org/drawingml/2006/main" w="0">
+            <a:noFill/>
+          </a:ln>
+        </p:spPr>
+        <p:txBody>
+          <a:bodyPr xmlns:a="http://schemas.openxmlformats.org/drawingml/2006/main" lIns="0" tIns="0" rIns="0" bIns="0" anchor="t"/>
+          <a:lstStyle xmlns:a="http://schemas.openxmlformats.org/drawingml/2006/main">
+            <a:defPPr algn="l">
+              <a:defRPr sz="2400" b="0">
+                <a:solidFill>
+                  <a:srgbClr val="263746"/>
+                </a:solidFill>
+                <a:latin typeface="微软雅黑"/>
+                <a:ea typeface="微软雅黑"/>
+                <a:cs typeface="微软雅黑"/>
+              </a:defRPr>
+            </a:defPPr>
+          </a:lstStyle>
+          <a:p xmlns:a="http://schemas.openxmlformats.org/drawingml/2006/main">
+            <a:pPr algn="l">
+              <a:defRPr sz="2400" b="0">
+                <a:solidFill>
+                  <a:srgbClr val="263746"/>
+                </a:solidFill>
+                <a:latin typeface="微软雅黑"/>
+                <a:ea typeface="微软雅黑"/>
+                <a:cs typeface="微软雅黑"/>
+              </a:defRPr>
+            </a:pPr>
+            <a:r>
+              <a:rPr sz="2400" b="0">
+                <a:solidFill>
+                  <a:srgbClr val="263746"/>
+                </a:solidFill>
+                <a:latin typeface="微软雅黑"/>
+                <a:ea typeface="微软雅黑"/>
+                <a:cs typeface="微软雅黑"/>
+              </a:rPr>
+              <a:t>同一输入运行 baseline 与改动版；检查拒绝记录仍在账本中，gold 不参与执行端选择。只换提示词措辞、改标题或画流程图不能替代实际实现。</a:t>
+            </a:r>
+          </a:p>
+        </p:txBody>
+      </p:sp>
+      <p:sp>
+        <p:nvSpPr>
+          <p:cNvPr id="4" name="judgment-body-2">
+            <a:extLst xmlns:a="http://schemas.openxmlformats.org/drawingml/2006/main">
+              <a:ext uri="{FF2B5EF4-FFF2-40B4-BE49-F238E27FC236}">
+                <a16:creationId xmlns:a16="http://schemas.microsoft.com/office/drawing/2014/main" id="{2EFA7E2B-7B9C-4067-A031-BB4A27928605}"/>
+              </a:ext>
+            </a:extLst>
+          </p:cNvPr>
+          <p:cNvSpPr>
+            <a:spLocks xmlns:a="http://schemas.openxmlformats.org/drawingml/2006/main" noGrp="1"/>
+          </p:cNvSpPr>
+          <p:nvPr/>
+        </p:nvSpPr>
+        <p:spPr>
+          <a:xfrm xmlns:a="http://schemas.openxmlformats.org/drawingml/2006/main">
+            <a:off x="666750" y="4457700"/>
+            <a:ext cx="10858500" cy="1466850"/>
+          </a:xfrm>
+          <a:prstGeom xmlns:a="http://schemas.openxmlformats.org/drawingml/2006/main" prst="rect">
+            <a:avLst/>
+          </a:prstGeom>
+          <a:noFill xmlns:a="http://schemas.openxmlformats.org/drawingml/2006/main"/>
+          <a:ln xmlns:a="http://schemas.openxmlformats.org/drawingml/2006/main" w="0">
+            <a:noFill/>
+          </a:ln>
+        </p:spPr>
+        <p:txBody>
+          <a:bodyPr xmlns:a="http://schemas.openxmlformats.org/drawingml/2006/main" lIns="0" tIns="0" rIns="0" bIns="0" anchor="t"/>
+          <a:lstStyle xmlns:a="http://schemas.openxmlformats.org/drawingml/2006/main">
+            <a:defPPr algn="l">
+              <a:defRPr sz="2200" b="0">
+                <a:solidFill>
+                  <a:srgbClr val="1F4D78"/>
+                </a:solidFill>
+                <a:latin typeface="微软雅黑"/>
+                <a:ea typeface="微软雅黑"/>
+                <a:cs typeface="微软雅黑"/>
+              </a:defRPr>
+            </a:defPPr>
+          </a:lstStyle>
+          <a:p xmlns:a="http://schemas.openxmlformats.org/drawingml/2006/main">
+            <a:pPr algn="l">
+              <a:defRPr sz="2200" b="0">
+                <a:solidFill>
+                  <a:srgbClr val="1F4D78"/>
+                </a:solidFill>
+                <a:latin typeface="微软雅黑"/>
+                <a:ea typeface="微软雅黑"/>
+                <a:cs typeface="微软雅黑"/>
+              </a:defRPr>
+            </a:pPr>
+            <a:r>
+              <a:rPr sz="2200" b="0">
+                <a:solidFill>
+                  <a:srgbClr val="1F4D78"/>
+                </a:solidFill>
+                <a:latin typeface="微软雅黑"/>
+                <a:ea typeface="微软雅黑"/>
+                <a:cs typeface="微软雅黑"/>
+              </a:rPr>
+              <a:t>保存：本人可运行工作流、实质 diff、任务契约与端到端 trace</a:t>
+            </a:r>
+          </a:p>
+        </p:txBody>
+      </p:sp>
+      <p:sp>
+        <p:nvSpPr>
+          <p:cNvPr id="5" name="judgment-source">
+            <a:extLst xmlns:a="http://schemas.openxmlformats.org/drawingml/2006/main">
+              <a:ext uri="{FF2B5EF4-FFF2-40B4-BE49-F238E27FC236}">
+                <a16:creationId xmlns:a16="http://schemas.microsoft.com/office/drawing/2014/main" id="{F015A99F-16B5-4A14-B8EC-0DBF7DF7A773}"/>
+              </a:ext>
+            </a:extLst>
+          </p:cNvPr>
+          <p:cNvSpPr>
+            <a:spLocks xmlns:a="http://schemas.openxmlformats.org/drawingml/2006/main" noGrp="1"/>
+          </p:cNvSpPr>
+          <p:nvPr/>
+        </p:nvSpPr>
+        <p:spPr>
+          <a:xfrm xmlns:a="http://schemas.openxmlformats.org/drawingml/2006/main">
+            <a:off x="666750" y="6276975"/>
+            <a:ext cx="10572750" cy="209550"/>
+          </a:xfrm>
+          <a:prstGeom xmlns:a="http://schemas.openxmlformats.org/drawingml/2006/main" prst="rect">
+            <a:avLst/>
+          </a:prstGeom>
+          <a:noFill xmlns:a="http://schemas.openxmlformats.org/drawingml/2006/main"/>
+          <a:ln xmlns:a="http://schemas.openxmlformats.org/drawingml/2006/main" w="0">
+            <a:noFill/>
+          </a:ln>
+        </p:spPr>
+        <p:txBody>
+          <a:bodyPr xmlns:a="http://schemas.openxmlformats.org/drawingml/2006/main" lIns="0" tIns="0" rIns="0" bIns="0" anchor="t"/>
+          <a:lstStyle xmlns:a="http://schemas.openxmlformats.org/drawingml/2006/main">
+            <a:defPPr algn="l">
+              <a:defRPr sz="1100" b="0">
+                <a:solidFill>
+                  <a:srgbClr val="667684"/>
+                </a:solidFill>
+                <a:latin typeface="微软雅黑"/>
+                <a:ea typeface="微软雅黑"/>
+                <a:cs typeface="微软雅黑"/>
+              </a:defRPr>
+            </a:defPPr>
+          </a:lstStyle>
+          <a:p xmlns:a="http://schemas.openxmlformats.org/drawingml/2006/main">
+            <a:pPr algn="l">
+              <a:defRPr sz="1100" b="0">
+                <a:solidFill>
+                  <a:srgbClr val="667684"/>
+                </a:solidFill>
+                <a:latin typeface="微软雅黑"/>
+                <a:ea typeface="微软雅黑"/>
+                <a:cs typeface="微软雅黑"/>
+              </a:defRPr>
+            </a:pPr>
+            <a:r>
+              <a:rPr sz="1100" b="0">
+                <a:solidFill>
+                  <a:srgbClr val="667684"/>
+                </a:solidFill>
+                <a:latin typeface="微软雅黑"/>
+                <a:ea typeface="微软雅黑"/>
+                <a:cs typeface="微软雅黑"/>
+              </a:rPr>
+              <a:t>来源：本课判断任务与讲义；构造材料及真实来源按材料包标识</a:t>
+            </a:r>
+          </a:p>
+        </p:txBody>
+      </p:sp>
+      <p:sp>
+        <p:nvSpPr>
+          <p:cNvPr id="6" name="judgment-page">
+            <a:extLst xmlns:a="http://schemas.openxmlformats.org/drawingml/2006/main">
+              <a:ext uri="{FF2B5EF4-FFF2-40B4-BE49-F238E27FC236}">
+                <a16:creationId xmlns:a16="http://schemas.microsoft.com/office/drawing/2014/main" id="{DF638766-D257-4BF3-B074-D6176102CCA9}"/>
+              </a:ext>
+            </a:extLst>
+          </p:cNvPr>
+          <p:cNvSpPr>
+            <a:spLocks xmlns:a="http://schemas.openxmlformats.org/drawingml/2006/main" noGrp="1"/>
+          </p:cNvSpPr>
+          <p:nvPr/>
+        </p:nvSpPr>
+        <p:spPr>
+          <a:xfrm xmlns:a="http://schemas.openxmlformats.org/drawingml/2006/main">
+            <a:off x="11715750" y="6562725"/>
+            <a:ext cx="238125" cy="171450"/>
+          </a:xfrm>
+          <a:prstGeom xmlns:a="http://schemas.openxmlformats.org/drawingml/2006/main" prst="rect">
+            <a:avLst/>
+          </a:prstGeom>
+          <a:noFill xmlns:a="http://schemas.openxmlformats.org/drawingml/2006/main"/>
+          <a:ln xmlns:a="http://schemas.openxmlformats.org/drawingml/2006/main" w="0">
+            <a:noFill/>
+          </a:ln>
+        </p:spPr>
+        <p:txBody>
+          <a:bodyPr xmlns:a="http://schemas.openxmlformats.org/drawingml/2006/main" lIns="0" tIns="0" rIns="0" bIns="0" anchor="t"/>
+          <a:lstStyle xmlns:a="http://schemas.openxmlformats.org/drawingml/2006/main">
+            <a:defPPr algn="l">
+              <a:defRPr sz="900" b="0">
+                <a:solidFill>
+                  <a:srgbClr val="A5A5A5"/>
+                </a:solidFill>
+                <a:latin typeface="微软雅黑"/>
+                <a:ea typeface="微软雅黑"/>
+                <a:cs typeface="微软雅黑"/>
+              </a:defRPr>
+            </a:defPPr>
+          </a:lstStyle>
+          <a:p xmlns:a="http://schemas.openxmlformats.org/drawingml/2006/main">
+            <a:pPr algn="l">
+              <a:defRPr sz="900" b="0">
+                <a:solidFill>
+                  <a:srgbClr val="A5A5A5"/>
+                </a:solidFill>
+                <a:latin typeface="微软雅黑"/>
+                <a:ea typeface="微软雅黑"/>
+                <a:cs typeface="微软雅黑"/>
+              </a:defRPr>
+            </a:pPr>
+            <a:r>
+              <a:rPr sz="900" b="0">
+                <a:solidFill>
+                  <a:srgbClr val="A5A5A5"/>
+                </a:solidFill>
+                <a:latin typeface="微软雅黑"/>
+                <a:ea typeface="微软雅黑"/>
+                <a:cs typeface="微软雅黑"/>
+              </a:rPr>
               <a:t>17</a:t>
-            </a:fld>
-            <a:endParaRPr/>
-          </a:p>
-        </p:txBody>
-      </p:sp>
-      <p:sp>
-        <p:nvSpPr>
-          <p:cNvPr id="6" name="content-336">
-            <a:extLst xmlns:a="http://schemas.openxmlformats.org/drawingml/2006/main">
-              <a:ext uri="{FF2B5EF4-FFF2-40B4-BE49-F238E27FC236}">
-                <a16:creationId xmlns:a16="http://schemas.microsoft.com/office/drawing/2014/main" id="{B267732A-E555-405E-BAA0-72E8D8B344D9}"/>
-              </a:ext>
-            </a:extLst>
-          </p:cNvPr>
-          <p:cNvSpPr>
-            <a:spLocks xmlns:a="http://schemas.openxmlformats.org/drawingml/2006/main" noGrp="1"/>
-          </p:cNvSpPr>
-          <p:nvPr/>
-        </p:nvSpPr>
-        <p:spPr>
-          <a:xfrm xmlns:a="http://schemas.openxmlformats.org/drawingml/2006/main">
-            <a:off x="609600" y="1571625"/>
-            <a:ext cx="10972800" cy="432435"/>
-          </a:xfrm>
-          <a:prstGeom xmlns:a="http://schemas.openxmlformats.org/drawingml/2006/main" prst="rect">
-            <a:avLst/>
-          </a:prstGeom>
-          <a:noFill xmlns:a="http://schemas.openxmlformats.org/drawingml/2006/main"/>
-          <a:ln xmlns:a="http://schemas.openxmlformats.org/drawingml/2006/main" w="0">
-            <a:noFill/>
-          </a:ln>
-        </p:spPr>
-        <p:txBody>
-          <a:bodyPr xmlns:a="http://schemas.openxmlformats.org/drawingml/2006/main" lIns="0" tIns="0" rIns="0" bIns="0" anchor="t"/>
-          <a:lstStyle xmlns:a="http://schemas.openxmlformats.org/drawingml/2006/main"/>
-          <a:p xmlns:a="http://schemas.openxmlformats.org/drawingml/2006/main">
-            <a:pPr algn="l">
-              <a:lnSpc>
-                <a:spcPct val="118000"/>
-              </a:lnSpc>
-              <a:buNone/>
-              <a:defRPr sz="2400" b="0">
-                <a:solidFill>
-                  <a:srgbClr val="27333D"/>
-                </a:solidFill>
-                <a:latin typeface="微软雅黑"/>
-                <a:ea typeface="微软雅黑"/>
-                <a:cs typeface="微软雅黑"/>
-              </a:defRPr>
-            </a:pPr>
-            <a:r>
-              <a:rPr sz="2400" b="0">
-                <a:solidFill>
-                  <a:srgbClr val="27333D"/>
-                </a:solidFill>
-                <a:latin typeface="微软雅黑"/>
-                <a:ea typeface="微软雅黑"/>
-                <a:cs typeface="微软雅黑"/>
-              </a:rPr>
-              <a:t>选第 10–11 课的同一科研动作。</a:t>
-            </a:r>
-          </a:p>
-        </p:txBody>
-      </p:sp>
-      <p:sp>
-        <p:nvSpPr>
-          <p:cNvPr id="7" name="content-337">
-            <a:extLst xmlns:a="http://schemas.openxmlformats.org/drawingml/2006/main">
-              <a:ext uri="{FF2B5EF4-FFF2-40B4-BE49-F238E27FC236}">
-                <a16:creationId xmlns:a16="http://schemas.microsoft.com/office/drawing/2014/main" id="{53FBF48E-1CBA-4631-B352-60A9CEC9225C}"/>
-              </a:ext>
-            </a:extLst>
-          </p:cNvPr>
-          <p:cNvSpPr>
-            <a:spLocks xmlns:a="http://schemas.openxmlformats.org/drawingml/2006/main" noGrp="1"/>
-          </p:cNvSpPr>
-          <p:nvPr/>
-        </p:nvSpPr>
-        <p:spPr>
-          <a:xfrm xmlns:a="http://schemas.openxmlformats.org/drawingml/2006/main">
-            <a:off x="609600" y="2261235"/>
-            <a:ext cx="10972800" cy="432435"/>
-          </a:xfrm>
-          <a:prstGeom xmlns:a="http://schemas.openxmlformats.org/drawingml/2006/main" prst="rect">
-            <a:avLst/>
-          </a:prstGeom>
-          <a:noFill xmlns:a="http://schemas.openxmlformats.org/drawingml/2006/main"/>
-          <a:ln xmlns:a="http://schemas.openxmlformats.org/drawingml/2006/main" w="0">
-            <a:noFill/>
-          </a:ln>
-        </p:spPr>
-        <p:txBody>
-          <a:bodyPr xmlns:a="http://schemas.openxmlformats.org/drawingml/2006/main" lIns="0" tIns="0" rIns="0" bIns="0" anchor="t"/>
-          <a:lstStyle xmlns:a="http://schemas.openxmlformats.org/drawingml/2006/main"/>
-          <a:p xmlns:a="http://schemas.openxmlformats.org/drawingml/2006/main">
-            <a:pPr algn="l">
-              <a:lnSpc>
-                <a:spcPct val="118000"/>
-              </a:lnSpc>
-              <a:buNone/>
-              <a:defRPr sz="2400" b="0">
-                <a:solidFill>
-                  <a:srgbClr val="27333D"/>
-                </a:solidFill>
-                <a:latin typeface="微软雅黑"/>
-                <a:ea typeface="微软雅黑"/>
-                <a:cs typeface="微软雅黑"/>
-              </a:defRPr>
-            </a:pPr>
-            <a:r>
-              <a:rPr sz="2400" b="0">
-                <a:solidFill>
-                  <a:srgbClr val="27333D"/>
-                </a:solidFill>
-                <a:latin typeface="微软雅黑"/>
-                <a:ea typeface="微软雅黑"/>
-                <a:cs typeface="微软雅黑"/>
-              </a:rPr>
-              <a:t>先写任务、权限边界与评价路径，标明其他契约缺口。</a:t>
-            </a:r>
-          </a:p>
-        </p:txBody>
-      </p:sp>
-      <p:sp>
-        <p:nvSpPr>
-          <p:cNvPr id="8" name="content-338">
-            <a:extLst xmlns:a="http://schemas.openxmlformats.org/drawingml/2006/main">
-              <a:ext uri="{FF2B5EF4-FFF2-40B4-BE49-F238E27FC236}">
-                <a16:creationId xmlns:a16="http://schemas.microsoft.com/office/drawing/2014/main" id="{CD08A774-2C3B-457B-BADF-91608D935A6D}"/>
-              </a:ext>
-            </a:extLst>
-          </p:cNvPr>
-          <p:cNvSpPr>
-            <a:spLocks xmlns:a="http://schemas.openxmlformats.org/drawingml/2006/main" noGrp="1"/>
-          </p:cNvSpPr>
-          <p:nvPr/>
-        </p:nvSpPr>
-        <p:spPr>
-          <a:xfrm xmlns:a="http://schemas.openxmlformats.org/drawingml/2006/main">
-            <a:off x="609600" y="2950845"/>
-            <a:ext cx="10972800" cy="432435"/>
-          </a:xfrm>
-          <a:prstGeom xmlns:a="http://schemas.openxmlformats.org/drawingml/2006/main" prst="rect">
-            <a:avLst/>
-          </a:prstGeom>
-          <a:noFill xmlns:a="http://schemas.openxmlformats.org/drawingml/2006/main"/>
-          <a:ln xmlns:a="http://schemas.openxmlformats.org/drawingml/2006/main" w="0">
-            <a:noFill/>
-          </a:ln>
-        </p:spPr>
-        <p:txBody>
-          <a:bodyPr xmlns:a="http://schemas.openxmlformats.org/drawingml/2006/main" lIns="0" tIns="0" rIns="0" bIns="0" anchor="t"/>
-          <a:lstStyle xmlns:a="http://schemas.openxmlformats.org/drawingml/2006/main"/>
-          <a:p xmlns:a="http://schemas.openxmlformats.org/drawingml/2006/main">
-            <a:pPr algn="l">
-              <a:lnSpc>
-                <a:spcPct val="118000"/>
-              </a:lnSpc>
-              <a:buNone/>
-              <a:defRPr sz="2400" b="0">
-                <a:solidFill>
-                  <a:srgbClr val="27333D"/>
-                </a:solidFill>
-                <a:latin typeface="微软雅黑"/>
-                <a:ea typeface="微软雅黑"/>
-                <a:cs typeface="微软雅黑"/>
-              </a:defRPr>
-            </a:pPr>
-            <a:r>
-              <a:rPr sz="2400" b="0">
-                <a:solidFill>
-                  <a:srgbClr val="27333D"/>
-                </a:solidFill>
-                <a:latin typeface="微软雅黑"/>
-                <a:ea typeface="微软雅黑"/>
-                <a:cs typeface="微软雅黑"/>
-              </a:rPr>
-              <a:t>建立最小目录，走通一条 trace，说明失败如何保留与恢复。</a:t>
-            </a:r>
-          </a:p>
-        </p:txBody>
-      </p:sp>
-      <p:sp>
-        <p:nvSpPr>
-          <p:cNvPr id="9" name="content-339">
-            <a:extLst xmlns:a="http://schemas.openxmlformats.org/drawingml/2006/main">
-              <a:ext uri="{FF2B5EF4-FFF2-40B4-BE49-F238E27FC236}">
-                <a16:creationId xmlns:a16="http://schemas.microsoft.com/office/drawing/2014/main" id="{12B84699-73CE-417B-9D85-EB2A03246E9A}"/>
-              </a:ext>
-            </a:extLst>
-          </p:cNvPr>
-          <p:cNvSpPr>
-            <a:spLocks xmlns:a="http://schemas.openxmlformats.org/drawingml/2006/main" noGrp="1"/>
-          </p:cNvSpPr>
-          <p:nvPr/>
-        </p:nvSpPr>
-        <p:spPr>
-          <a:xfrm xmlns:a="http://schemas.openxmlformats.org/drawingml/2006/main">
-            <a:off x="609600" y="3640455"/>
-            <a:ext cx="10972800" cy="432435"/>
-          </a:xfrm>
-          <a:prstGeom xmlns:a="http://schemas.openxmlformats.org/drawingml/2006/main" prst="rect">
-            <a:avLst/>
-          </a:prstGeom>
-          <a:noFill xmlns:a="http://schemas.openxmlformats.org/drawingml/2006/main"/>
-          <a:ln xmlns:a="http://schemas.openxmlformats.org/drawingml/2006/main" w="0">
-            <a:noFill/>
-          </a:ln>
-        </p:spPr>
-        <p:txBody>
-          <a:bodyPr xmlns:a="http://schemas.openxmlformats.org/drawingml/2006/main" lIns="0" tIns="0" rIns="0" bIns="0" anchor="t"/>
-          <a:lstStyle xmlns:a="http://schemas.openxmlformats.org/drawingml/2006/main"/>
-          <a:p xmlns:a="http://schemas.openxmlformats.org/drawingml/2006/main">
-            <a:pPr algn="l">
-              <a:lnSpc>
-                <a:spcPct val="118000"/>
-              </a:lnSpc>
-              <a:buNone/>
-              <a:defRPr sz="2400" b="0">
-                <a:solidFill>
-                  <a:srgbClr val="27333D"/>
-                </a:solidFill>
-                <a:latin typeface="微软雅黑"/>
-                <a:ea typeface="微软雅黑"/>
-                <a:cs typeface="微软雅黑"/>
-              </a:defRPr>
-            </a:pPr>
-            <a:r>
-              <a:rPr sz="2400" b="0">
-                <a:solidFill>
-                  <a:srgbClr val="27333D"/>
-                </a:solidFill>
-                <a:latin typeface="微软雅黑"/>
-                <a:ea typeface="微软雅黑"/>
-                <a:cs typeface="微软雅黑"/>
-              </a:rPr>
-              <a:t>完成标志：可运行，或能沿已有记录复现演示。</a:t>
-            </a:r>
-          </a:p>
-        </p:txBody>
-      </p:sp>
-      <p:sp>
-        <p:nvSpPr>
-          <p:cNvPr id="10" name="content-340">
-            <a:extLst xmlns:a="http://schemas.openxmlformats.org/drawingml/2006/main">
-              <a:ext uri="{FF2B5EF4-FFF2-40B4-BE49-F238E27FC236}">
-                <a16:creationId xmlns:a16="http://schemas.microsoft.com/office/drawing/2014/main" id="{0D7D37A5-845E-4629-9A1D-BE2792115CBE}"/>
-              </a:ext>
-            </a:extLst>
-          </p:cNvPr>
-          <p:cNvSpPr>
-            <a:spLocks xmlns:a="http://schemas.openxmlformats.org/drawingml/2006/main" noGrp="1"/>
-          </p:cNvSpPr>
-          <p:nvPr/>
-        </p:nvSpPr>
-        <p:spPr>
-          <a:xfrm xmlns:a="http://schemas.openxmlformats.org/drawingml/2006/main">
-            <a:off x="609600" y="4330065"/>
-            <a:ext cx="10972800" cy="432435"/>
-          </a:xfrm>
-          <a:prstGeom xmlns:a="http://schemas.openxmlformats.org/drawingml/2006/main" prst="rect">
-            <a:avLst/>
-          </a:prstGeom>
-          <a:noFill xmlns:a="http://schemas.openxmlformats.org/drawingml/2006/main"/>
-          <a:ln xmlns:a="http://schemas.openxmlformats.org/drawingml/2006/main" w="0">
-            <a:noFill/>
-          </a:ln>
-        </p:spPr>
-        <p:txBody>
-          <a:bodyPr xmlns:a="http://schemas.openxmlformats.org/drawingml/2006/main" lIns="0" tIns="0" rIns="0" bIns="0" anchor="t"/>
-          <a:lstStyle xmlns:a="http://schemas.openxmlformats.org/drawingml/2006/main"/>
-          <a:p xmlns:a="http://schemas.openxmlformats.org/drawingml/2006/main">
-            <a:pPr algn="l">
-              <a:lnSpc>
-                <a:spcPct val="118000"/>
-              </a:lnSpc>
-              <a:buNone/>
-              <a:defRPr sz="2400" b="0">
-                <a:solidFill>
-                  <a:srgbClr val="1F4D78"/>
-                </a:solidFill>
-                <a:latin typeface="微软雅黑"/>
-                <a:ea typeface="微软雅黑"/>
-                <a:cs typeface="微软雅黑"/>
-              </a:defRPr>
-            </a:pPr>
-            <a:r>
-              <a:rPr sz="2400" b="0">
-                <a:solidFill>
-                  <a:srgbClr val="1F4D78"/>
-                </a:solidFill>
-                <a:latin typeface="微软雅黑"/>
-                <a:ea typeface="微软雅黑"/>
-                <a:cs typeface="微软雅黑"/>
-              </a:rPr>
-              <a:t>课堂无需跑完 6 份输出；课后补齐完整契约。</a:t>
             </a:r>
           </a:p>
         </p:txBody>
@@ -13384,35 +11610,55 @@
       </p:grpSpPr>
       <p:sp>
         <p:nvSpPr>
-          <p:cNvPr id="4" name="Text Placeholder 3">
-            <a:extLst xmlns:a="http://schemas.openxmlformats.org/drawingml/2006/main">
-              <a:ext uri="{FF2B5EF4-FFF2-40B4-BE49-F238E27FC236}">
-                <a16:creationId xmlns:a16="http://schemas.microsoft.com/office/drawing/2014/main" id="{4D941B40-7A0A-534E-3563-CA11753C8E3F}"/>
-              </a:ext>
-            </a:extLst>
-          </p:cNvPr>
-          <p:cNvSpPr>
-            <a:spLocks xmlns:a="http://schemas.openxmlformats.org/drawingml/2006/main" noGrp="1"/>
-          </p:cNvSpPr>
-          <p:nvPr>
-            <p:ph type="body" idx="14"/>
-          </p:nvPr>
-        </p:nvSpPr>
-        <p:spPr>
-          <a:xfrm xmlns:a="http://schemas.openxmlformats.org/drawingml/2006/main">
-            <a:off x="1028700" y="57150"/>
-            <a:ext cx="10668000" cy="571500"/>
-          </a:xfrm>
-        </p:spPr>
-        <p:txBody>
-          <a:bodyPr xmlns:a="http://schemas.openxmlformats.org/drawingml/2006/main" lIns="0" tIns="0" rIns="0" bIns="0" anchor="ctr"/>
-          <a:lstStyle xmlns:a="http://schemas.openxmlformats.org/drawingml/2006/main"/>
+          <p:cNvPr id="7" name="judgment-title">
+            <a:extLst xmlns:a="http://schemas.openxmlformats.org/drawingml/2006/main">
+              <a:ext uri="{FF2B5EF4-FFF2-40B4-BE49-F238E27FC236}">
+                <a16:creationId xmlns:a16="http://schemas.microsoft.com/office/drawing/2014/main" id="{8A1E6837-82DE-421A-9AAD-252CBC289EB3}"/>
+              </a:ext>
+            </a:extLst>
+          </p:cNvPr>
+          <p:cNvSpPr>
+            <a:spLocks xmlns:a="http://schemas.openxmlformats.org/drawingml/2006/main" noGrp="1"/>
+          </p:cNvSpPr>
+          <p:nvPr/>
+        </p:nvSpPr>
+        <p:spPr>
+          <a:xfrm xmlns:a="http://schemas.openxmlformats.org/drawingml/2006/main">
+            <a:off x="1028700" y="76200"/>
+            <a:ext cx="10687050" cy="514350"/>
+          </a:xfrm>
+          <a:prstGeom xmlns:a="http://schemas.openxmlformats.org/drawingml/2006/main" prst="rect">
+            <a:avLst/>
+          </a:prstGeom>
+          <a:noFill xmlns:a="http://schemas.openxmlformats.org/drawingml/2006/main"/>
+          <a:ln xmlns:a="http://schemas.openxmlformats.org/drawingml/2006/main" w="0">
+            <a:noFill/>
+          </a:ln>
+        </p:spPr>
+        <p:txBody>
+          <a:bodyPr xmlns:a="http://schemas.openxmlformats.org/drawingml/2006/main" lIns="0" tIns="0" rIns="0" bIns="0" anchor="t"/>
+          <a:lstStyle xmlns:a="http://schemas.openxmlformats.org/drawingml/2006/main">
+            <a:defPPr algn="l">
+              <a:defRPr sz="3000" b="1">
+                <a:solidFill>
+                  <a:srgbClr val="FFFFFF"/>
+                </a:solidFill>
+                <a:latin typeface="微软雅黑"/>
+                <a:ea typeface="微软雅黑"/>
+                <a:cs typeface="微软雅黑"/>
+              </a:defRPr>
+            </a:defPPr>
+          </a:lstStyle>
           <a:p xmlns:a="http://schemas.openxmlformats.org/drawingml/2006/main">
             <a:pPr algn="l">
-              <a:lnSpc>
-                <a:spcPct val="118000"/>
-              </a:lnSpc>
-              <a:buNone/>
+              <a:defRPr sz="3000" b="1">
+                <a:solidFill>
+                  <a:srgbClr val="FFFFFF"/>
+                </a:solidFill>
+                <a:latin typeface="微软雅黑"/>
+                <a:ea typeface="微软雅黑"/>
+                <a:cs typeface="微软雅黑"/>
+              </a:defRPr>
             </a:pPr>
             <a:r>
               <a:rPr sz="3000" b="1">
@@ -13423,1744 +11669,383 @@
                 <a:ea typeface="微软雅黑"/>
                 <a:cs typeface="微软雅黑"/>
               </a:rPr>
-              <a:t>八个设计决定围绕同一工作流展开</a:t>
-            </a:r>
-            <a:endParaRPr/>
-          </a:p>
-        </p:txBody>
-      </p:sp>
-      <p:sp>
-        <p:nvSpPr>
-          <p:cNvPr id="5" name="Slide Number Placeholder 4">
-            <a:extLst xmlns:a="http://schemas.openxmlformats.org/drawingml/2006/main">
-              <a:ext uri="{FF2B5EF4-FFF2-40B4-BE49-F238E27FC236}">
-                <a16:creationId xmlns:a16="http://schemas.microsoft.com/office/drawing/2014/main" id="{EBA5909F-738E-F60C-BE8C-B3F1D94548E5}"/>
-              </a:ext>
-            </a:extLst>
-          </p:cNvPr>
-          <p:cNvSpPr>
-            <a:spLocks xmlns:a="http://schemas.openxmlformats.org/drawingml/2006/main" noGrp="1"/>
-          </p:cNvSpPr>
-          <p:nvPr>
-            <p:ph type="sldNum" idx="10"/>
-          </p:nvPr>
-        </p:nvSpPr>
-        <p:spPr/>
-        <p:txBody>
-          <a:bodyPr xmlns:a="http://schemas.openxmlformats.org/drawingml/2006/main"/>
-          <a:lstStyle xmlns:a="http://schemas.openxmlformats.org/drawingml/2006/main"/>
-          <a:p xmlns:a="http://schemas.openxmlformats.org/drawingml/2006/main">
-            <a:fld id="{E2598689-54C9-18A7-3A19-ED76AA08988F}" type="slidenum">
+              <a:t>这个任务需要多少自主性</a:t>
+            </a:r>
+          </a:p>
+        </p:txBody>
+      </p:sp>
+      <p:sp>
+        <p:nvSpPr>
+          <p:cNvPr id="2" name="judgment-body-0">
+            <a:extLst xmlns:a="http://schemas.openxmlformats.org/drawingml/2006/main">
+              <a:ext uri="{FF2B5EF4-FFF2-40B4-BE49-F238E27FC236}">
+                <a16:creationId xmlns:a16="http://schemas.microsoft.com/office/drawing/2014/main" id="{DC9DBBDC-83A5-4EC9-A416-7C6C5E4D6981}"/>
+              </a:ext>
+            </a:extLst>
+          </p:cNvPr>
+          <p:cNvSpPr>
+            <a:spLocks xmlns:a="http://schemas.openxmlformats.org/drawingml/2006/main" noGrp="1"/>
+          </p:cNvSpPr>
+          <p:nvPr/>
+        </p:nvSpPr>
+        <p:spPr>
+          <a:xfrm xmlns:a="http://schemas.openxmlformats.org/drawingml/2006/main">
+            <a:off x="666750" y="1066800"/>
+            <a:ext cx="10858500" cy="1009650"/>
+          </a:xfrm>
+          <a:prstGeom xmlns:a="http://schemas.openxmlformats.org/drawingml/2006/main" prst="rect">
+            <a:avLst/>
+          </a:prstGeom>
+          <a:noFill xmlns:a="http://schemas.openxmlformats.org/drawingml/2006/main"/>
+          <a:ln xmlns:a="http://schemas.openxmlformats.org/drawingml/2006/main" w="0">
+            <a:noFill/>
+          </a:ln>
+        </p:spPr>
+        <p:txBody>
+          <a:bodyPr xmlns:a="http://schemas.openxmlformats.org/drawingml/2006/main" lIns="0" tIns="0" rIns="0" bIns="0" anchor="t"/>
+          <a:lstStyle xmlns:a="http://schemas.openxmlformats.org/drawingml/2006/main">
+            <a:defPPr algn="l">
+              <a:defRPr sz="2400" b="0">
+                <a:solidFill>
+                  <a:srgbClr val="263746"/>
+                </a:solidFill>
+                <a:latin typeface="微软雅黑"/>
+                <a:ea typeface="微软雅黑"/>
+                <a:cs typeface="微软雅黑"/>
+              </a:defRPr>
+            </a:defPPr>
+          </a:lstStyle>
+          <a:p xmlns:a="http://schemas.openxmlformats.org/drawingml/2006/main">
+            <a:pPr algn="l">
+              <a:defRPr sz="2400" b="0">
+                <a:solidFill>
+                  <a:srgbClr val="263746"/>
+                </a:solidFill>
+                <a:latin typeface="微软雅黑"/>
+                <a:ea typeface="微软雅黑"/>
+                <a:cs typeface="微软雅黑"/>
+              </a:defRPr>
+            </a:pPr>
+            <a:r>
+              <a:rPr sz="2400" b="0">
+                <a:solidFill>
+                  <a:srgbClr val="263746"/>
+                </a:solidFill>
+                <a:latin typeface="微软雅黑"/>
+                <a:ea typeface="微软雅黑"/>
+                <a:cs typeface="微软雅黑"/>
+              </a:rPr>
+              <a:t>固定输入校验、人工判语义、汇总、失败恢复</a:t>
+            </a:r>
+          </a:p>
+        </p:txBody>
+      </p:sp>
+      <p:sp>
+        <p:nvSpPr>
+          <p:cNvPr id="3" name="judgment-body-1">
+            <a:extLst xmlns:a="http://schemas.openxmlformats.org/drawingml/2006/main">
+              <a:ext uri="{FF2B5EF4-FFF2-40B4-BE49-F238E27FC236}">
+                <a16:creationId xmlns:a16="http://schemas.microsoft.com/office/drawing/2014/main" id="{2B1AD598-0CF5-4A35-AB87-A028F3C83BC7}"/>
+              </a:ext>
+            </a:extLst>
+          </p:cNvPr>
+          <p:cNvSpPr>
+            <a:spLocks xmlns:a="http://schemas.openxmlformats.org/drawingml/2006/main" noGrp="1"/>
+          </p:cNvSpPr>
+          <p:nvPr/>
+        </p:nvSpPr>
+        <p:spPr>
+          <a:xfrm xmlns:a="http://schemas.openxmlformats.org/drawingml/2006/main">
+            <a:off x="666750" y="2238375"/>
+            <a:ext cx="10858500" cy="2076450"/>
+          </a:xfrm>
+          <a:prstGeom xmlns:a="http://schemas.openxmlformats.org/drawingml/2006/main" prst="rect">
+            <a:avLst/>
+          </a:prstGeom>
+          <a:noFill xmlns:a="http://schemas.openxmlformats.org/drawingml/2006/main"/>
+          <a:ln xmlns:a="http://schemas.openxmlformats.org/drawingml/2006/main" w="0">
+            <a:noFill/>
+          </a:ln>
+        </p:spPr>
+        <p:txBody>
+          <a:bodyPr xmlns:a="http://schemas.openxmlformats.org/drawingml/2006/main" lIns="0" tIns="0" rIns="0" bIns="0" anchor="t"/>
+          <a:lstStyle xmlns:a="http://schemas.openxmlformats.org/drawingml/2006/main">
+            <a:defPPr algn="l">
+              <a:defRPr sz="2400" b="0">
+                <a:solidFill>
+                  <a:srgbClr val="263746"/>
+                </a:solidFill>
+                <a:latin typeface="微软雅黑"/>
+                <a:ea typeface="微软雅黑"/>
+                <a:cs typeface="微软雅黑"/>
+              </a:defRPr>
+            </a:defPPr>
+          </a:lstStyle>
+          <a:p xmlns:a="http://schemas.openxmlformats.org/drawingml/2006/main">
+            <a:pPr algn="l">
+              <a:defRPr sz="2400" b="0">
+                <a:solidFill>
+                  <a:srgbClr val="263746"/>
+                </a:solidFill>
+                <a:latin typeface="微软雅黑"/>
+                <a:ea typeface="微软雅黑"/>
+                <a:cs typeface="微软雅黑"/>
+              </a:defRPr>
+            </a:pPr>
+            <a:r>
+              <a:rPr sz="2400" b="0">
+                <a:solidFill>
+                  <a:srgbClr val="263746"/>
+                </a:solidFill>
+                <a:latin typeface="微软雅黑"/>
+                <a:ea typeface="微软雅黑"/>
+                <a:cs typeface="微软雅黑"/>
+              </a:rPr>
+              <a:t>A｜确定性脚本</a:t>
+            </a:r>
+          </a:p>
+          <a:p xmlns:a="http://schemas.openxmlformats.org/drawingml/2006/main">
+            <a:pPr algn="l">
+              <a:defRPr sz="2400" b="0">
+                <a:solidFill>
+                  <a:srgbClr val="263746"/>
+                </a:solidFill>
+                <a:latin typeface="微软雅黑"/>
+                <a:ea typeface="微软雅黑"/>
+                <a:cs typeface="微软雅黑"/>
+              </a:defRPr>
+            </a:pPr>
+            <a:r>
+              <a:rPr sz="2400" b="0">
+                <a:solidFill>
+                  <a:srgbClr val="263746"/>
+                </a:solidFill>
+                <a:latin typeface="微软雅黑"/>
+                <a:ea typeface="微软雅黑"/>
+                <a:cs typeface="微软雅黑"/>
+              </a:rPr>
+              <a:t>B｜固定生成链＋人工审核</a:t>
+            </a:r>
+          </a:p>
+          <a:p xmlns:a="http://schemas.openxmlformats.org/drawingml/2006/main">
+            <a:pPr algn="l">
+              <a:defRPr sz="2400" b="0">
+                <a:solidFill>
+                  <a:srgbClr val="263746"/>
+                </a:solidFill>
+                <a:latin typeface="微软雅黑"/>
+                <a:ea typeface="微软雅黑"/>
+                <a:cs typeface="微软雅黑"/>
+              </a:defRPr>
+            </a:pPr>
+            <a:r>
+              <a:rPr sz="2400" b="0">
+                <a:solidFill>
+                  <a:srgbClr val="263746"/>
+                </a:solidFill>
+                <a:latin typeface="微软雅黑"/>
+                <a:ea typeface="微软雅黑"/>
+                <a:cs typeface="微软雅黑"/>
+              </a:rPr>
+              <a:t>C｜Agent 自选输入、可读 gold、得分上升即采用</a:t>
+            </a:r>
+          </a:p>
+        </p:txBody>
+      </p:sp>
+      <p:sp>
+        <p:nvSpPr>
+          <p:cNvPr id="4" name="judgment-body-2">
+            <a:extLst xmlns:a="http://schemas.openxmlformats.org/drawingml/2006/main">
+              <a:ext uri="{FF2B5EF4-FFF2-40B4-BE49-F238E27FC236}">
+                <a16:creationId xmlns:a16="http://schemas.microsoft.com/office/drawing/2014/main" id="{74E5C2FA-1189-41FC-B05F-245957C56BE8}"/>
+              </a:ext>
+            </a:extLst>
+          </p:cNvPr>
+          <p:cNvSpPr>
+            <a:spLocks xmlns:a="http://schemas.openxmlformats.org/drawingml/2006/main" noGrp="1"/>
+          </p:cNvSpPr>
+          <p:nvPr/>
+        </p:nvSpPr>
+        <p:spPr>
+          <a:xfrm xmlns:a="http://schemas.openxmlformats.org/drawingml/2006/main">
+            <a:off x="666750" y="4495800"/>
+            <a:ext cx="10858500" cy="1409700"/>
+          </a:xfrm>
+          <a:prstGeom xmlns:a="http://schemas.openxmlformats.org/drawingml/2006/main" prst="rect">
+            <a:avLst/>
+          </a:prstGeom>
+          <a:noFill xmlns:a="http://schemas.openxmlformats.org/drawingml/2006/main"/>
+          <a:ln xmlns:a="http://schemas.openxmlformats.org/drawingml/2006/main" w="0">
+            <a:noFill/>
+          </a:ln>
+        </p:spPr>
+        <p:txBody>
+          <a:bodyPr xmlns:a="http://schemas.openxmlformats.org/drawingml/2006/main" lIns="0" tIns="0" rIns="0" bIns="0" anchor="t"/>
+          <a:lstStyle xmlns:a="http://schemas.openxmlformats.org/drawingml/2006/main">
+            <a:defPPr algn="l">
+              <a:defRPr sz="2200" b="0">
+                <a:solidFill>
+                  <a:srgbClr val="1F4D78"/>
+                </a:solidFill>
+                <a:latin typeface="微软雅黑"/>
+                <a:ea typeface="微软雅黑"/>
+                <a:cs typeface="微软雅黑"/>
+              </a:defRPr>
+            </a:defPPr>
+          </a:lstStyle>
+          <a:p xmlns:a="http://schemas.openxmlformats.org/drawingml/2006/main">
+            <a:pPr algn="l">
+              <a:defRPr sz="2200" b="0">
+                <a:solidFill>
+                  <a:srgbClr val="1F4D78"/>
+                </a:solidFill>
+                <a:latin typeface="微软雅黑"/>
+                <a:ea typeface="微软雅黑"/>
+                <a:cs typeface="微软雅黑"/>
+              </a:defRPr>
+            </a:pPr>
+            <a:r>
+              <a:rPr sz="2200" b="0">
+                <a:solidFill>
+                  <a:srgbClr val="1F4D78"/>
+                </a:solidFill>
+                <a:latin typeface="微软雅黑"/>
+                <a:ea typeface="微软雅黑"/>
+                <a:cs typeface="微软雅黑"/>
+              </a:rPr>
+              <a:t>选最小合适设计；实际修改一个环节，并保留输入到评价的 trace。</a:t>
+            </a:r>
+          </a:p>
+        </p:txBody>
+      </p:sp>
+      <p:sp>
+        <p:nvSpPr>
+          <p:cNvPr id="5" name="judgment-source">
+            <a:extLst xmlns:a="http://schemas.openxmlformats.org/drawingml/2006/main">
+              <a:ext uri="{FF2B5EF4-FFF2-40B4-BE49-F238E27FC236}">
+                <a16:creationId xmlns:a16="http://schemas.microsoft.com/office/drawing/2014/main" id="{6902EB42-FE1E-4051-96DC-994168369360}"/>
+              </a:ext>
+            </a:extLst>
+          </p:cNvPr>
+          <p:cNvSpPr>
+            <a:spLocks xmlns:a="http://schemas.openxmlformats.org/drawingml/2006/main" noGrp="1"/>
+          </p:cNvSpPr>
+          <p:nvPr/>
+        </p:nvSpPr>
+        <p:spPr>
+          <a:xfrm xmlns:a="http://schemas.openxmlformats.org/drawingml/2006/main">
+            <a:off x="666750" y="6276975"/>
+            <a:ext cx="10572750" cy="209550"/>
+          </a:xfrm>
+          <a:prstGeom xmlns:a="http://schemas.openxmlformats.org/drawingml/2006/main" prst="rect">
+            <a:avLst/>
+          </a:prstGeom>
+          <a:noFill xmlns:a="http://schemas.openxmlformats.org/drawingml/2006/main"/>
+          <a:ln xmlns:a="http://schemas.openxmlformats.org/drawingml/2006/main" w="0">
+            <a:noFill/>
+          </a:ln>
+        </p:spPr>
+        <p:txBody>
+          <a:bodyPr xmlns:a="http://schemas.openxmlformats.org/drawingml/2006/main" lIns="0" tIns="0" rIns="0" bIns="0" anchor="t"/>
+          <a:lstStyle xmlns:a="http://schemas.openxmlformats.org/drawingml/2006/main">
+            <a:defPPr algn="l">
+              <a:defRPr sz="1100" b="0">
+                <a:solidFill>
+                  <a:srgbClr val="667684"/>
+                </a:solidFill>
+                <a:latin typeface="微软雅黑"/>
+                <a:ea typeface="微软雅黑"/>
+                <a:cs typeface="微软雅黑"/>
+              </a:defRPr>
+            </a:defPPr>
+          </a:lstStyle>
+          <a:p xmlns:a="http://schemas.openxmlformats.org/drawingml/2006/main">
+            <a:pPr algn="l">
+              <a:defRPr sz="1100" b="0">
+                <a:solidFill>
+                  <a:srgbClr val="667684"/>
+                </a:solidFill>
+                <a:latin typeface="微软雅黑"/>
+                <a:ea typeface="微软雅黑"/>
+                <a:cs typeface="微软雅黑"/>
+              </a:defRPr>
+            </a:pPr>
+            <a:r>
+              <a:rPr sz="1100" b="0">
+                <a:solidFill>
+                  <a:srgbClr val="667684"/>
+                </a:solidFill>
+                <a:latin typeface="微软雅黑"/>
+                <a:ea typeface="微软雅黑"/>
+                <a:cs typeface="微软雅黑"/>
+              </a:rPr>
+              <a:t>来源：本课判断任务与讲义；构造材料及真实来源按材料包标识</a:t>
+            </a:r>
+          </a:p>
+        </p:txBody>
+      </p:sp>
+      <p:sp>
+        <p:nvSpPr>
+          <p:cNvPr id="6" name="judgment-page">
+            <a:extLst xmlns:a="http://schemas.openxmlformats.org/drawingml/2006/main">
+              <a:ext uri="{FF2B5EF4-FFF2-40B4-BE49-F238E27FC236}">
+                <a16:creationId xmlns:a16="http://schemas.microsoft.com/office/drawing/2014/main" id="{5035C6F1-CE09-4FE6-9408-105E3FA7D4A9}"/>
+              </a:ext>
+            </a:extLst>
+          </p:cNvPr>
+          <p:cNvSpPr>
+            <a:spLocks xmlns:a="http://schemas.openxmlformats.org/drawingml/2006/main" noGrp="1"/>
+          </p:cNvSpPr>
+          <p:nvPr/>
+        </p:nvSpPr>
+        <p:spPr>
+          <a:xfrm xmlns:a="http://schemas.openxmlformats.org/drawingml/2006/main">
+            <a:off x="11715750" y="6562725"/>
+            <a:ext cx="238125" cy="171450"/>
+          </a:xfrm>
+          <a:prstGeom xmlns:a="http://schemas.openxmlformats.org/drawingml/2006/main" prst="rect">
+            <a:avLst/>
+          </a:prstGeom>
+          <a:noFill xmlns:a="http://schemas.openxmlformats.org/drawingml/2006/main"/>
+          <a:ln xmlns:a="http://schemas.openxmlformats.org/drawingml/2006/main" w="0">
+            <a:noFill/>
+          </a:ln>
+        </p:spPr>
+        <p:txBody>
+          <a:bodyPr xmlns:a="http://schemas.openxmlformats.org/drawingml/2006/main" lIns="0" tIns="0" rIns="0" bIns="0" anchor="t"/>
+          <a:lstStyle xmlns:a="http://schemas.openxmlformats.org/drawingml/2006/main">
+            <a:defPPr algn="l">
+              <a:defRPr sz="900" b="0">
+                <a:solidFill>
+                  <a:srgbClr val="A5A5A5"/>
+                </a:solidFill>
+                <a:latin typeface="微软雅黑"/>
+                <a:ea typeface="微软雅黑"/>
+                <a:cs typeface="微软雅黑"/>
+              </a:defRPr>
+            </a:defPPr>
+          </a:lstStyle>
+          <a:p xmlns:a="http://schemas.openxmlformats.org/drawingml/2006/main">
+            <a:pPr algn="l">
+              <a:defRPr sz="900" b="0">
+                <a:solidFill>
+                  <a:srgbClr val="A5A5A5"/>
+                </a:solidFill>
+                <a:latin typeface="微软雅黑"/>
+                <a:ea typeface="微软雅黑"/>
+                <a:cs typeface="微软雅黑"/>
+              </a:defRPr>
+            </a:pPr>
+            <a:r>
+              <a:rPr sz="900" b="0">
+                <a:solidFill>
+                  <a:srgbClr val="A5A5A5"/>
+                </a:solidFill>
+                <a:latin typeface="微软雅黑"/>
+                <a:ea typeface="微软雅黑"/>
+                <a:cs typeface="微软雅黑"/>
+              </a:rPr>
               <a:t>2</a:t>
-            </a:fld>
-            <a:endParaRPr/>
-          </a:p>
-        </p:txBody>
-      </p:sp>
-      <p:sp>
-        <p:nvSpPr>
-          <p:cNvPr id="6" name="brand-header">
-            <a:extLst xmlns:a="http://schemas.openxmlformats.org/drawingml/2006/main">
-              <a:ext uri="{FF2B5EF4-FFF2-40B4-BE49-F238E27FC236}">
-                <a16:creationId xmlns:a16="http://schemas.microsoft.com/office/drawing/2014/main" id="{1AD45271-749D-4061-803D-BECC4EDCE92E}"/>
-              </a:ext>
-            </a:extLst>
-          </p:cNvPr>
-          <p:cNvSpPr>
-            <a:spLocks xmlns:a="http://schemas.openxmlformats.org/drawingml/2006/main" noGrp="1"/>
-          </p:cNvSpPr>
-          <p:nvPr/>
-        </p:nvSpPr>
-        <p:spPr>
-          <a:xfrm xmlns:a="http://schemas.openxmlformats.org/drawingml/2006/main">
-            <a:off x="0" y="0"/>
-            <a:ext cx="11887200" cy="685800"/>
-          </a:xfrm>
-          <a:prstGeom xmlns:a="http://schemas.openxmlformats.org/drawingml/2006/main" prst="rect">
-            <a:avLst/>
-          </a:prstGeom>
-          <a:solidFill xmlns:a="http://schemas.openxmlformats.org/drawingml/2006/main">
-            <a:srgbClr val="C8161E"/>
-          </a:solidFill>
-          <a:ln xmlns:a="http://schemas.openxmlformats.org/drawingml/2006/main" w="0">
-            <a:noFill/>
-          </a:ln>
-        </p:spPr>
-      </p:sp>
-      <p:pic>
-        <p:nvPicPr>
-          <p:cNvPr id="44" name=""/>
-          <p:cNvPicPr>
-            <a:picLocks xmlns:a="http://schemas.openxmlformats.org/drawingml/2006/main" noChangeAspect="1"/>
-          </p:cNvPicPr>
-          <p:nvPr/>
-        </p:nvPicPr>
-        <p:blipFill>
-          <a:blip xmlns:r="http://schemas.openxmlformats.org/officeDocument/2006/relationships" xmlns:a="http://schemas.openxmlformats.org/drawingml/2006/main" r:embed="R9b23b49ec5594cb5"/>
-          <a:stretch xmlns:a="http://schemas.openxmlformats.org/drawingml/2006/main"/>
-        </p:blipFill>
-        <p:spPr>
-          <a:xfrm xmlns:a="http://schemas.openxmlformats.org/drawingml/2006/main">
-            <a:off x="323850" y="76200"/>
-            <a:ext cx="533400" cy="533400"/>
-          </a:xfrm>
-          <a:prstGeom xmlns:a="http://schemas.openxmlformats.org/drawingml/2006/main" prst="rect">
-            <a:avLst/>
-          </a:prstGeom>
-        </p:spPr>
-      </p:pic>
-      <p:sp>
-        <p:nvSpPr>
-          <p:cNvPr id="8" name="brand-title">
-            <a:extLst xmlns:a="http://schemas.openxmlformats.org/drawingml/2006/main">
-              <a:ext uri="{FF2B5EF4-FFF2-40B4-BE49-F238E27FC236}">
-                <a16:creationId xmlns:a16="http://schemas.microsoft.com/office/drawing/2014/main" id="{6EE8992D-2CA2-4366-8FF2-17719BCD979D}"/>
-              </a:ext>
-            </a:extLst>
-          </p:cNvPr>
-          <p:cNvSpPr>
-            <a:spLocks xmlns:a="http://schemas.openxmlformats.org/drawingml/2006/main" noGrp="1"/>
-          </p:cNvSpPr>
-          <p:nvPr/>
-        </p:nvSpPr>
-        <p:spPr>
-          <a:xfrm xmlns:a="http://schemas.openxmlformats.org/drawingml/2006/main">
-            <a:off x="1028700" y="66675"/>
-            <a:ext cx="10477500" cy="552450"/>
-          </a:xfrm>
-          <a:prstGeom xmlns:a="http://schemas.openxmlformats.org/drawingml/2006/main" prst="rect">
-            <a:avLst/>
-          </a:prstGeom>
-          <a:noFill xmlns:a="http://schemas.openxmlformats.org/drawingml/2006/main"/>
-          <a:ln xmlns:a="http://schemas.openxmlformats.org/drawingml/2006/main" w="0">
-            <a:noFill/>
-          </a:ln>
-        </p:spPr>
-        <p:txBody>
-          <a:bodyPr xmlns:a="http://schemas.openxmlformats.org/drawingml/2006/main" lIns="0" tIns="0" rIns="0" bIns="0" anchor="ctr"/>
-          <a:lstStyle xmlns:a="http://schemas.openxmlformats.org/drawingml/2006/main"/>
-          <a:p xmlns:a="http://schemas.openxmlformats.org/drawingml/2006/main">
-            <a:pPr algn="l">
-              <a:lnSpc>
-                <a:spcPct val="118000"/>
-              </a:lnSpc>
-              <a:buNone/>
-              <a:defRPr sz="3000" b="1">
-                <a:solidFill>
-                  <a:srgbClr val="FFFFFF"/>
-                </a:solidFill>
-                <a:latin typeface="微软雅黑"/>
-                <a:ea typeface="微软雅黑"/>
-                <a:cs typeface="微软雅黑"/>
-              </a:defRPr>
-            </a:pPr>
-            <a:r>
-              <a:rPr sz="3000" b="1">
-                <a:solidFill>
-                  <a:srgbClr val="FFFFFF"/>
-                </a:solidFill>
-                <a:latin typeface="微软雅黑"/>
-                <a:ea typeface="微软雅黑"/>
-                <a:cs typeface="微软雅黑"/>
-              </a:rPr>
-              <a:t>八个设计决定围绕同一工作流展开</a:t>
-            </a:r>
-          </a:p>
-        </p:txBody>
-      </p:sp>
-      <p:sp>
-        <p:nvSpPr>
-          <p:cNvPr id="9" name="source">
-            <a:extLst xmlns:a="http://schemas.openxmlformats.org/drawingml/2006/main">
-              <a:ext uri="{FF2B5EF4-FFF2-40B4-BE49-F238E27FC236}">
-                <a16:creationId xmlns:a16="http://schemas.microsoft.com/office/drawing/2014/main" id="{78F352A8-CEDE-4C12-B57B-DBC233623F9E}"/>
-              </a:ext>
-            </a:extLst>
-          </p:cNvPr>
-          <p:cNvSpPr>
-            <a:spLocks xmlns:a="http://schemas.openxmlformats.org/drawingml/2006/main" noGrp="1"/>
-          </p:cNvSpPr>
-          <p:nvPr/>
-        </p:nvSpPr>
-        <p:spPr>
-          <a:xfrm xmlns:a="http://schemas.openxmlformats.org/drawingml/2006/main">
-            <a:off x="609600" y="6067425"/>
-            <a:ext cx="10763250" cy="209550"/>
-          </a:xfrm>
-          <a:prstGeom xmlns:a="http://schemas.openxmlformats.org/drawingml/2006/main" prst="rect">
-            <a:avLst/>
-          </a:prstGeom>
-          <a:noFill xmlns:a="http://schemas.openxmlformats.org/drawingml/2006/main"/>
-          <a:ln xmlns:a="http://schemas.openxmlformats.org/drawingml/2006/main" w="0">
-            <a:noFill/>
-          </a:ln>
-        </p:spPr>
-        <p:txBody>
-          <a:bodyPr xmlns:a="http://schemas.openxmlformats.org/drawingml/2006/main" lIns="0" tIns="0" rIns="0" bIns="0" anchor="t"/>
-          <a:lstStyle xmlns:a="http://schemas.openxmlformats.org/drawingml/2006/main"/>
-          <a:p xmlns:a="http://schemas.openxmlformats.org/drawingml/2006/main">
-            <a:pPr algn="l">
-              <a:lnSpc>
-                <a:spcPct val="118000"/>
-              </a:lnSpc>
-              <a:buNone/>
-              <a:defRPr sz="1100" b="0">
-                <a:solidFill>
-                  <a:srgbClr val="66727D"/>
-                </a:solidFill>
-                <a:latin typeface="微软雅黑"/>
-                <a:ea typeface="微软雅黑"/>
-                <a:cs typeface="微软雅黑"/>
-              </a:defRPr>
-            </a:pPr>
-            <a:r>
-              <a:rPr sz="1100" b="0">
-                <a:solidFill>
-                  <a:srgbClr val="66727D"/>
-                </a:solidFill>
-                <a:latin typeface="微软雅黑"/>
-                <a:ea typeface="微软雅黑"/>
-                <a:cs typeface="微软雅黑"/>
-              </a:rPr>
-              <a:t>来源：lesson-12/slides.md；课程工件与讲义见 speaker notes</a:t>
-            </a:r>
-          </a:p>
-        </p:txBody>
-      </p:sp>
-      <p:sp>
-        <p:nvSpPr>
-          <p:cNvPr id="10" name="chain-line-0">
-            <a:extLst xmlns:a="http://schemas.openxmlformats.org/drawingml/2006/main">
-              <a:ext uri="{FF2B5EF4-FFF2-40B4-BE49-F238E27FC236}">
-                <a16:creationId xmlns:a16="http://schemas.microsoft.com/office/drawing/2014/main" id="{43A3AC0C-F55D-4E85-B03D-8644E07DA2BB}"/>
-              </a:ext>
-            </a:extLst>
-          </p:cNvPr>
-          <p:cNvSpPr>
-            <a:spLocks xmlns:a="http://schemas.openxmlformats.org/drawingml/2006/main" noGrp="1"/>
-          </p:cNvSpPr>
-          <p:nvPr/>
-        </p:nvSpPr>
-        <p:spPr>
-          <a:xfrm xmlns:a="http://schemas.openxmlformats.org/drawingml/2006/main">
-            <a:off x="666750" y="2343150"/>
-            <a:ext cx="2000250" cy="14288"/>
-          </a:xfrm>
-          <a:prstGeom xmlns:a="http://schemas.openxmlformats.org/drawingml/2006/main" prst="rect">
-            <a:avLst/>
-          </a:prstGeom>
-          <a:solidFill xmlns:a="http://schemas.openxmlformats.org/drawingml/2006/main">
-            <a:srgbClr val="1F4D78"/>
-          </a:solidFill>
-          <a:ln xmlns:a="http://schemas.openxmlformats.org/drawingml/2006/main" w="0">
-            <a:noFill/>
-          </a:ln>
-        </p:spPr>
-      </p:sp>
-      <p:sp>
-        <p:nvSpPr>
-          <p:cNvPr id="11" name="chain-0">
-            <a:extLst xmlns:a="http://schemas.openxmlformats.org/drawingml/2006/main">
-              <a:ext uri="{FF2B5EF4-FFF2-40B4-BE49-F238E27FC236}">
-                <a16:creationId xmlns:a16="http://schemas.microsoft.com/office/drawing/2014/main" id="{DDCEEB0B-6E1B-4956-BED9-FAEF59727A88}"/>
-              </a:ext>
-            </a:extLst>
-          </p:cNvPr>
-          <p:cNvSpPr>
-            <a:spLocks xmlns:a="http://schemas.openxmlformats.org/drawingml/2006/main" noGrp="1"/>
-          </p:cNvSpPr>
-          <p:nvPr/>
-        </p:nvSpPr>
-        <p:spPr>
-          <a:xfrm xmlns:a="http://schemas.openxmlformats.org/drawingml/2006/main">
-            <a:off x="666750" y="1619250"/>
-            <a:ext cx="2000250" cy="666750"/>
-          </a:xfrm>
-          <a:prstGeom xmlns:a="http://schemas.openxmlformats.org/drawingml/2006/main" prst="rect">
-            <a:avLst/>
-          </a:prstGeom>
-          <a:noFill xmlns:a="http://schemas.openxmlformats.org/drawingml/2006/main"/>
-          <a:ln xmlns:a="http://schemas.openxmlformats.org/drawingml/2006/main" w="0">
-            <a:noFill/>
-          </a:ln>
-        </p:spPr>
-        <p:txBody>
-          <a:bodyPr xmlns:a="http://schemas.openxmlformats.org/drawingml/2006/main" lIns="0" tIns="0" rIns="0" bIns="0" anchor="ctr"/>
-          <a:lstStyle xmlns:a="http://schemas.openxmlformats.org/drawingml/2006/main"/>
-          <a:p xmlns:a="http://schemas.openxmlformats.org/drawingml/2006/main">
-            <a:pPr algn="ctr">
-              <a:lnSpc>
-                <a:spcPct val="118000"/>
-              </a:lnSpc>
-              <a:buNone/>
-              <a:defRPr sz="2200" b="0">
-                <a:solidFill>
-                  <a:srgbClr val="1F4D78"/>
-                </a:solidFill>
-                <a:latin typeface="微软雅黑"/>
-                <a:ea typeface="微软雅黑"/>
-                <a:cs typeface="微软雅黑"/>
-              </a:defRPr>
-            </a:pPr>
-            <a:r>
-              <a:rPr sz="2200" b="0">
-                <a:solidFill>
-                  <a:srgbClr val="1F4D78"/>
-                </a:solidFill>
-                <a:latin typeface="微软雅黑"/>
-                <a:ea typeface="微软雅黑"/>
-                <a:cs typeface="微软雅黑"/>
-              </a:rPr>
-              <a:t>任务契约</a:t>
-            </a:r>
-          </a:p>
-        </p:txBody>
-      </p:sp>
-      <p:sp>
-        <p:nvSpPr>
-          <p:cNvPr id="12" name="chain-arrow-0">
-            <a:extLst xmlns:a="http://schemas.openxmlformats.org/drawingml/2006/main">
-              <a:ext uri="{FF2B5EF4-FFF2-40B4-BE49-F238E27FC236}">
-                <a16:creationId xmlns:a16="http://schemas.microsoft.com/office/drawing/2014/main" id="{4C8E86B3-94A5-4DFB-9554-596B687E31B0}"/>
-              </a:ext>
-            </a:extLst>
-          </p:cNvPr>
-          <p:cNvSpPr>
-            <a:spLocks xmlns:a="http://schemas.openxmlformats.org/drawingml/2006/main" noGrp="1"/>
-          </p:cNvSpPr>
-          <p:nvPr/>
-        </p:nvSpPr>
-        <p:spPr>
-          <a:xfrm xmlns:a="http://schemas.openxmlformats.org/drawingml/2006/main">
-            <a:off x="2667000" y="1790700"/>
-            <a:ext cx="889000" cy="323850"/>
-          </a:xfrm>
-          <a:prstGeom xmlns:a="http://schemas.openxmlformats.org/drawingml/2006/main" prst="rect">
-            <a:avLst/>
-          </a:prstGeom>
-          <a:noFill xmlns:a="http://schemas.openxmlformats.org/drawingml/2006/main"/>
-          <a:ln xmlns:a="http://schemas.openxmlformats.org/drawingml/2006/main" w="0">
-            <a:noFill/>
-          </a:ln>
-        </p:spPr>
-        <p:txBody>
-          <a:bodyPr xmlns:a="http://schemas.openxmlformats.org/drawingml/2006/main" lIns="0" tIns="0" rIns="0" bIns="0" anchor="ctr"/>
-          <a:lstStyle xmlns:a="http://schemas.openxmlformats.org/drawingml/2006/main"/>
-          <a:p xmlns:a="http://schemas.openxmlformats.org/drawingml/2006/main">
-            <a:pPr algn="ctr">
-              <a:lnSpc>
-                <a:spcPct val="118000"/>
-              </a:lnSpc>
-              <a:buNone/>
-              <a:defRPr sz="2400" b="0">
-                <a:solidFill>
-                  <a:srgbClr val="1F4D78"/>
-                </a:solidFill>
-                <a:latin typeface="微软雅黑"/>
-                <a:ea typeface="微软雅黑"/>
-                <a:cs typeface="微软雅黑"/>
-              </a:defRPr>
-            </a:pPr>
-            <a:r>
-              <a:rPr sz="2400" b="0">
-                <a:solidFill>
-                  <a:srgbClr val="1F4D78"/>
-                </a:solidFill>
-                <a:latin typeface="微软雅黑"/>
-                <a:ea typeface="微软雅黑"/>
-                <a:cs typeface="微软雅黑"/>
-              </a:rPr>
-              <a:t>→</a:t>
-            </a:r>
-          </a:p>
-        </p:txBody>
-      </p:sp>
-      <p:sp>
-        <p:nvSpPr>
-          <p:cNvPr id="13" name="chain-sub-0">
-            <a:extLst xmlns:a="http://schemas.openxmlformats.org/drawingml/2006/main">
-              <a:ext uri="{FF2B5EF4-FFF2-40B4-BE49-F238E27FC236}">
-                <a16:creationId xmlns:a16="http://schemas.microsoft.com/office/drawing/2014/main" id="{F4AEF127-FBD7-4A13-A26F-71E36615DB49}"/>
-              </a:ext>
-            </a:extLst>
-          </p:cNvPr>
-          <p:cNvSpPr>
-            <a:spLocks xmlns:a="http://schemas.openxmlformats.org/drawingml/2006/main" noGrp="1"/>
-          </p:cNvSpPr>
-          <p:nvPr/>
-        </p:nvSpPr>
-        <p:spPr>
-          <a:xfrm xmlns:a="http://schemas.openxmlformats.org/drawingml/2006/main">
-            <a:off x="666750" y="2495550"/>
-            <a:ext cx="2000250" cy="571500"/>
-          </a:xfrm>
-          <a:prstGeom xmlns:a="http://schemas.openxmlformats.org/drawingml/2006/main" prst="rect">
-            <a:avLst/>
-          </a:prstGeom>
-          <a:noFill xmlns:a="http://schemas.openxmlformats.org/drawingml/2006/main"/>
-          <a:ln xmlns:a="http://schemas.openxmlformats.org/drawingml/2006/main" w="0">
-            <a:noFill/>
-          </a:ln>
-        </p:spPr>
-        <p:txBody>
-          <a:bodyPr xmlns:a="http://schemas.openxmlformats.org/drawingml/2006/main" lIns="0" tIns="0" rIns="0" bIns="0" anchor="t"/>
-          <a:lstStyle xmlns:a="http://schemas.openxmlformats.org/drawingml/2006/main"/>
-          <a:p xmlns:a="http://schemas.openxmlformats.org/drawingml/2006/main">
-            <a:pPr algn="ctr">
-              <a:lnSpc>
-                <a:spcPct val="118000"/>
-              </a:lnSpc>
-              <a:buNone/>
-              <a:defRPr sz="2000" b="0">
-                <a:solidFill>
-                  <a:srgbClr val="66727D"/>
-                </a:solidFill>
-                <a:latin typeface="微软雅黑"/>
-                <a:ea typeface="微软雅黑"/>
-                <a:cs typeface="微软雅黑"/>
-              </a:defRPr>
-            </a:pPr>
-            <a:r>
-              <a:rPr sz="2000" b="0">
-                <a:solidFill>
-                  <a:srgbClr val="66727D"/>
-                </a:solidFill>
-                <a:latin typeface="微软雅黑"/>
-                <a:ea typeface="微软雅黑"/>
-                <a:cs typeface="微软雅黑"/>
-              </a:rPr>
-              <a:t>输入输出与边界</a:t>
-            </a:r>
-          </a:p>
-        </p:txBody>
-      </p:sp>
-      <p:sp>
-        <p:nvSpPr>
-          <p:cNvPr id="14" name="chain-line-1">
-            <a:extLst xmlns:a="http://schemas.openxmlformats.org/drawingml/2006/main">
-              <a:ext uri="{FF2B5EF4-FFF2-40B4-BE49-F238E27FC236}">
-                <a16:creationId xmlns:a16="http://schemas.microsoft.com/office/drawing/2014/main" id="{245325A5-D821-4AC6-B21C-083FD21586FF}"/>
-              </a:ext>
-            </a:extLst>
-          </p:cNvPr>
-          <p:cNvSpPr>
-            <a:spLocks xmlns:a="http://schemas.openxmlformats.org/drawingml/2006/main" noGrp="1"/>
-          </p:cNvSpPr>
-          <p:nvPr/>
-        </p:nvSpPr>
-        <p:spPr>
-          <a:xfrm xmlns:a="http://schemas.openxmlformats.org/drawingml/2006/main">
-            <a:off x="3556000" y="2343150"/>
-            <a:ext cx="2000250" cy="14288"/>
-          </a:xfrm>
-          <a:prstGeom xmlns:a="http://schemas.openxmlformats.org/drawingml/2006/main" prst="rect">
-            <a:avLst/>
-          </a:prstGeom>
-          <a:solidFill xmlns:a="http://schemas.openxmlformats.org/drawingml/2006/main">
-            <a:srgbClr val="1F4D78"/>
-          </a:solidFill>
-          <a:ln xmlns:a="http://schemas.openxmlformats.org/drawingml/2006/main" w="0">
-            <a:noFill/>
-          </a:ln>
-        </p:spPr>
-      </p:sp>
-      <p:sp>
-        <p:nvSpPr>
-          <p:cNvPr id="15" name="chain-1">
-            <a:extLst xmlns:a="http://schemas.openxmlformats.org/drawingml/2006/main">
-              <a:ext uri="{FF2B5EF4-FFF2-40B4-BE49-F238E27FC236}">
-                <a16:creationId xmlns:a16="http://schemas.microsoft.com/office/drawing/2014/main" id="{F87B7F69-FC28-4BB1-AB0F-68639D757D06}"/>
-              </a:ext>
-            </a:extLst>
-          </p:cNvPr>
-          <p:cNvSpPr>
-            <a:spLocks xmlns:a="http://schemas.openxmlformats.org/drawingml/2006/main" noGrp="1"/>
-          </p:cNvSpPr>
-          <p:nvPr/>
-        </p:nvSpPr>
-        <p:spPr>
-          <a:xfrm xmlns:a="http://schemas.openxmlformats.org/drawingml/2006/main">
-            <a:off x="3556000" y="1619250"/>
-            <a:ext cx="2000250" cy="666750"/>
-          </a:xfrm>
-          <a:prstGeom xmlns:a="http://schemas.openxmlformats.org/drawingml/2006/main" prst="rect">
-            <a:avLst/>
-          </a:prstGeom>
-          <a:noFill xmlns:a="http://schemas.openxmlformats.org/drawingml/2006/main"/>
-          <a:ln xmlns:a="http://schemas.openxmlformats.org/drawingml/2006/main" w="0">
-            <a:noFill/>
-          </a:ln>
-        </p:spPr>
-        <p:txBody>
-          <a:bodyPr xmlns:a="http://schemas.openxmlformats.org/drawingml/2006/main" lIns="0" tIns="0" rIns="0" bIns="0" anchor="ctr"/>
-          <a:lstStyle xmlns:a="http://schemas.openxmlformats.org/drawingml/2006/main"/>
-          <a:p xmlns:a="http://schemas.openxmlformats.org/drawingml/2006/main">
-            <a:pPr algn="ctr">
-              <a:lnSpc>
-                <a:spcPct val="118000"/>
-              </a:lnSpc>
-              <a:buNone/>
-              <a:defRPr sz="2200" b="0">
-                <a:solidFill>
-                  <a:srgbClr val="1F4D78"/>
-                </a:solidFill>
-                <a:latin typeface="微软雅黑"/>
-                <a:ea typeface="微软雅黑"/>
-                <a:cs typeface="微软雅黑"/>
-              </a:defRPr>
-            </a:pPr>
-            <a:r>
-              <a:rPr sz="2200" b="0">
-                <a:solidFill>
-                  <a:srgbClr val="1F4D78"/>
-                </a:solidFill>
-                <a:latin typeface="微软雅黑"/>
-                <a:ea typeface="微软雅黑"/>
-                <a:cs typeface="微软雅黑"/>
-              </a:rPr>
-              <a:t>Context / 状态</a:t>
-            </a:r>
-          </a:p>
-        </p:txBody>
-      </p:sp>
-      <p:sp>
-        <p:nvSpPr>
-          <p:cNvPr id="16" name="chain-arrow-1">
-            <a:extLst xmlns:a="http://schemas.openxmlformats.org/drawingml/2006/main">
-              <a:ext uri="{FF2B5EF4-FFF2-40B4-BE49-F238E27FC236}">
-                <a16:creationId xmlns:a16="http://schemas.microsoft.com/office/drawing/2014/main" id="{670A1C3B-6B8E-444E-9205-976B3167D4CE}"/>
-              </a:ext>
-            </a:extLst>
-          </p:cNvPr>
-          <p:cNvSpPr>
-            <a:spLocks xmlns:a="http://schemas.openxmlformats.org/drawingml/2006/main" noGrp="1"/>
-          </p:cNvSpPr>
-          <p:nvPr/>
-        </p:nvSpPr>
-        <p:spPr>
-          <a:xfrm xmlns:a="http://schemas.openxmlformats.org/drawingml/2006/main">
-            <a:off x="5556250" y="1790700"/>
-            <a:ext cx="889000" cy="323850"/>
-          </a:xfrm>
-          <a:prstGeom xmlns:a="http://schemas.openxmlformats.org/drawingml/2006/main" prst="rect">
-            <a:avLst/>
-          </a:prstGeom>
-          <a:noFill xmlns:a="http://schemas.openxmlformats.org/drawingml/2006/main"/>
-          <a:ln xmlns:a="http://schemas.openxmlformats.org/drawingml/2006/main" w="0">
-            <a:noFill/>
-          </a:ln>
-        </p:spPr>
-        <p:txBody>
-          <a:bodyPr xmlns:a="http://schemas.openxmlformats.org/drawingml/2006/main" lIns="0" tIns="0" rIns="0" bIns="0" anchor="ctr"/>
-          <a:lstStyle xmlns:a="http://schemas.openxmlformats.org/drawingml/2006/main"/>
-          <a:p xmlns:a="http://schemas.openxmlformats.org/drawingml/2006/main">
-            <a:pPr algn="ctr">
-              <a:lnSpc>
-                <a:spcPct val="118000"/>
-              </a:lnSpc>
-              <a:buNone/>
-              <a:defRPr sz="2400" b="0">
-                <a:solidFill>
-                  <a:srgbClr val="1F4D78"/>
-                </a:solidFill>
-                <a:latin typeface="微软雅黑"/>
-                <a:ea typeface="微软雅黑"/>
-                <a:cs typeface="微软雅黑"/>
-              </a:defRPr>
-            </a:pPr>
-            <a:r>
-              <a:rPr sz="2400" b="0">
-                <a:solidFill>
-                  <a:srgbClr val="1F4D78"/>
-                </a:solidFill>
-                <a:latin typeface="微软雅黑"/>
-                <a:ea typeface="微软雅黑"/>
-                <a:cs typeface="微软雅黑"/>
-              </a:rPr>
-              <a:t>→</a:t>
-            </a:r>
-          </a:p>
-        </p:txBody>
-      </p:sp>
-      <p:sp>
-        <p:nvSpPr>
-          <p:cNvPr id="17" name="chain-sub-1">
-            <a:extLst xmlns:a="http://schemas.openxmlformats.org/drawingml/2006/main">
-              <a:ext uri="{FF2B5EF4-FFF2-40B4-BE49-F238E27FC236}">
-                <a16:creationId xmlns:a16="http://schemas.microsoft.com/office/drawing/2014/main" id="{A907D2ED-BAB6-4F9D-B894-8DCE36284545}"/>
-              </a:ext>
-            </a:extLst>
-          </p:cNvPr>
-          <p:cNvSpPr>
-            <a:spLocks xmlns:a="http://schemas.openxmlformats.org/drawingml/2006/main" noGrp="1"/>
-          </p:cNvSpPr>
-          <p:nvPr/>
-        </p:nvSpPr>
-        <p:spPr>
-          <a:xfrm xmlns:a="http://schemas.openxmlformats.org/drawingml/2006/main">
-            <a:off x="3556000" y="2495550"/>
-            <a:ext cx="2000250" cy="571500"/>
-          </a:xfrm>
-          <a:prstGeom xmlns:a="http://schemas.openxmlformats.org/drawingml/2006/main" prst="rect">
-            <a:avLst/>
-          </a:prstGeom>
-          <a:noFill xmlns:a="http://schemas.openxmlformats.org/drawingml/2006/main"/>
-          <a:ln xmlns:a="http://schemas.openxmlformats.org/drawingml/2006/main" w="0">
-            <a:noFill/>
-          </a:ln>
-        </p:spPr>
-        <p:txBody>
-          <a:bodyPr xmlns:a="http://schemas.openxmlformats.org/drawingml/2006/main" lIns="0" tIns="0" rIns="0" bIns="0" anchor="t"/>
-          <a:lstStyle xmlns:a="http://schemas.openxmlformats.org/drawingml/2006/main"/>
-          <a:p xmlns:a="http://schemas.openxmlformats.org/drawingml/2006/main">
-            <a:pPr algn="ctr">
-              <a:lnSpc>
-                <a:spcPct val="118000"/>
-              </a:lnSpc>
-              <a:buNone/>
-              <a:defRPr sz="2000" b="0">
-                <a:solidFill>
-                  <a:srgbClr val="66727D"/>
-                </a:solidFill>
-                <a:latin typeface="微软雅黑"/>
-                <a:ea typeface="微软雅黑"/>
-                <a:cs typeface="微软雅黑"/>
-              </a:defRPr>
-            </a:pPr>
-            <a:r>
-              <a:rPr sz="2000" b="0">
-                <a:solidFill>
-                  <a:srgbClr val="66727D"/>
-                </a:solidFill>
-                <a:latin typeface="微软雅黑"/>
-                <a:ea typeface="微软雅黑"/>
-                <a:cs typeface="微软雅黑"/>
-              </a:rPr>
-              <a:t>可审计工件</a:t>
-            </a:r>
-          </a:p>
-        </p:txBody>
-      </p:sp>
-      <p:sp>
-        <p:nvSpPr>
-          <p:cNvPr id="18" name="chain-line-2">
-            <a:extLst xmlns:a="http://schemas.openxmlformats.org/drawingml/2006/main">
-              <a:ext uri="{FF2B5EF4-FFF2-40B4-BE49-F238E27FC236}">
-                <a16:creationId xmlns:a16="http://schemas.microsoft.com/office/drawing/2014/main" id="{B986281B-3FEA-4BDF-BBAF-975796523E3F}"/>
-              </a:ext>
-            </a:extLst>
-          </p:cNvPr>
-          <p:cNvSpPr>
-            <a:spLocks xmlns:a="http://schemas.openxmlformats.org/drawingml/2006/main" noGrp="1"/>
-          </p:cNvSpPr>
-          <p:nvPr/>
-        </p:nvSpPr>
-        <p:spPr>
-          <a:xfrm xmlns:a="http://schemas.openxmlformats.org/drawingml/2006/main">
-            <a:off x="6445250" y="2343150"/>
-            <a:ext cx="2000250" cy="14288"/>
-          </a:xfrm>
-          <a:prstGeom xmlns:a="http://schemas.openxmlformats.org/drawingml/2006/main" prst="rect">
-            <a:avLst/>
-          </a:prstGeom>
-          <a:solidFill xmlns:a="http://schemas.openxmlformats.org/drawingml/2006/main">
-            <a:srgbClr val="1F4D78"/>
-          </a:solidFill>
-          <a:ln xmlns:a="http://schemas.openxmlformats.org/drawingml/2006/main" w="0">
-            <a:noFill/>
-          </a:ln>
-        </p:spPr>
-      </p:sp>
-      <p:sp>
-        <p:nvSpPr>
-          <p:cNvPr id="19" name="chain-2">
-            <a:extLst xmlns:a="http://schemas.openxmlformats.org/drawingml/2006/main">
-              <a:ext uri="{FF2B5EF4-FFF2-40B4-BE49-F238E27FC236}">
-                <a16:creationId xmlns:a16="http://schemas.microsoft.com/office/drawing/2014/main" id="{33C569A4-8A4D-4CAF-AAE7-F910241DF2F1}"/>
-              </a:ext>
-            </a:extLst>
-          </p:cNvPr>
-          <p:cNvSpPr>
-            <a:spLocks xmlns:a="http://schemas.openxmlformats.org/drawingml/2006/main" noGrp="1"/>
-          </p:cNvSpPr>
-          <p:nvPr/>
-        </p:nvSpPr>
-        <p:spPr>
-          <a:xfrm xmlns:a="http://schemas.openxmlformats.org/drawingml/2006/main">
-            <a:off x="6445250" y="1619250"/>
-            <a:ext cx="2000250" cy="666750"/>
-          </a:xfrm>
-          <a:prstGeom xmlns:a="http://schemas.openxmlformats.org/drawingml/2006/main" prst="rect">
-            <a:avLst/>
-          </a:prstGeom>
-          <a:noFill xmlns:a="http://schemas.openxmlformats.org/drawingml/2006/main"/>
-          <a:ln xmlns:a="http://schemas.openxmlformats.org/drawingml/2006/main" w="0">
-            <a:noFill/>
-          </a:ln>
-        </p:spPr>
-        <p:txBody>
-          <a:bodyPr xmlns:a="http://schemas.openxmlformats.org/drawingml/2006/main" lIns="0" tIns="0" rIns="0" bIns="0" anchor="ctr"/>
-          <a:lstStyle xmlns:a="http://schemas.openxmlformats.org/drawingml/2006/main"/>
-          <a:p xmlns:a="http://schemas.openxmlformats.org/drawingml/2006/main">
-            <a:pPr algn="ctr">
-              <a:lnSpc>
-                <a:spcPct val="118000"/>
-              </a:lnSpc>
-              <a:buNone/>
-              <a:defRPr sz="2200" b="0">
-                <a:solidFill>
-                  <a:srgbClr val="1F4D78"/>
-                </a:solidFill>
-                <a:latin typeface="微软雅黑"/>
-                <a:ea typeface="微软雅黑"/>
-                <a:cs typeface="微软雅黑"/>
-              </a:defRPr>
-            </a:pPr>
-            <a:r>
-              <a:rPr sz="2200" b="0">
-                <a:solidFill>
-                  <a:srgbClr val="1F4D78"/>
-                </a:solidFill>
-                <a:latin typeface="微软雅黑"/>
-                <a:ea typeface="微软雅黑"/>
-                <a:cs typeface="微软雅黑"/>
-              </a:rPr>
-              <a:t>工具权限</a:t>
-            </a:r>
-          </a:p>
-        </p:txBody>
-      </p:sp>
-      <p:sp>
-        <p:nvSpPr>
-          <p:cNvPr id="20" name="chain-arrow-2">
-            <a:extLst xmlns:a="http://schemas.openxmlformats.org/drawingml/2006/main">
-              <a:ext uri="{FF2B5EF4-FFF2-40B4-BE49-F238E27FC236}">
-                <a16:creationId xmlns:a16="http://schemas.microsoft.com/office/drawing/2014/main" id="{F81D905A-12B9-417C-BD9C-B215341C0154}"/>
-              </a:ext>
-            </a:extLst>
-          </p:cNvPr>
-          <p:cNvSpPr>
-            <a:spLocks xmlns:a="http://schemas.openxmlformats.org/drawingml/2006/main" noGrp="1"/>
-          </p:cNvSpPr>
-          <p:nvPr/>
-        </p:nvSpPr>
-        <p:spPr>
-          <a:xfrm xmlns:a="http://schemas.openxmlformats.org/drawingml/2006/main">
-            <a:off x="8445500" y="1790700"/>
-            <a:ext cx="889000" cy="323850"/>
-          </a:xfrm>
-          <a:prstGeom xmlns:a="http://schemas.openxmlformats.org/drawingml/2006/main" prst="rect">
-            <a:avLst/>
-          </a:prstGeom>
-          <a:noFill xmlns:a="http://schemas.openxmlformats.org/drawingml/2006/main"/>
-          <a:ln xmlns:a="http://schemas.openxmlformats.org/drawingml/2006/main" w="0">
-            <a:noFill/>
-          </a:ln>
-        </p:spPr>
-        <p:txBody>
-          <a:bodyPr xmlns:a="http://schemas.openxmlformats.org/drawingml/2006/main" lIns="0" tIns="0" rIns="0" bIns="0" anchor="ctr"/>
-          <a:lstStyle xmlns:a="http://schemas.openxmlformats.org/drawingml/2006/main"/>
-          <a:p xmlns:a="http://schemas.openxmlformats.org/drawingml/2006/main">
-            <a:pPr algn="ctr">
-              <a:lnSpc>
-                <a:spcPct val="118000"/>
-              </a:lnSpc>
-              <a:buNone/>
-              <a:defRPr sz="2400" b="0">
-                <a:solidFill>
-                  <a:srgbClr val="1F4D78"/>
-                </a:solidFill>
-                <a:latin typeface="微软雅黑"/>
-                <a:ea typeface="微软雅黑"/>
-                <a:cs typeface="微软雅黑"/>
-              </a:defRPr>
-            </a:pPr>
-            <a:r>
-              <a:rPr sz="2400" b="0">
-                <a:solidFill>
-                  <a:srgbClr val="1F4D78"/>
-                </a:solidFill>
-                <a:latin typeface="微软雅黑"/>
-                <a:ea typeface="微软雅黑"/>
-                <a:cs typeface="微软雅黑"/>
-              </a:rPr>
-              <a:t>→</a:t>
-            </a:r>
-          </a:p>
-        </p:txBody>
-      </p:sp>
-      <p:sp>
-        <p:nvSpPr>
-          <p:cNvPr id="21" name="chain-sub-2">
-            <a:extLst xmlns:a="http://schemas.openxmlformats.org/drawingml/2006/main">
-              <a:ext uri="{FF2B5EF4-FFF2-40B4-BE49-F238E27FC236}">
-                <a16:creationId xmlns:a16="http://schemas.microsoft.com/office/drawing/2014/main" id="{88FADD33-7548-4D33-81D1-4A2C4050AE13}"/>
-              </a:ext>
-            </a:extLst>
-          </p:cNvPr>
-          <p:cNvSpPr>
-            <a:spLocks xmlns:a="http://schemas.openxmlformats.org/drawingml/2006/main" noGrp="1"/>
-          </p:cNvSpPr>
-          <p:nvPr/>
-        </p:nvSpPr>
-        <p:spPr>
-          <a:xfrm xmlns:a="http://schemas.openxmlformats.org/drawingml/2006/main">
-            <a:off x="6445250" y="2495550"/>
-            <a:ext cx="2000250" cy="571500"/>
-          </a:xfrm>
-          <a:prstGeom xmlns:a="http://schemas.openxmlformats.org/drawingml/2006/main" prst="rect">
-            <a:avLst/>
-          </a:prstGeom>
-          <a:noFill xmlns:a="http://schemas.openxmlformats.org/drawingml/2006/main"/>
-          <a:ln xmlns:a="http://schemas.openxmlformats.org/drawingml/2006/main" w="0">
-            <a:noFill/>
-          </a:ln>
-        </p:spPr>
-        <p:txBody>
-          <a:bodyPr xmlns:a="http://schemas.openxmlformats.org/drawingml/2006/main" lIns="0" tIns="0" rIns="0" bIns="0" anchor="t"/>
-          <a:lstStyle xmlns:a="http://schemas.openxmlformats.org/drawingml/2006/main"/>
-          <a:p xmlns:a="http://schemas.openxmlformats.org/drawingml/2006/main">
-            <a:pPr algn="ctr">
-              <a:lnSpc>
-                <a:spcPct val="118000"/>
-              </a:lnSpc>
-              <a:buNone/>
-              <a:defRPr sz="2000" b="0">
-                <a:solidFill>
-                  <a:srgbClr val="66727D"/>
-                </a:solidFill>
-                <a:latin typeface="微软雅黑"/>
-                <a:ea typeface="微软雅黑"/>
-                <a:cs typeface="微软雅黑"/>
-              </a:defRPr>
-            </a:pPr>
-            <a:r>
-              <a:rPr sz="2000" b="0">
-                <a:solidFill>
-                  <a:srgbClr val="66727D"/>
-                </a:solidFill>
-                <a:latin typeface="微软雅黑"/>
-                <a:ea typeface="微软雅黑"/>
-                <a:cs typeface="微软雅黑"/>
-              </a:rPr>
-              <a:t>五档与确认点</a:t>
-            </a:r>
-          </a:p>
-        </p:txBody>
-      </p:sp>
-      <p:sp>
-        <p:nvSpPr>
-          <p:cNvPr id="22" name="chain-line-3">
-            <a:extLst xmlns:a="http://schemas.openxmlformats.org/drawingml/2006/main">
-              <a:ext uri="{FF2B5EF4-FFF2-40B4-BE49-F238E27FC236}">
-                <a16:creationId xmlns:a16="http://schemas.microsoft.com/office/drawing/2014/main" id="{96CF3FB4-1735-40D8-BF46-6CBD06C7A42F}"/>
-              </a:ext>
-            </a:extLst>
-          </p:cNvPr>
-          <p:cNvSpPr>
-            <a:spLocks xmlns:a="http://schemas.openxmlformats.org/drawingml/2006/main" noGrp="1"/>
-          </p:cNvSpPr>
-          <p:nvPr/>
-        </p:nvSpPr>
-        <p:spPr>
-          <a:xfrm xmlns:a="http://schemas.openxmlformats.org/drawingml/2006/main">
-            <a:off x="9334500" y="2343150"/>
-            <a:ext cx="2000250" cy="14288"/>
-          </a:xfrm>
-          <a:prstGeom xmlns:a="http://schemas.openxmlformats.org/drawingml/2006/main" prst="rect">
-            <a:avLst/>
-          </a:prstGeom>
-          <a:solidFill xmlns:a="http://schemas.openxmlformats.org/drawingml/2006/main">
-            <a:srgbClr val="1F4D78"/>
-          </a:solidFill>
-          <a:ln xmlns:a="http://schemas.openxmlformats.org/drawingml/2006/main" w="0">
-            <a:noFill/>
-          </a:ln>
-        </p:spPr>
-      </p:sp>
-      <p:sp>
-        <p:nvSpPr>
-          <p:cNvPr id="23" name="chain-3">
-            <a:extLst xmlns:a="http://schemas.openxmlformats.org/drawingml/2006/main">
-              <a:ext uri="{FF2B5EF4-FFF2-40B4-BE49-F238E27FC236}">
-                <a16:creationId xmlns:a16="http://schemas.microsoft.com/office/drawing/2014/main" id="{E7EE6A5F-E82C-4F8F-B501-43B77A32F588}"/>
-              </a:ext>
-            </a:extLst>
-          </p:cNvPr>
-          <p:cNvSpPr>
-            <a:spLocks xmlns:a="http://schemas.openxmlformats.org/drawingml/2006/main" noGrp="1"/>
-          </p:cNvSpPr>
-          <p:nvPr/>
-        </p:nvSpPr>
-        <p:spPr>
-          <a:xfrm xmlns:a="http://schemas.openxmlformats.org/drawingml/2006/main">
-            <a:off x="9334500" y="1619250"/>
-            <a:ext cx="2000250" cy="666750"/>
-          </a:xfrm>
-          <a:prstGeom xmlns:a="http://schemas.openxmlformats.org/drawingml/2006/main" prst="rect">
-            <a:avLst/>
-          </a:prstGeom>
-          <a:noFill xmlns:a="http://schemas.openxmlformats.org/drawingml/2006/main"/>
-          <a:ln xmlns:a="http://schemas.openxmlformats.org/drawingml/2006/main" w="0">
-            <a:noFill/>
-          </a:ln>
-        </p:spPr>
-        <p:txBody>
-          <a:bodyPr xmlns:a="http://schemas.openxmlformats.org/drawingml/2006/main" lIns="0" tIns="0" rIns="0" bIns="0" anchor="ctr"/>
-          <a:lstStyle xmlns:a="http://schemas.openxmlformats.org/drawingml/2006/main"/>
-          <a:p xmlns:a="http://schemas.openxmlformats.org/drawingml/2006/main">
-            <a:pPr algn="ctr">
-              <a:lnSpc>
-                <a:spcPct val="118000"/>
-              </a:lnSpc>
-              <a:buNone/>
-              <a:defRPr sz="2200" b="0">
-                <a:solidFill>
-                  <a:srgbClr val="1F4D78"/>
-                </a:solidFill>
-                <a:latin typeface="微软雅黑"/>
-                <a:ea typeface="微软雅黑"/>
-                <a:cs typeface="微软雅黑"/>
-              </a:defRPr>
-            </a:pPr>
-            <a:r>
-              <a:rPr sz="2200" b="0">
-                <a:solidFill>
-                  <a:srgbClr val="1F4D78"/>
-                </a:solidFill>
-                <a:latin typeface="微软雅黑"/>
-                <a:ea typeface="微软雅黑"/>
-                <a:cs typeface="微软雅黑"/>
-              </a:rPr>
-              <a:t>执行循环</a:t>
-            </a:r>
-          </a:p>
-        </p:txBody>
-      </p:sp>
-      <p:sp>
-        <p:nvSpPr>
-          <p:cNvPr id="24" name="chain-sub-3">
-            <a:extLst xmlns:a="http://schemas.openxmlformats.org/drawingml/2006/main">
-              <a:ext uri="{FF2B5EF4-FFF2-40B4-BE49-F238E27FC236}">
-                <a16:creationId xmlns:a16="http://schemas.microsoft.com/office/drawing/2014/main" id="{03DB9384-8D8A-4097-8F8F-0A54BD271D9A}"/>
-              </a:ext>
-            </a:extLst>
-          </p:cNvPr>
-          <p:cNvSpPr>
-            <a:spLocks xmlns:a="http://schemas.openxmlformats.org/drawingml/2006/main" noGrp="1"/>
-          </p:cNvSpPr>
-          <p:nvPr/>
-        </p:nvSpPr>
-        <p:spPr>
-          <a:xfrm xmlns:a="http://schemas.openxmlformats.org/drawingml/2006/main">
-            <a:off x="9334500" y="2495550"/>
-            <a:ext cx="2000250" cy="571500"/>
-          </a:xfrm>
-          <a:prstGeom xmlns:a="http://schemas.openxmlformats.org/drawingml/2006/main" prst="rect">
-            <a:avLst/>
-          </a:prstGeom>
-          <a:noFill xmlns:a="http://schemas.openxmlformats.org/drawingml/2006/main"/>
-          <a:ln xmlns:a="http://schemas.openxmlformats.org/drawingml/2006/main" w="0">
-            <a:noFill/>
-          </a:ln>
-        </p:spPr>
-        <p:txBody>
-          <a:bodyPr xmlns:a="http://schemas.openxmlformats.org/drawingml/2006/main" lIns="0" tIns="0" rIns="0" bIns="0" anchor="t"/>
-          <a:lstStyle xmlns:a="http://schemas.openxmlformats.org/drawingml/2006/main"/>
-          <a:p xmlns:a="http://schemas.openxmlformats.org/drawingml/2006/main">
-            <a:pPr algn="ctr">
-              <a:lnSpc>
-                <a:spcPct val="118000"/>
-              </a:lnSpc>
-              <a:buNone/>
-              <a:defRPr sz="2000" b="0">
-                <a:solidFill>
-                  <a:srgbClr val="66727D"/>
-                </a:solidFill>
-                <a:latin typeface="微软雅黑"/>
-                <a:ea typeface="微软雅黑"/>
-                <a:cs typeface="微软雅黑"/>
-              </a:defRPr>
-            </a:pPr>
-            <a:r>
-              <a:rPr sz="2000" b="0">
-                <a:solidFill>
-                  <a:srgbClr val="66727D"/>
-                </a:solidFill>
-                <a:latin typeface="微软雅黑"/>
-                <a:ea typeface="微软雅黑"/>
-                <a:cs typeface="微软雅黑"/>
-              </a:rPr>
-              <a:t>继承 L11 冻结循环</a:t>
-            </a:r>
-          </a:p>
-        </p:txBody>
-      </p:sp>
-      <p:sp>
-        <p:nvSpPr>
-          <p:cNvPr id="25" name="chain-line-0">
-            <a:extLst xmlns:a="http://schemas.openxmlformats.org/drawingml/2006/main">
-              <a:ext uri="{FF2B5EF4-FFF2-40B4-BE49-F238E27FC236}">
-                <a16:creationId xmlns:a16="http://schemas.microsoft.com/office/drawing/2014/main" id="{23717D3B-D3FF-4F01-9222-45B4C4E5A1B9}"/>
-              </a:ext>
-            </a:extLst>
-          </p:cNvPr>
-          <p:cNvSpPr>
-            <a:spLocks xmlns:a="http://schemas.openxmlformats.org/drawingml/2006/main" noGrp="1"/>
-          </p:cNvSpPr>
-          <p:nvPr/>
-        </p:nvSpPr>
-        <p:spPr>
-          <a:xfrm xmlns:a="http://schemas.openxmlformats.org/drawingml/2006/main">
-            <a:off x="666750" y="4438650"/>
-            <a:ext cx="2000250" cy="14288"/>
-          </a:xfrm>
-          <a:prstGeom xmlns:a="http://schemas.openxmlformats.org/drawingml/2006/main" prst="rect">
-            <a:avLst/>
-          </a:prstGeom>
-          <a:solidFill xmlns:a="http://schemas.openxmlformats.org/drawingml/2006/main">
-            <a:srgbClr val="1F4D78"/>
-          </a:solidFill>
-          <a:ln xmlns:a="http://schemas.openxmlformats.org/drawingml/2006/main" w="0">
-            <a:noFill/>
-          </a:ln>
-        </p:spPr>
-      </p:sp>
-      <p:sp>
-        <p:nvSpPr>
-          <p:cNvPr id="26" name="chain-0">
-            <a:extLst xmlns:a="http://schemas.openxmlformats.org/drawingml/2006/main">
-              <a:ext uri="{FF2B5EF4-FFF2-40B4-BE49-F238E27FC236}">
-                <a16:creationId xmlns:a16="http://schemas.microsoft.com/office/drawing/2014/main" id="{22D023A9-75DE-4DE3-BAF8-2C9757FF9EFD}"/>
-              </a:ext>
-            </a:extLst>
-          </p:cNvPr>
-          <p:cNvSpPr>
-            <a:spLocks xmlns:a="http://schemas.openxmlformats.org/drawingml/2006/main" noGrp="1"/>
-          </p:cNvSpPr>
-          <p:nvPr/>
-        </p:nvSpPr>
-        <p:spPr>
-          <a:xfrm xmlns:a="http://schemas.openxmlformats.org/drawingml/2006/main">
-            <a:off x="666750" y="3714750"/>
-            <a:ext cx="2000250" cy="666750"/>
-          </a:xfrm>
-          <a:prstGeom xmlns:a="http://schemas.openxmlformats.org/drawingml/2006/main" prst="rect">
-            <a:avLst/>
-          </a:prstGeom>
-          <a:noFill xmlns:a="http://schemas.openxmlformats.org/drawingml/2006/main"/>
-          <a:ln xmlns:a="http://schemas.openxmlformats.org/drawingml/2006/main" w="0">
-            <a:noFill/>
-          </a:ln>
-        </p:spPr>
-        <p:txBody>
-          <a:bodyPr xmlns:a="http://schemas.openxmlformats.org/drawingml/2006/main" lIns="0" tIns="0" rIns="0" bIns="0" anchor="ctr"/>
-          <a:lstStyle xmlns:a="http://schemas.openxmlformats.org/drawingml/2006/main"/>
-          <a:p xmlns:a="http://schemas.openxmlformats.org/drawingml/2006/main">
-            <a:pPr algn="ctr">
-              <a:lnSpc>
-                <a:spcPct val="118000"/>
-              </a:lnSpc>
-              <a:buNone/>
-              <a:defRPr sz="2200" b="0">
-                <a:solidFill>
-                  <a:srgbClr val="1F4D78"/>
-                </a:solidFill>
-                <a:latin typeface="微软雅黑"/>
-                <a:ea typeface="微软雅黑"/>
-                <a:cs typeface="微软雅黑"/>
-              </a:defRPr>
-            </a:pPr>
-            <a:r>
-              <a:rPr sz="2200" b="0">
-                <a:solidFill>
-                  <a:srgbClr val="1F4D78"/>
-                </a:solidFill>
-                <a:latin typeface="微软雅黑"/>
-                <a:ea typeface="微软雅黑"/>
-                <a:cs typeface="微软雅黑"/>
-              </a:rPr>
-              <a:t>工件追踪</a:t>
-            </a:r>
-          </a:p>
-        </p:txBody>
-      </p:sp>
-      <p:sp>
-        <p:nvSpPr>
-          <p:cNvPr id="27" name="chain-arrow-0">
-            <a:extLst xmlns:a="http://schemas.openxmlformats.org/drawingml/2006/main">
-              <a:ext uri="{FF2B5EF4-FFF2-40B4-BE49-F238E27FC236}">
-                <a16:creationId xmlns:a16="http://schemas.microsoft.com/office/drawing/2014/main" id="{F8B7E982-0377-45C6-901A-73072E5E90B4}"/>
-              </a:ext>
-            </a:extLst>
-          </p:cNvPr>
-          <p:cNvSpPr>
-            <a:spLocks xmlns:a="http://schemas.openxmlformats.org/drawingml/2006/main" noGrp="1"/>
-          </p:cNvSpPr>
-          <p:nvPr/>
-        </p:nvSpPr>
-        <p:spPr>
-          <a:xfrm xmlns:a="http://schemas.openxmlformats.org/drawingml/2006/main">
-            <a:off x="2667000" y="3886200"/>
-            <a:ext cx="889000" cy="323850"/>
-          </a:xfrm>
-          <a:prstGeom xmlns:a="http://schemas.openxmlformats.org/drawingml/2006/main" prst="rect">
-            <a:avLst/>
-          </a:prstGeom>
-          <a:noFill xmlns:a="http://schemas.openxmlformats.org/drawingml/2006/main"/>
-          <a:ln xmlns:a="http://schemas.openxmlformats.org/drawingml/2006/main" w="0">
-            <a:noFill/>
-          </a:ln>
-        </p:spPr>
-        <p:txBody>
-          <a:bodyPr xmlns:a="http://schemas.openxmlformats.org/drawingml/2006/main" lIns="0" tIns="0" rIns="0" bIns="0" anchor="ctr"/>
-          <a:lstStyle xmlns:a="http://schemas.openxmlformats.org/drawingml/2006/main"/>
-          <a:p xmlns:a="http://schemas.openxmlformats.org/drawingml/2006/main">
-            <a:pPr algn="ctr">
-              <a:lnSpc>
-                <a:spcPct val="118000"/>
-              </a:lnSpc>
-              <a:buNone/>
-              <a:defRPr sz="2400" b="0">
-                <a:solidFill>
-                  <a:srgbClr val="1F4D78"/>
-                </a:solidFill>
-                <a:latin typeface="微软雅黑"/>
-                <a:ea typeface="微软雅黑"/>
-                <a:cs typeface="微软雅黑"/>
-              </a:defRPr>
-            </a:pPr>
-            <a:r>
-              <a:rPr sz="2400" b="0">
-                <a:solidFill>
-                  <a:srgbClr val="1F4D78"/>
-                </a:solidFill>
-                <a:latin typeface="微软雅黑"/>
-                <a:ea typeface="微软雅黑"/>
-                <a:cs typeface="微软雅黑"/>
-              </a:rPr>
-              <a:t>→</a:t>
-            </a:r>
-          </a:p>
-        </p:txBody>
-      </p:sp>
-      <p:sp>
-        <p:nvSpPr>
-          <p:cNvPr id="28" name="chain-sub-0">
-            <a:extLst xmlns:a="http://schemas.openxmlformats.org/drawingml/2006/main">
-              <a:ext uri="{FF2B5EF4-FFF2-40B4-BE49-F238E27FC236}">
-                <a16:creationId xmlns:a16="http://schemas.microsoft.com/office/drawing/2014/main" id="{4A32309A-916A-485A-BAD6-07488E3B9E2D}"/>
-              </a:ext>
-            </a:extLst>
-          </p:cNvPr>
-          <p:cNvSpPr>
-            <a:spLocks xmlns:a="http://schemas.openxmlformats.org/drawingml/2006/main" noGrp="1"/>
-          </p:cNvSpPr>
-          <p:nvPr/>
-        </p:nvSpPr>
-        <p:spPr>
-          <a:xfrm xmlns:a="http://schemas.openxmlformats.org/drawingml/2006/main">
-            <a:off x="666750" y="4591050"/>
-            <a:ext cx="2000250" cy="571500"/>
-          </a:xfrm>
-          <a:prstGeom xmlns:a="http://schemas.openxmlformats.org/drawingml/2006/main" prst="rect">
-            <a:avLst/>
-          </a:prstGeom>
-          <a:noFill xmlns:a="http://schemas.openxmlformats.org/drawingml/2006/main"/>
-          <a:ln xmlns:a="http://schemas.openxmlformats.org/drawingml/2006/main" w="0">
-            <a:noFill/>
-          </a:ln>
-        </p:spPr>
-        <p:txBody>
-          <a:bodyPr xmlns:a="http://schemas.openxmlformats.org/drawingml/2006/main" lIns="0" tIns="0" rIns="0" bIns="0" anchor="t"/>
-          <a:lstStyle xmlns:a="http://schemas.openxmlformats.org/drawingml/2006/main"/>
-          <a:p xmlns:a="http://schemas.openxmlformats.org/drawingml/2006/main">
-            <a:pPr algn="ctr">
-              <a:lnSpc>
-                <a:spcPct val="118000"/>
-              </a:lnSpc>
-              <a:buNone/>
-              <a:defRPr sz="2000" b="0">
-                <a:solidFill>
-                  <a:srgbClr val="66727D"/>
-                </a:solidFill>
-                <a:latin typeface="微软雅黑"/>
-                <a:ea typeface="微软雅黑"/>
-                <a:cs typeface="微软雅黑"/>
-              </a:defRPr>
-            </a:pPr>
-            <a:r>
-              <a:rPr sz="2000" b="0">
-                <a:solidFill>
-                  <a:srgbClr val="66727D"/>
-                </a:solidFill>
-                <a:latin typeface="微软雅黑"/>
-                <a:ea typeface="微软雅黑"/>
-                <a:cs typeface="微软雅黑"/>
-              </a:rPr>
-              <a:t>run ID</a:t>
-            </a:r>
-          </a:p>
-        </p:txBody>
-      </p:sp>
-      <p:sp>
-        <p:nvSpPr>
-          <p:cNvPr id="29" name="chain-line-1">
-            <a:extLst xmlns:a="http://schemas.openxmlformats.org/drawingml/2006/main">
-              <a:ext uri="{FF2B5EF4-FFF2-40B4-BE49-F238E27FC236}">
-                <a16:creationId xmlns:a16="http://schemas.microsoft.com/office/drawing/2014/main" id="{36862E82-E219-49DB-B943-E82A27EA632B}"/>
-              </a:ext>
-            </a:extLst>
-          </p:cNvPr>
-          <p:cNvSpPr>
-            <a:spLocks xmlns:a="http://schemas.openxmlformats.org/drawingml/2006/main" noGrp="1"/>
-          </p:cNvSpPr>
-          <p:nvPr/>
-        </p:nvSpPr>
-        <p:spPr>
-          <a:xfrm xmlns:a="http://schemas.openxmlformats.org/drawingml/2006/main">
-            <a:off x="3556000" y="4438650"/>
-            <a:ext cx="2000250" cy="14288"/>
-          </a:xfrm>
-          <a:prstGeom xmlns:a="http://schemas.openxmlformats.org/drawingml/2006/main" prst="rect">
-            <a:avLst/>
-          </a:prstGeom>
-          <a:solidFill xmlns:a="http://schemas.openxmlformats.org/drawingml/2006/main">
-            <a:srgbClr val="1F4D78"/>
-          </a:solidFill>
-          <a:ln xmlns:a="http://schemas.openxmlformats.org/drawingml/2006/main" w="0">
-            <a:noFill/>
-          </a:ln>
-        </p:spPr>
-      </p:sp>
-      <p:sp>
-        <p:nvSpPr>
-          <p:cNvPr id="30" name="chain-1">
-            <a:extLst xmlns:a="http://schemas.openxmlformats.org/drawingml/2006/main">
-              <a:ext uri="{FF2B5EF4-FFF2-40B4-BE49-F238E27FC236}">
-                <a16:creationId xmlns:a16="http://schemas.microsoft.com/office/drawing/2014/main" id="{D91616C8-4294-4C80-9DC8-46EB626D8A28}"/>
-              </a:ext>
-            </a:extLst>
-          </p:cNvPr>
-          <p:cNvSpPr>
-            <a:spLocks xmlns:a="http://schemas.openxmlformats.org/drawingml/2006/main" noGrp="1"/>
-          </p:cNvSpPr>
-          <p:nvPr/>
-        </p:nvSpPr>
-        <p:spPr>
-          <a:xfrm xmlns:a="http://schemas.openxmlformats.org/drawingml/2006/main">
-            <a:off x="3556000" y="3714750"/>
-            <a:ext cx="2000250" cy="666750"/>
-          </a:xfrm>
-          <a:prstGeom xmlns:a="http://schemas.openxmlformats.org/drawingml/2006/main" prst="rect">
-            <a:avLst/>
-          </a:prstGeom>
-          <a:noFill xmlns:a="http://schemas.openxmlformats.org/drawingml/2006/main"/>
-          <a:ln xmlns:a="http://schemas.openxmlformats.org/drawingml/2006/main" w="0">
-            <a:noFill/>
-          </a:ln>
-        </p:spPr>
-        <p:txBody>
-          <a:bodyPr xmlns:a="http://schemas.openxmlformats.org/drawingml/2006/main" lIns="0" tIns="0" rIns="0" bIns="0" anchor="ctr"/>
-          <a:lstStyle xmlns:a="http://schemas.openxmlformats.org/drawingml/2006/main"/>
-          <a:p xmlns:a="http://schemas.openxmlformats.org/drawingml/2006/main">
-            <a:pPr algn="ctr">
-              <a:lnSpc>
-                <a:spcPct val="118000"/>
-              </a:lnSpc>
-              <a:buNone/>
-              <a:defRPr sz="2200" b="0">
-                <a:solidFill>
-                  <a:srgbClr val="1F4D78"/>
-                </a:solidFill>
-                <a:latin typeface="微软雅黑"/>
-                <a:ea typeface="微软雅黑"/>
-                <a:cs typeface="微软雅黑"/>
-              </a:defRPr>
-            </a:pPr>
-            <a:r>
-              <a:rPr sz="2200" b="0">
-                <a:solidFill>
-                  <a:srgbClr val="1F4D78"/>
-                </a:solidFill>
-                <a:latin typeface="微软雅黑"/>
-                <a:ea typeface="微软雅黑"/>
-                <a:cs typeface="微软雅黑"/>
-              </a:rPr>
-              <a:t>Evals</a:t>
-            </a:r>
-          </a:p>
-        </p:txBody>
-      </p:sp>
-      <p:sp>
-        <p:nvSpPr>
-          <p:cNvPr id="31" name="chain-arrow-1">
-            <a:extLst xmlns:a="http://schemas.openxmlformats.org/drawingml/2006/main">
-              <a:ext uri="{FF2B5EF4-FFF2-40B4-BE49-F238E27FC236}">
-                <a16:creationId xmlns:a16="http://schemas.microsoft.com/office/drawing/2014/main" id="{A2FAF685-A630-4330-9B98-C4C2B58F3D44}"/>
-              </a:ext>
-            </a:extLst>
-          </p:cNvPr>
-          <p:cNvSpPr>
-            <a:spLocks xmlns:a="http://schemas.openxmlformats.org/drawingml/2006/main" noGrp="1"/>
-          </p:cNvSpPr>
-          <p:nvPr/>
-        </p:nvSpPr>
-        <p:spPr>
-          <a:xfrm xmlns:a="http://schemas.openxmlformats.org/drawingml/2006/main">
-            <a:off x="5556250" y="3886200"/>
-            <a:ext cx="889000" cy="323850"/>
-          </a:xfrm>
-          <a:prstGeom xmlns:a="http://schemas.openxmlformats.org/drawingml/2006/main" prst="rect">
-            <a:avLst/>
-          </a:prstGeom>
-          <a:noFill xmlns:a="http://schemas.openxmlformats.org/drawingml/2006/main"/>
-          <a:ln xmlns:a="http://schemas.openxmlformats.org/drawingml/2006/main" w="0">
-            <a:noFill/>
-          </a:ln>
-        </p:spPr>
-        <p:txBody>
-          <a:bodyPr xmlns:a="http://schemas.openxmlformats.org/drawingml/2006/main" lIns="0" tIns="0" rIns="0" bIns="0" anchor="ctr"/>
-          <a:lstStyle xmlns:a="http://schemas.openxmlformats.org/drawingml/2006/main"/>
-          <a:p xmlns:a="http://schemas.openxmlformats.org/drawingml/2006/main">
-            <a:pPr algn="ctr">
-              <a:lnSpc>
-                <a:spcPct val="118000"/>
-              </a:lnSpc>
-              <a:buNone/>
-              <a:defRPr sz="2400" b="0">
-                <a:solidFill>
-                  <a:srgbClr val="1F4D78"/>
-                </a:solidFill>
-                <a:latin typeface="微软雅黑"/>
-                <a:ea typeface="微软雅黑"/>
-                <a:cs typeface="微软雅黑"/>
-              </a:defRPr>
-            </a:pPr>
-            <a:r>
-              <a:rPr sz="2400" b="0">
-                <a:solidFill>
-                  <a:srgbClr val="1F4D78"/>
-                </a:solidFill>
-                <a:latin typeface="微软雅黑"/>
-                <a:ea typeface="微软雅黑"/>
-                <a:cs typeface="微软雅黑"/>
-              </a:rPr>
-              <a:t>→</a:t>
-            </a:r>
-          </a:p>
-        </p:txBody>
-      </p:sp>
-      <p:sp>
-        <p:nvSpPr>
-          <p:cNvPr id="32" name="chain-sub-1">
-            <a:extLst xmlns:a="http://schemas.openxmlformats.org/drawingml/2006/main">
-              <a:ext uri="{FF2B5EF4-FFF2-40B4-BE49-F238E27FC236}">
-                <a16:creationId xmlns:a16="http://schemas.microsoft.com/office/drawing/2014/main" id="{9524ECA7-EBC8-407A-9260-FDE422D7D796}"/>
-              </a:ext>
-            </a:extLst>
-          </p:cNvPr>
-          <p:cNvSpPr>
-            <a:spLocks xmlns:a="http://schemas.openxmlformats.org/drawingml/2006/main" noGrp="1"/>
-          </p:cNvSpPr>
-          <p:nvPr/>
-        </p:nvSpPr>
-        <p:spPr>
-          <a:xfrm xmlns:a="http://schemas.openxmlformats.org/drawingml/2006/main">
-            <a:off x="3556000" y="4591050"/>
-            <a:ext cx="2000250" cy="571500"/>
-          </a:xfrm>
-          <a:prstGeom xmlns:a="http://schemas.openxmlformats.org/drawingml/2006/main" prst="rect">
-            <a:avLst/>
-          </a:prstGeom>
-          <a:noFill xmlns:a="http://schemas.openxmlformats.org/drawingml/2006/main"/>
-          <a:ln xmlns:a="http://schemas.openxmlformats.org/drawingml/2006/main" w="0">
-            <a:noFill/>
-          </a:ln>
-        </p:spPr>
-        <p:txBody>
-          <a:bodyPr xmlns:a="http://schemas.openxmlformats.org/drawingml/2006/main" lIns="0" tIns="0" rIns="0" bIns="0" anchor="t"/>
-          <a:lstStyle xmlns:a="http://schemas.openxmlformats.org/drawingml/2006/main"/>
-          <a:p xmlns:a="http://schemas.openxmlformats.org/drawingml/2006/main">
-            <a:pPr algn="ctr">
-              <a:lnSpc>
-                <a:spcPct val="118000"/>
-              </a:lnSpc>
-              <a:buNone/>
-              <a:defRPr sz="2000" b="0">
-                <a:solidFill>
-                  <a:srgbClr val="66727D"/>
-                </a:solidFill>
-                <a:latin typeface="微软雅黑"/>
-                <a:ea typeface="微软雅黑"/>
-                <a:cs typeface="微软雅黑"/>
-              </a:defRPr>
-            </a:pPr>
-            <a:r>
-              <a:rPr sz="2000" b="0">
-                <a:solidFill>
-                  <a:srgbClr val="66727D"/>
-                </a:solidFill>
-                <a:latin typeface="微软雅黑"/>
-                <a:ea typeface="微软雅黑"/>
-                <a:cs typeface="微软雅黑"/>
-              </a:rPr>
-              <a:t>独立评价</a:t>
-            </a:r>
-          </a:p>
-        </p:txBody>
-      </p:sp>
-      <p:sp>
-        <p:nvSpPr>
-          <p:cNvPr id="33" name="chain-line-2">
-            <a:extLst xmlns:a="http://schemas.openxmlformats.org/drawingml/2006/main">
-              <a:ext uri="{FF2B5EF4-FFF2-40B4-BE49-F238E27FC236}">
-                <a16:creationId xmlns:a16="http://schemas.microsoft.com/office/drawing/2014/main" id="{9DC9AEE1-14A6-4A31-816E-F685C6750B94}"/>
-              </a:ext>
-            </a:extLst>
-          </p:cNvPr>
-          <p:cNvSpPr>
-            <a:spLocks xmlns:a="http://schemas.openxmlformats.org/drawingml/2006/main" noGrp="1"/>
-          </p:cNvSpPr>
-          <p:nvPr/>
-        </p:nvSpPr>
-        <p:spPr>
-          <a:xfrm xmlns:a="http://schemas.openxmlformats.org/drawingml/2006/main">
-            <a:off x="6445250" y="4438650"/>
-            <a:ext cx="2000250" cy="14288"/>
-          </a:xfrm>
-          <a:prstGeom xmlns:a="http://schemas.openxmlformats.org/drawingml/2006/main" prst="rect">
-            <a:avLst/>
-          </a:prstGeom>
-          <a:solidFill xmlns:a="http://schemas.openxmlformats.org/drawingml/2006/main">
-            <a:srgbClr val="1F4D78"/>
-          </a:solidFill>
-          <a:ln xmlns:a="http://schemas.openxmlformats.org/drawingml/2006/main" w="0">
-            <a:noFill/>
-          </a:ln>
-        </p:spPr>
-      </p:sp>
-      <p:sp>
-        <p:nvSpPr>
-          <p:cNvPr id="34" name="chain-2">
-            <a:extLst xmlns:a="http://schemas.openxmlformats.org/drawingml/2006/main">
-              <a:ext uri="{FF2B5EF4-FFF2-40B4-BE49-F238E27FC236}">
-                <a16:creationId xmlns:a16="http://schemas.microsoft.com/office/drawing/2014/main" id="{93F48441-4F6A-4C98-8B4F-178259784075}"/>
-              </a:ext>
-            </a:extLst>
-          </p:cNvPr>
-          <p:cNvSpPr>
-            <a:spLocks xmlns:a="http://schemas.openxmlformats.org/drawingml/2006/main" noGrp="1"/>
-          </p:cNvSpPr>
-          <p:nvPr/>
-        </p:nvSpPr>
-        <p:spPr>
-          <a:xfrm xmlns:a="http://schemas.openxmlformats.org/drawingml/2006/main">
-            <a:off x="6445250" y="3714750"/>
-            <a:ext cx="2000250" cy="666750"/>
-          </a:xfrm>
-          <a:prstGeom xmlns:a="http://schemas.openxmlformats.org/drawingml/2006/main" prst="rect">
-            <a:avLst/>
-          </a:prstGeom>
-          <a:noFill xmlns:a="http://schemas.openxmlformats.org/drawingml/2006/main"/>
-          <a:ln xmlns:a="http://schemas.openxmlformats.org/drawingml/2006/main" w="0">
-            <a:noFill/>
-          </a:ln>
-        </p:spPr>
-        <p:txBody>
-          <a:bodyPr xmlns:a="http://schemas.openxmlformats.org/drawingml/2006/main" lIns="0" tIns="0" rIns="0" bIns="0" anchor="ctr"/>
-          <a:lstStyle xmlns:a="http://schemas.openxmlformats.org/drawingml/2006/main"/>
-          <a:p xmlns:a="http://schemas.openxmlformats.org/drawingml/2006/main">
-            <a:pPr algn="ctr">
-              <a:lnSpc>
-                <a:spcPct val="118000"/>
-              </a:lnSpc>
-              <a:buNone/>
-              <a:defRPr sz="2200" b="0">
-                <a:solidFill>
-                  <a:srgbClr val="1F4D78"/>
-                </a:solidFill>
-                <a:latin typeface="微软雅黑"/>
-                <a:ea typeface="微软雅黑"/>
-                <a:cs typeface="微软雅黑"/>
-              </a:defRPr>
-            </a:pPr>
-            <a:r>
-              <a:rPr sz="2200" b="0">
-                <a:solidFill>
-                  <a:srgbClr val="1F4D78"/>
-                </a:solidFill>
-                <a:latin typeface="微软雅黑"/>
-                <a:ea typeface="微软雅黑"/>
-                <a:cs typeface="微软雅黑"/>
-              </a:rPr>
-              <a:t>人工审核</a:t>
-            </a:r>
-          </a:p>
-        </p:txBody>
-      </p:sp>
-      <p:sp>
-        <p:nvSpPr>
-          <p:cNvPr id="35" name="chain-arrow-2">
-            <a:extLst xmlns:a="http://schemas.openxmlformats.org/drawingml/2006/main">
-              <a:ext uri="{FF2B5EF4-FFF2-40B4-BE49-F238E27FC236}">
-                <a16:creationId xmlns:a16="http://schemas.microsoft.com/office/drawing/2014/main" id="{F18E038B-9DE5-49F1-95C3-937E06AEC640}"/>
-              </a:ext>
-            </a:extLst>
-          </p:cNvPr>
-          <p:cNvSpPr>
-            <a:spLocks xmlns:a="http://schemas.openxmlformats.org/drawingml/2006/main" noGrp="1"/>
-          </p:cNvSpPr>
-          <p:nvPr/>
-        </p:nvSpPr>
-        <p:spPr>
-          <a:xfrm xmlns:a="http://schemas.openxmlformats.org/drawingml/2006/main">
-            <a:off x="8445500" y="3886200"/>
-            <a:ext cx="889000" cy="323850"/>
-          </a:xfrm>
-          <a:prstGeom xmlns:a="http://schemas.openxmlformats.org/drawingml/2006/main" prst="rect">
-            <a:avLst/>
-          </a:prstGeom>
-          <a:noFill xmlns:a="http://schemas.openxmlformats.org/drawingml/2006/main"/>
-          <a:ln xmlns:a="http://schemas.openxmlformats.org/drawingml/2006/main" w="0">
-            <a:noFill/>
-          </a:ln>
-        </p:spPr>
-        <p:txBody>
-          <a:bodyPr xmlns:a="http://schemas.openxmlformats.org/drawingml/2006/main" lIns="0" tIns="0" rIns="0" bIns="0" anchor="ctr"/>
-          <a:lstStyle xmlns:a="http://schemas.openxmlformats.org/drawingml/2006/main"/>
-          <a:p xmlns:a="http://schemas.openxmlformats.org/drawingml/2006/main">
-            <a:pPr algn="ctr">
-              <a:lnSpc>
-                <a:spcPct val="118000"/>
-              </a:lnSpc>
-              <a:buNone/>
-              <a:defRPr sz="2400" b="0">
-                <a:solidFill>
-                  <a:srgbClr val="1F4D78"/>
-                </a:solidFill>
-                <a:latin typeface="微软雅黑"/>
-                <a:ea typeface="微软雅黑"/>
-                <a:cs typeface="微软雅黑"/>
-              </a:defRPr>
-            </a:pPr>
-            <a:r>
-              <a:rPr sz="2400" b="0">
-                <a:solidFill>
-                  <a:srgbClr val="1F4D78"/>
-                </a:solidFill>
-                <a:latin typeface="微软雅黑"/>
-                <a:ea typeface="微软雅黑"/>
-                <a:cs typeface="微软雅黑"/>
-              </a:rPr>
-              <a:t>→</a:t>
-            </a:r>
-          </a:p>
-        </p:txBody>
-      </p:sp>
-      <p:sp>
-        <p:nvSpPr>
-          <p:cNvPr id="36" name="chain-sub-2">
-            <a:extLst xmlns:a="http://schemas.openxmlformats.org/drawingml/2006/main">
-              <a:ext uri="{FF2B5EF4-FFF2-40B4-BE49-F238E27FC236}">
-                <a16:creationId xmlns:a16="http://schemas.microsoft.com/office/drawing/2014/main" id="{09541EA7-8E49-426F-A1ED-205E8A1320EB}"/>
-              </a:ext>
-            </a:extLst>
-          </p:cNvPr>
-          <p:cNvSpPr>
-            <a:spLocks xmlns:a="http://schemas.openxmlformats.org/drawingml/2006/main" noGrp="1"/>
-          </p:cNvSpPr>
-          <p:nvPr/>
-        </p:nvSpPr>
-        <p:spPr>
-          <a:xfrm xmlns:a="http://schemas.openxmlformats.org/drawingml/2006/main">
-            <a:off x="6445250" y="4591050"/>
-            <a:ext cx="2000250" cy="571500"/>
-          </a:xfrm>
-          <a:prstGeom xmlns:a="http://schemas.openxmlformats.org/drawingml/2006/main" prst="rect">
-            <a:avLst/>
-          </a:prstGeom>
-          <a:noFill xmlns:a="http://schemas.openxmlformats.org/drawingml/2006/main"/>
-          <a:ln xmlns:a="http://schemas.openxmlformats.org/drawingml/2006/main" w="0">
-            <a:noFill/>
-          </a:ln>
-        </p:spPr>
-        <p:txBody>
-          <a:bodyPr xmlns:a="http://schemas.openxmlformats.org/drawingml/2006/main" lIns="0" tIns="0" rIns="0" bIns="0" anchor="t"/>
-          <a:lstStyle xmlns:a="http://schemas.openxmlformats.org/drawingml/2006/main"/>
-          <a:p xmlns:a="http://schemas.openxmlformats.org/drawingml/2006/main">
-            <a:pPr algn="ctr">
-              <a:lnSpc>
-                <a:spcPct val="118000"/>
-              </a:lnSpc>
-              <a:buNone/>
-              <a:defRPr sz="2000" b="0">
-                <a:solidFill>
-                  <a:srgbClr val="66727D"/>
-                </a:solidFill>
-                <a:latin typeface="微软雅黑"/>
-                <a:ea typeface="微软雅黑"/>
-                <a:cs typeface="微软雅黑"/>
-              </a:defRPr>
-            </a:pPr>
-            <a:r>
-              <a:rPr sz="2000" b="0">
-                <a:solidFill>
-                  <a:srgbClr val="66727D"/>
-                </a:solidFill>
-                <a:latin typeface="微软雅黑"/>
-                <a:ea typeface="微软雅黑"/>
-                <a:cs typeface="微软雅黑"/>
-              </a:rPr>
-              <a:t>研究决定</a:t>
-            </a:r>
-          </a:p>
-        </p:txBody>
-      </p:sp>
-      <p:sp>
-        <p:nvSpPr>
-          <p:cNvPr id="37" name="chain-line-3">
-            <a:extLst xmlns:a="http://schemas.openxmlformats.org/drawingml/2006/main">
-              <a:ext uri="{FF2B5EF4-FFF2-40B4-BE49-F238E27FC236}">
-                <a16:creationId xmlns:a16="http://schemas.microsoft.com/office/drawing/2014/main" id="{51F29B22-0723-4644-9052-39E1D93270E0}"/>
-              </a:ext>
-            </a:extLst>
-          </p:cNvPr>
-          <p:cNvSpPr>
-            <a:spLocks xmlns:a="http://schemas.openxmlformats.org/drawingml/2006/main" noGrp="1"/>
-          </p:cNvSpPr>
-          <p:nvPr/>
-        </p:nvSpPr>
-        <p:spPr>
-          <a:xfrm xmlns:a="http://schemas.openxmlformats.org/drawingml/2006/main">
-            <a:off x="9334500" y="4438650"/>
-            <a:ext cx="2000250" cy="14288"/>
-          </a:xfrm>
-          <a:prstGeom xmlns:a="http://schemas.openxmlformats.org/drawingml/2006/main" prst="rect">
-            <a:avLst/>
-          </a:prstGeom>
-          <a:solidFill xmlns:a="http://schemas.openxmlformats.org/drawingml/2006/main">
-            <a:srgbClr val="1F4D78"/>
-          </a:solidFill>
-          <a:ln xmlns:a="http://schemas.openxmlformats.org/drawingml/2006/main" w="0">
-            <a:noFill/>
-          </a:ln>
-        </p:spPr>
-      </p:sp>
-      <p:sp>
-        <p:nvSpPr>
-          <p:cNvPr id="38" name="chain-3">
-            <a:extLst xmlns:a="http://schemas.openxmlformats.org/drawingml/2006/main">
-              <a:ext uri="{FF2B5EF4-FFF2-40B4-BE49-F238E27FC236}">
-                <a16:creationId xmlns:a16="http://schemas.microsoft.com/office/drawing/2014/main" id="{94085A36-67AB-4509-B3FD-CD2F0B171D8A}"/>
-              </a:ext>
-            </a:extLst>
-          </p:cNvPr>
-          <p:cNvSpPr>
-            <a:spLocks xmlns:a="http://schemas.openxmlformats.org/drawingml/2006/main" noGrp="1"/>
-          </p:cNvSpPr>
-          <p:nvPr/>
-        </p:nvSpPr>
-        <p:spPr>
-          <a:xfrm xmlns:a="http://schemas.openxmlformats.org/drawingml/2006/main">
-            <a:off x="9334500" y="3714750"/>
-            <a:ext cx="2000250" cy="666750"/>
-          </a:xfrm>
-          <a:prstGeom xmlns:a="http://schemas.openxmlformats.org/drawingml/2006/main" prst="rect">
-            <a:avLst/>
-          </a:prstGeom>
-          <a:noFill xmlns:a="http://schemas.openxmlformats.org/drawingml/2006/main"/>
-          <a:ln xmlns:a="http://schemas.openxmlformats.org/drawingml/2006/main" w="0">
-            <a:noFill/>
-          </a:ln>
-        </p:spPr>
-        <p:txBody>
-          <a:bodyPr xmlns:a="http://schemas.openxmlformats.org/drawingml/2006/main" lIns="0" tIns="0" rIns="0" bIns="0" anchor="ctr"/>
-          <a:lstStyle xmlns:a="http://schemas.openxmlformats.org/drawingml/2006/main"/>
-          <a:p xmlns:a="http://schemas.openxmlformats.org/drawingml/2006/main">
-            <a:pPr algn="ctr">
-              <a:lnSpc>
-                <a:spcPct val="118000"/>
-              </a:lnSpc>
-              <a:buNone/>
-              <a:defRPr sz="2200" b="0">
-                <a:solidFill>
-                  <a:srgbClr val="1F4D78"/>
-                </a:solidFill>
-                <a:latin typeface="微软雅黑"/>
-                <a:ea typeface="微软雅黑"/>
-                <a:cs typeface="微软雅黑"/>
-              </a:defRPr>
-            </a:pPr>
-            <a:r>
-              <a:rPr sz="2200" b="0">
-                <a:solidFill>
-                  <a:srgbClr val="1F4D78"/>
-                </a:solidFill>
-                <a:latin typeface="微软雅黑"/>
-                <a:ea typeface="微软雅黑"/>
-                <a:cs typeface="微软雅黑"/>
-              </a:rPr>
-              <a:t>失败恢复</a:t>
-            </a:r>
-          </a:p>
-        </p:txBody>
-      </p:sp>
-      <p:sp>
-        <p:nvSpPr>
-          <p:cNvPr id="39" name="chain-sub-3">
-            <a:extLst xmlns:a="http://schemas.openxmlformats.org/drawingml/2006/main">
-              <a:ext uri="{FF2B5EF4-FFF2-40B4-BE49-F238E27FC236}">
-                <a16:creationId xmlns:a16="http://schemas.microsoft.com/office/drawing/2014/main" id="{9A0DCE3E-2C99-4609-93A5-BCFE9CF85656}"/>
-              </a:ext>
-            </a:extLst>
-          </p:cNvPr>
-          <p:cNvSpPr>
-            <a:spLocks xmlns:a="http://schemas.openxmlformats.org/drawingml/2006/main" noGrp="1"/>
-          </p:cNvSpPr>
-          <p:nvPr/>
-        </p:nvSpPr>
-        <p:spPr>
-          <a:xfrm xmlns:a="http://schemas.openxmlformats.org/drawingml/2006/main">
-            <a:off x="9334500" y="4591050"/>
-            <a:ext cx="2000250" cy="571500"/>
-          </a:xfrm>
-          <a:prstGeom xmlns:a="http://schemas.openxmlformats.org/drawingml/2006/main" prst="rect">
-            <a:avLst/>
-          </a:prstGeom>
-          <a:noFill xmlns:a="http://schemas.openxmlformats.org/drawingml/2006/main"/>
-          <a:ln xmlns:a="http://schemas.openxmlformats.org/drawingml/2006/main" w="0">
-            <a:noFill/>
-          </a:ln>
-        </p:spPr>
-        <p:txBody>
-          <a:bodyPr xmlns:a="http://schemas.openxmlformats.org/drawingml/2006/main" lIns="0" tIns="0" rIns="0" bIns="0" anchor="t"/>
-          <a:lstStyle xmlns:a="http://schemas.openxmlformats.org/drawingml/2006/main"/>
-          <a:p xmlns:a="http://schemas.openxmlformats.org/drawingml/2006/main">
-            <a:pPr algn="ctr">
-              <a:lnSpc>
-                <a:spcPct val="118000"/>
-              </a:lnSpc>
-              <a:buNone/>
-              <a:defRPr sz="2000" b="0">
-                <a:solidFill>
-                  <a:srgbClr val="66727D"/>
-                </a:solidFill>
-                <a:latin typeface="微软雅黑"/>
-                <a:ea typeface="微软雅黑"/>
-                <a:cs typeface="微软雅黑"/>
-              </a:defRPr>
-            </a:pPr>
-            <a:r>
-              <a:rPr sz="2000" b="0">
-                <a:solidFill>
-                  <a:srgbClr val="66727D"/>
-                </a:solidFill>
-                <a:latin typeface="微软雅黑"/>
-                <a:ea typeface="微软雅黑"/>
-                <a:cs typeface="微软雅黑"/>
-              </a:rPr>
-              <a:t>保留 trace</a:t>
             </a:r>
           </a:p>
         </p:txBody>
@@ -16225,35 +13110,55 @@
       </p:grpSpPr>
       <p:sp>
         <p:nvSpPr>
-          <p:cNvPr id="4" name="Text Placeholder 3">
-            <a:extLst xmlns:a="http://schemas.openxmlformats.org/drawingml/2006/main">
-              <a:ext uri="{FF2B5EF4-FFF2-40B4-BE49-F238E27FC236}">
-                <a16:creationId xmlns:a16="http://schemas.microsoft.com/office/drawing/2014/main" id="{4D941B40-7A0A-534E-3563-CA11753C8E3F}"/>
-              </a:ext>
-            </a:extLst>
-          </p:cNvPr>
-          <p:cNvSpPr>
-            <a:spLocks xmlns:a="http://schemas.openxmlformats.org/drawingml/2006/main" noGrp="1"/>
-          </p:cNvSpPr>
-          <p:nvPr>
-            <p:ph type="body" idx="14"/>
-          </p:nvPr>
-        </p:nvSpPr>
-        <p:spPr>
-          <a:xfrm xmlns:a="http://schemas.openxmlformats.org/drawingml/2006/main">
-            <a:off x="1028700" y="57150"/>
-            <a:ext cx="10668000" cy="571500"/>
-          </a:xfrm>
-        </p:spPr>
-        <p:txBody>
-          <a:bodyPr xmlns:a="http://schemas.openxmlformats.org/drawingml/2006/main" lIns="0" tIns="0" rIns="0" bIns="0" anchor="ctr"/>
-          <a:lstStyle xmlns:a="http://schemas.openxmlformats.org/drawingml/2006/main"/>
+          <p:cNvPr id="7" name="judgment-title">
+            <a:extLst xmlns:a="http://schemas.openxmlformats.org/drawingml/2006/main">
+              <a:ext uri="{FF2B5EF4-FFF2-40B4-BE49-F238E27FC236}">
+                <a16:creationId xmlns:a16="http://schemas.microsoft.com/office/drawing/2014/main" id="{314B2AC0-7D22-43DF-88A6-A51241C80243}"/>
+              </a:ext>
+            </a:extLst>
+          </p:cNvPr>
+          <p:cNvSpPr>
+            <a:spLocks xmlns:a="http://schemas.openxmlformats.org/drawingml/2006/main" noGrp="1"/>
+          </p:cNvSpPr>
+          <p:nvPr/>
+        </p:nvSpPr>
+        <p:spPr>
+          <a:xfrm xmlns:a="http://schemas.openxmlformats.org/drawingml/2006/main">
+            <a:off x="1028700" y="76200"/>
+            <a:ext cx="10687050" cy="514350"/>
+          </a:xfrm>
+          <a:prstGeom xmlns:a="http://schemas.openxmlformats.org/drawingml/2006/main" prst="rect">
+            <a:avLst/>
+          </a:prstGeom>
+          <a:noFill xmlns:a="http://schemas.openxmlformats.org/drawingml/2006/main"/>
+          <a:ln xmlns:a="http://schemas.openxmlformats.org/drawingml/2006/main" w="0">
+            <a:noFill/>
+          </a:ln>
+        </p:spPr>
+        <p:txBody>
+          <a:bodyPr xmlns:a="http://schemas.openxmlformats.org/drawingml/2006/main" lIns="0" tIns="0" rIns="0" bIns="0" anchor="t"/>
+          <a:lstStyle xmlns:a="http://schemas.openxmlformats.org/drawingml/2006/main">
+            <a:defPPr algn="l">
+              <a:defRPr sz="3000" b="1">
+                <a:solidFill>
+                  <a:srgbClr val="FFFFFF"/>
+                </a:solidFill>
+                <a:latin typeface="微软雅黑"/>
+                <a:ea typeface="微软雅黑"/>
+                <a:cs typeface="微软雅黑"/>
+              </a:defRPr>
+            </a:defPPr>
+          </a:lstStyle>
           <a:p xmlns:a="http://schemas.openxmlformats.org/drawingml/2006/main">
             <a:pPr algn="l">
-              <a:lnSpc>
-                <a:spcPct val="118000"/>
-              </a:lnSpc>
-              <a:buNone/>
+              <a:defRPr sz="3000" b="1">
+                <a:solidFill>
+                  <a:srgbClr val="FFFFFF"/>
+                </a:solidFill>
+                <a:latin typeface="微软雅黑"/>
+                <a:ea typeface="微软雅黑"/>
+                <a:cs typeface="微软雅黑"/>
+              </a:defRPr>
             </a:pPr>
             <a:r>
               <a:rPr sz="3000" b="1">
@@ -16264,965 +13169,337 @@
                 <a:ea typeface="微软雅黑"/>
                 <a:cs typeface="微软雅黑"/>
               </a:rPr>
-              <a:t>把真实运行结果带到第 13 课</a:t>
-            </a:r>
-            <a:endParaRPr/>
-          </a:p>
-        </p:txBody>
-      </p:sp>
-      <p:sp>
-        <p:nvSpPr>
-          <p:cNvPr id="5" name="Slide Number Placeholder 4">
-            <a:extLst xmlns:a="http://schemas.openxmlformats.org/drawingml/2006/main">
-              <a:ext uri="{FF2B5EF4-FFF2-40B4-BE49-F238E27FC236}">
-                <a16:creationId xmlns:a16="http://schemas.microsoft.com/office/drawing/2014/main" id="{EBA5909F-738E-F60C-BE8C-B3F1D94548E5}"/>
-              </a:ext>
-            </a:extLst>
-          </p:cNvPr>
-          <p:cNvSpPr>
-            <a:spLocks xmlns:a="http://schemas.openxmlformats.org/drawingml/2006/main" noGrp="1"/>
-          </p:cNvSpPr>
-          <p:nvPr>
-            <p:ph type="sldNum" idx="10"/>
-          </p:nvPr>
-        </p:nvSpPr>
-        <p:spPr/>
-        <p:txBody>
-          <a:bodyPr xmlns:a="http://schemas.openxmlformats.org/drawingml/2006/main"/>
-          <a:lstStyle xmlns:a="http://schemas.openxmlformats.org/drawingml/2006/main"/>
-          <a:p xmlns:a="http://schemas.openxmlformats.org/drawingml/2006/main">
-            <a:fld id="{F6DF2BE2-2DFA-1C03-677D-BDC2260D6D92}" type="slidenum">
+              <a:t>保留本课决定，准备下一课输入</a:t>
+            </a:r>
+          </a:p>
+        </p:txBody>
+      </p:sp>
+      <p:sp>
+        <p:nvSpPr>
+          <p:cNvPr id="2" name="judgment-body-0">
+            <a:extLst xmlns:a="http://schemas.openxmlformats.org/drawingml/2006/main">
+              <a:ext uri="{FF2B5EF4-FFF2-40B4-BE49-F238E27FC236}">
+                <a16:creationId xmlns:a16="http://schemas.microsoft.com/office/drawing/2014/main" id="{D29E3433-7574-4D0B-9E18-8CF35B0D9674}"/>
+              </a:ext>
+            </a:extLst>
+          </p:cNvPr>
+          <p:cNvSpPr>
+            <a:spLocks xmlns:a="http://schemas.openxmlformats.org/drawingml/2006/main" noGrp="1"/>
+          </p:cNvSpPr>
+          <p:nvPr/>
+        </p:nvSpPr>
+        <p:spPr>
+          <a:xfrm xmlns:a="http://schemas.openxmlformats.org/drawingml/2006/main">
+            <a:off x="666750" y="1066800"/>
+            <a:ext cx="10858500" cy="1009650"/>
+          </a:xfrm>
+          <a:prstGeom xmlns:a="http://schemas.openxmlformats.org/drawingml/2006/main" prst="rect">
+            <a:avLst/>
+          </a:prstGeom>
+          <a:noFill xmlns:a="http://schemas.openxmlformats.org/drawingml/2006/main"/>
+          <a:ln xmlns:a="http://schemas.openxmlformats.org/drawingml/2006/main" w="0">
+            <a:noFill/>
+          </a:ln>
+        </p:spPr>
+        <p:txBody>
+          <a:bodyPr xmlns:a="http://schemas.openxmlformats.org/drawingml/2006/main" lIns="0" tIns="0" rIns="0" bIns="0" anchor="t"/>
+          <a:lstStyle xmlns:a="http://schemas.openxmlformats.org/drawingml/2006/main">
+            <a:defPPr algn="l">
+              <a:defRPr sz="2400" b="0">
+                <a:solidFill>
+                  <a:srgbClr val="263746"/>
+                </a:solidFill>
+                <a:latin typeface="微软雅黑"/>
+                <a:ea typeface="微软雅黑"/>
+                <a:cs typeface="微软雅黑"/>
+              </a:defRPr>
+            </a:defPPr>
+          </a:lstStyle>
+          <a:p xmlns:a="http://schemas.openxmlformats.org/drawingml/2006/main">
+            <a:pPr algn="l">
+              <a:defRPr sz="2400" b="0">
+                <a:solidFill>
+                  <a:srgbClr val="263746"/>
+                </a:solidFill>
+                <a:latin typeface="微软雅黑"/>
+                <a:ea typeface="微软雅黑"/>
+                <a:cs typeface="微软雅黑"/>
+              </a:defRPr>
+            </a:pPr>
+            <a:r>
+              <a:rPr sz="2400" b="0">
+                <a:solidFill>
+                  <a:srgbClr val="263746"/>
+                </a:solidFill>
+                <a:latin typeface="微软雅黑"/>
+                <a:ea typeface="微软雅黑"/>
+                <a:cs typeface="微软雅黑"/>
+              </a:rPr>
+              <a:t>L13 按冻结协议评价 baseline 和改动版。</a:t>
+            </a:r>
+          </a:p>
+        </p:txBody>
+      </p:sp>
+      <p:sp>
+        <p:nvSpPr>
+          <p:cNvPr id="3" name="judgment-body-1">
+            <a:extLst xmlns:a="http://schemas.openxmlformats.org/drawingml/2006/main">
+              <a:ext uri="{FF2B5EF4-FFF2-40B4-BE49-F238E27FC236}">
+                <a16:creationId xmlns:a16="http://schemas.microsoft.com/office/drawing/2014/main" id="{C866D2A1-C2BE-4A24-BB82-8869B4B18887}"/>
+              </a:ext>
+            </a:extLst>
+          </p:cNvPr>
+          <p:cNvSpPr>
+            <a:spLocks xmlns:a="http://schemas.openxmlformats.org/drawingml/2006/main" noGrp="1"/>
+          </p:cNvSpPr>
+          <p:nvPr/>
+        </p:nvSpPr>
+        <p:spPr>
+          <a:xfrm xmlns:a="http://schemas.openxmlformats.org/drawingml/2006/main">
+            <a:off x="666750" y="2238375"/>
+            <a:ext cx="10858500" cy="2076450"/>
+          </a:xfrm>
+          <a:prstGeom xmlns:a="http://schemas.openxmlformats.org/drawingml/2006/main" prst="rect">
+            <a:avLst/>
+          </a:prstGeom>
+          <a:noFill xmlns:a="http://schemas.openxmlformats.org/drawingml/2006/main"/>
+          <a:ln xmlns:a="http://schemas.openxmlformats.org/drawingml/2006/main" w="0">
+            <a:noFill/>
+          </a:ln>
+        </p:spPr>
+        <p:txBody>
+          <a:bodyPr xmlns:a="http://schemas.openxmlformats.org/drawingml/2006/main" lIns="0" tIns="0" rIns="0" bIns="0" anchor="t"/>
+          <a:lstStyle xmlns:a="http://schemas.openxmlformats.org/drawingml/2006/main">
+            <a:defPPr algn="l">
+              <a:defRPr sz="2400" b="0">
+                <a:solidFill>
+                  <a:srgbClr val="263746"/>
+                </a:solidFill>
+                <a:latin typeface="微软雅黑"/>
+                <a:ea typeface="微软雅黑"/>
+                <a:cs typeface="微软雅黑"/>
+              </a:defRPr>
+            </a:defPPr>
+          </a:lstStyle>
+          <a:p xmlns:a="http://schemas.openxmlformats.org/drawingml/2006/main">
+            <a:pPr algn="l">
+              <a:defRPr sz="2400" b="0">
+                <a:solidFill>
+                  <a:srgbClr val="263746"/>
+                </a:solidFill>
+                <a:latin typeface="微软雅黑"/>
+                <a:ea typeface="微软雅黑"/>
+                <a:cs typeface="微软雅黑"/>
+              </a:defRPr>
+            </a:pPr>
+            <a:r>
+              <a:rPr sz="2400" b="0">
+                <a:solidFill>
+                  <a:srgbClr val="263746"/>
+                </a:solidFill>
+                <a:latin typeface="微软雅黑"/>
+                <a:ea typeface="微软雅黑"/>
+                <a:cs typeface="微软雅黑"/>
+              </a:rPr>
+              <a:t>回写已有项目：本人可运行工作流、实质 diff、任务契约与端到端 trace</a:t>
+            </a:r>
+          </a:p>
+        </p:txBody>
+      </p:sp>
+      <p:sp>
+        <p:nvSpPr>
+          <p:cNvPr id="4" name="judgment-body-2">
+            <a:extLst xmlns:a="http://schemas.openxmlformats.org/drawingml/2006/main">
+              <a:ext uri="{FF2B5EF4-FFF2-40B4-BE49-F238E27FC236}">
+                <a16:creationId xmlns:a16="http://schemas.microsoft.com/office/drawing/2014/main" id="{DD479662-25C3-4D15-AE1F-20818AD5F54D}"/>
+              </a:ext>
+            </a:extLst>
+          </p:cNvPr>
+          <p:cNvSpPr>
+            <a:spLocks xmlns:a="http://schemas.openxmlformats.org/drawingml/2006/main" noGrp="1"/>
+          </p:cNvSpPr>
+          <p:nvPr/>
+        </p:nvSpPr>
+        <p:spPr>
+          <a:xfrm xmlns:a="http://schemas.openxmlformats.org/drawingml/2006/main">
+            <a:off x="666750" y="4495800"/>
+            <a:ext cx="10858500" cy="1409700"/>
+          </a:xfrm>
+          <a:prstGeom xmlns:a="http://schemas.openxmlformats.org/drawingml/2006/main" prst="rect">
+            <a:avLst/>
+          </a:prstGeom>
+          <a:noFill xmlns:a="http://schemas.openxmlformats.org/drawingml/2006/main"/>
+          <a:ln xmlns:a="http://schemas.openxmlformats.org/drawingml/2006/main" w="0">
+            <a:noFill/>
+          </a:ln>
+        </p:spPr>
+        <p:txBody>
+          <a:bodyPr xmlns:a="http://schemas.openxmlformats.org/drawingml/2006/main" lIns="0" tIns="0" rIns="0" bIns="0" anchor="t"/>
+          <a:lstStyle xmlns:a="http://schemas.openxmlformats.org/drawingml/2006/main">
+            <a:defPPr algn="l">
+              <a:defRPr sz="2200" b="0">
+                <a:solidFill>
+                  <a:srgbClr val="1F4D78"/>
+                </a:solidFill>
+                <a:latin typeface="微软雅黑"/>
+                <a:ea typeface="微软雅黑"/>
+                <a:cs typeface="微软雅黑"/>
+              </a:defRPr>
+            </a:defPPr>
+          </a:lstStyle>
+          <a:p xmlns:a="http://schemas.openxmlformats.org/drawingml/2006/main">
+            <a:pPr algn="l">
+              <a:defRPr sz="2200" b="0">
+                <a:solidFill>
+                  <a:srgbClr val="1F4D78"/>
+                </a:solidFill>
+                <a:latin typeface="微软雅黑"/>
+                <a:ea typeface="微软雅黑"/>
+                <a:cs typeface="微软雅黑"/>
+              </a:defRPr>
+            </a:pPr>
+            <a:r>
+              <a:rPr sz="2200" b="0">
+                <a:solidFill>
+                  <a:srgbClr val="1F4D78"/>
+                </a:solidFill>
+                <a:latin typeface="微软雅黑"/>
+                <a:ea typeface="微软雅黑"/>
+                <a:cs typeface="微软雅黑"/>
+              </a:rPr>
+              <a:t>只读指定段落，补课堂留下的真实缺口。安装与排障计入课外总预算。</a:t>
+            </a:r>
+          </a:p>
+        </p:txBody>
+      </p:sp>
+      <p:sp>
+        <p:nvSpPr>
+          <p:cNvPr id="5" name="judgment-source">
+            <a:extLst xmlns:a="http://schemas.openxmlformats.org/drawingml/2006/main">
+              <a:ext uri="{FF2B5EF4-FFF2-40B4-BE49-F238E27FC236}">
+                <a16:creationId xmlns:a16="http://schemas.microsoft.com/office/drawing/2014/main" id="{7B31831D-B40B-40CD-86E6-1E6A77B39B58}"/>
+              </a:ext>
+            </a:extLst>
+          </p:cNvPr>
+          <p:cNvSpPr>
+            <a:spLocks xmlns:a="http://schemas.openxmlformats.org/drawingml/2006/main" noGrp="1"/>
+          </p:cNvSpPr>
+          <p:nvPr/>
+        </p:nvSpPr>
+        <p:spPr>
+          <a:xfrm xmlns:a="http://schemas.openxmlformats.org/drawingml/2006/main">
+            <a:off x="666750" y="6276975"/>
+            <a:ext cx="10572750" cy="209550"/>
+          </a:xfrm>
+          <a:prstGeom xmlns:a="http://schemas.openxmlformats.org/drawingml/2006/main" prst="rect">
+            <a:avLst/>
+          </a:prstGeom>
+          <a:noFill xmlns:a="http://schemas.openxmlformats.org/drawingml/2006/main"/>
+          <a:ln xmlns:a="http://schemas.openxmlformats.org/drawingml/2006/main" w="0">
+            <a:noFill/>
+          </a:ln>
+        </p:spPr>
+        <p:txBody>
+          <a:bodyPr xmlns:a="http://schemas.openxmlformats.org/drawingml/2006/main" lIns="0" tIns="0" rIns="0" bIns="0" anchor="t"/>
+          <a:lstStyle xmlns:a="http://schemas.openxmlformats.org/drawingml/2006/main">
+            <a:defPPr algn="l">
+              <a:defRPr sz="1100" b="0">
+                <a:solidFill>
+                  <a:srgbClr val="667684"/>
+                </a:solidFill>
+                <a:latin typeface="微软雅黑"/>
+                <a:ea typeface="微软雅黑"/>
+                <a:cs typeface="微软雅黑"/>
+              </a:defRPr>
+            </a:defPPr>
+          </a:lstStyle>
+          <a:p xmlns:a="http://schemas.openxmlformats.org/drawingml/2006/main">
+            <a:pPr algn="l">
+              <a:defRPr sz="1100" b="0">
+                <a:solidFill>
+                  <a:srgbClr val="667684"/>
+                </a:solidFill>
+                <a:latin typeface="微软雅黑"/>
+                <a:ea typeface="微软雅黑"/>
+                <a:cs typeface="微软雅黑"/>
+              </a:defRPr>
+            </a:pPr>
+            <a:r>
+              <a:rPr sz="1100" b="0">
+                <a:solidFill>
+                  <a:srgbClr val="667684"/>
+                </a:solidFill>
+                <a:latin typeface="微软雅黑"/>
+                <a:ea typeface="微软雅黑"/>
+                <a:cs typeface="微软雅黑"/>
+              </a:rPr>
+              <a:t>来源：本课判断任务与讲义；构造材料及真实来源按材料包标识</a:t>
+            </a:r>
+          </a:p>
+        </p:txBody>
+      </p:sp>
+      <p:sp>
+        <p:nvSpPr>
+          <p:cNvPr id="6" name="judgment-page">
+            <a:extLst xmlns:a="http://schemas.openxmlformats.org/drawingml/2006/main">
+              <a:ext uri="{FF2B5EF4-FFF2-40B4-BE49-F238E27FC236}">
+                <a16:creationId xmlns:a16="http://schemas.microsoft.com/office/drawing/2014/main" id="{FF8F120D-9888-40DF-9CBA-72D7EEA42135}"/>
+              </a:ext>
+            </a:extLst>
+          </p:cNvPr>
+          <p:cNvSpPr>
+            <a:spLocks xmlns:a="http://schemas.openxmlformats.org/drawingml/2006/main" noGrp="1"/>
+          </p:cNvSpPr>
+          <p:nvPr/>
+        </p:nvSpPr>
+        <p:spPr>
+          <a:xfrm xmlns:a="http://schemas.openxmlformats.org/drawingml/2006/main">
+            <a:off x="11715750" y="6562725"/>
+            <a:ext cx="238125" cy="171450"/>
+          </a:xfrm>
+          <a:prstGeom xmlns:a="http://schemas.openxmlformats.org/drawingml/2006/main" prst="rect">
+            <a:avLst/>
+          </a:prstGeom>
+          <a:noFill xmlns:a="http://schemas.openxmlformats.org/drawingml/2006/main"/>
+          <a:ln xmlns:a="http://schemas.openxmlformats.org/drawingml/2006/main" w="0">
+            <a:noFill/>
+          </a:ln>
+        </p:spPr>
+        <p:txBody>
+          <a:bodyPr xmlns:a="http://schemas.openxmlformats.org/drawingml/2006/main" lIns="0" tIns="0" rIns="0" bIns="0" anchor="t"/>
+          <a:lstStyle xmlns:a="http://schemas.openxmlformats.org/drawingml/2006/main">
+            <a:defPPr algn="l">
+              <a:defRPr sz="900" b="0">
+                <a:solidFill>
+                  <a:srgbClr val="A5A5A5"/>
+                </a:solidFill>
+                <a:latin typeface="微软雅黑"/>
+                <a:ea typeface="微软雅黑"/>
+                <a:cs typeface="微软雅黑"/>
+              </a:defRPr>
+            </a:defPPr>
+          </a:lstStyle>
+          <a:p xmlns:a="http://schemas.openxmlformats.org/drawingml/2006/main">
+            <a:pPr algn="l">
+              <a:defRPr sz="900" b="0">
+                <a:solidFill>
+                  <a:srgbClr val="A5A5A5"/>
+                </a:solidFill>
+                <a:latin typeface="微软雅黑"/>
+                <a:ea typeface="微软雅黑"/>
+                <a:cs typeface="微软雅黑"/>
+              </a:defRPr>
+            </a:pPr>
+            <a:r>
+              <a:rPr sz="900" b="0">
+                <a:solidFill>
+                  <a:srgbClr val="A5A5A5"/>
+                </a:solidFill>
+                <a:latin typeface="微软雅黑"/>
+                <a:ea typeface="微软雅黑"/>
+                <a:cs typeface="微软雅黑"/>
+              </a:rPr>
               <a:t>21</a:t>
-            </a:fld>
-            <a:endParaRPr/>
-          </a:p>
-        </p:txBody>
-      </p:sp>
-      <p:sp>
-        <p:nvSpPr>
-          <p:cNvPr id="6" name="brand-header">
-            <a:extLst xmlns:a="http://schemas.openxmlformats.org/drawingml/2006/main">
-              <a:ext uri="{FF2B5EF4-FFF2-40B4-BE49-F238E27FC236}">
-                <a16:creationId xmlns:a16="http://schemas.microsoft.com/office/drawing/2014/main" id="{99A50343-548A-4659-951C-90416B624BC9}"/>
-              </a:ext>
-            </a:extLst>
-          </p:cNvPr>
-          <p:cNvSpPr>
-            <a:spLocks xmlns:a="http://schemas.openxmlformats.org/drawingml/2006/main" noGrp="1"/>
-          </p:cNvSpPr>
-          <p:nvPr/>
-        </p:nvSpPr>
-        <p:spPr>
-          <a:xfrm xmlns:a="http://schemas.openxmlformats.org/drawingml/2006/main">
-            <a:off x="0" y="0"/>
-            <a:ext cx="11887200" cy="685800"/>
-          </a:xfrm>
-          <a:prstGeom xmlns:a="http://schemas.openxmlformats.org/drawingml/2006/main" prst="rect">
-            <a:avLst/>
-          </a:prstGeom>
-          <a:solidFill xmlns:a="http://schemas.openxmlformats.org/drawingml/2006/main">
-            <a:srgbClr val="C8161E"/>
-          </a:solidFill>
-          <a:ln xmlns:a="http://schemas.openxmlformats.org/drawingml/2006/main" w="0">
-            <a:noFill/>
-          </a:ln>
-        </p:spPr>
-      </p:sp>
-      <p:pic>
-        <p:nvPicPr>
-          <p:cNvPr id="27" name=""/>
-          <p:cNvPicPr>
-            <a:picLocks xmlns:a="http://schemas.openxmlformats.org/drawingml/2006/main" noChangeAspect="1"/>
-          </p:cNvPicPr>
-          <p:nvPr/>
-        </p:nvPicPr>
-        <p:blipFill>
-          <a:blip xmlns:r="http://schemas.openxmlformats.org/officeDocument/2006/relationships" xmlns:a="http://schemas.openxmlformats.org/drawingml/2006/main" r:embed="R9e926a3581d54d46"/>
-          <a:stretch xmlns:a="http://schemas.openxmlformats.org/drawingml/2006/main"/>
-        </p:blipFill>
-        <p:spPr>
-          <a:xfrm xmlns:a="http://schemas.openxmlformats.org/drawingml/2006/main">
-            <a:off x="323850" y="76200"/>
-            <a:ext cx="533400" cy="533400"/>
-          </a:xfrm>
-          <a:prstGeom xmlns:a="http://schemas.openxmlformats.org/drawingml/2006/main" prst="rect">
-            <a:avLst/>
-          </a:prstGeom>
-        </p:spPr>
-      </p:pic>
-      <p:sp>
-        <p:nvSpPr>
-          <p:cNvPr id="8" name="brand-title">
-            <a:extLst xmlns:a="http://schemas.openxmlformats.org/drawingml/2006/main">
-              <a:ext uri="{FF2B5EF4-FFF2-40B4-BE49-F238E27FC236}">
-                <a16:creationId xmlns:a16="http://schemas.microsoft.com/office/drawing/2014/main" id="{59E0283A-3F6F-460C-AF8C-82F4647817D0}"/>
-              </a:ext>
-            </a:extLst>
-          </p:cNvPr>
-          <p:cNvSpPr>
-            <a:spLocks xmlns:a="http://schemas.openxmlformats.org/drawingml/2006/main" noGrp="1"/>
-          </p:cNvSpPr>
-          <p:nvPr/>
-        </p:nvSpPr>
-        <p:spPr>
-          <a:xfrm xmlns:a="http://schemas.openxmlformats.org/drawingml/2006/main">
-            <a:off x="1028700" y="66675"/>
-            <a:ext cx="10477500" cy="552450"/>
-          </a:xfrm>
-          <a:prstGeom xmlns:a="http://schemas.openxmlformats.org/drawingml/2006/main" prst="rect">
-            <a:avLst/>
-          </a:prstGeom>
-          <a:noFill xmlns:a="http://schemas.openxmlformats.org/drawingml/2006/main"/>
-          <a:ln xmlns:a="http://schemas.openxmlformats.org/drawingml/2006/main" w="0">
-            <a:noFill/>
-          </a:ln>
-        </p:spPr>
-        <p:txBody>
-          <a:bodyPr xmlns:a="http://schemas.openxmlformats.org/drawingml/2006/main" lIns="0" tIns="0" rIns="0" bIns="0" anchor="ctr"/>
-          <a:lstStyle xmlns:a="http://schemas.openxmlformats.org/drawingml/2006/main"/>
-          <a:p xmlns:a="http://schemas.openxmlformats.org/drawingml/2006/main">
-            <a:pPr algn="l">
-              <a:lnSpc>
-                <a:spcPct val="118000"/>
-              </a:lnSpc>
-              <a:buNone/>
-              <a:defRPr sz="3000" b="1">
-                <a:solidFill>
-                  <a:srgbClr val="FFFFFF"/>
-                </a:solidFill>
-                <a:latin typeface="微软雅黑"/>
-                <a:ea typeface="微软雅黑"/>
-                <a:cs typeface="微软雅黑"/>
-              </a:defRPr>
-            </a:pPr>
-            <a:r>
-              <a:rPr sz="3000" b="1">
-                <a:solidFill>
-                  <a:srgbClr val="FFFFFF"/>
-                </a:solidFill>
-                <a:latin typeface="微软雅黑"/>
-                <a:ea typeface="微软雅黑"/>
-                <a:cs typeface="微软雅黑"/>
-              </a:rPr>
-              <a:t>把真实运行结果带到第 13 课</a:t>
-            </a:r>
-          </a:p>
-        </p:txBody>
-      </p:sp>
-      <p:sp>
-        <p:nvSpPr>
-          <p:cNvPr id="9" name="source">
-            <a:extLst xmlns:a="http://schemas.openxmlformats.org/drawingml/2006/main">
-              <a:ext uri="{FF2B5EF4-FFF2-40B4-BE49-F238E27FC236}">
-                <a16:creationId xmlns:a16="http://schemas.microsoft.com/office/drawing/2014/main" id="{9964D0D1-BB8C-4B6D-93FC-1D73C9C527D7}"/>
-              </a:ext>
-            </a:extLst>
-          </p:cNvPr>
-          <p:cNvSpPr>
-            <a:spLocks xmlns:a="http://schemas.openxmlformats.org/drawingml/2006/main" noGrp="1"/>
-          </p:cNvSpPr>
-          <p:nvPr/>
-        </p:nvSpPr>
-        <p:spPr>
-          <a:xfrm xmlns:a="http://schemas.openxmlformats.org/drawingml/2006/main">
-            <a:off x="609600" y="6067425"/>
-            <a:ext cx="10763250" cy="209550"/>
-          </a:xfrm>
-          <a:prstGeom xmlns:a="http://schemas.openxmlformats.org/drawingml/2006/main" prst="rect">
-            <a:avLst/>
-          </a:prstGeom>
-          <a:noFill xmlns:a="http://schemas.openxmlformats.org/drawingml/2006/main"/>
-          <a:ln xmlns:a="http://schemas.openxmlformats.org/drawingml/2006/main" w="0">
-            <a:noFill/>
-          </a:ln>
-        </p:spPr>
-        <p:txBody>
-          <a:bodyPr xmlns:a="http://schemas.openxmlformats.org/drawingml/2006/main" lIns="0" tIns="0" rIns="0" bIns="0" anchor="t"/>
-          <a:lstStyle xmlns:a="http://schemas.openxmlformats.org/drawingml/2006/main"/>
-          <a:p xmlns:a="http://schemas.openxmlformats.org/drawingml/2006/main">
-            <a:pPr algn="l">
-              <a:lnSpc>
-                <a:spcPct val="118000"/>
-              </a:lnSpc>
-              <a:buNone/>
-              <a:defRPr sz="1100" b="0">
-                <a:solidFill>
-                  <a:srgbClr val="66727D"/>
-                </a:solidFill>
-                <a:latin typeface="微软雅黑"/>
-                <a:ea typeface="微软雅黑"/>
-                <a:cs typeface="微软雅黑"/>
-              </a:defRPr>
-            </a:pPr>
-            <a:r>
-              <a:rPr sz="1100" b="0">
-                <a:solidFill>
-                  <a:srgbClr val="66727D"/>
-                </a:solidFill>
-                <a:latin typeface="微软雅黑"/>
-                <a:ea typeface="微软雅黑"/>
-                <a:cs typeface="微软雅黑"/>
-              </a:rPr>
-              <a:t>来源：lesson-12/slides.md；课程工件与讲义见 speaker notes</a:t>
-            </a:r>
-          </a:p>
-        </p:txBody>
-      </p:sp>
-      <p:sp>
-        <p:nvSpPr>
-          <p:cNvPr id="10" name="chain-line-0">
-            <a:extLst xmlns:a="http://schemas.openxmlformats.org/drawingml/2006/main">
-              <a:ext uri="{FF2B5EF4-FFF2-40B4-BE49-F238E27FC236}">
-                <a16:creationId xmlns:a16="http://schemas.microsoft.com/office/drawing/2014/main" id="{0FD2712F-97B8-4F37-9E13-4D881897509B}"/>
-              </a:ext>
-            </a:extLst>
-          </p:cNvPr>
-          <p:cNvSpPr>
-            <a:spLocks xmlns:a="http://schemas.openxmlformats.org/drawingml/2006/main" noGrp="1"/>
-          </p:cNvSpPr>
-          <p:nvPr/>
-        </p:nvSpPr>
-        <p:spPr>
-          <a:xfrm xmlns:a="http://schemas.openxmlformats.org/drawingml/2006/main">
-            <a:off x="666750" y="3105150"/>
-            <a:ext cx="2095500" cy="14288"/>
-          </a:xfrm>
-          <a:prstGeom xmlns:a="http://schemas.openxmlformats.org/drawingml/2006/main" prst="rect">
-            <a:avLst/>
-          </a:prstGeom>
-          <a:solidFill xmlns:a="http://schemas.openxmlformats.org/drawingml/2006/main">
-            <a:srgbClr val="1F4D78"/>
-          </a:solidFill>
-          <a:ln xmlns:a="http://schemas.openxmlformats.org/drawingml/2006/main" w="0">
-            <a:noFill/>
-          </a:ln>
-        </p:spPr>
-      </p:sp>
-      <p:sp>
-        <p:nvSpPr>
-          <p:cNvPr id="11" name="chain-0">
-            <a:extLst xmlns:a="http://schemas.openxmlformats.org/drawingml/2006/main">
-              <a:ext uri="{FF2B5EF4-FFF2-40B4-BE49-F238E27FC236}">
-                <a16:creationId xmlns:a16="http://schemas.microsoft.com/office/drawing/2014/main" id="{74280057-49C0-4392-AC52-B5CA7DE0F277}"/>
-              </a:ext>
-            </a:extLst>
-          </p:cNvPr>
-          <p:cNvSpPr>
-            <a:spLocks xmlns:a="http://schemas.openxmlformats.org/drawingml/2006/main" noGrp="1"/>
-          </p:cNvSpPr>
-          <p:nvPr/>
-        </p:nvSpPr>
-        <p:spPr>
-          <a:xfrm xmlns:a="http://schemas.openxmlformats.org/drawingml/2006/main">
-            <a:off x="666750" y="2381250"/>
-            <a:ext cx="2095500" cy="666750"/>
-          </a:xfrm>
-          <a:prstGeom xmlns:a="http://schemas.openxmlformats.org/drawingml/2006/main" prst="rect">
-            <a:avLst/>
-          </a:prstGeom>
-          <a:noFill xmlns:a="http://schemas.openxmlformats.org/drawingml/2006/main"/>
-          <a:ln xmlns:a="http://schemas.openxmlformats.org/drawingml/2006/main" w="0">
-            <a:noFill/>
-          </a:ln>
-        </p:spPr>
-        <p:txBody>
-          <a:bodyPr xmlns:a="http://schemas.openxmlformats.org/drawingml/2006/main" lIns="0" tIns="0" rIns="0" bIns="0" anchor="ctr"/>
-          <a:lstStyle xmlns:a="http://schemas.openxmlformats.org/drawingml/2006/main"/>
-          <a:p xmlns:a="http://schemas.openxmlformats.org/drawingml/2006/main">
-            <a:pPr algn="ctr">
-              <a:lnSpc>
-                <a:spcPct val="118000"/>
-              </a:lnSpc>
-              <a:buNone/>
-              <a:defRPr sz="2200" b="0">
-                <a:solidFill>
-                  <a:srgbClr val="1F4D78"/>
-                </a:solidFill>
-                <a:latin typeface="微软雅黑"/>
-                <a:ea typeface="微软雅黑"/>
-                <a:cs typeface="微软雅黑"/>
-              </a:defRPr>
-            </a:pPr>
-            <a:r>
-              <a:rPr sz="2200" b="0">
-                <a:solidFill>
-                  <a:srgbClr val="1F4D78"/>
-                </a:solidFill>
-                <a:latin typeface="微软雅黑"/>
-                <a:ea typeface="微软雅黑"/>
-                <a:cs typeface="微软雅黑"/>
-              </a:rPr>
-              <a:t>L10</a:t>
-            </a:r>
-          </a:p>
-          <a:p xmlns:a="http://schemas.openxmlformats.org/drawingml/2006/main">
-            <a:pPr algn="ctr">
-              <a:lnSpc>
-                <a:spcPct val="118000"/>
-              </a:lnSpc>
-              <a:buNone/>
-              <a:defRPr sz="2200" b="0">
-                <a:solidFill>
-                  <a:srgbClr val="1F4D78"/>
-                </a:solidFill>
-                <a:latin typeface="微软雅黑"/>
-                <a:ea typeface="微软雅黑"/>
-                <a:cs typeface="微软雅黑"/>
-              </a:defRPr>
-            </a:pPr>
-            <a:r>
-              <a:rPr sz="2200" b="0">
-                <a:solidFill>
-                  <a:srgbClr val="1F4D78"/>
-                </a:solidFill>
-                <a:latin typeface="微软雅黑"/>
-                <a:ea typeface="微软雅黑"/>
-                <a:cs typeface="微软雅黑"/>
-              </a:rPr>
-              <a:t>受限执行</a:t>
-            </a:r>
-          </a:p>
-        </p:txBody>
-      </p:sp>
-      <p:sp>
-        <p:nvSpPr>
-          <p:cNvPr id="12" name="chain-arrow-0">
-            <a:extLst xmlns:a="http://schemas.openxmlformats.org/drawingml/2006/main">
-              <a:ext uri="{FF2B5EF4-FFF2-40B4-BE49-F238E27FC236}">
-                <a16:creationId xmlns:a16="http://schemas.microsoft.com/office/drawing/2014/main" id="{1DD96755-277F-4D86-B2CE-346A9D45E73D}"/>
-              </a:ext>
-            </a:extLst>
-          </p:cNvPr>
-          <p:cNvSpPr>
-            <a:spLocks xmlns:a="http://schemas.openxmlformats.org/drawingml/2006/main" noGrp="1"/>
-          </p:cNvSpPr>
-          <p:nvPr/>
-        </p:nvSpPr>
-        <p:spPr>
-          <a:xfrm xmlns:a="http://schemas.openxmlformats.org/drawingml/2006/main">
-            <a:off x="2762250" y="2552700"/>
-            <a:ext cx="762000" cy="323850"/>
-          </a:xfrm>
-          <a:prstGeom xmlns:a="http://schemas.openxmlformats.org/drawingml/2006/main" prst="rect">
-            <a:avLst/>
-          </a:prstGeom>
-          <a:noFill xmlns:a="http://schemas.openxmlformats.org/drawingml/2006/main"/>
-          <a:ln xmlns:a="http://schemas.openxmlformats.org/drawingml/2006/main" w="0">
-            <a:noFill/>
-          </a:ln>
-        </p:spPr>
-        <p:txBody>
-          <a:bodyPr xmlns:a="http://schemas.openxmlformats.org/drawingml/2006/main" lIns="0" tIns="0" rIns="0" bIns="0" anchor="ctr"/>
-          <a:lstStyle xmlns:a="http://schemas.openxmlformats.org/drawingml/2006/main"/>
-          <a:p xmlns:a="http://schemas.openxmlformats.org/drawingml/2006/main">
-            <a:pPr algn="ctr">
-              <a:lnSpc>
-                <a:spcPct val="118000"/>
-              </a:lnSpc>
-              <a:buNone/>
-              <a:defRPr sz="2400" b="0">
-                <a:solidFill>
-                  <a:srgbClr val="1F4D78"/>
-                </a:solidFill>
-                <a:latin typeface="微软雅黑"/>
-                <a:ea typeface="微软雅黑"/>
-                <a:cs typeface="微软雅黑"/>
-              </a:defRPr>
-            </a:pPr>
-            <a:r>
-              <a:rPr sz="2400" b="0">
-                <a:solidFill>
-                  <a:srgbClr val="1F4D78"/>
-                </a:solidFill>
-                <a:latin typeface="微软雅黑"/>
-                <a:ea typeface="微软雅黑"/>
-                <a:cs typeface="微软雅黑"/>
-              </a:rPr>
-              <a:t>→</a:t>
-            </a:r>
-          </a:p>
-        </p:txBody>
-      </p:sp>
-      <p:sp>
-        <p:nvSpPr>
-          <p:cNvPr id="13" name="chain-line-1">
-            <a:extLst xmlns:a="http://schemas.openxmlformats.org/drawingml/2006/main">
-              <a:ext uri="{FF2B5EF4-FFF2-40B4-BE49-F238E27FC236}">
-                <a16:creationId xmlns:a16="http://schemas.microsoft.com/office/drawing/2014/main" id="{C9A9A366-C848-4339-8BAD-BBF16CAE519D}"/>
-              </a:ext>
-            </a:extLst>
-          </p:cNvPr>
-          <p:cNvSpPr>
-            <a:spLocks xmlns:a="http://schemas.openxmlformats.org/drawingml/2006/main" noGrp="1"/>
-          </p:cNvSpPr>
-          <p:nvPr/>
-        </p:nvSpPr>
-        <p:spPr>
-          <a:xfrm xmlns:a="http://schemas.openxmlformats.org/drawingml/2006/main">
-            <a:off x="3524250" y="3105150"/>
-            <a:ext cx="2095500" cy="14288"/>
-          </a:xfrm>
-          <a:prstGeom xmlns:a="http://schemas.openxmlformats.org/drawingml/2006/main" prst="rect">
-            <a:avLst/>
-          </a:prstGeom>
-          <a:solidFill xmlns:a="http://schemas.openxmlformats.org/drawingml/2006/main">
-            <a:srgbClr val="1F4D78"/>
-          </a:solidFill>
-          <a:ln xmlns:a="http://schemas.openxmlformats.org/drawingml/2006/main" w="0">
-            <a:noFill/>
-          </a:ln>
-        </p:spPr>
-      </p:sp>
-      <p:sp>
-        <p:nvSpPr>
-          <p:cNvPr id="14" name="chain-1">
-            <a:extLst xmlns:a="http://schemas.openxmlformats.org/drawingml/2006/main">
-              <a:ext uri="{FF2B5EF4-FFF2-40B4-BE49-F238E27FC236}">
-                <a16:creationId xmlns:a16="http://schemas.microsoft.com/office/drawing/2014/main" id="{1B3726FF-E838-4B1C-BBD5-D8EB071FAB3C}"/>
-              </a:ext>
-            </a:extLst>
-          </p:cNvPr>
-          <p:cNvSpPr>
-            <a:spLocks xmlns:a="http://schemas.openxmlformats.org/drawingml/2006/main" noGrp="1"/>
-          </p:cNvSpPr>
-          <p:nvPr/>
-        </p:nvSpPr>
-        <p:spPr>
-          <a:xfrm xmlns:a="http://schemas.openxmlformats.org/drawingml/2006/main">
-            <a:off x="3524250" y="2381250"/>
-            <a:ext cx="2095500" cy="666750"/>
-          </a:xfrm>
-          <a:prstGeom xmlns:a="http://schemas.openxmlformats.org/drawingml/2006/main" prst="rect">
-            <a:avLst/>
-          </a:prstGeom>
-          <a:noFill xmlns:a="http://schemas.openxmlformats.org/drawingml/2006/main"/>
-          <a:ln xmlns:a="http://schemas.openxmlformats.org/drawingml/2006/main" w="0">
-            <a:noFill/>
-          </a:ln>
-        </p:spPr>
-        <p:txBody>
-          <a:bodyPr xmlns:a="http://schemas.openxmlformats.org/drawingml/2006/main" lIns="0" tIns="0" rIns="0" bIns="0" anchor="ctr"/>
-          <a:lstStyle xmlns:a="http://schemas.openxmlformats.org/drawingml/2006/main"/>
-          <a:p xmlns:a="http://schemas.openxmlformats.org/drawingml/2006/main">
-            <a:pPr algn="ctr">
-              <a:lnSpc>
-                <a:spcPct val="118000"/>
-              </a:lnSpc>
-              <a:buNone/>
-              <a:defRPr sz="2200" b="0">
-                <a:solidFill>
-                  <a:srgbClr val="1F4D78"/>
-                </a:solidFill>
-                <a:latin typeface="微软雅黑"/>
-                <a:ea typeface="微软雅黑"/>
-                <a:cs typeface="微软雅黑"/>
-              </a:defRPr>
-            </a:pPr>
-            <a:r>
-              <a:rPr sz="2200" b="0">
-                <a:solidFill>
-                  <a:srgbClr val="1F4D78"/>
-                </a:solidFill>
-                <a:latin typeface="微软雅黑"/>
-                <a:ea typeface="微软雅黑"/>
-                <a:cs typeface="微软雅黑"/>
-              </a:rPr>
-              <a:t>L11</a:t>
-            </a:r>
-          </a:p>
-          <a:p xmlns:a="http://schemas.openxmlformats.org/drawingml/2006/main">
-            <a:pPr algn="ctr">
-              <a:lnSpc>
-                <a:spcPct val="118000"/>
-              </a:lnSpc>
-              <a:buNone/>
-              <a:defRPr sz="2200" b="0">
-                <a:solidFill>
-                  <a:srgbClr val="1F4D78"/>
-                </a:solidFill>
-                <a:latin typeface="微软雅黑"/>
-                <a:ea typeface="微软雅黑"/>
-                <a:cs typeface="微软雅黑"/>
-              </a:defRPr>
-            </a:pPr>
-            <a:r>
-              <a:rPr sz="2200" b="0">
-                <a:solidFill>
-                  <a:srgbClr val="1F4D78"/>
-                </a:solidFill>
-                <a:latin typeface="微软雅黑"/>
-                <a:ea typeface="微软雅黑"/>
-                <a:cs typeface="微软雅黑"/>
-              </a:rPr>
-              <a:t>冻结循环</a:t>
-            </a:r>
-          </a:p>
-        </p:txBody>
-      </p:sp>
-      <p:sp>
-        <p:nvSpPr>
-          <p:cNvPr id="15" name="chain-arrow-1">
-            <a:extLst xmlns:a="http://schemas.openxmlformats.org/drawingml/2006/main">
-              <a:ext uri="{FF2B5EF4-FFF2-40B4-BE49-F238E27FC236}">
-                <a16:creationId xmlns:a16="http://schemas.microsoft.com/office/drawing/2014/main" id="{2AA0FD19-A84C-4FA0-AC78-B0AD0F54FC80}"/>
-              </a:ext>
-            </a:extLst>
-          </p:cNvPr>
-          <p:cNvSpPr>
-            <a:spLocks xmlns:a="http://schemas.openxmlformats.org/drawingml/2006/main" noGrp="1"/>
-          </p:cNvSpPr>
-          <p:nvPr/>
-        </p:nvSpPr>
-        <p:spPr>
-          <a:xfrm xmlns:a="http://schemas.openxmlformats.org/drawingml/2006/main">
-            <a:off x="5619750" y="2552700"/>
-            <a:ext cx="762000" cy="323850"/>
-          </a:xfrm>
-          <a:prstGeom xmlns:a="http://schemas.openxmlformats.org/drawingml/2006/main" prst="rect">
-            <a:avLst/>
-          </a:prstGeom>
-          <a:noFill xmlns:a="http://schemas.openxmlformats.org/drawingml/2006/main"/>
-          <a:ln xmlns:a="http://schemas.openxmlformats.org/drawingml/2006/main" w="0">
-            <a:noFill/>
-          </a:ln>
-        </p:spPr>
-        <p:txBody>
-          <a:bodyPr xmlns:a="http://schemas.openxmlformats.org/drawingml/2006/main" lIns="0" tIns="0" rIns="0" bIns="0" anchor="ctr"/>
-          <a:lstStyle xmlns:a="http://schemas.openxmlformats.org/drawingml/2006/main"/>
-          <a:p xmlns:a="http://schemas.openxmlformats.org/drawingml/2006/main">
-            <a:pPr algn="ctr">
-              <a:lnSpc>
-                <a:spcPct val="118000"/>
-              </a:lnSpc>
-              <a:buNone/>
-              <a:defRPr sz="2400" b="0">
-                <a:solidFill>
-                  <a:srgbClr val="1F4D78"/>
-                </a:solidFill>
-                <a:latin typeface="微软雅黑"/>
-                <a:ea typeface="微软雅黑"/>
-                <a:cs typeface="微软雅黑"/>
-              </a:defRPr>
-            </a:pPr>
-            <a:r>
-              <a:rPr sz="2400" b="0">
-                <a:solidFill>
-                  <a:srgbClr val="1F4D78"/>
-                </a:solidFill>
-                <a:latin typeface="微软雅黑"/>
-                <a:ea typeface="微软雅黑"/>
-                <a:cs typeface="微软雅黑"/>
-              </a:rPr>
-              <a:t>→</a:t>
-            </a:r>
-          </a:p>
-        </p:txBody>
-      </p:sp>
-      <p:sp>
-        <p:nvSpPr>
-          <p:cNvPr id="16" name="chain-line-2">
-            <a:extLst xmlns:a="http://schemas.openxmlformats.org/drawingml/2006/main">
-              <a:ext uri="{FF2B5EF4-FFF2-40B4-BE49-F238E27FC236}">
-                <a16:creationId xmlns:a16="http://schemas.microsoft.com/office/drawing/2014/main" id="{314B92B6-864E-4E59-BE73-8FD405D28588}"/>
-              </a:ext>
-            </a:extLst>
-          </p:cNvPr>
-          <p:cNvSpPr>
-            <a:spLocks xmlns:a="http://schemas.openxmlformats.org/drawingml/2006/main" noGrp="1"/>
-          </p:cNvSpPr>
-          <p:nvPr/>
-        </p:nvSpPr>
-        <p:spPr>
-          <a:xfrm xmlns:a="http://schemas.openxmlformats.org/drawingml/2006/main">
-            <a:off x="6381750" y="3105150"/>
-            <a:ext cx="2095500" cy="14288"/>
-          </a:xfrm>
-          <a:prstGeom xmlns:a="http://schemas.openxmlformats.org/drawingml/2006/main" prst="rect">
-            <a:avLst/>
-          </a:prstGeom>
-          <a:solidFill xmlns:a="http://schemas.openxmlformats.org/drawingml/2006/main">
-            <a:srgbClr val="1F4D78"/>
-          </a:solidFill>
-          <a:ln xmlns:a="http://schemas.openxmlformats.org/drawingml/2006/main" w="0">
-            <a:noFill/>
-          </a:ln>
-        </p:spPr>
-      </p:sp>
-      <p:sp>
-        <p:nvSpPr>
-          <p:cNvPr id="17" name="chain-2">
-            <a:extLst xmlns:a="http://schemas.openxmlformats.org/drawingml/2006/main">
-              <a:ext uri="{FF2B5EF4-FFF2-40B4-BE49-F238E27FC236}">
-                <a16:creationId xmlns:a16="http://schemas.microsoft.com/office/drawing/2014/main" id="{EA5F6CB8-E021-4610-AEEF-6F4B5819E1E6}"/>
-              </a:ext>
-            </a:extLst>
-          </p:cNvPr>
-          <p:cNvSpPr>
-            <a:spLocks xmlns:a="http://schemas.openxmlformats.org/drawingml/2006/main" noGrp="1"/>
-          </p:cNvSpPr>
-          <p:nvPr/>
-        </p:nvSpPr>
-        <p:spPr>
-          <a:xfrm xmlns:a="http://schemas.openxmlformats.org/drawingml/2006/main">
-            <a:off x="6381750" y="2381250"/>
-            <a:ext cx="2095500" cy="666750"/>
-          </a:xfrm>
-          <a:prstGeom xmlns:a="http://schemas.openxmlformats.org/drawingml/2006/main" prst="rect">
-            <a:avLst/>
-          </a:prstGeom>
-          <a:noFill xmlns:a="http://schemas.openxmlformats.org/drawingml/2006/main"/>
-          <a:ln xmlns:a="http://schemas.openxmlformats.org/drawingml/2006/main" w="0">
-            <a:noFill/>
-          </a:ln>
-        </p:spPr>
-        <p:txBody>
-          <a:bodyPr xmlns:a="http://schemas.openxmlformats.org/drawingml/2006/main" lIns="0" tIns="0" rIns="0" bIns="0" anchor="ctr"/>
-          <a:lstStyle xmlns:a="http://schemas.openxmlformats.org/drawingml/2006/main"/>
-          <a:p xmlns:a="http://schemas.openxmlformats.org/drawingml/2006/main">
-            <a:pPr algn="ctr">
-              <a:lnSpc>
-                <a:spcPct val="118000"/>
-              </a:lnSpc>
-              <a:buNone/>
-              <a:defRPr sz="2200" b="0">
-                <a:solidFill>
-                  <a:srgbClr val="1F4D78"/>
-                </a:solidFill>
-                <a:latin typeface="微软雅黑"/>
-                <a:ea typeface="微软雅黑"/>
-                <a:cs typeface="微软雅黑"/>
-              </a:defRPr>
-            </a:pPr>
-            <a:r>
-              <a:rPr sz="2200" b="0">
-                <a:solidFill>
-                  <a:srgbClr val="1F4D78"/>
-                </a:solidFill>
-                <a:latin typeface="微软雅黑"/>
-                <a:ea typeface="微软雅黑"/>
-                <a:cs typeface="微软雅黑"/>
-              </a:rPr>
-              <a:t>L12</a:t>
-            </a:r>
-          </a:p>
-          <a:p xmlns:a="http://schemas.openxmlformats.org/drawingml/2006/main">
-            <a:pPr algn="ctr">
-              <a:lnSpc>
-                <a:spcPct val="118000"/>
-              </a:lnSpc>
-              <a:buNone/>
-              <a:defRPr sz="2200" b="0">
-                <a:solidFill>
-                  <a:srgbClr val="1F4D78"/>
-                </a:solidFill>
-                <a:latin typeface="微软雅黑"/>
-                <a:ea typeface="微软雅黑"/>
-                <a:cs typeface="微软雅黑"/>
-              </a:defRPr>
-            </a:pPr>
-            <a:r>
-              <a:rPr sz="2200" b="0">
-                <a:solidFill>
-                  <a:srgbClr val="1F4D78"/>
-                </a:solidFill>
-                <a:latin typeface="微软雅黑"/>
-                <a:ea typeface="微软雅黑"/>
-                <a:cs typeface="微软雅黑"/>
-              </a:rPr>
-              <a:t>最小工作流</a:t>
-            </a:r>
-          </a:p>
-        </p:txBody>
-      </p:sp>
-      <p:sp>
-        <p:nvSpPr>
-          <p:cNvPr id="18" name="chain-arrow-2">
-            <a:extLst xmlns:a="http://schemas.openxmlformats.org/drawingml/2006/main">
-              <a:ext uri="{FF2B5EF4-FFF2-40B4-BE49-F238E27FC236}">
-                <a16:creationId xmlns:a16="http://schemas.microsoft.com/office/drawing/2014/main" id="{0AC20634-5755-445B-9BCE-DE34308749F7}"/>
-              </a:ext>
-            </a:extLst>
-          </p:cNvPr>
-          <p:cNvSpPr>
-            <a:spLocks xmlns:a="http://schemas.openxmlformats.org/drawingml/2006/main" noGrp="1"/>
-          </p:cNvSpPr>
-          <p:nvPr/>
-        </p:nvSpPr>
-        <p:spPr>
-          <a:xfrm xmlns:a="http://schemas.openxmlformats.org/drawingml/2006/main">
-            <a:off x="8477250" y="2552700"/>
-            <a:ext cx="762000" cy="323850"/>
-          </a:xfrm>
-          <a:prstGeom xmlns:a="http://schemas.openxmlformats.org/drawingml/2006/main" prst="rect">
-            <a:avLst/>
-          </a:prstGeom>
-          <a:noFill xmlns:a="http://schemas.openxmlformats.org/drawingml/2006/main"/>
-          <a:ln xmlns:a="http://schemas.openxmlformats.org/drawingml/2006/main" w="0">
-            <a:noFill/>
-          </a:ln>
-        </p:spPr>
-        <p:txBody>
-          <a:bodyPr xmlns:a="http://schemas.openxmlformats.org/drawingml/2006/main" lIns="0" tIns="0" rIns="0" bIns="0" anchor="ctr"/>
-          <a:lstStyle xmlns:a="http://schemas.openxmlformats.org/drawingml/2006/main"/>
-          <a:p xmlns:a="http://schemas.openxmlformats.org/drawingml/2006/main">
-            <a:pPr algn="ctr">
-              <a:lnSpc>
-                <a:spcPct val="118000"/>
-              </a:lnSpc>
-              <a:buNone/>
-              <a:defRPr sz="2400" b="0">
-                <a:solidFill>
-                  <a:srgbClr val="1F4D78"/>
-                </a:solidFill>
-                <a:latin typeface="微软雅黑"/>
-                <a:ea typeface="微软雅黑"/>
-                <a:cs typeface="微软雅黑"/>
-              </a:defRPr>
-            </a:pPr>
-            <a:r>
-              <a:rPr sz="2400" b="0">
-                <a:solidFill>
-                  <a:srgbClr val="1F4D78"/>
-                </a:solidFill>
-                <a:latin typeface="微软雅黑"/>
-                <a:ea typeface="微软雅黑"/>
-                <a:cs typeface="微软雅黑"/>
-              </a:rPr>
-              <a:t>→</a:t>
-            </a:r>
-          </a:p>
-        </p:txBody>
-      </p:sp>
-      <p:sp>
-        <p:nvSpPr>
-          <p:cNvPr id="19" name="chain-sub-2">
-            <a:extLst xmlns:a="http://schemas.openxmlformats.org/drawingml/2006/main">
-              <a:ext uri="{FF2B5EF4-FFF2-40B4-BE49-F238E27FC236}">
-                <a16:creationId xmlns:a16="http://schemas.microsoft.com/office/drawing/2014/main" id="{5ED94A4F-8705-4B4F-A31B-0777247980F9}"/>
-              </a:ext>
-            </a:extLst>
-          </p:cNvPr>
-          <p:cNvSpPr>
-            <a:spLocks xmlns:a="http://schemas.openxmlformats.org/drawingml/2006/main" noGrp="1"/>
-          </p:cNvSpPr>
-          <p:nvPr/>
-        </p:nvSpPr>
-        <p:spPr>
-          <a:xfrm xmlns:a="http://schemas.openxmlformats.org/drawingml/2006/main">
-            <a:off x="6381750" y="3257550"/>
-            <a:ext cx="2095500" cy="571500"/>
-          </a:xfrm>
-          <a:prstGeom xmlns:a="http://schemas.openxmlformats.org/drawingml/2006/main" prst="rect">
-            <a:avLst/>
-          </a:prstGeom>
-          <a:noFill xmlns:a="http://schemas.openxmlformats.org/drawingml/2006/main"/>
-          <a:ln xmlns:a="http://schemas.openxmlformats.org/drawingml/2006/main" w="0">
-            <a:noFill/>
-          </a:ln>
-        </p:spPr>
-        <p:txBody>
-          <a:bodyPr xmlns:a="http://schemas.openxmlformats.org/drawingml/2006/main" lIns="0" tIns="0" rIns="0" bIns="0" anchor="t"/>
-          <a:lstStyle xmlns:a="http://schemas.openxmlformats.org/drawingml/2006/main"/>
-          <a:p xmlns:a="http://schemas.openxmlformats.org/drawingml/2006/main">
-            <a:pPr algn="ctr">
-              <a:lnSpc>
-                <a:spcPct val="118000"/>
-              </a:lnSpc>
-              <a:buNone/>
-              <a:defRPr sz="2000" b="0">
-                <a:solidFill>
-                  <a:srgbClr val="66727D"/>
-                </a:solidFill>
-                <a:latin typeface="微软雅黑"/>
-                <a:ea typeface="微软雅黑"/>
-                <a:cs typeface="微软雅黑"/>
-              </a:defRPr>
-            </a:pPr>
-            <a:r>
-              <a:rPr sz="2000" b="0">
-                <a:solidFill>
-                  <a:srgbClr val="66727D"/>
-                </a:solidFill>
-                <a:latin typeface="微软雅黑"/>
-                <a:ea typeface="微软雅黑"/>
-                <a:cs typeface="微软雅黑"/>
-              </a:rPr>
-              <a:t>当前位置 / 输出</a:t>
-            </a:r>
-          </a:p>
-        </p:txBody>
-      </p:sp>
-      <p:sp>
-        <p:nvSpPr>
-          <p:cNvPr id="20" name="chain-line-3">
-            <a:extLst xmlns:a="http://schemas.openxmlformats.org/drawingml/2006/main">
-              <a:ext uri="{FF2B5EF4-FFF2-40B4-BE49-F238E27FC236}">
-                <a16:creationId xmlns:a16="http://schemas.microsoft.com/office/drawing/2014/main" id="{F6FC4554-066F-4963-A90E-3CA0C525C319}"/>
-              </a:ext>
-            </a:extLst>
-          </p:cNvPr>
-          <p:cNvSpPr>
-            <a:spLocks xmlns:a="http://schemas.openxmlformats.org/drawingml/2006/main" noGrp="1"/>
-          </p:cNvSpPr>
-          <p:nvPr/>
-        </p:nvSpPr>
-        <p:spPr>
-          <a:xfrm xmlns:a="http://schemas.openxmlformats.org/drawingml/2006/main">
-            <a:off x="9239250" y="3105150"/>
-            <a:ext cx="2095500" cy="14288"/>
-          </a:xfrm>
-          <a:prstGeom xmlns:a="http://schemas.openxmlformats.org/drawingml/2006/main" prst="rect">
-            <a:avLst/>
-          </a:prstGeom>
-          <a:solidFill xmlns:a="http://schemas.openxmlformats.org/drawingml/2006/main">
-            <a:srgbClr val="1F4D78"/>
-          </a:solidFill>
-          <a:ln xmlns:a="http://schemas.openxmlformats.org/drawingml/2006/main" w="0">
-            <a:noFill/>
-          </a:ln>
-        </p:spPr>
-      </p:sp>
-      <p:sp>
-        <p:nvSpPr>
-          <p:cNvPr id="21" name="chain-3">
-            <a:extLst xmlns:a="http://schemas.openxmlformats.org/drawingml/2006/main">
-              <a:ext uri="{FF2B5EF4-FFF2-40B4-BE49-F238E27FC236}">
-                <a16:creationId xmlns:a16="http://schemas.microsoft.com/office/drawing/2014/main" id="{E9A49E85-4ECD-4599-877F-E14D784170C6}"/>
-              </a:ext>
-            </a:extLst>
-          </p:cNvPr>
-          <p:cNvSpPr>
-            <a:spLocks xmlns:a="http://schemas.openxmlformats.org/drawingml/2006/main" noGrp="1"/>
-          </p:cNvSpPr>
-          <p:nvPr/>
-        </p:nvSpPr>
-        <p:spPr>
-          <a:xfrm xmlns:a="http://schemas.openxmlformats.org/drawingml/2006/main">
-            <a:off x="9239250" y="2381250"/>
-            <a:ext cx="2095500" cy="666750"/>
-          </a:xfrm>
-          <a:prstGeom xmlns:a="http://schemas.openxmlformats.org/drawingml/2006/main" prst="rect">
-            <a:avLst/>
-          </a:prstGeom>
-          <a:noFill xmlns:a="http://schemas.openxmlformats.org/drawingml/2006/main"/>
-          <a:ln xmlns:a="http://schemas.openxmlformats.org/drawingml/2006/main" w="0">
-            <a:noFill/>
-          </a:ln>
-        </p:spPr>
-        <p:txBody>
-          <a:bodyPr xmlns:a="http://schemas.openxmlformats.org/drawingml/2006/main" lIns="0" tIns="0" rIns="0" bIns="0" anchor="ctr"/>
-          <a:lstStyle xmlns:a="http://schemas.openxmlformats.org/drawingml/2006/main"/>
-          <a:p xmlns:a="http://schemas.openxmlformats.org/drawingml/2006/main">
-            <a:pPr algn="ctr">
-              <a:lnSpc>
-                <a:spcPct val="118000"/>
-              </a:lnSpc>
-              <a:buNone/>
-              <a:defRPr sz="2200" b="0">
-                <a:solidFill>
-                  <a:srgbClr val="1F4D78"/>
-                </a:solidFill>
-                <a:latin typeface="微软雅黑"/>
-                <a:ea typeface="微软雅黑"/>
-                <a:cs typeface="微软雅黑"/>
-              </a:defRPr>
-            </a:pPr>
-            <a:r>
-              <a:rPr sz="2200" b="0">
-                <a:solidFill>
-                  <a:srgbClr val="1F4D78"/>
-                </a:solidFill>
-                <a:latin typeface="微软雅黑"/>
-                <a:ea typeface="微软雅黑"/>
-                <a:cs typeface="微软雅黑"/>
-              </a:rPr>
-              <a:t>L13</a:t>
-            </a:r>
-          </a:p>
-          <a:p xmlns:a="http://schemas.openxmlformats.org/drawingml/2006/main">
-            <a:pPr algn="ctr">
-              <a:lnSpc>
-                <a:spcPct val="118000"/>
-              </a:lnSpc>
-              <a:buNone/>
-              <a:defRPr sz="2200" b="0">
-                <a:solidFill>
-                  <a:srgbClr val="1F4D78"/>
-                </a:solidFill>
-                <a:latin typeface="微软雅黑"/>
-                <a:ea typeface="微软雅黑"/>
-                <a:cs typeface="微软雅黑"/>
-              </a:defRPr>
-            </a:pPr>
-            <a:r>
-              <a:rPr sz="2200" b="0">
-                <a:solidFill>
-                  <a:srgbClr val="1F4D78"/>
-                </a:solidFill>
-                <a:latin typeface="微软雅黑"/>
-                <a:ea typeface="微软雅黑"/>
-                <a:cs typeface="微软雅黑"/>
-              </a:rPr>
-              <a:t>评价</a:t>
-            </a:r>
-          </a:p>
-        </p:txBody>
-      </p:sp>
-      <p:sp>
-        <p:nvSpPr>
-          <p:cNvPr id="22" name="bring">
-            <a:extLst xmlns:a="http://schemas.openxmlformats.org/drawingml/2006/main">
-              <a:ext uri="{FF2B5EF4-FFF2-40B4-BE49-F238E27FC236}">
-                <a16:creationId xmlns:a16="http://schemas.microsoft.com/office/drawing/2014/main" id="{3CCD444F-BE0D-43FF-9356-2BDBFD5E48F6}"/>
-              </a:ext>
-            </a:extLst>
-          </p:cNvPr>
-          <p:cNvSpPr>
-            <a:spLocks xmlns:a="http://schemas.openxmlformats.org/drawingml/2006/main" noGrp="1"/>
-          </p:cNvSpPr>
-          <p:nvPr/>
-        </p:nvSpPr>
-        <p:spPr>
-          <a:xfrm xmlns:a="http://schemas.openxmlformats.org/drawingml/2006/main">
-            <a:off x="1809750" y="4476750"/>
-            <a:ext cx="8572500" cy="619125"/>
-          </a:xfrm>
-          <a:prstGeom xmlns:a="http://schemas.openxmlformats.org/drawingml/2006/main" prst="rect">
-            <a:avLst/>
-          </a:prstGeom>
-          <a:noFill xmlns:a="http://schemas.openxmlformats.org/drawingml/2006/main"/>
-          <a:ln xmlns:a="http://schemas.openxmlformats.org/drawingml/2006/main" w="0">
-            <a:noFill/>
-          </a:ln>
-        </p:spPr>
-        <p:txBody>
-          <a:bodyPr xmlns:a="http://schemas.openxmlformats.org/drawingml/2006/main" lIns="0" tIns="0" rIns="0" bIns="0" anchor="t"/>
-          <a:lstStyle xmlns:a="http://schemas.openxmlformats.org/drawingml/2006/main"/>
-          <a:p xmlns:a="http://schemas.openxmlformats.org/drawingml/2006/main">
-            <a:pPr algn="ctr">
-              <a:lnSpc>
-                <a:spcPct val="118000"/>
-              </a:lnSpc>
-              <a:buNone/>
-              <a:defRPr sz="2400" b="0">
-                <a:solidFill>
-                  <a:srgbClr val="1F4D78"/>
-                </a:solidFill>
-                <a:latin typeface="微软雅黑"/>
-                <a:ea typeface="微软雅黑"/>
-                <a:cs typeface="微软雅黑"/>
-              </a:defRPr>
-            </a:pPr>
-            <a:r>
-              <a:rPr sz="2400" b="0">
-                <a:solidFill>
-                  <a:srgbClr val="1F4D78"/>
-                </a:solidFill>
-                <a:latin typeface="微软雅黑"/>
-                <a:ea typeface="微软雅黑"/>
-                <a:cs typeface="微软雅黑"/>
-              </a:rPr>
-              <a:t>课前带来：结果对照｜失败 trace｜人工审核记录</a:t>
             </a:r>
           </a:p>
         </p:txBody>
